--- a/output/techforward_live/techforward_live_enhanced_brand_book.pptx
+++ b/output/techforward_live/techforward_live_enhanced_brand_book.pptx
@@ -3095,74 +3095,31 @@
 <file path=ppt/slides/slide1.xml><?xml version="1.0" encoding="utf-8"?>
 <p:sld xmlns:a="http://schemas.openxmlformats.org/drawingml/2006/main" xmlns:p="http://schemas.openxmlformats.org/presentationml/2006/main" xmlns:r="http://schemas.openxmlformats.org/officeDocument/2006/relationships">
   <p:cSld>
+    <p:bg>
+      <p:bgPr>
+        <a:solidFill>
+          <a:srgbClr val="000000"/>
+        </a:solidFill>
+        <a:effectLst/>
+      </p:bgPr>
+    </p:bg>
     <p:spTree>
       <p:nvGrpSpPr>
         <p:cNvPr id="1" name=""/>
         <p:cNvGrpSpPr/>
         <p:nvPr/>
       </p:nvGrpSpPr>
-      <p:sp>
-        <p:nvSpPr>
-          <p:cNvPr id="2" name="Rectangle 1"/>
-          <p:cNvSpPr/>
-          <p:nvPr/>
-        </p:nvSpPr>
-        <p:spPr>
-          <a:xfrm>
-            <a:off x="0" y="0"/>
-            <a:ext cx="9144000" cy="6858000"/>
-          </a:xfrm>
-          <a:prstGeom prst="rect">
-            <a:avLst/>
-          </a:prstGeom>
-          <a:gradFill rotWithShape="1">
-            <a:gsLst>
-              <a:gs pos="0">
-                <a:srgbClr val="2E86AB"/>
-              </a:gs>
-              <a:gs pos="100000">
-                <a:srgbClr val="A23B72"/>
-              </a:gs>
-            </a:gsLst>
-            <a:lin scaled="0" ang="13500000"/>
-          </a:gradFill>
-          <a:ln>
-            <a:noFill/>
-          </a:ln>
-        </p:spPr>
-        <p:style>
-          <a:lnRef idx="1">
-            <a:schemeClr val="accent1"/>
-          </a:lnRef>
-          <a:fillRef idx="3">
-            <a:schemeClr val="accent1"/>
-          </a:fillRef>
-          <a:effectRef idx="2">
-            <a:schemeClr val="accent1"/>
-          </a:effectRef>
-          <a:fontRef idx="minor">
-            <a:schemeClr val="lt1"/>
-          </a:fontRef>
-        </p:style>
-        <p:txBody>
-          <a:bodyPr rtlCol="0" anchor="ctr"/>
-          <a:lstStyle/>
-          <a:p>
-            <a:pPr algn="ctr"/>
-          </a:p>
-        </p:txBody>
-      </p:sp>
       <p:grpSpPr/>
       <p:sp>
         <p:nvSpPr>
-          <p:cNvPr id="3" name="TextBox 2"/>
+          <p:cNvPr id="2" name="TextBox 1"/>
           <p:cNvSpPr txBox="1"/>
           <p:nvPr/>
         </p:nvSpPr>
         <p:spPr>
           <a:xfrm>
-            <a:off x="1828800" y="2686050"/>
-            <a:ext cx="5486400" cy="1485900"/>
+            <a:off x="1143000" y="4171950"/>
+            <a:ext cx="2743200" cy="742950"/>
           </a:xfrm>
           <a:prstGeom prst="rect">
             <a:avLst/>
@@ -3176,9 +3133,9 @@
           <a:lstStyle/>
           <a:p>
             <a:pPr algn="ctr">
-              <a:defRPr sz="4800" b="1">
-                <a:solidFill>
-                  <a:srgbClr val="2E86AB"/>
+              <a:defRPr sz="3600" b="1">
+                <a:solidFill>
+                  <a:srgbClr val="FFFFFF"/>
                 </a:solidFill>
                 <a:latin typeface="Inter"/>
               </a:defRPr>
@@ -3189,6 +3146,41 @@
           </a:p>
         </p:txBody>
       </p:sp>
+      <p:cxnSp>
+        <p:nvCxnSpPr>
+          <p:cNvPr id="3" name="Connector 2"/>
+          <p:cNvCxnSpPr/>
+          <p:nvPr/>
+        </p:nvCxnSpPr>
+        <p:spPr>
+          <a:xfrm>
+            <a:off x="6629400.0" y="5657850.0"/>
+            <a:ext cx="2057400.0" cy="0.0"/>
+          </a:xfrm>
+          <a:prstGeom prst="line">
+            <a:avLst/>
+          </a:prstGeom>
+          <a:ln>
+            <a:solidFill>
+              <a:srgbClr val="2E86AB"/>
+            </a:solidFill>
+          </a:ln>
+        </p:spPr>
+        <p:style>
+          <a:lnRef idx="2">
+            <a:schemeClr val="accent1"/>
+          </a:lnRef>
+          <a:fillRef idx="0">
+            <a:schemeClr val="accent1"/>
+          </a:fillRef>
+          <a:effectRef idx="1">
+            <a:schemeClr val="accent1"/>
+          </a:effectRef>
+          <a:fontRef idx="minor">
+            <a:schemeClr val="tx1"/>
+          </a:fontRef>
+        </p:style>
+      </p:cxnSp>
       <p:sp>
         <p:nvSpPr>
           <p:cNvPr id="4" name="TextBox 3"/>
@@ -3197,8 +3189,8 @@
         </p:nvSpPr>
         <p:spPr>
           <a:xfrm>
-            <a:off x="2514600" y="4171950"/>
-            <a:ext cx="4114800" cy="742950"/>
+            <a:off x="6629400" y="5657850"/>
+            <a:ext cx="2057400" cy="1485900"/>
           </a:xfrm>
           <a:prstGeom prst="rect">
             <a:avLst/>
@@ -3206,136 +3198,21 @@
           <a:noFill/>
         </p:spPr>
         <p:txBody>
-          <a:bodyPr wrap="none">
+          <a:bodyPr wrap="none" anchor="ctr">
             <a:spAutoFit/>
           </a:bodyPr>
           <a:lstStyle/>
           <a:p>
             <a:pPr algn="ctr">
-              <a:defRPr sz="2400" b="0">
-                <a:solidFill>
-                  <a:srgbClr val="2E86AB"/>
-                </a:solidFill>
-                <a:latin typeface="Source Sans Pro"/>
-              </a:defRPr>
-            </a:pPr>
-            <a:r>
-              <a:t>Brand Book</a:t>
-            </a:r>
-          </a:p>
-        </p:txBody>
-      </p:sp>
-      <p:sp>
-        <p:nvSpPr>
-          <p:cNvPr id="5" name="Oval 4"/>
-          <p:cNvSpPr/>
-          <p:nvPr/>
-        </p:nvSpPr>
-        <p:spPr>
-          <a:xfrm>
-            <a:off x="6629400" y="1200150"/>
-            <a:ext cx="1371600" cy="1485900"/>
-          </a:xfrm>
-          <a:prstGeom prst="ellipse">
-            <a:avLst/>
-          </a:prstGeom>
-          <a:solidFill>
-            <a:srgbClr val="F18F01"/>
-          </a:solidFill>
-          <a:ln>
-            <a:noFill/>
-          </a:ln>
-        </p:spPr>
-        <p:style>
-          <a:lnRef idx="1">
-            <a:schemeClr val="accent1"/>
-          </a:lnRef>
-          <a:fillRef idx="3">
-            <a:schemeClr val="accent1"/>
-          </a:fillRef>
-          <a:effectRef idx="2">
-            <a:schemeClr val="accent1"/>
-          </a:effectRef>
-          <a:fontRef idx="minor">
-            <a:schemeClr val="lt1"/>
-          </a:fontRef>
-        </p:style>
-        <p:txBody>
-          <a:bodyPr rtlCol="0" anchor="ctr"/>
-          <a:lstStyle/>
-          <a:p>
-            <a:pPr algn="ctr"/>
-          </a:p>
-        </p:txBody>
-      </p:sp>
-      <p:sp>
-        <p:nvSpPr>
-          <p:cNvPr id="6" name="TextBox 5"/>
-          <p:cNvSpPr txBox="1"/>
-          <p:nvPr/>
-        </p:nvSpPr>
-        <p:spPr>
-          <a:xfrm>
-            <a:off x="457200" y="5657850"/>
-            <a:ext cx="4114800" cy="742950"/>
-          </a:xfrm>
-          <a:prstGeom prst="rect">
-            <a:avLst/>
-          </a:prstGeom>
-          <a:noFill/>
-        </p:spPr>
-        <p:txBody>
-          <a:bodyPr wrap="none">
-            <a:spAutoFit/>
-          </a:bodyPr>
-          <a:lstStyle/>
-          <a:p>
-            <a:pPr algn="l">
-              <a:defRPr sz="1000" b="0">
-                <a:solidFill>
-                  <a:srgbClr val="2E86AB"/>
-                </a:solidFill>
-                <a:latin typeface="Source Sans Pro"/>
-              </a:defRPr>
-            </a:pPr>
-            <a:r>
-              <a:t>TechForward Live</a:t>
-            </a:r>
-          </a:p>
-        </p:txBody>
-      </p:sp>
-      <p:sp>
-        <p:nvSpPr>
-          <p:cNvPr id="7" name="TextBox 6"/>
-          <p:cNvSpPr txBox="1"/>
-          <p:nvPr/>
-        </p:nvSpPr>
-        <p:spPr>
-          <a:xfrm>
-            <a:off x="4572000" y="5657850"/>
-            <a:ext cx="4114800" cy="742950"/>
-          </a:xfrm>
-          <a:prstGeom prst="rect">
-            <a:avLst/>
-          </a:prstGeom>
-          <a:noFill/>
-        </p:spPr>
-        <p:txBody>
-          <a:bodyPr wrap="none">
-            <a:spAutoFit/>
-          </a:bodyPr>
-          <a:lstStyle/>
-          <a:p>
-            <a:pPr algn="r">
-              <a:defRPr sz="1000" b="0">
-                <a:solidFill>
-                  <a:srgbClr val="2E86AB"/>
-                </a:solidFill>
-                <a:latin typeface="Source Sans Pro"/>
-              </a:defRPr>
-            </a:pPr>
-            <a:r>
-              <a:t>1</a:t>
+              <a:defRPr sz="1800" b="0">
+                <a:solidFill>
+                  <a:srgbClr val="FFFFFF"/>
+                </a:solidFill>
+                <a:latin typeface="Source Sans Pro"/>
+              </a:defRPr>
+            </a:pPr>
+            <a:r>
+              <a:t>Brand Identity System</a:t>
             </a:r>
           </a:p>
         </p:txBody>

--- a/output/techforward_live/techforward_live_enhanced_brand_book.pptx
+++ b/output/techforward_live/techforward_live_enhanced_brand_book.pptx
@@ -3135,7 +3135,7 @@
             <a:pPr algn="ctr">
               <a:defRPr sz="3600" b="1">
                 <a:solidFill>
-                  <a:srgbClr val="FFFFFF"/>
+                  <a:srgbClr val="2E86AB"/>
                 </a:solidFill>
                 <a:latin typeface="Inter"/>
               </a:defRPr>
@@ -3206,7 +3206,7 @@
             <a:pPr algn="ctr">
               <a:defRPr sz="1800" b="0">
                 <a:solidFill>
-                  <a:srgbClr val="FFFFFF"/>
+                  <a:srgbClr val="2E86AB"/>
                 </a:solidFill>
                 <a:latin typeface="Source Sans Pro"/>
               </a:defRPr>
@@ -4458,59 +4458,24 @@
 <file path=ppt/slides/slide2.xml><?xml version="1.0" encoding="utf-8"?>
 <p:sld xmlns:a="http://schemas.openxmlformats.org/drawingml/2006/main" xmlns:p="http://schemas.openxmlformats.org/presentationml/2006/main" xmlns:r="http://schemas.openxmlformats.org/officeDocument/2006/relationships">
   <p:cSld>
+    <p:bg>
+      <p:bgPr>
+        <a:solidFill>
+          <a:srgbClr val="000000"/>
+        </a:solidFill>
+        <a:effectLst/>
+      </p:bgPr>
+    </p:bg>
     <p:spTree>
       <p:nvGrpSpPr>
         <p:cNvPr id="1" name=""/>
         <p:cNvGrpSpPr/>
         <p:nvPr/>
       </p:nvGrpSpPr>
-      <p:sp>
-        <p:nvSpPr>
-          <p:cNvPr id="2" name="Rectangle 1"/>
-          <p:cNvSpPr/>
-          <p:nvPr/>
-        </p:nvSpPr>
-        <p:spPr>
-          <a:xfrm>
-            <a:off x="0" y="0"/>
-            <a:ext cx="9144000" cy="6858000"/>
-          </a:xfrm>
-          <a:prstGeom prst="rect">
-            <a:avLst/>
-          </a:prstGeom>
-          <a:solidFill>
-            <a:srgbClr val="1A1A1A"/>
-          </a:solidFill>
-          <a:ln>
-            <a:noFill/>
-          </a:ln>
-        </p:spPr>
-        <p:style>
-          <a:lnRef idx="1">
-            <a:schemeClr val="accent1"/>
-          </a:lnRef>
-          <a:fillRef idx="3">
-            <a:schemeClr val="accent1"/>
-          </a:fillRef>
-          <a:effectRef idx="2">
-            <a:schemeClr val="accent1"/>
-          </a:effectRef>
-          <a:fontRef idx="minor">
-            <a:schemeClr val="lt1"/>
-          </a:fontRef>
-        </p:style>
-        <p:txBody>
-          <a:bodyPr rtlCol="0" anchor="ctr"/>
-          <a:lstStyle/>
-          <a:p>
-            <a:pPr algn="ctr"/>
-          </a:p>
-        </p:txBody>
-      </p:sp>
       <p:grpSpPr/>
       <p:sp>
         <p:nvSpPr>
-          <p:cNvPr id="3" name="TextBox 2"/>
+          <p:cNvPr id="2" name="TextBox 1"/>
           <p:cNvSpPr txBox="1"/>
           <p:nvPr/>
         </p:nvSpPr>
@@ -4546,14 +4511,14 @@
       </p:sp>
       <p:sp>
         <p:nvSpPr>
-          <p:cNvPr id="4" name="TextBox 3"/>
+          <p:cNvPr id="3" name="TextBox 2"/>
           <p:cNvSpPr txBox="1"/>
           <p:nvPr/>
         </p:nvSpPr>
         <p:spPr>
           <a:xfrm>
             <a:off x="1143000" y="1943100"/>
-            <a:ext cx="3429000" cy="3714750"/>
+            <a:ext cx="2743200" cy="3714750"/>
           </a:xfrm>
           <a:prstGeom prst="rect">
             <a:avLst/>
@@ -4587,6 +4552,16 @@
                 <a:latin typeface="Source Sans Pro"/>
               </a:defRPr>
             </a:pPr>
+          </a:p>
+          <a:p>
+            <a:pPr>
+              <a:defRPr sz="1600" b="0">
+                <a:solidFill>
+                  <a:srgbClr val="2E86AB"/>
+                </a:solidFill>
+                <a:latin typeface="Source Sans Pro"/>
+              </a:defRPr>
+            </a:pPr>
             <a:r>
               <a:t>2. Market Analysis &amp; Insights</a:t>
             </a:r>
@@ -4600,6 +4575,16 @@
                 <a:latin typeface="Source Sans Pro"/>
               </a:defRPr>
             </a:pPr>
+          </a:p>
+          <a:p>
+            <a:pPr>
+              <a:defRPr sz="1600" b="0">
+                <a:solidFill>
+                  <a:srgbClr val="2E86AB"/>
+                </a:solidFill>
+                <a:latin typeface="Source Sans Pro"/>
+              </a:defRPr>
+            </a:pPr>
             <a:r>
               <a:t>3. Brand Positioning</a:t>
             </a:r>
@@ -4613,6 +4598,16 @@
                 <a:latin typeface="Source Sans Pro"/>
               </a:defRPr>
             </a:pPr>
+          </a:p>
+          <a:p>
+            <a:pPr>
+              <a:defRPr sz="1600" b="0">
+                <a:solidFill>
+                  <a:srgbClr val="2E86AB"/>
+                </a:solidFill>
+                <a:latin typeface="Source Sans Pro"/>
+              </a:defRPr>
+            </a:pPr>
             <a:r>
               <a:t>4. Logo Variations</a:t>
             </a:r>
@@ -4626,6 +4621,16 @@
                 <a:latin typeface="Source Sans Pro"/>
               </a:defRPr>
             </a:pPr>
+          </a:p>
+          <a:p>
+            <a:pPr>
+              <a:defRPr sz="1600" b="0">
+                <a:solidFill>
+                  <a:srgbClr val="2E86AB"/>
+                </a:solidFill>
+                <a:latin typeface="Source Sans Pro"/>
+              </a:defRPr>
+            </a:pPr>
             <a:r>
               <a:t>5. Color Palette</a:t>
             </a:r>
@@ -4639,6 +4644,16 @@
                 <a:latin typeface="Source Sans Pro"/>
               </a:defRPr>
             </a:pPr>
+          </a:p>
+          <a:p>
+            <a:pPr>
+              <a:defRPr sz="1600" b="0">
+                <a:solidFill>
+                  <a:srgbClr val="2E86AB"/>
+                </a:solidFill>
+                <a:latin typeface="Source Sans Pro"/>
+              </a:defRPr>
+            </a:pPr>
             <a:r>
               <a:t>6. Typography</a:t>
             </a:r>
@@ -4647,14 +4662,14 @@
       </p:sp>
       <p:sp>
         <p:nvSpPr>
-          <p:cNvPr id="5" name="TextBox 4"/>
+          <p:cNvPr id="4" name="TextBox 3"/>
           <p:cNvSpPr txBox="1"/>
           <p:nvPr/>
         </p:nvSpPr>
         <p:spPr>
           <a:xfrm>
-            <a:off x="5257800" y="1943100"/>
-            <a:ext cx="3429000" cy="3714750"/>
+            <a:off x="5943600" y="1943100"/>
+            <a:ext cx="2743200" cy="3714750"/>
           </a:xfrm>
           <a:prstGeom prst="rect">
             <a:avLst/>
@@ -4688,6 +4703,16 @@
                 <a:latin typeface="Source Sans Pro"/>
               </a:defRPr>
             </a:pPr>
+          </a:p>
+          <a:p>
+            <a:pPr>
+              <a:defRPr sz="1600" b="0">
+                <a:solidFill>
+                  <a:srgbClr val="2E86AB"/>
+                </a:solidFill>
+                <a:latin typeface="Source Sans Pro"/>
+              </a:defRPr>
+            </a:pPr>
             <a:r>
               <a:t>8. Brand Story &amp; Mission</a:t>
             </a:r>
@@ -4701,6 +4726,16 @@
                 <a:latin typeface="Source Sans Pro"/>
               </a:defRPr>
             </a:pPr>
+          </a:p>
+          <a:p>
+            <a:pPr>
+              <a:defRPr sz="1600" b="0">
+                <a:solidFill>
+                  <a:srgbClr val="2E86AB"/>
+                </a:solidFill>
+                <a:latin typeface="Source Sans Pro"/>
+              </a:defRPr>
+            </a:pPr>
             <a:r>
               <a:t>9. Brand Voice &amp; Tone</a:t>
             </a:r>
@@ -4714,6 +4749,16 @@
                 <a:latin typeface="Source Sans Pro"/>
               </a:defRPr>
             </a:pPr>
+          </a:p>
+          <a:p>
+            <a:pPr>
+              <a:defRPr sz="1600" b="0">
+                <a:solidFill>
+                  <a:srgbClr val="2E86AB"/>
+                </a:solidFill>
+                <a:latin typeface="Source Sans Pro"/>
+              </a:defRPr>
+            </a:pPr>
             <a:r>
               <a:t>10. Messaging &amp; Value Propositions</a:t>
             </a:r>
@@ -4727,6 +4772,16 @@
                 <a:latin typeface="Source Sans Pro"/>
               </a:defRPr>
             </a:pPr>
+          </a:p>
+          <a:p>
+            <a:pPr>
+              <a:defRPr sz="1600" b="0">
+                <a:solidFill>
+                  <a:srgbClr val="2E86AB"/>
+                </a:solidFill>
+                <a:latin typeface="Source Sans Pro"/>
+              </a:defRPr>
+            </a:pPr>
             <a:r>
               <a:t>11. Marketing Copy</a:t>
             </a:r>
@@ -4740,80 +4795,18 @@
                 <a:latin typeface="Source Sans Pro"/>
               </a:defRPr>
             </a:pPr>
+          </a:p>
+          <a:p>
+            <a:pPr>
+              <a:defRPr sz="1600" b="0">
+                <a:solidFill>
+                  <a:srgbClr val="2E86AB"/>
+                </a:solidFill>
+                <a:latin typeface="Source Sans Pro"/>
+              </a:defRPr>
+            </a:pPr>
             <a:r>
               <a:t>12. Brand Collateral Templates</a:t>
-            </a:r>
-          </a:p>
-        </p:txBody>
-      </p:sp>
-      <p:sp>
-        <p:nvSpPr>
-          <p:cNvPr id="6" name="TextBox 5"/>
-          <p:cNvSpPr txBox="1"/>
-          <p:nvPr/>
-        </p:nvSpPr>
-        <p:spPr>
-          <a:xfrm>
-            <a:off x="457200" y="5657850"/>
-            <a:ext cx="4114800" cy="742950"/>
-          </a:xfrm>
-          <a:prstGeom prst="rect">
-            <a:avLst/>
-          </a:prstGeom>
-          <a:noFill/>
-        </p:spPr>
-        <p:txBody>
-          <a:bodyPr wrap="none">
-            <a:spAutoFit/>
-          </a:bodyPr>
-          <a:lstStyle/>
-          <a:p>
-            <a:pPr algn="l">
-              <a:defRPr sz="1000" b="0">
-                <a:solidFill>
-                  <a:srgbClr val="2E86AB"/>
-                </a:solidFill>
-                <a:latin typeface="Source Sans Pro"/>
-              </a:defRPr>
-            </a:pPr>
-            <a:r>
-              <a:t>TechForward Live</a:t>
-            </a:r>
-          </a:p>
-        </p:txBody>
-      </p:sp>
-      <p:sp>
-        <p:nvSpPr>
-          <p:cNvPr id="7" name="TextBox 6"/>
-          <p:cNvSpPr txBox="1"/>
-          <p:nvPr/>
-        </p:nvSpPr>
-        <p:spPr>
-          <a:xfrm>
-            <a:off x="4572000" y="5657850"/>
-            <a:ext cx="4114800" cy="742950"/>
-          </a:xfrm>
-          <a:prstGeom prst="rect">
-            <a:avLst/>
-          </a:prstGeom>
-          <a:noFill/>
-        </p:spPr>
-        <p:txBody>
-          <a:bodyPr wrap="none">
-            <a:spAutoFit/>
-          </a:bodyPr>
-          <a:lstStyle/>
-          <a:p>
-            <a:pPr algn="r">
-              <a:defRPr sz="1000" b="0">
-                <a:solidFill>
-                  <a:srgbClr val="2E86AB"/>
-                </a:solidFill>
-                <a:latin typeface="Source Sans Pro"/>
-              </a:defRPr>
-            </a:pPr>
-            <a:r>
-              <a:t>2</a:t>
             </a:r>
           </a:p>
         </p:txBody>

--- a/output/techforward_live/techforward_live_enhanced_brand_book.pptx
+++ b/output/techforward_live/techforward_live_enhanced_brand_book.pptx
@@ -20,6 +20,8 @@
     <p:sldId id="268" r:id="rId19"/>
     <p:sldId id="269" r:id="rId20"/>
     <p:sldId id="270" r:id="rId21"/>
+    <p:sldId id="271" r:id="rId22"/>
+    <p:sldId id="272" r:id="rId23"/>
   </p:sldIdLst>
   <p:sldSz cx="9144000" cy="6858000" type="screen4x3"/>
   <p:notesSz cx="6858000" cy="9144000"/>
@@ -3309,7 +3311,7 @@
               </a:defRPr>
             </a:pPr>
             <a:r>
-              <a:t>Brand Voice &amp; Tone</a:t>
+              <a:t>Visual &amp; Photography Guidelines</a:t>
             </a:r>
           </a:p>
         </p:txBody>
@@ -3323,7 +3325,7 @@
         <p:spPr>
           <a:xfrm>
             <a:off x="1143000" y="1943100"/>
-            <a:ext cx="6858000" cy="2971800"/>
+            <a:ext cx="3429000" cy="2971800"/>
           </a:xfrm>
           <a:prstGeom prst="rect">
             <a:avLst/>
@@ -3337,15 +3339,80 @@
           <a:lstStyle/>
           <a:p>
             <a:pPr>
-              <a:defRPr sz="1600" b="0">
-                <a:solidFill>
-                  <a:srgbClr val="2E86AB"/>
-                </a:solidFill>
-                <a:latin typeface="Source Sans Pro"/>
-              </a:defRPr>
-            </a:pPr>
-            <a:r>
-              <a:t>Professional yet approachable, confident, innovative, and human-centered with a focus on clarity and trust.</a:t>
+              <a:defRPr sz="1800" b="0">
+                <a:solidFill>
+                  <a:srgbClr val="2E86AB"/>
+                </a:solidFill>
+                <a:latin typeface="Source Sans Pro"/>
+              </a:defRPr>
+            </a:pPr>
+            <a:r>
+              <a:t>Visual Style Guidelines:</a:t>
+            </a:r>
+          </a:p>
+          <a:p>
+            <a:pPr>
+              <a:defRPr sz="1400" b="0">
+                <a:solidFill>
+                  <a:srgbClr val="2E86AB"/>
+                </a:solidFill>
+                <a:latin typeface="Source Sans Pro"/>
+              </a:defRPr>
+            </a:pPr>
+            <a:r>
+              <a:t>• Modern</a:t>
+            </a:r>
+          </a:p>
+          <a:p>
+            <a:pPr>
+              <a:defRPr sz="1400" b="0">
+                <a:solidFill>
+                  <a:srgbClr val="2E86AB"/>
+                </a:solidFill>
+                <a:latin typeface="Source Sans Pro"/>
+              </a:defRPr>
+            </a:pPr>
+            <a:r>
+              <a:t>• clean</a:t>
+            </a:r>
+          </a:p>
+          <a:p>
+            <a:pPr>
+              <a:defRPr sz="1400" b="0">
+                <a:solidFill>
+                  <a:srgbClr val="2E86AB"/>
+                </a:solidFill>
+                <a:latin typeface="Source Sans Pro"/>
+              </a:defRPr>
+            </a:pPr>
+            <a:r>
+              <a:t>• professional</a:t>
+            </a:r>
+          </a:p>
+          <a:p>
+            <a:pPr>
+              <a:defRPr sz="1400" b="0">
+                <a:solidFill>
+                  <a:srgbClr val="2E86AB"/>
+                </a:solidFill>
+                <a:latin typeface="Source Sans Pro"/>
+              </a:defRPr>
+            </a:pPr>
+            <a:r>
+              <a:t>• minimalist</a:t>
+            </a:r>
+          </a:p>
+          <a:p>
+            <a:pPr>
+              <a:defRPr sz="1400" b="0">
+                <a:solidFill>
+                  <a:srgbClr val="2E86AB"/>
+                </a:solidFill>
+                <a:latin typeface="Source Sans Pro"/>
+              </a:defRPr>
+            </a:pPr>
+            <a:r>
+              <a:t>• bold typography</a:t>
             </a:r>
           </a:p>
         </p:txBody>
@@ -3358,8 +3425,128 @@
         </p:nvSpPr>
         <p:spPr>
           <a:xfrm>
-            <a:off x="457200" y="5657850"/>
-            <a:ext cx="4114800" cy="742950"/>
+            <a:off x="5257800" y="1943100"/>
+            <a:ext cx="3429000" cy="2971800"/>
+          </a:xfrm>
+          <a:prstGeom prst="rect">
+            <a:avLst/>
+          </a:prstGeom>
+          <a:noFill/>
+        </p:spPr>
+        <p:txBody>
+          <a:bodyPr wrap="square">
+            <a:spAutoFit/>
+          </a:bodyPr>
+          <a:lstStyle/>
+          <a:p>
+            <a:pPr>
+              <a:defRPr sz="1800" b="0">
+                <a:solidFill>
+                  <a:srgbClr val="2E86AB"/>
+                </a:solidFill>
+                <a:latin typeface="Source Sans Pro"/>
+              </a:defRPr>
+            </a:pPr>
+            <a:r>
+              <a:t>Photography Guidelines:</a:t>
+            </a:r>
+          </a:p>
+          <a:p>
+            <a:pPr>
+              <a:defRPr sz="1400" b="0">
+                <a:solidFill>
+                  <a:srgbClr val="2E86AB"/>
+                </a:solidFill>
+                <a:latin typeface="Source Sans Pro"/>
+              </a:defRPr>
+            </a:pPr>
+            <a:r>
+              <a:t>• High contrast</a:t>
+            </a:r>
+          </a:p>
+          <a:p>
+            <a:pPr>
+              <a:defRPr sz="1400" b="0">
+                <a:solidFill>
+                  <a:srgbClr val="2E86AB"/>
+                </a:solidFill>
+                <a:latin typeface="Source Sans Pro"/>
+              </a:defRPr>
+            </a:pPr>
+            <a:r>
+              <a:t>• authentic moments</a:t>
+            </a:r>
+          </a:p>
+          <a:p>
+            <a:pPr>
+              <a:defRPr sz="1400" b="0">
+                <a:solidFill>
+                  <a:srgbClr val="2E86AB"/>
+                </a:solidFill>
+                <a:latin typeface="Source Sans Pro"/>
+              </a:defRPr>
+            </a:pPr>
+            <a:r>
+              <a:t>• natural lighting</a:t>
+            </a:r>
+          </a:p>
+        </p:txBody>
+      </p:sp>
+      <p:sp>
+        <p:nvSpPr>
+          <p:cNvPr id="6" name="Rectangle 5"/>
+          <p:cNvSpPr/>
+          <p:nvPr/>
+        </p:nvSpPr>
+        <p:spPr>
+          <a:xfrm>
+            <a:off x="5257800" y="4914900"/>
+            <a:ext cx="685800" cy="742950"/>
+          </a:xfrm>
+          <a:prstGeom prst="rect">
+            <a:avLst/>
+          </a:prstGeom>
+          <a:solidFill>
+            <a:srgbClr val="404040"/>
+          </a:solidFill>
+          <a:ln w="12700">
+            <a:solidFill>
+              <a:srgbClr val="808080"/>
+            </a:solidFill>
+          </a:ln>
+        </p:spPr>
+        <p:style>
+          <a:lnRef idx="1">
+            <a:schemeClr val="accent1"/>
+          </a:lnRef>
+          <a:fillRef idx="3">
+            <a:schemeClr val="accent1"/>
+          </a:fillRef>
+          <a:effectRef idx="2">
+            <a:schemeClr val="accent1"/>
+          </a:effectRef>
+          <a:fontRef idx="minor">
+            <a:schemeClr val="lt1"/>
+          </a:fontRef>
+        </p:style>
+        <p:txBody>
+          <a:bodyPr rtlCol="0" anchor="ctr"/>
+          <a:lstStyle/>
+          <a:p>
+            <a:pPr algn="ctr"/>
+          </a:p>
+        </p:txBody>
+      </p:sp>
+      <p:sp>
+        <p:nvSpPr>
+          <p:cNvPr id="7" name="TextBox 6"/>
+          <p:cNvSpPr txBox="1"/>
+          <p:nvPr/>
+        </p:nvSpPr>
+        <p:spPr>
+          <a:xfrm>
+            <a:off x="5257800" y="5162550"/>
+            <a:ext cx="685800" cy="247650"/>
           </a:xfrm>
           <a:prstGeom prst="rect">
             <a:avLst/>
@@ -3372,6 +3559,204 @@
           </a:bodyPr>
           <a:lstStyle/>
           <a:p>
+            <a:pPr algn="ctr">
+              <a:defRPr sz="800" b="0">
+                <a:solidFill>
+                  <a:srgbClr val="2E86AB"/>
+                </a:solidFill>
+                <a:latin typeface="Source Sans Pro"/>
+              </a:defRPr>
+            </a:pPr>
+            <a:r>
+              <a:t>Example</a:t>
+            </a:r>
+          </a:p>
+        </p:txBody>
+      </p:sp>
+      <p:sp>
+        <p:nvSpPr>
+          <p:cNvPr id="8" name="Rectangle 7"/>
+          <p:cNvSpPr/>
+          <p:nvPr/>
+        </p:nvSpPr>
+        <p:spPr>
+          <a:xfrm>
+            <a:off x="6629400" y="4914900"/>
+            <a:ext cx="685800" cy="742950"/>
+          </a:xfrm>
+          <a:prstGeom prst="rect">
+            <a:avLst/>
+          </a:prstGeom>
+          <a:solidFill>
+            <a:srgbClr val="404040"/>
+          </a:solidFill>
+          <a:ln w="12700">
+            <a:solidFill>
+              <a:srgbClr val="808080"/>
+            </a:solidFill>
+          </a:ln>
+        </p:spPr>
+        <p:style>
+          <a:lnRef idx="1">
+            <a:schemeClr val="accent1"/>
+          </a:lnRef>
+          <a:fillRef idx="3">
+            <a:schemeClr val="accent1"/>
+          </a:fillRef>
+          <a:effectRef idx="2">
+            <a:schemeClr val="accent1"/>
+          </a:effectRef>
+          <a:fontRef idx="minor">
+            <a:schemeClr val="lt1"/>
+          </a:fontRef>
+        </p:style>
+        <p:txBody>
+          <a:bodyPr rtlCol="0" anchor="ctr"/>
+          <a:lstStyle/>
+          <a:p>
+            <a:pPr algn="ctr"/>
+          </a:p>
+        </p:txBody>
+      </p:sp>
+      <p:sp>
+        <p:nvSpPr>
+          <p:cNvPr id="9" name="TextBox 8"/>
+          <p:cNvSpPr txBox="1"/>
+          <p:nvPr/>
+        </p:nvSpPr>
+        <p:spPr>
+          <a:xfrm>
+            <a:off x="6629400" y="5162550"/>
+            <a:ext cx="685800" cy="247650"/>
+          </a:xfrm>
+          <a:prstGeom prst="rect">
+            <a:avLst/>
+          </a:prstGeom>
+          <a:noFill/>
+        </p:spPr>
+        <p:txBody>
+          <a:bodyPr wrap="none">
+            <a:spAutoFit/>
+          </a:bodyPr>
+          <a:lstStyle/>
+          <a:p>
+            <a:pPr algn="ctr">
+              <a:defRPr sz="800" b="0">
+                <a:solidFill>
+                  <a:srgbClr val="2E86AB"/>
+                </a:solidFill>
+                <a:latin typeface="Source Sans Pro"/>
+              </a:defRPr>
+            </a:pPr>
+            <a:r>
+              <a:t>Example</a:t>
+            </a:r>
+          </a:p>
+        </p:txBody>
+      </p:sp>
+      <p:sp>
+        <p:nvSpPr>
+          <p:cNvPr id="10" name="Rectangle 9"/>
+          <p:cNvSpPr/>
+          <p:nvPr/>
+        </p:nvSpPr>
+        <p:spPr>
+          <a:xfrm>
+            <a:off x="8001000" y="4914900"/>
+            <a:ext cx="685800" cy="742950"/>
+          </a:xfrm>
+          <a:prstGeom prst="rect">
+            <a:avLst/>
+          </a:prstGeom>
+          <a:solidFill>
+            <a:srgbClr val="404040"/>
+          </a:solidFill>
+          <a:ln w="12700">
+            <a:solidFill>
+              <a:srgbClr val="808080"/>
+            </a:solidFill>
+          </a:ln>
+        </p:spPr>
+        <p:style>
+          <a:lnRef idx="1">
+            <a:schemeClr val="accent1"/>
+          </a:lnRef>
+          <a:fillRef idx="3">
+            <a:schemeClr val="accent1"/>
+          </a:fillRef>
+          <a:effectRef idx="2">
+            <a:schemeClr val="accent1"/>
+          </a:effectRef>
+          <a:fontRef idx="minor">
+            <a:schemeClr val="lt1"/>
+          </a:fontRef>
+        </p:style>
+        <p:txBody>
+          <a:bodyPr rtlCol="0" anchor="ctr"/>
+          <a:lstStyle/>
+          <a:p>
+            <a:pPr algn="ctr"/>
+          </a:p>
+        </p:txBody>
+      </p:sp>
+      <p:sp>
+        <p:nvSpPr>
+          <p:cNvPr id="11" name="TextBox 10"/>
+          <p:cNvSpPr txBox="1"/>
+          <p:nvPr/>
+        </p:nvSpPr>
+        <p:spPr>
+          <a:xfrm>
+            <a:off x="8001000" y="5162550"/>
+            <a:ext cx="685800" cy="247650"/>
+          </a:xfrm>
+          <a:prstGeom prst="rect">
+            <a:avLst/>
+          </a:prstGeom>
+          <a:noFill/>
+        </p:spPr>
+        <p:txBody>
+          <a:bodyPr wrap="none">
+            <a:spAutoFit/>
+          </a:bodyPr>
+          <a:lstStyle/>
+          <a:p>
+            <a:pPr algn="ctr">
+              <a:defRPr sz="800" b="0">
+                <a:solidFill>
+                  <a:srgbClr val="2E86AB"/>
+                </a:solidFill>
+                <a:latin typeface="Source Sans Pro"/>
+              </a:defRPr>
+            </a:pPr>
+            <a:r>
+              <a:t>Example</a:t>
+            </a:r>
+          </a:p>
+        </p:txBody>
+      </p:sp>
+      <p:sp>
+        <p:nvSpPr>
+          <p:cNvPr id="12" name="TextBox 11"/>
+          <p:cNvSpPr txBox="1"/>
+          <p:nvPr/>
+        </p:nvSpPr>
+        <p:spPr>
+          <a:xfrm>
+            <a:off x="457200" y="5657850"/>
+            <a:ext cx="4114800" cy="742950"/>
+          </a:xfrm>
+          <a:prstGeom prst="rect">
+            <a:avLst/>
+          </a:prstGeom>
+          <a:noFill/>
+        </p:spPr>
+        <p:txBody>
+          <a:bodyPr wrap="none">
+            <a:spAutoFit/>
+          </a:bodyPr>
+          <a:lstStyle/>
+          <a:p>
             <a:pPr algn="l">
               <a:defRPr sz="1000" b="0">
                 <a:solidFill>
@@ -3388,7 +3773,7 @@
       </p:sp>
       <p:sp>
         <p:nvSpPr>
-          <p:cNvPr id="6" name="TextBox 5"/>
+          <p:cNvPr id="13" name="TextBox 12"/>
           <p:cNvSpPr txBox="1"/>
           <p:nvPr/>
         </p:nvSpPr>
@@ -3514,7 +3899,7 @@
               </a:defRPr>
             </a:pPr>
             <a:r>
-              <a:t>Messaging &amp; Value Propositions</a:t>
+              <a:t>Brand Story &amp; Mission</a:t>
             </a:r>
           </a:p>
         </p:txBody>
@@ -3550,7 +3935,7 @@
               </a:defRPr>
             </a:pPr>
             <a:r>
-              <a:t>Our core message centers on bridging the gap between complex technology and intuitive user experiences.</a:t>
+              <a:t>We revolutionize technology through innovative design and human-centered solutions that empower businesses to achieve their digital transformation goals.</a:t>
             </a:r>
           </a:p>
         </p:txBody>
@@ -3719,7 +4104,7 @@
               </a:defRPr>
             </a:pPr>
             <a:r>
-              <a:t>Marketing Copy: Website</a:t>
+              <a:t>Brand Voice &amp; Tone</a:t>
             </a:r>
           </a:p>
         </p:txBody>
@@ -3755,7 +4140,7 @@
               </a:defRPr>
             </a:pPr>
             <a:r>
-              <a:t>Transform your digital experience with our cutting-edge solutions designed for the modern business landscape.</a:t>
+              <a:t>Professional yet approachable, confident, innovative, and human-centered with a focus on clarity and trust.</a:t>
             </a:r>
           </a:p>
         </p:txBody>
@@ -3924,7 +4309,7 @@
               </a:defRPr>
             </a:pPr>
             <a:r>
-              <a:t>Marketing Copy: Social Media</a:t>
+              <a:t>Messaging &amp; Value Propositions</a:t>
             </a:r>
           </a:p>
         </p:txBody>
@@ -3960,7 +4345,7 @@
               </a:defRPr>
             </a:pPr>
             <a:r>
-              <a:t>Innovation meets simplicity. Technology that works for you. #TechForHumans #DigitalTransformation</a:t>
+              <a:t>Our core message centers on bridging the gap between complex technology and intuitive user experiences.</a:t>
             </a:r>
           </a:p>
         </p:txBody>
@@ -4129,7 +4514,7 @@
               </a:defRPr>
             </a:pPr>
             <a:r>
-              <a:t>Collateral: Business Card</a:t>
+              <a:t>Marketing Copy: Website</a:t>
             </a:r>
           </a:p>
         </p:txBody>
@@ -4165,7 +4550,7 @@
               </a:defRPr>
             </a:pPr>
             <a:r>
-              <a:t>Clean, modern design with QR code integration and minimal brand elements</a:t>
+              <a:t>Transform your digital experience with our cutting-edge solutions designed for the modern business landscape.</a:t>
             </a:r>
           </a:p>
         </p:txBody>
@@ -4334,7 +4719,7 @@
               </a:defRPr>
             </a:pPr>
             <a:r>
-              <a:t>Collateral: Letterhead</a:t>
+              <a:t>Marketing Copy: Social Media</a:t>
             </a:r>
           </a:p>
         </p:txBody>
@@ -4370,7 +4755,7 @@
               </a:defRPr>
             </a:pPr>
             <a:r>
-              <a:t>Professional header with subtle brand accents and contact information</a:t>
+              <a:t>Innovation meets simplicity. Technology that works for you. #TechForHumans #DigitalTransformation</a:t>
             </a:r>
           </a:p>
         </p:txBody>
@@ -4443,6 +4828,416 @@
             </a:pPr>
             <a:r>
               <a:t>15</a:t>
+            </a:r>
+          </a:p>
+        </p:txBody>
+      </p:sp>
+    </p:spTree>
+  </p:cSld>
+  <p:clrMapOvr>
+    <a:masterClrMapping/>
+  </p:clrMapOvr>
+</p:sld>
+</file>
+
+<file path=ppt/slides/slide16.xml><?xml version="1.0" encoding="utf-8"?>
+<p:sld xmlns:a="http://schemas.openxmlformats.org/drawingml/2006/main" xmlns:p="http://schemas.openxmlformats.org/presentationml/2006/main" xmlns:r="http://schemas.openxmlformats.org/officeDocument/2006/relationships">
+  <p:cSld>
+    <p:spTree>
+      <p:nvGrpSpPr>
+        <p:cNvPr id="1" name=""/>
+        <p:cNvGrpSpPr/>
+        <p:nvPr/>
+      </p:nvGrpSpPr>
+      <p:sp>
+        <p:nvSpPr>
+          <p:cNvPr id="2" name="Rectangle 1"/>
+          <p:cNvSpPr/>
+          <p:nvPr/>
+        </p:nvSpPr>
+        <p:spPr>
+          <a:xfrm>
+            <a:off x="0" y="0"/>
+            <a:ext cx="9144000" cy="6858000"/>
+          </a:xfrm>
+          <a:prstGeom prst="rect">
+            <a:avLst/>
+          </a:prstGeom>
+          <a:solidFill>
+            <a:srgbClr val="1A1A1A"/>
+          </a:solidFill>
+          <a:ln>
+            <a:noFill/>
+          </a:ln>
+        </p:spPr>
+        <p:style>
+          <a:lnRef idx="1">
+            <a:schemeClr val="accent1"/>
+          </a:lnRef>
+          <a:fillRef idx="3">
+            <a:schemeClr val="accent1"/>
+          </a:fillRef>
+          <a:effectRef idx="2">
+            <a:schemeClr val="accent1"/>
+          </a:effectRef>
+          <a:fontRef idx="minor">
+            <a:schemeClr val="lt1"/>
+          </a:fontRef>
+        </p:style>
+        <p:txBody>
+          <a:bodyPr rtlCol="0" anchor="ctr"/>
+          <a:lstStyle/>
+          <a:p>
+            <a:pPr algn="ctr"/>
+          </a:p>
+        </p:txBody>
+      </p:sp>
+      <p:grpSpPr/>
+      <p:sp>
+        <p:nvSpPr>
+          <p:cNvPr id="3" name="TextBox 2"/>
+          <p:cNvSpPr txBox="1"/>
+          <p:nvPr/>
+        </p:nvSpPr>
+        <p:spPr>
+          <a:xfrm>
+            <a:off x="1143000" y="457200"/>
+            <a:ext cx="6858000" cy="742950"/>
+          </a:xfrm>
+          <a:prstGeom prst="rect">
+            <a:avLst/>
+          </a:prstGeom>
+          <a:noFill/>
+        </p:spPr>
+        <p:txBody>
+          <a:bodyPr wrap="none">
+            <a:spAutoFit/>
+          </a:bodyPr>
+          <a:lstStyle/>
+          <a:p>
+            <a:pPr>
+              <a:defRPr sz="3200" b="1">
+                <a:solidFill>
+                  <a:srgbClr val="2E86AB"/>
+                </a:solidFill>
+                <a:latin typeface="Inter"/>
+              </a:defRPr>
+            </a:pPr>
+            <a:r>
+              <a:t>Collateral: Business Card</a:t>
+            </a:r>
+          </a:p>
+        </p:txBody>
+      </p:sp>
+      <p:sp>
+        <p:nvSpPr>
+          <p:cNvPr id="4" name="TextBox 3"/>
+          <p:cNvSpPr txBox="1"/>
+          <p:nvPr/>
+        </p:nvSpPr>
+        <p:spPr>
+          <a:xfrm>
+            <a:off x="1143000" y="1943100"/>
+            <a:ext cx="6858000" cy="2971800"/>
+          </a:xfrm>
+          <a:prstGeom prst="rect">
+            <a:avLst/>
+          </a:prstGeom>
+          <a:noFill/>
+        </p:spPr>
+        <p:txBody>
+          <a:bodyPr wrap="square">
+            <a:spAutoFit/>
+          </a:bodyPr>
+          <a:lstStyle/>
+          <a:p>
+            <a:pPr>
+              <a:defRPr sz="1600" b="0">
+                <a:solidFill>
+                  <a:srgbClr val="2E86AB"/>
+                </a:solidFill>
+                <a:latin typeface="Source Sans Pro"/>
+              </a:defRPr>
+            </a:pPr>
+            <a:r>
+              <a:t>Clean, modern design with QR code integration and minimal brand elements</a:t>
+            </a:r>
+          </a:p>
+        </p:txBody>
+      </p:sp>
+      <p:sp>
+        <p:nvSpPr>
+          <p:cNvPr id="5" name="TextBox 4"/>
+          <p:cNvSpPr txBox="1"/>
+          <p:nvPr/>
+        </p:nvSpPr>
+        <p:spPr>
+          <a:xfrm>
+            <a:off x="457200" y="5657850"/>
+            <a:ext cx="4114800" cy="742950"/>
+          </a:xfrm>
+          <a:prstGeom prst="rect">
+            <a:avLst/>
+          </a:prstGeom>
+          <a:noFill/>
+        </p:spPr>
+        <p:txBody>
+          <a:bodyPr wrap="none">
+            <a:spAutoFit/>
+          </a:bodyPr>
+          <a:lstStyle/>
+          <a:p>
+            <a:pPr algn="l">
+              <a:defRPr sz="1000" b="0">
+                <a:solidFill>
+                  <a:srgbClr val="2E86AB"/>
+                </a:solidFill>
+                <a:latin typeface="Source Sans Pro"/>
+              </a:defRPr>
+            </a:pPr>
+            <a:r>
+              <a:t>TechForward Live</a:t>
+            </a:r>
+          </a:p>
+        </p:txBody>
+      </p:sp>
+      <p:sp>
+        <p:nvSpPr>
+          <p:cNvPr id="6" name="TextBox 5"/>
+          <p:cNvSpPr txBox="1"/>
+          <p:nvPr/>
+        </p:nvSpPr>
+        <p:spPr>
+          <a:xfrm>
+            <a:off x="4572000" y="5657850"/>
+            <a:ext cx="4114800" cy="742950"/>
+          </a:xfrm>
+          <a:prstGeom prst="rect">
+            <a:avLst/>
+          </a:prstGeom>
+          <a:noFill/>
+        </p:spPr>
+        <p:txBody>
+          <a:bodyPr wrap="none">
+            <a:spAutoFit/>
+          </a:bodyPr>
+          <a:lstStyle/>
+          <a:p>
+            <a:pPr algn="r">
+              <a:defRPr sz="1000" b="0">
+                <a:solidFill>
+                  <a:srgbClr val="2E86AB"/>
+                </a:solidFill>
+                <a:latin typeface="Source Sans Pro"/>
+              </a:defRPr>
+            </a:pPr>
+            <a:r>
+              <a:t>16</a:t>
+            </a:r>
+          </a:p>
+        </p:txBody>
+      </p:sp>
+    </p:spTree>
+  </p:cSld>
+  <p:clrMapOvr>
+    <a:masterClrMapping/>
+  </p:clrMapOvr>
+</p:sld>
+</file>
+
+<file path=ppt/slides/slide17.xml><?xml version="1.0" encoding="utf-8"?>
+<p:sld xmlns:a="http://schemas.openxmlformats.org/drawingml/2006/main" xmlns:p="http://schemas.openxmlformats.org/presentationml/2006/main" xmlns:r="http://schemas.openxmlformats.org/officeDocument/2006/relationships">
+  <p:cSld>
+    <p:spTree>
+      <p:nvGrpSpPr>
+        <p:cNvPr id="1" name=""/>
+        <p:cNvGrpSpPr/>
+        <p:nvPr/>
+      </p:nvGrpSpPr>
+      <p:sp>
+        <p:nvSpPr>
+          <p:cNvPr id="2" name="Rectangle 1"/>
+          <p:cNvSpPr/>
+          <p:nvPr/>
+        </p:nvSpPr>
+        <p:spPr>
+          <a:xfrm>
+            <a:off x="0" y="0"/>
+            <a:ext cx="9144000" cy="6858000"/>
+          </a:xfrm>
+          <a:prstGeom prst="rect">
+            <a:avLst/>
+          </a:prstGeom>
+          <a:solidFill>
+            <a:srgbClr val="1A1A1A"/>
+          </a:solidFill>
+          <a:ln>
+            <a:noFill/>
+          </a:ln>
+        </p:spPr>
+        <p:style>
+          <a:lnRef idx="1">
+            <a:schemeClr val="accent1"/>
+          </a:lnRef>
+          <a:fillRef idx="3">
+            <a:schemeClr val="accent1"/>
+          </a:fillRef>
+          <a:effectRef idx="2">
+            <a:schemeClr val="accent1"/>
+          </a:effectRef>
+          <a:fontRef idx="minor">
+            <a:schemeClr val="lt1"/>
+          </a:fontRef>
+        </p:style>
+        <p:txBody>
+          <a:bodyPr rtlCol="0" anchor="ctr"/>
+          <a:lstStyle/>
+          <a:p>
+            <a:pPr algn="ctr"/>
+          </a:p>
+        </p:txBody>
+      </p:sp>
+      <p:grpSpPr/>
+      <p:sp>
+        <p:nvSpPr>
+          <p:cNvPr id="3" name="TextBox 2"/>
+          <p:cNvSpPr txBox="1"/>
+          <p:nvPr/>
+        </p:nvSpPr>
+        <p:spPr>
+          <a:xfrm>
+            <a:off x="1143000" y="457200"/>
+            <a:ext cx="6858000" cy="742950"/>
+          </a:xfrm>
+          <a:prstGeom prst="rect">
+            <a:avLst/>
+          </a:prstGeom>
+          <a:noFill/>
+        </p:spPr>
+        <p:txBody>
+          <a:bodyPr wrap="none">
+            <a:spAutoFit/>
+          </a:bodyPr>
+          <a:lstStyle/>
+          <a:p>
+            <a:pPr>
+              <a:defRPr sz="3200" b="1">
+                <a:solidFill>
+                  <a:srgbClr val="2E86AB"/>
+                </a:solidFill>
+                <a:latin typeface="Inter"/>
+              </a:defRPr>
+            </a:pPr>
+            <a:r>
+              <a:t>Collateral: Letterhead</a:t>
+            </a:r>
+          </a:p>
+        </p:txBody>
+      </p:sp>
+      <p:sp>
+        <p:nvSpPr>
+          <p:cNvPr id="4" name="TextBox 3"/>
+          <p:cNvSpPr txBox="1"/>
+          <p:nvPr/>
+        </p:nvSpPr>
+        <p:spPr>
+          <a:xfrm>
+            <a:off x="1143000" y="1943100"/>
+            <a:ext cx="6858000" cy="2971800"/>
+          </a:xfrm>
+          <a:prstGeom prst="rect">
+            <a:avLst/>
+          </a:prstGeom>
+          <a:noFill/>
+        </p:spPr>
+        <p:txBody>
+          <a:bodyPr wrap="square">
+            <a:spAutoFit/>
+          </a:bodyPr>
+          <a:lstStyle/>
+          <a:p>
+            <a:pPr>
+              <a:defRPr sz="1600" b="0">
+                <a:solidFill>
+                  <a:srgbClr val="2E86AB"/>
+                </a:solidFill>
+                <a:latin typeface="Source Sans Pro"/>
+              </a:defRPr>
+            </a:pPr>
+            <a:r>
+              <a:t>Professional header with subtle brand accents and contact information</a:t>
+            </a:r>
+          </a:p>
+        </p:txBody>
+      </p:sp>
+      <p:sp>
+        <p:nvSpPr>
+          <p:cNvPr id="5" name="TextBox 4"/>
+          <p:cNvSpPr txBox="1"/>
+          <p:nvPr/>
+        </p:nvSpPr>
+        <p:spPr>
+          <a:xfrm>
+            <a:off x="457200" y="5657850"/>
+            <a:ext cx="4114800" cy="742950"/>
+          </a:xfrm>
+          <a:prstGeom prst="rect">
+            <a:avLst/>
+          </a:prstGeom>
+          <a:noFill/>
+        </p:spPr>
+        <p:txBody>
+          <a:bodyPr wrap="none">
+            <a:spAutoFit/>
+          </a:bodyPr>
+          <a:lstStyle/>
+          <a:p>
+            <a:pPr algn="l">
+              <a:defRPr sz="1000" b="0">
+                <a:solidFill>
+                  <a:srgbClr val="2E86AB"/>
+                </a:solidFill>
+                <a:latin typeface="Source Sans Pro"/>
+              </a:defRPr>
+            </a:pPr>
+            <a:r>
+              <a:t>TechForward Live</a:t>
+            </a:r>
+          </a:p>
+        </p:txBody>
+      </p:sp>
+      <p:sp>
+        <p:nvSpPr>
+          <p:cNvPr id="6" name="TextBox 5"/>
+          <p:cNvSpPr txBox="1"/>
+          <p:nvPr/>
+        </p:nvSpPr>
+        <p:spPr>
+          <a:xfrm>
+            <a:off x="4572000" y="5657850"/>
+            <a:ext cx="4114800" cy="742950"/>
+          </a:xfrm>
+          <a:prstGeom prst="rect">
+            <a:avLst/>
+          </a:prstGeom>
+          <a:noFill/>
+        </p:spPr>
+        <p:txBody>
+          <a:bodyPr wrap="none">
+            <a:spAutoFit/>
+          </a:bodyPr>
+          <a:lstStyle/>
+          <a:p>
+            <a:pPr algn="r">
+              <a:defRPr sz="1000" b="0">
+                <a:solidFill>
+                  <a:srgbClr val="2E86AB"/>
+                </a:solidFill>
+                <a:latin typeface="Source Sans Pro"/>
+              </a:defRPr>
+            </a:pPr>
+            <a:r>
+              <a:t>17</a:t>
             </a:r>
           </a:p>
         </p:txBody>
@@ -4540,7 +5335,7 @@
               </a:defRPr>
             </a:pPr>
             <a:r>
-              <a:t>1. Company Profile</a:t>
+              <a:t>1. 1. Introduction</a:t>
             </a:r>
           </a:p>
           <a:p>
@@ -4563,7 +5358,7 @@
               </a:defRPr>
             </a:pPr>
             <a:r>
-              <a:t>2. Market Analysis &amp; Insights</a:t>
+              <a:t>2. 2. Brand Purpose</a:t>
             </a:r>
           </a:p>
           <a:p>
@@ -4586,7 +5381,7 @@
               </a:defRPr>
             </a:pPr>
             <a:r>
-              <a:t>3. Brand Positioning</a:t>
+              <a:t>3. 3. Company Profile</a:t>
             </a:r>
           </a:p>
           <a:p>
@@ -4609,7 +5404,7 @@
               </a:defRPr>
             </a:pPr>
             <a:r>
-              <a:t>4. Logo Variations</a:t>
+              <a:t>4. 4. Market Analysis &amp; Insights</a:t>
             </a:r>
           </a:p>
           <a:p>
@@ -4632,7 +5427,7 @@
               </a:defRPr>
             </a:pPr>
             <a:r>
-              <a:t>5. Color Palette</a:t>
+              <a:t>5. 5. Brand Positioning</a:t>
             </a:r>
           </a:p>
           <a:p>
@@ -4655,7 +5450,30 @@
               </a:defRPr>
             </a:pPr>
             <a:r>
-              <a:t>6. Typography</a:t>
+              <a:t>6. 6. Logo Variations</a:t>
+            </a:r>
+          </a:p>
+          <a:p>
+            <a:pPr>
+              <a:defRPr sz="1600" b="0">
+                <a:solidFill>
+                  <a:srgbClr val="2E86AB"/>
+                </a:solidFill>
+                <a:latin typeface="Source Sans Pro"/>
+              </a:defRPr>
+            </a:pPr>
+          </a:p>
+          <a:p>
+            <a:pPr>
+              <a:defRPr sz="1600" b="0">
+                <a:solidFill>
+                  <a:srgbClr val="2E86AB"/>
+                </a:solidFill>
+                <a:latin typeface="Source Sans Pro"/>
+              </a:defRPr>
+            </a:pPr>
+            <a:r>
+              <a:t>7. 7. Color Palette</a:t>
             </a:r>
           </a:p>
         </p:txBody>
@@ -4691,7 +5509,7 @@
               </a:defRPr>
             </a:pPr>
             <a:r>
-              <a:t>7. Visual &amp; Photography Guidelines</a:t>
+              <a:t>8. 8. Typography</a:t>
             </a:r>
           </a:p>
           <a:p>
@@ -4714,7 +5532,7 @@
               </a:defRPr>
             </a:pPr>
             <a:r>
-              <a:t>8. Brand Story &amp; Mission</a:t>
+              <a:t>9. 9. Visual &amp; Photography Guidelines</a:t>
             </a:r>
           </a:p>
           <a:p>
@@ -4737,7 +5555,7 @@
               </a:defRPr>
             </a:pPr>
             <a:r>
-              <a:t>9. Brand Voice &amp; Tone</a:t>
+              <a:t>10. 10. Brand Story &amp; Mission</a:t>
             </a:r>
           </a:p>
           <a:p>
@@ -4760,7 +5578,7 @@
               </a:defRPr>
             </a:pPr>
             <a:r>
-              <a:t>10. Messaging &amp; Value Propositions</a:t>
+              <a:t>11. 11. Brand Voice &amp; Tone</a:t>
             </a:r>
           </a:p>
           <a:p>
@@ -4783,7 +5601,7 @@
               </a:defRPr>
             </a:pPr>
             <a:r>
-              <a:t>11. Marketing Copy</a:t>
+              <a:t>12. 12. Messaging &amp; Value Propositions</a:t>
             </a:r>
           </a:p>
           <a:p>
@@ -4806,7 +5624,30 @@
               </a:defRPr>
             </a:pPr>
             <a:r>
-              <a:t>12. Brand Collateral Templates</a:t>
+              <a:t>13. 13. Marketing Copy</a:t>
+            </a:r>
+          </a:p>
+          <a:p>
+            <a:pPr>
+              <a:defRPr sz="1600" b="0">
+                <a:solidFill>
+                  <a:srgbClr val="2E86AB"/>
+                </a:solidFill>
+                <a:latin typeface="Source Sans Pro"/>
+              </a:defRPr>
+            </a:pPr>
+          </a:p>
+          <a:p>
+            <a:pPr>
+              <a:defRPr sz="1600" b="0">
+                <a:solidFill>
+                  <a:srgbClr val="2E86AB"/>
+                </a:solidFill>
+                <a:latin typeface="Source Sans Pro"/>
+              </a:defRPr>
+            </a:pPr>
+            <a:r>
+              <a:t>14. 14. Brand Collateral Templates</a:t>
             </a:r>
           </a:p>
         </p:txBody>
@@ -4822,59 +5663,24 @@
 <file path=ppt/slides/slide3.xml><?xml version="1.0" encoding="utf-8"?>
 <p:sld xmlns:a="http://schemas.openxmlformats.org/drawingml/2006/main" xmlns:p="http://schemas.openxmlformats.org/presentationml/2006/main" xmlns:r="http://schemas.openxmlformats.org/officeDocument/2006/relationships">
   <p:cSld>
+    <p:bg>
+      <p:bgPr>
+        <a:solidFill>
+          <a:srgbClr val="000000"/>
+        </a:solidFill>
+        <a:effectLst/>
+      </p:bgPr>
+    </p:bg>
     <p:spTree>
       <p:nvGrpSpPr>
         <p:cNvPr id="1" name=""/>
         <p:cNvGrpSpPr/>
         <p:nvPr/>
       </p:nvGrpSpPr>
-      <p:sp>
-        <p:nvSpPr>
-          <p:cNvPr id="2" name="Rectangle 1"/>
-          <p:cNvSpPr/>
-          <p:nvPr/>
-        </p:nvSpPr>
-        <p:spPr>
-          <a:xfrm>
-            <a:off x="0" y="0"/>
-            <a:ext cx="9144000" cy="6858000"/>
-          </a:xfrm>
-          <a:prstGeom prst="rect">
-            <a:avLst/>
-          </a:prstGeom>
-          <a:solidFill>
-            <a:srgbClr val="1A1A1A"/>
-          </a:solidFill>
-          <a:ln>
-            <a:noFill/>
-          </a:ln>
-        </p:spPr>
-        <p:style>
-          <a:lnRef idx="1">
-            <a:schemeClr val="accent1"/>
-          </a:lnRef>
-          <a:fillRef idx="3">
-            <a:schemeClr val="accent1"/>
-          </a:fillRef>
-          <a:effectRef idx="2">
-            <a:schemeClr val="accent1"/>
-          </a:effectRef>
-          <a:fontRef idx="minor">
-            <a:schemeClr val="lt1"/>
-          </a:fontRef>
-        </p:style>
-        <p:txBody>
-          <a:bodyPr rtlCol="0" anchor="ctr"/>
-          <a:lstStyle/>
-          <a:p>
-            <a:pPr algn="ctr"/>
-          </a:p>
-        </p:txBody>
-      </p:sp>
       <p:grpSpPr/>
       <p:sp>
         <p:nvSpPr>
-          <p:cNvPr id="3" name="TextBox 2"/>
+          <p:cNvPr id="2" name="TextBox 1"/>
           <p:cNvSpPr txBox="1"/>
           <p:nvPr/>
         </p:nvSpPr>
@@ -4894,7 +5700,7 @@
           </a:bodyPr>
           <a:lstStyle/>
           <a:p>
-            <a:pPr>
+            <a:pPr algn="ctr">
               <a:defRPr sz="3200" b="1">
                 <a:solidFill>
                   <a:srgbClr val="2E86AB"/>
@@ -4903,21 +5709,21 @@
               </a:defRPr>
             </a:pPr>
             <a:r>
-              <a:t>Company Profile</a:t>
-            </a:r>
-          </a:p>
-        </p:txBody>
-      </p:sp>
-      <p:sp>
-        <p:nvSpPr>
-          <p:cNvPr id="4" name="TextBox 3"/>
+              <a:t>Introduction</a:t>
+            </a:r>
+          </a:p>
+        </p:txBody>
+      </p:sp>
+      <p:sp>
+        <p:nvSpPr>
+          <p:cNvPr id="3" name="TextBox 2"/>
           <p:cNvSpPr txBox="1"/>
           <p:nvPr/>
         </p:nvSpPr>
         <p:spPr>
           <a:xfrm>
-            <a:off x="1143000" y="1943100"/>
-            <a:ext cx="3429000" cy="2971800"/>
+            <a:off x="1828800" y="1943100"/>
+            <a:ext cx="5486400" cy="2971800"/>
           </a:xfrm>
           <a:prstGeom prst="rect">
             <a:avLst/>
@@ -4930,133 +5736,8 @@
           </a:bodyPr>
           <a:lstStyle/>
           <a:p>
-            <a:pPr>
-              <a:defRPr sz="1600" b="0">
-                <a:solidFill>
-                  <a:srgbClr val="2E86AB"/>
-                </a:solidFill>
-                <a:latin typeface="Source Sans Pro"/>
-              </a:defRPr>
-            </a:pPr>
-            <a:r>
-              <a:t>Company: TechForward Inc</a:t>
-            </a:r>
-          </a:p>
-          <a:p>
-            <a:pPr>
-              <a:defRPr sz="1600" b="0">
-                <a:solidFill>
-                  <a:srgbClr val="2E86AB"/>
-                </a:solidFill>
-                <a:latin typeface="Source Sans Pro"/>
-              </a:defRPr>
-            </a:pPr>
-          </a:p>
-          <a:p>
-            <a:pPr>
-              <a:defRPr sz="1600" b="0">
-                <a:solidFill>
-                  <a:srgbClr val="2E86AB"/>
-                </a:solidFill>
-                <a:latin typeface="Source Sans Pro"/>
-              </a:defRPr>
-            </a:pPr>
-            <a:r>
-              <a:t>Industry: Technology &amp; Digital Solutions</a:t>
-            </a:r>
-          </a:p>
-          <a:p>
-            <a:pPr>
-              <a:defRPr sz="1600" b="0">
-                <a:solidFill>
-                  <a:srgbClr val="2E86AB"/>
-                </a:solidFill>
-                <a:latin typeface="Source Sans Pro"/>
-              </a:defRPr>
-            </a:pPr>
-          </a:p>
-          <a:p>
-            <a:pPr>
-              <a:defRPr sz="1600" b="0">
-                <a:solidFill>
-                  <a:srgbClr val="2E86AB"/>
-                </a:solidFill>
-                <a:latin typeface="Source Sans Pro"/>
-              </a:defRPr>
-            </a:pPr>
-            <a:r>
-              <a:t>Target Audience: Progressive businesses seeking digital transformation and innovation</a:t>
-            </a:r>
-          </a:p>
-        </p:txBody>
-      </p:sp>
-      <p:sp>
-        <p:nvSpPr>
-          <p:cNvPr id="5" name="Rounded Rectangle 4"/>
-          <p:cNvSpPr/>
-          <p:nvPr/>
-        </p:nvSpPr>
-        <p:spPr>
-          <a:xfrm>
-            <a:off x="5257800" y="2034540"/>
-            <a:ext cx="1280160" cy="560070"/>
-          </a:xfrm>
-          <a:prstGeom prst="roundRect">
-            <a:avLst/>
-          </a:prstGeom>
-          <a:solidFill>
-            <a:srgbClr val="F18F01"/>
-          </a:solidFill>
-          <a:ln>
-            <a:noFill/>
-          </a:ln>
-        </p:spPr>
-        <p:style>
-          <a:lnRef idx="1">
-            <a:schemeClr val="accent1"/>
-          </a:lnRef>
-          <a:fillRef idx="3">
-            <a:schemeClr val="accent1"/>
-          </a:fillRef>
-          <a:effectRef idx="2">
-            <a:schemeClr val="accent1"/>
-          </a:effectRef>
-          <a:fontRef idx="minor">
-            <a:schemeClr val="lt1"/>
-          </a:fontRef>
-        </p:style>
-        <p:txBody>
-          <a:bodyPr rtlCol="0" anchor="ctr"/>
-          <a:lstStyle/>
-          <a:p>
-            <a:pPr algn="ctr"/>
-          </a:p>
-        </p:txBody>
-      </p:sp>
-      <p:sp>
-        <p:nvSpPr>
-          <p:cNvPr id="6" name="TextBox 5"/>
-          <p:cNvSpPr txBox="1"/>
-          <p:nvPr/>
-        </p:nvSpPr>
-        <p:spPr>
-          <a:xfrm>
-            <a:off x="5257800" y="1943100"/>
-            <a:ext cx="1371600" cy="742950"/>
-          </a:xfrm>
-          <a:prstGeom prst="rect">
-            <a:avLst/>
-          </a:prstGeom>
-          <a:noFill/>
-        </p:spPr>
-        <p:txBody>
-          <a:bodyPr wrap="none" anchor="ctr">
-            <a:spAutoFit/>
-          </a:bodyPr>
-          <a:lstStyle/>
-          <a:p>
             <a:pPr algn="ctr">
-              <a:defRPr sz="1400" b="0">
+              <a:defRPr sz="1800" b="0">
                 <a:solidFill>
                   <a:srgbClr val="FFFFFF"/>
                 </a:solidFill>
@@ -5064,157 +5745,22 @@
               </a:defRPr>
             </a:pPr>
             <a:r>
-              <a:t>Innovation</a:t>
-            </a:r>
-          </a:p>
-        </p:txBody>
-      </p:sp>
-      <p:sp>
-        <p:nvSpPr>
-          <p:cNvPr id="7" name="Rounded Rectangle 6"/>
-          <p:cNvSpPr/>
-          <p:nvPr/>
-        </p:nvSpPr>
-        <p:spPr>
-          <a:xfrm>
-            <a:off x="6629400" y="2034540"/>
-            <a:ext cx="1280160" cy="560070"/>
-          </a:xfrm>
-          <a:prstGeom prst="roundRect">
-            <a:avLst/>
-          </a:prstGeom>
-          <a:solidFill>
-            <a:srgbClr val="A23B72"/>
-          </a:solidFill>
-          <a:ln>
-            <a:noFill/>
-          </a:ln>
-        </p:spPr>
-        <p:style>
-          <a:lnRef idx="1">
-            <a:schemeClr val="accent1"/>
-          </a:lnRef>
-          <a:fillRef idx="3">
-            <a:schemeClr val="accent1"/>
-          </a:fillRef>
-          <a:effectRef idx="2">
-            <a:schemeClr val="accent1"/>
-          </a:effectRef>
-          <a:fontRef idx="minor">
-            <a:schemeClr val="lt1"/>
-          </a:fontRef>
-        </p:style>
-        <p:txBody>
-          <a:bodyPr rtlCol="0" anchor="ctr"/>
-          <a:lstStyle/>
-          <a:p>
-            <a:pPr algn="ctr"/>
-          </a:p>
-        </p:txBody>
-      </p:sp>
-      <p:sp>
-        <p:nvSpPr>
-          <p:cNvPr id="8" name="TextBox 7"/>
-          <p:cNvSpPr txBox="1"/>
-          <p:nvPr/>
-        </p:nvSpPr>
-        <p:spPr>
-          <a:xfrm>
-            <a:off x="6629400" y="1943100"/>
-            <a:ext cx="1371600" cy="742950"/>
-          </a:xfrm>
-          <a:prstGeom prst="rect">
-            <a:avLst/>
-          </a:prstGeom>
-          <a:noFill/>
-        </p:spPr>
-        <p:txBody>
-          <a:bodyPr wrap="none" anchor="ctr">
-            <a:spAutoFit/>
-          </a:bodyPr>
-          <a:lstStyle/>
+              <a:t>Welcome to the TechForward Live Brand Book.</a:t>
+            </a:r>
+          </a:p>
           <a:p>
             <a:pPr algn="ctr">
-              <a:defRPr sz="1400" b="0">
+              <a:defRPr sz="1800" b="0">
                 <a:solidFill>
                   <a:srgbClr val="FFFFFF"/>
                 </a:solidFill>
                 <a:latin typeface="Source Sans Pro"/>
               </a:defRPr>
             </a:pPr>
-            <a:r>
-              <a:t>Simplicity</a:t>
-            </a:r>
-          </a:p>
-        </p:txBody>
-      </p:sp>
-      <p:sp>
-        <p:nvSpPr>
-          <p:cNvPr id="9" name="Rounded Rectangle 8"/>
-          <p:cNvSpPr/>
-          <p:nvPr/>
-        </p:nvSpPr>
-        <p:spPr>
-          <a:xfrm>
-            <a:off x="5257800" y="2777490"/>
-            <a:ext cx="1280160" cy="560070"/>
-          </a:xfrm>
-          <a:prstGeom prst="roundRect">
-            <a:avLst/>
-          </a:prstGeom>
-          <a:solidFill>
-            <a:srgbClr val="F18F01"/>
-          </a:solidFill>
-          <a:ln>
-            <a:noFill/>
-          </a:ln>
-        </p:spPr>
-        <p:style>
-          <a:lnRef idx="1">
-            <a:schemeClr val="accent1"/>
-          </a:lnRef>
-          <a:fillRef idx="3">
-            <a:schemeClr val="accent1"/>
-          </a:fillRef>
-          <a:effectRef idx="2">
-            <a:schemeClr val="accent1"/>
-          </a:effectRef>
-          <a:fontRef idx="minor">
-            <a:schemeClr val="lt1"/>
-          </a:fontRef>
-        </p:style>
-        <p:txBody>
-          <a:bodyPr rtlCol="0" anchor="ctr"/>
-          <a:lstStyle/>
-          <a:p>
-            <a:pPr algn="ctr"/>
-          </a:p>
-        </p:txBody>
-      </p:sp>
-      <p:sp>
-        <p:nvSpPr>
-          <p:cNvPr id="10" name="TextBox 9"/>
-          <p:cNvSpPr txBox="1"/>
-          <p:nvPr/>
-        </p:nvSpPr>
-        <p:spPr>
-          <a:xfrm>
-            <a:off x="5257800" y="2686050"/>
-            <a:ext cx="1371600" cy="742950"/>
-          </a:xfrm>
-          <a:prstGeom prst="rect">
-            <a:avLst/>
-          </a:prstGeom>
-          <a:noFill/>
-        </p:spPr>
-        <p:txBody>
-          <a:bodyPr wrap="none" anchor="ctr">
-            <a:spAutoFit/>
-          </a:bodyPr>
-          <a:lstStyle/>
+          </a:p>
           <a:p>
             <a:pPr algn="ctr">
-              <a:defRPr sz="1400" b="0">
+              <a:defRPr sz="1800" b="0">
                 <a:solidFill>
                   <a:srgbClr val="FFFFFF"/>
                 </a:solidFill>
@@ -5222,157 +5768,22 @@
               </a:defRPr>
             </a:pPr>
             <a:r>
-              <a:t>Human-Centered</a:t>
-            </a:r>
-          </a:p>
-        </p:txBody>
-      </p:sp>
-      <p:sp>
-        <p:nvSpPr>
-          <p:cNvPr id="11" name="Rounded Rectangle 10"/>
-          <p:cNvSpPr/>
-          <p:nvPr/>
-        </p:nvSpPr>
-        <p:spPr>
-          <a:xfrm>
-            <a:off x="6629400" y="2777490"/>
-            <a:ext cx="1280160" cy="560070"/>
-          </a:xfrm>
-          <a:prstGeom prst="roundRect">
-            <a:avLst/>
-          </a:prstGeom>
-          <a:solidFill>
-            <a:srgbClr val="A23B72"/>
-          </a:solidFill>
-          <a:ln>
-            <a:noFill/>
-          </a:ln>
-        </p:spPr>
-        <p:style>
-          <a:lnRef idx="1">
-            <a:schemeClr val="accent1"/>
-          </a:lnRef>
-          <a:fillRef idx="3">
-            <a:schemeClr val="accent1"/>
-          </a:fillRef>
-          <a:effectRef idx="2">
-            <a:schemeClr val="accent1"/>
-          </a:effectRef>
-          <a:fontRef idx="minor">
-            <a:schemeClr val="lt1"/>
-          </a:fontRef>
-        </p:style>
-        <p:txBody>
-          <a:bodyPr rtlCol="0" anchor="ctr"/>
-          <a:lstStyle/>
-          <a:p>
-            <a:pPr algn="ctr"/>
-          </a:p>
-        </p:txBody>
-      </p:sp>
-      <p:sp>
-        <p:nvSpPr>
-          <p:cNvPr id="12" name="TextBox 11"/>
-          <p:cNvSpPr txBox="1"/>
-          <p:nvPr/>
-        </p:nvSpPr>
-        <p:spPr>
-          <a:xfrm>
-            <a:off x="6629400" y="2686050"/>
-            <a:ext cx="1371600" cy="742950"/>
-          </a:xfrm>
-          <a:prstGeom prst="rect">
-            <a:avLst/>
-          </a:prstGeom>
-          <a:noFill/>
-        </p:spPr>
-        <p:txBody>
-          <a:bodyPr wrap="none" anchor="ctr">
-            <a:spAutoFit/>
-          </a:bodyPr>
-          <a:lstStyle/>
+              <a:t>This comprehensive guide outlines our brand identity, values, and visual standards to ensure consistent brand representation across all touchpoints.</a:t>
+            </a:r>
+          </a:p>
           <a:p>
             <a:pPr algn="ctr">
-              <a:defRPr sz="1400" b="0">
+              <a:defRPr sz="1800" b="0">
                 <a:solidFill>
                   <a:srgbClr val="FFFFFF"/>
                 </a:solidFill>
                 <a:latin typeface="Source Sans Pro"/>
               </a:defRPr>
             </a:pPr>
-            <a:r>
-              <a:t>Excellence</a:t>
-            </a:r>
-          </a:p>
-        </p:txBody>
-      </p:sp>
-      <p:sp>
-        <p:nvSpPr>
-          <p:cNvPr id="13" name="Rounded Rectangle 12"/>
-          <p:cNvSpPr/>
-          <p:nvPr/>
-        </p:nvSpPr>
-        <p:spPr>
-          <a:xfrm>
-            <a:off x="5257800" y="3520440"/>
-            <a:ext cx="1280160" cy="560070"/>
-          </a:xfrm>
-          <a:prstGeom prst="roundRect">
-            <a:avLst/>
-          </a:prstGeom>
-          <a:solidFill>
-            <a:srgbClr val="F18F01"/>
-          </a:solidFill>
-          <a:ln>
-            <a:noFill/>
-          </a:ln>
-        </p:spPr>
-        <p:style>
-          <a:lnRef idx="1">
-            <a:schemeClr val="accent1"/>
-          </a:lnRef>
-          <a:fillRef idx="3">
-            <a:schemeClr val="accent1"/>
-          </a:fillRef>
-          <a:effectRef idx="2">
-            <a:schemeClr val="accent1"/>
-          </a:effectRef>
-          <a:fontRef idx="minor">
-            <a:schemeClr val="lt1"/>
-          </a:fontRef>
-        </p:style>
-        <p:txBody>
-          <a:bodyPr rtlCol="0" anchor="ctr"/>
-          <a:lstStyle/>
-          <a:p>
-            <a:pPr algn="ctr"/>
-          </a:p>
-        </p:txBody>
-      </p:sp>
-      <p:sp>
-        <p:nvSpPr>
-          <p:cNvPr id="14" name="TextBox 13"/>
-          <p:cNvSpPr txBox="1"/>
-          <p:nvPr/>
-        </p:nvSpPr>
-        <p:spPr>
-          <a:xfrm>
-            <a:off x="5257800" y="3429000"/>
-            <a:ext cx="1371600" cy="742950"/>
-          </a:xfrm>
-          <a:prstGeom prst="rect">
-            <a:avLst/>
-          </a:prstGeom>
-          <a:noFill/>
-        </p:spPr>
-        <p:txBody>
-          <a:bodyPr wrap="none" anchor="ctr">
-            <a:spAutoFit/>
-          </a:bodyPr>
-          <a:lstStyle/>
+          </a:p>
           <a:p>
             <a:pPr algn="ctr">
-              <a:defRPr sz="1400" b="0">
+              <a:defRPr sz="1800" b="0">
                 <a:solidFill>
                   <a:srgbClr val="FFFFFF"/>
                 </a:solidFill>
@@ -5380,158 +5791,7 @@
               </a:defRPr>
             </a:pPr>
             <a:r>
-              <a:t>Trust</a:t>
-            </a:r>
-          </a:p>
-        </p:txBody>
-      </p:sp>
-      <p:sp>
-        <p:nvSpPr>
-          <p:cNvPr id="15" name="Rounded Rectangle 14"/>
-          <p:cNvSpPr/>
-          <p:nvPr/>
-        </p:nvSpPr>
-        <p:spPr>
-          <a:xfrm>
-            <a:off x="6629400" y="3520440"/>
-            <a:ext cx="1280160" cy="560070"/>
-          </a:xfrm>
-          <a:prstGeom prst="roundRect">
-            <a:avLst/>
-          </a:prstGeom>
-          <a:solidFill>
-            <a:srgbClr val="A23B72"/>
-          </a:solidFill>
-          <a:ln>
-            <a:noFill/>
-          </a:ln>
-        </p:spPr>
-        <p:style>
-          <a:lnRef idx="1">
-            <a:schemeClr val="accent1"/>
-          </a:lnRef>
-          <a:fillRef idx="3">
-            <a:schemeClr val="accent1"/>
-          </a:fillRef>
-          <a:effectRef idx="2">
-            <a:schemeClr val="accent1"/>
-          </a:effectRef>
-          <a:fontRef idx="minor">
-            <a:schemeClr val="lt1"/>
-          </a:fontRef>
-        </p:style>
-        <p:txBody>
-          <a:bodyPr rtlCol="0" anchor="ctr"/>
-          <a:lstStyle/>
-          <a:p>
-            <a:pPr algn="ctr"/>
-          </a:p>
-        </p:txBody>
-      </p:sp>
-      <p:sp>
-        <p:nvSpPr>
-          <p:cNvPr id="16" name="TextBox 15"/>
-          <p:cNvSpPr txBox="1"/>
-          <p:nvPr/>
-        </p:nvSpPr>
-        <p:spPr>
-          <a:xfrm>
-            <a:off x="6629400" y="3429000"/>
-            <a:ext cx="1371600" cy="742950"/>
-          </a:xfrm>
-          <a:prstGeom prst="rect">
-            <a:avLst/>
-          </a:prstGeom>
-          <a:noFill/>
-        </p:spPr>
-        <p:txBody>
-          <a:bodyPr wrap="none" anchor="ctr">
-            <a:spAutoFit/>
-          </a:bodyPr>
-          <a:lstStyle/>
-          <a:p>
-            <a:pPr algn="ctr">
-              <a:defRPr sz="1400" b="0">
-                <a:solidFill>
-                  <a:srgbClr val="FFFFFF"/>
-                </a:solidFill>
-                <a:latin typeface="Source Sans Pro"/>
-              </a:defRPr>
-            </a:pPr>
-            <a:r>
-              <a:t>Reliability</a:t>
-            </a:r>
-          </a:p>
-        </p:txBody>
-      </p:sp>
-      <p:sp>
-        <p:nvSpPr>
-          <p:cNvPr id="17" name="TextBox 16"/>
-          <p:cNvSpPr txBox="1"/>
-          <p:nvPr/>
-        </p:nvSpPr>
-        <p:spPr>
-          <a:xfrm>
-            <a:off x="457200" y="5657850"/>
-            <a:ext cx="4114800" cy="742950"/>
-          </a:xfrm>
-          <a:prstGeom prst="rect">
-            <a:avLst/>
-          </a:prstGeom>
-          <a:noFill/>
-        </p:spPr>
-        <p:txBody>
-          <a:bodyPr wrap="none">
-            <a:spAutoFit/>
-          </a:bodyPr>
-          <a:lstStyle/>
-          <a:p>
-            <a:pPr algn="l">
-              <a:defRPr sz="1000" b="0">
-                <a:solidFill>
-                  <a:srgbClr val="2E86AB"/>
-                </a:solidFill>
-                <a:latin typeface="Source Sans Pro"/>
-              </a:defRPr>
-            </a:pPr>
-            <a:r>
-              <a:t>TechForward Live</a:t>
-            </a:r>
-          </a:p>
-        </p:txBody>
-      </p:sp>
-      <p:sp>
-        <p:nvSpPr>
-          <p:cNvPr id="18" name="TextBox 17"/>
-          <p:cNvSpPr txBox="1"/>
-          <p:nvPr/>
-        </p:nvSpPr>
-        <p:spPr>
-          <a:xfrm>
-            <a:off x="4572000" y="5657850"/>
-            <a:ext cx="4114800" cy="742950"/>
-          </a:xfrm>
-          <a:prstGeom prst="rect">
-            <a:avLst/>
-          </a:prstGeom>
-          <a:noFill/>
-        </p:spPr>
-        <p:txBody>
-          <a:bodyPr wrap="none">
-            <a:spAutoFit/>
-          </a:bodyPr>
-          <a:lstStyle/>
-          <a:p>
-            <a:pPr algn="r">
-              <a:defRPr sz="1000" b="0">
-                <a:solidFill>
-                  <a:srgbClr val="2E86AB"/>
-                </a:solidFill>
-                <a:latin typeface="Source Sans Pro"/>
-              </a:defRPr>
-            </a:pPr>
-            <a:r>
-              <a:t>3</a:t>
+              <a:t>Our mission is to serve Progressive businesses seeking digital transformation and innovation with excellence and innovation.</a:t>
             </a:r>
           </a:p>
         </p:txBody>
@@ -5547,59 +5807,24 @@
 <file path=ppt/slides/slide4.xml><?xml version="1.0" encoding="utf-8"?>
 <p:sld xmlns:a="http://schemas.openxmlformats.org/drawingml/2006/main" xmlns:p="http://schemas.openxmlformats.org/presentationml/2006/main" xmlns:r="http://schemas.openxmlformats.org/officeDocument/2006/relationships">
   <p:cSld>
+    <p:bg>
+      <p:bgPr>
+        <a:solidFill>
+          <a:srgbClr val="000000"/>
+        </a:solidFill>
+        <a:effectLst/>
+      </p:bgPr>
+    </p:bg>
     <p:spTree>
       <p:nvGrpSpPr>
         <p:cNvPr id="1" name=""/>
         <p:cNvGrpSpPr/>
         <p:nvPr/>
       </p:nvGrpSpPr>
-      <p:sp>
-        <p:nvSpPr>
-          <p:cNvPr id="2" name="Rectangle 1"/>
-          <p:cNvSpPr/>
-          <p:nvPr/>
-        </p:nvSpPr>
-        <p:spPr>
-          <a:xfrm>
-            <a:off x="0" y="0"/>
-            <a:ext cx="9144000" cy="6858000"/>
-          </a:xfrm>
-          <a:prstGeom prst="rect">
-            <a:avLst/>
-          </a:prstGeom>
-          <a:solidFill>
-            <a:srgbClr val="1A1A1A"/>
-          </a:solidFill>
-          <a:ln>
-            <a:noFill/>
-          </a:ln>
-        </p:spPr>
-        <p:style>
-          <a:lnRef idx="1">
-            <a:schemeClr val="accent1"/>
-          </a:lnRef>
-          <a:fillRef idx="3">
-            <a:schemeClr val="accent1"/>
-          </a:fillRef>
-          <a:effectRef idx="2">
-            <a:schemeClr val="accent1"/>
-          </a:effectRef>
-          <a:fontRef idx="minor">
-            <a:schemeClr val="lt1"/>
-          </a:fontRef>
-        </p:style>
-        <p:txBody>
-          <a:bodyPr rtlCol="0" anchor="ctr"/>
-          <a:lstStyle/>
-          <a:p>
-            <a:pPr algn="ctr"/>
-          </a:p>
-        </p:txBody>
-      </p:sp>
       <p:grpSpPr/>
       <p:sp>
         <p:nvSpPr>
-          <p:cNvPr id="3" name="TextBox 2"/>
+          <p:cNvPr id="2" name="TextBox 1"/>
           <p:cNvSpPr txBox="1"/>
           <p:nvPr/>
         </p:nvSpPr>
@@ -5619,7 +5844,7 @@
           </a:bodyPr>
           <a:lstStyle/>
           <a:p>
-            <a:pPr>
+            <a:pPr algn="ctr">
               <a:defRPr sz="3200" b="1">
                 <a:solidFill>
                   <a:srgbClr val="2E86AB"/>
@@ -5628,21 +5853,21 @@
               </a:defRPr>
             </a:pPr>
             <a:r>
-              <a:t>Market Analysis &amp; Insights</a:t>
-            </a:r>
-          </a:p>
-        </p:txBody>
-      </p:sp>
-      <p:sp>
-        <p:nvSpPr>
-          <p:cNvPr id="4" name="TextBox 3"/>
+              <a:t>Brand Purpose</a:t>
+            </a:r>
+          </a:p>
+        </p:txBody>
+      </p:sp>
+      <p:sp>
+        <p:nvSpPr>
+          <p:cNvPr id="3" name="TextBox 2"/>
           <p:cNvSpPr txBox="1"/>
           <p:nvPr/>
         </p:nvSpPr>
         <p:spPr>
           <a:xfrm>
-            <a:off x="1143000" y="1943100"/>
-            <a:ext cx="2743200" cy="1485900"/>
+            <a:off x="1828800" y="1943100"/>
+            <a:ext cx="5486400" cy="3714750"/>
           </a:xfrm>
           <a:prstGeom prst="rect">
             <a:avLst/>
@@ -5655,356 +5880,174 @@
           </a:bodyPr>
           <a:lstStyle/>
           <a:p>
-            <a:pPr>
-              <a:defRPr sz="1800" b="0">
-                <a:solidFill>
-                  <a:srgbClr val="2E86AB"/>
-                </a:solidFill>
-                <a:latin typeface="Source Sans Pro"/>
-              </a:defRPr>
-            </a:pPr>
-            <a:r>
-              <a:t>Industry Trends:</a:t>
-            </a:r>
-          </a:p>
-          <a:p>
-            <a:pPr>
-              <a:defRPr sz="1400" b="0">
-                <a:solidFill>
-                  <a:srgbClr val="2E86AB"/>
-                </a:solidFill>
-                <a:latin typeface="Source Sans Pro"/>
-              </a:defRPr>
-            </a:pPr>
-            <a:r>
-              <a:t>• AI-driven automation solutions</a:t>
-            </a:r>
-          </a:p>
-          <a:p>
-            <a:pPr>
-              <a:defRPr sz="1400" b="0">
-                <a:solidFill>
-                  <a:srgbClr val="2E86AB"/>
-                </a:solidFill>
-                <a:latin typeface="Source Sans Pro"/>
-              </a:defRPr>
-            </a:pPr>
-            <a:r>
-              <a:t>• Human-centered design principles</a:t>
-            </a:r>
-          </a:p>
-          <a:p>
-            <a:pPr>
-              <a:defRPr sz="1400" b="0">
-                <a:solidFill>
-                  <a:srgbClr val="2E86AB"/>
-                </a:solidFill>
-                <a:latin typeface="Source Sans Pro"/>
-              </a:defRPr>
-            </a:pPr>
-            <a:r>
-              <a:t>• Low-code/no-code platforms</a:t>
-            </a:r>
-          </a:p>
-          <a:p>
-            <a:pPr>
-              <a:defRPr sz="1400" b="0">
-                <a:solidFill>
-                  <a:srgbClr val="2E86AB"/>
-                </a:solidFill>
-                <a:latin typeface="Source Sans Pro"/>
-              </a:defRPr>
-            </a:pPr>
-            <a:r>
-              <a:t>• Remote collaboration tools</a:t>
-            </a:r>
-          </a:p>
-          <a:p>
-            <a:pPr>
-              <a:defRPr sz="1400" b="0">
-                <a:solidFill>
-                  <a:srgbClr val="2E86AB"/>
-                </a:solidFill>
-                <a:latin typeface="Source Sans Pro"/>
-              </a:defRPr>
-            </a:pPr>
-            <a:r>
-              <a:t>• Sustainable technology practices</a:t>
-            </a:r>
-          </a:p>
-        </p:txBody>
-      </p:sp>
-      <p:sp>
-        <p:nvSpPr>
-          <p:cNvPr id="5" name="TextBox 4"/>
-          <p:cNvSpPr txBox="1"/>
-          <p:nvPr/>
-        </p:nvSpPr>
-        <p:spPr>
-          <a:xfrm>
-            <a:off x="3886200" y="1943100"/>
-            <a:ext cx="2743200" cy="1485900"/>
-          </a:xfrm>
-          <a:prstGeom prst="rect">
-            <a:avLst/>
-          </a:prstGeom>
-          <a:noFill/>
-        </p:spPr>
-        <p:txBody>
-          <a:bodyPr wrap="square">
-            <a:spAutoFit/>
-          </a:bodyPr>
-          <a:lstStyle/>
-          <a:p>
-            <a:pPr>
-              <a:defRPr sz="1800" b="0">
-                <a:solidFill>
-                  <a:srgbClr val="2E86AB"/>
-                </a:solidFill>
-                <a:latin typeface="Source Sans Pro"/>
-              </a:defRPr>
-            </a:pPr>
-            <a:r>
-              <a:t>Key Competitors:</a:t>
-            </a:r>
-          </a:p>
-          <a:p>
-            <a:pPr>
-              <a:defRPr sz="1400" b="0">
-                <a:solidFill>
-                  <a:srgbClr val="2E86AB"/>
-                </a:solidFill>
-                <a:latin typeface="Source Sans Pro"/>
-              </a:defRPr>
-            </a:pPr>
-            <a:r>
-              <a:t>• Microsoft</a:t>
-            </a:r>
-          </a:p>
-          <a:p>
-            <a:pPr>
-              <a:defRPr sz="1400" b="0">
-                <a:solidFill>
-                  <a:srgbClr val="2E86AB"/>
-                </a:solidFill>
-                <a:latin typeface="Source Sans Pro"/>
-              </a:defRPr>
-            </a:pPr>
-            <a:r>
-              <a:t>• Google Workspace</a:t>
-            </a:r>
-          </a:p>
-          <a:p>
-            <a:pPr>
-              <a:defRPr sz="1400" b="0">
-                <a:solidFill>
-                  <a:srgbClr val="2E86AB"/>
-                </a:solidFill>
-                <a:latin typeface="Source Sans Pro"/>
-              </a:defRPr>
-            </a:pPr>
-            <a:r>
-              <a:t>• Salesforce</a:t>
-            </a:r>
-          </a:p>
-          <a:p>
-            <a:pPr>
-              <a:defRPr sz="1400" b="0">
-                <a:solidFill>
-                  <a:srgbClr val="2E86AB"/>
-                </a:solidFill>
-                <a:latin typeface="Source Sans Pro"/>
-              </a:defRPr>
-            </a:pPr>
-            <a:r>
-              <a:t>• Adobe</a:t>
-            </a:r>
-          </a:p>
-          <a:p>
-            <a:pPr>
-              <a:defRPr sz="1400" b="0">
-                <a:solidFill>
-                  <a:srgbClr val="2E86AB"/>
-                </a:solidFill>
-                <a:latin typeface="Source Sans Pro"/>
-              </a:defRPr>
-            </a:pPr>
-            <a:r>
-              <a:t>• Figma</a:t>
-            </a:r>
-          </a:p>
-          <a:p>
-            <a:pPr>
-              <a:defRPr sz="1400" b="0">
-                <a:solidFill>
-                  <a:srgbClr val="2E86AB"/>
-                </a:solidFill>
-                <a:latin typeface="Source Sans Pro"/>
-              </a:defRPr>
-            </a:pPr>
-            <a:r>
-              <a:t>• Notion</a:t>
-            </a:r>
-          </a:p>
-        </p:txBody>
-      </p:sp>
-      <p:sp>
-        <p:nvSpPr>
-          <p:cNvPr id="6" name="TextBox 5"/>
-          <p:cNvSpPr txBox="1"/>
-          <p:nvPr/>
-        </p:nvSpPr>
-        <p:spPr>
-          <a:xfrm>
-            <a:off x="6629400" y="1943100"/>
-            <a:ext cx="2057400" cy="1485900"/>
-          </a:xfrm>
-          <a:prstGeom prst="rect">
-            <a:avLst/>
-          </a:prstGeom>
-          <a:noFill/>
-        </p:spPr>
-        <p:txBody>
-          <a:bodyPr wrap="square">
-            <a:spAutoFit/>
-          </a:bodyPr>
-          <a:lstStyle/>
-          <a:p>
-            <a:pPr>
-              <a:defRPr sz="1800" b="0">
-                <a:solidFill>
-                  <a:srgbClr val="2E86AB"/>
-                </a:solidFill>
-                <a:latin typeface="Source Sans Pro"/>
-              </a:defRPr>
-            </a:pPr>
-            <a:r>
-              <a:t>Design Styles:</a:t>
-            </a:r>
-          </a:p>
-          <a:p>
-            <a:pPr>
-              <a:defRPr sz="1400" b="0">
-                <a:solidFill>
-                  <a:srgbClr val="2E86AB"/>
-                </a:solidFill>
-                <a:latin typeface="Source Sans Pro"/>
-              </a:defRPr>
-            </a:pPr>
-            <a:r>
-              <a:t>• Minimalist interfaces</a:t>
-            </a:r>
-          </a:p>
-          <a:p>
-            <a:pPr>
-              <a:defRPr sz="1400" b="0">
-                <a:solidFill>
-                  <a:srgbClr val="2E86AB"/>
-                </a:solidFill>
-                <a:latin typeface="Source Sans Pro"/>
-              </a:defRPr>
-            </a:pPr>
-            <a:r>
-              <a:t>• Bold typography</a:t>
-            </a:r>
-          </a:p>
-          <a:p>
-            <a:pPr>
-              <a:defRPr sz="1400" b="0">
-                <a:solidFill>
-                  <a:srgbClr val="2E86AB"/>
-                </a:solidFill>
-                <a:latin typeface="Source Sans Pro"/>
-              </a:defRPr>
-            </a:pPr>
-            <a:r>
-              <a:t>• Gradient backgrounds</a:t>
-            </a:r>
-          </a:p>
-          <a:p>
-            <a:pPr>
-              <a:defRPr sz="1400" b="0">
-                <a:solidFill>
-                  <a:srgbClr val="2E86AB"/>
-                </a:solidFill>
-                <a:latin typeface="Source Sans Pro"/>
-              </a:defRPr>
-            </a:pPr>
-            <a:r>
-              <a:t>• Micro-interactions</a:t>
-            </a:r>
-          </a:p>
-        </p:txBody>
-      </p:sp>
-      <p:sp>
-        <p:nvSpPr>
-          <p:cNvPr id="7" name="TextBox 6"/>
-          <p:cNvSpPr txBox="1"/>
-          <p:nvPr/>
-        </p:nvSpPr>
-        <p:spPr>
-          <a:xfrm>
-            <a:off x="457200" y="5657850"/>
-            <a:ext cx="4114800" cy="742950"/>
-          </a:xfrm>
-          <a:prstGeom prst="rect">
-            <a:avLst/>
-          </a:prstGeom>
-          <a:noFill/>
-        </p:spPr>
-        <p:txBody>
-          <a:bodyPr wrap="none">
-            <a:spAutoFit/>
-          </a:bodyPr>
-          <a:lstStyle/>
-          <a:p>
-            <a:pPr algn="l">
-              <a:defRPr sz="1000" b="0">
-                <a:solidFill>
-                  <a:srgbClr val="2E86AB"/>
-                </a:solidFill>
-                <a:latin typeface="Source Sans Pro"/>
-              </a:defRPr>
-            </a:pPr>
-            <a:r>
-              <a:t>TechForward Live</a:t>
-            </a:r>
-          </a:p>
-        </p:txBody>
-      </p:sp>
-      <p:sp>
-        <p:nvSpPr>
-          <p:cNvPr id="8" name="TextBox 7"/>
-          <p:cNvSpPr txBox="1"/>
-          <p:nvPr/>
-        </p:nvSpPr>
-        <p:spPr>
-          <a:xfrm>
-            <a:off x="4572000" y="5657850"/>
-            <a:ext cx="4114800" cy="742950"/>
-          </a:xfrm>
-          <a:prstGeom prst="rect">
-            <a:avLst/>
-          </a:prstGeom>
-          <a:noFill/>
-        </p:spPr>
-        <p:txBody>
-          <a:bodyPr wrap="none">
-            <a:spAutoFit/>
-          </a:bodyPr>
-          <a:lstStyle/>
-          <a:p>
-            <a:pPr algn="r">
-              <a:defRPr sz="1000" b="0">
-                <a:solidFill>
-                  <a:srgbClr val="2E86AB"/>
-                </a:solidFill>
-                <a:latin typeface="Source Sans Pro"/>
-              </a:defRPr>
-            </a:pPr>
-            <a:r>
-              <a:t>4</a:t>
-            </a:r>
+            <a:pPr algn="ctr">
+              <a:defRPr sz="2400" b="0">
+                <a:solidFill>
+                  <a:srgbClr val="2E86AB"/>
+                </a:solidFill>
+                <a:latin typeface="Source Sans Pro"/>
+              </a:defRPr>
+            </a:pPr>
+            <a:r>
+              <a:t>Our Purpose</a:t>
+            </a:r>
+          </a:p>
+          <a:p>
+            <a:pPr>
+              <a:defRPr sz="1600" b="0">
+                <a:solidFill>
+                  <a:srgbClr val="FFFFFF"/>
+                </a:solidFill>
+                <a:latin typeface="Source Sans Pro"/>
+              </a:defRPr>
+            </a:pPr>
+          </a:p>
+          <a:p>
+            <a:pPr>
+              <a:defRPr sz="1600" b="0">
+                <a:solidFill>
+                  <a:srgbClr val="FFFFFF"/>
+                </a:solidFill>
+                <a:latin typeface="Source Sans Pro"/>
+              </a:defRPr>
+            </a:pPr>
+            <a:r>
+              <a:t>Vision: We bridge the gap between complex technology and intuitive user experiences through human-centered design</a:t>
+            </a:r>
+          </a:p>
+          <a:p>
+            <a:pPr>
+              <a:defRPr sz="1600" b="0">
+                <a:solidFill>
+                  <a:srgbClr val="FFFFFF"/>
+                </a:solidFill>
+                <a:latin typeface="Source Sans Pro"/>
+              </a:defRPr>
+            </a:pPr>
+          </a:p>
+          <a:p>
+            <a:pPr>
+              <a:defRPr sz="1600" b="0">
+                <a:solidFill>
+                  <a:srgbClr val="FFFFFF"/>
+                </a:solidFill>
+                <a:latin typeface="Source Sans Pro"/>
+              </a:defRPr>
+            </a:pPr>
+            <a:r>
+              <a:t>Mission: Technology that enhances human potential without adding complexity to your workflow</a:t>
+            </a:r>
+          </a:p>
+          <a:p>
+            <a:pPr>
+              <a:defRPr sz="1600" b="0">
+                <a:solidFill>
+                  <a:srgbClr val="FFFFFF"/>
+                </a:solidFill>
+                <a:latin typeface="Source Sans Pro"/>
+              </a:defRPr>
+            </a:pPr>
+          </a:p>
+          <a:p>
+            <a:pPr>
+              <a:defRPr sz="1600" b="0">
+                <a:solidFill>
+                  <a:srgbClr val="FFFFFF"/>
+                </a:solidFill>
+                <a:latin typeface="Source Sans Pro"/>
+              </a:defRPr>
+            </a:pPr>
+            <a:r>
+              <a:t>Core Values:</a:t>
+            </a:r>
+          </a:p>
+          <a:p>
+            <a:pPr>
+              <a:defRPr sz="1600" b="0">
+                <a:solidFill>
+                  <a:srgbClr val="FFFFFF"/>
+                </a:solidFill>
+                <a:latin typeface="Source Sans Pro"/>
+              </a:defRPr>
+            </a:pPr>
+            <a:r>
+              <a:t>• Innovation</a:t>
+            </a:r>
+          </a:p>
+          <a:p>
+            <a:pPr>
+              <a:defRPr sz="1600" b="0">
+                <a:solidFill>
+                  <a:srgbClr val="FFFFFF"/>
+                </a:solidFill>
+                <a:latin typeface="Source Sans Pro"/>
+              </a:defRPr>
+            </a:pPr>
+            <a:r>
+              <a:t>• Simplicity</a:t>
+            </a:r>
+          </a:p>
+          <a:p>
+            <a:pPr>
+              <a:defRPr sz="1600" b="0">
+                <a:solidFill>
+                  <a:srgbClr val="FFFFFF"/>
+                </a:solidFill>
+                <a:latin typeface="Source Sans Pro"/>
+              </a:defRPr>
+            </a:pPr>
+            <a:r>
+              <a:t>• Human-Centered</a:t>
+            </a:r>
+          </a:p>
+          <a:p>
+            <a:pPr>
+              <a:defRPr sz="1600" b="0">
+                <a:solidFill>
+                  <a:srgbClr val="FFFFFF"/>
+                </a:solidFill>
+                <a:latin typeface="Source Sans Pro"/>
+              </a:defRPr>
+            </a:pPr>
+            <a:r>
+              <a:t>• Excellence</a:t>
+            </a:r>
+          </a:p>
+          <a:p>
+            <a:pPr>
+              <a:defRPr sz="1600" b="0">
+                <a:solidFill>
+                  <a:srgbClr val="FFFFFF"/>
+                </a:solidFill>
+                <a:latin typeface="Source Sans Pro"/>
+              </a:defRPr>
+            </a:pPr>
+            <a:r>
+              <a:t>• Trust</a:t>
+            </a:r>
+          </a:p>
+          <a:p>
+            <a:pPr>
+              <a:defRPr sz="1600" b="0">
+                <a:solidFill>
+                  <a:srgbClr val="FFFFFF"/>
+                </a:solidFill>
+                <a:latin typeface="Source Sans Pro"/>
+              </a:defRPr>
+            </a:pPr>
+            <a:r>
+              <a:t>• Reliability</a:t>
+            </a:r>
+          </a:p>
+          <a:p>
+            <a:pPr>
+              <a:defRPr sz="1600" b="0">
+                <a:solidFill>
+                  <a:srgbClr val="FFFFFF"/>
+                </a:solidFill>
+                <a:latin typeface="Source Sans Pro"/>
+              </a:defRPr>
+            </a:pPr>
           </a:p>
         </p:txBody>
       </p:sp>
@@ -6100,7 +6143,7 @@
               </a:defRPr>
             </a:pPr>
             <a:r>
-              <a:t>Brand Positioning</a:t>
+              <a:t>Company Profile</a:t>
             </a:r>
           </a:p>
         </p:txBody>
@@ -6114,7 +6157,7 @@
         <p:spPr>
           <a:xfrm>
             <a:off x="1143000" y="1943100"/>
-            <a:ext cx="4114800" cy="1485900"/>
+            <a:ext cx="3429000" cy="2971800"/>
           </a:xfrm>
           <a:prstGeom prst="rect">
             <a:avLst/>
@@ -6136,45 +6179,9 @@
               </a:defRPr>
             </a:pPr>
             <a:r>
-              <a:t>Unique Value Proposition:</a:t>
-            </a:r>
-          </a:p>
-          <a:p>
-            <a:pPr>
-              <a:defRPr sz="1400" b="0">
-                <a:solidFill>
-                  <a:srgbClr val="2E86AB"/>
-                </a:solidFill>
-                <a:latin typeface="Source Sans Pro"/>
-              </a:defRPr>
-            </a:pPr>
-            <a:r>
-              <a:t>We bridge the gap between complex technology and intuitive user experiences through human-centered design</a:t>
-            </a:r>
-          </a:p>
-        </p:txBody>
-      </p:sp>
-      <p:sp>
-        <p:nvSpPr>
-          <p:cNvPr id="5" name="TextBox 4"/>
-          <p:cNvSpPr txBox="1"/>
-          <p:nvPr/>
-        </p:nvSpPr>
-        <p:spPr>
-          <a:xfrm>
-            <a:off x="5257800" y="1943100"/>
-            <a:ext cx="3429000" cy="1485900"/>
-          </a:xfrm>
-          <a:prstGeom prst="rect">
-            <a:avLst/>
-          </a:prstGeom>
-          <a:noFill/>
-        </p:spPr>
-        <p:txBody>
-          <a:bodyPr wrap="square">
-            <a:spAutoFit/>
-          </a:bodyPr>
-          <a:lstStyle/>
+              <a:t>Company: TechForward Inc</a:t>
+            </a:r>
+          </a:p>
           <a:p>
             <a:pPr>
               <a:defRPr sz="1600" b="0">
@@ -6184,34 +6191,54 @@
                 <a:latin typeface="Source Sans Pro"/>
               </a:defRPr>
             </a:pPr>
-            <a:r>
-              <a:t>Brand Promise:</a:t>
-            </a:r>
-          </a:p>
-          <a:p>
-            <a:pPr>
-              <a:defRPr sz="1400" b="0">
-                <a:solidFill>
-                  <a:srgbClr val="2E86AB"/>
-                </a:solidFill>
-                <a:latin typeface="Source Sans Pro"/>
-              </a:defRPr>
-            </a:pPr>
-            <a:r>
-              <a:t>Technology that enhances human potential without adding complexity to your workflow</a:t>
-            </a:r>
-          </a:p>
-        </p:txBody>
-      </p:sp>
-      <p:sp>
-        <p:nvSpPr>
-          <p:cNvPr id="6" name="Rounded Rectangle 5"/>
+          </a:p>
+          <a:p>
+            <a:pPr>
+              <a:defRPr sz="1600" b="0">
+                <a:solidFill>
+                  <a:srgbClr val="2E86AB"/>
+                </a:solidFill>
+                <a:latin typeface="Source Sans Pro"/>
+              </a:defRPr>
+            </a:pPr>
+            <a:r>
+              <a:t>Industry: Technology &amp; Digital Solutions</a:t>
+            </a:r>
+          </a:p>
+          <a:p>
+            <a:pPr>
+              <a:defRPr sz="1600" b="0">
+                <a:solidFill>
+                  <a:srgbClr val="2E86AB"/>
+                </a:solidFill>
+                <a:latin typeface="Source Sans Pro"/>
+              </a:defRPr>
+            </a:pPr>
+          </a:p>
+          <a:p>
+            <a:pPr>
+              <a:defRPr sz="1600" b="0">
+                <a:solidFill>
+                  <a:srgbClr val="2E86AB"/>
+                </a:solidFill>
+                <a:latin typeface="Source Sans Pro"/>
+              </a:defRPr>
+            </a:pPr>
+            <a:r>
+              <a:t>Target Audience: Progressive businesses seeking digital transformation and innovation</a:t>
+            </a:r>
+          </a:p>
+        </p:txBody>
+      </p:sp>
+      <p:sp>
+        <p:nvSpPr>
+          <p:cNvPr id="5" name="Rounded Rectangle 4"/>
           <p:cNvSpPr/>
           <p:nvPr/>
         </p:nvSpPr>
         <p:spPr>
           <a:xfrm>
-            <a:off x="1143000" y="3520440"/>
+            <a:off x="5257800" y="2034540"/>
             <a:ext cx="1280160" cy="560070"/>
           </a:xfrm>
           <a:prstGeom prst="roundRect">
@@ -6220,10 +6247,8 @@
           <a:solidFill>
             <a:srgbClr val="F18F01"/>
           </a:solidFill>
-          <a:ln w="12700">
-            <a:solidFill>
-              <a:srgbClr val="F18F01"/>
-            </a:solidFill>
+          <a:ln>
+            <a:noFill/>
           </a:ln>
         </p:spPr>
         <p:style>
@@ -6250,13 +6275,13 @@
       </p:sp>
       <p:sp>
         <p:nvSpPr>
-          <p:cNvPr id="7" name="TextBox 6"/>
+          <p:cNvPr id="6" name="TextBox 5"/>
           <p:cNvSpPr txBox="1"/>
           <p:nvPr/>
         </p:nvSpPr>
         <p:spPr>
           <a:xfrm>
-            <a:off x="1143000" y="3429000"/>
+            <a:off x="5257800" y="1943100"/>
             <a:ext cx="1371600" cy="742950"/>
           </a:xfrm>
           <a:prstGeom prst="rect">
@@ -6271,40 +6296,38 @@
           <a:lstStyle/>
           <a:p>
             <a:pPr algn="ctr">
-              <a:defRPr sz="1200" b="0">
-                <a:solidFill>
-                  <a:srgbClr val="2E86AB"/>
-                </a:solidFill>
-                <a:latin typeface="Source Sans Pro"/>
-              </a:defRPr>
-            </a:pPr>
-            <a:r>
-              <a:t>Innovative</a:t>
-            </a:r>
-          </a:p>
-        </p:txBody>
-      </p:sp>
-      <p:sp>
-        <p:nvSpPr>
-          <p:cNvPr id="8" name="Rounded Rectangle 7"/>
+              <a:defRPr sz="1400" b="0">
+                <a:solidFill>
+                  <a:srgbClr val="FFFFFF"/>
+                </a:solidFill>
+                <a:latin typeface="Source Sans Pro"/>
+              </a:defRPr>
+            </a:pPr>
+            <a:r>
+              <a:t>Innovation</a:t>
+            </a:r>
+          </a:p>
+        </p:txBody>
+      </p:sp>
+      <p:sp>
+        <p:nvSpPr>
+          <p:cNvPr id="7" name="Rounded Rectangle 6"/>
           <p:cNvSpPr/>
           <p:nvPr/>
         </p:nvSpPr>
         <p:spPr>
           <a:xfrm>
-            <a:off x="2514600" y="3520440"/>
+            <a:off x="6629400" y="2034540"/>
             <a:ext cx="1280160" cy="560070"/>
           </a:xfrm>
           <a:prstGeom prst="roundRect">
             <a:avLst/>
           </a:prstGeom>
           <a:solidFill>
-            <a:srgbClr val="F18F01"/>
+            <a:srgbClr val="A23B72"/>
           </a:solidFill>
-          <a:ln w="12700">
-            <a:solidFill>
-              <a:srgbClr val="F18F01"/>
-            </a:solidFill>
+          <a:ln>
+            <a:noFill/>
           </a:ln>
         </p:spPr>
         <p:style>
@@ -6331,13 +6354,13 @@
       </p:sp>
       <p:sp>
         <p:nvSpPr>
-          <p:cNvPr id="9" name="TextBox 8"/>
+          <p:cNvPr id="8" name="TextBox 7"/>
           <p:cNvSpPr txBox="1"/>
           <p:nvPr/>
         </p:nvSpPr>
         <p:spPr>
           <a:xfrm>
-            <a:off x="2514600" y="3429000"/>
+            <a:off x="6629400" y="1943100"/>
             <a:ext cx="1371600" cy="742950"/>
           </a:xfrm>
           <a:prstGeom prst="rect">
@@ -6352,28 +6375,28 @@
           <a:lstStyle/>
           <a:p>
             <a:pPr algn="ctr">
-              <a:defRPr sz="1200" b="0">
-                <a:solidFill>
-                  <a:srgbClr val="2E86AB"/>
-                </a:solidFill>
-                <a:latin typeface="Source Sans Pro"/>
-              </a:defRPr>
-            </a:pPr>
-            <a:r>
-              <a:t>Reliable</a:t>
-            </a:r>
-          </a:p>
-        </p:txBody>
-      </p:sp>
-      <p:sp>
-        <p:nvSpPr>
-          <p:cNvPr id="10" name="Rounded Rectangle 9"/>
+              <a:defRPr sz="1400" b="0">
+                <a:solidFill>
+                  <a:srgbClr val="FFFFFF"/>
+                </a:solidFill>
+                <a:latin typeface="Source Sans Pro"/>
+              </a:defRPr>
+            </a:pPr>
+            <a:r>
+              <a:t>Simplicity</a:t>
+            </a:r>
+          </a:p>
+        </p:txBody>
+      </p:sp>
+      <p:sp>
+        <p:nvSpPr>
+          <p:cNvPr id="9" name="Rounded Rectangle 8"/>
           <p:cNvSpPr/>
           <p:nvPr/>
         </p:nvSpPr>
         <p:spPr>
           <a:xfrm>
-            <a:off x="3886200" y="3520440"/>
+            <a:off x="5257800" y="2777490"/>
             <a:ext cx="1280160" cy="560070"/>
           </a:xfrm>
           <a:prstGeom prst="roundRect">
@@ -6382,10 +6405,8 @@
           <a:solidFill>
             <a:srgbClr val="F18F01"/>
           </a:solidFill>
-          <a:ln w="12700">
-            <a:solidFill>
-              <a:srgbClr val="F18F01"/>
-            </a:solidFill>
+          <a:ln>
+            <a:noFill/>
           </a:ln>
         </p:spPr>
         <p:style>
@@ -6412,13 +6433,13 @@
       </p:sp>
       <p:sp>
         <p:nvSpPr>
-          <p:cNvPr id="11" name="TextBox 10"/>
+          <p:cNvPr id="10" name="TextBox 9"/>
           <p:cNvSpPr txBox="1"/>
           <p:nvPr/>
         </p:nvSpPr>
         <p:spPr>
           <a:xfrm>
-            <a:off x="3886200" y="3429000"/>
+            <a:off x="5257800" y="2686050"/>
             <a:ext cx="1371600" cy="742950"/>
           </a:xfrm>
           <a:prstGeom prst="rect">
@@ -6433,40 +6454,38 @@
           <a:lstStyle/>
           <a:p>
             <a:pPr algn="ctr">
-              <a:defRPr sz="1200" b="0">
-                <a:solidFill>
-                  <a:srgbClr val="2E86AB"/>
-                </a:solidFill>
-                <a:latin typeface="Source Sans Pro"/>
-              </a:defRPr>
-            </a:pPr>
-            <a:r>
-              <a:t>Approachable</a:t>
-            </a:r>
-          </a:p>
-        </p:txBody>
-      </p:sp>
-      <p:sp>
-        <p:nvSpPr>
-          <p:cNvPr id="12" name="Rounded Rectangle 11"/>
+              <a:defRPr sz="1400" b="0">
+                <a:solidFill>
+                  <a:srgbClr val="FFFFFF"/>
+                </a:solidFill>
+                <a:latin typeface="Source Sans Pro"/>
+              </a:defRPr>
+            </a:pPr>
+            <a:r>
+              <a:t>Human-Centered</a:t>
+            </a:r>
+          </a:p>
+        </p:txBody>
+      </p:sp>
+      <p:sp>
+        <p:nvSpPr>
+          <p:cNvPr id="11" name="Rounded Rectangle 10"/>
           <p:cNvSpPr/>
           <p:nvPr/>
         </p:nvSpPr>
         <p:spPr>
           <a:xfrm>
-            <a:off x="5257800" y="3520440"/>
+            <a:off x="6629400" y="2777490"/>
             <a:ext cx="1280160" cy="560070"/>
           </a:xfrm>
           <a:prstGeom prst="roundRect">
             <a:avLst/>
           </a:prstGeom>
           <a:solidFill>
-            <a:srgbClr val="F18F01"/>
+            <a:srgbClr val="A23B72"/>
           </a:solidFill>
-          <a:ln w="12700">
-            <a:solidFill>
-              <a:srgbClr val="F18F01"/>
-            </a:solidFill>
+          <a:ln>
+            <a:noFill/>
           </a:ln>
         </p:spPr>
         <p:style>
@@ -6493,13 +6512,13 @@
       </p:sp>
       <p:sp>
         <p:nvSpPr>
-          <p:cNvPr id="13" name="TextBox 12"/>
+          <p:cNvPr id="12" name="TextBox 11"/>
           <p:cNvSpPr txBox="1"/>
           <p:nvPr/>
         </p:nvSpPr>
         <p:spPr>
           <a:xfrm>
-            <a:off x="5257800" y="3429000"/>
+            <a:off x="6629400" y="2686050"/>
             <a:ext cx="1371600" cy="742950"/>
           </a:xfrm>
           <a:prstGeom prst="rect">
@@ -6514,28 +6533,28 @@
           <a:lstStyle/>
           <a:p>
             <a:pPr algn="ctr">
-              <a:defRPr sz="1200" b="0">
-                <a:solidFill>
-                  <a:srgbClr val="2E86AB"/>
-                </a:solidFill>
-                <a:latin typeface="Source Sans Pro"/>
-              </a:defRPr>
-            </a:pPr>
-            <a:r>
-              <a:t>Progressive</a:t>
-            </a:r>
-          </a:p>
-        </p:txBody>
-      </p:sp>
-      <p:sp>
-        <p:nvSpPr>
-          <p:cNvPr id="14" name="Rounded Rectangle 13"/>
+              <a:defRPr sz="1400" b="0">
+                <a:solidFill>
+                  <a:srgbClr val="FFFFFF"/>
+                </a:solidFill>
+                <a:latin typeface="Source Sans Pro"/>
+              </a:defRPr>
+            </a:pPr>
+            <a:r>
+              <a:t>Excellence</a:t>
+            </a:r>
+          </a:p>
+        </p:txBody>
+      </p:sp>
+      <p:sp>
+        <p:nvSpPr>
+          <p:cNvPr id="13" name="Rounded Rectangle 12"/>
           <p:cNvSpPr/>
           <p:nvPr/>
         </p:nvSpPr>
         <p:spPr>
           <a:xfrm>
-            <a:off x="6629400" y="3520440"/>
+            <a:off x="5257800" y="3520440"/>
             <a:ext cx="1280160" cy="560070"/>
           </a:xfrm>
           <a:prstGeom prst="roundRect">
@@ -6544,10 +6563,8 @@
           <a:solidFill>
             <a:srgbClr val="F18F01"/>
           </a:solidFill>
-          <a:ln w="12700">
-            <a:solidFill>
-              <a:srgbClr val="F18F01"/>
-            </a:solidFill>
+          <a:ln>
+            <a:noFill/>
           </a:ln>
         </p:spPr>
         <p:style>
@@ -6574,13 +6591,13 @@
       </p:sp>
       <p:sp>
         <p:nvSpPr>
-          <p:cNvPr id="15" name="TextBox 14"/>
+          <p:cNvPr id="14" name="TextBox 13"/>
           <p:cNvSpPr txBox="1"/>
           <p:nvPr/>
         </p:nvSpPr>
         <p:spPr>
           <a:xfrm>
-            <a:off x="6629400" y="3429000"/>
+            <a:off x="5257800" y="3429000"/>
             <a:ext cx="1371600" cy="742950"/>
           </a:xfrm>
           <a:prstGeom prst="rect">
@@ -6595,16 +6612,59 @@
           <a:lstStyle/>
           <a:p>
             <a:pPr algn="ctr">
-              <a:defRPr sz="1200" b="0">
-                <a:solidFill>
-                  <a:srgbClr val="2E86AB"/>
-                </a:solidFill>
-                <a:latin typeface="Source Sans Pro"/>
-              </a:defRPr>
-            </a:pPr>
-            <a:r>
-              <a:t>Trustworthy</a:t>
-            </a:r>
+              <a:defRPr sz="1400" b="0">
+                <a:solidFill>
+                  <a:srgbClr val="FFFFFF"/>
+                </a:solidFill>
+                <a:latin typeface="Source Sans Pro"/>
+              </a:defRPr>
+            </a:pPr>
+            <a:r>
+              <a:t>Trust</a:t>
+            </a:r>
+          </a:p>
+        </p:txBody>
+      </p:sp>
+      <p:sp>
+        <p:nvSpPr>
+          <p:cNvPr id="15" name="Rounded Rectangle 14"/>
+          <p:cNvSpPr/>
+          <p:nvPr/>
+        </p:nvSpPr>
+        <p:spPr>
+          <a:xfrm>
+            <a:off x="6629400" y="3520440"/>
+            <a:ext cx="1280160" cy="560070"/>
+          </a:xfrm>
+          <a:prstGeom prst="roundRect">
+            <a:avLst/>
+          </a:prstGeom>
+          <a:solidFill>
+            <a:srgbClr val="A23B72"/>
+          </a:solidFill>
+          <a:ln>
+            <a:noFill/>
+          </a:ln>
+        </p:spPr>
+        <p:style>
+          <a:lnRef idx="1">
+            <a:schemeClr val="accent1"/>
+          </a:lnRef>
+          <a:fillRef idx="3">
+            <a:schemeClr val="accent1"/>
+          </a:fillRef>
+          <a:effectRef idx="2">
+            <a:schemeClr val="accent1"/>
+          </a:effectRef>
+          <a:fontRef idx="minor">
+            <a:schemeClr val="lt1"/>
+          </a:fontRef>
+        </p:style>
+        <p:txBody>
+          <a:bodyPr rtlCol="0" anchor="ctr"/>
+          <a:lstStyle/>
+          <a:p>
+            <a:pPr algn="ctr"/>
           </a:p>
         </p:txBody>
       </p:sp>
@@ -6616,8 +6676,8 @@
         </p:nvSpPr>
         <p:spPr>
           <a:xfrm>
-            <a:off x="1143000" y="4171950"/>
-            <a:ext cx="7543800" cy="1485900"/>
+            <a:off x="6629400" y="3429000"/>
+            <a:ext cx="1371600" cy="742950"/>
           </a:xfrm>
           <a:prstGeom prst="rect">
             <a:avLst/>
@@ -6625,106 +6685,21 @@
           <a:noFill/>
         </p:spPr>
         <p:txBody>
-          <a:bodyPr wrap="square">
+          <a:bodyPr wrap="none" anchor="ctr">
             <a:spAutoFit/>
           </a:bodyPr>
           <a:lstStyle/>
           <a:p>
-            <a:pPr>
-              <a:defRPr sz="1600" b="0">
-                <a:solidFill>
-                  <a:srgbClr val="2E86AB"/>
-                </a:solidFill>
-                <a:latin typeface="Source Sans Pro"/>
-              </a:defRPr>
-            </a:pPr>
-            <a:r>
-              <a:t>Competitive Advantage:</a:t>
-            </a:r>
-          </a:p>
-          <a:p>
-            <a:pPr>
+            <a:pPr algn="ctr">
               <a:defRPr sz="1400" b="0">
                 <a:solidFill>
-                  <a:srgbClr val="2E86AB"/>
-                </a:solidFill>
-                <a:latin typeface="Source Sans Pro"/>
-              </a:defRPr>
-            </a:pPr>
-            <a:r>
-              <a:t>Our deep understanding of human psychology and behavior drives more intuitive and effective technology solutions</a:t>
-            </a:r>
-          </a:p>
-        </p:txBody>
-      </p:sp>
-      <p:sp>
-        <p:nvSpPr>
-          <p:cNvPr id="17" name="TextBox 16"/>
-          <p:cNvSpPr txBox="1"/>
-          <p:nvPr/>
-        </p:nvSpPr>
-        <p:spPr>
-          <a:xfrm>
-            <a:off x="457200" y="5657850"/>
-            <a:ext cx="4114800" cy="742950"/>
-          </a:xfrm>
-          <a:prstGeom prst="rect">
-            <a:avLst/>
-          </a:prstGeom>
-          <a:noFill/>
-        </p:spPr>
-        <p:txBody>
-          <a:bodyPr wrap="none">
-            <a:spAutoFit/>
-          </a:bodyPr>
-          <a:lstStyle/>
-          <a:p>
-            <a:pPr algn="l">
-              <a:defRPr sz="1000" b="0">
-                <a:solidFill>
-                  <a:srgbClr val="2E86AB"/>
-                </a:solidFill>
-                <a:latin typeface="Source Sans Pro"/>
-              </a:defRPr>
-            </a:pPr>
-            <a:r>
-              <a:t>TechForward Live</a:t>
-            </a:r>
-          </a:p>
-        </p:txBody>
-      </p:sp>
-      <p:sp>
-        <p:nvSpPr>
-          <p:cNvPr id="18" name="TextBox 17"/>
-          <p:cNvSpPr txBox="1"/>
-          <p:nvPr/>
-        </p:nvSpPr>
-        <p:spPr>
-          <a:xfrm>
-            <a:off x="4572000" y="5657850"/>
-            <a:ext cx="4114800" cy="742950"/>
-          </a:xfrm>
-          <a:prstGeom prst="rect">
-            <a:avLst/>
-          </a:prstGeom>
-          <a:noFill/>
-        </p:spPr>
-        <p:txBody>
-          <a:bodyPr wrap="none">
-            <a:spAutoFit/>
-          </a:bodyPr>
-          <a:lstStyle/>
-          <a:p>
-            <a:pPr algn="r">
-              <a:defRPr sz="1000" b="0">
-                <a:solidFill>
-                  <a:srgbClr val="2E86AB"/>
-                </a:solidFill>
-                <a:latin typeface="Source Sans Pro"/>
-              </a:defRPr>
-            </a:pPr>
-            <a:r>
-              <a:t>5</a:t>
+                  <a:srgbClr val="FFFFFF"/>
+                </a:solidFill>
+                <a:latin typeface="Source Sans Pro"/>
+              </a:defRPr>
+            </a:pPr>
+            <a:r>
+              <a:t>Reliability</a:t>
             </a:r>
           </a:p>
         </p:txBody>
@@ -6821,66 +6796,21 @@
               </a:defRPr>
             </a:pPr>
             <a:r>
-              <a:t>Color Palette</a:t>
-            </a:r>
-          </a:p>
-        </p:txBody>
-      </p:sp>
-      <p:sp>
-        <p:nvSpPr>
-          <p:cNvPr id="4" name="Rectangle 3"/>
-          <p:cNvSpPr/>
+              <a:t>Market Analysis &amp; Insights</a:t>
+            </a:r>
+          </a:p>
+        </p:txBody>
+      </p:sp>
+      <p:sp>
+        <p:nvSpPr>
+          <p:cNvPr id="4" name="TextBox 3"/>
+          <p:cNvSpPr txBox="1"/>
           <p:nvPr/>
         </p:nvSpPr>
         <p:spPr>
           <a:xfrm>
             <a:off x="1143000" y="1943100"/>
-            <a:ext cx="2057400" cy="1485900"/>
-          </a:xfrm>
-          <a:prstGeom prst="rect">
-            <a:avLst/>
-          </a:prstGeom>
-          <a:solidFill>
-            <a:srgbClr val="2E86AB"/>
-          </a:solidFill>
-          <a:ln w="12700">
-            <a:solidFill>
-              <a:srgbClr val="FFFFFF"/>
-            </a:solidFill>
-          </a:ln>
-        </p:spPr>
-        <p:style>
-          <a:lnRef idx="1">
-            <a:schemeClr val="accent1"/>
-          </a:lnRef>
-          <a:fillRef idx="3">
-            <a:schemeClr val="accent1"/>
-          </a:fillRef>
-          <a:effectRef idx="2">
-            <a:schemeClr val="accent1"/>
-          </a:effectRef>
-          <a:fontRef idx="minor">
-            <a:schemeClr val="lt1"/>
-          </a:fontRef>
-        </p:style>
-        <p:txBody>
-          <a:bodyPr rtlCol="0" anchor="ctr"/>
-          <a:lstStyle/>
-          <a:p>
-            <a:pPr algn="ctr"/>
-          </a:p>
-        </p:txBody>
-      </p:sp>
-      <p:sp>
-        <p:nvSpPr>
-          <p:cNvPr id="5" name="TextBox 4"/>
-          <p:cNvSpPr txBox="1"/>
-          <p:nvPr/>
-        </p:nvSpPr>
-        <p:spPr>
-          <a:xfrm>
-            <a:off x="1143000" y="3429000"/>
-            <a:ext cx="2057400" cy="1485900"/>
+            <a:ext cx="2743200" cy="1485900"/>
           </a:xfrm>
           <a:prstGeom prst="rect">
             <a:avLst/>
@@ -6894,126 +6824,94 @@
           <a:lstStyle/>
           <a:p>
             <a:pPr>
-              <a:defRPr sz="1000" b="0">
-                <a:solidFill>
-                  <a:srgbClr val="2E86AB"/>
-                </a:solidFill>
-                <a:latin typeface="Source Sans Pro"/>
-              </a:defRPr>
-            </a:pPr>
-            <a:r>
-              <a:t>Primary</a:t>
-            </a:r>
-          </a:p>
-          <a:p>
-            <a:pPr>
-              <a:defRPr sz="1000" b="0">
-                <a:solidFill>
-                  <a:srgbClr val="2E86AB"/>
-                </a:solidFill>
-                <a:latin typeface="Source Sans Pro"/>
-              </a:defRPr>
-            </a:pPr>
-            <a:r>
-              <a:t>#2E86AB</a:t>
-            </a:r>
-          </a:p>
-          <a:p>
-            <a:pPr>
-              <a:defRPr sz="1000" b="0">
-                <a:solidFill>
-                  <a:srgbClr val="2E86AB"/>
-                </a:solidFill>
-                <a:latin typeface="Source Sans Pro"/>
-              </a:defRPr>
-            </a:pPr>
-            <a:r>
-              <a:t>RGB(46, 134, 171)</a:t>
-            </a:r>
-          </a:p>
-          <a:p>
-            <a:pPr>
-              <a:defRPr sz="1000" b="0">
-                <a:solidFill>
-                  <a:srgbClr val="2E86AB"/>
-                </a:solidFill>
-                <a:latin typeface="Source Sans Pro"/>
-              </a:defRPr>
-            </a:pPr>
-            <a:r>
-              <a:t>CMYK(73, 21, 0, 32)</a:t>
-            </a:r>
-          </a:p>
-          <a:p>
-            <a:pPr>
-              <a:defRPr sz="1000" b="0">
-                <a:solidFill>
-                  <a:srgbClr val="2E86AB"/>
-                </a:solidFill>
-                <a:latin typeface="Source Sans Pro"/>
-              </a:defRPr>
-            </a:pPr>
-            <a:r>
-              <a:t>Use Light Text</a:t>
-            </a:r>
-          </a:p>
-        </p:txBody>
-      </p:sp>
-      <p:sp>
-        <p:nvSpPr>
-          <p:cNvPr id="6" name="Rectangle 5"/>
-          <p:cNvSpPr/>
+              <a:defRPr sz="1800" b="0">
+                <a:solidFill>
+                  <a:srgbClr val="2E86AB"/>
+                </a:solidFill>
+                <a:latin typeface="Source Sans Pro"/>
+              </a:defRPr>
+            </a:pPr>
+            <a:r>
+              <a:t>Industry Trends:</a:t>
+            </a:r>
+          </a:p>
+          <a:p>
+            <a:pPr>
+              <a:defRPr sz="1400" b="0">
+                <a:solidFill>
+                  <a:srgbClr val="2E86AB"/>
+                </a:solidFill>
+                <a:latin typeface="Source Sans Pro"/>
+              </a:defRPr>
+            </a:pPr>
+            <a:r>
+              <a:t>• AI-driven automation solutions</a:t>
+            </a:r>
+          </a:p>
+          <a:p>
+            <a:pPr>
+              <a:defRPr sz="1400" b="0">
+                <a:solidFill>
+                  <a:srgbClr val="2E86AB"/>
+                </a:solidFill>
+                <a:latin typeface="Source Sans Pro"/>
+              </a:defRPr>
+            </a:pPr>
+            <a:r>
+              <a:t>• Human-centered design principles</a:t>
+            </a:r>
+          </a:p>
+          <a:p>
+            <a:pPr>
+              <a:defRPr sz="1400" b="0">
+                <a:solidFill>
+                  <a:srgbClr val="2E86AB"/>
+                </a:solidFill>
+                <a:latin typeface="Source Sans Pro"/>
+              </a:defRPr>
+            </a:pPr>
+            <a:r>
+              <a:t>• Low-code/no-code platforms</a:t>
+            </a:r>
+          </a:p>
+          <a:p>
+            <a:pPr>
+              <a:defRPr sz="1400" b="0">
+                <a:solidFill>
+                  <a:srgbClr val="2E86AB"/>
+                </a:solidFill>
+                <a:latin typeface="Source Sans Pro"/>
+              </a:defRPr>
+            </a:pPr>
+            <a:r>
+              <a:t>• Remote collaboration tools</a:t>
+            </a:r>
+          </a:p>
+          <a:p>
+            <a:pPr>
+              <a:defRPr sz="1400" b="0">
+                <a:solidFill>
+                  <a:srgbClr val="2E86AB"/>
+                </a:solidFill>
+                <a:latin typeface="Source Sans Pro"/>
+              </a:defRPr>
+            </a:pPr>
+            <a:r>
+              <a:t>• Sustainable technology practices</a:t>
+            </a:r>
+          </a:p>
+        </p:txBody>
+      </p:sp>
+      <p:sp>
+        <p:nvSpPr>
+          <p:cNvPr id="5" name="TextBox 4"/>
+          <p:cNvSpPr txBox="1"/>
           <p:nvPr/>
         </p:nvSpPr>
         <p:spPr>
           <a:xfrm>
             <a:off x="3886200" y="1943100"/>
-            <a:ext cx="2057400" cy="1485900"/>
-          </a:xfrm>
-          <a:prstGeom prst="rect">
-            <a:avLst/>
-          </a:prstGeom>
-          <a:solidFill>
-            <a:srgbClr val="A23B72"/>
-          </a:solidFill>
-          <a:ln w="12700">
-            <a:solidFill>
-              <a:srgbClr val="FFFFFF"/>
-            </a:solidFill>
-          </a:ln>
-        </p:spPr>
-        <p:style>
-          <a:lnRef idx="1">
-            <a:schemeClr val="accent1"/>
-          </a:lnRef>
-          <a:fillRef idx="3">
-            <a:schemeClr val="accent1"/>
-          </a:fillRef>
-          <a:effectRef idx="2">
-            <a:schemeClr val="accent1"/>
-          </a:effectRef>
-          <a:fontRef idx="minor">
-            <a:schemeClr val="lt1"/>
-          </a:fontRef>
-        </p:style>
-        <p:txBody>
-          <a:bodyPr rtlCol="0" anchor="ctr"/>
-          <a:lstStyle/>
-          <a:p>
-            <a:pPr algn="ctr"/>
-          </a:p>
-        </p:txBody>
-      </p:sp>
-      <p:sp>
-        <p:nvSpPr>
-          <p:cNvPr id="7" name="TextBox 6"/>
-          <p:cNvSpPr txBox="1"/>
-          <p:nvPr/>
-        </p:nvSpPr>
-        <p:spPr>
-          <a:xfrm>
-            <a:off x="3886200" y="3429000"/>
-            <a:ext cx="2057400" cy="1485900"/>
+            <a:ext cx="2743200" cy="1485900"/>
           </a:xfrm>
           <a:prstGeom prst="rect">
             <a:avLst/>
@@ -7027,125 +6925,106 @@
           <a:lstStyle/>
           <a:p>
             <a:pPr>
-              <a:defRPr sz="1000" b="0">
-                <a:solidFill>
-                  <a:srgbClr val="2E86AB"/>
-                </a:solidFill>
-                <a:latin typeface="Source Sans Pro"/>
-              </a:defRPr>
-            </a:pPr>
-            <a:r>
-              <a:t>Secondary</a:t>
-            </a:r>
-          </a:p>
-          <a:p>
-            <a:pPr>
-              <a:defRPr sz="1000" b="0">
-                <a:solidFill>
-                  <a:srgbClr val="2E86AB"/>
-                </a:solidFill>
-                <a:latin typeface="Source Sans Pro"/>
-              </a:defRPr>
-            </a:pPr>
-            <a:r>
-              <a:t>#A23B72</a:t>
-            </a:r>
-          </a:p>
-          <a:p>
-            <a:pPr>
-              <a:defRPr sz="1000" b="0">
-                <a:solidFill>
-                  <a:srgbClr val="2E86AB"/>
-                </a:solidFill>
-                <a:latin typeface="Source Sans Pro"/>
-              </a:defRPr>
-            </a:pPr>
-            <a:r>
-              <a:t>RGB(162, 59, 114)</a:t>
-            </a:r>
-          </a:p>
-          <a:p>
-            <a:pPr>
-              <a:defRPr sz="1000" b="0">
-                <a:solidFill>
-                  <a:srgbClr val="2E86AB"/>
-                </a:solidFill>
-                <a:latin typeface="Source Sans Pro"/>
-              </a:defRPr>
-            </a:pPr>
-            <a:r>
-              <a:t>CMYK(0, 63, 29, 36)</a:t>
-            </a:r>
-          </a:p>
-          <a:p>
-            <a:pPr>
-              <a:defRPr sz="1000" b="0">
-                <a:solidFill>
-                  <a:srgbClr val="2E86AB"/>
-                </a:solidFill>
-                <a:latin typeface="Source Sans Pro"/>
-              </a:defRPr>
-            </a:pPr>
-            <a:r>
-              <a:t>Use Light Text</a:t>
-            </a:r>
-          </a:p>
-        </p:txBody>
-      </p:sp>
-      <p:sp>
-        <p:nvSpPr>
-          <p:cNvPr id="8" name="Rectangle 7"/>
-          <p:cNvSpPr/>
+              <a:defRPr sz="1800" b="0">
+                <a:solidFill>
+                  <a:srgbClr val="2E86AB"/>
+                </a:solidFill>
+                <a:latin typeface="Source Sans Pro"/>
+              </a:defRPr>
+            </a:pPr>
+            <a:r>
+              <a:t>Key Competitors:</a:t>
+            </a:r>
+          </a:p>
+          <a:p>
+            <a:pPr>
+              <a:defRPr sz="1400" b="0">
+                <a:solidFill>
+                  <a:srgbClr val="2E86AB"/>
+                </a:solidFill>
+                <a:latin typeface="Source Sans Pro"/>
+              </a:defRPr>
+            </a:pPr>
+            <a:r>
+              <a:t>• Microsoft</a:t>
+            </a:r>
+          </a:p>
+          <a:p>
+            <a:pPr>
+              <a:defRPr sz="1400" b="0">
+                <a:solidFill>
+                  <a:srgbClr val="2E86AB"/>
+                </a:solidFill>
+                <a:latin typeface="Source Sans Pro"/>
+              </a:defRPr>
+            </a:pPr>
+            <a:r>
+              <a:t>• Google Workspace</a:t>
+            </a:r>
+          </a:p>
+          <a:p>
+            <a:pPr>
+              <a:defRPr sz="1400" b="0">
+                <a:solidFill>
+                  <a:srgbClr val="2E86AB"/>
+                </a:solidFill>
+                <a:latin typeface="Source Sans Pro"/>
+              </a:defRPr>
+            </a:pPr>
+            <a:r>
+              <a:t>• Salesforce</a:t>
+            </a:r>
+          </a:p>
+          <a:p>
+            <a:pPr>
+              <a:defRPr sz="1400" b="0">
+                <a:solidFill>
+                  <a:srgbClr val="2E86AB"/>
+                </a:solidFill>
+                <a:latin typeface="Source Sans Pro"/>
+              </a:defRPr>
+            </a:pPr>
+            <a:r>
+              <a:t>• Adobe</a:t>
+            </a:r>
+          </a:p>
+          <a:p>
+            <a:pPr>
+              <a:defRPr sz="1400" b="0">
+                <a:solidFill>
+                  <a:srgbClr val="2E86AB"/>
+                </a:solidFill>
+                <a:latin typeface="Source Sans Pro"/>
+              </a:defRPr>
+            </a:pPr>
+            <a:r>
+              <a:t>• Figma</a:t>
+            </a:r>
+          </a:p>
+          <a:p>
+            <a:pPr>
+              <a:defRPr sz="1400" b="0">
+                <a:solidFill>
+                  <a:srgbClr val="2E86AB"/>
+                </a:solidFill>
+                <a:latin typeface="Source Sans Pro"/>
+              </a:defRPr>
+            </a:pPr>
+            <a:r>
+              <a:t>• Notion</a:t>
+            </a:r>
+          </a:p>
+        </p:txBody>
+      </p:sp>
+      <p:sp>
+        <p:nvSpPr>
+          <p:cNvPr id="6" name="TextBox 5"/>
+          <p:cNvSpPr txBox="1"/>
           <p:nvPr/>
         </p:nvSpPr>
         <p:spPr>
           <a:xfrm>
             <a:off x="6629400" y="1943100"/>
-            <a:ext cx="2057400" cy="1485900"/>
-          </a:xfrm>
-          <a:prstGeom prst="rect">
-            <a:avLst/>
-          </a:prstGeom>
-          <a:solidFill>
-            <a:srgbClr val="F18F01"/>
-          </a:solidFill>
-          <a:ln w="12700">
-            <a:solidFill>
-              <a:srgbClr val="FFFFFF"/>
-            </a:solidFill>
-          </a:ln>
-        </p:spPr>
-        <p:style>
-          <a:lnRef idx="1">
-            <a:schemeClr val="accent1"/>
-          </a:lnRef>
-          <a:fillRef idx="3">
-            <a:schemeClr val="accent1"/>
-          </a:fillRef>
-          <a:effectRef idx="2">
-            <a:schemeClr val="accent1"/>
-          </a:effectRef>
-          <a:fontRef idx="minor">
-            <a:schemeClr val="lt1"/>
-          </a:fontRef>
-        </p:style>
-        <p:txBody>
-          <a:bodyPr rtlCol="0" anchor="ctr"/>
-          <a:lstStyle/>
-          <a:p>
-            <a:pPr algn="ctr"/>
-          </a:p>
-        </p:txBody>
-      </p:sp>
-      <p:sp>
-        <p:nvSpPr>
-          <p:cNvPr id="9" name="TextBox 8"/>
-          <p:cNvSpPr txBox="1"/>
-          <p:nvPr/>
-        </p:nvSpPr>
-        <p:spPr>
-          <a:xfrm>
-            <a:off x="6629400" y="3429000"/>
             <a:ext cx="2057400" cy="1485900"/>
           </a:xfrm>
           <a:prstGeom prst="rect">
@@ -7160,74 +7039,74 @@
           <a:lstStyle/>
           <a:p>
             <a:pPr>
-              <a:defRPr sz="1000" b="0">
-                <a:solidFill>
-                  <a:srgbClr val="2E86AB"/>
-                </a:solidFill>
-                <a:latin typeface="Source Sans Pro"/>
-              </a:defRPr>
-            </a:pPr>
-            <a:r>
-              <a:t>Accent</a:t>
-            </a:r>
-          </a:p>
-          <a:p>
-            <a:pPr>
-              <a:defRPr sz="1000" b="0">
-                <a:solidFill>
-                  <a:srgbClr val="2E86AB"/>
-                </a:solidFill>
-                <a:latin typeface="Source Sans Pro"/>
-              </a:defRPr>
-            </a:pPr>
-            <a:r>
-              <a:t>#F18F01</a:t>
-            </a:r>
-          </a:p>
-          <a:p>
-            <a:pPr>
-              <a:defRPr sz="1000" b="0">
-                <a:solidFill>
-                  <a:srgbClr val="2E86AB"/>
-                </a:solidFill>
-                <a:latin typeface="Source Sans Pro"/>
-              </a:defRPr>
-            </a:pPr>
-            <a:r>
-              <a:t>RGB(241, 143, 1)</a:t>
-            </a:r>
-          </a:p>
-          <a:p>
-            <a:pPr>
-              <a:defRPr sz="1000" b="0">
-                <a:solidFill>
-                  <a:srgbClr val="2E86AB"/>
-                </a:solidFill>
-                <a:latin typeface="Source Sans Pro"/>
-              </a:defRPr>
-            </a:pPr>
-            <a:r>
-              <a:t>CMYK(0, 40, 99, 5)</a:t>
-            </a:r>
-          </a:p>
-          <a:p>
-            <a:pPr>
-              <a:defRPr sz="1000" b="0">
-                <a:solidFill>
-                  <a:srgbClr val="2E86AB"/>
-                </a:solidFill>
-                <a:latin typeface="Source Sans Pro"/>
-              </a:defRPr>
-            </a:pPr>
-            <a:r>
-              <a:t>Use Dark Text</a:t>
-            </a:r>
-          </a:p>
-        </p:txBody>
-      </p:sp>
-      <p:sp>
-        <p:nvSpPr>
-          <p:cNvPr id="10" name="TextBox 9"/>
+              <a:defRPr sz="1800" b="0">
+                <a:solidFill>
+                  <a:srgbClr val="2E86AB"/>
+                </a:solidFill>
+                <a:latin typeface="Source Sans Pro"/>
+              </a:defRPr>
+            </a:pPr>
+            <a:r>
+              <a:t>Design Styles:</a:t>
+            </a:r>
+          </a:p>
+          <a:p>
+            <a:pPr>
+              <a:defRPr sz="1400" b="0">
+                <a:solidFill>
+                  <a:srgbClr val="2E86AB"/>
+                </a:solidFill>
+                <a:latin typeface="Source Sans Pro"/>
+              </a:defRPr>
+            </a:pPr>
+            <a:r>
+              <a:t>• Minimalist interfaces</a:t>
+            </a:r>
+          </a:p>
+          <a:p>
+            <a:pPr>
+              <a:defRPr sz="1400" b="0">
+                <a:solidFill>
+                  <a:srgbClr val="2E86AB"/>
+                </a:solidFill>
+                <a:latin typeface="Source Sans Pro"/>
+              </a:defRPr>
+            </a:pPr>
+            <a:r>
+              <a:t>• Bold typography</a:t>
+            </a:r>
+          </a:p>
+          <a:p>
+            <a:pPr>
+              <a:defRPr sz="1400" b="0">
+                <a:solidFill>
+                  <a:srgbClr val="2E86AB"/>
+                </a:solidFill>
+                <a:latin typeface="Source Sans Pro"/>
+              </a:defRPr>
+            </a:pPr>
+            <a:r>
+              <a:t>• Gradient backgrounds</a:t>
+            </a:r>
+          </a:p>
+          <a:p>
+            <a:pPr>
+              <a:defRPr sz="1400" b="0">
+                <a:solidFill>
+                  <a:srgbClr val="2E86AB"/>
+                </a:solidFill>
+                <a:latin typeface="Source Sans Pro"/>
+              </a:defRPr>
+            </a:pPr>
+            <a:r>
+              <a:t>• Micro-interactions</a:t>
+            </a:r>
+          </a:p>
+        </p:txBody>
+      </p:sp>
+      <p:sp>
+        <p:nvSpPr>
+          <p:cNvPr id="7" name="TextBox 6"/>
           <p:cNvSpPr txBox="1"/>
           <p:nvPr/>
         </p:nvSpPr>
@@ -7263,7 +7142,7 @@
       </p:sp>
       <p:sp>
         <p:nvSpPr>
-          <p:cNvPr id="11" name="TextBox 10"/>
+          <p:cNvPr id="8" name="TextBox 7"/>
           <p:cNvSpPr txBox="1"/>
           <p:nvPr/>
         </p:nvSpPr>
@@ -7389,7 +7268,7 @@
               </a:defRPr>
             </a:pPr>
             <a:r>
-              <a:t>Typography</a:t>
+              <a:t>Brand Positioning</a:t>
             </a:r>
           </a:p>
         </p:txBody>
@@ -7403,7 +7282,559 @@
         <p:spPr>
           <a:xfrm>
             <a:off x="1143000" y="1943100"/>
-            <a:ext cx="3429000" cy="742950"/>
+            <a:ext cx="4114800" cy="1485900"/>
+          </a:xfrm>
+          <a:prstGeom prst="rect">
+            <a:avLst/>
+          </a:prstGeom>
+          <a:noFill/>
+        </p:spPr>
+        <p:txBody>
+          <a:bodyPr wrap="square">
+            <a:spAutoFit/>
+          </a:bodyPr>
+          <a:lstStyle/>
+          <a:p>
+            <a:pPr>
+              <a:defRPr sz="1600" b="0">
+                <a:solidFill>
+                  <a:srgbClr val="2E86AB"/>
+                </a:solidFill>
+                <a:latin typeface="Source Sans Pro"/>
+              </a:defRPr>
+            </a:pPr>
+            <a:r>
+              <a:t>Unique Value Proposition:</a:t>
+            </a:r>
+          </a:p>
+          <a:p>
+            <a:pPr>
+              <a:defRPr sz="1400" b="0">
+                <a:solidFill>
+                  <a:srgbClr val="2E86AB"/>
+                </a:solidFill>
+                <a:latin typeface="Source Sans Pro"/>
+              </a:defRPr>
+            </a:pPr>
+            <a:r>
+              <a:t>We bridge the gap between complex technology and intuitive user experiences through human-centered design</a:t>
+            </a:r>
+          </a:p>
+        </p:txBody>
+      </p:sp>
+      <p:sp>
+        <p:nvSpPr>
+          <p:cNvPr id="5" name="TextBox 4"/>
+          <p:cNvSpPr txBox="1"/>
+          <p:nvPr/>
+        </p:nvSpPr>
+        <p:spPr>
+          <a:xfrm>
+            <a:off x="5257800" y="1943100"/>
+            <a:ext cx="3429000" cy="1485900"/>
+          </a:xfrm>
+          <a:prstGeom prst="rect">
+            <a:avLst/>
+          </a:prstGeom>
+          <a:noFill/>
+        </p:spPr>
+        <p:txBody>
+          <a:bodyPr wrap="square">
+            <a:spAutoFit/>
+          </a:bodyPr>
+          <a:lstStyle/>
+          <a:p>
+            <a:pPr>
+              <a:defRPr sz="1600" b="0">
+                <a:solidFill>
+                  <a:srgbClr val="2E86AB"/>
+                </a:solidFill>
+                <a:latin typeface="Source Sans Pro"/>
+              </a:defRPr>
+            </a:pPr>
+            <a:r>
+              <a:t>Brand Promise:</a:t>
+            </a:r>
+          </a:p>
+          <a:p>
+            <a:pPr>
+              <a:defRPr sz="1400" b="0">
+                <a:solidFill>
+                  <a:srgbClr val="2E86AB"/>
+                </a:solidFill>
+                <a:latin typeface="Source Sans Pro"/>
+              </a:defRPr>
+            </a:pPr>
+            <a:r>
+              <a:t>Technology that enhances human potential without adding complexity to your workflow</a:t>
+            </a:r>
+          </a:p>
+        </p:txBody>
+      </p:sp>
+      <p:sp>
+        <p:nvSpPr>
+          <p:cNvPr id="6" name="Rounded Rectangle 5"/>
+          <p:cNvSpPr/>
+          <p:nvPr/>
+        </p:nvSpPr>
+        <p:spPr>
+          <a:xfrm>
+            <a:off x="1143000" y="3520440"/>
+            <a:ext cx="1280160" cy="560070"/>
+          </a:xfrm>
+          <a:prstGeom prst="roundRect">
+            <a:avLst/>
+          </a:prstGeom>
+          <a:solidFill>
+            <a:srgbClr val="F18F01"/>
+          </a:solidFill>
+          <a:ln w="12700">
+            <a:solidFill>
+              <a:srgbClr val="F18F01"/>
+            </a:solidFill>
+          </a:ln>
+        </p:spPr>
+        <p:style>
+          <a:lnRef idx="1">
+            <a:schemeClr val="accent1"/>
+          </a:lnRef>
+          <a:fillRef idx="3">
+            <a:schemeClr val="accent1"/>
+          </a:fillRef>
+          <a:effectRef idx="2">
+            <a:schemeClr val="accent1"/>
+          </a:effectRef>
+          <a:fontRef idx="minor">
+            <a:schemeClr val="lt1"/>
+          </a:fontRef>
+        </p:style>
+        <p:txBody>
+          <a:bodyPr rtlCol="0" anchor="ctr"/>
+          <a:lstStyle/>
+          <a:p>
+            <a:pPr algn="ctr"/>
+          </a:p>
+        </p:txBody>
+      </p:sp>
+      <p:sp>
+        <p:nvSpPr>
+          <p:cNvPr id="7" name="TextBox 6"/>
+          <p:cNvSpPr txBox="1"/>
+          <p:nvPr/>
+        </p:nvSpPr>
+        <p:spPr>
+          <a:xfrm>
+            <a:off x="1143000" y="3429000"/>
+            <a:ext cx="1371600" cy="742950"/>
+          </a:xfrm>
+          <a:prstGeom prst="rect">
+            <a:avLst/>
+          </a:prstGeom>
+          <a:noFill/>
+        </p:spPr>
+        <p:txBody>
+          <a:bodyPr wrap="none" anchor="ctr">
+            <a:spAutoFit/>
+          </a:bodyPr>
+          <a:lstStyle/>
+          <a:p>
+            <a:pPr algn="ctr">
+              <a:defRPr sz="1200" b="0">
+                <a:solidFill>
+                  <a:srgbClr val="2E86AB"/>
+                </a:solidFill>
+                <a:latin typeface="Source Sans Pro"/>
+              </a:defRPr>
+            </a:pPr>
+            <a:r>
+              <a:t>Innovative</a:t>
+            </a:r>
+          </a:p>
+        </p:txBody>
+      </p:sp>
+      <p:sp>
+        <p:nvSpPr>
+          <p:cNvPr id="8" name="Rounded Rectangle 7"/>
+          <p:cNvSpPr/>
+          <p:nvPr/>
+        </p:nvSpPr>
+        <p:spPr>
+          <a:xfrm>
+            <a:off x="2514600" y="3520440"/>
+            <a:ext cx="1280160" cy="560070"/>
+          </a:xfrm>
+          <a:prstGeom prst="roundRect">
+            <a:avLst/>
+          </a:prstGeom>
+          <a:solidFill>
+            <a:srgbClr val="F18F01"/>
+          </a:solidFill>
+          <a:ln w="12700">
+            <a:solidFill>
+              <a:srgbClr val="F18F01"/>
+            </a:solidFill>
+          </a:ln>
+        </p:spPr>
+        <p:style>
+          <a:lnRef idx="1">
+            <a:schemeClr val="accent1"/>
+          </a:lnRef>
+          <a:fillRef idx="3">
+            <a:schemeClr val="accent1"/>
+          </a:fillRef>
+          <a:effectRef idx="2">
+            <a:schemeClr val="accent1"/>
+          </a:effectRef>
+          <a:fontRef idx="minor">
+            <a:schemeClr val="lt1"/>
+          </a:fontRef>
+        </p:style>
+        <p:txBody>
+          <a:bodyPr rtlCol="0" anchor="ctr"/>
+          <a:lstStyle/>
+          <a:p>
+            <a:pPr algn="ctr"/>
+          </a:p>
+        </p:txBody>
+      </p:sp>
+      <p:sp>
+        <p:nvSpPr>
+          <p:cNvPr id="9" name="TextBox 8"/>
+          <p:cNvSpPr txBox="1"/>
+          <p:nvPr/>
+        </p:nvSpPr>
+        <p:spPr>
+          <a:xfrm>
+            <a:off x="2514600" y="3429000"/>
+            <a:ext cx="1371600" cy="742950"/>
+          </a:xfrm>
+          <a:prstGeom prst="rect">
+            <a:avLst/>
+          </a:prstGeom>
+          <a:noFill/>
+        </p:spPr>
+        <p:txBody>
+          <a:bodyPr wrap="none" anchor="ctr">
+            <a:spAutoFit/>
+          </a:bodyPr>
+          <a:lstStyle/>
+          <a:p>
+            <a:pPr algn="ctr">
+              <a:defRPr sz="1200" b="0">
+                <a:solidFill>
+                  <a:srgbClr val="2E86AB"/>
+                </a:solidFill>
+                <a:latin typeface="Source Sans Pro"/>
+              </a:defRPr>
+            </a:pPr>
+            <a:r>
+              <a:t>Reliable</a:t>
+            </a:r>
+          </a:p>
+        </p:txBody>
+      </p:sp>
+      <p:sp>
+        <p:nvSpPr>
+          <p:cNvPr id="10" name="Rounded Rectangle 9"/>
+          <p:cNvSpPr/>
+          <p:nvPr/>
+        </p:nvSpPr>
+        <p:spPr>
+          <a:xfrm>
+            <a:off x="3886200" y="3520440"/>
+            <a:ext cx="1280160" cy="560070"/>
+          </a:xfrm>
+          <a:prstGeom prst="roundRect">
+            <a:avLst/>
+          </a:prstGeom>
+          <a:solidFill>
+            <a:srgbClr val="F18F01"/>
+          </a:solidFill>
+          <a:ln w="12700">
+            <a:solidFill>
+              <a:srgbClr val="F18F01"/>
+            </a:solidFill>
+          </a:ln>
+        </p:spPr>
+        <p:style>
+          <a:lnRef idx="1">
+            <a:schemeClr val="accent1"/>
+          </a:lnRef>
+          <a:fillRef idx="3">
+            <a:schemeClr val="accent1"/>
+          </a:fillRef>
+          <a:effectRef idx="2">
+            <a:schemeClr val="accent1"/>
+          </a:effectRef>
+          <a:fontRef idx="minor">
+            <a:schemeClr val="lt1"/>
+          </a:fontRef>
+        </p:style>
+        <p:txBody>
+          <a:bodyPr rtlCol="0" anchor="ctr"/>
+          <a:lstStyle/>
+          <a:p>
+            <a:pPr algn="ctr"/>
+          </a:p>
+        </p:txBody>
+      </p:sp>
+      <p:sp>
+        <p:nvSpPr>
+          <p:cNvPr id="11" name="TextBox 10"/>
+          <p:cNvSpPr txBox="1"/>
+          <p:nvPr/>
+        </p:nvSpPr>
+        <p:spPr>
+          <a:xfrm>
+            <a:off x="3886200" y="3429000"/>
+            <a:ext cx="1371600" cy="742950"/>
+          </a:xfrm>
+          <a:prstGeom prst="rect">
+            <a:avLst/>
+          </a:prstGeom>
+          <a:noFill/>
+        </p:spPr>
+        <p:txBody>
+          <a:bodyPr wrap="none" anchor="ctr">
+            <a:spAutoFit/>
+          </a:bodyPr>
+          <a:lstStyle/>
+          <a:p>
+            <a:pPr algn="ctr">
+              <a:defRPr sz="1200" b="0">
+                <a:solidFill>
+                  <a:srgbClr val="2E86AB"/>
+                </a:solidFill>
+                <a:latin typeface="Source Sans Pro"/>
+              </a:defRPr>
+            </a:pPr>
+            <a:r>
+              <a:t>Approachable</a:t>
+            </a:r>
+          </a:p>
+        </p:txBody>
+      </p:sp>
+      <p:sp>
+        <p:nvSpPr>
+          <p:cNvPr id="12" name="Rounded Rectangle 11"/>
+          <p:cNvSpPr/>
+          <p:nvPr/>
+        </p:nvSpPr>
+        <p:spPr>
+          <a:xfrm>
+            <a:off x="5257800" y="3520440"/>
+            <a:ext cx="1280160" cy="560070"/>
+          </a:xfrm>
+          <a:prstGeom prst="roundRect">
+            <a:avLst/>
+          </a:prstGeom>
+          <a:solidFill>
+            <a:srgbClr val="F18F01"/>
+          </a:solidFill>
+          <a:ln w="12700">
+            <a:solidFill>
+              <a:srgbClr val="F18F01"/>
+            </a:solidFill>
+          </a:ln>
+        </p:spPr>
+        <p:style>
+          <a:lnRef idx="1">
+            <a:schemeClr val="accent1"/>
+          </a:lnRef>
+          <a:fillRef idx="3">
+            <a:schemeClr val="accent1"/>
+          </a:fillRef>
+          <a:effectRef idx="2">
+            <a:schemeClr val="accent1"/>
+          </a:effectRef>
+          <a:fontRef idx="minor">
+            <a:schemeClr val="lt1"/>
+          </a:fontRef>
+        </p:style>
+        <p:txBody>
+          <a:bodyPr rtlCol="0" anchor="ctr"/>
+          <a:lstStyle/>
+          <a:p>
+            <a:pPr algn="ctr"/>
+          </a:p>
+        </p:txBody>
+      </p:sp>
+      <p:sp>
+        <p:nvSpPr>
+          <p:cNvPr id="13" name="TextBox 12"/>
+          <p:cNvSpPr txBox="1"/>
+          <p:nvPr/>
+        </p:nvSpPr>
+        <p:spPr>
+          <a:xfrm>
+            <a:off x="5257800" y="3429000"/>
+            <a:ext cx="1371600" cy="742950"/>
+          </a:xfrm>
+          <a:prstGeom prst="rect">
+            <a:avLst/>
+          </a:prstGeom>
+          <a:noFill/>
+        </p:spPr>
+        <p:txBody>
+          <a:bodyPr wrap="none" anchor="ctr">
+            <a:spAutoFit/>
+          </a:bodyPr>
+          <a:lstStyle/>
+          <a:p>
+            <a:pPr algn="ctr">
+              <a:defRPr sz="1200" b="0">
+                <a:solidFill>
+                  <a:srgbClr val="2E86AB"/>
+                </a:solidFill>
+                <a:latin typeface="Source Sans Pro"/>
+              </a:defRPr>
+            </a:pPr>
+            <a:r>
+              <a:t>Progressive</a:t>
+            </a:r>
+          </a:p>
+        </p:txBody>
+      </p:sp>
+      <p:sp>
+        <p:nvSpPr>
+          <p:cNvPr id="14" name="Rounded Rectangle 13"/>
+          <p:cNvSpPr/>
+          <p:nvPr/>
+        </p:nvSpPr>
+        <p:spPr>
+          <a:xfrm>
+            <a:off x="6629400" y="3520440"/>
+            <a:ext cx="1280160" cy="560070"/>
+          </a:xfrm>
+          <a:prstGeom prst="roundRect">
+            <a:avLst/>
+          </a:prstGeom>
+          <a:solidFill>
+            <a:srgbClr val="F18F01"/>
+          </a:solidFill>
+          <a:ln w="12700">
+            <a:solidFill>
+              <a:srgbClr val="F18F01"/>
+            </a:solidFill>
+          </a:ln>
+        </p:spPr>
+        <p:style>
+          <a:lnRef idx="1">
+            <a:schemeClr val="accent1"/>
+          </a:lnRef>
+          <a:fillRef idx="3">
+            <a:schemeClr val="accent1"/>
+          </a:fillRef>
+          <a:effectRef idx="2">
+            <a:schemeClr val="accent1"/>
+          </a:effectRef>
+          <a:fontRef idx="minor">
+            <a:schemeClr val="lt1"/>
+          </a:fontRef>
+        </p:style>
+        <p:txBody>
+          <a:bodyPr rtlCol="0" anchor="ctr"/>
+          <a:lstStyle/>
+          <a:p>
+            <a:pPr algn="ctr"/>
+          </a:p>
+        </p:txBody>
+      </p:sp>
+      <p:sp>
+        <p:nvSpPr>
+          <p:cNvPr id="15" name="TextBox 14"/>
+          <p:cNvSpPr txBox="1"/>
+          <p:nvPr/>
+        </p:nvSpPr>
+        <p:spPr>
+          <a:xfrm>
+            <a:off x="6629400" y="3429000"/>
+            <a:ext cx="1371600" cy="742950"/>
+          </a:xfrm>
+          <a:prstGeom prst="rect">
+            <a:avLst/>
+          </a:prstGeom>
+          <a:noFill/>
+        </p:spPr>
+        <p:txBody>
+          <a:bodyPr wrap="none" anchor="ctr">
+            <a:spAutoFit/>
+          </a:bodyPr>
+          <a:lstStyle/>
+          <a:p>
+            <a:pPr algn="ctr">
+              <a:defRPr sz="1200" b="0">
+                <a:solidFill>
+                  <a:srgbClr val="2E86AB"/>
+                </a:solidFill>
+                <a:latin typeface="Source Sans Pro"/>
+              </a:defRPr>
+            </a:pPr>
+            <a:r>
+              <a:t>Trustworthy</a:t>
+            </a:r>
+          </a:p>
+        </p:txBody>
+      </p:sp>
+      <p:sp>
+        <p:nvSpPr>
+          <p:cNvPr id="16" name="TextBox 15"/>
+          <p:cNvSpPr txBox="1"/>
+          <p:nvPr/>
+        </p:nvSpPr>
+        <p:spPr>
+          <a:xfrm>
+            <a:off x="1143000" y="4171950"/>
+            <a:ext cx="7543800" cy="1485900"/>
+          </a:xfrm>
+          <a:prstGeom prst="rect">
+            <a:avLst/>
+          </a:prstGeom>
+          <a:noFill/>
+        </p:spPr>
+        <p:txBody>
+          <a:bodyPr wrap="square">
+            <a:spAutoFit/>
+          </a:bodyPr>
+          <a:lstStyle/>
+          <a:p>
+            <a:pPr>
+              <a:defRPr sz="1600" b="0">
+                <a:solidFill>
+                  <a:srgbClr val="2E86AB"/>
+                </a:solidFill>
+                <a:latin typeface="Source Sans Pro"/>
+              </a:defRPr>
+            </a:pPr>
+            <a:r>
+              <a:t>Competitive Advantage:</a:t>
+            </a:r>
+          </a:p>
+          <a:p>
+            <a:pPr>
+              <a:defRPr sz="1400" b="0">
+                <a:solidFill>
+                  <a:srgbClr val="2E86AB"/>
+                </a:solidFill>
+                <a:latin typeface="Source Sans Pro"/>
+              </a:defRPr>
+            </a:pPr>
+            <a:r>
+              <a:t>Our deep understanding of human psychology and behavior drives more intuitive and effective technology solutions</a:t>
+            </a:r>
+          </a:p>
+        </p:txBody>
+      </p:sp>
+      <p:sp>
+        <p:nvSpPr>
+          <p:cNvPr id="17" name="TextBox 16"/>
+          <p:cNvSpPr txBox="1"/>
+          <p:nvPr/>
+        </p:nvSpPr>
+        <p:spPr>
+          <a:xfrm>
+            <a:off x="457200" y="5657850"/>
+            <a:ext cx="4114800" cy="742950"/>
           </a:xfrm>
           <a:prstGeom prst="rect">
             <a:avLst/>
@@ -7416,294 +7847,6 @@
           </a:bodyPr>
           <a:lstStyle/>
           <a:p>
-            <a:pPr>
-              <a:defRPr sz="2000" b="0">
-                <a:solidFill>
-                  <a:srgbClr val="2E86AB"/>
-                </a:solidFill>
-                <a:latin typeface="Source Sans Pro"/>
-              </a:defRPr>
-            </a:pPr>
-            <a:r>
-              <a:t>Primary Font: Inter</a:t>
-            </a:r>
-          </a:p>
-        </p:txBody>
-      </p:sp>
-      <p:sp>
-        <p:nvSpPr>
-          <p:cNvPr id="5" name="TextBox 4"/>
-          <p:cNvSpPr txBox="1"/>
-          <p:nvPr/>
-        </p:nvSpPr>
-        <p:spPr>
-          <a:xfrm>
-            <a:off x="1143000" y="2686050"/>
-            <a:ext cx="3429000" cy="742950"/>
-          </a:xfrm>
-          <a:prstGeom prst="rect">
-            <a:avLst/>
-          </a:prstGeom>
-          <a:noFill/>
-        </p:spPr>
-        <p:txBody>
-          <a:bodyPr wrap="none">
-            <a:spAutoFit/>
-          </a:bodyPr>
-          <a:lstStyle/>
-          <a:p>
-            <a:pPr>
-              <a:defRPr sz="3200" b="1">
-                <a:solidFill>
-                  <a:srgbClr val="2E86AB"/>
-                </a:solidFill>
-                <a:latin typeface="Inter"/>
-              </a:defRPr>
-            </a:pPr>
-            <a:r>
-              <a:t>H1 Heading</a:t>
-            </a:r>
-          </a:p>
-        </p:txBody>
-      </p:sp>
-      <p:sp>
-        <p:nvSpPr>
-          <p:cNvPr id="6" name="TextBox 5"/>
-          <p:cNvSpPr txBox="1"/>
-          <p:nvPr/>
-        </p:nvSpPr>
-        <p:spPr>
-          <a:xfrm>
-            <a:off x="1143000" y="3429000"/>
-            <a:ext cx="3429000" cy="742950"/>
-          </a:xfrm>
-          <a:prstGeom prst="rect">
-            <a:avLst/>
-          </a:prstGeom>
-          <a:noFill/>
-        </p:spPr>
-        <p:txBody>
-          <a:bodyPr wrap="none">
-            <a:spAutoFit/>
-          </a:bodyPr>
-          <a:lstStyle/>
-          <a:p>
-            <a:pPr>
-              <a:defRPr sz="2400" b="1">
-                <a:solidFill>
-                  <a:srgbClr val="2E86AB"/>
-                </a:solidFill>
-                <a:latin typeface="Inter"/>
-              </a:defRPr>
-            </a:pPr>
-            <a:r>
-              <a:t>H2 Heading</a:t>
-            </a:r>
-          </a:p>
-        </p:txBody>
-      </p:sp>
-      <p:sp>
-        <p:nvSpPr>
-          <p:cNvPr id="7" name="TextBox 6"/>
-          <p:cNvSpPr txBox="1"/>
-          <p:nvPr/>
-        </p:nvSpPr>
-        <p:spPr>
-          <a:xfrm>
-            <a:off x="1143000" y="4171950"/>
-            <a:ext cx="3429000" cy="742950"/>
-          </a:xfrm>
-          <a:prstGeom prst="rect">
-            <a:avLst/>
-          </a:prstGeom>
-          <a:noFill/>
-        </p:spPr>
-        <p:txBody>
-          <a:bodyPr wrap="none">
-            <a:spAutoFit/>
-          </a:bodyPr>
-          <a:lstStyle/>
-          <a:p>
-            <a:pPr>
-              <a:defRPr sz="2000" b="0">
-                <a:solidFill>
-                  <a:srgbClr val="2E86AB"/>
-                </a:solidFill>
-                <a:latin typeface="Inter"/>
-              </a:defRPr>
-            </a:pPr>
-            <a:r>
-              <a:t>H3 Heading</a:t>
-            </a:r>
-          </a:p>
-        </p:txBody>
-      </p:sp>
-      <p:sp>
-        <p:nvSpPr>
-          <p:cNvPr id="8" name="TextBox 7"/>
-          <p:cNvSpPr txBox="1"/>
-          <p:nvPr/>
-        </p:nvSpPr>
-        <p:spPr>
-          <a:xfrm>
-            <a:off x="5257800" y="1943100"/>
-            <a:ext cx="3429000" cy="742950"/>
-          </a:xfrm>
-          <a:prstGeom prst="rect">
-            <a:avLst/>
-          </a:prstGeom>
-          <a:noFill/>
-        </p:spPr>
-        <p:txBody>
-          <a:bodyPr wrap="none">
-            <a:spAutoFit/>
-          </a:bodyPr>
-          <a:lstStyle/>
-          <a:p>
-            <a:pPr>
-              <a:defRPr sz="2000" b="0">
-                <a:solidFill>
-                  <a:srgbClr val="2E86AB"/>
-                </a:solidFill>
-                <a:latin typeface="Source Sans Pro"/>
-              </a:defRPr>
-            </a:pPr>
-            <a:r>
-              <a:t>Secondary Font: Source Sans Pro</a:t>
-            </a:r>
-          </a:p>
-        </p:txBody>
-      </p:sp>
-      <p:sp>
-        <p:nvSpPr>
-          <p:cNvPr id="9" name="TextBox 8"/>
-          <p:cNvSpPr txBox="1"/>
-          <p:nvPr/>
-        </p:nvSpPr>
-        <p:spPr>
-          <a:xfrm>
-            <a:off x="5257800" y="2686050"/>
-            <a:ext cx="3429000" cy="742950"/>
-          </a:xfrm>
-          <a:prstGeom prst="rect">
-            <a:avLst/>
-          </a:prstGeom>
-          <a:noFill/>
-        </p:spPr>
-        <p:txBody>
-          <a:bodyPr wrap="none">
-            <a:spAutoFit/>
-          </a:bodyPr>
-          <a:lstStyle/>
-          <a:p>
-            <a:pPr>
-              <a:defRPr sz="1600" b="0">
-                <a:solidFill>
-                  <a:srgbClr val="2E86AB"/>
-                </a:solidFill>
-                <a:latin typeface="Source Sans Pro"/>
-              </a:defRPr>
-            </a:pPr>
-            <a:r>
-              <a:t>Body Text</a:t>
-            </a:r>
-          </a:p>
-        </p:txBody>
-      </p:sp>
-      <p:sp>
-        <p:nvSpPr>
-          <p:cNvPr id="10" name="TextBox 9"/>
-          <p:cNvSpPr txBox="1"/>
-          <p:nvPr/>
-        </p:nvSpPr>
-        <p:spPr>
-          <a:xfrm>
-            <a:off x="5257800" y="3429000"/>
-            <a:ext cx="3429000" cy="742950"/>
-          </a:xfrm>
-          <a:prstGeom prst="rect">
-            <a:avLst/>
-          </a:prstGeom>
-          <a:noFill/>
-        </p:spPr>
-        <p:txBody>
-          <a:bodyPr wrap="none">
-            <a:spAutoFit/>
-          </a:bodyPr>
-          <a:lstStyle/>
-          <a:p>
-            <a:pPr>
-              <a:defRPr sz="1600" b="1">
-                <a:solidFill>
-                  <a:srgbClr val="2E86AB"/>
-                </a:solidFill>
-                <a:latin typeface="Source Sans Pro"/>
-              </a:defRPr>
-            </a:pPr>
-            <a:r>
-              <a:t>Body Bold</a:t>
-            </a:r>
-          </a:p>
-        </p:txBody>
-      </p:sp>
-      <p:sp>
-        <p:nvSpPr>
-          <p:cNvPr id="11" name="TextBox 10"/>
-          <p:cNvSpPr txBox="1"/>
-          <p:nvPr/>
-        </p:nvSpPr>
-        <p:spPr>
-          <a:xfrm>
-            <a:off x="5257800" y="4171950"/>
-            <a:ext cx="3429000" cy="742950"/>
-          </a:xfrm>
-          <a:prstGeom prst="rect">
-            <a:avLst/>
-          </a:prstGeom>
-          <a:noFill/>
-        </p:spPr>
-        <p:txBody>
-          <a:bodyPr wrap="none">
-            <a:spAutoFit/>
-          </a:bodyPr>
-          <a:lstStyle/>
-          <a:p>
-            <a:pPr>
-              <a:defRPr sz="1200" b="0">
-                <a:solidFill>
-                  <a:srgbClr val="2E86AB"/>
-                </a:solidFill>
-                <a:latin typeface="Source Sans Pro"/>
-              </a:defRPr>
-            </a:pPr>
-            <a:r>
-              <a:t>Caption Text</a:t>
-            </a:r>
-          </a:p>
-        </p:txBody>
-      </p:sp>
-      <p:sp>
-        <p:nvSpPr>
-          <p:cNvPr id="12" name="TextBox 11"/>
-          <p:cNvSpPr txBox="1"/>
-          <p:nvPr/>
-        </p:nvSpPr>
-        <p:spPr>
-          <a:xfrm>
-            <a:off x="457200" y="5657850"/>
-            <a:ext cx="4114800" cy="742950"/>
-          </a:xfrm>
-          <a:prstGeom prst="rect">
-            <a:avLst/>
-          </a:prstGeom>
-          <a:noFill/>
-        </p:spPr>
-        <p:txBody>
-          <a:bodyPr wrap="none">
-            <a:spAutoFit/>
-          </a:bodyPr>
-          <a:lstStyle/>
-          <a:p>
             <a:pPr algn="l">
               <a:defRPr sz="1000" b="0">
                 <a:solidFill>
@@ -7720,7 +7863,7 @@
       </p:sp>
       <p:sp>
         <p:nvSpPr>
-          <p:cNvPr id="13" name="TextBox 12"/>
+          <p:cNvPr id="18" name="TextBox 17"/>
           <p:cNvSpPr txBox="1"/>
           <p:nvPr/>
         </p:nvSpPr>
@@ -7846,207 +7989,31 @@
               </a:defRPr>
             </a:pPr>
             <a:r>
-              <a:t>Visual &amp; Photography Guidelines</a:t>
-            </a:r>
-          </a:p>
-        </p:txBody>
-      </p:sp>
-      <p:sp>
-        <p:nvSpPr>
-          <p:cNvPr id="4" name="TextBox 3"/>
-          <p:cNvSpPr txBox="1"/>
+              <a:t>Color Palette</a:t>
+            </a:r>
+          </a:p>
+        </p:txBody>
+      </p:sp>
+      <p:sp>
+        <p:nvSpPr>
+          <p:cNvPr id="4" name="Rectangle 3"/>
+          <p:cNvSpPr/>
           <p:nvPr/>
         </p:nvSpPr>
         <p:spPr>
           <a:xfrm>
             <a:off x="1143000" y="1943100"/>
-            <a:ext cx="3429000" cy="2971800"/>
-          </a:xfrm>
-          <a:prstGeom prst="rect">
-            <a:avLst/>
-          </a:prstGeom>
-          <a:noFill/>
-        </p:spPr>
-        <p:txBody>
-          <a:bodyPr wrap="square">
-            <a:spAutoFit/>
-          </a:bodyPr>
-          <a:lstStyle/>
-          <a:p>
-            <a:pPr>
-              <a:defRPr sz="1800" b="0">
-                <a:solidFill>
-                  <a:srgbClr val="2E86AB"/>
-                </a:solidFill>
-                <a:latin typeface="Source Sans Pro"/>
-              </a:defRPr>
-            </a:pPr>
-            <a:r>
-              <a:t>Visual Style Guidelines:</a:t>
-            </a:r>
-          </a:p>
-          <a:p>
-            <a:pPr>
-              <a:defRPr sz="1400" b="0">
-                <a:solidFill>
-                  <a:srgbClr val="2E86AB"/>
-                </a:solidFill>
-                <a:latin typeface="Source Sans Pro"/>
-              </a:defRPr>
-            </a:pPr>
-            <a:r>
-              <a:t>• Modern</a:t>
-            </a:r>
-          </a:p>
-          <a:p>
-            <a:pPr>
-              <a:defRPr sz="1400" b="0">
-                <a:solidFill>
-                  <a:srgbClr val="2E86AB"/>
-                </a:solidFill>
-                <a:latin typeface="Source Sans Pro"/>
-              </a:defRPr>
-            </a:pPr>
-            <a:r>
-              <a:t>• clean</a:t>
-            </a:r>
-          </a:p>
-          <a:p>
-            <a:pPr>
-              <a:defRPr sz="1400" b="0">
-                <a:solidFill>
-                  <a:srgbClr val="2E86AB"/>
-                </a:solidFill>
-                <a:latin typeface="Source Sans Pro"/>
-              </a:defRPr>
-            </a:pPr>
-            <a:r>
-              <a:t>• professional</a:t>
-            </a:r>
-          </a:p>
-          <a:p>
-            <a:pPr>
-              <a:defRPr sz="1400" b="0">
-                <a:solidFill>
-                  <a:srgbClr val="2E86AB"/>
-                </a:solidFill>
-                <a:latin typeface="Source Sans Pro"/>
-              </a:defRPr>
-            </a:pPr>
-            <a:r>
-              <a:t>• minimalist</a:t>
-            </a:r>
-          </a:p>
-          <a:p>
-            <a:pPr>
-              <a:defRPr sz="1400" b="0">
-                <a:solidFill>
-                  <a:srgbClr val="2E86AB"/>
-                </a:solidFill>
-                <a:latin typeface="Source Sans Pro"/>
-              </a:defRPr>
-            </a:pPr>
-            <a:r>
-              <a:t>• bold typography</a:t>
-            </a:r>
-          </a:p>
-        </p:txBody>
-      </p:sp>
-      <p:sp>
-        <p:nvSpPr>
-          <p:cNvPr id="5" name="TextBox 4"/>
-          <p:cNvSpPr txBox="1"/>
-          <p:nvPr/>
-        </p:nvSpPr>
-        <p:spPr>
-          <a:xfrm>
-            <a:off x="5257800" y="1943100"/>
-            <a:ext cx="3429000" cy="2971800"/>
-          </a:xfrm>
-          <a:prstGeom prst="rect">
-            <a:avLst/>
-          </a:prstGeom>
-          <a:noFill/>
-        </p:spPr>
-        <p:txBody>
-          <a:bodyPr wrap="square">
-            <a:spAutoFit/>
-          </a:bodyPr>
-          <a:lstStyle/>
-          <a:p>
-            <a:pPr>
-              <a:defRPr sz="1800" b="0">
-                <a:solidFill>
-                  <a:srgbClr val="2E86AB"/>
-                </a:solidFill>
-                <a:latin typeface="Source Sans Pro"/>
-              </a:defRPr>
-            </a:pPr>
-            <a:r>
-              <a:t>Photography Guidelines:</a:t>
-            </a:r>
-          </a:p>
-          <a:p>
-            <a:pPr>
-              <a:defRPr sz="1400" b="0">
-                <a:solidFill>
-                  <a:srgbClr val="2E86AB"/>
-                </a:solidFill>
-                <a:latin typeface="Source Sans Pro"/>
-              </a:defRPr>
-            </a:pPr>
-            <a:r>
-              <a:t>• High contrast</a:t>
-            </a:r>
-          </a:p>
-          <a:p>
-            <a:pPr>
-              <a:defRPr sz="1400" b="0">
-                <a:solidFill>
-                  <a:srgbClr val="2E86AB"/>
-                </a:solidFill>
-                <a:latin typeface="Source Sans Pro"/>
-              </a:defRPr>
-            </a:pPr>
-            <a:r>
-              <a:t>• authentic moments</a:t>
-            </a:r>
-          </a:p>
-          <a:p>
-            <a:pPr>
-              <a:defRPr sz="1400" b="0">
-                <a:solidFill>
-                  <a:srgbClr val="2E86AB"/>
-                </a:solidFill>
-                <a:latin typeface="Source Sans Pro"/>
-              </a:defRPr>
-            </a:pPr>
-            <a:r>
-              <a:t>• natural lighting</a:t>
-            </a:r>
-          </a:p>
-        </p:txBody>
-      </p:sp>
-      <p:sp>
-        <p:nvSpPr>
-          <p:cNvPr id="6" name="Rectangle 5"/>
-          <p:cNvSpPr/>
-          <p:nvPr/>
-        </p:nvSpPr>
-        <p:spPr>
-          <a:xfrm>
-            <a:off x="5257800" y="4914900"/>
-            <a:ext cx="685800" cy="742950"/>
+            <a:ext cx="2057400" cy="1485900"/>
           </a:xfrm>
           <a:prstGeom prst="rect">
             <a:avLst/>
           </a:prstGeom>
           <a:solidFill>
-            <a:srgbClr val="404040"/>
+            <a:srgbClr val="2E86AB"/>
           </a:solidFill>
           <a:ln w="12700">
             <a:solidFill>
-              <a:srgbClr val="808080"/>
+              <a:srgbClr val="FFFFFF"/>
             </a:solidFill>
           </a:ln>
         </p:spPr>
@@ -8074,14 +8041,14 @@
       </p:sp>
       <p:sp>
         <p:nvSpPr>
-          <p:cNvPr id="7" name="TextBox 6"/>
+          <p:cNvPr id="5" name="TextBox 4"/>
           <p:cNvSpPr txBox="1"/>
           <p:nvPr/>
         </p:nvSpPr>
         <p:spPr>
           <a:xfrm>
-            <a:off x="5257800" y="5162550"/>
-            <a:ext cx="685800" cy="247650"/>
+            <a:off x="1143000" y="3429000"/>
+            <a:ext cx="2057400" cy="1485900"/>
           </a:xfrm>
           <a:prstGeom prst="rect">
             <a:avLst/>
@@ -8089,45 +8056,97 @@
           <a:noFill/>
         </p:spPr>
         <p:txBody>
-          <a:bodyPr wrap="none">
+          <a:bodyPr wrap="square">
             <a:spAutoFit/>
           </a:bodyPr>
           <a:lstStyle/>
           <a:p>
-            <a:pPr algn="ctr">
-              <a:defRPr sz="800" b="0">
-                <a:solidFill>
-                  <a:srgbClr val="2E86AB"/>
-                </a:solidFill>
-                <a:latin typeface="Source Sans Pro"/>
-              </a:defRPr>
-            </a:pPr>
-            <a:r>
-              <a:t>Example</a:t>
-            </a:r>
-          </a:p>
-        </p:txBody>
-      </p:sp>
-      <p:sp>
-        <p:nvSpPr>
-          <p:cNvPr id="8" name="Rectangle 7"/>
+            <a:pPr>
+              <a:defRPr sz="1000" b="0">
+                <a:solidFill>
+                  <a:srgbClr val="2E86AB"/>
+                </a:solidFill>
+                <a:latin typeface="Source Sans Pro"/>
+              </a:defRPr>
+            </a:pPr>
+            <a:r>
+              <a:t>Primary</a:t>
+            </a:r>
+          </a:p>
+          <a:p>
+            <a:pPr>
+              <a:defRPr sz="1000" b="0">
+                <a:solidFill>
+                  <a:srgbClr val="2E86AB"/>
+                </a:solidFill>
+                <a:latin typeface="Source Sans Pro"/>
+              </a:defRPr>
+            </a:pPr>
+            <a:r>
+              <a:t>#2E86AB</a:t>
+            </a:r>
+          </a:p>
+          <a:p>
+            <a:pPr>
+              <a:defRPr sz="1000" b="0">
+                <a:solidFill>
+                  <a:srgbClr val="2E86AB"/>
+                </a:solidFill>
+                <a:latin typeface="Source Sans Pro"/>
+              </a:defRPr>
+            </a:pPr>
+            <a:r>
+              <a:t>RGB(46, 134, 171)</a:t>
+            </a:r>
+          </a:p>
+          <a:p>
+            <a:pPr>
+              <a:defRPr sz="1000" b="0">
+                <a:solidFill>
+                  <a:srgbClr val="2E86AB"/>
+                </a:solidFill>
+                <a:latin typeface="Source Sans Pro"/>
+              </a:defRPr>
+            </a:pPr>
+            <a:r>
+              <a:t>CMYK(73, 21, 0, 32)</a:t>
+            </a:r>
+          </a:p>
+          <a:p>
+            <a:pPr>
+              <a:defRPr sz="1000" b="0">
+                <a:solidFill>
+                  <a:srgbClr val="2E86AB"/>
+                </a:solidFill>
+                <a:latin typeface="Source Sans Pro"/>
+              </a:defRPr>
+            </a:pPr>
+            <a:r>
+              <a:t>Use Light Text</a:t>
+            </a:r>
+          </a:p>
+        </p:txBody>
+      </p:sp>
+      <p:sp>
+        <p:nvSpPr>
+          <p:cNvPr id="6" name="Rectangle 5"/>
           <p:cNvSpPr/>
           <p:nvPr/>
         </p:nvSpPr>
         <p:spPr>
           <a:xfrm>
-            <a:off x="6629400" y="4914900"/>
-            <a:ext cx="685800" cy="742950"/>
+            <a:off x="3886200" y="1943100"/>
+            <a:ext cx="2057400" cy="1485900"/>
           </a:xfrm>
           <a:prstGeom prst="rect">
             <a:avLst/>
           </a:prstGeom>
           <a:solidFill>
-            <a:srgbClr val="404040"/>
+            <a:srgbClr val="A23B72"/>
           </a:solidFill>
           <a:ln w="12700">
             <a:solidFill>
-              <a:srgbClr val="808080"/>
+              <a:srgbClr val="FFFFFF"/>
             </a:solidFill>
           </a:ln>
         </p:spPr>
@@ -8155,14 +8174,14 @@
       </p:sp>
       <p:sp>
         <p:nvSpPr>
-          <p:cNvPr id="9" name="TextBox 8"/>
+          <p:cNvPr id="7" name="TextBox 6"/>
           <p:cNvSpPr txBox="1"/>
           <p:nvPr/>
         </p:nvSpPr>
         <p:spPr>
           <a:xfrm>
-            <a:off x="6629400" y="5162550"/>
-            <a:ext cx="685800" cy="247650"/>
+            <a:off x="3886200" y="3429000"/>
+            <a:ext cx="2057400" cy="1485900"/>
           </a:xfrm>
           <a:prstGeom prst="rect">
             <a:avLst/>
@@ -8170,45 +8189,97 @@
           <a:noFill/>
         </p:spPr>
         <p:txBody>
-          <a:bodyPr wrap="none">
+          <a:bodyPr wrap="square">
             <a:spAutoFit/>
           </a:bodyPr>
           <a:lstStyle/>
           <a:p>
-            <a:pPr algn="ctr">
-              <a:defRPr sz="800" b="0">
-                <a:solidFill>
-                  <a:srgbClr val="2E86AB"/>
-                </a:solidFill>
-                <a:latin typeface="Source Sans Pro"/>
-              </a:defRPr>
-            </a:pPr>
-            <a:r>
-              <a:t>Example</a:t>
-            </a:r>
-          </a:p>
-        </p:txBody>
-      </p:sp>
-      <p:sp>
-        <p:nvSpPr>
-          <p:cNvPr id="10" name="Rectangle 9"/>
+            <a:pPr>
+              <a:defRPr sz="1000" b="0">
+                <a:solidFill>
+                  <a:srgbClr val="2E86AB"/>
+                </a:solidFill>
+                <a:latin typeface="Source Sans Pro"/>
+              </a:defRPr>
+            </a:pPr>
+            <a:r>
+              <a:t>Secondary</a:t>
+            </a:r>
+          </a:p>
+          <a:p>
+            <a:pPr>
+              <a:defRPr sz="1000" b="0">
+                <a:solidFill>
+                  <a:srgbClr val="2E86AB"/>
+                </a:solidFill>
+                <a:latin typeface="Source Sans Pro"/>
+              </a:defRPr>
+            </a:pPr>
+            <a:r>
+              <a:t>#A23B72</a:t>
+            </a:r>
+          </a:p>
+          <a:p>
+            <a:pPr>
+              <a:defRPr sz="1000" b="0">
+                <a:solidFill>
+                  <a:srgbClr val="2E86AB"/>
+                </a:solidFill>
+                <a:latin typeface="Source Sans Pro"/>
+              </a:defRPr>
+            </a:pPr>
+            <a:r>
+              <a:t>RGB(162, 59, 114)</a:t>
+            </a:r>
+          </a:p>
+          <a:p>
+            <a:pPr>
+              <a:defRPr sz="1000" b="0">
+                <a:solidFill>
+                  <a:srgbClr val="2E86AB"/>
+                </a:solidFill>
+                <a:latin typeface="Source Sans Pro"/>
+              </a:defRPr>
+            </a:pPr>
+            <a:r>
+              <a:t>CMYK(0, 63, 29, 36)</a:t>
+            </a:r>
+          </a:p>
+          <a:p>
+            <a:pPr>
+              <a:defRPr sz="1000" b="0">
+                <a:solidFill>
+                  <a:srgbClr val="2E86AB"/>
+                </a:solidFill>
+                <a:latin typeface="Source Sans Pro"/>
+              </a:defRPr>
+            </a:pPr>
+            <a:r>
+              <a:t>Use Light Text</a:t>
+            </a:r>
+          </a:p>
+        </p:txBody>
+      </p:sp>
+      <p:sp>
+        <p:nvSpPr>
+          <p:cNvPr id="8" name="Rectangle 7"/>
           <p:cNvSpPr/>
           <p:nvPr/>
         </p:nvSpPr>
         <p:spPr>
           <a:xfrm>
-            <a:off x="8001000" y="4914900"/>
-            <a:ext cx="685800" cy="742950"/>
+            <a:off x="6629400" y="1943100"/>
+            <a:ext cx="2057400" cy="1485900"/>
           </a:xfrm>
           <a:prstGeom prst="rect">
             <a:avLst/>
           </a:prstGeom>
           <a:solidFill>
-            <a:srgbClr val="404040"/>
+            <a:srgbClr val="F18F01"/>
           </a:solidFill>
           <a:ln w="12700">
             <a:solidFill>
-              <a:srgbClr val="808080"/>
+              <a:srgbClr val="FFFFFF"/>
             </a:solidFill>
           </a:ln>
         </p:spPr>
@@ -8236,14 +8307,102 @@
       </p:sp>
       <p:sp>
         <p:nvSpPr>
-          <p:cNvPr id="11" name="TextBox 10"/>
+          <p:cNvPr id="9" name="TextBox 8"/>
           <p:cNvSpPr txBox="1"/>
           <p:nvPr/>
         </p:nvSpPr>
         <p:spPr>
           <a:xfrm>
-            <a:off x="8001000" y="5162550"/>
-            <a:ext cx="685800" cy="247650"/>
+            <a:off x="6629400" y="3429000"/>
+            <a:ext cx="2057400" cy="1485900"/>
+          </a:xfrm>
+          <a:prstGeom prst="rect">
+            <a:avLst/>
+          </a:prstGeom>
+          <a:noFill/>
+        </p:spPr>
+        <p:txBody>
+          <a:bodyPr wrap="square">
+            <a:spAutoFit/>
+          </a:bodyPr>
+          <a:lstStyle/>
+          <a:p>
+            <a:pPr>
+              <a:defRPr sz="1000" b="0">
+                <a:solidFill>
+                  <a:srgbClr val="2E86AB"/>
+                </a:solidFill>
+                <a:latin typeface="Source Sans Pro"/>
+              </a:defRPr>
+            </a:pPr>
+            <a:r>
+              <a:t>Accent</a:t>
+            </a:r>
+          </a:p>
+          <a:p>
+            <a:pPr>
+              <a:defRPr sz="1000" b="0">
+                <a:solidFill>
+                  <a:srgbClr val="2E86AB"/>
+                </a:solidFill>
+                <a:latin typeface="Source Sans Pro"/>
+              </a:defRPr>
+            </a:pPr>
+            <a:r>
+              <a:t>#F18F01</a:t>
+            </a:r>
+          </a:p>
+          <a:p>
+            <a:pPr>
+              <a:defRPr sz="1000" b="0">
+                <a:solidFill>
+                  <a:srgbClr val="2E86AB"/>
+                </a:solidFill>
+                <a:latin typeface="Source Sans Pro"/>
+              </a:defRPr>
+            </a:pPr>
+            <a:r>
+              <a:t>RGB(241, 143, 1)</a:t>
+            </a:r>
+          </a:p>
+          <a:p>
+            <a:pPr>
+              <a:defRPr sz="1000" b="0">
+                <a:solidFill>
+                  <a:srgbClr val="2E86AB"/>
+                </a:solidFill>
+                <a:latin typeface="Source Sans Pro"/>
+              </a:defRPr>
+            </a:pPr>
+            <a:r>
+              <a:t>CMYK(0, 40, 99, 5)</a:t>
+            </a:r>
+          </a:p>
+          <a:p>
+            <a:pPr>
+              <a:defRPr sz="1000" b="0">
+                <a:solidFill>
+                  <a:srgbClr val="2E86AB"/>
+                </a:solidFill>
+                <a:latin typeface="Source Sans Pro"/>
+              </a:defRPr>
+            </a:pPr>
+            <a:r>
+              <a:t>Use Dark Text</a:t>
+            </a:r>
+          </a:p>
+        </p:txBody>
+      </p:sp>
+      <p:sp>
+        <p:nvSpPr>
+          <p:cNvPr id="10" name="TextBox 9"/>
+          <p:cNvSpPr txBox="1"/>
+          <p:nvPr/>
+        </p:nvSpPr>
+        <p:spPr>
+          <a:xfrm>
+            <a:off x="457200" y="5657850"/>
+            <a:ext cx="4114800" cy="742950"/>
           </a:xfrm>
           <a:prstGeom prst="rect">
             <a:avLst/>
@@ -8256,42 +8415,6 @@
           </a:bodyPr>
           <a:lstStyle/>
           <a:p>
-            <a:pPr algn="ctr">
-              <a:defRPr sz="800" b="0">
-                <a:solidFill>
-                  <a:srgbClr val="2E86AB"/>
-                </a:solidFill>
-                <a:latin typeface="Source Sans Pro"/>
-              </a:defRPr>
-            </a:pPr>
-            <a:r>
-              <a:t>Example</a:t>
-            </a:r>
-          </a:p>
-        </p:txBody>
-      </p:sp>
-      <p:sp>
-        <p:nvSpPr>
-          <p:cNvPr id="12" name="TextBox 11"/>
-          <p:cNvSpPr txBox="1"/>
-          <p:nvPr/>
-        </p:nvSpPr>
-        <p:spPr>
-          <a:xfrm>
-            <a:off x="457200" y="5657850"/>
-            <a:ext cx="4114800" cy="742950"/>
-          </a:xfrm>
-          <a:prstGeom prst="rect">
-            <a:avLst/>
-          </a:prstGeom>
-          <a:noFill/>
-        </p:spPr>
-        <p:txBody>
-          <a:bodyPr wrap="none">
-            <a:spAutoFit/>
-          </a:bodyPr>
-          <a:lstStyle/>
-          <a:p>
             <a:pPr algn="l">
               <a:defRPr sz="1000" b="0">
                 <a:solidFill>
@@ -8308,7 +8431,7 @@
       </p:sp>
       <p:sp>
         <p:nvSpPr>
-          <p:cNvPr id="13" name="TextBox 12"/>
+          <p:cNvPr id="11" name="TextBox 10"/>
           <p:cNvSpPr txBox="1"/>
           <p:nvPr/>
         </p:nvSpPr>
@@ -8434,7 +8557,7 @@
               </a:defRPr>
             </a:pPr>
             <a:r>
-              <a:t>Brand Story &amp; Mission</a:t>
+              <a:t>Typography</a:t>
             </a:r>
           </a:p>
         </p:txBody>
@@ -8448,43 +8571,7 @@
         <p:spPr>
           <a:xfrm>
             <a:off x="1143000" y="1943100"/>
-            <a:ext cx="6858000" cy="2971800"/>
-          </a:xfrm>
-          <a:prstGeom prst="rect">
-            <a:avLst/>
-          </a:prstGeom>
-          <a:noFill/>
-        </p:spPr>
-        <p:txBody>
-          <a:bodyPr wrap="square">
-            <a:spAutoFit/>
-          </a:bodyPr>
-          <a:lstStyle/>
-          <a:p>
-            <a:pPr>
-              <a:defRPr sz="1600" b="0">
-                <a:solidFill>
-                  <a:srgbClr val="2E86AB"/>
-                </a:solidFill>
-                <a:latin typeface="Source Sans Pro"/>
-              </a:defRPr>
-            </a:pPr>
-            <a:r>
-              <a:t>We revolutionize technology through innovative design and human-centered solutions that empower businesses to achieve their digital transformation goals.</a:t>
-            </a:r>
-          </a:p>
-        </p:txBody>
-      </p:sp>
-      <p:sp>
-        <p:nvSpPr>
-          <p:cNvPr id="5" name="TextBox 4"/>
-          <p:cNvSpPr txBox="1"/>
-          <p:nvPr/>
-        </p:nvSpPr>
-        <p:spPr>
-          <a:xfrm>
-            <a:off x="457200" y="5657850"/>
-            <a:ext cx="4114800" cy="742950"/>
+            <a:ext cx="3429000" cy="742950"/>
           </a:xfrm>
           <a:prstGeom prst="rect">
             <a:avLst/>
@@ -8497,6 +8584,294 @@
           </a:bodyPr>
           <a:lstStyle/>
           <a:p>
+            <a:pPr>
+              <a:defRPr sz="2000" b="0">
+                <a:solidFill>
+                  <a:srgbClr val="2E86AB"/>
+                </a:solidFill>
+                <a:latin typeface="Source Sans Pro"/>
+              </a:defRPr>
+            </a:pPr>
+            <a:r>
+              <a:t>Primary Font: Inter</a:t>
+            </a:r>
+          </a:p>
+        </p:txBody>
+      </p:sp>
+      <p:sp>
+        <p:nvSpPr>
+          <p:cNvPr id="5" name="TextBox 4"/>
+          <p:cNvSpPr txBox="1"/>
+          <p:nvPr/>
+        </p:nvSpPr>
+        <p:spPr>
+          <a:xfrm>
+            <a:off x="1143000" y="2686050"/>
+            <a:ext cx="3429000" cy="742950"/>
+          </a:xfrm>
+          <a:prstGeom prst="rect">
+            <a:avLst/>
+          </a:prstGeom>
+          <a:noFill/>
+        </p:spPr>
+        <p:txBody>
+          <a:bodyPr wrap="none">
+            <a:spAutoFit/>
+          </a:bodyPr>
+          <a:lstStyle/>
+          <a:p>
+            <a:pPr>
+              <a:defRPr sz="3200" b="1">
+                <a:solidFill>
+                  <a:srgbClr val="2E86AB"/>
+                </a:solidFill>
+                <a:latin typeface="Inter"/>
+              </a:defRPr>
+            </a:pPr>
+            <a:r>
+              <a:t>H1 Heading</a:t>
+            </a:r>
+          </a:p>
+        </p:txBody>
+      </p:sp>
+      <p:sp>
+        <p:nvSpPr>
+          <p:cNvPr id="6" name="TextBox 5"/>
+          <p:cNvSpPr txBox="1"/>
+          <p:nvPr/>
+        </p:nvSpPr>
+        <p:spPr>
+          <a:xfrm>
+            <a:off x="1143000" y="3429000"/>
+            <a:ext cx="3429000" cy="742950"/>
+          </a:xfrm>
+          <a:prstGeom prst="rect">
+            <a:avLst/>
+          </a:prstGeom>
+          <a:noFill/>
+        </p:spPr>
+        <p:txBody>
+          <a:bodyPr wrap="none">
+            <a:spAutoFit/>
+          </a:bodyPr>
+          <a:lstStyle/>
+          <a:p>
+            <a:pPr>
+              <a:defRPr sz="2400" b="1">
+                <a:solidFill>
+                  <a:srgbClr val="2E86AB"/>
+                </a:solidFill>
+                <a:latin typeface="Inter"/>
+              </a:defRPr>
+            </a:pPr>
+            <a:r>
+              <a:t>H2 Heading</a:t>
+            </a:r>
+          </a:p>
+        </p:txBody>
+      </p:sp>
+      <p:sp>
+        <p:nvSpPr>
+          <p:cNvPr id="7" name="TextBox 6"/>
+          <p:cNvSpPr txBox="1"/>
+          <p:nvPr/>
+        </p:nvSpPr>
+        <p:spPr>
+          <a:xfrm>
+            <a:off x="1143000" y="4171950"/>
+            <a:ext cx="3429000" cy="742950"/>
+          </a:xfrm>
+          <a:prstGeom prst="rect">
+            <a:avLst/>
+          </a:prstGeom>
+          <a:noFill/>
+        </p:spPr>
+        <p:txBody>
+          <a:bodyPr wrap="none">
+            <a:spAutoFit/>
+          </a:bodyPr>
+          <a:lstStyle/>
+          <a:p>
+            <a:pPr>
+              <a:defRPr sz="2000" b="0">
+                <a:solidFill>
+                  <a:srgbClr val="2E86AB"/>
+                </a:solidFill>
+                <a:latin typeface="Inter"/>
+              </a:defRPr>
+            </a:pPr>
+            <a:r>
+              <a:t>H3 Heading</a:t>
+            </a:r>
+          </a:p>
+        </p:txBody>
+      </p:sp>
+      <p:sp>
+        <p:nvSpPr>
+          <p:cNvPr id="8" name="TextBox 7"/>
+          <p:cNvSpPr txBox="1"/>
+          <p:nvPr/>
+        </p:nvSpPr>
+        <p:spPr>
+          <a:xfrm>
+            <a:off x="5257800" y="1943100"/>
+            <a:ext cx="3429000" cy="742950"/>
+          </a:xfrm>
+          <a:prstGeom prst="rect">
+            <a:avLst/>
+          </a:prstGeom>
+          <a:noFill/>
+        </p:spPr>
+        <p:txBody>
+          <a:bodyPr wrap="none">
+            <a:spAutoFit/>
+          </a:bodyPr>
+          <a:lstStyle/>
+          <a:p>
+            <a:pPr>
+              <a:defRPr sz="2000" b="0">
+                <a:solidFill>
+                  <a:srgbClr val="2E86AB"/>
+                </a:solidFill>
+                <a:latin typeface="Source Sans Pro"/>
+              </a:defRPr>
+            </a:pPr>
+            <a:r>
+              <a:t>Secondary Font: Source Sans Pro</a:t>
+            </a:r>
+          </a:p>
+        </p:txBody>
+      </p:sp>
+      <p:sp>
+        <p:nvSpPr>
+          <p:cNvPr id="9" name="TextBox 8"/>
+          <p:cNvSpPr txBox="1"/>
+          <p:nvPr/>
+        </p:nvSpPr>
+        <p:spPr>
+          <a:xfrm>
+            <a:off x="5257800" y="2686050"/>
+            <a:ext cx="3429000" cy="742950"/>
+          </a:xfrm>
+          <a:prstGeom prst="rect">
+            <a:avLst/>
+          </a:prstGeom>
+          <a:noFill/>
+        </p:spPr>
+        <p:txBody>
+          <a:bodyPr wrap="none">
+            <a:spAutoFit/>
+          </a:bodyPr>
+          <a:lstStyle/>
+          <a:p>
+            <a:pPr>
+              <a:defRPr sz="1600" b="0">
+                <a:solidFill>
+                  <a:srgbClr val="2E86AB"/>
+                </a:solidFill>
+                <a:latin typeface="Source Sans Pro"/>
+              </a:defRPr>
+            </a:pPr>
+            <a:r>
+              <a:t>Body Text</a:t>
+            </a:r>
+          </a:p>
+        </p:txBody>
+      </p:sp>
+      <p:sp>
+        <p:nvSpPr>
+          <p:cNvPr id="10" name="TextBox 9"/>
+          <p:cNvSpPr txBox="1"/>
+          <p:nvPr/>
+        </p:nvSpPr>
+        <p:spPr>
+          <a:xfrm>
+            <a:off x="5257800" y="3429000"/>
+            <a:ext cx="3429000" cy="742950"/>
+          </a:xfrm>
+          <a:prstGeom prst="rect">
+            <a:avLst/>
+          </a:prstGeom>
+          <a:noFill/>
+        </p:spPr>
+        <p:txBody>
+          <a:bodyPr wrap="none">
+            <a:spAutoFit/>
+          </a:bodyPr>
+          <a:lstStyle/>
+          <a:p>
+            <a:pPr>
+              <a:defRPr sz="1600" b="1">
+                <a:solidFill>
+                  <a:srgbClr val="2E86AB"/>
+                </a:solidFill>
+                <a:latin typeface="Source Sans Pro"/>
+              </a:defRPr>
+            </a:pPr>
+            <a:r>
+              <a:t>Body Bold</a:t>
+            </a:r>
+          </a:p>
+        </p:txBody>
+      </p:sp>
+      <p:sp>
+        <p:nvSpPr>
+          <p:cNvPr id="11" name="TextBox 10"/>
+          <p:cNvSpPr txBox="1"/>
+          <p:nvPr/>
+        </p:nvSpPr>
+        <p:spPr>
+          <a:xfrm>
+            <a:off x="5257800" y="4171950"/>
+            <a:ext cx="3429000" cy="742950"/>
+          </a:xfrm>
+          <a:prstGeom prst="rect">
+            <a:avLst/>
+          </a:prstGeom>
+          <a:noFill/>
+        </p:spPr>
+        <p:txBody>
+          <a:bodyPr wrap="none">
+            <a:spAutoFit/>
+          </a:bodyPr>
+          <a:lstStyle/>
+          <a:p>
+            <a:pPr>
+              <a:defRPr sz="1200" b="0">
+                <a:solidFill>
+                  <a:srgbClr val="2E86AB"/>
+                </a:solidFill>
+                <a:latin typeface="Source Sans Pro"/>
+              </a:defRPr>
+            </a:pPr>
+            <a:r>
+              <a:t>Caption Text</a:t>
+            </a:r>
+          </a:p>
+        </p:txBody>
+      </p:sp>
+      <p:sp>
+        <p:nvSpPr>
+          <p:cNvPr id="12" name="TextBox 11"/>
+          <p:cNvSpPr txBox="1"/>
+          <p:nvPr/>
+        </p:nvSpPr>
+        <p:spPr>
+          <a:xfrm>
+            <a:off x="457200" y="5657850"/>
+            <a:ext cx="4114800" cy="742950"/>
+          </a:xfrm>
+          <a:prstGeom prst="rect">
+            <a:avLst/>
+          </a:prstGeom>
+          <a:noFill/>
+        </p:spPr>
+        <p:txBody>
+          <a:bodyPr wrap="none">
+            <a:spAutoFit/>
+          </a:bodyPr>
+          <a:lstStyle/>
+          <a:p>
             <a:pPr algn="l">
               <a:defRPr sz="1000" b="0">
                 <a:solidFill>
@@ -8513,7 +8888,7 @@
       </p:sp>
       <p:sp>
         <p:nvSpPr>
-          <p:cNvPr id="6" name="TextBox 5"/>
+          <p:cNvPr id="13" name="TextBox 12"/>
           <p:cNvSpPr txBox="1"/>
           <p:nvPr/>
         </p:nvSpPr>

--- a/output/techforward_live/techforward_live_enhanced_brand_book.pptx
+++ b/output/techforward_live/techforward_live_enhanced_brand_book.pptx
@@ -19,9 +19,6 @@
     <p:sldId id="267" r:id="rId18"/>
     <p:sldId id="268" r:id="rId19"/>
     <p:sldId id="269" r:id="rId20"/>
-    <p:sldId id="270" r:id="rId21"/>
-    <p:sldId id="271" r:id="rId22"/>
-    <p:sldId id="272" r:id="rId23"/>
   </p:sldIdLst>
   <p:sldSz cx="9144000" cy="6858000" type="screen4x3"/>
   <p:notesSz cx="6858000" cy="9144000"/>
@@ -3311,7 +3308,7 @@
               </a:defRPr>
             </a:pPr>
             <a:r>
-              <a:t>Visual &amp; Photography Guidelines</a:t>
+              <a:t>Messaging &amp; Value Propositions</a:t>
             </a:r>
           </a:p>
         </p:txBody>
@@ -3325,7 +3322,7 @@
         <p:spPr>
           <a:xfrm>
             <a:off x="1143000" y="1943100"/>
-            <a:ext cx="3429000" cy="2971800"/>
+            <a:ext cx="6858000" cy="2971800"/>
           </a:xfrm>
           <a:prstGeom prst="rect">
             <a:avLst/>
@@ -3339,80 +3336,15 @@
           <a:lstStyle/>
           <a:p>
             <a:pPr>
-              <a:defRPr sz="1800" b="0">
-                <a:solidFill>
-                  <a:srgbClr val="2E86AB"/>
-                </a:solidFill>
-                <a:latin typeface="Source Sans Pro"/>
-              </a:defRPr>
-            </a:pPr>
-            <a:r>
-              <a:t>Visual Style Guidelines:</a:t>
-            </a:r>
-          </a:p>
-          <a:p>
-            <a:pPr>
-              <a:defRPr sz="1400" b="0">
-                <a:solidFill>
-                  <a:srgbClr val="2E86AB"/>
-                </a:solidFill>
-                <a:latin typeface="Source Sans Pro"/>
-              </a:defRPr>
-            </a:pPr>
-            <a:r>
-              <a:t>• Modern</a:t>
-            </a:r>
-          </a:p>
-          <a:p>
-            <a:pPr>
-              <a:defRPr sz="1400" b="0">
-                <a:solidFill>
-                  <a:srgbClr val="2E86AB"/>
-                </a:solidFill>
-                <a:latin typeface="Source Sans Pro"/>
-              </a:defRPr>
-            </a:pPr>
-            <a:r>
-              <a:t>• clean</a:t>
-            </a:r>
-          </a:p>
-          <a:p>
-            <a:pPr>
-              <a:defRPr sz="1400" b="0">
-                <a:solidFill>
-                  <a:srgbClr val="2E86AB"/>
-                </a:solidFill>
-                <a:latin typeface="Source Sans Pro"/>
-              </a:defRPr>
-            </a:pPr>
-            <a:r>
-              <a:t>• professional</a:t>
-            </a:r>
-          </a:p>
-          <a:p>
-            <a:pPr>
-              <a:defRPr sz="1400" b="0">
-                <a:solidFill>
-                  <a:srgbClr val="2E86AB"/>
-                </a:solidFill>
-                <a:latin typeface="Source Sans Pro"/>
-              </a:defRPr>
-            </a:pPr>
-            <a:r>
-              <a:t>• minimalist</a:t>
-            </a:r>
-          </a:p>
-          <a:p>
-            <a:pPr>
-              <a:defRPr sz="1400" b="0">
-                <a:solidFill>
-                  <a:srgbClr val="2E86AB"/>
-                </a:solidFill>
-                <a:latin typeface="Source Sans Pro"/>
-              </a:defRPr>
-            </a:pPr>
-            <a:r>
-              <a:t>• bold typography</a:t>
+              <a:defRPr sz="1600" b="0">
+                <a:solidFill>
+                  <a:srgbClr val="2E86AB"/>
+                </a:solidFill>
+                <a:latin typeface="Source Sans Pro"/>
+              </a:defRPr>
+            </a:pPr>
+            <a:r>
+              <a:t>Our core message centers on bridging the gap between complex technology and intuitive user experiences.</a:t>
             </a:r>
           </a:p>
         </p:txBody>
@@ -3420,324 +3352,6 @@
       <p:sp>
         <p:nvSpPr>
           <p:cNvPr id="5" name="TextBox 4"/>
-          <p:cNvSpPr txBox="1"/>
-          <p:nvPr/>
-        </p:nvSpPr>
-        <p:spPr>
-          <a:xfrm>
-            <a:off x="5257800" y="1943100"/>
-            <a:ext cx="3429000" cy="2971800"/>
-          </a:xfrm>
-          <a:prstGeom prst="rect">
-            <a:avLst/>
-          </a:prstGeom>
-          <a:noFill/>
-        </p:spPr>
-        <p:txBody>
-          <a:bodyPr wrap="square">
-            <a:spAutoFit/>
-          </a:bodyPr>
-          <a:lstStyle/>
-          <a:p>
-            <a:pPr>
-              <a:defRPr sz="1800" b="0">
-                <a:solidFill>
-                  <a:srgbClr val="2E86AB"/>
-                </a:solidFill>
-                <a:latin typeface="Source Sans Pro"/>
-              </a:defRPr>
-            </a:pPr>
-            <a:r>
-              <a:t>Photography Guidelines:</a:t>
-            </a:r>
-          </a:p>
-          <a:p>
-            <a:pPr>
-              <a:defRPr sz="1400" b="0">
-                <a:solidFill>
-                  <a:srgbClr val="2E86AB"/>
-                </a:solidFill>
-                <a:latin typeface="Source Sans Pro"/>
-              </a:defRPr>
-            </a:pPr>
-            <a:r>
-              <a:t>• High contrast</a:t>
-            </a:r>
-          </a:p>
-          <a:p>
-            <a:pPr>
-              <a:defRPr sz="1400" b="0">
-                <a:solidFill>
-                  <a:srgbClr val="2E86AB"/>
-                </a:solidFill>
-                <a:latin typeface="Source Sans Pro"/>
-              </a:defRPr>
-            </a:pPr>
-            <a:r>
-              <a:t>• authentic moments</a:t>
-            </a:r>
-          </a:p>
-          <a:p>
-            <a:pPr>
-              <a:defRPr sz="1400" b="0">
-                <a:solidFill>
-                  <a:srgbClr val="2E86AB"/>
-                </a:solidFill>
-                <a:latin typeface="Source Sans Pro"/>
-              </a:defRPr>
-            </a:pPr>
-            <a:r>
-              <a:t>• natural lighting</a:t>
-            </a:r>
-          </a:p>
-        </p:txBody>
-      </p:sp>
-      <p:sp>
-        <p:nvSpPr>
-          <p:cNvPr id="6" name="Rectangle 5"/>
-          <p:cNvSpPr/>
-          <p:nvPr/>
-        </p:nvSpPr>
-        <p:spPr>
-          <a:xfrm>
-            <a:off x="5257800" y="4914900"/>
-            <a:ext cx="685800" cy="742950"/>
-          </a:xfrm>
-          <a:prstGeom prst="rect">
-            <a:avLst/>
-          </a:prstGeom>
-          <a:solidFill>
-            <a:srgbClr val="404040"/>
-          </a:solidFill>
-          <a:ln w="12700">
-            <a:solidFill>
-              <a:srgbClr val="808080"/>
-            </a:solidFill>
-          </a:ln>
-        </p:spPr>
-        <p:style>
-          <a:lnRef idx="1">
-            <a:schemeClr val="accent1"/>
-          </a:lnRef>
-          <a:fillRef idx="3">
-            <a:schemeClr val="accent1"/>
-          </a:fillRef>
-          <a:effectRef idx="2">
-            <a:schemeClr val="accent1"/>
-          </a:effectRef>
-          <a:fontRef idx="minor">
-            <a:schemeClr val="lt1"/>
-          </a:fontRef>
-        </p:style>
-        <p:txBody>
-          <a:bodyPr rtlCol="0" anchor="ctr"/>
-          <a:lstStyle/>
-          <a:p>
-            <a:pPr algn="ctr"/>
-          </a:p>
-        </p:txBody>
-      </p:sp>
-      <p:sp>
-        <p:nvSpPr>
-          <p:cNvPr id="7" name="TextBox 6"/>
-          <p:cNvSpPr txBox="1"/>
-          <p:nvPr/>
-        </p:nvSpPr>
-        <p:spPr>
-          <a:xfrm>
-            <a:off x="5257800" y="5162550"/>
-            <a:ext cx="685800" cy="247650"/>
-          </a:xfrm>
-          <a:prstGeom prst="rect">
-            <a:avLst/>
-          </a:prstGeom>
-          <a:noFill/>
-        </p:spPr>
-        <p:txBody>
-          <a:bodyPr wrap="none">
-            <a:spAutoFit/>
-          </a:bodyPr>
-          <a:lstStyle/>
-          <a:p>
-            <a:pPr algn="ctr">
-              <a:defRPr sz="800" b="0">
-                <a:solidFill>
-                  <a:srgbClr val="2E86AB"/>
-                </a:solidFill>
-                <a:latin typeface="Source Sans Pro"/>
-              </a:defRPr>
-            </a:pPr>
-            <a:r>
-              <a:t>Example</a:t>
-            </a:r>
-          </a:p>
-        </p:txBody>
-      </p:sp>
-      <p:sp>
-        <p:nvSpPr>
-          <p:cNvPr id="8" name="Rectangle 7"/>
-          <p:cNvSpPr/>
-          <p:nvPr/>
-        </p:nvSpPr>
-        <p:spPr>
-          <a:xfrm>
-            <a:off x="6629400" y="4914900"/>
-            <a:ext cx="685800" cy="742950"/>
-          </a:xfrm>
-          <a:prstGeom prst="rect">
-            <a:avLst/>
-          </a:prstGeom>
-          <a:solidFill>
-            <a:srgbClr val="404040"/>
-          </a:solidFill>
-          <a:ln w="12700">
-            <a:solidFill>
-              <a:srgbClr val="808080"/>
-            </a:solidFill>
-          </a:ln>
-        </p:spPr>
-        <p:style>
-          <a:lnRef idx="1">
-            <a:schemeClr val="accent1"/>
-          </a:lnRef>
-          <a:fillRef idx="3">
-            <a:schemeClr val="accent1"/>
-          </a:fillRef>
-          <a:effectRef idx="2">
-            <a:schemeClr val="accent1"/>
-          </a:effectRef>
-          <a:fontRef idx="minor">
-            <a:schemeClr val="lt1"/>
-          </a:fontRef>
-        </p:style>
-        <p:txBody>
-          <a:bodyPr rtlCol="0" anchor="ctr"/>
-          <a:lstStyle/>
-          <a:p>
-            <a:pPr algn="ctr"/>
-          </a:p>
-        </p:txBody>
-      </p:sp>
-      <p:sp>
-        <p:nvSpPr>
-          <p:cNvPr id="9" name="TextBox 8"/>
-          <p:cNvSpPr txBox="1"/>
-          <p:nvPr/>
-        </p:nvSpPr>
-        <p:spPr>
-          <a:xfrm>
-            <a:off x="6629400" y="5162550"/>
-            <a:ext cx="685800" cy="247650"/>
-          </a:xfrm>
-          <a:prstGeom prst="rect">
-            <a:avLst/>
-          </a:prstGeom>
-          <a:noFill/>
-        </p:spPr>
-        <p:txBody>
-          <a:bodyPr wrap="none">
-            <a:spAutoFit/>
-          </a:bodyPr>
-          <a:lstStyle/>
-          <a:p>
-            <a:pPr algn="ctr">
-              <a:defRPr sz="800" b="0">
-                <a:solidFill>
-                  <a:srgbClr val="2E86AB"/>
-                </a:solidFill>
-                <a:latin typeface="Source Sans Pro"/>
-              </a:defRPr>
-            </a:pPr>
-            <a:r>
-              <a:t>Example</a:t>
-            </a:r>
-          </a:p>
-        </p:txBody>
-      </p:sp>
-      <p:sp>
-        <p:nvSpPr>
-          <p:cNvPr id="10" name="Rectangle 9"/>
-          <p:cNvSpPr/>
-          <p:nvPr/>
-        </p:nvSpPr>
-        <p:spPr>
-          <a:xfrm>
-            <a:off x="8001000" y="4914900"/>
-            <a:ext cx="685800" cy="742950"/>
-          </a:xfrm>
-          <a:prstGeom prst="rect">
-            <a:avLst/>
-          </a:prstGeom>
-          <a:solidFill>
-            <a:srgbClr val="404040"/>
-          </a:solidFill>
-          <a:ln w="12700">
-            <a:solidFill>
-              <a:srgbClr val="808080"/>
-            </a:solidFill>
-          </a:ln>
-        </p:spPr>
-        <p:style>
-          <a:lnRef idx="1">
-            <a:schemeClr val="accent1"/>
-          </a:lnRef>
-          <a:fillRef idx="3">
-            <a:schemeClr val="accent1"/>
-          </a:fillRef>
-          <a:effectRef idx="2">
-            <a:schemeClr val="accent1"/>
-          </a:effectRef>
-          <a:fontRef idx="minor">
-            <a:schemeClr val="lt1"/>
-          </a:fontRef>
-        </p:style>
-        <p:txBody>
-          <a:bodyPr rtlCol="0" anchor="ctr"/>
-          <a:lstStyle/>
-          <a:p>
-            <a:pPr algn="ctr"/>
-          </a:p>
-        </p:txBody>
-      </p:sp>
-      <p:sp>
-        <p:nvSpPr>
-          <p:cNvPr id="11" name="TextBox 10"/>
-          <p:cNvSpPr txBox="1"/>
-          <p:nvPr/>
-        </p:nvSpPr>
-        <p:spPr>
-          <a:xfrm>
-            <a:off x="8001000" y="5162550"/>
-            <a:ext cx="685800" cy="247650"/>
-          </a:xfrm>
-          <a:prstGeom prst="rect">
-            <a:avLst/>
-          </a:prstGeom>
-          <a:noFill/>
-        </p:spPr>
-        <p:txBody>
-          <a:bodyPr wrap="none">
-            <a:spAutoFit/>
-          </a:bodyPr>
-          <a:lstStyle/>
-          <a:p>
-            <a:pPr algn="ctr">
-              <a:defRPr sz="800" b="0">
-                <a:solidFill>
-                  <a:srgbClr val="2E86AB"/>
-                </a:solidFill>
-                <a:latin typeface="Source Sans Pro"/>
-              </a:defRPr>
-            </a:pPr>
-            <a:r>
-              <a:t>Example</a:t>
-            </a:r>
-          </a:p>
-        </p:txBody>
-      </p:sp>
-      <p:sp>
-        <p:nvSpPr>
-          <p:cNvPr id="12" name="TextBox 11"/>
           <p:cNvSpPr txBox="1"/>
           <p:nvPr/>
         </p:nvSpPr>
@@ -3773,7 +3387,7 @@
       </p:sp>
       <p:sp>
         <p:nvSpPr>
-          <p:cNvPr id="13" name="TextBox 12"/>
+          <p:cNvPr id="6" name="TextBox 5"/>
           <p:cNvSpPr txBox="1"/>
           <p:nvPr/>
         </p:nvSpPr>
@@ -3899,7 +3513,7 @@
               </a:defRPr>
             </a:pPr>
             <a:r>
-              <a:t>Brand Story &amp; Mission</a:t>
+              <a:t>Marketing Copy: Website</a:t>
             </a:r>
           </a:p>
         </p:txBody>
@@ -3935,7 +3549,7 @@
               </a:defRPr>
             </a:pPr>
             <a:r>
-              <a:t>We revolutionize technology through innovative design and human-centered solutions that empower businesses to achieve their digital transformation goals.</a:t>
+              <a:t>Transform your digital experience with our cutting-edge solutions designed for the modern business landscape.</a:t>
             </a:r>
           </a:p>
         </p:txBody>
@@ -4104,7 +3718,7 @@
               </a:defRPr>
             </a:pPr>
             <a:r>
-              <a:t>Brand Voice &amp; Tone</a:t>
+              <a:t>Marketing Copy: Social Media</a:t>
             </a:r>
           </a:p>
         </p:txBody>
@@ -4140,7 +3754,7 @@
               </a:defRPr>
             </a:pPr>
             <a:r>
-              <a:t>Professional yet approachable, confident, innovative, and human-centered with a focus on clarity and trust.</a:t>
+              <a:t>Innovation meets simplicity. Technology that works for you. #TechForHumans #DigitalTransformation</a:t>
             </a:r>
           </a:p>
         </p:txBody>
@@ -4309,7 +3923,7 @@
               </a:defRPr>
             </a:pPr>
             <a:r>
-              <a:t>Messaging &amp; Value Propositions</a:t>
+              <a:t>Collateral: Business Card</a:t>
             </a:r>
           </a:p>
         </p:txBody>
@@ -4345,7 +3959,7 @@
               </a:defRPr>
             </a:pPr>
             <a:r>
-              <a:t>Our core message centers on bridging the gap between complex technology and intuitive user experiences.</a:t>
+              <a:t>Clean, modern design with QR code integration and minimal brand elements</a:t>
             </a:r>
           </a:p>
         </p:txBody>
@@ -4514,7 +4128,7 @@
               </a:defRPr>
             </a:pPr>
             <a:r>
-              <a:t>Marketing Copy: Website</a:t>
+              <a:t>Collateral: Letterhead</a:t>
             </a:r>
           </a:p>
         </p:txBody>
@@ -4550,7 +4164,7 @@
               </a:defRPr>
             </a:pPr>
             <a:r>
-              <a:t>Transform your digital experience with our cutting-edge solutions designed for the modern business landscape.</a:t>
+              <a:t>Professional header with subtle brand accents and contact information</a:t>
             </a:r>
           </a:p>
         </p:txBody>
@@ -4623,621 +4237,6 @@
             </a:pPr>
             <a:r>
               <a:t>14</a:t>
-            </a:r>
-          </a:p>
-        </p:txBody>
-      </p:sp>
-    </p:spTree>
-  </p:cSld>
-  <p:clrMapOvr>
-    <a:masterClrMapping/>
-  </p:clrMapOvr>
-</p:sld>
-</file>
-
-<file path=ppt/slides/slide15.xml><?xml version="1.0" encoding="utf-8"?>
-<p:sld xmlns:a="http://schemas.openxmlformats.org/drawingml/2006/main" xmlns:p="http://schemas.openxmlformats.org/presentationml/2006/main" xmlns:r="http://schemas.openxmlformats.org/officeDocument/2006/relationships">
-  <p:cSld>
-    <p:spTree>
-      <p:nvGrpSpPr>
-        <p:cNvPr id="1" name=""/>
-        <p:cNvGrpSpPr/>
-        <p:nvPr/>
-      </p:nvGrpSpPr>
-      <p:sp>
-        <p:nvSpPr>
-          <p:cNvPr id="2" name="Rectangle 1"/>
-          <p:cNvSpPr/>
-          <p:nvPr/>
-        </p:nvSpPr>
-        <p:spPr>
-          <a:xfrm>
-            <a:off x="0" y="0"/>
-            <a:ext cx="9144000" cy="6858000"/>
-          </a:xfrm>
-          <a:prstGeom prst="rect">
-            <a:avLst/>
-          </a:prstGeom>
-          <a:solidFill>
-            <a:srgbClr val="1A1A1A"/>
-          </a:solidFill>
-          <a:ln>
-            <a:noFill/>
-          </a:ln>
-        </p:spPr>
-        <p:style>
-          <a:lnRef idx="1">
-            <a:schemeClr val="accent1"/>
-          </a:lnRef>
-          <a:fillRef idx="3">
-            <a:schemeClr val="accent1"/>
-          </a:fillRef>
-          <a:effectRef idx="2">
-            <a:schemeClr val="accent1"/>
-          </a:effectRef>
-          <a:fontRef idx="minor">
-            <a:schemeClr val="lt1"/>
-          </a:fontRef>
-        </p:style>
-        <p:txBody>
-          <a:bodyPr rtlCol="0" anchor="ctr"/>
-          <a:lstStyle/>
-          <a:p>
-            <a:pPr algn="ctr"/>
-          </a:p>
-        </p:txBody>
-      </p:sp>
-      <p:grpSpPr/>
-      <p:sp>
-        <p:nvSpPr>
-          <p:cNvPr id="3" name="TextBox 2"/>
-          <p:cNvSpPr txBox="1"/>
-          <p:nvPr/>
-        </p:nvSpPr>
-        <p:spPr>
-          <a:xfrm>
-            <a:off x="1143000" y="457200"/>
-            <a:ext cx="6858000" cy="742950"/>
-          </a:xfrm>
-          <a:prstGeom prst="rect">
-            <a:avLst/>
-          </a:prstGeom>
-          <a:noFill/>
-        </p:spPr>
-        <p:txBody>
-          <a:bodyPr wrap="none">
-            <a:spAutoFit/>
-          </a:bodyPr>
-          <a:lstStyle/>
-          <a:p>
-            <a:pPr>
-              <a:defRPr sz="3200" b="1">
-                <a:solidFill>
-                  <a:srgbClr val="2E86AB"/>
-                </a:solidFill>
-                <a:latin typeface="Inter"/>
-              </a:defRPr>
-            </a:pPr>
-            <a:r>
-              <a:t>Marketing Copy: Social Media</a:t>
-            </a:r>
-          </a:p>
-        </p:txBody>
-      </p:sp>
-      <p:sp>
-        <p:nvSpPr>
-          <p:cNvPr id="4" name="TextBox 3"/>
-          <p:cNvSpPr txBox="1"/>
-          <p:nvPr/>
-        </p:nvSpPr>
-        <p:spPr>
-          <a:xfrm>
-            <a:off x="1143000" y="1943100"/>
-            <a:ext cx="6858000" cy="2971800"/>
-          </a:xfrm>
-          <a:prstGeom prst="rect">
-            <a:avLst/>
-          </a:prstGeom>
-          <a:noFill/>
-        </p:spPr>
-        <p:txBody>
-          <a:bodyPr wrap="square">
-            <a:spAutoFit/>
-          </a:bodyPr>
-          <a:lstStyle/>
-          <a:p>
-            <a:pPr>
-              <a:defRPr sz="1600" b="0">
-                <a:solidFill>
-                  <a:srgbClr val="2E86AB"/>
-                </a:solidFill>
-                <a:latin typeface="Source Sans Pro"/>
-              </a:defRPr>
-            </a:pPr>
-            <a:r>
-              <a:t>Innovation meets simplicity. Technology that works for you. #TechForHumans #DigitalTransformation</a:t>
-            </a:r>
-          </a:p>
-        </p:txBody>
-      </p:sp>
-      <p:sp>
-        <p:nvSpPr>
-          <p:cNvPr id="5" name="TextBox 4"/>
-          <p:cNvSpPr txBox="1"/>
-          <p:nvPr/>
-        </p:nvSpPr>
-        <p:spPr>
-          <a:xfrm>
-            <a:off x="457200" y="5657850"/>
-            <a:ext cx="4114800" cy="742950"/>
-          </a:xfrm>
-          <a:prstGeom prst="rect">
-            <a:avLst/>
-          </a:prstGeom>
-          <a:noFill/>
-        </p:spPr>
-        <p:txBody>
-          <a:bodyPr wrap="none">
-            <a:spAutoFit/>
-          </a:bodyPr>
-          <a:lstStyle/>
-          <a:p>
-            <a:pPr algn="l">
-              <a:defRPr sz="1000" b="0">
-                <a:solidFill>
-                  <a:srgbClr val="2E86AB"/>
-                </a:solidFill>
-                <a:latin typeface="Source Sans Pro"/>
-              </a:defRPr>
-            </a:pPr>
-            <a:r>
-              <a:t>TechForward Live</a:t>
-            </a:r>
-          </a:p>
-        </p:txBody>
-      </p:sp>
-      <p:sp>
-        <p:nvSpPr>
-          <p:cNvPr id="6" name="TextBox 5"/>
-          <p:cNvSpPr txBox="1"/>
-          <p:nvPr/>
-        </p:nvSpPr>
-        <p:spPr>
-          <a:xfrm>
-            <a:off x="4572000" y="5657850"/>
-            <a:ext cx="4114800" cy="742950"/>
-          </a:xfrm>
-          <a:prstGeom prst="rect">
-            <a:avLst/>
-          </a:prstGeom>
-          <a:noFill/>
-        </p:spPr>
-        <p:txBody>
-          <a:bodyPr wrap="none">
-            <a:spAutoFit/>
-          </a:bodyPr>
-          <a:lstStyle/>
-          <a:p>
-            <a:pPr algn="r">
-              <a:defRPr sz="1000" b="0">
-                <a:solidFill>
-                  <a:srgbClr val="2E86AB"/>
-                </a:solidFill>
-                <a:latin typeface="Source Sans Pro"/>
-              </a:defRPr>
-            </a:pPr>
-            <a:r>
-              <a:t>15</a:t>
-            </a:r>
-          </a:p>
-        </p:txBody>
-      </p:sp>
-    </p:spTree>
-  </p:cSld>
-  <p:clrMapOvr>
-    <a:masterClrMapping/>
-  </p:clrMapOvr>
-</p:sld>
-</file>
-
-<file path=ppt/slides/slide16.xml><?xml version="1.0" encoding="utf-8"?>
-<p:sld xmlns:a="http://schemas.openxmlformats.org/drawingml/2006/main" xmlns:p="http://schemas.openxmlformats.org/presentationml/2006/main" xmlns:r="http://schemas.openxmlformats.org/officeDocument/2006/relationships">
-  <p:cSld>
-    <p:spTree>
-      <p:nvGrpSpPr>
-        <p:cNvPr id="1" name=""/>
-        <p:cNvGrpSpPr/>
-        <p:nvPr/>
-      </p:nvGrpSpPr>
-      <p:sp>
-        <p:nvSpPr>
-          <p:cNvPr id="2" name="Rectangle 1"/>
-          <p:cNvSpPr/>
-          <p:nvPr/>
-        </p:nvSpPr>
-        <p:spPr>
-          <a:xfrm>
-            <a:off x="0" y="0"/>
-            <a:ext cx="9144000" cy="6858000"/>
-          </a:xfrm>
-          <a:prstGeom prst="rect">
-            <a:avLst/>
-          </a:prstGeom>
-          <a:solidFill>
-            <a:srgbClr val="1A1A1A"/>
-          </a:solidFill>
-          <a:ln>
-            <a:noFill/>
-          </a:ln>
-        </p:spPr>
-        <p:style>
-          <a:lnRef idx="1">
-            <a:schemeClr val="accent1"/>
-          </a:lnRef>
-          <a:fillRef idx="3">
-            <a:schemeClr val="accent1"/>
-          </a:fillRef>
-          <a:effectRef idx="2">
-            <a:schemeClr val="accent1"/>
-          </a:effectRef>
-          <a:fontRef idx="minor">
-            <a:schemeClr val="lt1"/>
-          </a:fontRef>
-        </p:style>
-        <p:txBody>
-          <a:bodyPr rtlCol="0" anchor="ctr"/>
-          <a:lstStyle/>
-          <a:p>
-            <a:pPr algn="ctr"/>
-          </a:p>
-        </p:txBody>
-      </p:sp>
-      <p:grpSpPr/>
-      <p:sp>
-        <p:nvSpPr>
-          <p:cNvPr id="3" name="TextBox 2"/>
-          <p:cNvSpPr txBox="1"/>
-          <p:nvPr/>
-        </p:nvSpPr>
-        <p:spPr>
-          <a:xfrm>
-            <a:off x="1143000" y="457200"/>
-            <a:ext cx="6858000" cy="742950"/>
-          </a:xfrm>
-          <a:prstGeom prst="rect">
-            <a:avLst/>
-          </a:prstGeom>
-          <a:noFill/>
-        </p:spPr>
-        <p:txBody>
-          <a:bodyPr wrap="none">
-            <a:spAutoFit/>
-          </a:bodyPr>
-          <a:lstStyle/>
-          <a:p>
-            <a:pPr>
-              <a:defRPr sz="3200" b="1">
-                <a:solidFill>
-                  <a:srgbClr val="2E86AB"/>
-                </a:solidFill>
-                <a:latin typeface="Inter"/>
-              </a:defRPr>
-            </a:pPr>
-            <a:r>
-              <a:t>Collateral: Business Card</a:t>
-            </a:r>
-          </a:p>
-        </p:txBody>
-      </p:sp>
-      <p:sp>
-        <p:nvSpPr>
-          <p:cNvPr id="4" name="TextBox 3"/>
-          <p:cNvSpPr txBox="1"/>
-          <p:nvPr/>
-        </p:nvSpPr>
-        <p:spPr>
-          <a:xfrm>
-            <a:off x="1143000" y="1943100"/>
-            <a:ext cx="6858000" cy="2971800"/>
-          </a:xfrm>
-          <a:prstGeom prst="rect">
-            <a:avLst/>
-          </a:prstGeom>
-          <a:noFill/>
-        </p:spPr>
-        <p:txBody>
-          <a:bodyPr wrap="square">
-            <a:spAutoFit/>
-          </a:bodyPr>
-          <a:lstStyle/>
-          <a:p>
-            <a:pPr>
-              <a:defRPr sz="1600" b="0">
-                <a:solidFill>
-                  <a:srgbClr val="2E86AB"/>
-                </a:solidFill>
-                <a:latin typeface="Source Sans Pro"/>
-              </a:defRPr>
-            </a:pPr>
-            <a:r>
-              <a:t>Clean, modern design with QR code integration and minimal brand elements</a:t>
-            </a:r>
-          </a:p>
-        </p:txBody>
-      </p:sp>
-      <p:sp>
-        <p:nvSpPr>
-          <p:cNvPr id="5" name="TextBox 4"/>
-          <p:cNvSpPr txBox="1"/>
-          <p:nvPr/>
-        </p:nvSpPr>
-        <p:spPr>
-          <a:xfrm>
-            <a:off x="457200" y="5657850"/>
-            <a:ext cx="4114800" cy="742950"/>
-          </a:xfrm>
-          <a:prstGeom prst="rect">
-            <a:avLst/>
-          </a:prstGeom>
-          <a:noFill/>
-        </p:spPr>
-        <p:txBody>
-          <a:bodyPr wrap="none">
-            <a:spAutoFit/>
-          </a:bodyPr>
-          <a:lstStyle/>
-          <a:p>
-            <a:pPr algn="l">
-              <a:defRPr sz="1000" b="0">
-                <a:solidFill>
-                  <a:srgbClr val="2E86AB"/>
-                </a:solidFill>
-                <a:latin typeface="Source Sans Pro"/>
-              </a:defRPr>
-            </a:pPr>
-            <a:r>
-              <a:t>TechForward Live</a:t>
-            </a:r>
-          </a:p>
-        </p:txBody>
-      </p:sp>
-      <p:sp>
-        <p:nvSpPr>
-          <p:cNvPr id="6" name="TextBox 5"/>
-          <p:cNvSpPr txBox="1"/>
-          <p:nvPr/>
-        </p:nvSpPr>
-        <p:spPr>
-          <a:xfrm>
-            <a:off x="4572000" y="5657850"/>
-            <a:ext cx="4114800" cy="742950"/>
-          </a:xfrm>
-          <a:prstGeom prst="rect">
-            <a:avLst/>
-          </a:prstGeom>
-          <a:noFill/>
-        </p:spPr>
-        <p:txBody>
-          <a:bodyPr wrap="none">
-            <a:spAutoFit/>
-          </a:bodyPr>
-          <a:lstStyle/>
-          <a:p>
-            <a:pPr algn="r">
-              <a:defRPr sz="1000" b="0">
-                <a:solidFill>
-                  <a:srgbClr val="2E86AB"/>
-                </a:solidFill>
-                <a:latin typeface="Source Sans Pro"/>
-              </a:defRPr>
-            </a:pPr>
-            <a:r>
-              <a:t>16</a:t>
-            </a:r>
-          </a:p>
-        </p:txBody>
-      </p:sp>
-    </p:spTree>
-  </p:cSld>
-  <p:clrMapOvr>
-    <a:masterClrMapping/>
-  </p:clrMapOvr>
-</p:sld>
-</file>
-
-<file path=ppt/slides/slide17.xml><?xml version="1.0" encoding="utf-8"?>
-<p:sld xmlns:a="http://schemas.openxmlformats.org/drawingml/2006/main" xmlns:p="http://schemas.openxmlformats.org/presentationml/2006/main" xmlns:r="http://schemas.openxmlformats.org/officeDocument/2006/relationships">
-  <p:cSld>
-    <p:spTree>
-      <p:nvGrpSpPr>
-        <p:cNvPr id="1" name=""/>
-        <p:cNvGrpSpPr/>
-        <p:nvPr/>
-      </p:nvGrpSpPr>
-      <p:sp>
-        <p:nvSpPr>
-          <p:cNvPr id="2" name="Rectangle 1"/>
-          <p:cNvSpPr/>
-          <p:nvPr/>
-        </p:nvSpPr>
-        <p:spPr>
-          <a:xfrm>
-            <a:off x="0" y="0"/>
-            <a:ext cx="9144000" cy="6858000"/>
-          </a:xfrm>
-          <a:prstGeom prst="rect">
-            <a:avLst/>
-          </a:prstGeom>
-          <a:solidFill>
-            <a:srgbClr val="1A1A1A"/>
-          </a:solidFill>
-          <a:ln>
-            <a:noFill/>
-          </a:ln>
-        </p:spPr>
-        <p:style>
-          <a:lnRef idx="1">
-            <a:schemeClr val="accent1"/>
-          </a:lnRef>
-          <a:fillRef idx="3">
-            <a:schemeClr val="accent1"/>
-          </a:fillRef>
-          <a:effectRef idx="2">
-            <a:schemeClr val="accent1"/>
-          </a:effectRef>
-          <a:fontRef idx="minor">
-            <a:schemeClr val="lt1"/>
-          </a:fontRef>
-        </p:style>
-        <p:txBody>
-          <a:bodyPr rtlCol="0" anchor="ctr"/>
-          <a:lstStyle/>
-          <a:p>
-            <a:pPr algn="ctr"/>
-          </a:p>
-        </p:txBody>
-      </p:sp>
-      <p:grpSpPr/>
-      <p:sp>
-        <p:nvSpPr>
-          <p:cNvPr id="3" name="TextBox 2"/>
-          <p:cNvSpPr txBox="1"/>
-          <p:nvPr/>
-        </p:nvSpPr>
-        <p:spPr>
-          <a:xfrm>
-            <a:off x="1143000" y="457200"/>
-            <a:ext cx="6858000" cy="742950"/>
-          </a:xfrm>
-          <a:prstGeom prst="rect">
-            <a:avLst/>
-          </a:prstGeom>
-          <a:noFill/>
-        </p:spPr>
-        <p:txBody>
-          <a:bodyPr wrap="none">
-            <a:spAutoFit/>
-          </a:bodyPr>
-          <a:lstStyle/>
-          <a:p>
-            <a:pPr>
-              <a:defRPr sz="3200" b="1">
-                <a:solidFill>
-                  <a:srgbClr val="2E86AB"/>
-                </a:solidFill>
-                <a:latin typeface="Inter"/>
-              </a:defRPr>
-            </a:pPr>
-            <a:r>
-              <a:t>Collateral: Letterhead</a:t>
-            </a:r>
-          </a:p>
-        </p:txBody>
-      </p:sp>
-      <p:sp>
-        <p:nvSpPr>
-          <p:cNvPr id="4" name="TextBox 3"/>
-          <p:cNvSpPr txBox="1"/>
-          <p:nvPr/>
-        </p:nvSpPr>
-        <p:spPr>
-          <a:xfrm>
-            <a:off x="1143000" y="1943100"/>
-            <a:ext cx="6858000" cy="2971800"/>
-          </a:xfrm>
-          <a:prstGeom prst="rect">
-            <a:avLst/>
-          </a:prstGeom>
-          <a:noFill/>
-        </p:spPr>
-        <p:txBody>
-          <a:bodyPr wrap="square">
-            <a:spAutoFit/>
-          </a:bodyPr>
-          <a:lstStyle/>
-          <a:p>
-            <a:pPr>
-              <a:defRPr sz="1600" b="0">
-                <a:solidFill>
-                  <a:srgbClr val="2E86AB"/>
-                </a:solidFill>
-                <a:latin typeface="Source Sans Pro"/>
-              </a:defRPr>
-            </a:pPr>
-            <a:r>
-              <a:t>Professional header with subtle brand accents and contact information</a:t>
-            </a:r>
-          </a:p>
-        </p:txBody>
-      </p:sp>
-      <p:sp>
-        <p:nvSpPr>
-          <p:cNvPr id="5" name="TextBox 4"/>
-          <p:cNvSpPr txBox="1"/>
-          <p:nvPr/>
-        </p:nvSpPr>
-        <p:spPr>
-          <a:xfrm>
-            <a:off x="457200" y="5657850"/>
-            <a:ext cx="4114800" cy="742950"/>
-          </a:xfrm>
-          <a:prstGeom prst="rect">
-            <a:avLst/>
-          </a:prstGeom>
-          <a:noFill/>
-        </p:spPr>
-        <p:txBody>
-          <a:bodyPr wrap="none">
-            <a:spAutoFit/>
-          </a:bodyPr>
-          <a:lstStyle/>
-          <a:p>
-            <a:pPr algn="l">
-              <a:defRPr sz="1000" b="0">
-                <a:solidFill>
-                  <a:srgbClr val="2E86AB"/>
-                </a:solidFill>
-                <a:latin typeface="Source Sans Pro"/>
-              </a:defRPr>
-            </a:pPr>
-            <a:r>
-              <a:t>TechForward Live</a:t>
-            </a:r>
-          </a:p>
-        </p:txBody>
-      </p:sp>
-      <p:sp>
-        <p:nvSpPr>
-          <p:cNvPr id="6" name="TextBox 5"/>
-          <p:cNvSpPr txBox="1"/>
-          <p:nvPr/>
-        </p:nvSpPr>
-        <p:spPr>
-          <a:xfrm>
-            <a:off x="4572000" y="5657850"/>
-            <a:ext cx="4114800" cy="742950"/>
-          </a:xfrm>
-          <a:prstGeom prst="rect">
-            <a:avLst/>
-          </a:prstGeom>
-          <a:noFill/>
-        </p:spPr>
-        <p:txBody>
-          <a:bodyPr wrap="none">
-            <a:spAutoFit/>
-          </a:bodyPr>
-          <a:lstStyle/>
-          <a:p>
-            <a:pPr algn="r">
-              <a:defRPr sz="1000" b="0">
-                <a:solidFill>
-                  <a:srgbClr val="2E86AB"/>
-                </a:solidFill>
-                <a:latin typeface="Source Sans Pro"/>
-              </a:defRPr>
-            </a:pPr>
-            <a:r>
-              <a:t>17</a:t>
             </a:r>
           </a:p>
         </p:txBody>
@@ -5276,8 +4275,8 @@
         </p:nvSpPr>
         <p:spPr>
           <a:xfrm>
-            <a:off x="1143000" y="457200"/>
-            <a:ext cx="6858000" cy="742950"/>
+            <a:off x="457200" y="457200"/>
+            <a:ext cx="2743200" cy="731520"/>
           </a:xfrm>
           <a:prstGeom prst="rect">
             <a:avLst/>
@@ -5290,8 +4289,8 @@
           </a:bodyPr>
           <a:lstStyle/>
           <a:p>
-            <a:pPr algn="ctr">
-              <a:defRPr sz="3200" b="1">
+            <a:pPr>
+              <a:defRPr sz="2800" b="1">
                 <a:solidFill>
                   <a:srgbClr val="2E86AB"/>
                 </a:solidFill>
@@ -5299,185 +4298,46 @@
               </a:defRPr>
             </a:pPr>
             <a:r>
-              <a:t>Table of Contents</a:t>
-            </a:r>
-          </a:p>
-        </p:txBody>
-      </p:sp>
-      <p:sp>
-        <p:nvSpPr>
-          <p:cNvPr id="3" name="TextBox 2"/>
-          <p:cNvSpPr txBox="1"/>
-          <p:nvPr/>
-        </p:nvSpPr>
-        <p:spPr>
-          <a:xfrm>
-            <a:off x="1143000" y="1943100"/>
-            <a:ext cx="2743200" cy="3714750"/>
-          </a:xfrm>
-          <a:prstGeom prst="rect">
-            <a:avLst/>
-          </a:prstGeom>
-          <a:noFill/>
-        </p:spPr>
-        <p:txBody>
-          <a:bodyPr wrap="square">
-            <a:spAutoFit/>
-          </a:bodyPr>
-          <a:lstStyle/>
-          <a:p>
-            <a:pPr>
-              <a:defRPr sz="1600" b="0">
-                <a:solidFill>
-                  <a:srgbClr val="2E86AB"/>
-                </a:solidFill>
-                <a:latin typeface="Source Sans Pro"/>
-              </a:defRPr>
-            </a:pPr>
-            <a:r>
-              <a:t>1. 1. Introduction</a:t>
-            </a:r>
-          </a:p>
-          <a:p>
-            <a:pPr>
-              <a:defRPr sz="1600" b="0">
-                <a:solidFill>
-                  <a:srgbClr val="2E86AB"/>
-                </a:solidFill>
-                <a:latin typeface="Source Sans Pro"/>
-              </a:defRPr>
-            </a:pPr>
-          </a:p>
-          <a:p>
-            <a:pPr>
-              <a:defRPr sz="1600" b="0">
-                <a:solidFill>
-                  <a:srgbClr val="2E86AB"/>
-                </a:solidFill>
-                <a:latin typeface="Source Sans Pro"/>
-              </a:defRPr>
-            </a:pPr>
-            <a:r>
-              <a:t>2. 2. Brand Purpose</a:t>
-            </a:r>
-          </a:p>
-          <a:p>
-            <a:pPr>
-              <a:defRPr sz="1600" b="0">
-                <a:solidFill>
-                  <a:srgbClr val="2E86AB"/>
-                </a:solidFill>
-                <a:latin typeface="Source Sans Pro"/>
-              </a:defRPr>
-            </a:pPr>
-          </a:p>
-          <a:p>
-            <a:pPr>
-              <a:defRPr sz="1600" b="0">
-                <a:solidFill>
-                  <a:srgbClr val="2E86AB"/>
-                </a:solidFill>
-                <a:latin typeface="Source Sans Pro"/>
-              </a:defRPr>
-            </a:pPr>
-            <a:r>
-              <a:t>3. 3. Company Profile</a:t>
-            </a:r>
-          </a:p>
-          <a:p>
-            <a:pPr>
-              <a:defRPr sz="1600" b="0">
-                <a:solidFill>
-                  <a:srgbClr val="2E86AB"/>
-                </a:solidFill>
-                <a:latin typeface="Source Sans Pro"/>
-              </a:defRPr>
-            </a:pPr>
-          </a:p>
-          <a:p>
-            <a:pPr>
-              <a:defRPr sz="1600" b="0">
-                <a:solidFill>
-                  <a:srgbClr val="2E86AB"/>
-                </a:solidFill>
-                <a:latin typeface="Source Sans Pro"/>
-              </a:defRPr>
-            </a:pPr>
-            <a:r>
-              <a:t>4. 4. Market Analysis &amp; Insights</a:t>
-            </a:r>
-          </a:p>
-          <a:p>
-            <a:pPr>
-              <a:defRPr sz="1600" b="0">
-                <a:solidFill>
-                  <a:srgbClr val="2E86AB"/>
-                </a:solidFill>
-                <a:latin typeface="Source Sans Pro"/>
-              </a:defRPr>
-            </a:pPr>
-          </a:p>
-          <a:p>
-            <a:pPr>
-              <a:defRPr sz="1600" b="0">
-                <a:solidFill>
-                  <a:srgbClr val="2E86AB"/>
-                </a:solidFill>
-                <a:latin typeface="Source Sans Pro"/>
-              </a:defRPr>
-            </a:pPr>
-            <a:r>
-              <a:t>5. 5. Brand Positioning</a:t>
-            </a:r>
-          </a:p>
-          <a:p>
-            <a:pPr>
-              <a:defRPr sz="1600" b="0">
-                <a:solidFill>
-                  <a:srgbClr val="2E86AB"/>
-                </a:solidFill>
-                <a:latin typeface="Source Sans Pro"/>
-              </a:defRPr>
-            </a:pPr>
-          </a:p>
-          <a:p>
-            <a:pPr>
-              <a:defRPr sz="1600" b="0">
-                <a:solidFill>
-                  <a:srgbClr val="2E86AB"/>
-                </a:solidFill>
-                <a:latin typeface="Source Sans Pro"/>
-              </a:defRPr>
-            </a:pPr>
-            <a:r>
-              <a:t>6. 6. Logo Variations</a:t>
-            </a:r>
-          </a:p>
-          <a:p>
-            <a:pPr>
-              <a:defRPr sz="1600" b="0">
-                <a:solidFill>
-                  <a:srgbClr val="2E86AB"/>
-                </a:solidFill>
-                <a:latin typeface="Source Sans Pro"/>
-              </a:defRPr>
-            </a:pPr>
-          </a:p>
-          <a:p>
-            <a:pPr>
-              <a:defRPr sz="1600" b="0">
-                <a:solidFill>
-                  <a:srgbClr val="2E86AB"/>
-                </a:solidFill>
-                <a:latin typeface="Source Sans Pro"/>
-              </a:defRPr>
-            </a:pPr>
-            <a:r>
-              <a:t>7. 7. Color Palette</a:t>
-            </a:r>
-          </a:p>
-        </p:txBody>
-      </p:sp>
+              <a:t>INDEX</a:t>
+            </a:r>
+          </a:p>
+        </p:txBody>
+      </p:sp>
+      <p:cxnSp>
+        <p:nvCxnSpPr>
+          <p:cNvPr id="3" name="Connector 2"/>
+          <p:cNvCxnSpPr/>
+          <p:nvPr/>
+        </p:nvCxnSpPr>
+        <p:spPr>
+          <a:xfrm>
+            <a:off x="457200" y="1097280"/>
+            <a:ext cx="8229600" cy="0"/>
+          </a:xfrm>
+          <a:prstGeom prst="line">
+            <a:avLst/>
+          </a:prstGeom>
+          <a:ln w="25400">
+            <a:solidFill>
+              <a:srgbClr val="2E86AB"/>
+            </a:solidFill>
+          </a:ln>
+        </p:spPr>
+        <p:style>
+          <a:lnRef idx="2">
+            <a:schemeClr val="accent1"/>
+          </a:lnRef>
+          <a:fillRef idx="0">
+            <a:schemeClr val="accent1"/>
+          </a:fillRef>
+          <a:effectRef idx="1">
+            <a:schemeClr val="accent1"/>
+          </a:effectRef>
+          <a:fontRef idx="minor">
+            <a:schemeClr val="tx1"/>
+          </a:fontRef>
+        </p:style>
+      </p:cxnSp>
       <p:sp>
         <p:nvSpPr>
           <p:cNvPr id="4" name="TextBox 3"/>
@@ -5486,168 +4346,1675 @@
         </p:nvSpPr>
         <p:spPr>
           <a:xfrm>
-            <a:off x="5943600" y="1943100"/>
-            <a:ext cx="2743200" cy="3714750"/>
-          </a:xfrm>
-          <a:prstGeom prst="rect">
-            <a:avLst/>
-          </a:prstGeom>
-          <a:noFill/>
-        </p:spPr>
-        <p:txBody>
-          <a:bodyPr wrap="square">
-            <a:spAutoFit/>
-          </a:bodyPr>
-          <a:lstStyle/>
-          <a:p>
-            <a:pPr>
-              <a:defRPr sz="1600" b="0">
-                <a:solidFill>
-                  <a:srgbClr val="2E86AB"/>
-                </a:solidFill>
-                <a:latin typeface="Source Sans Pro"/>
-              </a:defRPr>
-            </a:pPr>
-            <a:r>
-              <a:t>8. 8. Typography</a:t>
-            </a:r>
-          </a:p>
-          <a:p>
-            <a:pPr>
-              <a:defRPr sz="1600" b="0">
-                <a:solidFill>
-                  <a:srgbClr val="2E86AB"/>
-                </a:solidFill>
-                <a:latin typeface="Source Sans Pro"/>
-              </a:defRPr>
-            </a:pPr>
-          </a:p>
-          <a:p>
-            <a:pPr>
-              <a:defRPr sz="1600" b="0">
-                <a:solidFill>
-                  <a:srgbClr val="2E86AB"/>
-                </a:solidFill>
-                <a:latin typeface="Source Sans Pro"/>
-              </a:defRPr>
-            </a:pPr>
-            <a:r>
-              <a:t>9. 9. Visual &amp; Photography Guidelines</a:t>
-            </a:r>
-          </a:p>
-          <a:p>
-            <a:pPr>
-              <a:defRPr sz="1600" b="0">
-                <a:solidFill>
-                  <a:srgbClr val="2E86AB"/>
-                </a:solidFill>
-                <a:latin typeface="Source Sans Pro"/>
-              </a:defRPr>
-            </a:pPr>
-          </a:p>
-          <a:p>
-            <a:pPr>
-              <a:defRPr sz="1600" b="0">
-                <a:solidFill>
-                  <a:srgbClr val="2E86AB"/>
-                </a:solidFill>
-                <a:latin typeface="Source Sans Pro"/>
-              </a:defRPr>
-            </a:pPr>
-            <a:r>
-              <a:t>10. 10. Brand Story &amp; Mission</a:t>
-            </a:r>
-          </a:p>
-          <a:p>
-            <a:pPr>
-              <a:defRPr sz="1600" b="0">
-                <a:solidFill>
-                  <a:srgbClr val="2E86AB"/>
-                </a:solidFill>
-                <a:latin typeface="Source Sans Pro"/>
-              </a:defRPr>
-            </a:pPr>
-          </a:p>
-          <a:p>
-            <a:pPr>
-              <a:defRPr sz="1600" b="0">
-                <a:solidFill>
-                  <a:srgbClr val="2E86AB"/>
-                </a:solidFill>
-                <a:latin typeface="Source Sans Pro"/>
-              </a:defRPr>
-            </a:pPr>
-            <a:r>
-              <a:t>11. 11. Brand Voice &amp; Tone</a:t>
-            </a:r>
-          </a:p>
-          <a:p>
-            <a:pPr>
-              <a:defRPr sz="1600" b="0">
-                <a:solidFill>
-                  <a:srgbClr val="2E86AB"/>
-                </a:solidFill>
-                <a:latin typeface="Source Sans Pro"/>
-              </a:defRPr>
-            </a:pPr>
-          </a:p>
-          <a:p>
-            <a:pPr>
-              <a:defRPr sz="1600" b="0">
-                <a:solidFill>
-                  <a:srgbClr val="2E86AB"/>
-                </a:solidFill>
-                <a:latin typeface="Source Sans Pro"/>
-              </a:defRPr>
-            </a:pPr>
-            <a:r>
-              <a:t>12. 12. Messaging &amp; Value Propositions</a:t>
-            </a:r>
-          </a:p>
-          <a:p>
-            <a:pPr>
-              <a:defRPr sz="1600" b="0">
-                <a:solidFill>
-                  <a:srgbClr val="2E86AB"/>
-                </a:solidFill>
-                <a:latin typeface="Source Sans Pro"/>
-              </a:defRPr>
-            </a:pPr>
-          </a:p>
-          <a:p>
-            <a:pPr>
-              <a:defRPr sz="1600" b="0">
-                <a:solidFill>
-                  <a:srgbClr val="2E86AB"/>
-                </a:solidFill>
-                <a:latin typeface="Source Sans Pro"/>
-              </a:defRPr>
-            </a:pPr>
-            <a:r>
-              <a:t>13. 13. Marketing Copy</a:t>
-            </a:r>
-          </a:p>
-          <a:p>
-            <a:pPr>
-              <a:defRPr sz="1600" b="0">
-                <a:solidFill>
-                  <a:srgbClr val="2E86AB"/>
-                </a:solidFill>
-                <a:latin typeface="Source Sans Pro"/>
-              </a:defRPr>
-            </a:pPr>
-          </a:p>
-          <a:p>
-            <a:pPr>
-              <a:defRPr sz="1600" b="0">
-                <a:solidFill>
-                  <a:srgbClr val="2E86AB"/>
-                </a:solidFill>
-                <a:latin typeface="Source Sans Pro"/>
-              </a:defRPr>
-            </a:pPr>
-            <a:r>
-              <a:t>14. 14. Brand Collateral Templates</a:t>
+            <a:off x="457200" y="1554480"/>
+            <a:ext cx="2011680" cy="274320"/>
+          </a:xfrm>
+          <a:prstGeom prst="rect">
+            <a:avLst/>
+          </a:prstGeom>
+          <a:noFill/>
+        </p:spPr>
+        <p:txBody>
+          <a:bodyPr wrap="none" lIns="0" rIns="0" tIns="0" bIns="0">
+            <a:spAutoFit/>
+          </a:bodyPr>
+          <a:lstStyle/>
+          <a:p>
+            <a:pPr>
+              <a:defRPr sz="1200" b="1">
+                <a:solidFill>
+                  <a:srgbClr val="FFFFFF"/>
+                </a:solidFill>
+                <a:latin typeface="Source Sans Pro"/>
+              </a:defRPr>
+            </a:pPr>
+            <a:r>
+              <a:t>Introduction</a:t>
+            </a:r>
+          </a:p>
+        </p:txBody>
+      </p:sp>
+      <p:cxnSp>
+        <p:nvCxnSpPr>
+          <p:cNvPr id="5" name="Connector 4"/>
+          <p:cNvCxnSpPr/>
+          <p:nvPr/>
+        </p:nvCxnSpPr>
+        <p:spPr>
+          <a:xfrm>
+            <a:off x="2560320" y="1664208"/>
+            <a:ext cx="365760" cy="0"/>
+          </a:xfrm>
+          <a:prstGeom prst="line">
+            <a:avLst/>
+          </a:prstGeom>
+          <a:ln w="19050">
+            <a:solidFill>
+              <a:srgbClr val="2E86AB"/>
+            </a:solidFill>
+          </a:ln>
+        </p:spPr>
+        <p:style>
+          <a:lnRef idx="2">
+            <a:schemeClr val="accent1"/>
+          </a:lnRef>
+          <a:fillRef idx="0">
+            <a:schemeClr val="accent1"/>
+          </a:fillRef>
+          <a:effectRef idx="1">
+            <a:schemeClr val="accent1"/>
+          </a:effectRef>
+          <a:fontRef idx="minor">
+            <a:schemeClr val="tx1"/>
+          </a:fontRef>
+        </p:style>
+      </p:cxnSp>
+      <p:sp>
+        <p:nvSpPr>
+          <p:cNvPr id="6" name="TextBox 5"/>
+          <p:cNvSpPr txBox="1"/>
+          <p:nvPr/>
+        </p:nvSpPr>
+        <p:spPr>
+          <a:xfrm>
+            <a:off x="3017520" y="1554480"/>
+            <a:ext cx="274320" cy="274320"/>
+          </a:xfrm>
+          <a:prstGeom prst="rect">
+            <a:avLst/>
+          </a:prstGeom>
+          <a:noFill/>
+        </p:spPr>
+        <p:txBody>
+          <a:bodyPr wrap="none" lIns="0" tIns="0" bIns="0">
+            <a:spAutoFit/>
+          </a:bodyPr>
+          <a:lstStyle/>
+          <a:p>
+            <a:pPr>
+              <a:defRPr sz="1200" b="1">
+                <a:solidFill>
+                  <a:srgbClr val="2E86AB"/>
+                </a:solidFill>
+                <a:latin typeface="Source Sans Pro"/>
+              </a:defRPr>
+            </a:pPr>
+            <a:r>
+              <a:t>01</a:t>
+            </a:r>
+          </a:p>
+        </p:txBody>
+      </p:sp>
+      <p:sp>
+        <p:nvSpPr>
+          <p:cNvPr id="7" name="TextBox 6"/>
+          <p:cNvSpPr txBox="1"/>
+          <p:nvPr/>
+        </p:nvSpPr>
+        <p:spPr>
+          <a:xfrm>
+            <a:off x="457200" y="2057400"/>
+            <a:ext cx="2011680" cy="274320"/>
+          </a:xfrm>
+          <a:prstGeom prst="rect">
+            <a:avLst/>
+          </a:prstGeom>
+          <a:noFill/>
+        </p:spPr>
+        <p:txBody>
+          <a:bodyPr wrap="none" lIns="0" rIns="0" tIns="0" bIns="0">
+            <a:spAutoFit/>
+          </a:bodyPr>
+          <a:lstStyle/>
+          <a:p>
+            <a:pPr>
+              <a:defRPr sz="1200" b="1">
+                <a:solidFill>
+                  <a:srgbClr val="FFFFFF"/>
+                </a:solidFill>
+                <a:latin typeface="Source Sans Pro"/>
+              </a:defRPr>
+            </a:pPr>
+            <a:r>
+              <a:t>Brand Purpose</a:t>
+            </a:r>
+          </a:p>
+        </p:txBody>
+      </p:sp>
+      <p:cxnSp>
+        <p:nvCxnSpPr>
+          <p:cNvPr id="8" name="Connector 7"/>
+          <p:cNvCxnSpPr/>
+          <p:nvPr/>
+        </p:nvCxnSpPr>
+        <p:spPr>
+          <a:xfrm>
+            <a:off x="2560320" y="2167128"/>
+            <a:ext cx="365760" cy="0"/>
+          </a:xfrm>
+          <a:prstGeom prst="line">
+            <a:avLst/>
+          </a:prstGeom>
+          <a:ln w="19050">
+            <a:solidFill>
+              <a:srgbClr val="2E86AB"/>
+            </a:solidFill>
+          </a:ln>
+        </p:spPr>
+        <p:style>
+          <a:lnRef idx="2">
+            <a:schemeClr val="accent1"/>
+          </a:lnRef>
+          <a:fillRef idx="0">
+            <a:schemeClr val="accent1"/>
+          </a:fillRef>
+          <a:effectRef idx="1">
+            <a:schemeClr val="accent1"/>
+          </a:effectRef>
+          <a:fontRef idx="minor">
+            <a:schemeClr val="tx1"/>
+          </a:fontRef>
+        </p:style>
+      </p:cxnSp>
+      <p:sp>
+        <p:nvSpPr>
+          <p:cNvPr id="9" name="TextBox 8"/>
+          <p:cNvSpPr txBox="1"/>
+          <p:nvPr/>
+        </p:nvSpPr>
+        <p:spPr>
+          <a:xfrm>
+            <a:off x="3017520" y="2057400"/>
+            <a:ext cx="274320" cy="274320"/>
+          </a:xfrm>
+          <a:prstGeom prst="rect">
+            <a:avLst/>
+          </a:prstGeom>
+          <a:noFill/>
+        </p:spPr>
+        <p:txBody>
+          <a:bodyPr wrap="none" lIns="0" tIns="0" bIns="0">
+            <a:spAutoFit/>
+          </a:bodyPr>
+          <a:lstStyle/>
+          <a:p>
+            <a:pPr>
+              <a:defRPr sz="1200" b="1">
+                <a:solidFill>
+                  <a:srgbClr val="2E86AB"/>
+                </a:solidFill>
+                <a:latin typeface="Source Sans Pro"/>
+              </a:defRPr>
+            </a:pPr>
+            <a:r>
+              <a:t>02</a:t>
+            </a:r>
+          </a:p>
+        </p:txBody>
+      </p:sp>
+      <p:sp>
+        <p:nvSpPr>
+          <p:cNvPr id="10" name="TextBox 9"/>
+          <p:cNvSpPr txBox="1"/>
+          <p:nvPr/>
+        </p:nvSpPr>
+        <p:spPr>
+          <a:xfrm>
+            <a:off x="457200" y="2560320"/>
+            <a:ext cx="2011680" cy="274320"/>
+          </a:xfrm>
+          <a:prstGeom prst="rect">
+            <a:avLst/>
+          </a:prstGeom>
+          <a:noFill/>
+        </p:spPr>
+        <p:txBody>
+          <a:bodyPr wrap="none" lIns="0" rIns="0" tIns="0" bIns="0">
+            <a:spAutoFit/>
+          </a:bodyPr>
+          <a:lstStyle/>
+          <a:p>
+            <a:pPr>
+              <a:defRPr sz="1200" b="1">
+                <a:solidFill>
+                  <a:srgbClr val="FFFFFF"/>
+                </a:solidFill>
+                <a:latin typeface="Source Sans Pro"/>
+              </a:defRPr>
+            </a:pPr>
+            <a:r>
+              <a:t>Logo Variations</a:t>
+            </a:r>
+          </a:p>
+        </p:txBody>
+      </p:sp>
+      <p:cxnSp>
+        <p:nvCxnSpPr>
+          <p:cNvPr id="11" name="Connector 10"/>
+          <p:cNvCxnSpPr/>
+          <p:nvPr/>
+        </p:nvCxnSpPr>
+        <p:spPr>
+          <a:xfrm>
+            <a:off x="2560320" y="2670048"/>
+            <a:ext cx="365760" cy="0"/>
+          </a:xfrm>
+          <a:prstGeom prst="line">
+            <a:avLst/>
+          </a:prstGeom>
+          <a:ln w="19050">
+            <a:solidFill>
+              <a:srgbClr val="2E86AB"/>
+            </a:solidFill>
+          </a:ln>
+        </p:spPr>
+        <p:style>
+          <a:lnRef idx="2">
+            <a:schemeClr val="accent1"/>
+          </a:lnRef>
+          <a:fillRef idx="0">
+            <a:schemeClr val="accent1"/>
+          </a:fillRef>
+          <a:effectRef idx="1">
+            <a:schemeClr val="accent1"/>
+          </a:effectRef>
+          <a:fontRef idx="minor">
+            <a:schemeClr val="tx1"/>
+          </a:fontRef>
+        </p:style>
+      </p:cxnSp>
+      <p:sp>
+        <p:nvSpPr>
+          <p:cNvPr id="12" name="TextBox 11"/>
+          <p:cNvSpPr txBox="1"/>
+          <p:nvPr/>
+        </p:nvSpPr>
+        <p:spPr>
+          <a:xfrm>
+            <a:off x="3017520" y="2560320"/>
+            <a:ext cx="274320" cy="274320"/>
+          </a:xfrm>
+          <a:prstGeom prst="rect">
+            <a:avLst/>
+          </a:prstGeom>
+          <a:noFill/>
+        </p:spPr>
+        <p:txBody>
+          <a:bodyPr wrap="none" lIns="0" tIns="0" bIns="0">
+            <a:spAutoFit/>
+          </a:bodyPr>
+          <a:lstStyle/>
+          <a:p>
+            <a:pPr>
+              <a:defRPr sz="1200" b="1">
+                <a:solidFill>
+                  <a:srgbClr val="2E86AB"/>
+                </a:solidFill>
+                <a:latin typeface="Source Sans Pro"/>
+              </a:defRPr>
+            </a:pPr>
+            <a:r>
+              <a:t>03</a:t>
+            </a:r>
+          </a:p>
+        </p:txBody>
+      </p:sp>
+      <p:sp>
+        <p:nvSpPr>
+          <p:cNvPr id="13" name="TextBox 12"/>
+          <p:cNvSpPr txBox="1"/>
+          <p:nvPr/>
+        </p:nvSpPr>
+        <p:spPr>
+          <a:xfrm>
+            <a:off x="640080" y="2926079"/>
+            <a:ext cx="1828800" cy="228600"/>
+          </a:xfrm>
+          <a:prstGeom prst="rect">
+            <a:avLst/>
+          </a:prstGeom>
+          <a:noFill/>
+        </p:spPr>
+        <p:txBody>
+          <a:bodyPr wrap="none" lIns="0" tIns="0" bIns="0">
+            <a:spAutoFit/>
+          </a:bodyPr>
+          <a:lstStyle/>
+          <a:p>
+            <a:pPr>
+              <a:defRPr sz="900" b="0">
+                <a:solidFill>
+                  <a:srgbClr val="CCCCCC"/>
+                </a:solidFill>
+                <a:latin typeface="Source Sans Pro"/>
+              </a:defRPr>
+            </a:pPr>
+            <a:r>
+              <a:t>Logo Mark</a:t>
+            </a:r>
+          </a:p>
+        </p:txBody>
+      </p:sp>
+      <p:sp>
+        <p:nvSpPr>
+          <p:cNvPr id="14" name="TextBox 13"/>
+          <p:cNvSpPr txBox="1"/>
+          <p:nvPr/>
+        </p:nvSpPr>
+        <p:spPr>
+          <a:xfrm>
+            <a:off x="640080" y="3154679"/>
+            <a:ext cx="1828800" cy="228600"/>
+          </a:xfrm>
+          <a:prstGeom prst="rect">
+            <a:avLst/>
+          </a:prstGeom>
+          <a:noFill/>
+        </p:spPr>
+        <p:txBody>
+          <a:bodyPr wrap="none" lIns="0" tIns="0" bIns="0">
+            <a:spAutoFit/>
+          </a:bodyPr>
+          <a:lstStyle/>
+          <a:p>
+            <a:pPr>
+              <a:defRPr sz="900" b="0">
+                <a:solidFill>
+                  <a:srgbClr val="CCCCCC"/>
+                </a:solidFill>
+                <a:latin typeface="Source Sans Pro"/>
+              </a:defRPr>
+            </a:pPr>
+            <a:r>
+              <a:t>Clear Space</a:t>
+            </a:r>
+          </a:p>
+        </p:txBody>
+      </p:sp>
+      <p:sp>
+        <p:nvSpPr>
+          <p:cNvPr id="15" name="TextBox 14"/>
+          <p:cNvSpPr txBox="1"/>
+          <p:nvPr/>
+        </p:nvSpPr>
+        <p:spPr>
+          <a:xfrm>
+            <a:off x="640080" y="3383279"/>
+            <a:ext cx="1828800" cy="228600"/>
+          </a:xfrm>
+          <a:prstGeom prst="rect">
+            <a:avLst/>
+          </a:prstGeom>
+          <a:noFill/>
+        </p:spPr>
+        <p:txBody>
+          <a:bodyPr wrap="none" lIns="0" tIns="0" bIns="0">
+            <a:spAutoFit/>
+          </a:bodyPr>
+          <a:lstStyle/>
+          <a:p>
+            <a:pPr>
+              <a:defRPr sz="900" b="0">
+                <a:solidFill>
+                  <a:srgbClr val="CCCCCC"/>
+                </a:solidFill>
+                <a:latin typeface="Source Sans Pro"/>
+              </a:defRPr>
+            </a:pPr>
+            <a:r>
+              <a:t>Usage Guidelines</a:t>
+            </a:r>
+          </a:p>
+        </p:txBody>
+      </p:sp>
+      <p:sp>
+        <p:nvSpPr>
+          <p:cNvPr id="16" name="TextBox 15"/>
+          <p:cNvSpPr txBox="1"/>
+          <p:nvPr/>
+        </p:nvSpPr>
+        <p:spPr>
+          <a:xfrm>
+            <a:off x="457200" y="3749039"/>
+            <a:ext cx="2011680" cy="274320"/>
+          </a:xfrm>
+          <a:prstGeom prst="rect">
+            <a:avLst/>
+          </a:prstGeom>
+          <a:noFill/>
+        </p:spPr>
+        <p:txBody>
+          <a:bodyPr wrap="none" lIns="0" rIns="0" tIns="0" bIns="0">
+            <a:spAutoFit/>
+          </a:bodyPr>
+          <a:lstStyle/>
+          <a:p>
+            <a:pPr>
+              <a:defRPr sz="1200" b="1">
+                <a:solidFill>
+                  <a:srgbClr val="FFFFFF"/>
+                </a:solidFill>
+                <a:latin typeface="Source Sans Pro"/>
+              </a:defRPr>
+            </a:pPr>
+            <a:r>
+              <a:t>Brand Colors</a:t>
+            </a:r>
+          </a:p>
+        </p:txBody>
+      </p:sp>
+      <p:cxnSp>
+        <p:nvCxnSpPr>
+          <p:cNvPr id="17" name="Connector 16"/>
+          <p:cNvCxnSpPr/>
+          <p:nvPr/>
+        </p:nvCxnSpPr>
+        <p:spPr>
+          <a:xfrm>
+            <a:off x="2560320" y="3858767"/>
+            <a:ext cx="365760" cy="0"/>
+          </a:xfrm>
+          <a:prstGeom prst="line">
+            <a:avLst/>
+          </a:prstGeom>
+          <a:ln w="19050">
+            <a:solidFill>
+              <a:srgbClr val="2E86AB"/>
+            </a:solidFill>
+          </a:ln>
+        </p:spPr>
+        <p:style>
+          <a:lnRef idx="2">
+            <a:schemeClr val="accent1"/>
+          </a:lnRef>
+          <a:fillRef idx="0">
+            <a:schemeClr val="accent1"/>
+          </a:fillRef>
+          <a:effectRef idx="1">
+            <a:schemeClr val="accent1"/>
+          </a:effectRef>
+          <a:fontRef idx="minor">
+            <a:schemeClr val="tx1"/>
+          </a:fontRef>
+        </p:style>
+      </p:cxnSp>
+      <p:sp>
+        <p:nvSpPr>
+          <p:cNvPr id="18" name="TextBox 17"/>
+          <p:cNvSpPr txBox="1"/>
+          <p:nvPr/>
+        </p:nvSpPr>
+        <p:spPr>
+          <a:xfrm>
+            <a:off x="3017520" y="3749039"/>
+            <a:ext cx="274320" cy="274320"/>
+          </a:xfrm>
+          <a:prstGeom prst="rect">
+            <a:avLst/>
+          </a:prstGeom>
+          <a:noFill/>
+        </p:spPr>
+        <p:txBody>
+          <a:bodyPr wrap="none" lIns="0" tIns="0" bIns="0">
+            <a:spAutoFit/>
+          </a:bodyPr>
+          <a:lstStyle/>
+          <a:p>
+            <a:pPr>
+              <a:defRPr sz="1200" b="1">
+                <a:solidFill>
+                  <a:srgbClr val="2E86AB"/>
+                </a:solidFill>
+                <a:latin typeface="Source Sans Pro"/>
+              </a:defRPr>
+            </a:pPr>
+            <a:r>
+              <a:t>04</a:t>
+            </a:r>
+          </a:p>
+        </p:txBody>
+      </p:sp>
+      <p:sp>
+        <p:nvSpPr>
+          <p:cNvPr id="19" name="TextBox 18"/>
+          <p:cNvSpPr txBox="1"/>
+          <p:nvPr/>
+        </p:nvSpPr>
+        <p:spPr>
+          <a:xfrm>
+            <a:off x="640080" y="4114800"/>
+            <a:ext cx="1828800" cy="228600"/>
+          </a:xfrm>
+          <a:prstGeom prst="rect">
+            <a:avLst/>
+          </a:prstGeom>
+          <a:noFill/>
+        </p:spPr>
+        <p:txBody>
+          <a:bodyPr wrap="none" lIns="0" tIns="0" bIns="0">
+            <a:spAutoFit/>
+          </a:bodyPr>
+          <a:lstStyle/>
+          <a:p>
+            <a:pPr>
+              <a:defRPr sz="900" b="0">
+                <a:solidFill>
+                  <a:srgbClr val="CCCCCC"/>
+                </a:solidFill>
+                <a:latin typeface="Source Sans Pro"/>
+              </a:defRPr>
+            </a:pPr>
+            <a:r>
+              <a:t>Primary Colors</a:t>
+            </a:r>
+          </a:p>
+        </p:txBody>
+      </p:sp>
+      <p:sp>
+        <p:nvSpPr>
+          <p:cNvPr id="20" name="TextBox 19"/>
+          <p:cNvSpPr txBox="1"/>
+          <p:nvPr/>
+        </p:nvSpPr>
+        <p:spPr>
+          <a:xfrm>
+            <a:off x="640080" y="4343400"/>
+            <a:ext cx="1828800" cy="228600"/>
+          </a:xfrm>
+          <a:prstGeom prst="rect">
+            <a:avLst/>
+          </a:prstGeom>
+          <a:noFill/>
+        </p:spPr>
+        <p:txBody>
+          <a:bodyPr wrap="none" lIns="0" tIns="0" bIns="0">
+            <a:spAutoFit/>
+          </a:bodyPr>
+          <a:lstStyle/>
+          <a:p>
+            <a:pPr>
+              <a:defRPr sz="900" b="0">
+                <a:solidFill>
+                  <a:srgbClr val="CCCCCC"/>
+                </a:solidFill>
+                <a:latin typeface="Source Sans Pro"/>
+              </a:defRPr>
+            </a:pPr>
+            <a:r>
+              <a:t>Secondary Colors</a:t>
+            </a:r>
+          </a:p>
+        </p:txBody>
+      </p:sp>
+      <p:sp>
+        <p:nvSpPr>
+          <p:cNvPr id="21" name="TextBox 20"/>
+          <p:cNvSpPr txBox="1"/>
+          <p:nvPr/>
+        </p:nvSpPr>
+        <p:spPr>
+          <a:xfrm>
+            <a:off x="640080" y="4572000"/>
+            <a:ext cx="1828800" cy="228600"/>
+          </a:xfrm>
+          <a:prstGeom prst="rect">
+            <a:avLst/>
+          </a:prstGeom>
+          <a:noFill/>
+        </p:spPr>
+        <p:txBody>
+          <a:bodyPr wrap="none" lIns="0" tIns="0" bIns="0">
+            <a:spAutoFit/>
+          </a:bodyPr>
+          <a:lstStyle/>
+          <a:p>
+            <a:pPr>
+              <a:defRPr sz="900" b="0">
+                <a:solidFill>
+                  <a:srgbClr val="CCCCCC"/>
+                </a:solidFill>
+                <a:latin typeface="Source Sans Pro"/>
+              </a:defRPr>
+            </a:pPr>
+            <a:r>
+              <a:t>Color Usage</a:t>
+            </a:r>
+          </a:p>
+        </p:txBody>
+      </p:sp>
+      <p:sp>
+        <p:nvSpPr>
+          <p:cNvPr id="22" name="TextBox 21"/>
+          <p:cNvSpPr txBox="1"/>
+          <p:nvPr/>
+        </p:nvSpPr>
+        <p:spPr>
+          <a:xfrm>
+            <a:off x="3474720" y="1554480"/>
+            <a:ext cx="2011680" cy="274320"/>
+          </a:xfrm>
+          <a:prstGeom prst="rect">
+            <a:avLst/>
+          </a:prstGeom>
+          <a:noFill/>
+        </p:spPr>
+        <p:txBody>
+          <a:bodyPr wrap="none" lIns="0" rIns="0" tIns="0" bIns="0">
+            <a:spAutoFit/>
+          </a:bodyPr>
+          <a:lstStyle/>
+          <a:p>
+            <a:pPr>
+              <a:defRPr sz="1200" b="1">
+                <a:solidFill>
+                  <a:srgbClr val="FFFFFF"/>
+                </a:solidFill>
+                <a:latin typeface="Source Sans Pro"/>
+              </a:defRPr>
+            </a:pPr>
+            <a:r>
+              <a:t>Typography</a:t>
+            </a:r>
+          </a:p>
+        </p:txBody>
+      </p:sp>
+      <p:cxnSp>
+        <p:nvCxnSpPr>
+          <p:cNvPr id="23" name="Connector 22"/>
+          <p:cNvCxnSpPr/>
+          <p:nvPr/>
+        </p:nvCxnSpPr>
+        <p:spPr>
+          <a:xfrm>
+            <a:off x="5577840" y="1664208"/>
+            <a:ext cx="365760" cy="0"/>
+          </a:xfrm>
+          <a:prstGeom prst="line">
+            <a:avLst/>
+          </a:prstGeom>
+          <a:ln w="19050">
+            <a:solidFill>
+              <a:srgbClr val="2E86AB"/>
+            </a:solidFill>
+          </a:ln>
+        </p:spPr>
+        <p:style>
+          <a:lnRef idx="2">
+            <a:schemeClr val="accent1"/>
+          </a:lnRef>
+          <a:fillRef idx="0">
+            <a:schemeClr val="accent1"/>
+          </a:fillRef>
+          <a:effectRef idx="1">
+            <a:schemeClr val="accent1"/>
+          </a:effectRef>
+          <a:fontRef idx="minor">
+            <a:schemeClr val="tx1"/>
+          </a:fontRef>
+        </p:style>
+      </p:cxnSp>
+      <p:sp>
+        <p:nvSpPr>
+          <p:cNvPr id="24" name="TextBox 23"/>
+          <p:cNvSpPr txBox="1"/>
+          <p:nvPr/>
+        </p:nvSpPr>
+        <p:spPr>
+          <a:xfrm>
+            <a:off x="6035040" y="1554480"/>
+            <a:ext cx="274320" cy="274320"/>
+          </a:xfrm>
+          <a:prstGeom prst="rect">
+            <a:avLst/>
+          </a:prstGeom>
+          <a:noFill/>
+        </p:spPr>
+        <p:txBody>
+          <a:bodyPr wrap="none" lIns="0" tIns="0" bIns="0">
+            <a:spAutoFit/>
+          </a:bodyPr>
+          <a:lstStyle/>
+          <a:p>
+            <a:pPr>
+              <a:defRPr sz="1200" b="1">
+                <a:solidFill>
+                  <a:srgbClr val="2E86AB"/>
+                </a:solidFill>
+                <a:latin typeface="Source Sans Pro"/>
+              </a:defRPr>
+            </a:pPr>
+            <a:r>
+              <a:t>05</a:t>
+            </a:r>
+          </a:p>
+        </p:txBody>
+      </p:sp>
+      <p:sp>
+        <p:nvSpPr>
+          <p:cNvPr id="25" name="TextBox 24"/>
+          <p:cNvSpPr txBox="1"/>
+          <p:nvPr/>
+        </p:nvSpPr>
+        <p:spPr>
+          <a:xfrm>
+            <a:off x="3657600" y="1920240"/>
+            <a:ext cx="1828800" cy="228600"/>
+          </a:xfrm>
+          <a:prstGeom prst="rect">
+            <a:avLst/>
+          </a:prstGeom>
+          <a:noFill/>
+        </p:spPr>
+        <p:txBody>
+          <a:bodyPr wrap="none" lIns="0" tIns="0" bIns="0">
+            <a:spAutoFit/>
+          </a:bodyPr>
+          <a:lstStyle/>
+          <a:p>
+            <a:pPr>
+              <a:defRPr sz="900" b="0">
+                <a:solidFill>
+                  <a:srgbClr val="CCCCCC"/>
+                </a:solidFill>
+                <a:latin typeface="Source Sans Pro"/>
+              </a:defRPr>
+            </a:pPr>
+            <a:r>
+              <a:t>Brand Font</a:t>
+            </a:r>
+          </a:p>
+        </p:txBody>
+      </p:sp>
+      <p:sp>
+        <p:nvSpPr>
+          <p:cNvPr id="26" name="TextBox 25"/>
+          <p:cNvSpPr txBox="1"/>
+          <p:nvPr/>
+        </p:nvSpPr>
+        <p:spPr>
+          <a:xfrm>
+            <a:off x="3657600" y="2148840"/>
+            <a:ext cx="1828800" cy="228600"/>
+          </a:xfrm>
+          <a:prstGeom prst="rect">
+            <a:avLst/>
+          </a:prstGeom>
+          <a:noFill/>
+        </p:spPr>
+        <p:txBody>
+          <a:bodyPr wrap="none" lIns="0" tIns="0" bIns="0">
+            <a:spAutoFit/>
+          </a:bodyPr>
+          <a:lstStyle/>
+          <a:p>
+            <a:pPr>
+              <a:defRPr sz="900" b="0">
+                <a:solidFill>
+                  <a:srgbClr val="CCCCCC"/>
+                </a:solidFill>
+                <a:latin typeface="Source Sans Pro"/>
+              </a:defRPr>
+            </a:pPr>
+            <a:r>
+              <a:t>Font Usage</a:t>
+            </a:r>
+          </a:p>
+        </p:txBody>
+      </p:sp>
+      <p:sp>
+        <p:nvSpPr>
+          <p:cNvPr id="27" name="TextBox 26"/>
+          <p:cNvSpPr txBox="1"/>
+          <p:nvPr/>
+        </p:nvSpPr>
+        <p:spPr>
+          <a:xfrm>
+            <a:off x="3657600" y="2377440"/>
+            <a:ext cx="1828800" cy="228600"/>
+          </a:xfrm>
+          <a:prstGeom prst="rect">
+            <a:avLst/>
+          </a:prstGeom>
+          <a:noFill/>
+        </p:spPr>
+        <p:txBody>
+          <a:bodyPr wrap="none" lIns="0" tIns="0" bIns="0">
+            <a:spAutoFit/>
+          </a:bodyPr>
+          <a:lstStyle/>
+          <a:p>
+            <a:pPr>
+              <a:defRPr sz="900" b="0">
+                <a:solidFill>
+                  <a:srgbClr val="CCCCCC"/>
+                </a:solidFill>
+                <a:latin typeface="Source Sans Pro"/>
+              </a:defRPr>
+            </a:pPr>
+            <a:r>
+              <a:t>Text Hierarchy</a:t>
+            </a:r>
+          </a:p>
+        </p:txBody>
+      </p:sp>
+      <p:sp>
+        <p:nvSpPr>
+          <p:cNvPr id="28" name="TextBox 27"/>
+          <p:cNvSpPr txBox="1"/>
+          <p:nvPr/>
+        </p:nvSpPr>
+        <p:spPr>
+          <a:xfrm>
+            <a:off x="3474720" y="2743200"/>
+            <a:ext cx="2011680" cy="274320"/>
+          </a:xfrm>
+          <a:prstGeom prst="rect">
+            <a:avLst/>
+          </a:prstGeom>
+          <a:noFill/>
+        </p:spPr>
+        <p:txBody>
+          <a:bodyPr wrap="none" lIns="0" rIns="0" tIns="0" bIns="0">
+            <a:spAutoFit/>
+          </a:bodyPr>
+          <a:lstStyle/>
+          <a:p>
+            <a:pPr>
+              <a:defRPr sz="1200" b="1">
+                <a:solidFill>
+                  <a:srgbClr val="FFFFFF"/>
+                </a:solidFill>
+                <a:latin typeface="Source Sans Pro"/>
+              </a:defRPr>
+            </a:pPr>
+            <a:r>
+              <a:t>Visual Guidelines</a:t>
+            </a:r>
+          </a:p>
+        </p:txBody>
+      </p:sp>
+      <p:cxnSp>
+        <p:nvCxnSpPr>
+          <p:cNvPr id="29" name="Connector 28"/>
+          <p:cNvCxnSpPr/>
+          <p:nvPr/>
+        </p:nvCxnSpPr>
+        <p:spPr>
+          <a:xfrm>
+            <a:off x="5577840" y="2852928"/>
+            <a:ext cx="365760" cy="0"/>
+          </a:xfrm>
+          <a:prstGeom prst="line">
+            <a:avLst/>
+          </a:prstGeom>
+          <a:ln w="19050">
+            <a:solidFill>
+              <a:srgbClr val="2E86AB"/>
+            </a:solidFill>
+          </a:ln>
+        </p:spPr>
+        <p:style>
+          <a:lnRef idx="2">
+            <a:schemeClr val="accent1"/>
+          </a:lnRef>
+          <a:fillRef idx="0">
+            <a:schemeClr val="accent1"/>
+          </a:fillRef>
+          <a:effectRef idx="1">
+            <a:schemeClr val="accent1"/>
+          </a:effectRef>
+          <a:fontRef idx="minor">
+            <a:schemeClr val="tx1"/>
+          </a:fontRef>
+        </p:style>
+      </p:cxnSp>
+      <p:sp>
+        <p:nvSpPr>
+          <p:cNvPr id="30" name="TextBox 29"/>
+          <p:cNvSpPr txBox="1"/>
+          <p:nvPr/>
+        </p:nvSpPr>
+        <p:spPr>
+          <a:xfrm>
+            <a:off x="6035040" y="2743200"/>
+            <a:ext cx="274320" cy="274320"/>
+          </a:xfrm>
+          <a:prstGeom prst="rect">
+            <a:avLst/>
+          </a:prstGeom>
+          <a:noFill/>
+        </p:spPr>
+        <p:txBody>
+          <a:bodyPr wrap="none" lIns="0" tIns="0" bIns="0">
+            <a:spAutoFit/>
+          </a:bodyPr>
+          <a:lstStyle/>
+          <a:p>
+            <a:pPr>
+              <a:defRPr sz="1200" b="1">
+                <a:solidFill>
+                  <a:srgbClr val="2E86AB"/>
+                </a:solidFill>
+                <a:latin typeface="Source Sans Pro"/>
+              </a:defRPr>
+            </a:pPr>
+            <a:r>
+              <a:t>06</a:t>
+            </a:r>
+          </a:p>
+        </p:txBody>
+      </p:sp>
+      <p:sp>
+        <p:nvSpPr>
+          <p:cNvPr id="31" name="TextBox 30"/>
+          <p:cNvSpPr txBox="1"/>
+          <p:nvPr/>
+        </p:nvSpPr>
+        <p:spPr>
+          <a:xfrm>
+            <a:off x="3657600" y="3108960"/>
+            <a:ext cx="1828800" cy="228600"/>
+          </a:xfrm>
+          <a:prstGeom prst="rect">
+            <a:avLst/>
+          </a:prstGeom>
+          <a:noFill/>
+        </p:spPr>
+        <p:txBody>
+          <a:bodyPr wrap="none" lIns="0" tIns="0" bIns="0">
+            <a:spAutoFit/>
+          </a:bodyPr>
+          <a:lstStyle/>
+          <a:p>
+            <a:pPr>
+              <a:defRPr sz="900" b="0">
+                <a:solidFill>
+                  <a:srgbClr val="CCCCCC"/>
+                </a:solidFill>
+                <a:latin typeface="Source Sans Pro"/>
+              </a:defRPr>
+            </a:pPr>
+            <a:r>
+              <a:t>Visual Style</a:t>
+            </a:r>
+          </a:p>
+        </p:txBody>
+      </p:sp>
+      <p:sp>
+        <p:nvSpPr>
+          <p:cNvPr id="32" name="TextBox 31"/>
+          <p:cNvSpPr txBox="1"/>
+          <p:nvPr/>
+        </p:nvSpPr>
+        <p:spPr>
+          <a:xfrm>
+            <a:off x="3657600" y="3337560"/>
+            <a:ext cx="1828800" cy="228600"/>
+          </a:xfrm>
+          <a:prstGeom prst="rect">
+            <a:avLst/>
+          </a:prstGeom>
+          <a:noFill/>
+        </p:spPr>
+        <p:txBody>
+          <a:bodyPr wrap="none" lIns="0" tIns="0" bIns="0">
+            <a:spAutoFit/>
+          </a:bodyPr>
+          <a:lstStyle/>
+          <a:p>
+            <a:pPr>
+              <a:defRPr sz="900" b="0">
+                <a:solidFill>
+                  <a:srgbClr val="CCCCCC"/>
+                </a:solidFill>
+                <a:latin typeface="Source Sans Pro"/>
+              </a:defRPr>
+            </a:pPr>
+            <a:r>
+              <a:t>Photography</a:t>
+            </a:r>
+          </a:p>
+        </p:txBody>
+      </p:sp>
+      <p:sp>
+        <p:nvSpPr>
+          <p:cNvPr id="33" name="TextBox 32"/>
+          <p:cNvSpPr txBox="1"/>
+          <p:nvPr/>
+        </p:nvSpPr>
+        <p:spPr>
+          <a:xfrm>
+            <a:off x="3657600" y="3566160"/>
+            <a:ext cx="1828800" cy="228600"/>
+          </a:xfrm>
+          <a:prstGeom prst="rect">
+            <a:avLst/>
+          </a:prstGeom>
+          <a:noFill/>
+        </p:spPr>
+        <p:txBody>
+          <a:bodyPr wrap="none" lIns="0" tIns="0" bIns="0">
+            <a:spAutoFit/>
+          </a:bodyPr>
+          <a:lstStyle/>
+          <a:p>
+            <a:pPr>
+              <a:defRPr sz="900" b="0">
+                <a:solidFill>
+                  <a:srgbClr val="CCCCCC"/>
+                </a:solidFill>
+                <a:latin typeface="Source Sans Pro"/>
+              </a:defRPr>
+            </a:pPr>
+            <a:r>
+              <a:t>Imagery</a:t>
+            </a:r>
+          </a:p>
+        </p:txBody>
+      </p:sp>
+      <p:sp>
+        <p:nvSpPr>
+          <p:cNvPr id="34" name="TextBox 33"/>
+          <p:cNvSpPr txBox="1"/>
+          <p:nvPr/>
+        </p:nvSpPr>
+        <p:spPr>
+          <a:xfrm>
+            <a:off x="3474720" y="3931920"/>
+            <a:ext cx="2011680" cy="274320"/>
+          </a:xfrm>
+          <a:prstGeom prst="rect">
+            <a:avLst/>
+          </a:prstGeom>
+          <a:noFill/>
+        </p:spPr>
+        <p:txBody>
+          <a:bodyPr wrap="none" lIns="0" rIns="0" tIns="0" bIns="0">
+            <a:spAutoFit/>
+          </a:bodyPr>
+          <a:lstStyle/>
+          <a:p>
+            <a:pPr>
+              <a:defRPr sz="1200" b="1">
+                <a:solidFill>
+                  <a:srgbClr val="FFFFFF"/>
+                </a:solidFill>
+                <a:latin typeface="Source Sans Pro"/>
+              </a:defRPr>
+            </a:pPr>
+            <a:r>
+              <a:t>Brand Story &amp; Mission</a:t>
+            </a:r>
+          </a:p>
+        </p:txBody>
+      </p:sp>
+      <p:cxnSp>
+        <p:nvCxnSpPr>
+          <p:cNvPr id="35" name="Connector 34"/>
+          <p:cNvCxnSpPr/>
+          <p:nvPr/>
+        </p:nvCxnSpPr>
+        <p:spPr>
+          <a:xfrm>
+            <a:off x="5577840" y="4041648"/>
+            <a:ext cx="365760" cy="0"/>
+          </a:xfrm>
+          <a:prstGeom prst="line">
+            <a:avLst/>
+          </a:prstGeom>
+          <a:ln w="19050">
+            <a:solidFill>
+              <a:srgbClr val="2E86AB"/>
+            </a:solidFill>
+          </a:ln>
+        </p:spPr>
+        <p:style>
+          <a:lnRef idx="2">
+            <a:schemeClr val="accent1"/>
+          </a:lnRef>
+          <a:fillRef idx="0">
+            <a:schemeClr val="accent1"/>
+          </a:fillRef>
+          <a:effectRef idx="1">
+            <a:schemeClr val="accent1"/>
+          </a:effectRef>
+          <a:fontRef idx="minor">
+            <a:schemeClr val="tx1"/>
+          </a:fontRef>
+        </p:style>
+      </p:cxnSp>
+      <p:sp>
+        <p:nvSpPr>
+          <p:cNvPr id="36" name="TextBox 35"/>
+          <p:cNvSpPr txBox="1"/>
+          <p:nvPr/>
+        </p:nvSpPr>
+        <p:spPr>
+          <a:xfrm>
+            <a:off x="6035040" y="3931920"/>
+            <a:ext cx="274320" cy="274320"/>
+          </a:xfrm>
+          <a:prstGeom prst="rect">
+            <a:avLst/>
+          </a:prstGeom>
+          <a:noFill/>
+        </p:spPr>
+        <p:txBody>
+          <a:bodyPr wrap="none" lIns="0" tIns="0" bIns="0">
+            <a:spAutoFit/>
+          </a:bodyPr>
+          <a:lstStyle/>
+          <a:p>
+            <a:pPr>
+              <a:defRPr sz="1200" b="1">
+                <a:solidFill>
+                  <a:srgbClr val="2E86AB"/>
+                </a:solidFill>
+                <a:latin typeface="Source Sans Pro"/>
+              </a:defRPr>
+            </a:pPr>
+            <a:r>
+              <a:t>07</a:t>
+            </a:r>
+          </a:p>
+        </p:txBody>
+      </p:sp>
+      <p:sp>
+        <p:nvSpPr>
+          <p:cNvPr id="37" name="TextBox 36"/>
+          <p:cNvSpPr txBox="1"/>
+          <p:nvPr/>
+        </p:nvSpPr>
+        <p:spPr>
+          <a:xfrm>
+            <a:off x="3474720" y="4434840"/>
+            <a:ext cx="2011680" cy="274320"/>
+          </a:xfrm>
+          <a:prstGeom prst="rect">
+            <a:avLst/>
+          </a:prstGeom>
+          <a:noFill/>
+        </p:spPr>
+        <p:txBody>
+          <a:bodyPr wrap="none" lIns="0" rIns="0" tIns="0" bIns="0">
+            <a:spAutoFit/>
+          </a:bodyPr>
+          <a:lstStyle/>
+          <a:p>
+            <a:pPr>
+              <a:defRPr sz="1200" b="1">
+                <a:solidFill>
+                  <a:srgbClr val="FFFFFF"/>
+                </a:solidFill>
+                <a:latin typeface="Source Sans Pro"/>
+              </a:defRPr>
+            </a:pPr>
+            <a:r>
+              <a:t>Brand Voice &amp; Tone</a:t>
+            </a:r>
+          </a:p>
+        </p:txBody>
+      </p:sp>
+      <p:cxnSp>
+        <p:nvCxnSpPr>
+          <p:cNvPr id="38" name="Connector 37"/>
+          <p:cNvCxnSpPr/>
+          <p:nvPr/>
+        </p:nvCxnSpPr>
+        <p:spPr>
+          <a:xfrm>
+            <a:off x="5577840" y="4544568"/>
+            <a:ext cx="365760" cy="0"/>
+          </a:xfrm>
+          <a:prstGeom prst="line">
+            <a:avLst/>
+          </a:prstGeom>
+          <a:ln w="19050">
+            <a:solidFill>
+              <a:srgbClr val="2E86AB"/>
+            </a:solidFill>
+          </a:ln>
+        </p:spPr>
+        <p:style>
+          <a:lnRef idx="2">
+            <a:schemeClr val="accent1"/>
+          </a:lnRef>
+          <a:fillRef idx="0">
+            <a:schemeClr val="accent1"/>
+          </a:fillRef>
+          <a:effectRef idx="1">
+            <a:schemeClr val="accent1"/>
+          </a:effectRef>
+          <a:fontRef idx="minor">
+            <a:schemeClr val="tx1"/>
+          </a:fontRef>
+        </p:style>
+      </p:cxnSp>
+      <p:sp>
+        <p:nvSpPr>
+          <p:cNvPr id="39" name="TextBox 38"/>
+          <p:cNvSpPr txBox="1"/>
+          <p:nvPr/>
+        </p:nvSpPr>
+        <p:spPr>
+          <a:xfrm>
+            <a:off x="6035040" y="4434840"/>
+            <a:ext cx="274320" cy="274320"/>
+          </a:xfrm>
+          <a:prstGeom prst="rect">
+            <a:avLst/>
+          </a:prstGeom>
+          <a:noFill/>
+        </p:spPr>
+        <p:txBody>
+          <a:bodyPr wrap="none" lIns="0" tIns="0" bIns="0">
+            <a:spAutoFit/>
+          </a:bodyPr>
+          <a:lstStyle/>
+          <a:p>
+            <a:pPr>
+              <a:defRPr sz="1200" b="1">
+                <a:solidFill>
+                  <a:srgbClr val="2E86AB"/>
+                </a:solidFill>
+                <a:latin typeface="Source Sans Pro"/>
+              </a:defRPr>
+            </a:pPr>
+            <a:r>
+              <a:t>08</a:t>
+            </a:r>
+          </a:p>
+        </p:txBody>
+      </p:sp>
+      <p:sp>
+        <p:nvSpPr>
+          <p:cNvPr id="40" name="TextBox 39"/>
+          <p:cNvSpPr txBox="1"/>
+          <p:nvPr/>
+        </p:nvSpPr>
+        <p:spPr>
+          <a:xfrm>
+            <a:off x="6492240" y="1554480"/>
+            <a:ext cx="2011680" cy="274320"/>
+          </a:xfrm>
+          <a:prstGeom prst="rect">
+            <a:avLst/>
+          </a:prstGeom>
+          <a:noFill/>
+        </p:spPr>
+        <p:txBody>
+          <a:bodyPr wrap="none" lIns="0" rIns="0" tIns="0" bIns="0">
+            <a:spAutoFit/>
+          </a:bodyPr>
+          <a:lstStyle/>
+          <a:p>
+            <a:pPr>
+              <a:defRPr sz="1200" b="1">
+                <a:solidFill>
+                  <a:srgbClr val="FFFFFF"/>
+                </a:solidFill>
+                <a:latin typeface="Source Sans Pro"/>
+              </a:defRPr>
+            </a:pPr>
+            <a:r>
+              <a:t>Messaging &amp; Value Propositions</a:t>
+            </a:r>
+          </a:p>
+        </p:txBody>
+      </p:sp>
+      <p:cxnSp>
+        <p:nvCxnSpPr>
+          <p:cNvPr id="41" name="Connector 40"/>
+          <p:cNvCxnSpPr/>
+          <p:nvPr/>
+        </p:nvCxnSpPr>
+        <p:spPr>
+          <a:xfrm>
+            <a:off x="8595360" y="1664208"/>
+            <a:ext cx="365760" cy="0"/>
+          </a:xfrm>
+          <a:prstGeom prst="line">
+            <a:avLst/>
+          </a:prstGeom>
+          <a:ln w="19050">
+            <a:solidFill>
+              <a:srgbClr val="2E86AB"/>
+            </a:solidFill>
+          </a:ln>
+        </p:spPr>
+        <p:style>
+          <a:lnRef idx="2">
+            <a:schemeClr val="accent1"/>
+          </a:lnRef>
+          <a:fillRef idx="0">
+            <a:schemeClr val="accent1"/>
+          </a:fillRef>
+          <a:effectRef idx="1">
+            <a:schemeClr val="accent1"/>
+          </a:effectRef>
+          <a:fontRef idx="minor">
+            <a:schemeClr val="tx1"/>
+          </a:fontRef>
+        </p:style>
+      </p:cxnSp>
+      <p:sp>
+        <p:nvSpPr>
+          <p:cNvPr id="42" name="TextBox 41"/>
+          <p:cNvSpPr txBox="1"/>
+          <p:nvPr/>
+        </p:nvSpPr>
+        <p:spPr>
+          <a:xfrm>
+            <a:off x="9052560" y="1554480"/>
+            <a:ext cx="274320" cy="274320"/>
+          </a:xfrm>
+          <a:prstGeom prst="rect">
+            <a:avLst/>
+          </a:prstGeom>
+          <a:noFill/>
+        </p:spPr>
+        <p:txBody>
+          <a:bodyPr wrap="none" lIns="0" tIns="0" bIns="0">
+            <a:spAutoFit/>
+          </a:bodyPr>
+          <a:lstStyle/>
+          <a:p>
+            <a:pPr>
+              <a:defRPr sz="1200" b="1">
+                <a:solidFill>
+                  <a:srgbClr val="2E86AB"/>
+                </a:solidFill>
+                <a:latin typeface="Source Sans Pro"/>
+              </a:defRPr>
+            </a:pPr>
+            <a:r>
+              <a:t>09</a:t>
+            </a:r>
+          </a:p>
+        </p:txBody>
+      </p:sp>
+      <p:sp>
+        <p:nvSpPr>
+          <p:cNvPr id="43" name="TextBox 42"/>
+          <p:cNvSpPr txBox="1"/>
+          <p:nvPr/>
+        </p:nvSpPr>
+        <p:spPr>
+          <a:xfrm>
+            <a:off x="6492240" y="2057400"/>
+            <a:ext cx="2011680" cy="274320"/>
+          </a:xfrm>
+          <a:prstGeom prst="rect">
+            <a:avLst/>
+          </a:prstGeom>
+          <a:noFill/>
+        </p:spPr>
+        <p:txBody>
+          <a:bodyPr wrap="none" lIns="0" rIns="0" tIns="0" bIns="0">
+            <a:spAutoFit/>
+          </a:bodyPr>
+          <a:lstStyle/>
+          <a:p>
+            <a:pPr>
+              <a:defRPr sz="1200" b="1">
+                <a:solidFill>
+                  <a:srgbClr val="FFFFFF"/>
+                </a:solidFill>
+                <a:latin typeface="Source Sans Pro"/>
+              </a:defRPr>
+            </a:pPr>
+            <a:r>
+              <a:t>Marketing Copy</a:t>
+            </a:r>
+          </a:p>
+        </p:txBody>
+      </p:sp>
+      <p:cxnSp>
+        <p:nvCxnSpPr>
+          <p:cNvPr id="44" name="Connector 43"/>
+          <p:cNvCxnSpPr/>
+          <p:nvPr/>
+        </p:nvCxnSpPr>
+        <p:spPr>
+          <a:xfrm>
+            <a:off x="8595360" y="2167128"/>
+            <a:ext cx="365760" cy="0"/>
+          </a:xfrm>
+          <a:prstGeom prst="line">
+            <a:avLst/>
+          </a:prstGeom>
+          <a:ln w="19050">
+            <a:solidFill>
+              <a:srgbClr val="2E86AB"/>
+            </a:solidFill>
+          </a:ln>
+        </p:spPr>
+        <p:style>
+          <a:lnRef idx="2">
+            <a:schemeClr val="accent1"/>
+          </a:lnRef>
+          <a:fillRef idx="0">
+            <a:schemeClr val="accent1"/>
+          </a:fillRef>
+          <a:effectRef idx="1">
+            <a:schemeClr val="accent1"/>
+          </a:effectRef>
+          <a:fontRef idx="minor">
+            <a:schemeClr val="tx1"/>
+          </a:fontRef>
+        </p:style>
+      </p:cxnSp>
+      <p:sp>
+        <p:nvSpPr>
+          <p:cNvPr id="45" name="TextBox 44"/>
+          <p:cNvSpPr txBox="1"/>
+          <p:nvPr/>
+        </p:nvSpPr>
+        <p:spPr>
+          <a:xfrm>
+            <a:off x="9052560" y="2057400"/>
+            <a:ext cx="274320" cy="274320"/>
+          </a:xfrm>
+          <a:prstGeom prst="rect">
+            <a:avLst/>
+          </a:prstGeom>
+          <a:noFill/>
+        </p:spPr>
+        <p:txBody>
+          <a:bodyPr wrap="none" lIns="0" tIns="0" bIns="0">
+            <a:spAutoFit/>
+          </a:bodyPr>
+          <a:lstStyle/>
+          <a:p>
+            <a:pPr>
+              <a:defRPr sz="1200" b="1">
+                <a:solidFill>
+                  <a:srgbClr val="2E86AB"/>
+                </a:solidFill>
+                <a:latin typeface="Source Sans Pro"/>
+              </a:defRPr>
+            </a:pPr>
+            <a:r>
+              <a:t>10</a:t>
+            </a:r>
+          </a:p>
+        </p:txBody>
+      </p:sp>
+      <p:sp>
+        <p:nvSpPr>
+          <p:cNvPr id="46" name="TextBox 45"/>
+          <p:cNvSpPr txBox="1"/>
+          <p:nvPr/>
+        </p:nvSpPr>
+        <p:spPr>
+          <a:xfrm>
+            <a:off x="6492240" y="2560320"/>
+            <a:ext cx="2011680" cy="274320"/>
+          </a:xfrm>
+          <a:prstGeom prst="rect">
+            <a:avLst/>
+          </a:prstGeom>
+          <a:noFill/>
+        </p:spPr>
+        <p:txBody>
+          <a:bodyPr wrap="none" lIns="0" rIns="0" tIns="0" bIns="0">
+            <a:spAutoFit/>
+          </a:bodyPr>
+          <a:lstStyle/>
+          <a:p>
+            <a:pPr>
+              <a:defRPr sz="1200" b="1">
+                <a:solidFill>
+                  <a:srgbClr val="FFFFFF"/>
+                </a:solidFill>
+                <a:latin typeface="Source Sans Pro"/>
+              </a:defRPr>
+            </a:pPr>
+            <a:r>
+              <a:t>1Brand Collateral Templates</a:t>
+            </a:r>
+          </a:p>
+        </p:txBody>
+      </p:sp>
+      <p:cxnSp>
+        <p:nvCxnSpPr>
+          <p:cNvPr id="47" name="Connector 46"/>
+          <p:cNvCxnSpPr/>
+          <p:nvPr/>
+        </p:nvCxnSpPr>
+        <p:spPr>
+          <a:xfrm>
+            <a:off x="8595360" y="2670048"/>
+            <a:ext cx="365760" cy="0"/>
+          </a:xfrm>
+          <a:prstGeom prst="line">
+            <a:avLst/>
+          </a:prstGeom>
+          <a:ln w="19050">
+            <a:solidFill>
+              <a:srgbClr val="2E86AB"/>
+            </a:solidFill>
+          </a:ln>
+        </p:spPr>
+        <p:style>
+          <a:lnRef idx="2">
+            <a:schemeClr val="accent1"/>
+          </a:lnRef>
+          <a:fillRef idx="0">
+            <a:schemeClr val="accent1"/>
+          </a:fillRef>
+          <a:effectRef idx="1">
+            <a:schemeClr val="accent1"/>
+          </a:effectRef>
+          <a:fontRef idx="minor">
+            <a:schemeClr val="tx1"/>
+          </a:fontRef>
+        </p:style>
+      </p:cxnSp>
+      <p:sp>
+        <p:nvSpPr>
+          <p:cNvPr id="48" name="TextBox 47"/>
+          <p:cNvSpPr txBox="1"/>
+          <p:nvPr/>
+        </p:nvSpPr>
+        <p:spPr>
+          <a:xfrm>
+            <a:off x="9052560" y="2560320"/>
+            <a:ext cx="274320" cy="274320"/>
+          </a:xfrm>
+          <a:prstGeom prst="rect">
+            <a:avLst/>
+          </a:prstGeom>
+          <a:noFill/>
+        </p:spPr>
+        <p:txBody>
+          <a:bodyPr wrap="none" lIns="0" tIns="0" bIns="0">
+            <a:spAutoFit/>
+          </a:bodyPr>
+          <a:lstStyle/>
+          <a:p>
+            <a:pPr>
+              <a:defRPr sz="1200" b="1">
+                <a:solidFill>
+                  <a:srgbClr val="2E86AB"/>
+                </a:solidFill>
+                <a:latin typeface="Source Sans Pro"/>
+              </a:defRPr>
+            </a:pPr>
+            <a:r>
+              <a:t>11</a:t>
+            </a:r>
+          </a:p>
+        </p:txBody>
+      </p:sp>
+      <p:sp>
+        <p:nvSpPr>
+          <p:cNvPr id="49" name="TextBox 48"/>
+          <p:cNvSpPr txBox="1"/>
+          <p:nvPr/>
+        </p:nvSpPr>
+        <p:spPr>
+          <a:xfrm>
+            <a:off x="457200" y="5657850"/>
+            <a:ext cx="4114800" cy="742950"/>
+          </a:xfrm>
+          <a:prstGeom prst="rect">
+            <a:avLst/>
+          </a:prstGeom>
+          <a:noFill/>
+        </p:spPr>
+        <p:txBody>
+          <a:bodyPr wrap="none">
+            <a:spAutoFit/>
+          </a:bodyPr>
+          <a:lstStyle/>
+          <a:p>
+            <a:pPr algn="l">
+              <a:defRPr sz="1000" b="0">
+                <a:solidFill>
+                  <a:srgbClr val="2E86AB"/>
+                </a:solidFill>
+                <a:latin typeface="Source Sans Pro"/>
+              </a:defRPr>
+            </a:pPr>
+            <a:r>
+              <a:t>TechForward Live</a:t>
+            </a:r>
+          </a:p>
+        </p:txBody>
+      </p:sp>
+      <p:sp>
+        <p:nvSpPr>
+          <p:cNvPr id="50" name="TextBox 49"/>
+          <p:cNvSpPr txBox="1"/>
+          <p:nvPr/>
+        </p:nvSpPr>
+        <p:spPr>
+          <a:xfrm>
+            <a:off x="4572000" y="5657850"/>
+            <a:ext cx="4114800" cy="742950"/>
+          </a:xfrm>
+          <a:prstGeom prst="rect">
+            <a:avLst/>
+          </a:prstGeom>
+          <a:noFill/>
+        </p:spPr>
+        <p:txBody>
+          <a:bodyPr wrap="none">
+            <a:spAutoFit/>
+          </a:bodyPr>
+          <a:lstStyle/>
+          <a:p>
+            <a:pPr algn="r">
+              <a:defRPr sz="1000" b="0">
+                <a:solidFill>
+                  <a:srgbClr val="2E86AB"/>
+                </a:solidFill>
+                <a:latin typeface="Source Sans Pro"/>
+              </a:defRPr>
+            </a:pPr>
+            <a:r>
+              <a:t>2</a:t>
             </a:r>
           </a:p>
         </p:txBody>
@@ -6143,112 +6510,32 @@
               </a:defRPr>
             </a:pPr>
             <a:r>
-              <a:t>Company Profile</a:t>
-            </a:r>
-          </a:p>
-        </p:txBody>
-      </p:sp>
-      <p:sp>
-        <p:nvSpPr>
-          <p:cNvPr id="4" name="TextBox 3"/>
-          <p:cNvSpPr txBox="1"/>
+              <a:t>Color Palette</a:t>
+            </a:r>
+          </a:p>
+        </p:txBody>
+      </p:sp>
+      <p:sp>
+        <p:nvSpPr>
+          <p:cNvPr id="4" name="Rectangle 3"/>
+          <p:cNvSpPr/>
           <p:nvPr/>
         </p:nvSpPr>
         <p:spPr>
           <a:xfrm>
             <a:off x="1143000" y="1943100"/>
-            <a:ext cx="3429000" cy="2971800"/>
-          </a:xfrm>
-          <a:prstGeom prst="rect">
-            <a:avLst/>
-          </a:prstGeom>
-          <a:noFill/>
-        </p:spPr>
-        <p:txBody>
-          <a:bodyPr wrap="square">
-            <a:spAutoFit/>
-          </a:bodyPr>
-          <a:lstStyle/>
-          <a:p>
-            <a:pPr>
-              <a:defRPr sz="1600" b="0">
-                <a:solidFill>
-                  <a:srgbClr val="2E86AB"/>
-                </a:solidFill>
-                <a:latin typeface="Source Sans Pro"/>
-              </a:defRPr>
-            </a:pPr>
-            <a:r>
-              <a:t>Company: TechForward Inc</a:t>
-            </a:r>
-          </a:p>
-          <a:p>
-            <a:pPr>
-              <a:defRPr sz="1600" b="0">
-                <a:solidFill>
-                  <a:srgbClr val="2E86AB"/>
-                </a:solidFill>
-                <a:latin typeface="Source Sans Pro"/>
-              </a:defRPr>
-            </a:pPr>
-          </a:p>
-          <a:p>
-            <a:pPr>
-              <a:defRPr sz="1600" b="0">
-                <a:solidFill>
-                  <a:srgbClr val="2E86AB"/>
-                </a:solidFill>
-                <a:latin typeface="Source Sans Pro"/>
-              </a:defRPr>
-            </a:pPr>
-            <a:r>
-              <a:t>Industry: Technology &amp; Digital Solutions</a:t>
-            </a:r>
-          </a:p>
-          <a:p>
-            <a:pPr>
-              <a:defRPr sz="1600" b="0">
-                <a:solidFill>
-                  <a:srgbClr val="2E86AB"/>
-                </a:solidFill>
-                <a:latin typeface="Source Sans Pro"/>
-              </a:defRPr>
-            </a:pPr>
-          </a:p>
-          <a:p>
-            <a:pPr>
-              <a:defRPr sz="1600" b="0">
-                <a:solidFill>
-                  <a:srgbClr val="2E86AB"/>
-                </a:solidFill>
-                <a:latin typeface="Source Sans Pro"/>
-              </a:defRPr>
-            </a:pPr>
-            <a:r>
-              <a:t>Target Audience: Progressive businesses seeking digital transformation and innovation</a:t>
-            </a:r>
-          </a:p>
-        </p:txBody>
-      </p:sp>
-      <p:sp>
-        <p:nvSpPr>
-          <p:cNvPr id="5" name="Rounded Rectangle 4"/>
-          <p:cNvSpPr/>
-          <p:nvPr/>
-        </p:nvSpPr>
-        <p:spPr>
-          <a:xfrm>
-            <a:off x="5257800" y="2034540"/>
-            <a:ext cx="1280160" cy="560070"/>
-          </a:xfrm>
-          <a:prstGeom prst="roundRect">
+            <a:ext cx="2057400" cy="1485900"/>
+          </a:xfrm>
+          <a:prstGeom prst="rect">
             <a:avLst/>
           </a:prstGeom>
           <a:solidFill>
-            <a:srgbClr val="F18F01"/>
+            <a:srgbClr val="2E86AB"/>
           </a:solidFill>
-          <a:ln>
-            <a:noFill/>
+          <a:ln w="12700">
+            <a:solidFill>
+              <a:srgbClr val="FFFFFF"/>
+            </a:solidFill>
           </a:ln>
         </p:spPr>
         <p:style>
@@ -6275,59 +6562,113 @@
       </p:sp>
       <p:sp>
         <p:nvSpPr>
-          <p:cNvPr id="6" name="TextBox 5"/>
-          <p:cNvSpPr txBox="1"/>
-          <p:nvPr/>
-        </p:nvSpPr>
-        <p:spPr>
-          <a:xfrm>
-            <a:off x="5257800" y="1943100"/>
-            <a:ext cx="1371600" cy="742950"/>
-          </a:xfrm>
-          <a:prstGeom prst="rect">
-            <a:avLst/>
-          </a:prstGeom>
-          <a:noFill/>
-        </p:spPr>
-        <p:txBody>
-          <a:bodyPr wrap="none" anchor="ctr">
-            <a:spAutoFit/>
-          </a:bodyPr>
-          <a:lstStyle/>
-          <a:p>
-            <a:pPr algn="ctr">
-              <a:defRPr sz="1400" b="0">
-                <a:solidFill>
-                  <a:srgbClr val="FFFFFF"/>
-                </a:solidFill>
-                <a:latin typeface="Source Sans Pro"/>
-              </a:defRPr>
-            </a:pPr>
-            <a:r>
-              <a:t>Innovation</a:t>
-            </a:r>
-          </a:p>
-        </p:txBody>
-      </p:sp>
-      <p:sp>
-        <p:nvSpPr>
-          <p:cNvPr id="7" name="Rounded Rectangle 6"/>
+          <p:cNvPr id="5" name="TextBox 4"/>
+          <p:cNvSpPr txBox="1"/>
+          <p:nvPr/>
+        </p:nvSpPr>
+        <p:spPr>
+          <a:xfrm>
+            <a:off x="1143000" y="3429000"/>
+            <a:ext cx="2057400" cy="1485900"/>
+          </a:xfrm>
+          <a:prstGeom prst="rect">
+            <a:avLst/>
+          </a:prstGeom>
+          <a:noFill/>
+        </p:spPr>
+        <p:txBody>
+          <a:bodyPr wrap="square">
+            <a:spAutoFit/>
+          </a:bodyPr>
+          <a:lstStyle/>
+          <a:p>
+            <a:pPr>
+              <a:defRPr sz="1000" b="0">
+                <a:solidFill>
+                  <a:srgbClr val="2E86AB"/>
+                </a:solidFill>
+                <a:latin typeface="Source Sans Pro"/>
+              </a:defRPr>
+            </a:pPr>
+            <a:r>
+              <a:t>Primary</a:t>
+            </a:r>
+          </a:p>
+          <a:p>
+            <a:pPr>
+              <a:defRPr sz="1000" b="0">
+                <a:solidFill>
+                  <a:srgbClr val="2E86AB"/>
+                </a:solidFill>
+                <a:latin typeface="Source Sans Pro"/>
+              </a:defRPr>
+            </a:pPr>
+            <a:r>
+              <a:t>#2E86AB</a:t>
+            </a:r>
+          </a:p>
+          <a:p>
+            <a:pPr>
+              <a:defRPr sz="1000" b="0">
+                <a:solidFill>
+                  <a:srgbClr val="2E86AB"/>
+                </a:solidFill>
+                <a:latin typeface="Source Sans Pro"/>
+              </a:defRPr>
+            </a:pPr>
+            <a:r>
+              <a:t>RGB(46, 134, 171)</a:t>
+            </a:r>
+          </a:p>
+          <a:p>
+            <a:pPr>
+              <a:defRPr sz="1000" b="0">
+                <a:solidFill>
+                  <a:srgbClr val="2E86AB"/>
+                </a:solidFill>
+                <a:latin typeface="Source Sans Pro"/>
+              </a:defRPr>
+            </a:pPr>
+            <a:r>
+              <a:t>CMYK(73, 21, 0, 32)</a:t>
+            </a:r>
+          </a:p>
+          <a:p>
+            <a:pPr>
+              <a:defRPr sz="1000" b="0">
+                <a:solidFill>
+                  <a:srgbClr val="2E86AB"/>
+                </a:solidFill>
+                <a:latin typeface="Source Sans Pro"/>
+              </a:defRPr>
+            </a:pPr>
+            <a:r>
+              <a:t>Use Light Text</a:t>
+            </a:r>
+          </a:p>
+        </p:txBody>
+      </p:sp>
+      <p:sp>
+        <p:nvSpPr>
+          <p:cNvPr id="6" name="Rectangle 5"/>
           <p:cNvSpPr/>
           <p:nvPr/>
         </p:nvSpPr>
         <p:spPr>
           <a:xfrm>
-            <a:off x="6629400" y="2034540"/>
-            <a:ext cx="1280160" cy="560070"/>
-          </a:xfrm>
-          <a:prstGeom prst="roundRect">
+            <a:off x="3886200" y="1943100"/>
+            <a:ext cx="2057400" cy="1485900"/>
+          </a:xfrm>
+          <a:prstGeom prst="rect">
             <a:avLst/>
           </a:prstGeom>
           <a:solidFill>
             <a:srgbClr val="A23B72"/>
           </a:solidFill>
-          <a:ln>
-            <a:noFill/>
+          <a:ln w="12700">
+            <a:solidFill>
+              <a:srgbClr val="FFFFFF"/>
+            </a:solidFill>
           </a:ln>
         </p:spPr>
         <p:style>
@@ -6354,59 +6695,113 @@
       </p:sp>
       <p:sp>
         <p:nvSpPr>
-          <p:cNvPr id="8" name="TextBox 7"/>
-          <p:cNvSpPr txBox="1"/>
+          <p:cNvPr id="7" name="TextBox 6"/>
+          <p:cNvSpPr txBox="1"/>
+          <p:nvPr/>
+        </p:nvSpPr>
+        <p:spPr>
+          <a:xfrm>
+            <a:off x="3886200" y="3429000"/>
+            <a:ext cx="2057400" cy="1485900"/>
+          </a:xfrm>
+          <a:prstGeom prst="rect">
+            <a:avLst/>
+          </a:prstGeom>
+          <a:noFill/>
+        </p:spPr>
+        <p:txBody>
+          <a:bodyPr wrap="square">
+            <a:spAutoFit/>
+          </a:bodyPr>
+          <a:lstStyle/>
+          <a:p>
+            <a:pPr>
+              <a:defRPr sz="1000" b="0">
+                <a:solidFill>
+                  <a:srgbClr val="2E86AB"/>
+                </a:solidFill>
+                <a:latin typeface="Source Sans Pro"/>
+              </a:defRPr>
+            </a:pPr>
+            <a:r>
+              <a:t>Secondary</a:t>
+            </a:r>
+          </a:p>
+          <a:p>
+            <a:pPr>
+              <a:defRPr sz="1000" b="0">
+                <a:solidFill>
+                  <a:srgbClr val="2E86AB"/>
+                </a:solidFill>
+                <a:latin typeface="Source Sans Pro"/>
+              </a:defRPr>
+            </a:pPr>
+            <a:r>
+              <a:t>#A23B72</a:t>
+            </a:r>
+          </a:p>
+          <a:p>
+            <a:pPr>
+              <a:defRPr sz="1000" b="0">
+                <a:solidFill>
+                  <a:srgbClr val="2E86AB"/>
+                </a:solidFill>
+                <a:latin typeface="Source Sans Pro"/>
+              </a:defRPr>
+            </a:pPr>
+            <a:r>
+              <a:t>RGB(162, 59, 114)</a:t>
+            </a:r>
+          </a:p>
+          <a:p>
+            <a:pPr>
+              <a:defRPr sz="1000" b="0">
+                <a:solidFill>
+                  <a:srgbClr val="2E86AB"/>
+                </a:solidFill>
+                <a:latin typeface="Source Sans Pro"/>
+              </a:defRPr>
+            </a:pPr>
+            <a:r>
+              <a:t>CMYK(0, 63, 29, 36)</a:t>
+            </a:r>
+          </a:p>
+          <a:p>
+            <a:pPr>
+              <a:defRPr sz="1000" b="0">
+                <a:solidFill>
+                  <a:srgbClr val="2E86AB"/>
+                </a:solidFill>
+                <a:latin typeface="Source Sans Pro"/>
+              </a:defRPr>
+            </a:pPr>
+            <a:r>
+              <a:t>Use Light Text</a:t>
+            </a:r>
+          </a:p>
+        </p:txBody>
+      </p:sp>
+      <p:sp>
+        <p:nvSpPr>
+          <p:cNvPr id="8" name="Rectangle 7"/>
+          <p:cNvSpPr/>
           <p:nvPr/>
         </p:nvSpPr>
         <p:spPr>
           <a:xfrm>
             <a:off x="6629400" y="1943100"/>
-            <a:ext cx="1371600" cy="742950"/>
-          </a:xfrm>
-          <a:prstGeom prst="rect">
-            <a:avLst/>
-          </a:prstGeom>
-          <a:noFill/>
-        </p:spPr>
-        <p:txBody>
-          <a:bodyPr wrap="none" anchor="ctr">
-            <a:spAutoFit/>
-          </a:bodyPr>
-          <a:lstStyle/>
-          <a:p>
-            <a:pPr algn="ctr">
-              <a:defRPr sz="1400" b="0">
-                <a:solidFill>
-                  <a:srgbClr val="FFFFFF"/>
-                </a:solidFill>
-                <a:latin typeface="Source Sans Pro"/>
-              </a:defRPr>
-            </a:pPr>
-            <a:r>
-              <a:t>Simplicity</a:t>
-            </a:r>
-          </a:p>
-        </p:txBody>
-      </p:sp>
-      <p:sp>
-        <p:nvSpPr>
-          <p:cNvPr id="9" name="Rounded Rectangle 8"/>
-          <p:cNvSpPr/>
-          <p:nvPr/>
-        </p:nvSpPr>
-        <p:spPr>
-          <a:xfrm>
-            <a:off x="5257800" y="2777490"/>
-            <a:ext cx="1280160" cy="560070"/>
-          </a:xfrm>
-          <a:prstGeom prst="roundRect">
+            <a:ext cx="2057400" cy="1485900"/>
+          </a:xfrm>
+          <a:prstGeom prst="rect">
             <a:avLst/>
           </a:prstGeom>
           <a:solidFill>
             <a:srgbClr val="F18F01"/>
           </a:solidFill>
-          <a:ln>
-            <a:noFill/>
+          <a:ln w="12700">
+            <a:solidFill>
+              <a:srgbClr val="FFFFFF"/>
+            </a:solidFill>
           </a:ln>
         </p:spPr>
         <p:style>
@@ -6433,273 +6828,160 @@
       </p:sp>
       <p:sp>
         <p:nvSpPr>
+          <p:cNvPr id="9" name="TextBox 8"/>
+          <p:cNvSpPr txBox="1"/>
+          <p:nvPr/>
+        </p:nvSpPr>
+        <p:spPr>
+          <a:xfrm>
+            <a:off x="6629400" y="3429000"/>
+            <a:ext cx="2057400" cy="1485900"/>
+          </a:xfrm>
+          <a:prstGeom prst="rect">
+            <a:avLst/>
+          </a:prstGeom>
+          <a:noFill/>
+        </p:spPr>
+        <p:txBody>
+          <a:bodyPr wrap="square">
+            <a:spAutoFit/>
+          </a:bodyPr>
+          <a:lstStyle/>
+          <a:p>
+            <a:pPr>
+              <a:defRPr sz="1000" b="0">
+                <a:solidFill>
+                  <a:srgbClr val="2E86AB"/>
+                </a:solidFill>
+                <a:latin typeface="Source Sans Pro"/>
+              </a:defRPr>
+            </a:pPr>
+            <a:r>
+              <a:t>Accent</a:t>
+            </a:r>
+          </a:p>
+          <a:p>
+            <a:pPr>
+              <a:defRPr sz="1000" b="0">
+                <a:solidFill>
+                  <a:srgbClr val="2E86AB"/>
+                </a:solidFill>
+                <a:latin typeface="Source Sans Pro"/>
+              </a:defRPr>
+            </a:pPr>
+            <a:r>
+              <a:t>#F18F01</a:t>
+            </a:r>
+          </a:p>
+          <a:p>
+            <a:pPr>
+              <a:defRPr sz="1000" b="0">
+                <a:solidFill>
+                  <a:srgbClr val="2E86AB"/>
+                </a:solidFill>
+                <a:latin typeface="Source Sans Pro"/>
+              </a:defRPr>
+            </a:pPr>
+            <a:r>
+              <a:t>RGB(241, 143, 1)</a:t>
+            </a:r>
+          </a:p>
+          <a:p>
+            <a:pPr>
+              <a:defRPr sz="1000" b="0">
+                <a:solidFill>
+                  <a:srgbClr val="2E86AB"/>
+                </a:solidFill>
+                <a:latin typeface="Source Sans Pro"/>
+              </a:defRPr>
+            </a:pPr>
+            <a:r>
+              <a:t>CMYK(0, 40, 99, 5)</a:t>
+            </a:r>
+          </a:p>
+          <a:p>
+            <a:pPr>
+              <a:defRPr sz="1000" b="0">
+                <a:solidFill>
+                  <a:srgbClr val="2E86AB"/>
+                </a:solidFill>
+                <a:latin typeface="Source Sans Pro"/>
+              </a:defRPr>
+            </a:pPr>
+            <a:r>
+              <a:t>Use Dark Text</a:t>
+            </a:r>
+          </a:p>
+        </p:txBody>
+      </p:sp>
+      <p:sp>
+        <p:nvSpPr>
           <p:cNvPr id="10" name="TextBox 9"/>
           <p:cNvSpPr txBox="1"/>
           <p:nvPr/>
         </p:nvSpPr>
         <p:spPr>
           <a:xfrm>
-            <a:off x="5257800" y="2686050"/>
-            <a:ext cx="1371600" cy="742950"/>
-          </a:xfrm>
-          <a:prstGeom prst="rect">
-            <a:avLst/>
-          </a:prstGeom>
-          <a:noFill/>
-        </p:spPr>
-        <p:txBody>
-          <a:bodyPr wrap="none" anchor="ctr">
-            <a:spAutoFit/>
-          </a:bodyPr>
-          <a:lstStyle/>
-          <a:p>
-            <a:pPr algn="ctr">
-              <a:defRPr sz="1400" b="0">
-                <a:solidFill>
-                  <a:srgbClr val="FFFFFF"/>
-                </a:solidFill>
-                <a:latin typeface="Source Sans Pro"/>
-              </a:defRPr>
-            </a:pPr>
-            <a:r>
-              <a:t>Human-Centered</a:t>
-            </a:r>
-          </a:p>
-        </p:txBody>
-      </p:sp>
-      <p:sp>
-        <p:nvSpPr>
-          <p:cNvPr id="11" name="Rounded Rectangle 10"/>
-          <p:cNvSpPr/>
-          <p:nvPr/>
-        </p:nvSpPr>
-        <p:spPr>
-          <a:xfrm>
-            <a:off x="6629400" y="2777490"/>
-            <a:ext cx="1280160" cy="560070"/>
-          </a:xfrm>
-          <a:prstGeom prst="roundRect">
-            <a:avLst/>
-          </a:prstGeom>
-          <a:solidFill>
-            <a:srgbClr val="A23B72"/>
-          </a:solidFill>
-          <a:ln>
-            <a:noFill/>
-          </a:ln>
-        </p:spPr>
-        <p:style>
-          <a:lnRef idx="1">
-            <a:schemeClr val="accent1"/>
-          </a:lnRef>
-          <a:fillRef idx="3">
-            <a:schemeClr val="accent1"/>
-          </a:fillRef>
-          <a:effectRef idx="2">
-            <a:schemeClr val="accent1"/>
-          </a:effectRef>
-          <a:fontRef idx="minor">
-            <a:schemeClr val="lt1"/>
-          </a:fontRef>
-        </p:style>
-        <p:txBody>
-          <a:bodyPr rtlCol="0" anchor="ctr"/>
-          <a:lstStyle/>
-          <a:p>
-            <a:pPr algn="ctr"/>
-          </a:p>
-        </p:txBody>
-      </p:sp>
-      <p:sp>
-        <p:nvSpPr>
-          <p:cNvPr id="12" name="TextBox 11"/>
-          <p:cNvSpPr txBox="1"/>
-          <p:nvPr/>
-        </p:nvSpPr>
-        <p:spPr>
-          <a:xfrm>
-            <a:off x="6629400" y="2686050"/>
-            <a:ext cx="1371600" cy="742950"/>
-          </a:xfrm>
-          <a:prstGeom prst="rect">
-            <a:avLst/>
-          </a:prstGeom>
-          <a:noFill/>
-        </p:spPr>
-        <p:txBody>
-          <a:bodyPr wrap="none" anchor="ctr">
-            <a:spAutoFit/>
-          </a:bodyPr>
-          <a:lstStyle/>
-          <a:p>
-            <a:pPr algn="ctr">
-              <a:defRPr sz="1400" b="0">
-                <a:solidFill>
-                  <a:srgbClr val="FFFFFF"/>
-                </a:solidFill>
-                <a:latin typeface="Source Sans Pro"/>
-              </a:defRPr>
-            </a:pPr>
-            <a:r>
-              <a:t>Excellence</a:t>
-            </a:r>
-          </a:p>
-        </p:txBody>
-      </p:sp>
-      <p:sp>
-        <p:nvSpPr>
-          <p:cNvPr id="13" name="Rounded Rectangle 12"/>
-          <p:cNvSpPr/>
-          <p:nvPr/>
-        </p:nvSpPr>
-        <p:spPr>
-          <a:xfrm>
-            <a:off x="5257800" y="3520440"/>
-            <a:ext cx="1280160" cy="560070"/>
-          </a:xfrm>
-          <a:prstGeom prst="roundRect">
-            <a:avLst/>
-          </a:prstGeom>
-          <a:solidFill>
-            <a:srgbClr val="F18F01"/>
-          </a:solidFill>
-          <a:ln>
-            <a:noFill/>
-          </a:ln>
-        </p:spPr>
-        <p:style>
-          <a:lnRef idx="1">
-            <a:schemeClr val="accent1"/>
-          </a:lnRef>
-          <a:fillRef idx="3">
-            <a:schemeClr val="accent1"/>
-          </a:fillRef>
-          <a:effectRef idx="2">
-            <a:schemeClr val="accent1"/>
-          </a:effectRef>
-          <a:fontRef idx="minor">
-            <a:schemeClr val="lt1"/>
-          </a:fontRef>
-        </p:style>
-        <p:txBody>
-          <a:bodyPr rtlCol="0" anchor="ctr"/>
-          <a:lstStyle/>
-          <a:p>
-            <a:pPr algn="ctr"/>
-          </a:p>
-        </p:txBody>
-      </p:sp>
-      <p:sp>
-        <p:nvSpPr>
-          <p:cNvPr id="14" name="TextBox 13"/>
-          <p:cNvSpPr txBox="1"/>
-          <p:nvPr/>
-        </p:nvSpPr>
-        <p:spPr>
-          <a:xfrm>
-            <a:off x="5257800" y="3429000"/>
-            <a:ext cx="1371600" cy="742950"/>
-          </a:xfrm>
-          <a:prstGeom prst="rect">
-            <a:avLst/>
-          </a:prstGeom>
-          <a:noFill/>
-        </p:spPr>
-        <p:txBody>
-          <a:bodyPr wrap="none" anchor="ctr">
-            <a:spAutoFit/>
-          </a:bodyPr>
-          <a:lstStyle/>
-          <a:p>
-            <a:pPr algn="ctr">
-              <a:defRPr sz="1400" b="0">
-                <a:solidFill>
-                  <a:srgbClr val="FFFFFF"/>
-                </a:solidFill>
-                <a:latin typeface="Source Sans Pro"/>
-              </a:defRPr>
-            </a:pPr>
-            <a:r>
-              <a:t>Trust</a:t>
-            </a:r>
-          </a:p>
-        </p:txBody>
-      </p:sp>
-      <p:sp>
-        <p:nvSpPr>
-          <p:cNvPr id="15" name="Rounded Rectangle 14"/>
-          <p:cNvSpPr/>
-          <p:nvPr/>
-        </p:nvSpPr>
-        <p:spPr>
-          <a:xfrm>
-            <a:off x="6629400" y="3520440"/>
-            <a:ext cx="1280160" cy="560070"/>
-          </a:xfrm>
-          <a:prstGeom prst="roundRect">
-            <a:avLst/>
-          </a:prstGeom>
-          <a:solidFill>
-            <a:srgbClr val="A23B72"/>
-          </a:solidFill>
-          <a:ln>
-            <a:noFill/>
-          </a:ln>
-        </p:spPr>
-        <p:style>
-          <a:lnRef idx="1">
-            <a:schemeClr val="accent1"/>
-          </a:lnRef>
-          <a:fillRef idx="3">
-            <a:schemeClr val="accent1"/>
-          </a:fillRef>
-          <a:effectRef idx="2">
-            <a:schemeClr val="accent1"/>
-          </a:effectRef>
-          <a:fontRef idx="minor">
-            <a:schemeClr val="lt1"/>
-          </a:fontRef>
-        </p:style>
-        <p:txBody>
-          <a:bodyPr rtlCol="0" anchor="ctr"/>
-          <a:lstStyle/>
-          <a:p>
-            <a:pPr algn="ctr"/>
-          </a:p>
-        </p:txBody>
-      </p:sp>
-      <p:sp>
-        <p:nvSpPr>
-          <p:cNvPr id="16" name="TextBox 15"/>
-          <p:cNvSpPr txBox="1"/>
-          <p:nvPr/>
-        </p:nvSpPr>
-        <p:spPr>
-          <a:xfrm>
-            <a:off x="6629400" y="3429000"/>
-            <a:ext cx="1371600" cy="742950"/>
-          </a:xfrm>
-          <a:prstGeom prst="rect">
-            <a:avLst/>
-          </a:prstGeom>
-          <a:noFill/>
-        </p:spPr>
-        <p:txBody>
-          <a:bodyPr wrap="none" anchor="ctr">
-            <a:spAutoFit/>
-          </a:bodyPr>
-          <a:lstStyle/>
-          <a:p>
-            <a:pPr algn="ctr">
-              <a:defRPr sz="1400" b="0">
-                <a:solidFill>
-                  <a:srgbClr val="FFFFFF"/>
-                </a:solidFill>
-                <a:latin typeface="Source Sans Pro"/>
-              </a:defRPr>
-            </a:pPr>
-            <a:r>
-              <a:t>Reliability</a:t>
+            <a:off x="457200" y="5657850"/>
+            <a:ext cx="4114800" cy="742950"/>
+          </a:xfrm>
+          <a:prstGeom prst="rect">
+            <a:avLst/>
+          </a:prstGeom>
+          <a:noFill/>
+        </p:spPr>
+        <p:txBody>
+          <a:bodyPr wrap="none">
+            <a:spAutoFit/>
+          </a:bodyPr>
+          <a:lstStyle/>
+          <a:p>
+            <a:pPr algn="l">
+              <a:defRPr sz="1000" b="0">
+                <a:solidFill>
+                  <a:srgbClr val="2E86AB"/>
+                </a:solidFill>
+                <a:latin typeface="Source Sans Pro"/>
+              </a:defRPr>
+            </a:pPr>
+            <a:r>
+              <a:t>TechForward Live</a:t>
+            </a:r>
+          </a:p>
+        </p:txBody>
+      </p:sp>
+      <p:sp>
+        <p:nvSpPr>
+          <p:cNvPr id="11" name="TextBox 10"/>
+          <p:cNvSpPr txBox="1"/>
+          <p:nvPr/>
+        </p:nvSpPr>
+        <p:spPr>
+          <a:xfrm>
+            <a:off x="4572000" y="5657850"/>
+            <a:ext cx="4114800" cy="742950"/>
+          </a:xfrm>
+          <a:prstGeom prst="rect">
+            <a:avLst/>
+          </a:prstGeom>
+          <a:noFill/>
+        </p:spPr>
+        <p:txBody>
+          <a:bodyPr wrap="none">
+            <a:spAutoFit/>
+          </a:bodyPr>
+          <a:lstStyle/>
+          <a:p>
+            <a:pPr algn="r">
+              <a:defRPr sz="1000" b="0">
+                <a:solidFill>
+                  <a:srgbClr val="2E86AB"/>
+                </a:solidFill>
+                <a:latin typeface="Source Sans Pro"/>
+              </a:defRPr>
+            </a:pPr>
+            <a:r>
+              <a:t>5</a:t>
             </a:r>
           </a:p>
         </p:txBody>
@@ -6796,7 +7078,7 @@
               </a:defRPr>
             </a:pPr>
             <a:r>
-              <a:t>Market Analysis &amp; Insights</a:t>
+              <a:t>Typography</a:t>
             </a:r>
           </a:p>
         </p:txBody>
@@ -6810,94 +7092,29 @@
         <p:spPr>
           <a:xfrm>
             <a:off x="1143000" y="1943100"/>
-            <a:ext cx="2743200" cy="1485900"/>
-          </a:xfrm>
-          <a:prstGeom prst="rect">
-            <a:avLst/>
-          </a:prstGeom>
-          <a:noFill/>
-        </p:spPr>
-        <p:txBody>
-          <a:bodyPr wrap="square">
-            <a:spAutoFit/>
-          </a:bodyPr>
-          <a:lstStyle/>
-          <a:p>
-            <a:pPr>
-              <a:defRPr sz="1800" b="0">
-                <a:solidFill>
-                  <a:srgbClr val="2E86AB"/>
-                </a:solidFill>
-                <a:latin typeface="Source Sans Pro"/>
-              </a:defRPr>
-            </a:pPr>
-            <a:r>
-              <a:t>Industry Trends:</a:t>
-            </a:r>
-          </a:p>
-          <a:p>
-            <a:pPr>
-              <a:defRPr sz="1400" b="0">
-                <a:solidFill>
-                  <a:srgbClr val="2E86AB"/>
-                </a:solidFill>
-                <a:latin typeface="Source Sans Pro"/>
-              </a:defRPr>
-            </a:pPr>
-            <a:r>
-              <a:t>• AI-driven automation solutions</a:t>
-            </a:r>
-          </a:p>
-          <a:p>
-            <a:pPr>
-              <a:defRPr sz="1400" b="0">
-                <a:solidFill>
-                  <a:srgbClr val="2E86AB"/>
-                </a:solidFill>
-                <a:latin typeface="Source Sans Pro"/>
-              </a:defRPr>
-            </a:pPr>
-            <a:r>
-              <a:t>• Human-centered design principles</a:t>
-            </a:r>
-          </a:p>
-          <a:p>
-            <a:pPr>
-              <a:defRPr sz="1400" b="0">
-                <a:solidFill>
-                  <a:srgbClr val="2E86AB"/>
-                </a:solidFill>
-                <a:latin typeface="Source Sans Pro"/>
-              </a:defRPr>
-            </a:pPr>
-            <a:r>
-              <a:t>• Low-code/no-code platforms</a:t>
-            </a:r>
-          </a:p>
-          <a:p>
-            <a:pPr>
-              <a:defRPr sz="1400" b="0">
-                <a:solidFill>
-                  <a:srgbClr val="2E86AB"/>
-                </a:solidFill>
-                <a:latin typeface="Source Sans Pro"/>
-              </a:defRPr>
-            </a:pPr>
-            <a:r>
-              <a:t>• Remote collaboration tools</a:t>
-            </a:r>
-          </a:p>
-          <a:p>
-            <a:pPr>
-              <a:defRPr sz="1400" b="0">
-                <a:solidFill>
-                  <a:srgbClr val="2E86AB"/>
-                </a:solidFill>
-                <a:latin typeface="Source Sans Pro"/>
-              </a:defRPr>
-            </a:pPr>
-            <a:r>
-              <a:t>• Sustainable technology practices</a:t>
+            <a:ext cx="3429000" cy="742950"/>
+          </a:xfrm>
+          <a:prstGeom prst="rect">
+            <a:avLst/>
+          </a:prstGeom>
+          <a:noFill/>
+        </p:spPr>
+        <p:txBody>
+          <a:bodyPr wrap="none">
+            <a:spAutoFit/>
+          </a:bodyPr>
+          <a:lstStyle/>
+          <a:p>
+            <a:pPr>
+              <a:defRPr sz="2000" b="0">
+                <a:solidFill>
+                  <a:srgbClr val="2E86AB"/>
+                </a:solidFill>
+                <a:latin typeface="Source Sans Pro"/>
+              </a:defRPr>
+            </a:pPr>
+            <a:r>
+              <a:t>Primary Font: Inter</a:t>
             </a:r>
           </a:p>
         </p:txBody>
@@ -6910,108 +7127,30 @@
         </p:nvSpPr>
         <p:spPr>
           <a:xfrm>
-            <a:off x="3886200" y="1943100"/>
-            <a:ext cx="2743200" cy="1485900"/>
-          </a:xfrm>
-          <a:prstGeom prst="rect">
-            <a:avLst/>
-          </a:prstGeom>
-          <a:noFill/>
-        </p:spPr>
-        <p:txBody>
-          <a:bodyPr wrap="square">
-            <a:spAutoFit/>
-          </a:bodyPr>
-          <a:lstStyle/>
-          <a:p>
-            <a:pPr>
-              <a:defRPr sz="1800" b="0">
-                <a:solidFill>
-                  <a:srgbClr val="2E86AB"/>
-                </a:solidFill>
-                <a:latin typeface="Source Sans Pro"/>
-              </a:defRPr>
-            </a:pPr>
-            <a:r>
-              <a:t>Key Competitors:</a:t>
-            </a:r>
-          </a:p>
-          <a:p>
-            <a:pPr>
-              <a:defRPr sz="1400" b="0">
-                <a:solidFill>
-                  <a:srgbClr val="2E86AB"/>
-                </a:solidFill>
-                <a:latin typeface="Source Sans Pro"/>
-              </a:defRPr>
-            </a:pPr>
-            <a:r>
-              <a:t>• Microsoft</a:t>
-            </a:r>
-          </a:p>
-          <a:p>
-            <a:pPr>
-              <a:defRPr sz="1400" b="0">
-                <a:solidFill>
-                  <a:srgbClr val="2E86AB"/>
-                </a:solidFill>
-                <a:latin typeface="Source Sans Pro"/>
-              </a:defRPr>
-            </a:pPr>
-            <a:r>
-              <a:t>• Google Workspace</a:t>
-            </a:r>
-          </a:p>
-          <a:p>
-            <a:pPr>
-              <a:defRPr sz="1400" b="0">
-                <a:solidFill>
-                  <a:srgbClr val="2E86AB"/>
-                </a:solidFill>
-                <a:latin typeface="Source Sans Pro"/>
-              </a:defRPr>
-            </a:pPr>
-            <a:r>
-              <a:t>• Salesforce</a:t>
-            </a:r>
-          </a:p>
-          <a:p>
-            <a:pPr>
-              <a:defRPr sz="1400" b="0">
-                <a:solidFill>
-                  <a:srgbClr val="2E86AB"/>
-                </a:solidFill>
-                <a:latin typeface="Source Sans Pro"/>
-              </a:defRPr>
-            </a:pPr>
-            <a:r>
-              <a:t>• Adobe</a:t>
-            </a:r>
-          </a:p>
-          <a:p>
-            <a:pPr>
-              <a:defRPr sz="1400" b="0">
-                <a:solidFill>
-                  <a:srgbClr val="2E86AB"/>
-                </a:solidFill>
-                <a:latin typeface="Source Sans Pro"/>
-              </a:defRPr>
-            </a:pPr>
-            <a:r>
-              <a:t>• Figma</a:t>
-            </a:r>
-          </a:p>
-          <a:p>
-            <a:pPr>
-              <a:defRPr sz="1400" b="0">
-                <a:solidFill>
-                  <a:srgbClr val="2E86AB"/>
-                </a:solidFill>
-                <a:latin typeface="Source Sans Pro"/>
-              </a:defRPr>
-            </a:pPr>
-            <a:r>
-              <a:t>• Notion</a:t>
+            <a:off x="1143000" y="2686050"/>
+            <a:ext cx="3429000" cy="742950"/>
+          </a:xfrm>
+          <a:prstGeom prst="rect">
+            <a:avLst/>
+          </a:prstGeom>
+          <a:noFill/>
+        </p:spPr>
+        <p:txBody>
+          <a:bodyPr wrap="none">
+            <a:spAutoFit/>
+          </a:bodyPr>
+          <a:lstStyle/>
+          <a:p>
+            <a:pPr>
+              <a:defRPr sz="3200" b="1">
+                <a:solidFill>
+                  <a:srgbClr val="2E86AB"/>
+                </a:solidFill>
+                <a:latin typeface="Inter"/>
+              </a:defRPr>
+            </a:pPr>
+            <a:r>
+              <a:t>H1 Heading</a:t>
             </a:r>
           </a:p>
         </p:txBody>
@@ -7024,82 +7163,30 @@
         </p:nvSpPr>
         <p:spPr>
           <a:xfrm>
-            <a:off x="6629400" y="1943100"/>
-            <a:ext cx="2057400" cy="1485900"/>
-          </a:xfrm>
-          <a:prstGeom prst="rect">
-            <a:avLst/>
-          </a:prstGeom>
-          <a:noFill/>
-        </p:spPr>
-        <p:txBody>
-          <a:bodyPr wrap="square">
-            <a:spAutoFit/>
-          </a:bodyPr>
-          <a:lstStyle/>
-          <a:p>
-            <a:pPr>
-              <a:defRPr sz="1800" b="0">
-                <a:solidFill>
-                  <a:srgbClr val="2E86AB"/>
-                </a:solidFill>
-                <a:latin typeface="Source Sans Pro"/>
-              </a:defRPr>
-            </a:pPr>
-            <a:r>
-              <a:t>Design Styles:</a:t>
-            </a:r>
-          </a:p>
-          <a:p>
-            <a:pPr>
-              <a:defRPr sz="1400" b="0">
-                <a:solidFill>
-                  <a:srgbClr val="2E86AB"/>
-                </a:solidFill>
-                <a:latin typeface="Source Sans Pro"/>
-              </a:defRPr>
-            </a:pPr>
-            <a:r>
-              <a:t>• Minimalist interfaces</a:t>
-            </a:r>
-          </a:p>
-          <a:p>
-            <a:pPr>
-              <a:defRPr sz="1400" b="0">
-                <a:solidFill>
-                  <a:srgbClr val="2E86AB"/>
-                </a:solidFill>
-                <a:latin typeface="Source Sans Pro"/>
-              </a:defRPr>
-            </a:pPr>
-            <a:r>
-              <a:t>• Bold typography</a:t>
-            </a:r>
-          </a:p>
-          <a:p>
-            <a:pPr>
-              <a:defRPr sz="1400" b="0">
-                <a:solidFill>
-                  <a:srgbClr val="2E86AB"/>
-                </a:solidFill>
-                <a:latin typeface="Source Sans Pro"/>
-              </a:defRPr>
-            </a:pPr>
-            <a:r>
-              <a:t>• Gradient backgrounds</a:t>
-            </a:r>
-          </a:p>
-          <a:p>
-            <a:pPr>
-              <a:defRPr sz="1400" b="0">
-                <a:solidFill>
-                  <a:srgbClr val="2E86AB"/>
-                </a:solidFill>
-                <a:latin typeface="Source Sans Pro"/>
-              </a:defRPr>
-            </a:pPr>
-            <a:r>
-              <a:t>• Micro-interactions</a:t>
+            <a:off x="1143000" y="3429000"/>
+            <a:ext cx="3429000" cy="742950"/>
+          </a:xfrm>
+          <a:prstGeom prst="rect">
+            <a:avLst/>
+          </a:prstGeom>
+          <a:noFill/>
+        </p:spPr>
+        <p:txBody>
+          <a:bodyPr wrap="none">
+            <a:spAutoFit/>
+          </a:bodyPr>
+          <a:lstStyle/>
+          <a:p>
+            <a:pPr>
+              <a:defRPr sz="2400" b="1">
+                <a:solidFill>
+                  <a:srgbClr val="2E86AB"/>
+                </a:solidFill>
+                <a:latin typeface="Inter"/>
+              </a:defRPr>
+            </a:pPr>
+            <a:r>
+              <a:t>H2 Heading</a:t>
             </a:r>
           </a:p>
         </p:txBody>
@@ -7107,6 +7194,186 @@
       <p:sp>
         <p:nvSpPr>
           <p:cNvPr id="7" name="TextBox 6"/>
+          <p:cNvSpPr txBox="1"/>
+          <p:nvPr/>
+        </p:nvSpPr>
+        <p:spPr>
+          <a:xfrm>
+            <a:off x="1143000" y="4171950"/>
+            <a:ext cx="3429000" cy="742950"/>
+          </a:xfrm>
+          <a:prstGeom prst="rect">
+            <a:avLst/>
+          </a:prstGeom>
+          <a:noFill/>
+        </p:spPr>
+        <p:txBody>
+          <a:bodyPr wrap="none">
+            <a:spAutoFit/>
+          </a:bodyPr>
+          <a:lstStyle/>
+          <a:p>
+            <a:pPr>
+              <a:defRPr sz="2000" b="0">
+                <a:solidFill>
+                  <a:srgbClr val="2E86AB"/>
+                </a:solidFill>
+                <a:latin typeface="Inter"/>
+              </a:defRPr>
+            </a:pPr>
+            <a:r>
+              <a:t>H3 Heading</a:t>
+            </a:r>
+          </a:p>
+        </p:txBody>
+      </p:sp>
+      <p:sp>
+        <p:nvSpPr>
+          <p:cNvPr id="8" name="TextBox 7"/>
+          <p:cNvSpPr txBox="1"/>
+          <p:nvPr/>
+        </p:nvSpPr>
+        <p:spPr>
+          <a:xfrm>
+            <a:off x="5257800" y="1943100"/>
+            <a:ext cx="3429000" cy="742950"/>
+          </a:xfrm>
+          <a:prstGeom prst="rect">
+            <a:avLst/>
+          </a:prstGeom>
+          <a:noFill/>
+        </p:spPr>
+        <p:txBody>
+          <a:bodyPr wrap="none">
+            <a:spAutoFit/>
+          </a:bodyPr>
+          <a:lstStyle/>
+          <a:p>
+            <a:pPr>
+              <a:defRPr sz="2000" b="0">
+                <a:solidFill>
+                  <a:srgbClr val="2E86AB"/>
+                </a:solidFill>
+                <a:latin typeface="Source Sans Pro"/>
+              </a:defRPr>
+            </a:pPr>
+            <a:r>
+              <a:t>Secondary Font: Source Sans Pro</a:t>
+            </a:r>
+          </a:p>
+        </p:txBody>
+      </p:sp>
+      <p:sp>
+        <p:nvSpPr>
+          <p:cNvPr id="9" name="TextBox 8"/>
+          <p:cNvSpPr txBox="1"/>
+          <p:nvPr/>
+        </p:nvSpPr>
+        <p:spPr>
+          <a:xfrm>
+            <a:off x="5257800" y="2686050"/>
+            <a:ext cx="3429000" cy="742950"/>
+          </a:xfrm>
+          <a:prstGeom prst="rect">
+            <a:avLst/>
+          </a:prstGeom>
+          <a:noFill/>
+        </p:spPr>
+        <p:txBody>
+          <a:bodyPr wrap="none">
+            <a:spAutoFit/>
+          </a:bodyPr>
+          <a:lstStyle/>
+          <a:p>
+            <a:pPr>
+              <a:defRPr sz="1600" b="0">
+                <a:solidFill>
+                  <a:srgbClr val="2E86AB"/>
+                </a:solidFill>
+                <a:latin typeface="Source Sans Pro"/>
+              </a:defRPr>
+            </a:pPr>
+            <a:r>
+              <a:t>Body Text</a:t>
+            </a:r>
+          </a:p>
+        </p:txBody>
+      </p:sp>
+      <p:sp>
+        <p:nvSpPr>
+          <p:cNvPr id="10" name="TextBox 9"/>
+          <p:cNvSpPr txBox="1"/>
+          <p:nvPr/>
+        </p:nvSpPr>
+        <p:spPr>
+          <a:xfrm>
+            <a:off x="5257800" y="3429000"/>
+            <a:ext cx="3429000" cy="742950"/>
+          </a:xfrm>
+          <a:prstGeom prst="rect">
+            <a:avLst/>
+          </a:prstGeom>
+          <a:noFill/>
+        </p:spPr>
+        <p:txBody>
+          <a:bodyPr wrap="none">
+            <a:spAutoFit/>
+          </a:bodyPr>
+          <a:lstStyle/>
+          <a:p>
+            <a:pPr>
+              <a:defRPr sz="1600" b="1">
+                <a:solidFill>
+                  <a:srgbClr val="2E86AB"/>
+                </a:solidFill>
+                <a:latin typeface="Source Sans Pro"/>
+              </a:defRPr>
+            </a:pPr>
+            <a:r>
+              <a:t>Body Bold</a:t>
+            </a:r>
+          </a:p>
+        </p:txBody>
+      </p:sp>
+      <p:sp>
+        <p:nvSpPr>
+          <p:cNvPr id="11" name="TextBox 10"/>
+          <p:cNvSpPr txBox="1"/>
+          <p:nvPr/>
+        </p:nvSpPr>
+        <p:spPr>
+          <a:xfrm>
+            <a:off x="5257800" y="4171950"/>
+            <a:ext cx="3429000" cy="742950"/>
+          </a:xfrm>
+          <a:prstGeom prst="rect">
+            <a:avLst/>
+          </a:prstGeom>
+          <a:noFill/>
+        </p:spPr>
+        <p:txBody>
+          <a:bodyPr wrap="none">
+            <a:spAutoFit/>
+          </a:bodyPr>
+          <a:lstStyle/>
+          <a:p>
+            <a:pPr>
+              <a:defRPr sz="1200" b="0">
+                <a:solidFill>
+                  <a:srgbClr val="2E86AB"/>
+                </a:solidFill>
+                <a:latin typeface="Source Sans Pro"/>
+              </a:defRPr>
+            </a:pPr>
+            <a:r>
+              <a:t>Caption Text</a:t>
+            </a:r>
+          </a:p>
+        </p:txBody>
+      </p:sp>
+      <p:sp>
+        <p:nvSpPr>
+          <p:cNvPr id="12" name="TextBox 11"/>
           <p:cNvSpPr txBox="1"/>
           <p:nvPr/>
         </p:nvSpPr>
@@ -7142,7 +7409,7 @@
       </p:sp>
       <p:sp>
         <p:nvSpPr>
-          <p:cNvPr id="8" name="TextBox 7"/>
+          <p:cNvPr id="13" name="TextBox 12"/>
           <p:cNvSpPr txBox="1"/>
           <p:nvPr/>
         </p:nvSpPr>
@@ -7268,7 +7535,7 @@
               </a:defRPr>
             </a:pPr>
             <a:r>
-              <a:t>Brand Positioning</a:t>
+              <a:t>Visual &amp; Photography Guidelines</a:t>
             </a:r>
           </a:p>
         </p:txBody>
@@ -7282,7 +7549,7 @@
         <p:spPr>
           <a:xfrm>
             <a:off x="1143000" y="1943100"/>
-            <a:ext cx="4114800" cy="1485900"/>
+            <a:ext cx="3429000" cy="2971800"/>
           </a:xfrm>
           <a:prstGeom prst="rect">
             <a:avLst/>
@@ -7296,15 +7563,15 @@
           <a:lstStyle/>
           <a:p>
             <a:pPr>
-              <a:defRPr sz="1600" b="0">
-                <a:solidFill>
-                  <a:srgbClr val="2E86AB"/>
-                </a:solidFill>
-                <a:latin typeface="Source Sans Pro"/>
-              </a:defRPr>
-            </a:pPr>
-            <a:r>
-              <a:t>Unique Value Proposition:</a:t>
+              <a:defRPr sz="1800" b="0">
+                <a:solidFill>
+                  <a:srgbClr val="2E86AB"/>
+                </a:solidFill>
+                <a:latin typeface="Source Sans Pro"/>
+              </a:defRPr>
+            </a:pPr>
+            <a:r>
+              <a:t>Visual Style Guidelines:</a:t>
             </a:r>
           </a:p>
           <a:p>
@@ -7317,7 +7584,59 @@
               </a:defRPr>
             </a:pPr>
             <a:r>
-              <a:t>We bridge the gap between complex technology and intuitive user experiences through human-centered design</a:t>
+              <a:t>• Modern</a:t>
+            </a:r>
+          </a:p>
+          <a:p>
+            <a:pPr>
+              <a:defRPr sz="1400" b="0">
+                <a:solidFill>
+                  <a:srgbClr val="2E86AB"/>
+                </a:solidFill>
+                <a:latin typeface="Source Sans Pro"/>
+              </a:defRPr>
+            </a:pPr>
+            <a:r>
+              <a:t>• clean</a:t>
+            </a:r>
+          </a:p>
+          <a:p>
+            <a:pPr>
+              <a:defRPr sz="1400" b="0">
+                <a:solidFill>
+                  <a:srgbClr val="2E86AB"/>
+                </a:solidFill>
+                <a:latin typeface="Source Sans Pro"/>
+              </a:defRPr>
+            </a:pPr>
+            <a:r>
+              <a:t>• professional</a:t>
+            </a:r>
+          </a:p>
+          <a:p>
+            <a:pPr>
+              <a:defRPr sz="1400" b="0">
+                <a:solidFill>
+                  <a:srgbClr val="2E86AB"/>
+                </a:solidFill>
+                <a:latin typeface="Source Sans Pro"/>
+              </a:defRPr>
+            </a:pPr>
+            <a:r>
+              <a:t>• minimalist</a:t>
+            </a:r>
+          </a:p>
+          <a:p>
+            <a:pPr>
+              <a:defRPr sz="1400" b="0">
+                <a:solidFill>
+                  <a:srgbClr val="2E86AB"/>
+                </a:solidFill>
+                <a:latin typeface="Source Sans Pro"/>
+              </a:defRPr>
+            </a:pPr>
+            <a:r>
+              <a:t>• bold typography</a:t>
             </a:r>
           </a:p>
         </p:txBody>
@@ -7331,7 +7650,7 @@
         <p:spPr>
           <a:xfrm>
             <a:off x="5257800" y="1943100"/>
-            <a:ext cx="3429000" cy="1485900"/>
+            <a:ext cx="3429000" cy="2971800"/>
           </a:xfrm>
           <a:prstGeom prst="rect">
             <a:avLst/>
@@ -7345,15 +7664,15 @@
           <a:lstStyle/>
           <a:p>
             <a:pPr>
-              <a:defRPr sz="1600" b="0">
-                <a:solidFill>
-                  <a:srgbClr val="2E86AB"/>
-                </a:solidFill>
-                <a:latin typeface="Source Sans Pro"/>
-              </a:defRPr>
-            </a:pPr>
-            <a:r>
-              <a:t>Brand Promise:</a:t>
+              <a:defRPr sz="1800" b="0">
+                <a:solidFill>
+                  <a:srgbClr val="2E86AB"/>
+                </a:solidFill>
+                <a:latin typeface="Source Sans Pro"/>
+              </a:defRPr>
+            </a:pPr>
+            <a:r>
+              <a:t>Photography Guidelines:</a:t>
             </a:r>
           </a:p>
           <a:p>
@@ -7366,31 +7685,57 @@
               </a:defRPr>
             </a:pPr>
             <a:r>
-              <a:t>Technology that enhances human potential without adding complexity to your workflow</a:t>
-            </a:r>
-          </a:p>
-        </p:txBody>
-      </p:sp>
-      <p:sp>
-        <p:nvSpPr>
-          <p:cNvPr id="6" name="Rounded Rectangle 5"/>
+              <a:t>• High contrast</a:t>
+            </a:r>
+          </a:p>
+          <a:p>
+            <a:pPr>
+              <a:defRPr sz="1400" b="0">
+                <a:solidFill>
+                  <a:srgbClr val="2E86AB"/>
+                </a:solidFill>
+                <a:latin typeface="Source Sans Pro"/>
+              </a:defRPr>
+            </a:pPr>
+            <a:r>
+              <a:t>• authentic moments</a:t>
+            </a:r>
+          </a:p>
+          <a:p>
+            <a:pPr>
+              <a:defRPr sz="1400" b="0">
+                <a:solidFill>
+                  <a:srgbClr val="2E86AB"/>
+                </a:solidFill>
+                <a:latin typeface="Source Sans Pro"/>
+              </a:defRPr>
+            </a:pPr>
+            <a:r>
+              <a:t>• natural lighting</a:t>
+            </a:r>
+          </a:p>
+        </p:txBody>
+      </p:sp>
+      <p:sp>
+        <p:nvSpPr>
+          <p:cNvPr id="6" name="Rectangle 5"/>
           <p:cNvSpPr/>
           <p:nvPr/>
         </p:nvSpPr>
         <p:spPr>
           <a:xfrm>
-            <a:off x="1143000" y="3520440"/>
-            <a:ext cx="1280160" cy="560070"/>
-          </a:xfrm>
-          <a:prstGeom prst="roundRect">
+            <a:off x="5257800" y="4914900"/>
+            <a:ext cx="685800" cy="742950"/>
+          </a:xfrm>
+          <a:prstGeom prst="rect">
             <a:avLst/>
           </a:prstGeom>
           <a:solidFill>
-            <a:srgbClr val="F18F01"/>
+            <a:srgbClr val="404040"/>
           </a:solidFill>
           <a:ln w="12700">
             <a:solidFill>
-              <a:srgbClr val="F18F01"/>
+              <a:srgbClr val="808080"/>
             </a:solidFill>
           </a:ln>
         </p:spPr>
@@ -7424,54 +7769,54 @@
         </p:nvSpPr>
         <p:spPr>
           <a:xfrm>
-            <a:off x="1143000" y="3429000"/>
-            <a:ext cx="1371600" cy="742950"/>
-          </a:xfrm>
-          <a:prstGeom prst="rect">
-            <a:avLst/>
-          </a:prstGeom>
-          <a:noFill/>
-        </p:spPr>
-        <p:txBody>
-          <a:bodyPr wrap="none" anchor="ctr">
+            <a:off x="5257800" y="5162550"/>
+            <a:ext cx="685800" cy="247650"/>
+          </a:xfrm>
+          <a:prstGeom prst="rect">
+            <a:avLst/>
+          </a:prstGeom>
+          <a:noFill/>
+        </p:spPr>
+        <p:txBody>
+          <a:bodyPr wrap="none">
             <a:spAutoFit/>
           </a:bodyPr>
           <a:lstStyle/>
           <a:p>
             <a:pPr algn="ctr">
-              <a:defRPr sz="1200" b="0">
-                <a:solidFill>
-                  <a:srgbClr val="2E86AB"/>
-                </a:solidFill>
-                <a:latin typeface="Source Sans Pro"/>
-              </a:defRPr>
-            </a:pPr>
-            <a:r>
-              <a:t>Innovative</a:t>
-            </a:r>
-          </a:p>
-        </p:txBody>
-      </p:sp>
-      <p:sp>
-        <p:nvSpPr>
-          <p:cNvPr id="8" name="Rounded Rectangle 7"/>
+              <a:defRPr sz="800" b="0">
+                <a:solidFill>
+                  <a:srgbClr val="2E86AB"/>
+                </a:solidFill>
+                <a:latin typeface="Source Sans Pro"/>
+              </a:defRPr>
+            </a:pPr>
+            <a:r>
+              <a:t>Example</a:t>
+            </a:r>
+          </a:p>
+        </p:txBody>
+      </p:sp>
+      <p:sp>
+        <p:nvSpPr>
+          <p:cNvPr id="8" name="Rectangle 7"/>
           <p:cNvSpPr/>
           <p:nvPr/>
         </p:nvSpPr>
         <p:spPr>
           <a:xfrm>
-            <a:off x="2514600" y="3520440"/>
-            <a:ext cx="1280160" cy="560070"/>
-          </a:xfrm>
-          <a:prstGeom prst="roundRect">
+            <a:off x="6629400" y="4914900"/>
+            <a:ext cx="685800" cy="742950"/>
+          </a:xfrm>
+          <a:prstGeom prst="rect">
             <a:avLst/>
           </a:prstGeom>
           <a:solidFill>
-            <a:srgbClr val="F18F01"/>
+            <a:srgbClr val="404040"/>
           </a:solidFill>
           <a:ln w="12700">
             <a:solidFill>
-              <a:srgbClr val="F18F01"/>
+              <a:srgbClr val="808080"/>
             </a:solidFill>
           </a:ln>
         </p:spPr>
@@ -7505,54 +7850,54 @@
         </p:nvSpPr>
         <p:spPr>
           <a:xfrm>
-            <a:off x="2514600" y="3429000"/>
-            <a:ext cx="1371600" cy="742950"/>
-          </a:xfrm>
-          <a:prstGeom prst="rect">
-            <a:avLst/>
-          </a:prstGeom>
-          <a:noFill/>
-        </p:spPr>
-        <p:txBody>
-          <a:bodyPr wrap="none" anchor="ctr">
+            <a:off x="6629400" y="5162550"/>
+            <a:ext cx="685800" cy="247650"/>
+          </a:xfrm>
+          <a:prstGeom prst="rect">
+            <a:avLst/>
+          </a:prstGeom>
+          <a:noFill/>
+        </p:spPr>
+        <p:txBody>
+          <a:bodyPr wrap="none">
             <a:spAutoFit/>
           </a:bodyPr>
           <a:lstStyle/>
           <a:p>
             <a:pPr algn="ctr">
-              <a:defRPr sz="1200" b="0">
-                <a:solidFill>
-                  <a:srgbClr val="2E86AB"/>
-                </a:solidFill>
-                <a:latin typeface="Source Sans Pro"/>
-              </a:defRPr>
-            </a:pPr>
-            <a:r>
-              <a:t>Reliable</a:t>
-            </a:r>
-          </a:p>
-        </p:txBody>
-      </p:sp>
-      <p:sp>
-        <p:nvSpPr>
-          <p:cNvPr id="10" name="Rounded Rectangle 9"/>
+              <a:defRPr sz="800" b="0">
+                <a:solidFill>
+                  <a:srgbClr val="2E86AB"/>
+                </a:solidFill>
+                <a:latin typeface="Source Sans Pro"/>
+              </a:defRPr>
+            </a:pPr>
+            <a:r>
+              <a:t>Example</a:t>
+            </a:r>
+          </a:p>
+        </p:txBody>
+      </p:sp>
+      <p:sp>
+        <p:nvSpPr>
+          <p:cNvPr id="10" name="Rectangle 9"/>
           <p:cNvSpPr/>
           <p:nvPr/>
         </p:nvSpPr>
         <p:spPr>
           <a:xfrm>
-            <a:off x="3886200" y="3520440"/>
-            <a:ext cx="1280160" cy="560070"/>
-          </a:xfrm>
-          <a:prstGeom prst="roundRect">
+            <a:off x="8001000" y="4914900"/>
+            <a:ext cx="685800" cy="742950"/>
+          </a:xfrm>
+          <a:prstGeom prst="rect">
             <a:avLst/>
           </a:prstGeom>
           <a:solidFill>
-            <a:srgbClr val="F18F01"/>
+            <a:srgbClr val="404040"/>
           </a:solidFill>
           <a:ln w="12700">
             <a:solidFill>
-              <a:srgbClr val="F18F01"/>
+              <a:srgbClr val="808080"/>
             </a:solidFill>
           </a:ln>
         </p:spPr>
@@ -7586,248 +7931,37 @@
         </p:nvSpPr>
         <p:spPr>
           <a:xfrm>
-            <a:off x="3886200" y="3429000"/>
-            <a:ext cx="1371600" cy="742950"/>
-          </a:xfrm>
-          <a:prstGeom prst="rect">
-            <a:avLst/>
-          </a:prstGeom>
-          <a:noFill/>
-        </p:spPr>
-        <p:txBody>
-          <a:bodyPr wrap="none" anchor="ctr">
+            <a:off x="8001000" y="5162550"/>
+            <a:ext cx="685800" cy="247650"/>
+          </a:xfrm>
+          <a:prstGeom prst="rect">
+            <a:avLst/>
+          </a:prstGeom>
+          <a:noFill/>
+        </p:spPr>
+        <p:txBody>
+          <a:bodyPr wrap="none">
             <a:spAutoFit/>
           </a:bodyPr>
           <a:lstStyle/>
           <a:p>
             <a:pPr algn="ctr">
-              <a:defRPr sz="1200" b="0">
-                <a:solidFill>
-                  <a:srgbClr val="2E86AB"/>
-                </a:solidFill>
-                <a:latin typeface="Source Sans Pro"/>
-              </a:defRPr>
-            </a:pPr>
-            <a:r>
-              <a:t>Approachable</a:t>
-            </a:r>
-          </a:p>
-        </p:txBody>
-      </p:sp>
-      <p:sp>
-        <p:nvSpPr>
-          <p:cNvPr id="12" name="Rounded Rectangle 11"/>
-          <p:cNvSpPr/>
-          <p:nvPr/>
-        </p:nvSpPr>
-        <p:spPr>
-          <a:xfrm>
-            <a:off x="5257800" y="3520440"/>
-            <a:ext cx="1280160" cy="560070"/>
-          </a:xfrm>
-          <a:prstGeom prst="roundRect">
-            <a:avLst/>
-          </a:prstGeom>
-          <a:solidFill>
-            <a:srgbClr val="F18F01"/>
-          </a:solidFill>
-          <a:ln w="12700">
-            <a:solidFill>
-              <a:srgbClr val="F18F01"/>
-            </a:solidFill>
-          </a:ln>
-        </p:spPr>
-        <p:style>
-          <a:lnRef idx="1">
-            <a:schemeClr val="accent1"/>
-          </a:lnRef>
-          <a:fillRef idx="3">
-            <a:schemeClr val="accent1"/>
-          </a:fillRef>
-          <a:effectRef idx="2">
-            <a:schemeClr val="accent1"/>
-          </a:effectRef>
-          <a:fontRef idx="minor">
-            <a:schemeClr val="lt1"/>
-          </a:fontRef>
-        </p:style>
-        <p:txBody>
-          <a:bodyPr rtlCol="0" anchor="ctr"/>
-          <a:lstStyle/>
-          <a:p>
-            <a:pPr algn="ctr"/>
-          </a:p>
-        </p:txBody>
-      </p:sp>
-      <p:sp>
-        <p:nvSpPr>
-          <p:cNvPr id="13" name="TextBox 12"/>
-          <p:cNvSpPr txBox="1"/>
-          <p:nvPr/>
-        </p:nvSpPr>
-        <p:spPr>
-          <a:xfrm>
-            <a:off x="5257800" y="3429000"/>
-            <a:ext cx="1371600" cy="742950"/>
-          </a:xfrm>
-          <a:prstGeom prst="rect">
-            <a:avLst/>
-          </a:prstGeom>
-          <a:noFill/>
-        </p:spPr>
-        <p:txBody>
-          <a:bodyPr wrap="none" anchor="ctr">
-            <a:spAutoFit/>
-          </a:bodyPr>
-          <a:lstStyle/>
-          <a:p>
-            <a:pPr algn="ctr">
-              <a:defRPr sz="1200" b="0">
-                <a:solidFill>
-                  <a:srgbClr val="2E86AB"/>
-                </a:solidFill>
-                <a:latin typeface="Source Sans Pro"/>
-              </a:defRPr>
-            </a:pPr>
-            <a:r>
-              <a:t>Progressive</a:t>
-            </a:r>
-          </a:p>
-        </p:txBody>
-      </p:sp>
-      <p:sp>
-        <p:nvSpPr>
-          <p:cNvPr id="14" name="Rounded Rectangle 13"/>
-          <p:cNvSpPr/>
-          <p:nvPr/>
-        </p:nvSpPr>
-        <p:spPr>
-          <a:xfrm>
-            <a:off x="6629400" y="3520440"/>
-            <a:ext cx="1280160" cy="560070"/>
-          </a:xfrm>
-          <a:prstGeom prst="roundRect">
-            <a:avLst/>
-          </a:prstGeom>
-          <a:solidFill>
-            <a:srgbClr val="F18F01"/>
-          </a:solidFill>
-          <a:ln w="12700">
-            <a:solidFill>
-              <a:srgbClr val="F18F01"/>
-            </a:solidFill>
-          </a:ln>
-        </p:spPr>
-        <p:style>
-          <a:lnRef idx="1">
-            <a:schemeClr val="accent1"/>
-          </a:lnRef>
-          <a:fillRef idx="3">
-            <a:schemeClr val="accent1"/>
-          </a:fillRef>
-          <a:effectRef idx="2">
-            <a:schemeClr val="accent1"/>
-          </a:effectRef>
-          <a:fontRef idx="minor">
-            <a:schemeClr val="lt1"/>
-          </a:fontRef>
-        </p:style>
-        <p:txBody>
-          <a:bodyPr rtlCol="0" anchor="ctr"/>
-          <a:lstStyle/>
-          <a:p>
-            <a:pPr algn="ctr"/>
-          </a:p>
-        </p:txBody>
-      </p:sp>
-      <p:sp>
-        <p:nvSpPr>
-          <p:cNvPr id="15" name="TextBox 14"/>
-          <p:cNvSpPr txBox="1"/>
-          <p:nvPr/>
-        </p:nvSpPr>
-        <p:spPr>
-          <a:xfrm>
-            <a:off x="6629400" y="3429000"/>
-            <a:ext cx="1371600" cy="742950"/>
-          </a:xfrm>
-          <a:prstGeom prst="rect">
-            <a:avLst/>
-          </a:prstGeom>
-          <a:noFill/>
-        </p:spPr>
-        <p:txBody>
-          <a:bodyPr wrap="none" anchor="ctr">
-            <a:spAutoFit/>
-          </a:bodyPr>
-          <a:lstStyle/>
-          <a:p>
-            <a:pPr algn="ctr">
-              <a:defRPr sz="1200" b="0">
-                <a:solidFill>
-                  <a:srgbClr val="2E86AB"/>
-                </a:solidFill>
-                <a:latin typeface="Source Sans Pro"/>
-              </a:defRPr>
-            </a:pPr>
-            <a:r>
-              <a:t>Trustworthy</a:t>
-            </a:r>
-          </a:p>
-        </p:txBody>
-      </p:sp>
-      <p:sp>
-        <p:nvSpPr>
-          <p:cNvPr id="16" name="TextBox 15"/>
-          <p:cNvSpPr txBox="1"/>
-          <p:nvPr/>
-        </p:nvSpPr>
-        <p:spPr>
-          <a:xfrm>
-            <a:off x="1143000" y="4171950"/>
-            <a:ext cx="7543800" cy="1485900"/>
-          </a:xfrm>
-          <a:prstGeom prst="rect">
-            <a:avLst/>
-          </a:prstGeom>
-          <a:noFill/>
-        </p:spPr>
-        <p:txBody>
-          <a:bodyPr wrap="square">
-            <a:spAutoFit/>
-          </a:bodyPr>
-          <a:lstStyle/>
-          <a:p>
-            <a:pPr>
-              <a:defRPr sz="1600" b="0">
-                <a:solidFill>
-                  <a:srgbClr val="2E86AB"/>
-                </a:solidFill>
-                <a:latin typeface="Source Sans Pro"/>
-              </a:defRPr>
-            </a:pPr>
-            <a:r>
-              <a:t>Competitive Advantage:</a:t>
-            </a:r>
-          </a:p>
-          <a:p>
-            <a:pPr>
-              <a:defRPr sz="1400" b="0">
-                <a:solidFill>
-                  <a:srgbClr val="2E86AB"/>
-                </a:solidFill>
-                <a:latin typeface="Source Sans Pro"/>
-              </a:defRPr>
-            </a:pPr>
-            <a:r>
-              <a:t>Our deep understanding of human psychology and behavior drives more intuitive and effective technology solutions</a:t>
-            </a:r>
-          </a:p>
-        </p:txBody>
-      </p:sp>
-      <p:sp>
-        <p:nvSpPr>
-          <p:cNvPr id="17" name="TextBox 16"/>
+              <a:defRPr sz="800" b="0">
+                <a:solidFill>
+                  <a:srgbClr val="2E86AB"/>
+                </a:solidFill>
+                <a:latin typeface="Source Sans Pro"/>
+              </a:defRPr>
+            </a:pPr>
+            <a:r>
+              <a:t>Example</a:t>
+            </a:r>
+          </a:p>
+        </p:txBody>
+      </p:sp>
+      <p:sp>
+        <p:nvSpPr>
+          <p:cNvPr id="12" name="TextBox 11"/>
           <p:cNvSpPr txBox="1"/>
           <p:nvPr/>
         </p:nvSpPr>
@@ -7863,7 +7997,7 @@
       </p:sp>
       <p:sp>
         <p:nvSpPr>
-          <p:cNvPr id="18" name="TextBox 17"/>
+          <p:cNvPr id="13" name="TextBox 12"/>
           <p:cNvSpPr txBox="1"/>
           <p:nvPr/>
         </p:nvSpPr>
@@ -7989,413 +8123,50 @@
               </a:defRPr>
             </a:pPr>
             <a:r>
-              <a:t>Color Palette</a:t>
-            </a:r>
-          </a:p>
-        </p:txBody>
-      </p:sp>
-      <p:sp>
-        <p:nvSpPr>
-          <p:cNvPr id="4" name="Rectangle 3"/>
-          <p:cNvSpPr/>
+              <a:t>Brand Story &amp; Mission</a:t>
+            </a:r>
+          </a:p>
+        </p:txBody>
+      </p:sp>
+      <p:sp>
+        <p:nvSpPr>
+          <p:cNvPr id="4" name="TextBox 3"/>
+          <p:cNvSpPr txBox="1"/>
           <p:nvPr/>
         </p:nvSpPr>
         <p:spPr>
           <a:xfrm>
             <a:off x="1143000" y="1943100"/>
-            <a:ext cx="2057400" cy="1485900"/>
-          </a:xfrm>
-          <a:prstGeom prst="rect">
-            <a:avLst/>
-          </a:prstGeom>
-          <a:solidFill>
-            <a:srgbClr val="2E86AB"/>
-          </a:solidFill>
-          <a:ln w="12700">
-            <a:solidFill>
-              <a:srgbClr val="FFFFFF"/>
-            </a:solidFill>
-          </a:ln>
-        </p:spPr>
-        <p:style>
-          <a:lnRef idx="1">
-            <a:schemeClr val="accent1"/>
-          </a:lnRef>
-          <a:fillRef idx="3">
-            <a:schemeClr val="accent1"/>
-          </a:fillRef>
-          <a:effectRef idx="2">
-            <a:schemeClr val="accent1"/>
-          </a:effectRef>
-          <a:fontRef idx="minor">
-            <a:schemeClr val="lt1"/>
-          </a:fontRef>
-        </p:style>
-        <p:txBody>
-          <a:bodyPr rtlCol="0" anchor="ctr"/>
-          <a:lstStyle/>
-          <a:p>
-            <a:pPr algn="ctr"/>
+            <a:ext cx="6858000" cy="2971800"/>
+          </a:xfrm>
+          <a:prstGeom prst="rect">
+            <a:avLst/>
+          </a:prstGeom>
+          <a:noFill/>
+        </p:spPr>
+        <p:txBody>
+          <a:bodyPr wrap="square">
+            <a:spAutoFit/>
+          </a:bodyPr>
+          <a:lstStyle/>
+          <a:p>
+            <a:pPr>
+              <a:defRPr sz="1600" b="0">
+                <a:solidFill>
+                  <a:srgbClr val="2E86AB"/>
+                </a:solidFill>
+                <a:latin typeface="Source Sans Pro"/>
+              </a:defRPr>
+            </a:pPr>
+            <a:r>
+              <a:t>We revolutionize technology through innovative design and human-centered solutions that empower businesses to achieve their digital transformation goals.</a:t>
+            </a:r>
           </a:p>
         </p:txBody>
       </p:sp>
       <p:sp>
         <p:nvSpPr>
           <p:cNvPr id="5" name="TextBox 4"/>
-          <p:cNvSpPr txBox="1"/>
-          <p:nvPr/>
-        </p:nvSpPr>
-        <p:spPr>
-          <a:xfrm>
-            <a:off x="1143000" y="3429000"/>
-            <a:ext cx="2057400" cy="1485900"/>
-          </a:xfrm>
-          <a:prstGeom prst="rect">
-            <a:avLst/>
-          </a:prstGeom>
-          <a:noFill/>
-        </p:spPr>
-        <p:txBody>
-          <a:bodyPr wrap="square">
-            <a:spAutoFit/>
-          </a:bodyPr>
-          <a:lstStyle/>
-          <a:p>
-            <a:pPr>
-              <a:defRPr sz="1000" b="0">
-                <a:solidFill>
-                  <a:srgbClr val="2E86AB"/>
-                </a:solidFill>
-                <a:latin typeface="Source Sans Pro"/>
-              </a:defRPr>
-            </a:pPr>
-            <a:r>
-              <a:t>Primary</a:t>
-            </a:r>
-          </a:p>
-          <a:p>
-            <a:pPr>
-              <a:defRPr sz="1000" b="0">
-                <a:solidFill>
-                  <a:srgbClr val="2E86AB"/>
-                </a:solidFill>
-                <a:latin typeface="Source Sans Pro"/>
-              </a:defRPr>
-            </a:pPr>
-            <a:r>
-              <a:t>#2E86AB</a:t>
-            </a:r>
-          </a:p>
-          <a:p>
-            <a:pPr>
-              <a:defRPr sz="1000" b="0">
-                <a:solidFill>
-                  <a:srgbClr val="2E86AB"/>
-                </a:solidFill>
-                <a:latin typeface="Source Sans Pro"/>
-              </a:defRPr>
-            </a:pPr>
-            <a:r>
-              <a:t>RGB(46, 134, 171)</a:t>
-            </a:r>
-          </a:p>
-          <a:p>
-            <a:pPr>
-              <a:defRPr sz="1000" b="0">
-                <a:solidFill>
-                  <a:srgbClr val="2E86AB"/>
-                </a:solidFill>
-                <a:latin typeface="Source Sans Pro"/>
-              </a:defRPr>
-            </a:pPr>
-            <a:r>
-              <a:t>CMYK(73, 21, 0, 32)</a:t>
-            </a:r>
-          </a:p>
-          <a:p>
-            <a:pPr>
-              <a:defRPr sz="1000" b="0">
-                <a:solidFill>
-                  <a:srgbClr val="2E86AB"/>
-                </a:solidFill>
-                <a:latin typeface="Source Sans Pro"/>
-              </a:defRPr>
-            </a:pPr>
-            <a:r>
-              <a:t>Use Light Text</a:t>
-            </a:r>
-          </a:p>
-        </p:txBody>
-      </p:sp>
-      <p:sp>
-        <p:nvSpPr>
-          <p:cNvPr id="6" name="Rectangle 5"/>
-          <p:cNvSpPr/>
-          <p:nvPr/>
-        </p:nvSpPr>
-        <p:spPr>
-          <a:xfrm>
-            <a:off x="3886200" y="1943100"/>
-            <a:ext cx="2057400" cy="1485900"/>
-          </a:xfrm>
-          <a:prstGeom prst="rect">
-            <a:avLst/>
-          </a:prstGeom>
-          <a:solidFill>
-            <a:srgbClr val="A23B72"/>
-          </a:solidFill>
-          <a:ln w="12700">
-            <a:solidFill>
-              <a:srgbClr val="FFFFFF"/>
-            </a:solidFill>
-          </a:ln>
-        </p:spPr>
-        <p:style>
-          <a:lnRef idx="1">
-            <a:schemeClr val="accent1"/>
-          </a:lnRef>
-          <a:fillRef idx="3">
-            <a:schemeClr val="accent1"/>
-          </a:fillRef>
-          <a:effectRef idx="2">
-            <a:schemeClr val="accent1"/>
-          </a:effectRef>
-          <a:fontRef idx="minor">
-            <a:schemeClr val="lt1"/>
-          </a:fontRef>
-        </p:style>
-        <p:txBody>
-          <a:bodyPr rtlCol="0" anchor="ctr"/>
-          <a:lstStyle/>
-          <a:p>
-            <a:pPr algn="ctr"/>
-          </a:p>
-        </p:txBody>
-      </p:sp>
-      <p:sp>
-        <p:nvSpPr>
-          <p:cNvPr id="7" name="TextBox 6"/>
-          <p:cNvSpPr txBox="1"/>
-          <p:nvPr/>
-        </p:nvSpPr>
-        <p:spPr>
-          <a:xfrm>
-            <a:off x="3886200" y="3429000"/>
-            <a:ext cx="2057400" cy="1485900"/>
-          </a:xfrm>
-          <a:prstGeom prst="rect">
-            <a:avLst/>
-          </a:prstGeom>
-          <a:noFill/>
-        </p:spPr>
-        <p:txBody>
-          <a:bodyPr wrap="square">
-            <a:spAutoFit/>
-          </a:bodyPr>
-          <a:lstStyle/>
-          <a:p>
-            <a:pPr>
-              <a:defRPr sz="1000" b="0">
-                <a:solidFill>
-                  <a:srgbClr val="2E86AB"/>
-                </a:solidFill>
-                <a:latin typeface="Source Sans Pro"/>
-              </a:defRPr>
-            </a:pPr>
-            <a:r>
-              <a:t>Secondary</a:t>
-            </a:r>
-          </a:p>
-          <a:p>
-            <a:pPr>
-              <a:defRPr sz="1000" b="0">
-                <a:solidFill>
-                  <a:srgbClr val="2E86AB"/>
-                </a:solidFill>
-                <a:latin typeface="Source Sans Pro"/>
-              </a:defRPr>
-            </a:pPr>
-            <a:r>
-              <a:t>#A23B72</a:t>
-            </a:r>
-          </a:p>
-          <a:p>
-            <a:pPr>
-              <a:defRPr sz="1000" b="0">
-                <a:solidFill>
-                  <a:srgbClr val="2E86AB"/>
-                </a:solidFill>
-                <a:latin typeface="Source Sans Pro"/>
-              </a:defRPr>
-            </a:pPr>
-            <a:r>
-              <a:t>RGB(162, 59, 114)</a:t>
-            </a:r>
-          </a:p>
-          <a:p>
-            <a:pPr>
-              <a:defRPr sz="1000" b="0">
-                <a:solidFill>
-                  <a:srgbClr val="2E86AB"/>
-                </a:solidFill>
-                <a:latin typeface="Source Sans Pro"/>
-              </a:defRPr>
-            </a:pPr>
-            <a:r>
-              <a:t>CMYK(0, 63, 29, 36)</a:t>
-            </a:r>
-          </a:p>
-          <a:p>
-            <a:pPr>
-              <a:defRPr sz="1000" b="0">
-                <a:solidFill>
-                  <a:srgbClr val="2E86AB"/>
-                </a:solidFill>
-                <a:latin typeface="Source Sans Pro"/>
-              </a:defRPr>
-            </a:pPr>
-            <a:r>
-              <a:t>Use Light Text</a:t>
-            </a:r>
-          </a:p>
-        </p:txBody>
-      </p:sp>
-      <p:sp>
-        <p:nvSpPr>
-          <p:cNvPr id="8" name="Rectangle 7"/>
-          <p:cNvSpPr/>
-          <p:nvPr/>
-        </p:nvSpPr>
-        <p:spPr>
-          <a:xfrm>
-            <a:off x="6629400" y="1943100"/>
-            <a:ext cx="2057400" cy="1485900"/>
-          </a:xfrm>
-          <a:prstGeom prst="rect">
-            <a:avLst/>
-          </a:prstGeom>
-          <a:solidFill>
-            <a:srgbClr val="F18F01"/>
-          </a:solidFill>
-          <a:ln w="12700">
-            <a:solidFill>
-              <a:srgbClr val="FFFFFF"/>
-            </a:solidFill>
-          </a:ln>
-        </p:spPr>
-        <p:style>
-          <a:lnRef idx="1">
-            <a:schemeClr val="accent1"/>
-          </a:lnRef>
-          <a:fillRef idx="3">
-            <a:schemeClr val="accent1"/>
-          </a:fillRef>
-          <a:effectRef idx="2">
-            <a:schemeClr val="accent1"/>
-          </a:effectRef>
-          <a:fontRef idx="minor">
-            <a:schemeClr val="lt1"/>
-          </a:fontRef>
-        </p:style>
-        <p:txBody>
-          <a:bodyPr rtlCol="0" anchor="ctr"/>
-          <a:lstStyle/>
-          <a:p>
-            <a:pPr algn="ctr"/>
-          </a:p>
-        </p:txBody>
-      </p:sp>
-      <p:sp>
-        <p:nvSpPr>
-          <p:cNvPr id="9" name="TextBox 8"/>
-          <p:cNvSpPr txBox="1"/>
-          <p:nvPr/>
-        </p:nvSpPr>
-        <p:spPr>
-          <a:xfrm>
-            <a:off x="6629400" y="3429000"/>
-            <a:ext cx="2057400" cy="1485900"/>
-          </a:xfrm>
-          <a:prstGeom prst="rect">
-            <a:avLst/>
-          </a:prstGeom>
-          <a:noFill/>
-        </p:spPr>
-        <p:txBody>
-          <a:bodyPr wrap="square">
-            <a:spAutoFit/>
-          </a:bodyPr>
-          <a:lstStyle/>
-          <a:p>
-            <a:pPr>
-              <a:defRPr sz="1000" b="0">
-                <a:solidFill>
-                  <a:srgbClr val="2E86AB"/>
-                </a:solidFill>
-                <a:latin typeface="Source Sans Pro"/>
-              </a:defRPr>
-            </a:pPr>
-            <a:r>
-              <a:t>Accent</a:t>
-            </a:r>
-          </a:p>
-          <a:p>
-            <a:pPr>
-              <a:defRPr sz="1000" b="0">
-                <a:solidFill>
-                  <a:srgbClr val="2E86AB"/>
-                </a:solidFill>
-                <a:latin typeface="Source Sans Pro"/>
-              </a:defRPr>
-            </a:pPr>
-            <a:r>
-              <a:t>#F18F01</a:t>
-            </a:r>
-          </a:p>
-          <a:p>
-            <a:pPr>
-              <a:defRPr sz="1000" b="0">
-                <a:solidFill>
-                  <a:srgbClr val="2E86AB"/>
-                </a:solidFill>
-                <a:latin typeface="Source Sans Pro"/>
-              </a:defRPr>
-            </a:pPr>
-            <a:r>
-              <a:t>RGB(241, 143, 1)</a:t>
-            </a:r>
-          </a:p>
-          <a:p>
-            <a:pPr>
-              <a:defRPr sz="1000" b="0">
-                <a:solidFill>
-                  <a:srgbClr val="2E86AB"/>
-                </a:solidFill>
-                <a:latin typeface="Source Sans Pro"/>
-              </a:defRPr>
-            </a:pPr>
-            <a:r>
-              <a:t>CMYK(0, 40, 99, 5)</a:t>
-            </a:r>
-          </a:p>
-          <a:p>
-            <a:pPr>
-              <a:defRPr sz="1000" b="0">
-                <a:solidFill>
-                  <a:srgbClr val="2E86AB"/>
-                </a:solidFill>
-                <a:latin typeface="Source Sans Pro"/>
-              </a:defRPr>
-            </a:pPr>
-            <a:r>
-              <a:t>Use Dark Text</a:t>
-            </a:r>
-          </a:p>
-        </p:txBody>
-      </p:sp>
-      <p:sp>
-        <p:nvSpPr>
-          <p:cNvPr id="10" name="TextBox 9"/>
           <p:cNvSpPr txBox="1"/>
           <p:nvPr/>
         </p:nvSpPr>
@@ -8431,7 +8202,7 @@
       </p:sp>
       <p:sp>
         <p:nvSpPr>
-          <p:cNvPr id="11" name="TextBox 10"/>
+          <p:cNvPr id="6" name="TextBox 5"/>
           <p:cNvSpPr txBox="1"/>
           <p:nvPr/>
         </p:nvSpPr>
@@ -8557,7 +8328,7 @@
               </a:defRPr>
             </a:pPr>
             <a:r>
-              <a:t>Typography</a:t>
+              <a:t>Brand Voice &amp; Tone</a:t>
             </a:r>
           </a:p>
         </p:txBody>
@@ -8571,29 +8342,29 @@
         <p:spPr>
           <a:xfrm>
             <a:off x="1143000" y="1943100"/>
-            <a:ext cx="3429000" cy="742950"/>
-          </a:xfrm>
-          <a:prstGeom prst="rect">
-            <a:avLst/>
-          </a:prstGeom>
-          <a:noFill/>
-        </p:spPr>
-        <p:txBody>
-          <a:bodyPr wrap="none">
-            <a:spAutoFit/>
-          </a:bodyPr>
-          <a:lstStyle/>
-          <a:p>
-            <a:pPr>
-              <a:defRPr sz="2000" b="0">
-                <a:solidFill>
-                  <a:srgbClr val="2E86AB"/>
-                </a:solidFill>
-                <a:latin typeface="Source Sans Pro"/>
-              </a:defRPr>
-            </a:pPr>
-            <a:r>
-              <a:t>Primary Font: Inter</a:t>
+            <a:ext cx="6858000" cy="2971800"/>
+          </a:xfrm>
+          <a:prstGeom prst="rect">
+            <a:avLst/>
+          </a:prstGeom>
+          <a:noFill/>
+        </p:spPr>
+        <p:txBody>
+          <a:bodyPr wrap="square">
+            <a:spAutoFit/>
+          </a:bodyPr>
+          <a:lstStyle/>
+          <a:p>
+            <a:pPr>
+              <a:defRPr sz="1600" b="0">
+                <a:solidFill>
+                  <a:srgbClr val="2E86AB"/>
+                </a:solidFill>
+                <a:latin typeface="Source Sans Pro"/>
+              </a:defRPr>
+            </a:pPr>
+            <a:r>
+              <a:t>Professional yet approachable, confident, innovative, and human-centered with a focus on clarity and trust.</a:t>
             </a:r>
           </a:p>
         </p:txBody>
@@ -8601,258 +8372,6 @@
       <p:sp>
         <p:nvSpPr>
           <p:cNvPr id="5" name="TextBox 4"/>
-          <p:cNvSpPr txBox="1"/>
-          <p:nvPr/>
-        </p:nvSpPr>
-        <p:spPr>
-          <a:xfrm>
-            <a:off x="1143000" y="2686050"/>
-            <a:ext cx="3429000" cy="742950"/>
-          </a:xfrm>
-          <a:prstGeom prst="rect">
-            <a:avLst/>
-          </a:prstGeom>
-          <a:noFill/>
-        </p:spPr>
-        <p:txBody>
-          <a:bodyPr wrap="none">
-            <a:spAutoFit/>
-          </a:bodyPr>
-          <a:lstStyle/>
-          <a:p>
-            <a:pPr>
-              <a:defRPr sz="3200" b="1">
-                <a:solidFill>
-                  <a:srgbClr val="2E86AB"/>
-                </a:solidFill>
-                <a:latin typeface="Inter"/>
-              </a:defRPr>
-            </a:pPr>
-            <a:r>
-              <a:t>H1 Heading</a:t>
-            </a:r>
-          </a:p>
-        </p:txBody>
-      </p:sp>
-      <p:sp>
-        <p:nvSpPr>
-          <p:cNvPr id="6" name="TextBox 5"/>
-          <p:cNvSpPr txBox="1"/>
-          <p:nvPr/>
-        </p:nvSpPr>
-        <p:spPr>
-          <a:xfrm>
-            <a:off x="1143000" y="3429000"/>
-            <a:ext cx="3429000" cy="742950"/>
-          </a:xfrm>
-          <a:prstGeom prst="rect">
-            <a:avLst/>
-          </a:prstGeom>
-          <a:noFill/>
-        </p:spPr>
-        <p:txBody>
-          <a:bodyPr wrap="none">
-            <a:spAutoFit/>
-          </a:bodyPr>
-          <a:lstStyle/>
-          <a:p>
-            <a:pPr>
-              <a:defRPr sz="2400" b="1">
-                <a:solidFill>
-                  <a:srgbClr val="2E86AB"/>
-                </a:solidFill>
-                <a:latin typeface="Inter"/>
-              </a:defRPr>
-            </a:pPr>
-            <a:r>
-              <a:t>H2 Heading</a:t>
-            </a:r>
-          </a:p>
-        </p:txBody>
-      </p:sp>
-      <p:sp>
-        <p:nvSpPr>
-          <p:cNvPr id="7" name="TextBox 6"/>
-          <p:cNvSpPr txBox="1"/>
-          <p:nvPr/>
-        </p:nvSpPr>
-        <p:spPr>
-          <a:xfrm>
-            <a:off x="1143000" y="4171950"/>
-            <a:ext cx="3429000" cy="742950"/>
-          </a:xfrm>
-          <a:prstGeom prst="rect">
-            <a:avLst/>
-          </a:prstGeom>
-          <a:noFill/>
-        </p:spPr>
-        <p:txBody>
-          <a:bodyPr wrap="none">
-            <a:spAutoFit/>
-          </a:bodyPr>
-          <a:lstStyle/>
-          <a:p>
-            <a:pPr>
-              <a:defRPr sz="2000" b="0">
-                <a:solidFill>
-                  <a:srgbClr val="2E86AB"/>
-                </a:solidFill>
-                <a:latin typeface="Inter"/>
-              </a:defRPr>
-            </a:pPr>
-            <a:r>
-              <a:t>H3 Heading</a:t>
-            </a:r>
-          </a:p>
-        </p:txBody>
-      </p:sp>
-      <p:sp>
-        <p:nvSpPr>
-          <p:cNvPr id="8" name="TextBox 7"/>
-          <p:cNvSpPr txBox="1"/>
-          <p:nvPr/>
-        </p:nvSpPr>
-        <p:spPr>
-          <a:xfrm>
-            <a:off x="5257800" y="1943100"/>
-            <a:ext cx="3429000" cy="742950"/>
-          </a:xfrm>
-          <a:prstGeom prst="rect">
-            <a:avLst/>
-          </a:prstGeom>
-          <a:noFill/>
-        </p:spPr>
-        <p:txBody>
-          <a:bodyPr wrap="none">
-            <a:spAutoFit/>
-          </a:bodyPr>
-          <a:lstStyle/>
-          <a:p>
-            <a:pPr>
-              <a:defRPr sz="2000" b="0">
-                <a:solidFill>
-                  <a:srgbClr val="2E86AB"/>
-                </a:solidFill>
-                <a:latin typeface="Source Sans Pro"/>
-              </a:defRPr>
-            </a:pPr>
-            <a:r>
-              <a:t>Secondary Font: Source Sans Pro</a:t>
-            </a:r>
-          </a:p>
-        </p:txBody>
-      </p:sp>
-      <p:sp>
-        <p:nvSpPr>
-          <p:cNvPr id="9" name="TextBox 8"/>
-          <p:cNvSpPr txBox="1"/>
-          <p:nvPr/>
-        </p:nvSpPr>
-        <p:spPr>
-          <a:xfrm>
-            <a:off x="5257800" y="2686050"/>
-            <a:ext cx="3429000" cy="742950"/>
-          </a:xfrm>
-          <a:prstGeom prst="rect">
-            <a:avLst/>
-          </a:prstGeom>
-          <a:noFill/>
-        </p:spPr>
-        <p:txBody>
-          <a:bodyPr wrap="none">
-            <a:spAutoFit/>
-          </a:bodyPr>
-          <a:lstStyle/>
-          <a:p>
-            <a:pPr>
-              <a:defRPr sz="1600" b="0">
-                <a:solidFill>
-                  <a:srgbClr val="2E86AB"/>
-                </a:solidFill>
-                <a:latin typeface="Source Sans Pro"/>
-              </a:defRPr>
-            </a:pPr>
-            <a:r>
-              <a:t>Body Text</a:t>
-            </a:r>
-          </a:p>
-        </p:txBody>
-      </p:sp>
-      <p:sp>
-        <p:nvSpPr>
-          <p:cNvPr id="10" name="TextBox 9"/>
-          <p:cNvSpPr txBox="1"/>
-          <p:nvPr/>
-        </p:nvSpPr>
-        <p:spPr>
-          <a:xfrm>
-            <a:off x="5257800" y="3429000"/>
-            <a:ext cx="3429000" cy="742950"/>
-          </a:xfrm>
-          <a:prstGeom prst="rect">
-            <a:avLst/>
-          </a:prstGeom>
-          <a:noFill/>
-        </p:spPr>
-        <p:txBody>
-          <a:bodyPr wrap="none">
-            <a:spAutoFit/>
-          </a:bodyPr>
-          <a:lstStyle/>
-          <a:p>
-            <a:pPr>
-              <a:defRPr sz="1600" b="1">
-                <a:solidFill>
-                  <a:srgbClr val="2E86AB"/>
-                </a:solidFill>
-                <a:latin typeface="Source Sans Pro"/>
-              </a:defRPr>
-            </a:pPr>
-            <a:r>
-              <a:t>Body Bold</a:t>
-            </a:r>
-          </a:p>
-        </p:txBody>
-      </p:sp>
-      <p:sp>
-        <p:nvSpPr>
-          <p:cNvPr id="11" name="TextBox 10"/>
-          <p:cNvSpPr txBox="1"/>
-          <p:nvPr/>
-        </p:nvSpPr>
-        <p:spPr>
-          <a:xfrm>
-            <a:off x="5257800" y="4171950"/>
-            <a:ext cx="3429000" cy="742950"/>
-          </a:xfrm>
-          <a:prstGeom prst="rect">
-            <a:avLst/>
-          </a:prstGeom>
-          <a:noFill/>
-        </p:spPr>
-        <p:txBody>
-          <a:bodyPr wrap="none">
-            <a:spAutoFit/>
-          </a:bodyPr>
-          <a:lstStyle/>
-          <a:p>
-            <a:pPr>
-              <a:defRPr sz="1200" b="0">
-                <a:solidFill>
-                  <a:srgbClr val="2E86AB"/>
-                </a:solidFill>
-                <a:latin typeface="Source Sans Pro"/>
-              </a:defRPr>
-            </a:pPr>
-            <a:r>
-              <a:t>Caption Text</a:t>
-            </a:r>
-          </a:p>
-        </p:txBody>
-      </p:sp>
-      <p:sp>
-        <p:nvSpPr>
-          <p:cNvPr id="12" name="TextBox 11"/>
           <p:cNvSpPr txBox="1"/>
           <p:nvPr/>
         </p:nvSpPr>
@@ -8888,7 +8407,7 @@
       </p:sp>
       <p:sp>
         <p:nvSpPr>
-          <p:cNvPr id="13" name="TextBox 12"/>
+          <p:cNvPr id="6" name="TextBox 5"/>
           <p:cNvSpPr txBox="1"/>
           <p:nvPr/>
         </p:nvSpPr>

--- a/output/techforward_live/techforward_live_enhanced_brand_book.pptx
+++ b/output/techforward_live/techforward_live_enhanced_brand_book.pptx
@@ -13,12 +13,6 @@
     <p:sldId id="261" r:id="rId12"/>
     <p:sldId id="262" r:id="rId13"/>
     <p:sldId id="263" r:id="rId14"/>
-    <p:sldId id="264" r:id="rId15"/>
-    <p:sldId id="265" r:id="rId16"/>
-    <p:sldId id="266" r:id="rId17"/>
-    <p:sldId id="267" r:id="rId18"/>
-    <p:sldId id="268" r:id="rId19"/>
-    <p:sldId id="269" r:id="rId20"/>
   </p:sldIdLst>
   <p:sldSz cx="9144000" cy="6858000" type="screen4x3"/>
   <p:notesSz cx="6858000" cy="9144000"/>
@@ -3224,1031 +3218,6 @@
 </p:sld>
 </file>
 
-<file path=ppt/slides/slide10.xml><?xml version="1.0" encoding="utf-8"?>
-<p:sld xmlns:a="http://schemas.openxmlformats.org/drawingml/2006/main" xmlns:p="http://schemas.openxmlformats.org/presentationml/2006/main" xmlns:r="http://schemas.openxmlformats.org/officeDocument/2006/relationships">
-  <p:cSld>
-    <p:spTree>
-      <p:nvGrpSpPr>
-        <p:cNvPr id="1" name=""/>
-        <p:cNvGrpSpPr/>
-        <p:nvPr/>
-      </p:nvGrpSpPr>
-      <p:sp>
-        <p:nvSpPr>
-          <p:cNvPr id="2" name="Rectangle 1"/>
-          <p:cNvSpPr/>
-          <p:nvPr/>
-        </p:nvSpPr>
-        <p:spPr>
-          <a:xfrm>
-            <a:off x="0" y="0"/>
-            <a:ext cx="9144000" cy="6858000"/>
-          </a:xfrm>
-          <a:prstGeom prst="rect">
-            <a:avLst/>
-          </a:prstGeom>
-          <a:solidFill>
-            <a:srgbClr val="1A1A1A"/>
-          </a:solidFill>
-          <a:ln>
-            <a:noFill/>
-          </a:ln>
-        </p:spPr>
-        <p:style>
-          <a:lnRef idx="1">
-            <a:schemeClr val="accent1"/>
-          </a:lnRef>
-          <a:fillRef idx="3">
-            <a:schemeClr val="accent1"/>
-          </a:fillRef>
-          <a:effectRef idx="2">
-            <a:schemeClr val="accent1"/>
-          </a:effectRef>
-          <a:fontRef idx="minor">
-            <a:schemeClr val="lt1"/>
-          </a:fontRef>
-        </p:style>
-        <p:txBody>
-          <a:bodyPr rtlCol="0" anchor="ctr"/>
-          <a:lstStyle/>
-          <a:p>
-            <a:pPr algn="ctr"/>
-          </a:p>
-        </p:txBody>
-      </p:sp>
-      <p:grpSpPr/>
-      <p:sp>
-        <p:nvSpPr>
-          <p:cNvPr id="3" name="TextBox 2"/>
-          <p:cNvSpPr txBox="1"/>
-          <p:nvPr/>
-        </p:nvSpPr>
-        <p:spPr>
-          <a:xfrm>
-            <a:off x="1143000" y="457200"/>
-            <a:ext cx="6858000" cy="742950"/>
-          </a:xfrm>
-          <a:prstGeom prst="rect">
-            <a:avLst/>
-          </a:prstGeom>
-          <a:noFill/>
-        </p:spPr>
-        <p:txBody>
-          <a:bodyPr wrap="none">
-            <a:spAutoFit/>
-          </a:bodyPr>
-          <a:lstStyle/>
-          <a:p>
-            <a:pPr>
-              <a:defRPr sz="3200" b="1">
-                <a:solidFill>
-                  <a:srgbClr val="2E86AB"/>
-                </a:solidFill>
-                <a:latin typeface="Inter"/>
-              </a:defRPr>
-            </a:pPr>
-            <a:r>
-              <a:t>Messaging &amp; Value Propositions</a:t>
-            </a:r>
-          </a:p>
-        </p:txBody>
-      </p:sp>
-      <p:sp>
-        <p:nvSpPr>
-          <p:cNvPr id="4" name="TextBox 3"/>
-          <p:cNvSpPr txBox="1"/>
-          <p:nvPr/>
-        </p:nvSpPr>
-        <p:spPr>
-          <a:xfrm>
-            <a:off x="1143000" y="1943100"/>
-            <a:ext cx="6858000" cy="2971800"/>
-          </a:xfrm>
-          <a:prstGeom prst="rect">
-            <a:avLst/>
-          </a:prstGeom>
-          <a:noFill/>
-        </p:spPr>
-        <p:txBody>
-          <a:bodyPr wrap="square">
-            <a:spAutoFit/>
-          </a:bodyPr>
-          <a:lstStyle/>
-          <a:p>
-            <a:pPr>
-              <a:defRPr sz="1600" b="0">
-                <a:solidFill>
-                  <a:srgbClr val="2E86AB"/>
-                </a:solidFill>
-                <a:latin typeface="Source Sans Pro"/>
-              </a:defRPr>
-            </a:pPr>
-            <a:r>
-              <a:t>Our core message centers on bridging the gap between complex technology and intuitive user experiences.</a:t>
-            </a:r>
-          </a:p>
-        </p:txBody>
-      </p:sp>
-      <p:sp>
-        <p:nvSpPr>
-          <p:cNvPr id="5" name="TextBox 4"/>
-          <p:cNvSpPr txBox="1"/>
-          <p:nvPr/>
-        </p:nvSpPr>
-        <p:spPr>
-          <a:xfrm>
-            <a:off x="457200" y="5657850"/>
-            <a:ext cx="4114800" cy="742950"/>
-          </a:xfrm>
-          <a:prstGeom prst="rect">
-            <a:avLst/>
-          </a:prstGeom>
-          <a:noFill/>
-        </p:spPr>
-        <p:txBody>
-          <a:bodyPr wrap="none">
-            <a:spAutoFit/>
-          </a:bodyPr>
-          <a:lstStyle/>
-          <a:p>
-            <a:pPr algn="l">
-              <a:defRPr sz="1000" b="0">
-                <a:solidFill>
-                  <a:srgbClr val="2E86AB"/>
-                </a:solidFill>
-                <a:latin typeface="Source Sans Pro"/>
-              </a:defRPr>
-            </a:pPr>
-            <a:r>
-              <a:t>TechForward Live</a:t>
-            </a:r>
-          </a:p>
-        </p:txBody>
-      </p:sp>
-      <p:sp>
-        <p:nvSpPr>
-          <p:cNvPr id="6" name="TextBox 5"/>
-          <p:cNvSpPr txBox="1"/>
-          <p:nvPr/>
-        </p:nvSpPr>
-        <p:spPr>
-          <a:xfrm>
-            <a:off x="4572000" y="5657850"/>
-            <a:ext cx="4114800" cy="742950"/>
-          </a:xfrm>
-          <a:prstGeom prst="rect">
-            <a:avLst/>
-          </a:prstGeom>
-          <a:noFill/>
-        </p:spPr>
-        <p:txBody>
-          <a:bodyPr wrap="none">
-            <a:spAutoFit/>
-          </a:bodyPr>
-          <a:lstStyle/>
-          <a:p>
-            <a:pPr algn="r">
-              <a:defRPr sz="1000" b="0">
-                <a:solidFill>
-                  <a:srgbClr val="2E86AB"/>
-                </a:solidFill>
-                <a:latin typeface="Source Sans Pro"/>
-              </a:defRPr>
-            </a:pPr>
-            <a:r>
-              <a:t>10</a:t>
-            </a:r>
-          </a:p>
-        </p:txBody>
-      </p:sp>
-    </p:spTree>
-  </p:cSld>
-  <p:clrMapOvr>
-    <a:masterClrMapping/>
-  </p:clrMapOvr>
-</p:sld>
-</file>
-
-<file path=ppt/slides/slide11.xml><?xml version="1.0" encoding="utf-8"?>
-<p:sld xmlns:a="http://schemas.openxmlformats.org/drawingml/2006/main" xmlns:p="http://schemas.openxmlformats.org/presentationml/2006/main" xmlns:r="http://schemas.openxmlformats.org/officeDocument/2006/relationships">
-  <p:cSld>
-    <p:spTree>
-      <p:nvGrpSpPr>
-        <p:cNvPr id="1" name=""/>
-        <p:cNvGrpSpPr/>
-        <p:nvPr/>
-      </p:nvGrpSpPr>
-      <p:sp>
-        <p:nvSpPr>
-          <p:cNvPr id="2" name="Rectangle 1"/>
-          <p:cNvSpPr/>
-          <p:nvPr/>
-        </p:nvSpPr>
-        <p:spPr>
-          <a:xfrm>
-            <a:off x="0" y="0"/>
-            <a:ext cx="9144000" cy="6858000"/>
-          </a:xfrm>
-          <a:prstGeom prst="rect">
-            <a:avLst/>
-          </a:prstGeom>
-          <a:solidFill>
-            <a:srgbClr val="1A1A1A"/>
-          </a:solidFill>
-          <a:ln>
-            <a:noFill/>
-          </a:ln>
-        </p:spPr>
-        <p:style>
-          <a:lnRef idx="1">
-            <a:schemeClr val="accent1"/>
-          </a:lnRef>
-          <a:fillRef idx="3">
-            <a:schemeClr val="accent1"/>
-          </a:fillRef>
-          <a:effectRef idx="2">
-            <a:schemeClr val="accent1"/>
-          </a:effectRef>
-          <a:fontRef idx="minor">
-            <a:schemeClr val="lt1"/>
-          </a:fontRef>
-        </p:style>
-        <p:txBody>
-          <a:bodyPr rtlCol="0" anchor="ctr"/>
-          <a:lstStyle/>
-          <a:p>
-            <a:pPr algn="ctr"/>
-          </a:p>
-        </p:txBody>
-      </p:sp>
-      <p:grpSpPr/>
-      <p:sp>
-        <p:nvSpPr>
-          <p:cNvPr id="3" name="TextBox 2"/>
-          <p:cNvSpPr txBox="1"/>
-          <p:nvPr/>
-        </p:nvSpPr>
-        <p:spPr>
-          <a:xfrm>
-            <a:off x="1143000" y="457200"/>
-            <a:ext cx="6858000" cy="742950"/>
-          </a:xfrm>
-          <a:prstGeom prst="rect">
-            <a:avLst/>
-          </a:prstGeom>
-          <a:noFill/>
-        </p:spPr>
-        <p:txBody>
-          <a:bodyPr wrap="none">
-            <a:spAutoFit/>
-          </a:bodyPr>
-          <a:lstStyle/>
-          <a:p>
-            <a:pPr>
-              <a:defRPr sz="3200" b="1">
-                <a:solidFill>
-                  <a:srgbClr val="2E86AB"/>
-                </a:solidFill>
-                <a:latin typeface="Inter"/>
-              </a:defRPr>
-            </a:pPr>
-            <a:r>
-              <a:t>Marketing Copy: Website</a:t>
-            </a:r>
-          </a:p>
-        </p:txBody>
-      </p:sp>
-      <p:sp>
-        <p:nvSpPr>
-          <p:cNvPr id="4" name="TextBox 3"/>
-          <p:cNvSpPr txBox="1"/>
-          <p:nvPr/>
-        </p:nvSpPr>
-        <p:spPr>
-          <a:xfrm>
-            <a:off x="1143000" y="1943100"/>
-            <a:ext cx="6858000" cy="2971800"/>
-          </a:xfrm>
-          <a:prstGeom prst="rect">
-            <a:avLst/>
-          </a:prstGeom>
-          <a:noFill/>
-        </p:spPr>
-        <p:txBody>
-          <a:bodyPr wrap="square">
-            <a:spAutoFit/>
-          </a:bodyPr>
-          <a:lstStyle/>
-          <a:p>
-            <a:pPr>
-              <a:defRPr sz="1600" b="0">
-                <a:solidFill>
-                  <a:srgbClr val="2E86AB"/>
-                </a:solidFill>
-                <a:latin typeface="Source Sans Pro"/>
-              </a:defRPr>
-            </a:pPr>
-            <a:r>
-              <a:t>Transform your digital experience with our cutting-edge solutions designed for the modern business landscape.</a:t>
-            </a:r>
-          </a:p>
-        </p:txBody>
-      </p:sp>
-      <p:sp>
-        <p:nvSpPr>
-          <p:cNvPr id="5" name="TextBox 4"/>
-          <p:cNvSpPr txBox="1"/>
-          <p:nvPr/>
-        </p:nvSpPr>
-        <p:spPr>
-          <a:xfrm>
-            <a:off x="457200" y="5657850"/>
-            <a:ext cx="4114800" cy="742950"/>
-          </a:xfrm>
-          <a:prstGeom prst="rect">
-            <a:avLst/>
-          </a:prstGeom>
-          <a:noFill/>
-        </p:spPr>
-        <p:txBody>
-          <a:bodyPr wrap="none">
-            <a:spAutoFit/>
-          </a:bodyPr>
-          <a:lstStyle/>
-          <a:p>
-            <a:pPr algn="l">
-              <a:defRPr sz="1000" b="0">
-                <a:solidFill>
-                  <a:srgbClr val="2E86AB"/>
-                </a:solidFill>
-                <a:latin typeface="Source Sans Pro"/>
-              </a:defRPr>
-            </a:pPr>
-            <a:r>
-              <a:t>TechForward Live</a:t>
-            </a:r>
-          </a:p>
-        </p:txBody>
-      </p:sp>
-      <p:sp>
-        <p:nvSpPr>
-          <p:cNvPr id="6" name="TextBox 5"/>
-          <p:cNvSpPr txBox="1"/>
-          <p:nvPr/>
-        </p:nvSpPr>
-        <p:spPr>
-          <a:xfrm>
-            <a:off x="4572000" y="5657850"/>
-            <a:ext cx="4114800" cy="742950"/>
-          </a:xfrm>
-          <a:prstGeom prst="rect">
-            <a:avLst/>
-          </a:prstGeom>
-          <a:noFill/>
-        </p:spPr>
-        <p:txBody>
-          <a:bodyPr wrap="none">
-            <a:spAutoFit/>
-          </a:bodyPr>
-          <a:lstStyle/>
-          <a:p>
-            <a:pPr algn="r">
-              <a:defRPr sz="1000" b="0">
-                <a:solidFill>
-                  <a:srgbClr val="2E86AB"/>
-                </a:solidFill>
-                <a:latin typeface="Source Sans Pro"/>
-              </a:defRPr>
-            </a:pPr>
-            <a:r>
-              <a:t>11</a:t>
-            </a:r>
-          </a:p>
-        </p:txBody>
-      </p:sp>
-    </p:spTree>
-  </p:cSld>
-  <p:clrMapOvr>
-    <a:masterClrMapping/>
-  </p:clrMapOvr>
-</p:sld>
-</file>
-
-<file path=ppt/slides/slide12.xml><?xml version="1.0" encoding="utf-8"?>
-<p:sld xmlns:a="http://schemas.openxmlformats.org/drawingml/2006/main" xmlns:p="http://schemas.openxmlformats.org/presentationml/2006/main" xmlns:r="http://schemas.openxmlformats.org/officeDocument/2006/relationships">
-  <p:cSld>
-    <p:spTree>
-      <p:nvGrpSpPr>
-        <p:cNvPr id="1" name=""/>
-        <p:cNvGrpSpPr/>
-        <p:nvPr/>
-      </p:nvGrpSpPr>
-      <p:sp>
-        <p:nvSpPr>
-          <p:cNvPr id="2" name="Rectangle 1"/>
-          <p:cNvSpPr/>
-          <p:nvPr/>
-        </p:nvSpPr>
-        <p:spPr>
-          <a:xfrm>
-            <a:off x="0" y="0"/>
-            <a:ext cx="9144000" cy="6858000"/>
-          </a:xfrm>
-          <a:prstGeom prst="rect">
-            <a:avLst/>
-          </a:prstGeom>
-          <a:solidFill>
-            <a:srgbClr val="1A1A1A"/>
-          </a:solidFill>
-          <a:ln>
-            <a:noFill/>
-          </a:ln>
-        </p:spPr>
-        <p:style>
-          <a:lnRef idx="1">
-            <a:schemeClr val="accent1"/>
-          </a:lnRef>
-          <a:fillRef idx="3">
-            <a:schemeClr val="accent1"/>
-          </a:fillRef>
-          <a:effectRef idx="2">
-            <a:schemeClr val="accent1"/>
-          </a:effectRef>
-          <a:fontRef idx="minor">
-            <a:schemeClr val="lt1"/>
-          </a:fontRef>
-        </p:style>
-        <p:txBody>
-          <a:bodyPr rtlCol="0" anchor="ctr"/>
-          <a:lstStyle/>
-          <a:p>
-            <a:pPr algn="ctr"/>
-          </a:p>
-        </p:txBody>
-      </p:sp>
-      <p:grpSpPr/>
-      <p:sp>
-        <p:nvSpPr>
-          <p:cNvPr id="3" name="TextBox 2"/>
-          <p:cNvSpPr txBox="1"/>
-          <p:nvPr/>
-        </p:nvSpPr>
-        <p:spPr>
-          <a:xfrm>
-            <a:off x="1143000" y="457200"/>
-            <a:ext cx="6858000" cy="742950"/>
-          </a:xfrm>
-          <a:prstGeom prst="rect">
-            <a:avLst/>
-          </a:prstGeom>
-          <a:noFill/>
-        </p:spPr>
-        <p:txBody>
-          <a:bodyPr wrap="none">
-            <a:spAutoFit/>
-          </a:bodyPr>
-          <a:lstStyle/>
-          <a:p>
-            <a:pPr>
-              <a:defRPr sz="3200" b="1">
-                <a:solidFill>
-                  <a:srgbClr val="2E86AB"/>
-                </a:solidFill>
-                <a:latin typeface="Inter"/>
-              </a:defRPr>
-            </a:pPr>
-            <a:r>
-              <a:t>Marketing Copy: Social Media</a:t>
-            </a:r>
-          </a:p>
-        </p:txBody>
-      </p:sp>
-      <p:sp>
-        <p:nvSpPr>
-          <p:cNvPr id="4" name="TextBox 3"/>
-          <p:cNvSpPr txBox="1"/>
-          <p:nvPr/>
-        </p:nvSpPr>
-        <p:spPr>
-          <a:xfrm>
-            <a:off x="1143000" y="1943100"/>
-            <a:ext cx="6858000" cy="2971800"/>
-          </a:xfrm>
-          <a:prstGeom prst="rect">
-            <a:avLst/>
-          </a:prstGeom>
-          <a:noFill/>
-        </p:spPr>
-        <p:txBody>
-          <a:bodyPr wrap="square">
-            <a:spAutoFit/>
-          </a:bodyPr>
-          <a:lstStyle/>
-          <a:p>
-            <a:pPr>
-              <a:defRPr sz="1600" b="0">
-                <a:solidFill>
-                  <a:srgbClr val="2E86AB"/>
-                </a:solidFill>
-                <a:latin typeface="Source Sans Pro"/>
-              </a:defRPr>
-            </a:pPr>
-            <a:r>
-              <a:t>Innovation meets simplicity. Technology that works for you. #TechForHumans #DigitalTransformation</a:t>
-            </a:r>
-          </a:p>
-        </p:txBody>
-      </p:sp>
-      <p:sp>
-        <p:nvSpPr>
-          <p:cNvPr id="5" name="TextBox 4"/>
-          <p:cNvSpPr txBox="1"/>
-          <p:nvPr/>
-        </p:nvSpPr>
-        <p:spPr>
-          <a:xfrm>
-            <a:off x="457200" y="5657850"/>
-            <a:ext cx="4114800" cy="742950"/>
-          </a:xfrm>
-          <a:prstGeom prst="rect">
-            <a:avLst/>
-          </a:prstGeom>
-          <a:noFill/>
-        </p:spPr>
-        <p:txBody>
-          <a:bodyPr wrap="none">
-            <a:spAutoFit/>
-          </a:bodyPr>
-          <a:lstStyle/>
-          <a:p>
-            <a:pPr algn="l">
-              <a:defRPr sz="1000" b="0">
-                <a:solidFill>
-                  <a:srgbClr val="2E86AB"/>
-                </a:solidFill>
-                <a:latin typeface="Source Sans Pro"/>
-              </a:defRPr>
-            </a:pPr>
-            <a:r>
-              <a:t>TechForward Live</a:t>
-            </a:r>
-          </a:p>
-        </p:txBody>
-      </p:sp>
-      <p:sp>
-        <p:nvSpPr>
-          <p:cNvPr id="6" name="TextBox 5"/>
-          <p:cNvSpPr txBox="1"/>
-          <p:nvPr/>
-        </p:nvSpPr>
-        <p:spPr>
-          <a:xfrm>
-            <a:off x="4572000" y="5657850"/>
-            <a:ext cx="4114800" cy="742950"/>
-          </a:xfrm>
-          <a:prstGeom prst="rect">
-            <a:avLst/>
-          </a:prstGeom>
-          <a:noFill/>
-        </p:spPr>
-        <p:txBody>
-          <a:bodyPr wrap="none">
-            <a:spAutoFit/>
-          </a:bodyPr>
-          <a:lstStyle/>
-          <a:p>
-            <a:pPr algn="r">
-              <a:defRPr sz="1000" b="0">
-                <a:solidFill>
-                  <a:srgbClr val="2E86AB"/>
-                </a:solidFill>
-                <a:latin typeface="Source Sans Pro"/>
-              </a:defRPr>
-            </a:pPr>
-            <a:r>
-              <a:t>12</a:t>
-            </a:r>
-          </a:p>
-        </p:txBody>
-      </p:sp>
-    </p:spTree>
-  </p:cSld>
-  <p:clrMapOvr>
-    <a:masterClrMapping/>
-  </p:clrMapOvr>
-</p:sld>
-</file>
-
-<file path=ppt/slides/slide13.xml><?xml version="1.0" encoding="utf-8"?>
-<p:sld xmlns:a="http://schemas.openxmlformats.org/drawingml/2006/main" xmlns:p="http://schemas.openxmlformats.org/presentationml/2006/main" xmlns:r="http://schemas.openxmlformats.org/officeDocument/2006/relationships">
-  <p:cSld>
-    <p:spTree>
-      <p:nvGrpSpPr>
-        <p:cNvPr id="1" name=""/>
-        <p:cNvGrpSpPr/>
-        <p:nvPr/>
-      </p:nvGrpSpPr>
-      <p:sp>
-        <p:nvSpPr>
-          <p:cNvPr id="2" name="Rectangle 1"/>
-          <p:cNvSpPr/>
-          <p:nvPr/>
-        </p:nvSpPr>
-        <p:spPr>
-          <a:xfrm>
-            <a:off x="0" y="0"/>
-            <a:ext cx="9144000" cy="6858000"/>
-          </a:xfrm>
-          <a:prstGeom prst="rect">
-            <a:avLst/>
-          </a:prstGeom>
-          <a:solidFill>
-            <a:srgbClr val="1A1A1A"/>
-          </a:solidFill>
-          <a:ln>
-            <a:noFill/>
-          </a:ln>
-        </p:spPr>
-        <p:style>
-          <a:lnRef idx="1">
-            <a:schemeClr val="accent1"/>
-          </a:lnRef>
-          <a:fillRef idx="3">
-            <a:schemeClr val="accent1"/>
-          </a:fillRef>
-          <a:effectRef idx="2">
-            <a:schemeClr val="accent1"/>
-          </a:effectRef>
-          <a:fontRef idx="minor">
-            <a:schemeClr val="lt1"/>
-          </a:fontRef>
-        </p:style>
-        <p:txBody>
-          <a:bodyPr rtlCol="0" anchor="ctr"/>
-          <a:lstStyle/>
-          <a:p>
-            <a:pPr algn="ctr"/>
-          </a:p>
-        </p:txBody>
-      </p:sp>
-      <p:grpSpPr/>
-      <p:sp>
-        <p:nvSpPr>
-          <p:cNvPr id="3" name="TextBox 2"/>
-          <p:cNvSpPr txBox="1"/>
-          <p:nvPr/>
-        </p:nvSpPr>
-        <p:spPr>
-          <a:xfrm>
-            <a:off x="1143000" y="457200"/>
-            <a:ext cx="6858000" cy="742950"/>
-          </a:xfrm>
-          <a:prstGeom prst="rect">
-            <a:avLst/>
-          </a:prstGeom>
-          <a:noFill/>
-        </p:spPr>
-        <p:txBody>
-          <a:bodyPr wrap="none">
-            <a:spAutoFit/>
-          </a:bodyPr>
-          <a:lstStyle/>
-          <a:p>
-            <a:pPr>
-              <a:defRPr sz="3200" b="1">
-                <a:solidFill>
-                  <a:srgbClr val="2E86AB"/>
-                </a:solidFill>
-                <a:latin typeface="Inter"/>
-              </a:defRPr>
-            </a:pPr>
-            <a:r>
-              <a:t>Collateral: Business Card</a:t>
-            </a:r>
-          </a:p>
-        </p:txBody>
-      </p:sp>
-      <p:sp>
-        <p:nvSpPr>
-          <p:cNvPr id="4" name="TextBox 3"/>
-          <p:cNvSpPr txBox="1"/>
-          <p:nvPr/>
-        </p:nvSpPr>
-        <p:spPr>
-          <a:xfrm>
-            <a:off x="1143000" y="1943100"/>
-            <a:ext cx="6858000" cy="2971800"/>
-          </a:xfrm>
-          <a:prstGeom prst="rect">
-            <a:avLst/>
-          </a:prstGeom>
-          <a:noFill/>
-        </p:spPr>
-        <p:txBody>
-          <a:bodyPr wrap="square">
-            <a:spAutoFit/>
-          </a:bodyPr>
-          <a:lstStyle/>
-          <a:p>
-            <a:pPr>
-              <a:defRPr sz="1600" b="0">
-                <a:solidFill>
-                  <a:srgbClr val="2E86AB"/>
-                </a:solidFill>
-                <a:latin typeface="Source Sans Pro"/>
-              </a:defRPr>
-            </a:pPr>
-            <a:r>
-              <a:t>Clean, modern design with QR code integration and minimal brand elements</a:t>
-            </a:r>
-          </a:p>
-        </p:txBody>
-      </p:sp>
-      <p:sp>
-        <p:nvSpPr>
-          <p:cNvPr id="5" name="TextBox 4"/>
-          <p:cNvSpPr txBox="1"/>
-          <p:nvPr/>
-        </p:nvSpPr>
-        <p:spPr>
-          <a:xfrm>
-            <a:off x="457200" y="5657850"/>
-            <a:ext cx="4114800" cy="742950"/>
-          </a:xfrm>
-          <a:prstGeom prst="rect">
-            <a:avLst/>
-          </a:prstGeom>
-          <a:noFill/>
-        </p:spPr>
-        <p:txBody>
-          <a:bodyPr wrap="none">
-            <a:spAutoFit/>
-          </a:bodyPr>
-          <a:lstStyle/>
-          <a:p>
-            <a:pPr algn="l">
-              <a:defRPr sz="1000" b="0">
-                <a:solidFill>
-                  <a:srgbClr val="2E86AB"/>
-                </a:solidFill>
-                <a:latin typeface="Source Sans Pro"/>
-              </a:defRPr>
-            </a:pPr>
-            <a:r>
-              <a:t>TechForward Live</a:t>
-            </a:r>
-          </a:p>
-        </p:txBody>
-      </p:sp>
-      <p:sp>
-        <p:nvSpPr>
-          <p:cNvPr id="6" name="TextBox 5"/>
-          <p:cNvSpPr txBox="1"/>
-          <p:nvPr/>
-        </p:nvSpPr>
-        <p:spPr>
-          <a:xfrm>
-            <a:off x="4572000" y="5657850"/>
-            <a:ext cx="4114800" cy="742950"/>
-          </a:xfrm>
-          <a:prstGeom prst="rect">
-            <a:avLst/>
-          </a:prstGeom>
-          <a:noFill/>
-        </p:spPr>
-        <p:txBody>
-          <a:bodyPr wrap="none">
-            <a:spAutoFit/>
-          </a:bodyPr>
-          <a:lstStyle/>
-          <a:p>
-            <a:pPr algn="r">
-              <a:defRPr sz="1000" b="0">
-                <a:solidFill>
-                  <a:srgbClr val="2E86AB"/>
-                </a:solidFill>
-                <a:latin typeface="Source Sans Pro"/>
-              </a:defRPr>
-            </a:pPr>
-            <a:r>
-              <a:t>13</a:t>
-            </a:r>
-          </a:p>
-        </p:txBody>
-      </p:sp>
-    </p:spTree>
-  </p:cSld>
-  <p:clrMapOvr>
-    <a:masterClrMapping/>
-  </p:clrMapOvr>
-</p:sld>
-</file>
-
-<file path=ppt/slides/slide14.xml><?xml version="1.0" encoding="utf-8"?>
-<p:sld xmlns:a="http://schemas.openxmlformats.org/drawingml/2006/main" xmlns:p="http://schemas.openxmlformats.org/presentationml/2006/main" xmlns:r="http://schemas.openxmlformats.org/officeDocument/2006/relationships">
-  <p:cSld>
-    <p:spTree>
-      <p:nvGrpSpPr>
-        <p:cNvPr id="1" name=""/>
-        <p:cNvGrpSpPr/>
-        <p:nvPr/>
-      </p:nvGrpSpPr>
-      <p:sp>
-        <p:nvSpPr>
-          <p:cNvPr id="2" name="Rectangle 1"/>
-          <p:cNvSpPr/>
-          <p:nvPr/>
-        </p:nvSpPr>
-        <p:spPr>
-          <a:xfrm>
-            <a:off x="0" y="0"/>
-            <a:ext cx="9144000" cy="6858000"/>
-          </a:xfrm>
-          <a:prstGeom prst="rect">
-            <a:avLst/>
-          </a:prstGeom>
-          <a:solidFill>
-            <a:srgbClr val="1A1A1A"/>
-          </a:solidFill>
-          <a:ln>
-            <a:noFill/>
-          </a:ln>
-        </p:spPr>
-        <p:style>
-          <a:lnRef idx="1">
-            <a:schemeClr val="accent1"/>
-          </a:lnRef>
-          <a:fillRef idx="3">
-            <a:schemeClr val="accent1"/>
-          </a:fillRef>
-          <a:effectRef idx="2">
-            <a:schemeClr val="accent1"/>
-          </a:effectRef>
-          <a:fontRef idx="minor">
-            <a:schemeClr val="lt1"/>
-          </a:fontRef>
-        </p:style>
-        <p:txBody>
-          <a:bodyPr rtlCol="0" anchor="ctr"/>
-          <a:lstStyle/>
-          <a:p>
-            <a:pPr algn="ctr"/>
-          </a:p>
-        </p:txBody>
-      </p:sp>
-      <p:grpSpPr/>
-      <p:sp>
-        <p:nvSpPr>
-          <p:cNvPr id="3" name="TextBox 2"/>
-          <p:cNvSpPr txBox="1"/>
-          <p:nvPr/>
-        </p:nvSpPr>
-        <p:spPr>
-          <a:xfrm>
-            <a:off x="1143000" y="457200"/>
-            <a:ext cx="6858000" cy="742950"/>
-          </a:xfrm>
-          <a:prstGeom prst="rect">
-            <a:avLst/>
-          </a:prstGeom>
-          <a:noFill/>
-        </p:spPr>
-        <p:txBody>
-          <a:bodyPr wrap="none">
-            <a:spAutoFit/>
-          </a:bodyPr>
-          <a:lstStyle/>
-          <a:p>
-            <a:pPr>
-              <a:defRPr sz="3200" b="1">
-                <a:solidFill>
-                  <a:srgbClr val="2E86AB"/>
-                </a:solidFill>
-                <a:latin typeface="Inter"/>
-              </a:defRPr>
-            </a:pPr>
-            <a:r>
-              <a:t>Collateral: Letterhead</a:t>
-            </a:r>
-          </a:p>
-        </p:txBody>
-      </p:sp>
-      <p:sp>
-        <p:nvSpPr>
-          <p:cNvPr id="4" name="TextBox 3"/>
-          <p:cNvSpPr txBox="1"/>
-          <p:nvPr/>
-        </p:nvSpPr>
-        <p:spPr>
-          <a:xfrm>
-            <a:off x="1143000" y="1943100"/>
-            <a:ext cx="6858000" cy="2971800"/>
-          </a:xfrm>
-          <a:prstGeom prst="rect">
-            <a:avLst/>
-          </a:prstGeom>
-          <a:noFill/>
-        </p:spPr>
-        <p:txBody>
-          <a:bodyPr wrap="square">
-            <a:spAutoFit/>
-          </a:bodyPr>
-          <a:lstStyle/>
-          <a:p>
-            <a:pPr>
-              <a:defRPr sz="1600" b="0">
-                <a:solidFill>
-                  <a:srgbClr val="2E86AB"/>
-                </a:solidFill>
-                <a:latin typeface="Source Sans Pro"/>
-              </a:defRPr>
-            </a:pPr>
-            <a:r>
-              <a:t>Professional header with subtle brand accents and contact information</a:t>
-            </a:r>
-          </a:p>
-        </p:txBody>
-      </p:sp>
-      <p:sp>
-        <p:nvSpPr>
-          <p:cNvPr id="5" name="TextBox 4"/>
-          <p:cNvSpPr txBox="1"/>
-          <p:nvPr/>
-        </p:nvSpPr>
-        <p:spPr>
-          <a:xfrm>
-            <a:off x="457200" y="5657850"/>
-            <a:ext cx="4114800" cy="742950"/>
-          </a:xfrm>
-          <a:prstGeom prst="rect">
-            <a:avLst/>
-          </a:prstGeom>
-          <a:noFill/>
-        </p:spPr>
-        <p:txBody>
-          <a:bodyPr wrap="none">
-            <a:spAutoFit/>
-          </a:bodyPr>
-          <a:lstStyle/>
-          <a:p>
-            <a:pPr algn="l">
-              <a:defRPr sz="1000" b="0">
-                <a:solidFill>
-                  <a:srgbClr val="2E86AB"/>
-                </a:solidFill>
-                <a:latin typeface="Source Sans Pro"/>
-              </a:defRPr>
-            </a:pPr>
-            <a:r>
-              <a:t>TechForward Live</a:t>
-            </a:r>
-          </a:p>
-        </p:txBody>
-      </p:sp>
-      <p:sp>
-        <p:nvSpPr>
-          <p:cNvPr id="6" name="TextBox 5"/>
-          <p:cNvSpPr txBox="1"/>
-          <p:nvPr/>
-        </p:nvSpPr>
-        <p:spPr>
-          <a:xfrm>
-            <a:off x="4572000" y="5657850"/>
-            <a:ext cx="4114800" cy="742950"/>
-          </a:xfrm>
-          <a:prstGeom prst="rect">
-            <a:avLst/>
-          </a:prstGeom>
-          <a:noFill/>
-        </p:spPr>
-        <p:txBody>
-          <a:bodyPr wrap="none">
-            <a:spAutoFit/>
-          </a:bodyPr>
-          <a:lstStyle/>
-          <a:p>
-            <a:pPr algn="r">
-              <a:defRPr sz="1000" b="0">
-                <a:solidFill>
-                  <a:srgbClr val="2E86AB"/>
-                </a:solidFill>
-                <a:latin typeface="Source Sans Pro"/>
-              </a:defRPr>
-            </a:pPr>
-            <a:r>
-              <a:t>14</a:t>
-            </a:r>
-          </a:p>
-        </p:txBody>
-      </p:sp>
-    </p:spTree>
-  </p:cSld>
-  <p:clrMapOvr>
-    <a:masterClrMapping/>
-  </p:clrMapOvr>
-</p:sld>
-</file>
-
 <file path=ppt/slides/slide2.xml><?xml version="1.0" encoding="utf-8"?>
 <p:sld xmlns:a="http://schemas.openxmlformats.org/drawingml/2006/main" xmlns:p="http://schemas.openxmlformats.org/presentationml/2006/main" xmlns:r="http://schemas.openxmlformats.org/officeDocument/2006/relationships">
   <p:cSld>
@@ -4347,7 +3316,7 @@
         <p:spPr>
           <a:xfrm>
             <a:off x="457200" y="1554480"/>
-            <a:ext cx="2011680" cy="274320"/>
+            <a:ext cx="1828800" cy="274320"/>
           </a:xfrm>
           <a:prstGeom prst="rect">
             <a:avLst/>
@@ -4382,7 +3351,7 @@
         </p:nvCxnSpPr>
         <p:spPr>
           <a:xfrm>
-            <a:off x="2560320" y="1664208"/>
+            <a:off x="2331719" y="1664208"/>
             <a:ext cx="365760" cy="0"/>
           </a:xfrm>
           <a:prstGeom prst="line">
@@ -4417,7 +3386,7 @@
         </p:nvSpPr>
         <p:spPr>
           <a:xfrm>
-            <a:off x="3017520" y="1554480"/>
+            <a:off x="2743200" y="1554480"/>
             <a:ext cx="274320" cy="274320"/>
           </a:xfrm>
           <a:prstGeom prst="rect">
@@ -4454,7 +3423,7 @@
         <p:spPr>
           <a:xfrm>
             <a:off x="457200" y="2057400"/>
-            <a:ext cx="2011680" cy="274320"/>
+            <a:ext cx="1828800" cy="274320"/>
           </a:xfrm>
           <a:prstGeom prst="rect">
             <a:avLst/>
@@ -4489,7 +3458,7 @@
         </p:nvCxnSpPr>
         <p:spPr>
           <a:xfrm>
-            <a:off x="2560320" y="2167128"/>
+            <a:off x="2331719" y="2167128"/>
             <a:ext cx="365760" cy="0"/>
           </a:xfrm>
           <a:prstGeom prst="line">
@@ -4524,7 +3493,7 @@
         </p:nvSpPr>
         <p:spPr>
           <a:xfrm>
-            <a:off x="3017520" y="2057400"/>
+            <a:off x="2743200" y="2057400"/>
             <a:ext cx="274320" cy="274320"/>
           </a:xfrm>
           <a:prstGeom prst="rect">
@@ -4561,7 +3530,7 @@
         <p:spPr>
           <a:xfrm>
             <a:off x="457200" y="2560320"/>
-            <a:ext cx="2011680" cy="274320"/>
+            <a:ext cx="1828800" cy="274320"/>
           </a:xfrm>
           <a:prstGeom prst="rect">
             <a:avLst/>
@@ -4583,7 +3552,7 @@
               </a:defRPr>
             </a:pPr>
             <a:r>
-              <a:t>Logo Variations</a:t>
+              <a:t>Brand Story</a:t>
             </a:r>
           </a:p>
         </p:txBody>
@@ -4596,7 +3565,7 @@
         </p:nvCxnSpPr>
         <p:spPr>
           <a:xfrm>
-            <a:off x="2560320" y="2670048"/>
+            <a:off x="2331719" y="2670048"/>
             <a:ext cx="365760" cy="0"/>
           </a:xfrm>
           <a:prstGeom prst="line">
@@ -4631,7 +3600,7 @@
         </p:nvSpPr>
         <p:spPr>
           <a:xfrm>
-            <a:off x="3017520" y="2560320"/>
+            <a:off x="2743200" y="2560320"/>
             <a:ext cx="274320" cy="274320"/>
           </a:xfrm>
           <a:prstGeom prst="rect">
@@ -4667,116 +3636,8 @@
         </p:nvSpPr>
         <p:spPr>
           <a:xfrm>
-            <a:off x="640080" y="2926079"/>
-            <a:ext cx="1828800" cy="228600"/>
-          </a:xfrm>
-          <a:prstGeom prst="rect">
-            <a:avLst/>
-          </a:prstGeom>
-          <a:noFill/>
-        </p:spPr>
-        <p:txBody>
-          <a:bodyPr wrap="none" lIns="0" tIns="0" bIns="0">
-            <a:spAutoFit/>
-          </a:bodyPr>
-          <a:lstStyle/>
-          <a:p>
-            <a:pPr>
-              <a:defRPr sz="900" b="0">
-                <a:solidFill>
-                  <a:srgbClr val="CCCCCC"/>
-                </a:solidFill>
-                <a:latin typeface="Source Sans Pro"/>
-              </a:defRPr>
-            </a:pPr>
-            <a:r>
-              <a:t>Logo Mark</a:t>
-            </a:r>
-          </a:p>
-        </p:txBody>
-      </p:sp>
-      <p:sp>
-        <p:nvSpPr>
-          <p:cNvPr id="14" name="TextBox 13"/>
-          <p:cNvSpPr txBox="1"/>
-          <p:nvPr/>
-        </p:nvSpPr>
-        <p:spPr>
-          <a:xfrm>
-            <a:off x="640080" y="3154679"/>
-            <a:ext cx="1828800" cy="228600"/>
-          </a:xfrm>
-          <a:prstGeom prst="rect">
-            <a:avLst/>
-          </a:prstGeom>
-          <a:noFill/>
-        </p:spPr>
-        <p:txBody>
-          <a:bodyPr wrap="none" lIns="0" tIns="0" bIns="0">
-            <a:spAutoFit/>
-          </a:bodyPr>
-          <a:lstStyle/>
-          <a:p>
-            <a:pPr>
-              <a:defRPr sz="900" b="0">
-                <a:solidFill>
-                  <a:srgbClr val="CCCCCC"/>
-                </a:solidFill>
-                <a:latin typeface="Source Sans Pro"/>
-              </a:defRPr>
-            </a:pPr>
-            <a:r>
-              <a:t>Clear Space</a:t>
-            </a:r>
-          </a:p>
-        </p:txBody>
-      </p:sp>
-      <p:sp>
-        <p:nvSpPr>
-          <p:cNvPr id="15" name="TextBox 14"/>
-          <p:cNvSpPr txBox="1"/>
-          <p:nvPr/>
-        </p:nvSpPr>
-        <p:spPr>
-          <a:xfrm>
-            <a:off x="640080" y="3383279"/>
-            <a:ext cx="1828800" cy="228600"/>
-          </a:xfrm>
-          <a:prstGeom prst="rect">
-            <a:avLst/>
-          </a:prstGeom>
-          <a:noFill/>
-        </p:spPr>
-        <p:txBody>
-          <a:bodyPr wrap="none" lIns="0" tIns="0" bIns="0">
-            <a:spAutoFit/>
-          </a:bodyPr>
-          <a:lstStyle/>
-          <a:p>
-            <a:pPr>
-              <a:defRPr sz="900" b="0">
-                <a:solidFill>
-                  <a:srgbClr val="CCCCCC"/>
-                </a:solidFill>
-                <a:latin typeface="Source Sans Pro"/>
-              </a:defRPr>
-            </a:pPr>
-            <a:r>
-              <a:t>Usage Guidelines</a:t>
-            </a:r>
-          </a:p>
-        </p:txBody>
-      </p:sp>
-      <p:sp>
-        <p:nvSpPr>
-          <p:cNvPr id="16" name="TextBox 15"/>
-          <p:cNvSpPr txBox="1"/>
-          <p:nvPr/>
-        </p:nvSpPr>
-        <p:spPr>
-          <a:xfrm>
-            <a:off x="457200" y="3749039"/>
-            <a:ext cx="2011680" cy="274320"/>
+            <a:off x="3474720" y="1554480"/>
+            <a:ext cx="1828800" cy="274320"/>
           </a:xfrm>
           <a:prstGeom prst="rect">
             <a:avLst/>
@@ -4798,20 +3659,20 @@
               </a:defRPr>
             </a:pPr>
             <a:r>
-              <a:t>Brand Colors</a:t>
+              <a:t>Logo Variations</a:t>
             </a:r>
           </a:p>
         </p:txBody>
       </p:sp>
       <p:cxnSp>
         <p:nvCxnSpPr>
-          <p:cNvPr id="17" name="Connector 16"/>
+          <p:cNvPr id="14" name="Connector 13"/>
           <p:cNvCxnSpPr/>
           <p:nvPr/>
         </p:nvCxnSpPr>
         <p:spPr>
           <a:xfrm>
-            <a:off x="2560320" y="3858767"/>
+            <a:off x="5349239" y="1664208"/>
             <a:ext cx="365760" cy="0"/>
           </a:xfrm>
           <a:prstGeom prst="line">
@@ -4840,13 +3701,13 @@
       </p:cxnSp>
       <p:sp>
         <p:nvSpPr>
-          <p:cNvPr id="18" name="TextBox 17"/>
+          <p:cNvPr id="15" name="TextBox 14"/>
           <p:cNvSpPr txBox="1"/>
           <p:nvPr/>
         </p:nvSpPr>
         <p:spPr>
           <a:xfrm>
-            <a:off x="3017520" y="3749039"/>
+            <a:off x="5760720" y="1554480"/>
             <a:ext cx="274320" cy="274320"/>
           </a:xfrm>
           <a:prstGeom prst="rect">
@@ -4876,13 +3737,13 @@
       </p:sp>
       <p:sp>
         <p:nvSpPr>
-          <p:cNvPr id="19" name="TextBox 18"/>
+          <p:cNvPr id="16" name="TextBox 15"/>
           <p:cNvSpPr txBox="1"/>
           <p:nvPr/>
         </p:nvSpPr>
         <p:spPr>
           <a:xfrm>
-            <a:off x="640080" y="4114800"/>
+            <a:off x="3657600" y="1920240"/>
             <a:ext cx="1828800" cy="228600"/>
           </a:xfrm>
           <a:prstGeom prst="rect">
@@ -4905,20 +3766,20 @@
               </a:defRPr>
             </a:pPr>
             <a:r>
-              <a:t>Primary Colors</a:t>
-            </a:r>
-          </a:p>
-        </p:txBody>
-      </p:sp>
-      <p:sp>
-        <p:nvSpPr>
-          <p:cNvPr id="20" name="TextBox 19"/>
+              <a:t>Logo Mark</a:t>
+            </a:r>
+          </a:p>
+        </p:txBody>
+      </p:sp>
+      <p:sp>
+        <p:nvSpPr>
+          <p:cNvPr id="17" name="TextBox 16"/>
           <p:cNvSpPr txBox="1"/>
           <p:nvPr/>
         </p:nvSpPr>
         <p:spPr>
           <a:xfrm>
-            <a:off x="640080" y="4343400"/>
+            <a:off x="3657600" y="2148840"/>
             <a:ext cx="1828800" cy="228600"/>
           </a:xfrm>
           <a:prstGeom prst="rect">
@@ -4941,20 +3802,20 @@
               </a:defRPr>
             </a:pPr>
             <a:r>
-              <a:t>Secondary Colors</a:t>
-            </a:r>
-          </a:p>
-        </p:txBody>
-      </p:sp>
-      <p:sp>
-        <p:nvSpPr>
-          <p:cNvPr id="21" name="TextBox 20"/>
+              <a:t>Clear Space</a:t>
+            </a:r>
+          </a:p>
+        </p:txBody>
+      </p:sp>
+      <p:sp>
+        <p:nvSpPr>
+          <p:cNvPr id="18" name="TextBox 17"/>
           <p:cNvSpPr txBox="1"/>
           <p:nvPr/>
         </p:nvSpPr>
         <p:spPr>
           <a:xfrm>
-            <a:off x="640080" y="4572000"/>
+            <a:off x="3657600" y="2377440"/>
             <a:ext cx="1828800" cy="228600"/>
           </a:xfrm>
           <a:prstGeom prst="rect">
@@ -4977,21 +3838,21 @@
               </a:defRPr>
             </a:pPr>
             <a:r>
-              <a:t>Color Usage</a:t>
-            </a:r>
-          </a:p>
-        </p:txBody>
-      </p:sp>
-      <p:sp>
-        <p:nvSpPr>
-          <p:cNvPr id="22" name="TextBox 21"/>
+              <a:t>Usage Guidelines</a:t>
+            </a:r>
+          </a:p>
+        </p:txBody>
+      </p:sp>
+      <p:sp>
+        <p:nvSpPr>
+          <p:cNvPr id="19" name="TextBox 18"/>
           <p:cNvSpPr txBox="1"/>
           <p:nvPr/>
         </p:nvSpPr>
         <p:spPr>
           <a:xfrm>
-            <a:off x="3474720" y="1554480"/>
-            <a:ext cx="2011680" cy="274320"/>
+            <a:off x="3474720" y="2743200"/>
+            <a:ext cx="1828800" cy="274320"/>
           </a:xfrm>
           <a:prstGeom prst="rect">
             <a:avLst/>
@@ -5013,20 +3874,20 @@
               </a:defRPr>
             </a:pPr>
             <a:r>
-              <a:t>Typography</a:t>
+              <a:t>Brand Colors</a:t>
             </a:r>
           </a:p>
         </p:txBody>
       </p:sp>
       <p:cxnSp>
         <p:nvCxnSpPr>
-          <p:cNvPr id="23" name="Connector 22"/>
+          <p:cNvPr id="20" name="Connector 19"/>
           <p:cNvCxnSpPr/>
           <p:nvPr/>
         </p:nvCxnSpPr>
         <p:spPr>
           <a:xfrm>
-            <a:off x="5577840" y="1664208"/>
+            <a:off x="5349239" y="2852928"/>
             <a:ext cx="365760" cy="0"/>
           </a:xfrm>
           <a:prstGeom prst="line">
@@ -5055,13 +3916,13 @@
       </p:cxnSp>
       <p:sp>
         <p:nvSpPr>
-          <p:cNvPr id="24" name="TextBox 23"/>
+          <p:cNvPr id="21" name="TextBox 20"/>
           <p:cNvSpPr txBox="1"/>
           <p:nvPr/>
         </p:nvSpPr>
         <p:spPr>
           <a:xfrm>
-            <a:off x="6035040" y="1554480"/>
+            <a:off x="5760720" y="2743200"/>
             <a:ext cx="274320" cy="274320"/>
           </a:xfrm>
           <a:prstGeom prst="rect">
@@ -5091,13 +3952,13 @@
       </p:sp>
       <p:sp>
         <p:nvSpPr>
-          <p:cNvPr id="25" name="TextBox 24"/>
+          <p:cNvPr id="22" name="TextBox 21"/>
           <p:cNvSpPr txBox="1"/>
           <p:nvPr/>
         </p:nvSpPr>
         <p:spPr>
           <a:xfrm>
-            <a:off x="3657600" y="1920240"/>
+            <a:off x="3657600" y="3108960"/>
             <a:ext cx="1828800" cy="228600"/>
           </a:xfrm>
           <a:prstGeom prst="rect">
@@ -5120,20 +3981,20 @@
               </a:defRPr>
             </a:pPr>
             <a:r>
-              <a:t>Brand Font</a:t>
-            </a:r>
-          </a:p>
-        </p:txBody>
-      </p:sp>
-      <p:sp>
-        <p:nvSpPr>
-          <p:cNvPr id="26" name="TextBox 25"/>
+              <a:t>Primary Colors</a:t>
+            </a:r>
+          </a:p>
+        </p:txBody>
+      </p:sp>
+      <p:sp>
+        <p:nvSpPr>
+          <p:cNvPr id="23" name="TextBox 22"/>
           <p:cNvSpPr txBox="1"/>
           <p:nvPr/>
         </p:nvSpPr>
         <p:spPr>
           <a:xfrm>
-            <a:off x="3657600" y="2148840"/>
+            <a:off x="3657600" y="3337560"/>
             <a:ext cx="1828800" cy="228600"/>
           </a:xfrm>
           <a:prstGeom prst="rect">
@@ -5156,20 +4017,20 @@
               </a:defRPr>
             </a:pPr>
             <a:r>
-              <a:t>Font Usage</a:t>
-            </a:r>
-          </a:p>
-        </p:txBody>
-      </p:sp>
-      <p:sp>
-        <p:nvSpPr>
-          <p:cNvPr id="27" name="TextBox 26"/>
+              <a:t>Secondary Colors</a:t>
+            </a:r>
+          </a:p>
+        </p:txBody>
+      </p:sp>
+      <p:sp>
+        <p:nvSpPr>
+          <p:cNvPr id="24" name="TextBox 23"/>
           <p:cNvSpPr txBox="1"/>
           <p:nvPr/>
         </p:nvSpPr>
         <p:spPr>
           <a:xfrm>
-            <a:off x="3657600" y="2377440"/>
+            <a:off x="3657600" y="3566160"/>
             <a:ext cx="1828800" cy="228600"/>
           </a:xfrm>
           <a:prstGeom prst="rect">
@@ -5192,21 +4053,21 @@
               </a:defRPr>
             </a:pPr>
             <a:r>
-              <a:t>Text Hierarchy</a:t>
-            </a:r>
-          </a:p>
-        </p:txBody>
-      </p:sp>
-      <p:sp>
-        <p:nvSpPr>
-          <p:cNvPr id="28" name="TextBox 27"/>
+              <a:t>Color Usage</a:t>
+            </a:r>
+          </a:p>
+        </p:txBody>
+      </p:sp>
+      <p:sp>
+        <p:nvSpPr>
+          <p:cNvPr id="25" name="TextBox 24"/>
           <p:cNvSpPr txBox="1"/>
           <p:nvPr/>
         </p:nvSpPr>
         <p:spPr>
           <a:xfrm>
-            <a:off x="3474720" y="2743200"/>
-            <a:ext cx="2011680" cy="274320"/>
+            <a:off x="3474720" y="3931920"/>
+            <a:ext cx="1828800" cy="274320"/>
           </a:xfrm>
           <a:prstGeom prst="rect">
             <a:avLst/>
@@ -5228,20 +4089,20 @@
               </a:defRPr>
             </a:pPr>
             <a:r>
-              <a:t>Visual Guidelines</a:t>
+              <a:t>Typography</a:t>
             </a:r>
           </a:p>
         </p:txBody>
       </p:sp>
       <p:cxnSp>
         <p:nvCxnSpPr>
-          <p:cNvPr id="29" name="Connector 28"/>
+          <p:cNvPr id="26" name="Connector 25"/>
           <p:cNvCxnSpPr/>
           <p:nvPr/>
         </p:nvCxnSpPr>
         <p:spPr>
           <a:xfrm>
-            <a:off x="5577840" y="2852928"/>
+            <a:off x="5349239" y="4041648"/>
             <a:ext cx="365760" cy="0"/>
           </a:xfrm>
           <a:prstGeom prst="line">
@@ -5270,13 +4131,13 @@
       </p:cxnSp>
       <p:sp>
         <p:nvSpPr>
-          <p:cNvPr id="30" name="TextBox 29"/>
+          <p:cNvPr id="27" name="TextBox 26"/>
           <p:cNvSpPr txBox="1"/>
           <p:nvPr/>
         </p:nvSpPr>
         <p:spPr>
           <a:xfrm>
-            <a:off x="6035040" y="2743200"/>
+            <a:off x="5760720" y="3931920"/>
             <a:ext cx="274320" cy="274320"/>
           </a:xfrm>
           <a:prstGeom prst="rect">
@@ -5306,13 +4167,13 @@
       </p:sp>
       <p:sp>
         <p:nvSpPr>
-          <p:cNvPr id="31" name="TextBox 30"/>
+          <p:cNvPr id="28" name="TextBox 27"/>
           <p:cNvSpPr txBox="1"/>
           <p:nvPr/>
         </p:nvSpPr>
         <p:spPr>
           <a:xfrm>
-            <a:off x="3657600" y="3108960"/>
+            <a:off x="3657600" y="4297680"/>
             <a:ext cx="1828800" cy="228600"/>
           </a:xfrm>
           <a:prstGeom prst="rect">
@@ -5335,20 +4196,20 @@
               </a:defRPr>
             </a:pPr>
             <a:r>
-              <a:t>Visual Style</a:t>
-            </a:r>
-          </a:p>
-        </p:txBody>
-      </p:sp>
-      <p:sp>
-        <p:nvSpPr>
-          <p:cNvPr id="32" name="TextBox 31"/>
+              <a:t>Brand Font</a:t>
+            </a:r>
+          </a:p>
+        </p:txBody>
+      </p:sp>
+      <p:sp>
+        <p:nvSpPr>
+          <p:cNvPr id="29" name="TextBox 28"/>
           <p:cNvSpPr txBox="1"/>
           <p:nvPr/>
         </p:nvSpPr>
         <p:spPr>
           <a:xfrm>
-            <a:off x="3657600" y="3337560"/>
+            <a:off x="3657600" y="4526280"/>
             <a:ext cx="1828800" cy="228600"/>
           </a:xfrm>
           <a:prstGeom prst="rect">
@@ -5371,20 +4232,20 @@
               </a:defRPr>
             </a:pPr>
             <a:r>
-              <a:t>Photography</a:t>
-            </a:r>
-          </a:p>
-        </p:txBody>
-      </p:sp>
-      <p:sp>
-        <p:nvSpPr>
-          <p:cNvPr id="33" name="TextBox 32"/>
+              <a:t>Font Usage</a:t>
+            </a:r>
+          </a:p>
+        </p:txBody>
+      </p:sp>
+      <p:sp>
+        <p:nvSpPr>
+          <p:cNvPr id="30" name="TextBox 29"/>
           <p:cNvSpPr txBox="1"/>
           <p:nvPr/>
         </p:nvSpPr>
         <p:spPr>
           <a:xfrm>
-            <a:off x="3657600" y="3566160"/>
+            <a:off x="3657600" y="4754880"/>
             <a:ext cx="1828800" cy="228600"/>
           </a:xfrm>
           <a:prstGeom prst="rect">
@@ -5407,21 +4268,21 @@
               </a:defRPr>
             </a:pPr>
             <a:r>
-              <a:t>Imagery</a:t>
-            </a:r>
-          </a:p>
-        </p:txBody>
-      </p:sp>
-      <p:sp>
-        <p:nvSpPr>
-          <p:cNvPr id="34" name="TextBox 33"/>
+              <a:t>Text Hierarchy</a:t>
+            </a:r>
+          </a:p>
+        </p:txBody>
+      </p:sp>
+      <p:sp>
+        <p:nvSpPr>
+          <p:cNvPr id="31" name="TextBox 30"/>
           <p:cNvSpPr txBox="1"/>
           <p:nvPr/>
         </p:nvSpPr>
         <p:spPr>
           <a:xfrm>
-            <a:off x="3474720" y="3931920"/>
-            <a:ext cx="2011680" cy="274320"/>
+            <a:off x="6492240" y="1554480"/>
+            <a:ext cx="1828800" cy="274320"/>
           </a:xfrm>
           <a:prstGeom prst="rect">
             <a:avLst/>
@@ -5443,20 +4304,20 @@
               </a:defRPr>
             </a:pPr>
             <a:r>
-              <a:t>Brand Story &amp; Mission</a:t>
+              <a:t>Visual Guidelines</a:t>
             </a:r>
           </a:p>
         </p:txBody>
       </p:sp>
       <p:cxnSp>
         <p:nvCxnSpPr>
-          <p:cNvPr id="35" name="Connector 34"/>
+          <p:cNvPr id="32" name="Connector 31"/>
           <p:cNvCxnSpPr/>
           <p:nvPr/>
         </p:nvCxnSpPr>
         <p:spPr>
           <a:xfrm>
-            <a:off x="5577840" y="4041648"/>
+            <a:off x="8366759" y="1664208"/>
             <a:ext cx="365760" cy="0"/>
           </a:xfrm>
           <a:prstGeom prst="line">
@@ -5485,13 +4346,13 @@
       </p:cxnSp>
       <p:sp>
         <p:nvSpPr>
-          <p:cNvPr id="36" name="TextBox 35"/>
+          <p:cNvPr id="33" name="TextBox 32"/>
           <p:cNvSpPr txBox="1"/>
           <p:nvPr/>
         </p:nvSpPr>
         <p:spPr>
           <a:xfrm>
-            <a:off x="6035040" y="3931920"/>
+            <a:off x="8778240" y="1554480"/>
             <a:ext cx="274320" cy="274320"/>
           </a:xfrm>
           <a:prstGeom prst="rect">
@@ -5521,85 +4382,14 @@
       </p:sp>
       <p:sp>
         <p:nvSpPr>
-          <p:cNvPr id="37" name="TextBox 36"/>
+          <p:cNvPr id="34" name="TextBox 33"/>
           <p:cNvSpPr txBox="1"/>
           <p:nvPr/>
         </p:nvSpPr>
         <p:spPr>
           <a:xfrm>
-            <a:off x="3474720" y="4434840"/>
-            <a:ext cx="2011680" cy="274320"/>
-          </a:xfrm>
-          <a:prstGeom prst="rect">
-            <a:avLst/>
-          </a:prstGeom>
-          <a:noFill/>
-        </p:spPr>
-        <p:txBody>
-          <a:bodyPr wrap="none" lIns="0" rIns="0" tIns="0" bIns="0">
-            <a:spAutoFit/>
-          </a:bodyPr>
-          <a:lstStyle/>
-          <a:p>
-            <a:pPr>
-              <a:defRPr sz="1200" b="1">
-                <a:solidFill>
-                  <a:srgbClr val="FFFFFF"/>
-                </a:solidFill>
-                <a:latin typeface="Source Sans Pro"/>
-              </a:defRPr>
-            </a:pPr>
-            <a:r>
-              <a:t>Brand Voice &amp; Tone</a:t>
-            </a:r>
-          </a:p>
-        </p:txBody>
-      </p:sp>
-      <p:cxnSp>
-        <p:nvCxnSpPr>
-          <p:cNvPr id="38" name="Connector 37"/>
-          <p:cNvCxnSpPr/>
-          <p:nvPr/>
-        </p:nvCxnSpPr>
-        <p:spPr>
-          <a:xfrm>
-            <a:off x="5577840" y="4544568"/>
-            <a:ext cx="365760" cy="0"/>
-          </a:xfrm>
-          <a:prstGeom prst="line">
-            <a:avLst/>
-          </a:prstGeom>
-          <a:ln w="19050">
-            <a:solidFill>
-              <a:srgbClr val="2E86AB"/>
-            </a:solidFill>
-          </a:ln>
-        </p:spPr>
-        <p:style>
-          <a:lnRef idx="2">
-            <a:schemeClr val="accent1"/>
-          </a:lnRef>
-          <a:fillRef idx="0">
-            <a:schemeClr val="accent1"/>
-          </a:fillRef>
-          <a:effectRef idx="1">
-            <a:schemeClr val="accent1"/>
-          </a:effectRef>
-          <a:fontRef idx="minor">
-            <a:schemeClr val="tx1"/>
-          </a:fontRef>
-        </p:style>
-      </p:cxnSp>
-      <p:sp>
-        <p:nvSpPr>
-          <p:cNvPr id="39" name="TextBox 38"/>
-          <p:cNvSpPr txBox="1"/>
-          <p:nvPr/>
-        </p:nvSpPr>
-        <p:spPr>
-          <a:xfrm>
-            <a:off x="6035040" y="4434840"/>
-            <a:ext cx="274320" cy="274320"/>
+            <a:off x="6675120" y="1920240"/>
+            <a:ext cx="1828800" cy="228600"/>
           </a:xfrm>
           <a:prstGeom prst="rect">
             <a:avLst/>
@@ -5613,100 +4403,29 @@
           <a:lstStyle/>
           <a:p>
             <a:pPr>
-              <a:defRPr sz="1200" b="1">
-                <a:solidFill>
-                  <a:srgbClr val="2E86AB"/>
-                </a:solidFill>
-                <a:latin typeface="Source Sans Pro"/>
-              </a:defRPr>
-            </a:pPr>
-            <a:r>
-              <a:t>08</a:t>
-            </a:r>
-          </a:p>
-        </p:txBody>
-      </p:sp>
-      <p:sp>
-        <p:nvSpPr>
-          <p:cNvPr id="40" name="TextBox 39"/>
+              <a:defRPr sz="900" b="0">
+                <a:solidFill>
+                  <a:srgbClr val="CCCCCC"/>
+                </a:solidFill>
+                <a:latin typeface="Source Sans Pro"/>
+              </a:defRPr>
+            </a:pPr>
+            <a:r>
+              <a:t>Visual Style</a:t>
+            </a:r>
+          </a:p>
+        </p:txBody>
+      </p:sp>
+      <p:sp>
+        <p:nvSpPr>
+          <p:cNvPr id="35" name="TextBox 34"/>
           <p:cNvSpPr txBox="1"/>
           <p:nvPr/>
         </p:nvSpPr>
         <p:spPr>
           <a:xfrm>
-            <a:off x="6492240" y="1554480"/>
-            <a:ext cx="2011680" cy="274320"/>
-          </a:xfrm>
-          <a:prstGeom prst="rect">
-            <a:avLst/>
-          </a:prstGeom>
-          <a:noFill/>
-        </p:spPr>
-        <p:txBody>
-          <a:bodyPr wrap="none" lIns="0" rIns="0" tIns="0" bIns="0">
-            <a:spAutoFit/>
-          </a:bodyPr>
-          <a:lstStyle/>
-          <a:p>
-            <a:pPr>
-              <a:defRPr sz="1200" b="1">
-                <a:solidFill>
-                  <a:srgbClr val="FFFFFF"/>
-                </a:solidFill>
-                <a:latin typeface="Source Sans Pro"/>
-              </a:defRPr>
-            </a:pPr>
-            <a:r>
-              <a:t>Messaging &amp; Value Propositions</a:t>
-            </a:r>
-          </a:p>
-        </p:txBody>
-      </p:sp>
-      <p:cxnSp>
-        <p:nvCxnSpPr>
-          <p:cNvPr id="41" name="Connector 40"/>
-          <p:cNvCxnSpPr/>
-          <p:nvPr/>
-        </p:nvCxnSpPr>
-        <p:spPr>
-          <a:xfrm>
-            <a:off x="8595360" y="1664208"/>
-            <a:ext cx="365760" cy="0"/>
-          </a:xfrm>
-          <a:prstGeom prst="line">
-            <a:avLst/>
-          </a:prstGeom>
-          <a:ln w="19050">
-            <a:solidFill>
-              <a:srgbClr val="2E86AB"/>
-            </a:solidFill>
-          </a:ln>
-        </p:spPr>
-        <p:style>
-          <a:lnRef idx="2">
-            <a:schemeClr val="accent1"/>
-          </a:lnRef>
-          <a:fillRef idx="0">
-            <a:schemeClr val="accent1"/>
-          </a:fillRef>
-          <a:effectRef idx="1">
-            <a:schemeClr val="accent1"/>
-          </a:effectRef>
-          <a:fontRef idx="minor">
-            <a:schemeClr val="tx1"/>
-          </a:fontRef>
-        </p:style>
-      </p:cxnSp>
-      <p:sp>
-        <p:nvSpPr>
-          <p:cNvPr id="42" name="TextBox 41"/>
-          <p:cNvSpPr txBox="1"/>
-          <p:nvPr/>
-        </p:nvSpPr>
-        <p:spPr>
-          <a:xfrm>
-            <a:off x="9052560" y="1554480"/>
-            <a:ext cx="274320" cy="274320"/>
+            <a:off x="6675120" y="2148840"/>
+            <a:ext cx="1828800" cy="228600"/>
           </a:xfrm>
           <a:prstGeom prst="rect">
             <a:avLst/>
@@ -5720,100 +4439,29 @@
           <a:lstStyle/>
           <a:p>
             <a:pPr>
-              <a:defRPr sz="1200" b="1">
-                <a:solidFill>
-                  <a:srgbClr val="2E86AB"/>
-                </a:solidFill>
-                <a:latin typeface="Source Sans Pro"/>
-              </a:defRPr>
-            </a:pPr>
-            <a:r>
-              <a:t>09</a:t>
-            </a:r>
-          </a:p>
-        </p:txBody>
-      </p:sp>
-      <p:sp>
-        <p:nvSpPr>
-          <p:cNvPr id="43" name="TextBox 42"/>
+              <a:defRPr sz="900" b="0">
+                <a:solidFill>
+                  <a:srgbClr val="CCCCCC"/>
+                </a:solidFill>
+                <a:latin typeface="Source Sans Pro"/>
+              </a:defRPr>
+            </a:pPr>
+            <a:r>
+              <a:t>Photography</a:t>
+            </a:r>
+          </a:p>
+        </p:txBody>
+      </p:sp>
+      <p:sp>
+        <p:nvSpPr>
+          <p:cNvPr id="36" name="TextBox 35"/>
           <p:cNvSpPr txBox="1"/>
           <p:nvPr/>
         </p:nvSpPr>
         <p:spPr>
           <a:xfrm>
-            <a:off x="6492240" y="2057400"/>
-            <a:ext cx="2011680" cy="274320"/>
-          </a:xfrm>
-          <a:prstGeom prst="rect">
-            <a:avLst/>
-          </a:prstGeom>
-          <a:noFill/>
-        </p:spPr>
-        <p:txBody>
-          <a:bodyPr wrap="none" lIns="0" rIns="0" tIns="0" bIns="0">
-            <a:spAutoFit/>
-          </a:bodyPr>
-          <a:lstStyle/>
-          <a:p>
-            <a:pPr>
-              <a:defRPr sz="1200" b="1">
-                <a:solidFill>
-                  <a:srgbClr val="FFFFFF"/>
-                </a:solidFill>
-                <a:latin typeface="Source Sans Pro"/>
-              </a:defRPr>
-            </a:pPr>
-            <a:r>
-              <a:t>Marketing Copy</a:t>
-            </a:r>
-          </a:p>
-        </p:txBody>
-      </p:sp>
-      <p:cxnSp>
-        <p:nvCxnSpPr>
-          <p:cNvPr id="44" name="Connector 43"/>
-          <p:cNvCxnSpPr/>
-          <p:nvPr/>
-        </p:nvCxnSpPr>
-        <p:spPr>
-          <a:xfrm>
-            <a:off x="8595360" y="2167128"/>
-            <a:ext cx="365760" cy="0"/>
-          </a:xfrm>
-          <a:prstGeom prst="line">
-            <a:avLst/>
-          </a:prstGeom>
-          <a:ln w="19050">
-            <a:solidFill>
-              <a:srgbClr val="2E86AB"/>
-            </a:solidFill>
-          </a:ln>
-        </p:spPr>
-        <p:style>
-          <a:lnRef idx="2">
-            <a:schemeClr val="accent1"/>
-          </a:lnRef>
-          <a:fillRef idx="0">
-            <a:schemeClr val="accent1"/>
-          </a:fillRef>
-          <a:effectRef idx="1">
-            <a:schemeClr val="accent1"/>
-          </a:effectRef>
-          <a:fontRef idx="minor">
-            <a:schemeClr val="tx1"/>
-          </a:fontRef>
-        </p:style>
-      </p:cxnSp>
-      <p:sp>
-        <p:nvSpPr>
-          <p:cNvPr id="45" name="TextBox 44"/>
-          <p:cNvSpPr txBox="1"/>
-          <p:nvPr/>
-        </p:nvSpPr>
-        <p:spPr>
-          <a:xfrm>
-            <a:off x="9052560" y="2057400"/>
-            <a:ext cx="274320" cy="274320"/>
+            <a:off x="6675120" y="2377440"/>
+            <a:ext cx="1828800" cy="228600"/>
           </a:xfrm>
           <a:prstGeom prst="rect">
             <a:avLst/>
@@ -5827,194 +4475,15 @@
           <a:lstStyle/>
           <a:p>
             <a:pPr>
-              <a:defRPr sz="1200" b="1">
-                <a:solidFill>
-                  <a:srgbClr val="2E86AB"/>
-                </a:solidFill>
-                <a:latin typeface="Source Sans Pro"/>
-              </a:defRPr>
-            </a:pPr>
-            <a:r>
-              <a:t>10</a:t>
-            </a:r>
-          </a:p>
-        </p:txBody>
-      </p:sp>
-      <p:sp>
-        <p:nvSpPr>
-          <p:cNvPr id="46" name="TextBox 45"/>
-          <p:cNvSpPr txBox="1"/>
-          <p:nvPr/>
-        </p:nvSpPr>
-        <p:spPr>
-          <a:xfrm>
-            <a:off x="6492240" y="2560320"/>
-            <a:ext cx="2011680" cy="274320"/>
-          </a:xfrm>
-          <a:prstGeom prst="rect">
-            <a:avLst/>
-          </a:prstGeom>
-          <a:noFill/>
-        </p:spPr>
-        <p:txBody>
-          <a:bodyPr wrap="none" lIns="0" rIns="0" tIns="0" bIns="0">
-            <a:spAutoFit/>
-          </a:bodyPr>
-          <a:lstStyle/>
-          <a:p>
-            <a:pPr>
-              <a:defRPr sz="1200" b="1">
-                <a:solidFill>
-                  <a:srgbClr val="FFFFFF"/>
-                </a:solidFill>
-                <a:latin typeface="Source Sans Pro"/>
-              </a:defRPr>
-            </a:pPr>
-            <a:r>
-              <a:t>1Brand Collateral Templates</a:t>
-            </a:r>
-          </a:p>
-        </p:txBody>
-      </p:sp>
-      <p:cxnSp>
-        <p:nvCxnSpPr>
-          <p:cNvPr id="47" name="Connector 46"/>
-          <p:cNvCxnSpPr/>
-          <p:nvPr/>
-        </p:nvCxnSpPr>
-        <p:spPr>
-          <a:xfrm>
-            <a:off x="8595360" y="2670048"/>
-            <a:ext cx="365760" cy="0"/>
-          </a:xfrm>
-          <a:prstGeom prst="line">
-            <a:avLst/>
-          </a:prstGeom>
-          <a:ln w="19050">
-            <a:solidFill>
-              <a:srgbClr val="2E86AB"/>
-            </a:solidFill>
-          </a:ln>
-        </p:spPr>
-        <p:style>
-          <a:lnRef idx="2">
-            <a:schemeClr val="accent1"/>
-          </a:lnRef>
-          <a:fillRef idx="0">
-            <a:schemeClr val="accent1"/>
-          </a:fillRef>
-          <a:effectRef idx="1">
-            <a:schemeClr val="accent1"/>
-          </a:effectRef>
-          <a:fontRef idx="minor">
-            <a:schemeClr val="tx1"/>
-          </a:fontRef>
-        </p:style>
-      </p:cxnSp>
-      <p:sp>
-        <p:nvSpPr>
-          <p:cNvPr id="48" name="TextBox 47"/>
-          <p:cNvSpPr txBox="1"/>
-          <p:nvPr/>
-        </p:nvSpPr>
-        <p:spPr>
-          <a:xfrm>
-            <a:off x="9052560" y="2560320"/>
-            <a:ext cx="274320" cy="274320"/>
-          </a:xfrm>
-          <a:prstGeom prst="rect">
-            <a:avLst/>
-          </a:prstGeom>
-          <a:noFill/>
-        </p:spPr>
-        <p:txBody>
-          <a:bodyPr wrap="none" lIns="0" tIns="0" bIns="0">
-            <a:spAutoFit/>
-          </a:bodyPr>
-          <a:lstStyle/>
-          <a:p>
-            <a:pPr>
-              <a:defRPr sz="1200" b="1">
-                <a:solidFill>
-                  <a:srgbClr val="2E86AB"/>
-                </a:solidFill>
-                <a:latin typeface="Source Sans Pro"/>
-              </a:defRPr>
-            </a:pPr>
-            <a:r>
-              <a:t>11</a:t>
-            </a:r>
-          </a:p>
-        </p:txBody>
-      </p:sp>
-      <p:sp>
-        <p:nvSpPr>
-          <p:cNvPr id="49" name="TextBox 48"/>
-          <p:cNvSpPr txBox="1"/>
-          <p:nvPr/>
-        </p:nvSpPr>
-        <p:spPr>
-          <a:xfrm>
-            <a:off x="457200" y="5657850"/>
-            <a:ext cx="4114800" cy="742950"/>
-          </a:xfrm>
-          <a:prstGeom prst="rect">
-            <a:avLst/>
-          </a:prstGeom>
-          <a:noFill/>
-        </p:spPr>
-        <p:txBody>
-          <a:bodyPr wrap="none">
-            <a:spAutoFit/>
-          </a:bodyPr>
-          <a:lstStyle/>
-          <a:p>
-            <a:pPr algn="l">
-              <a:defRPr sz="1000" b="0">
-                <a:solidFill>
-                  <a:srgbClr val="2E86AB"/>
-                </a:solidFill>
-                <a:latin typeface="Source Sans Pro"/>
-              </a:defRPr>
-            </a:pPr>
-            <a:r>
-              <a:t>TechForward Live</a:t>
-            </a:r>
-          </a:p>
-        </p:txBody>
-      </p:sp>
-      <p:sp>
-        <p:nvSpPr>
-          <p:cNvPr id="50" name="TextBox 49"/>
-          <p:cNvSpPr txBox="1"/>
-          <p:nvPr/>
-        </p:nvSpPr>
-        <p:spPr>
-          <a:xfrm>
-            <a:off x="4572000" y="5657850"/>
-            <a:ext cx="4114800" cy="742950"/>
-          </a:xfrm>
-          <a:prstGeom prst="rect">
-            <a:avLst/>
-          </a:prstGeom>
-          <a:noFill/>
-        </p:spPr>
-        <p:txBody>
-          <a:bodyPr wrap="none">
-            <a:spAutoFit/>
-          </a:bodyPr>
-          <a:lstStyle/>
-          <a:p>
-            <a:pPr algn="r">
-              <a:defRPr sz="1000" b="0">
-                <a:solidFill>
-                  <a:srgbClr val="2E86AB"/>
-                </a:solidFill>
-                <a:latin typeface="Source Sans Pro"/>
-              </a:defRPr>
-            </a:pPr>
-            <a:r>
-              <a:t>2</a:t>
+              <a:defRPr sz="900" b="0">
+                <a:solidFill>
+                  <a:srgbClr val="CCCCCC"/>
+                </a:solidFill>
+                <a:latin typeface="Source Sans Pro"/>
+              </a:defRPr>
+            </a:pPr>
+            <a:r>
+              <a:t>Imagery</a:t>
             </a:r>
           </a:p>
         </p:txBody>
@@ -6510,66 +4979,21 @@
               </a:defRPr>
             </a:pPr>
             <a:r>
-              <a:t>Color Palette</a:t>
-            </a:r>
-          </a:p>
-        </p:txBody>
-      </p:sp>
-      <p:sp>
-        <p:nvSpPr>
-          <p:cNvPr id="4" name="Rectangle 3"/>
-          <p:cNvSpPr/>
+              <a:t>Brand Story</a:t>
+            </a:r>
+          </a:p>
+        </p:txBody>
+      </p:sp>
+      <p:sp>
+        <p:nvSpPr>
+          <p:cNvPr id="4" name="TextBox 3"/>
+          <p:cNvSpPr txBox="1"/>
           <p:nvPr/>
         </p:nvSpPr>
         <p:spPr>
           <a:xfrm>
             <a:off x="1143000" y="1943100"/>
-            <a:ext cx="2057400" cy="1485900"/>
-          </a:xfrm>
-          <a:prstGeom prst="rect">
-            <a:avLst/>
-          </a:prstGeom>
-          <a:solidFill>
-            <a:srgbClr val="2E86AB"/>
-          </a:solidFill>
-          <a:ln w="12700">
-            <a:solidFill>
-              <a:srgbClr val="FFFFFF"/>
-            </a:solidFill>
-          </a:ln>
-        </p:spPr>
-        <p:style>
-          <a:lnRef idx="1">
-            <a:schemeClr val="accent1"/>
-          </a:lnRef>
-          <a:fillRef idx="3">
-            <a:schemeClr val="accent1"/>
-          </a:fillRef>
-          <a:effectRef idx="2">
-            <a:schemeClr val="accent1"/>
-          </a:effectRef>
-          <a:fontRef idx="minor">
-            <a:schemeClr val="lt1"/>
-          </a:fontRef>
-        </p:style>
-        <p:txBody>
-          <a:bodyPr rtlCol="0" anchor="ctr"/>
-          <a:lstStyle/>
-          <a:p>
-            <a:pPr algn="ctr"/>
-          </a:p>
-        </p:txBody>
-      </p:sp>
-      <p:sp>
-        <p:nvSpPr>
-          <p:cNvPr id="5" name="TextBox 4"/>
-          <p:cNvSpPr txBox="1"/>
-          <p:nvPr/>
-        </p:nvSpPr>
-        <p:spPr>
-          <a:xfrm>
-            <a:off x="1143000" y="3429000"/>
-            <a:ext cx="2057400" cy="1485900"/>
+            <a:ext cx="6858000" cy="2971800"/>
           </a:xfrm>
           <a:prstGeom prst="rect">
             <a:avLst/>
@@ -6583,7 +5007,7 @@
           <a:lstStyle/>
           <a:p>
             <a:pPr>
-              <a:defRPr sz="1000" b="0">
+              <a:defRPr sz="1600" b="0">
                 <a:solidFill>
                   <a:srgbClr val="2E86AB"/>
                 </a:solidFill>
@@ -6591,332 +5015,14 @@
               </a:defRPr>
             </a:pPr>
             <a:r>
-              <a:t>Primary</a:t>
-            </a:r>
-          </a:p>
-          <a:p>
-            <a:pPr>
-              <a:defRPr sz="1000" b="0">
-                <a:solidFill>
-                  <a:srgbClr val="2E86AB"/>
-                </a:solidFill>
-                <a:latin typeface="Source Sans Pro"/>
-              </a:defRPr>
-            </a:pPr>
-            <a:r>
-              <a:t>#2E86AB</a:t>
-            </a:r>
-          </a:p>
-          <a:p>
-            <a:pPr>
-              <a:defRPr sz="1000" b="0">
-                <a:solidFill>
-                  <a:srgbClr val="2E86AB"/>
-                </a:solidFill>
-                <a:latin typeface="Source Sans Pro"/>
-              </a:defRPr>
-            </a:pPr>
-            <a:r>
-              <a:t>RGB(46, 134, 171)</a:t>
-            </a:r>
-          </a:p>
-          <a:p>
-            <a:pPr>
-              <a:defRPr sz="1000" b="0">
-                <a:solidFill>
-                  <a:srgbClr val="2E86AB"/>
-                </a:solidFill>
-                <a:latin typeface="Source Sans Pro"/>
-              </a:defRPr>
-            </a:pPr>
-            <a:r>
-              <a:t>CMYK(73, 21, 0, 32)</a:t>
-            </a:r>
-          </a:p>
-          <a:p>
-            <a:pPr>
-              <a:defRPr sz="1000" b="0">
-                <a:solidFill>
-                  <a:srgbClr val="2E86AB"/>
-                </a:solidFill>
-                <a:latin typeface="Source Sans Pro"/>
-              </a:defRPr>
-            </a:pPr>
-            <a:r>
-              <a:t>Use Light Text</a:t>
-            </a:r>
-          </a:p>
-        </p:txBody>
-      </p:sp>
-      <p:sp>
-        <p:nvSpPr>
-          <p:cNvPr id="6" name="Rectangle 5"/>
-          <p:cNvSpPr/>
-          <p:nvPr/>
-        </p:nvSpPr>
-        <p:spPr>
-          <a:xfrm>
-            <a:off x="3886200" y="1943100"/>
-            <a:ext cx="2057400" cy="1485900"/>
-          </a:xfrm>
-          <a:prstGeom prst="rect">
-            <a:avLst/>
-          </a:prstGeom>
-          <a:solidFill>
-            <a:srgbClr val="A23B72"/>
-          </a:solidFill>
-          <a:ln w="12700">
-            <a:solidFill>
-              <a:srgbClr val="FFFFFF"/>
-            </a:solidFill>
-          </a:ln>
-        </p:spPr>
-        <p:style>
-          <a:lnRef idx="1">
-            <a:schemeClr val="accent1"/>
-          </a:lnRef>
-          <a:fillRef idx="3">
-            <a:schemeClr val="accent1"/>
-          </a:fillRef>
-          <a:effectRef idx="2">
-            <a:schemeClr val="accent1"/>
-          </a:effectRef>
-          <a:fontRef idx="minor">
-            <a:schemeClr val="lt1"/>
-          </a:fontRef>
-        </p:style>
-        <p:txBody>
-          <a:bodyPr rtlCol="0" anchor="ctr"/>
-          <a:lstStyle/>
-          <a:p>
-            <a:pPr algn="ctr"/>
-          </a:p>
-        </p:txBody>
-      </p:sp>
-      <p:sp>
-        <p:nvSpPr>
-          <p:cNvPr id="7" name="TextBox 6"/>
-          <p:cNvSpPr txBox="1"/>
-          <p:nvPr/>
-        </p:nvSpPr>
-        <p:spPr>
-          <a:xfrm>
-            <a:off x="3886200" y="3429000"/>
-            <a:ext cx="2057400" cy="1485900"/>
-          </a:xfrm>
-          <a:prstGeom prst="rect">
-            <a:avLst/>
-          </a:prstGeom>
-          <a:noFill/>
-        </p:spPr>
-        <p:txBody>
-          <a:bodyPr wrap="square">
-            <a:spAutoFit/>
-          </a:bodyPr>
-          <a:lstStyle/>
-          <a:p>
-            <a:pPr>
-              <a:defRPr sz="1000" b="0">
-                <a:solidFill>
-                  <a:srgbClr val="2E86AB"/>
-                </a:solidFill>
-                <a:latin typeface="Source Sans Pro"/>
-              </a:defRPr>
-            </a:pPr>
-            <a:r>
-              <a:t>Secondary</a:t>
-            </a:r>
-          </a:p>
-          <a:p>
-            <a:pPr>
-              <a:defRPr sz="1000" b="0">
-                <a:solidFill>
-                  <a:srgbClr val="2E86AB"/>
-                </a:solidFill>
-                <a:latin typeface="Source Sans Pro"/>
-              </a:defRPr>
-            </a:pPr>
-            <a:r>
-              <a:t>#A23B72</a:t>
-            </a:r>
-          </a:p>
-          <a:p>
-            <a:pPr>
-              <a:defRPr sz="1000" b="0">
-                <a:solidFill>
-                  <a:srgbClr val="2E86AB"/>
-                </a:solidFill>
-                <a:latin typeface="Source Sans Pro"/>
-              </a:defRPr>
-            </a:pPr>
-            <a:r>
-              <a:t>RGB(162, 59, 114)</a:t>
-            </a:r>
-          </a:p>
-          <a:p>
-            <a:pPr>
-              <a:defRPr sz="1000" b="0">
-                <a:solidFill>
-                  <a:srgbClr val="2E86AB"/>
-                </a:solidFill>
-                <a:latin typeface="Source Sans Pro"/>
-              </a:defRPr>
-            </a:pPr>
-            <a:r>
-              <a:t>CMYK(0, 63, 29, 36)</a:t>
-            </a:r>
-          </a:p>
-          <a:p>
-            <a:pPr>
-              <a:defRPr sz="1000" b="0">
-                <a:solidFill>
-                  <a:srgbClr val="2E86AB"/>
-                </a:solidFill>
-                <a:latin typeface="Source Sans Pro"/>
-              </a:defRPr>
-            </a:pPr>
-            <a:r>
-              <a:t>Use Light Text</a:t>
-            </a:r>
-          </a:p>
-        </p:txBody>
-      </p:sp>
-      <p:sp>
-        <p:nvSpPr>
-          <p:cNvPr id="8" name="Rectangle 7"/>
-          <p:cNvSpPr/>
-          <p:nvPr/>
-        </p:nvSpPr>
-        <p:spPr>
-          <a:xfrm>
-            <a:off x="6629400" y="1943100"/>
-            <a:ext cx="2057400" cy="1485900"/>
-          </a:xfrm>
-          <a:prstGeom prst="rect">
-            <a:avLst/>
-          </a:prstGeom>
-          <a:solidFill>
-            <a:srgbClr val="F18F01"/>
-          </a:solidFill>
-          <a:ln w="12700">
-            <a:solidFill>
-              <a:srgbClr val="FFFFFF"/>
-            </a:solidFill>
-          </a:ln>
-        </p:spPr>
-        <p:style>
-          <a:lnRef idx="1">
-            <a:schemeClr val="accent1"/>
-          </a:lnRef>
-          <a:fillRef idx="3">
-            <a:schemeClr val="accent1"/>
-          </a:fillRef>
-          <a:effectRef idx="2">
-            <a:schemeClr val="accent1"/>
-          </a:effectRef>
-          <a:fontRef idx="minor">
-            <a:schemeClr val="lt1"/>
-          </a:fontRef>
-        </p:style>
-        <p:txBody>
-          <a:bodyPr rtlCol="0" anchor="ctr"/>
-          <a:lstStyle/>
-          <a:p>
-            <a:pPr algn="ctr"/>
-          </a:p>
-        </p:txBody>
-      </p:sp>
-      <p:sp>
-        <p:nvSpPr>
-          <p:cNvPr id="9" name="TextBox 8"/>
-          <p:cNvSpPr txBox="1"/>
-          <p:nvPr/>
-        </p:nvSpPr>
-        <p:spPr>
-          <a:xfrm>
-            <a:off x="6629400" y="3429000"/>
-            <a:ext cx="2057400" cy="1485900"/>
-          </a:xfrm>
-          <a:prstGeom prst="rect">
-            <a:avLst/>
-          </a:prstGeom>
-          <a:noFill/>
-        </p:spPr>
-        <p:txBody>
-          <a:bodyPr wrap="square">
-            <a:spAutoFit/>
-          </a:bodyPr>
-          <a:lstStyle/>
-          <a:p>
-            <a:pPr>
-              <a:defRPr sz="1000" b="0">
-                <a:solidFill>
-                  <a:srgbClr val="2E86AB"/>
-                </a:solidFill>
-                <a:latin typeface="Source Sans Pro"/>
-              </a:defRPr>
-            </a:pPr>
-            <a:r>
-              <a:t>Accent</a:t>
-            </a:r>
-          </a:p>
-          <a:p>
-            <a:pPr>
-              <a:defRPr sz="1000" b="0">
-                <a:solidFill>
-                  <a:srgbClr val="2E86AB"/>
-                </a:solidFill>
-                <a:latin typeface="Source Sans Pro"/>
-              </a:defRPr>
-            </a:pPr>
-            <a:r>
-              <a:t>#F18F01</a:t>
-            </a:r>
-          </a:p>
-          <a:p>
-            <a:pPr>
-              <a:defRPr sz="1000" b="0">
-                <a:solidFill>
-                  <a:srgbClr val="2E86AB"/>
-                </a:solidFill>
-                <a:latin typeface="Source Sans Pro"/>
-              </a:defRPr>
-            </a:pPr>
-            <a:r>
-              <a:t>RGB(241, 143, 1)</a:t>
-            </a:r>
-          </a:p>
-          <a:p>
-            <a:pPr>
-              <a:defRPr sz="1000" b="0">
-                <a:solidFill>
-                  <a:srgbClr val="2E86AB"/>
-                </a:solidFill>
-                <a:latin typeface="Source Sans Pro"/>
-              </a:defRPr>
-            </a:pPr>
-            <a:r>
-              <a:t>CMYK(0, 40, 99, 5)</a:t>
-            </a:r>
-          </a:p>
-          <a:p>
-            <a:pPr>
-              <a:defRPr sz="1000" b="0">
-                <a:solidFill>
-                  <a:srgbClr val="2E86AB"/>
-                </a:solidFill>
-                <a:latin typeface="Source Sans Pro"/>
-              </a:defRPr>
-            </a:pPr>
-            <a:r>
-              <a:t>Use Dark Text</a:t>
-            </a:r>
-          </a:p>
-        </p:txBody>
-      </p:sp>
-      <p:sp>
-        <p:nvSpPr>
-          <p:cNvPr id="10" name="TextBox 9"/>
+              <a:t>We revolutionize technology through innovative design and human-centered solutions that empower businesses to achieve their digital transformation goals.</a:t>
+            </a:r>
+          </a:p>
+        </p:txBody>
+      </p:sp>
+      <p:sp>
+        <p:nvSpPr>
+          <p:cNvPr id="5" name="TextBox 4"/>
           <p:cNvSpPr txBox="1"/>
           <p:nvPr/>
         </p:nvSpPr>
@@ -6952,7 +5058,7 @@
       </p:sp>
       <p:sp>
         <p:nvSpPr>
-          <p:cNvPr id="11" name="TextBox 10"/>
+          <p:cNvPr id="6" name="TextBox 5"/>
           <p:cNvSpPr txBox="1"/>
           <p:nvPr/>
         </p:nvSpPr>
@@ -7078,21 +5184,420 @@
               </a:defRPr>
             </a:pPr>
             <a:r>
-              <a:t>Typography</a:t>
-            </a:r>
-          </a:p>
-        </p:txBody>
-      </p:sp>
-      <p:sp>
-        <p:nvSpPr>
-          <p:cNvPr id="4" name="TextBox 3"/>
+              <a:t>Color Palette</a:t>
+            </a:r>
+          </a:p>
+        </p:txBody>
+      </p:sp>
+      <p:sp>
+        <p:nvSpPr>
+          <p:cNvPr id="4" name="Rectangle 3"/>
+          <p:cNvSpPr/>
+          <p:nvPr/>
+        </p:nvSpPr>
+        <p:spPr>
+          <a:xfrm>
+            <a:off x="1143000" y="1943100"/>
+            <a:ext cx="2057400" cy="1485900"/>
+          </a:xfrm>
+          <a:prstGeom prst="rect">
+            <a:avLst/>
+          </a:prstGeom>
+          <a:solidFill>
+            <a:srgbClr val="2E86AB"/>
+          </a:solidFill>
+          <a:ln w="12700">
+            <a:solidFill>
+              <a:srgbClr val="FFFFFF"/>
+            </a:solidFill>
+          </a:ln>
+        </p:spPr>
+        <p:style>
+          <a:lnRef idx="1">
+            <a:schemeClr val="accent1"/>
+          </a:lnRef>
+          <a:fillRef idx="3">
+            <a:schemeClr val="accent1"/>
+          </a:fillRef>
+          <a:effectRef idx="2">
+            <a:schemeClr val="accent1"/>
+          </a:effectRef>
+          <a:fontRef idx="minor">
+            <a:schemeClr val="lt1"/>
+          </a:fontRef>
+        </p:style>
+        <p:txBody>
+          <a:bodyPr rtlCol="0" anchor="ctr"/>
+          <a:lstStyle/>
+          <a:p>
+            <a:pPr algn="ctr"/>
+          </a:p>
+        </p:txBody>
+      </p:sp>
+      <p:sp>
+        <p:nvSpPr>
+          <p:cNvPr id="5" name="TextBox 4"/>
           <p:cNvSpPr txBox="1"/>
           <p:nvPr/>
         </p:nvSpPr>
         <p:spPr>
           <a:xfrm>
-            <a:off x="1143000" y="1943100"/>
-            <a:ext cx="3429000" cy="742950"/>
+            <a:off x="1143000" y="3429000"/>
+            <a:ext cx="2057400" cy="1485900"/>
+          </a:xfrm>
+          <a:prstGeom prst="rect">
+            <a:avLst/>
+          </a:prstGeom>
+          <a:noFill/>
+        </p:spPr>
+        <p:txBody>
+          <a:bodyPr wrap="square">
+            <a:spAutoFit/>
+          </a:bodyPr>
+          <a:lstStyle/>
+          <a:p>
+            <a:pPr>
+              <a:defRPr sz="1000" b="0">
+                <a:solidFill>
+                  <a:srgbClr val="2E86AB"/>
+                </a:solidFill>
+                <a:latin typeface="Source Sans Pro"/>
+              </a:defRPr>
+            </a:pPr>
+            <a:r>
+              <a:t>Primary</a:t>
+            </a:r>
+          </a:p>
+          <a:p>
+            <a:pPr>
+              <a:defRPr sz="1000" b="0">
+                <a:solidFill>
+                  <a:srgbClr val="2E86AB"/>
+                </a:solidFill>
+                <a:latin typeface="Source Sans Pro"/>
+              </a:defRPr>
+            </a:pPr>
+            <a:r>
+              <a:t>#2E86AB</a:t>
+            </a:r>
+          </a:p>
+          <a:p>
+            <a:pPr>
+              <a:defRPr sz="1000" b="0">
+                <a:solidFill>
+                  <a:srgbClr val="2E86AB"/>
+                </a:solidFill>
+                <a:latin typeface="Source Sans Pro"/>
+              </a:defRPr>
+            </a:pPr>
+            <a:r>
+              <a:t>RGB(46, 134, 171)</a:t>
+            </a:r>
+          </a:p>
+          <a:p>
+            <a:pPr>
+              <a:defRPr sz="1000" b="0">
+                <a:solidFill>
+                  <a:srgbClr val="2E86AB"/>
+                </a:solidFill>
+                <a:latin typeface="Source Sans Pro"/>
+              </a:defRPr>
+            </a:pPr>
+            <a:r>
+              <a:t>CMYK(73, 21, 0, 32)</a:t>
+            </a:r>
+          </a:p>
+          <a:p>
+            <a:pPr>
+              <a:defRPr sz="1000" b="0">
+                <a:solidFill>
+                  <a:srgbClr val="2E86AB"/>
+                </a:solidFill>
+                <a:latin typeface="Source Sans Pro"/>
+              </a:defRPr>
+            </a:pPr>
+            <a:r>
+              <a:t>Use Light Text</a:t>
+            </a:r>
+          </a:p>
+        </p:txBody>
+      </p:sp>
+      <p:sp>
+        <p:nvSpPr>
+          <p:cNvPr id="6" name="Rectangle 5"/>
+          <p:cNvSpPr/>
+          <p:nvPr/>
+        </p:nvSpPr>
+        <p:spPr>
+          <a:xfrm>
+            <a:off x="3886200" y="1943100"/>
+            <a:ext cx="2057400" cy="1485900"/>
+          </a:xfrm>
+          <a:prstGeom prst="rect">
+            <a:avLst/>
+          </a:prstGeom>
+          <a:solidFill>
+            <a:srgbClr val="A23B72"/>
+          </a:solidFill>
+          <a:ln w="12700">
+            <a:solidFill>
+              <a:srgbClr val="FFFFFF"/>
+            </a:solidFill>
+          </a:ln>
+        </p:spPr>
+        <p:style>
+          <a:lnRef idx="1">
+            <a:schemeClr val="accent1"/>
+          </a:lnRef>
+          <a:fillRef idx="3">
+            <a:schemeClr val="accent1"/>
+          </a:fillRef>
+          <a:effectRef idx="2">
+            <a:schemeClr val="accent1"/>
+          </a:effectRef>
+          <a:fontRef idx="minor">
+            <a:schemeClr val="lt1"/>
+          </a:fontRef>
+        </p:style>
+        <p:txBody>
+          <a:bodyPr rtlCol="0" anchor="ctr"/>
+          <a:lstStyle/>
+          <a:p>
+            <a:pPr algn="ctr"/>
+          </a:p>
+        </p:txBody>
+      </p:sp>
+      <p:sp>
+        <p:nvSpPr>
+          <p:cNvPr id="7" name="TextBox 6"/>
+          <p:cNvSpPr txBox="1"/>
+          <p:nvPr/>
+        </p:nvSpPr>
+        <p:spPr>
+          <a:xfrm>
+            <a:off x="3886200" y="3429000"/>
+            <a:ext cx="2057400" cy="1485900"/>
+          </a:xfrm>
+          <a:prstGeom prst="rect">
+            <a:avLst/>
+          </a:prstGeom>
+          <a:noFill/>
+        </p:spPr>
+        <p:txBody>
+          <a:bodyPr wrap="square">
+            <a:spAutoFit/>
+          </a:bodyPr>
+          <a:lstStyle/>
+          <a:p>
+            <a:pPr>
+              <a:defRPr sz="1000" b="0">
+                <a:solidFill>
+                  <a:srgbClr val="2E86AB"/>
+                </a:solidFill>
+                <a:latin typeface="Source Sans Pro"/>
+              </a:defRPr>
+            </a:pPr>
+            <a:r>
+              <a:t>Secondary</a:t>
+            </a:r>
+          </a:p>
+          <a:p>
+            <a:pPr>
+              <a:defRPr sz="1000" b="0">
+                <a:solidFill>
+                  <a:srgbClr val="2E86AB"/>
+                </a:solidFill>
+                <a:latin typeface="Source Sans Pro"/>
+              </a:defRPr>
+            </a:pPr>
+            <a:r>
+              <a:t>#A23B72</a:t>
+            </a:r>
+          </a:p>
+          <a:p>
+            <a:pPr>
+              <a:defRPr sz="1000" b="0">
+                <a:solidFill>
+                  <a:srgbClr val="2E86AB"/>
+                </a:solidFill>
+                <a:latin typeface="Source Sans Pro"/>
+              </a:defRPr>
+            </a:pPr>
+            <a:r>
+              <a:t>RGB(162, 59, 114)</a:t>
+            </a:r>
+          </a:p>
+          <a:p>
+            <a:pPr>
+              <a:defRPr sz="1000" b="0">
+                <a:solidFill>
+                  <a:srgbClr val="2E86AB"/>
+                </a:solidFill>
+                <a:latin typeface="Source Sans Pro"/>
+              </a:defRPr>
+            </a:pPr>
+            <a:r>
+              <a:t>CMYK(0, 63, 29, 36)</a:t>
+            </a:r>
+          </a:p>
+          <a:p>
+            <a:pPr>
+              <a:defRPr sz="1000" b="0">
+                <a:solidFill>
+                  <a:srgbClr val="2E86AB"/>
+                </a:solidFill>
+                <a:latin typeface="Source Sans Pro"/>
+              </a:defRPr>
+            </a:pPr>
+            <a:r>
+              <a:t>Use Light Text</a:t>
+            </a:r>
+          </a:p>
+        </p:txBody>
+      </p:sp>
+      <p:sp>
+        <p:nvSpPr>
+          <p:cNvPr id="8" name="Rectangle 7"/>
+          <p:cNvSpPr/>
+          <p:nvPr/>
+        </p:nvSpPr>
+        <p:spPr>
+          <a:xfrm>
+            <a:off x="6629400" y="1943100"/>
+            <a:ext cx="2057400" cy="1485900"/>
+          </a:xfrm>
+          <a:prstGeom prst="rect">
+            <a:avLst/>
+          </a:prstGeom>
+          <a:solidFill>
+            <a:srgbClr val="F18F01"/>
+          </a:solidFill>
+          <a:ln w="12700">
+            <a:solidFill>
+              <a:srgbClr val="FFFFFF"/>
+            </a:solidFill>
+          </a:ln>
+        </p:spPr>
+        <p:style>
+          <a:lnRef idx="1">
+            <a:schemeClr val="accent1"/>
+          </a:lnRef>
+          <a:fillRef idx="3">
+            <a:schemeClr val="accent1"/>
+          </a:fillRef>
+          <a:effectRef idx="2">
+            <a:schemeClr val="accent1"/>
+          </a:effectRef>
+          <a:fontRef idx="minor">
+            <a:schemeClr val="lt1"/>
+          </a:fontRef>
+        </p:style>
+        <p:txBody>
+          <a:bodyPr rtlCol="0" anchor="ctr"/>
+          <a:lstStyle/>
+          <a:p>
+            <a:pPr algn="ctr"/>
+          </a:p>
+        </p:txBody>
+      </p:sp>
+      <p:sp>
+        <p:nvSpPr>
+          <p:cNvPr id="9" name="TextBox 8"/>
+          <p:cNvSpPr txBox="1"/>
+          <p:nvPr/>
+        </p:nvSpPr>
+        <p:spPr>
+          <a:xfrm>
+            <a:off x="6629400" y="3429000"/>
+            <a:ext cx="2057400" cy="1485900"/>
+          </a:xfrm>
+          <a:prstGeom prst="rect">
+            <a:avLst/>
+          </a:prstGeom>
+          <a:noFill/>
+        </p:spPr>
+        <p:txBody>
+          <a:bodyPr wrap="square">
+            <a:spAutoFit/>
+          </a:bodyPr>
+          <a:lstStyle/>
+          <a:p>
+            <a:pPr>
+              <a:defRPr sz="1000" b="0">
+                <a:solidFill>
+                  <a:srgbClr val="2E86AB"/>
+                </a:solidFill>
+                <a:latin typeface="Source Sans Pro"/>
+              </a:defRPr>
+            </a:pPr>
+            <a:r>
+              <a:t>Accent</a:t>
+            </a:r>
+          </a:p>
+          <a:p>
+            <a:pPr>
+              <a:defRPr sz="1000" b="0">
+                <a:solidFill>
+                  <a:srgbClr val="2E86AB"/>
+                </a:solidFill>
+                <a:latin typeface="Source Sans Pro"/>
+              </a:defRPr>
+            </a:pPr>
+            <a:r>
+              <a:t>#F18F01</a:t>
+            </a:r>
+          </a:p>
+          <a:p>
+            <a:pPr>
+              <a:defRPr sz="1000" b="0">
+                <a:solidFill>
+                  <a:srgbClr val="2E86AB"/>
+                </a:solidFill>
+                <a:latin typeface="Source Sans Pro"/>
+              </a:defRPr>
+            </a:pPr>
+            <a:r>
+              <a:t>RGB(241, 143, 1)</a:t>
+            </a:r>
+          </a:p>
+          <a:p>
+            <a:pPr>
+              <a:defRPr sz="1000" b="0">
+                <a:solidFill>
+                  <a:srgbClr val="2E86AB"/>
+                </a:solidFill>
+                <a:latin typeface="Source Sans Pro"/>
+              </a:defRPr>
+            </a:pPr>
+            <a:r>
+              <a:t>CMYK(0, 40, 99, 5)</a:t>
+            </a:r>
+          </a:p>
+          <a:p>
+            <a:pPr>
+              <a:defRPr sz="1000" b="0">
+                <a:solidFill>
+                  <a:srgbClr val="2E86AB"/>
+                </a:solidFill>
+                <a:latin typeface="Source Sans Pro"/>
+              </a:defRPr>
+            </a:pPr>
+            <a:r>
+              <a:t>Use Dark Text</a:t>
+            </a:r>
+          </a:p>
+        </p:txBody>
+      </p:sp>
+      <p:sp>
+        <p:nvSpPr>
+          <p:cNvPr id="10" name="TextBox 9"/>
+          <p:cNvSpPr txBox="1"/>
+          <p:nvPr/>
+        </p:nvSpPr>
+        <p:spPr>
+          <a:xfrm>
+            <a:off x="457200" y="5657850"/>
+            <a:ext cx="4114800" cy="742950"/>
           </a:xfrm>
           <a:prstGeom prst="rect">
             <a:avLst/>
@@ -7105,294 +5610,6 @@
           </a:bodyPr>
           <a:lstStyle/>
           <a:p>
-            <a:pPr>
-              <a:defRPr sz="2000" b="0">
-                <a:solidFill>
-                  <a:srgbClr val="2E86AB"/>
-                </a:solidFill>
-                <a:latin typeface="Source Sans Pro"/>
-              </a:defRPr>
-            </a:pPr>
-            <a:r>
-              <a:t>Primary Font: Inter</a:t>
-            </a:r>
-          </a:p>
-        </p:txBody>
-      </p:sp>
-      <p:sp>
-        <p:nvSpPr>
-          <p:cNvPr id="5" name="TextBox 4"/>
-          <p:cNvSpPr txBox="1"/>
-          <p:nvPr/>
-        </p:nvSpPr>
-        <p:spPr>
-          <a:xfrm>
-            <a:off x="1143000" y="2686050"/>
-            <a:ext cx="3429000" cy="742950"/>
-          </a:xfrm>
-          <a:prstGeom prst="rect">
-            <a:avLst/>
-          </a:prstGeom>
-          <a:noFill/>
-        </p:spPr>
-        <p:txBody>
-          <a:bodyPr wrap="none">
-            <a:spAutoFit/>
-          </a:bodyPr>
-          <a:lstStyle/>
-          <a:p>
-            <a:pPr>
-              <a:defRPr sz="3200" b="1">
-                <a:solidFill>
-                  <a:srgbClr val="2E86AB"/>
-                </a:solidFill>
-                <a:latin typeface="Inter"/>
-              </a:defRPr>
-            </a:pPr>
-            <a:r>
-              <a:t>H1 Heading</a:t>
-            </a:r>
-          </a:p>
-        </p:txBody>
-      </p:sp>
-      <p:sp>
-        <p:nvSpPr>
-          <p:cNvPr id="6" name="TextBox 5"/>
-          <p:cNvSpPr txBox="1"/>
-          <p:nvPr/>
-        </p:nvSpPr>
-        <p:spPr>
-          <a:xfrm>
-            <a:off x="1143000" y="3429000"/>
-            <a:ext cx="3429000" cy="742950"/>
-          </a:xfrm>
-          <a:prstGeom prst="rect">
-            <a:avLst/>
-          </a:prstGeom>
-          <a:noFill/>
-        </p:spPr>
-        <p:txBody>
-          <a:bodyPr wrap="none">
-            <a:spAutoFit/>
-          </a:bodyPr>
-          <a:lstStyle/>
-          <a:p>
-            <a:pPr>
-              <a:defRPr sz="2400" b="1">
-                <a:solidFill>
-                  <a:srgbClr val="2E86AB"/>
-                </a:solidFill>
-                <a:latin typeface="Inter"/>
-              </a:defRPr>
-            </a:pPr>
-            <a:r>
-              <a:t>H2 Heading</a:t>
-            </a:r>
-          </a:p>
-        </p:txBody>
-      </p:sp>
-      <p:sp>
-        <p:nvSpPr>
-          <p:cNvPr id="7" name="TextBox 6"/>
-          <p:cNvSpPr txBox="1"/>
-          <p:nvPr/>
-        </p:nvSpPr>
-        <p:spPr>
-          <a:xfrm>
-            <a:off x="1143000" y="4171950"/>
-            <a:ext cx="3429000" cy="742950"/>
-          </a:xfrm>
-          <a:prstGeom prst="rect">
-            <a:avLst/>
-          </a:prstGeom>
-          <a:noFill/>
-        </p:spPr>
-        <p:txBody>
-          <a:bodyPr wrap="none">
-            <a:spAutoFit/>
-          </a:bodyPr>
-          <a:lstStyle/>
-          <a:p>
-            <a:pPr>
-              <a:defRPr sz="2000" b="0">
-                <a:solidFill>
-                  <a:srgbClr val="2E86AB"/>
-                </a:solidFill>
-                <a:latin typeface="Inter"/>
-              </a:defRPr>
-            </a:pPr>
-            <a:r>
-              <a:t>H3 Heading</a:t>
-            </a:r>
-          </a:p>
-        </p:txBody>
-      </p:sp>
-      <p:sp>
-        <p:nvSpPr>
-          <p:cNvPr id="8" name="TextBox 7"/>
-          <p:cNvSpPr txBox="1"/>
-          <p:nvPr/>
-        </p:nvSpPr>
-        <p:spPr>
-          <a:xfrm>
-            <a:off x="5257800" y="1943100"/>
-            <a:ext cx="3429000" cy="742950"/>
-          </a:xfrm>
-          <a:prstGeom prst="rect">
-            <a:avLst/>
-          </a:prstGeom>
-          <a:noFill/>
-        </p:spPr>
-        <p:txBody>
-          <a:bodyPr wrap="none">
-            <a:spAutoFit/>
-          </a:bodyPr>
-          <a:lstStyle/>
-          <a:p>
-            <a:pPr>
-              <a:defRPr sz="2000" b="0">
-                <a:solidFill>
-                  <a:srgbClr val="2E86AB"/>
-                </a:solidFill>
-                <a:latin typeface="Source Sans Pro"/>
-              </a:defRPr>
-            </a:pPr>
-            <a:r>
-              <a:t>Secondary Font: Source Sans Pro</a:t>
-            </a:r>
-          </a:p>
-        </p:txBody>
-      </p:sp>
-      <p:sp>
-        <p:nvSpPr>
-          <p:cNvPr id="9" name="TextBox 8"/>
-          <p:cNvSpPr txBox="1"/>
-          <p:nvPr/>
-        </p:nvSpPr>
-        <p:spPr>
-          <a:xfrm>
-            <a:off x="5257800" y="2686050"/>
-            <a:ext cx="3429000" cy="742950"/>
-          </a:xfrm>
-          <a:prstGeom prst="rect">
-            <a:avLst/>
-          </a:prstGeom>
-          <a:noFill/>
-        </p:spPr>
-        <p:txBody>
-          <a:bodyPr wrap="none">
-            <a:spAutoFit/>
-          </a:bodyPr>
-          <a:lstStyle/>
-          <a:p>
-            <a:pPr>
-              <a:defRPr sz="1600" b="0">
-                <a:solidFill>
-                  <a:srgbClr val="2E86AB"/>
-                </a:solidFill>
-                <a:latin typeface="Source Sans Pro"/>
-              </a:defRPr>
-            </a:pPr>
-            <a:r>
-              <a:t>Body Text</a:t>
-            </a:r>
-          </a:p>
-        </p:txBody>
-      </p:sp>
-      <p:sp>
-        <p:nvSpPr>
-          <p:cNvPr id="10" name="TextBox 9"/>
-          <p:cNvSpPr txBox="1"/>
-          <p:nvPr/>
-        </p:nvSpPr>
-        <p:spPr>
-          <a:xfrm>
-            <a:off x="5257800" y="3429000"/>
-            <a:ext cx="3429000" cy="742950"/>
-          </a:xfrm>
-          <a:prstGeom prst="rect">
-            <a:avLst/>
-          </a:prstGeom>
-          <a:noFill/>
-        </p:spPr>
-        <p:txBody>
-          <a:bodyPr wrap="none">
-            <a:spAutoFit/>
-          </a:bodyPr>
-          <a:lstStyle/>
-          <a:p>
-            <a:pPr>
-              <a:defRPr sz="1600" b="1">
-                <a:solidFill>
-                  <a:srgbClr val="2E86AB"/>
-                </a:solidFill>
-                <a:latin typeface="Source Sans Pro"/>
-              </a:defRPr>
-            </a:pPr>
-            <a:r>
-              <a:t>Body Bold</a:t>
-            </a:r>
-          </a:p>
-        </p:txBody>
-      </p:sp>
-      <p:sp>
-        <p:nvSpPr>
-          <p:cNvPr id="11" name="TextBox 10"/>
-          <p:cNvSpPr txBox="1"/>
-          <p:nvPr/>
-        </p:nvSpPr>
-        <p:spPr>
-          <a:xfrm>
-            <a:off x="5257800" y="4171950"/>
-            <a:ext cx="3429000" cy="742950"/>
-          </a:xfrm>
-          <a:prstGeom prst="rect">
-            <a:avLst/>
-          </a:prstGeom>
-          <a:noFill/>
-        </p:spPr>
-        <p:txBody>
-          <a:bodyPr wrap="none">
-            <a:spAutoFit/>
-          </a:bodyPr>
-          <a:lstStyle/>
-          <a:p>
-            <a:pPr>
-              <a:defRPr sz="1200" b="0">
-                <a:solidFill>
-                  <a:srgbClr val="2E86AB"/>
-                </a:solidFill>
-                <a:latin typeface="Source Sans Pro"/>
-              </a:defRPr>
-            </a:pPr>
-            <a:r>
-              <a:t>Caption Text</a:t>
-            </a:r>
-          </a:p>
-        </p:txBody>
-      </p:sp>
-      <p:sp>
-        <p:nvSpPr>
-          <p:cNvPr id="12" name="TextBox 11"/>
-          <p:cNvSpPr txBox="1"/>
-          <p:nvPr/>
-        </p:nvSpPr>
-        <p:spPr>
-          <a:xfrm>
-            <a:off x="457200" y="5657850"/>
-            <a:ext cx="4114800" cy="742950"/>
-          </a:xfrm>
-          <a:prstGeom prst="rect">
-            <a:avLst/>
-          </a:prstGeom>
-          <a:noFill/>
-        </p:spPr>
-        <p:txBody>
-          <a:bodyPr wrap="none">
-            <a:spAutoFit/>
-          </a:bodyPr>
-          <a:lstStyle/>
-          <a:p>
             <a:pPr algn="l">
               <a:defRPr sz="1000" b="0">
                 <a:solidFill>
@@ -7409,7 +5626,7 @@
       </p:sp>
       <p:sp>
         <p:nvSpPr>
-          <p:cNvPr id="13" name="TextBox 12"/>
+          <p:cNvPr id="11" name="TextBox 10"/>
           <p:cNvSpPr txBox="1"/>
           <p:nvPr/>
         </p:nvSpPr>
@@ -7535,7 +5752,7 @@
               </a:defRPr>
             </a:pPr>
             <a:r>
-              <a:t>Visual &amp; Photography Guidelines</a:t>
+              <a:t>Typography</a:t>
             </a:r>
           </a:p>
         </p:txBody>
@@ -7549,228 +5766,7 @@
         <p:spPr>
           <a:xfrm>
             <a:off x="1143000" y="1943100"/>
-            <a:ext cx="3429000" cy="2971800"/>
-          </a:xfrm>
-          <a:prstGeom prst="rect">
-            <a:avLst/>
-          </a:prstGeom>
-          <a:noFill/>
-        </p:spPr>
-        <p:txBody>
-          <a:bodyPr wrap="square">
-            <a:spAutoFit/>
-          </a:bodyPr>
-          <a:lstStyle/>
-          <a:p>
-            <a:pPr>
-              <a:defRPr sz="1800" b="0">
-                <a:solidFill>
-                  <a:srgbClr val="2E86AB"/>
-                </a:solidFill>
-                <a:latin typeface="Source Sans Pro"/>
-              </a:defRPr>
-            </a:pPr>
-            <a:r>
-              <a:t>Visual Style Guidelines:</a:t>
-            </a:r>
-          </a:p>
-          <a:p>
-            <a:pPr>
-              <a:defRPr sz="1400" b="0">
-                <a:solidFill>
-                  <a:srgbClr val="2E86AB"/>
-                </a:solidFill>
-                <a:latin typeface="Source Sans Pro"/>
-              </a:defRPr>
-            </a:pPr>
-            <a:r>
-              <a:t>• Modern</a:t>
-            </a:r>
-          </a:p>
-          <a:p>
-            <a:pPr>
-              <a:defRPr sz="1400" b="0">
-                <a:solidFill>
-                  <a:srgbClr val="2E86AB"/>
-                </a:solidFill>
-                <a:latin typeface="Source Sans Pro"/>
-              </a:defRPr>
-            </a:pPr>
-            <a:r>
-              <a:t>• clean</a:t>
-            </a:r>
-          </a:p>
-          <a:p>
-            <a:pPr>
-              <a:defRPr sz="1400" b="0">
-                <a:solidFill>
-                  <a:srgbClr val="2E86AB"/>
-                </a:solidFill>
-                <a:latin typeface="Source Sans Pro"/>
-              </a:defRPr>
-            </a:pPr>
-            <a:r>
-              <a:t>• professional</a:t>
-            </a:r>
-          </a:p>
-          <a:p>
-            <a:pPr>
-              <a:defRPr sz="1400" b="0">
-                <a:solidFill>
-                  <a:srgbClr val="2E86AB"/>
-                </a:solidFill>
-                <a:latin typeface="Source Sans Pro"/>
-              </a:defRPr>
-            </a:pPr>
-            <a:r>
-              <a:t>• minimalist</a:t>
-            </a:r>
-          </a:p>
-          <a:p>
-            <a:pPr>
-              <a:defRPr sz="1400" b="0">
-                <a:solidFill>
-                  <a:srgbClr val="2E86AB"/>
-                </a:solidFill>
-                <a:latin typeface="Source Sans Pro"/>
-              </a:defRPr>
-            </a:pPr>
-            <a:r>
-              <a:t>• bold typography</a:t>
-            </a:r>
-          </a:p>
-        </p:txBody>
-      </p:sp>
-      <p:sp>
-        <p:nvSpPr>
-          <p:cNvPr id="5" name="TextBox 4"/>
-          <p:cNvSpPr txBox="1"/>
-          <p:nvPr/>
-        </p:nvSpPr>
-        <p:spPr>
-          <a:xfrm>
-            <a:off x="5257800" y="1943100"/>
-            <a:ext cx="3429000" cy="2971800"/>
-          </a:xfrm>
-          <a:prstGeom prst="rect">
-            <a:avLst/>
-          </a:prstGeom>
-          <a:noFill/>
-        </p:spPr>
-        <p:txBody>
-          <a:bodyPr wrap="square">
-            <a:spAutoFit/>
-          </a:bodyPr>
-          <a:lstStyle/>
-          <a:p>
-            <a:pPr>
-              <a:defRPr sz="1800" b="0">
-                <a:solidFill>
-                  <a:srgbClr val="2E86AB"/>
-                </a:solidFill>
-                <a:latin typeface="Source Sans Pro"/>
-              </a:defRPr>
-            </a:pPr>
-            <a:r>
-              <a:t>Photography Guidelines:</a:t>
-            </a:r>
-          </a:p>
-          <a:p>
-            <a:pPr>
-              <a:defRPr sz="1400" b="0">
-                <a:solidFill>
-                  <a:srgbClr val="2E86AB"/>
-                </a:solidFill>
-                <a:latin typeface="Source Sans Pro"/>
-              </a:defRPr>
-            </a:pPr>
-            <a:r>
-              <a:t>• High contrast</a:t>
-            </a:r>
-          </a:p>
-          <a:p>
-            <a:pPr>
-              <a:defRPr sz="1400" b="0">
-                <a:solidFill>
-                  <a:srgbClr val="2E86AB"/>
-                </a:solidFill>
-                <a:latin typeface="Source Sans Pro"/>
-              </a:defRPr>
-            </a:pPr>
-            <a:r>
-              <a:t>• authentic moments</a:t>
-            </a:r>
-          </a:p>
-          <a:p>
-            <a:pPr>
-              <a:defRPr sz="1400" b="0">
-                <a:solidFill>
-                  <a:srgbClr val="2E86AB"/>
-                </a:solidFill>
-                <a:latin typeface="Source Sans Pro"/>
-              </a:defRPr>
-            </a:pPr>
-            <a:r>
-              <a:t>• natural lighting</a:t>
-            </a:r>
-          </a:p>
-        </p:txBody>
-      </p:sp>
-      <p:sp>
-        <p:nvSpPr>
-          <p:cNvPr id="6" name="Rectangle 5"/>
-          <p:cNvSpPr/>
-          <p:nvPr/>
-        </p:nvSpPr>
-        <p:spPr>
-          <a:xfrm>
-            <a:off x="5257800" y="4914900"/>
-            <a:ext cx="685800" cy="742950"/>
-          </a:xfrm>
-          <a:prstGeom prst="rect">
-            <a:avLst/>
-          </a:prstGeom>
-          <a:solidFill>
-            <a:srgbClr val="404040"/>
-          </a:solidFill>
-          <a:ln w="12700">
-            <a:solidFill>
-              <a:srgbClr val="808080"/>
-            </a:solidFill>
-          </a:ln>
-        </p:spPr>
-        <p:style>
-          <a:lnRef idx="1">
-            <a:schemeClr val="accent1"/>
-          </a:lnRef>
-          <a:fillRef idx="3">
-            <a:schemeClr val="accent1"/>
-          </a:fillRef>
-          <a:effectRef idx="2">
-            <a:schemeClr val="accent1"/>
-          </a:effectRef>
-          <a:fontRef idx="minor">
-            <a:schemeClr val="lt1"/>
-          </a:fontRef>
-        </p:style>
-        <p:txBody>
-          <a:bodyPr rtlCol="0" anchor="ctr"/>
-          <a:lstStyle/>
-          <a:p>
-            <a:pPr algn="ctr"/>
-          </a:p>
-        </p:txBody>
-      </p:sp>
-      <p:sp>
-        <p:nvSpPr>
-          <p:cNvPr id="7" name="TextBox 6"/>
-          <p:cNvSpPr txBox="1"/>
-          <p:nvPr/>
-        </p:nvSpPr>
-        <p:spPr>
-          <a:xfrm>
-            <a:off x="5257800" y="5162550"/>
-            <a:ext cx="685800" cy="247650"/>
+            <a:ext cx="3429000" cy="742950"/>
           </a:xfrm>
           <a:prstGeom prst="rect">
             <a:avLst/>
@@ -7783,8 +5779,8 @@
           </a:bodyPr>
           <a:lstStyle/>
           <a:p>
-            <a:pPr algn="ctr">
-              <a:defRPr sz="800" b="0">
+            <a:pPr>
+              <a:defRPr sz="2000" b="0">
                 <a:solidFill>
                   <a:srgbClr val="2E86AB"/>
                 </a:solidFill>
@@ -7792,66 +5788,21 @@
               </a:defRPr>
             </a:pPr>
             <a:r>
-              <a:t>Example</a:t>
-            </a:r>
-          </a:p>
-        </p:txBody>
-      </p:sp>
-      <p:sp>
-        <p:nvSpPr>
-          <p:cNvPr id="8" name="Rectangle 7"/>
-          <p:cNvSpPr/>
-          <p:nvPr/>
-        </p:nvSpPr>
-        <p:spPr>
-          <a:xfrm>
-            <a:off x="6629400" y="4914900"/>
-            <a:ext cx="685800" cy="742950"/>
-          </a:xfrm>
-          <a:prstGeom prst="rect">
-            <a:avLst/>
-          </a:prstGeom>
-          <a:solidFill>
-            <a:srgbClr val="404040"/>
-          </a:solidFill>
-          <a:ln w="12700">
-            <a:solidFill>
-              <a:srgbClr val="808080"/>
-            </a:solidFill>
-          </a:ln>
-        </p:spPr>
-        <p:style>
-          <a:lnRef idx="1">
-            <a:schemeClr val="accent1"/>
-          </a:lnRef>
-          <a:fillRef idx="3">
-            <a:schemeClr val="accent1"/>
-          </a:fillRef>
-          <a:effectRef idx="2">
-            <a:schemeClr val="accent1"/>
-          </a:effectRef>
-          <a:fontRef idx="minor">
-            <a:schemeClr val="lt1"/>
-          </a:fontRef>
-        </p:style>
-        <p:txBody>
-          <a:bodyPr rtlCol="0" anchor="ctr"/>
-          <a:lstStyle/>
-          <a:p>
-            <a:pPr algn="ctr"/>
-          </a:p>
-        </p:txBody>
-      </p:sp>
-      <p:sp>
-        <p:nvSpPr>
-          <p:cNvPr id="9" name="TextBox 8"/>
+              <a:t>Primary Font: Inter</a:t>
+            </a:r>
+          </a:p>
+        </p:txBody>
+      </p:sp>
+      <p:sp>
+        <p:nvSpPr>
+          <p:cNvPr id="5" name="TextBox 4"/>
           <p:cNvSpPr txBox="1"/>
           <p:nvPr/>
         </p:nvSpPr>
         <p:spPr>
           <a:xfrm>
-            <a:off x="6629400" y="5162550"/>
-            <a:ext cx="685800" cy="247650"/>
+            <a:off x="1143000" y="2686050"/>
+            <a:ext cx="3429000" cy="742950"/>
           </a:xfrm>
           <a:prstGeom prst="rect">
             <a:avLst/>
@@ -7864,75 +5815,30 @@
           </a:bodyPr>
           <a:lstStyle/>
           <a:p>
-            <a:pPr algn="ctr">
-              <a:defRPr sz="800" b="0">
+            <a:pPr>
+              <a:defRPr sz="3200" b="1">
                 <a:solidFill>
                   <a:srgbClr val="2E86AB"/>
                 </a:solidFill>
-                <a:latin typeface="Source Sans Pro"/>
-              </a:defRPr>
-            </a:pPr>
-            <a:r>
-              <a:t>Example</a:t>
-            </a:r>
-          </a:p>
-        </p:txBody>
-      </p:sp>
-      <p:sp>
-        <p:nvSpPr>
-          <p:cNvPr id="10" name="Rectangle 9"/>
-          <p:cNvSpPr/>
-          <p:nvPr/>
-        </p:nvSpPr>
-        <p:spPr>
-          <a:xfrm>
-            <a:off x="8001000" y="4914900"/>
-            <a:ext cx="685800" cy="742950"/>
-          </a:xfrm>
-          <a:prstGeom prst="rect">
-            <a:avLst/>
-          </a:prstGeom>
-          <a:solidFill>
-            <a:srgbClr val="404040"/>
-          </a:solidFill>
-          <a:ln w="12700">
-            <a:solidFill>
-              <a:srgbClr val="808080"/>
-            </a:solidFill>
-          </a:ln>
-        </p:spPr>
-        <p:style>
-          <a:lnRef idx="1">
-            <a:schemeClr val="accent1"/>
-          </a:lnRef>
-          <a:fillRef idx="3">
-            <a:schemeClr val="accent1"/>
-          </a:fillRef>
-          <a:effectRef idx="2">
-            <a:schemeClr val="accent1"/>
-          </a:effectRef>
-          <a:fontRef idx="minor">
-            <a:schemeClr val="lt1"/>
-          </a:fontRef>
-        </p:style>
-        <p:txBody>
-          <a:bodyPr rtlCol="0" anchor="ctr"/>
-          <a:lstStyle/>
-          <a:p>
-            <a:pPr algn="ctr"/>
-          </a:p>
-        </p:txBody>
-      </p:sp>
-      <p:sp>
-        <p:nvSpPr>
-          <p:cNvPr id="11" name="TextBox 10"/>
+                <a:latin typeface="Inter"/>
+              </a:defRPr>
+            </a:pPr>
+            <a:r>
+              <a:t>H1 Heading</a:t>
+            </a:r>
+          </a:p>
+        </p:txBody>
+      </p:sp>
+      <p:sp>
+        <p:nvSpPr>
+          <p:cNvPr id="6" name="TextBox 5"/>
           <p:cNvSpPr txBox="1"/>
           <p:nvPr/>
         </p:nvSpPr>
         <p:spPr>
           <a:xfrm>
-            <a:off x="8001000" y="5162550"/>
-            <a:ext cx="685800" cy="247650"/>
+            <a:off x="1143000" y="3429000"/>
+            <a:ext cx="3429000" cy="742950"/>
           </a:xfrm>
           <a:prstGeom prst="rect">
             <a:avLst/>
@@ -7945,16 +5851,196 @@
           </a:bodyPr>
           <a:lstStyle/>
           <a:p>
-            <a:pPr algn="ctr">
-              <a:defRPr sz="800" b="0">
+            <a:pPr>
+              <a:defRPr sz="2400" b="1">
                 <a:solidFill>
                   <a:srgbClr val="2E86AB"/>
                 </a:solidFill>
-                <a:latin typeface="Source Sans Pro"/>
-              </a:defRPr>
-            </a:pPr>
-            <a:r>
-              <a:t>Example</a:t>
+                <a:latin typeface="Inter"/>
+              </a:defRPr>
+            </a:pPr>
+            <a:r>
+              <a:t>H2 Heading</a:t>
+            </a:r>
+          </a:p>
+        </p:txBody>
+      </p:sp>
+      <p:sp>
+        <p:nvSpPr>
+          <p:cNvPr id="7" name="TextBox 6"/>
+          <p:cNvSpPr txBox="1"/>
+          <p:nvPr/>
+        </p:nvSpPr>
+        <p:spPr>
+          <a:xfrm>
+            <a:off x="1143000" y="4171950"/>
+            <a:ext cx="3429000" cy="742950"/>
+          </a:xfrm>
+          <a:prstGeom prst="rect">
+            <a:avLst/>
+          </a:prstGeom>
+          <a:noFill/>
+        </p:spPr>
+        <p:txBody>
+          <a:bodyPr wrap="none">
+            <a:spAutoFit/>
+          </a:bodyPr>
+          <a:lstStyle/>
+          <a:p>
+            <a:pPr>
+              <a:defRPr sz="2000" b="0">
+                <a:solidFill>
+                  <a:srgbClr val="2E86AB"/>
+                </a:solidFill>
+                <a:latin typeface="Inter"/>
+              </a:defRPr>
+            </a:pPr>
+            <a:r>
+              <a:t>H3 Heading</a:t>
+            </a:r>
+          </a:p>
+        </p:txBody>
+      </p:sp>
+      <p:sp>
+        <p:nvSpPr>
+          <p:cNvPr id="8" name="TextBox 7"/>
+          <p:cNvSpPr txBox="1"/>
+          <p:nvPr/>
+        </p:nvSpPr>
+        <p:spPr>
+          <a:xfrm>
+            <a:off x="5257800" y="1943100"/>
+            <a:ext cx="3429000" cy="742950"/>
+          </a:xfrm>
+          <a:prstGeom prst="rect">
+            <a:avLst/>
+          </a:prstGeom>
+          <a:noFill/>
+        </p:spPr>
+        <p:txBody>
+          <a:bodyPr wrap="none">
+            <a:spAutoFit/>
+          </a:bodyPr>
+          <a:lstStyle/>
+          <a:p>
+            <a:pPr>
+              <a:defRPr sz="2000" b="0">
+                <a:solidFill>
+                  <a:srgbClr val="2E86AB"/>
+                </a:solidFill>
+                <a:latin typeface="Source Sans Pro"/>
+              </a:defRPr>
+            </a:pPr>
+            <a:r>
+              <a:t>Secondary Font: Source Sans Pro</a:t>
+            </a:r>
+          </a:p>
+        </p:txBody>
+      </p:sp>
+      <p:sp>
+        <p:nvSpPr>
+          <p:cNvPr id="9" name="TextBox 8"/>
+          <p:cNvSpPr txBox="1"/>
+          <p:nvPr/>
+        </p:nvSpPr>
+        <p:spPr>
+          <a:xfrm>
+            <a:off x="5257800" y="2686050"/>
+            <a:ext cx="3429000" cy="742950"/>
+          </a:xfrm>
+          <a:prstGeom prst="rect">
+            <a:avLst/>
+          </a:prstGeom>
+          <a:noFill/>
+        </p:spPr>
+        <p:txBody>
+          <a:bodyPr wrap="none">
+            <a:spAutoFit/>
+          </a:bodyPr>
+          <a:lstStyle/>
+          <a:p>
+            <a:pPr>
+              <a:defRPr sz="1600" b="0">
+                <a:solidFill>
+                  <a:srgbClr val="2E86AB"/>
+                </a:solidFill>
+                <a:latin typeface="Source Sans Pro"/>
+              </a:defRPr>
+            </a:pPr>
+            <a:r>
+              <a:t>Body Text</a:t>
+            </a:r>
+          </a:p>
+        </p:txBody>
+      </p:sp>
+      <p:sp>
+        <p:nvSpPr>
+          <p:cNvPr id="10" name="TextBox 9"/>
+          <p:cNvSpPr txBox="1"/>
+          <p:nvPr/>
+        </p:nvSpPr>
+        <p:spPr>
+          <a:xfrm>
+            <a:off x="5257800" y="3429000"/>
+            <a:ext cx="3429000" cy="742950"/>
+          </a:xfrm>
+          <a:prstGeom prst="rect">
+            <a:avLst/>
+          </a:prstGeom>
+          <a:noFill/>
+        </p:spPr>
+        <p:txBody>
+          <a:bodyPr wrap="none">
+            <a:spAutoFit/>
+          </a:bodyPr>
+          <a:lstStyle/>
+          <a:p>
+            <a:pPr>
+              <a:defRPr sz="1600" b="1">
+                <a:solidFill>
+                  <a:srgbClr val="2E86AB"/>
+                </a:solidFill>
+                <a:latin typeface="Source Sans Pro"/>
+              </a:defRPr>
+            </a:pPr>
+            <a:r>
+              <a:t>Body Bold</a:t>
+            </a:r>
+          </a:p>
+        </p:txBody>
+      </p:sp>
+      <p:sp>
+        <p:nvSpPr>
+          <p:cNvPr id="11" name="TextBox 10"/>
+          <p:cNvSpPr txBox="1"/>
+          <p:nvPr/>
+        </p:nvSpPr>
+        <p:spPr>
+          <a:xfrm>
+            <a:off x="5257800" y="4171950"/>
+            <a:ext cx="3429000" cy="742950"/>
+          </a:xfrm>
+          <a:prstGeom prst="rect">
+            <a:avLst/>
+          </a:prstGeom>
+          <a:noFill/>
+        </p:spPr>
+        <p:txBody>
+          <a:bodyPr wrap="none">
+            <a:spAutoFit/>
+          </a:bodyPr>
+          <a:lstStyle/>
+          <a:p>
+            <a:pPr>
+              <a:defRPr sz="1200" b="0">
+                <a:solidFill>
+                  <a:srgbClr val="2E86AB"/>
+                </a:solidFill>
+                <a:latin typeface="Source Sans Pro"/>
+              </a:defRPr>
+            </a:pPr>
+            <a:r>
+              <a:t>Caption Text</a:t>
             </a:r>
           </a:p>
         </p:txBody>
@@ -8123,7 +6209,7 @@
               </a:defRPr>
             </a:pPr>
             <a:r>
-              <a:t>Brand Story &amp; Mission</a:t>
+              <a:t>Visual &amp; Photography Guidelines</a:t>
             </a:r>
           </a:p>
         </p:txBody>
@@ -8137,7 +6223,7 @@
         <p:spPr>
           <a:xfrm>
             <a:off x="1143000" y="1943100"/>
-            <a:ext cx="6858000" cy="2971800"/>
+            <a:ext cx="3429000" cy="2971800"/>
           </a:xfrm>
           <a:prstGeom prst="rect">
             <a:avLst/>
@@ -8151,7 +6237,7 @@
           <a:lstStyle/>
           <a:p>
             <a:pPr>
-              <a:defRPr sz="1600" b="0">
+              <a:defRPr sz="1800" b="0">
                 <a:solidFill>
                   <a:srgbClr val="2E86AB"/>
                 </a:solidFill>
@@ -8159,7 +6245,72 @@
               </a:defRPr>
             </a:pPr>
             <a:r>
-              <a:t>We revolutionize technology through innovative design and human-centered solutions that empower businesses to achieve their digital transformation goals.</a:t>
+              <a:t>Visual Style Guidelines:</a:t>
+            </a:r>
+          </a:p>
+          <a:p>
+            <a:pPr>
+              <a:defRPr sz="1400" b="0">
+                <a:solidFill>
+                  <a:srgbClr val="2E86AB"/>
+                </a:solidFill>
+                <a:latin typeface="Source Sans Pro"/>
+              </a:defRPr>
+            </a:pPr>
+            <a:r>
+              <a:t>• Modern</a:t>
+            </a:r>
+          </a:p>
+          <a:p>
+            <a:pPr>
+              <a:defRPr sz="1400" b="0">
+                <a:solidFill>
+                  <a:srgbClr val="2E86AB"/>
+                </a:solidFill>
+                <a:latin typeface="Source Sans Pro"/>
+              </a:defRPr>
+            </a:pPr>
+            <a:r>
+              <a:t>• clean</a:t>
+            </a:r>
+          </a:p>
+          <a:p>
+            <a:pPr>
+              <a:defRPr sz="1400" b="0">
+                <a:solidFill>
+                  <a:srgbClr val="2E86AB"/>
+                </a:solidFill>
+                <a:latin typeface="Source Sans Pro"/>
+              </a:defRPr>
+            </a:pPr>
+            <a:r>
+              <a:t>• professional</a:t>
+            </a:r>
+          </a:p>
+          <a:p>
+            <a:pPr>
+              <a:defRPr sz="1400" b="0">
+                <a:solidFill>
+                  <a:srgbClr val="2E86AB"/>
+                </a:solidFill>
+                <a:latin typeface="Source Sans Pro"/>
+              </a:defRPr>
+            </a:pPr>
+            <a:r>
+              <a:t>• minimalist</a:t>
+            </a:r>
+          </a:p>
+          <a:p>
+            <a:pPr>
+              <a:defRPr sz="1400" b="0">
+                <a:solidFill>
+                  <a:srgbClr val="2E86AB"/>
+                </a:solidFill>
+                <a:latin typeface="Source Sans Pro"/>
+              </a:defRPr>
+            </a:pPr>
+            <a:r>
+              <a:t>• bold typography</a:t>
             </a:r>
           </a:p>
         </p:txBody>
@@ -8172,8 +6323,8 @@
         </p:nvSpPr>
         <p:spPr>
           <a:xfrm>
-            <a:off x="457200" y="5657850"/>
-            <a:ext cx="4114800" cy="742950"/>
+            <a:off x="5257800" y="1943100"/>
+            <a:ext cx="3429000" cy="2971800"/>
           </a:xfrm>
           <a:prstGeom prst="rect">
             <a:avLst/>
@@ -8181,13 +6332,13 @@
           <a:noFill/>
         </p:spPr>
         <p:txBody>
-          <a:bodyPr wrap="none">
+          <a:bodyPr wrap="square">
             <a:spAutoFit/>
           </a:bodyPr>
           <a:lstStyle/>
           <a:p>
-            <a:pPr algn="l">
-              <a:defRPr sz="1000" b="0">
+            <a:pPr>
+              <a:defRPr sz="1800" b="0">
                 <a:solidFill>
                   <a:srgbClr val="2E86AB"/>
                 </a:solidFill>
@@ -8195,35 +6346,12 @@
               </a:defRPr>
             </a:pPr>
             <a:r>
-              <a:t>TechForward Live</a:t>
-            </a:r>
-          </a:p>
-        </p:txBody>
-      </p:sp>
-      <p:sp>
-        <p:nvSpPr>
-          <p:cNvPr id="6" name="TextBox 5"/>
-          <p:cNvSpPr txBox="1"/>
-          <p:nvPr/>
-        </p:nvSpPr>
-        <p:spPr>
-          <a:xfrm>
-            <a:off x="4572000" y="5657850"/>
-            <a:ext cx="4114800" cy="742950"/>
-          </a:xfrm>
-          <a:prstGeom prst="rect">
-            <a:avLst/>
-          </a:prstGeom>
-          <a:noFill/>
-        </p:spPr>
-        <p:txBody>
-          <a:bodyPr wrap="none">
-            <a:spAutoFit/>
-          </a:bodyPr>
-          <a:lstStyle/>
-          <a:p>
-            <a:pPr algn="r">
-              <a:defRPr sz="1000" b="0">
+              <a:t>Photography Guidelines:</a:t>
+            </a:r>
+          </a:p>
+          <a:p>
+            <a:pPr>
+              <a:defRPr sz="1400" b="0">
                 <a:solidFill>
                   <a:srgbClr val="2E86AB"/>
                 </a:solidFill>
@@ -8231,47 +6359,58 @@
               </a:defRPr>
             </a:pPr>
             <a:r>
-              <a:t>8</a:t>
-            </a:r>
-          </a:p>
-        </p:txBody>
-      </p:sp>
-    </p:spTree>
-  </p:cSld>
-  <p:clrMapOvr>
-    <a:masterClrMapping/>
-  </p:clrMapOvr>
-</p:sld>
-</file>
-
-<file path=ppt/slides/slide9.xml><?xml version="1.0" encoding="utf-8"?>
-<p:sld xmlns:a="http://schemas.openxmlformats.org/drawingml/2006/main" xmlns:p="http://schemas.openxmlformats.org/presentationml/2006/main" xmlns:r="http://schemas.openxmlformats.org/officeDocument/2006/relationships">
-  <p:cSld>
-    <p:spTree>
-      <p:nvGrpSpPr>
-        <p:cNvPr id="1" name=""/>
-        <p:cNvGrpSpPr/>
-        <p:nvPr/>
-      </p:nvGrpSpPr>
-      <p:sp>
-        <p:nvSpPr>
-          <p:cNvPr id="2" name="Rectangle 1"/>
+              <a:t>• High contrast</a:t>
+            </a:r>
+          </a:p>
+          <a:p>
+            <a:pPr>
+              <a:defRPr sz="1400" b="0">
+                <a:solidFill>
+                  <a:srgbClr val="2E86AB"/>
+                </a:solidFill>
+                <a:latin typeface="Source Sans Pro"/>
+              </a:defRPr>
+            </a:pPr>
+            <a:r>
+              <a:t>• authentic moments</a:t>
+            </a:r>
+          </a:p>
+          <a:p>
+            <a:pPr>
+              <a:defRPr sz="1400" b="0">
+                <a:solidFill>
+                  <a:srgbClr val="2E86AB"/>
+                </a:solidFill>
+                <a:latin typeface="Source Sans Pro"/>
+              </a:defRPr>
+            </a:pPr>
+            <a:r>
+              <a:t>• natural lighting</a:t>
+            </a:r>
+          </a:p>
+        </p:txBody>
+      </p:sp>
+      <p:sp>
+        <p:nvSpPr>
+          <p:cNvPr id="6" name="Rectangle 5"/>
           <p:cNvSpPr/>
           <p:nvPr/>
         </p:nvSpPr>
         <p:spPr>
           <a:xfrm>
-            <a:off x="0" y="0"/>
-            <a:ext cx="9144000" cy="6858000"/>
+            <a:off x="5257800" y="4914900"/>
+            <a:ext cx="685800" cy="742950"/>
           </a:xfrm>
           <a:prstGeom prst="rect">
             <a:avLst/>
           </a:prstGeom>
           <a:solidFill>
-            <a:srgbClr val="1A1A1A"/>
+            <a:srgbClr val="404040"/>
           </a:solidFill>
-          <a:ln>
-            <a:noFill/>
+          <a:ln w="12700">
+            <a:solidFill>
+              <a:srgbClr val="808080"/>
+            </a:solidFill>
           </a:ln>
         </p:spPr>
         <p:style>
@@ -8296,17 +6435,16 @@
           </a:p>
         </p:txBody>
       </p:sp>
-      <p:grpSpPr/>
-      <p:sp>
-        <p:nvSpPr>
-          <p:cNvPr id="3" name="TextBox 2"/>
+      <p:sp>
+        <p:nvSpPr>
+          <p:cNvPr id="7" name="TextBox 6"/>
           <p:cNvSpPr txBox="1"/>
           <p:nvPr/>
         </p:nvSpPr>
         <p:spPr>
           <a:xfrm>
-            <a:off x="1143000" y="457200"/>
-            <a:ext cx="6858000" cy="742950"/>
+            <a:off x="5257800" y="5162550"/>
+            <a:ext cx="685800" cy="247650"/>
           </a:xfrm>
           <a:prstGeom prst="rect">
             <a:avLst/>
@@ -8319,66 +6457,75 @@
           </a:bodyPr>
           <a:lstStyle/>
           <a:p>
-            <a:pPr>
-              <a:defRPr sz="3200" b="1">
+            <a:pPr algn="ctr">
+              <a:defRPr sz="800" b="0">
                 <a:solidFill>
                   <a:srgbClr val="2E86AB"/>
                 </a:solidFill>
-                <a:latin typeface="Inter"/>
-              </a:defRPr>
-            </a:pPr>
-            <a:r>
-              <a:t>Brand Voice &amp; Tone</a:t>
-            </a:r>
-          </a:p>
-        </p:txBody>
-      </p:sp>
-      <p:sp>
-        <p:nvSpPr>
-          <p:cNvPr id="4" name="TextBox 3"/>
+                <a:latin typeface="Source Sans Pro"/>
+              </a:defRPr>
+            </a:pPr>
+            <a:r>
+              <a:t>Example</a:t>
+            </a:r>
+          </a:p>
+        </p:txBody>
+      </p:sp>
+      <p:sp>
+        <p:nvSpPr>
+          <p:cNvPr id="8" name="Rectangle 7"/>
+          <p:cNvSpPr/>
+          <p:nvPr/>
+        </p:nvSpPr>
+        <p:spPr>
+          <a:xfrm>
+            <a:off x="6629400" y="4914900"/>
+            <a:ext cx="685800" cy="742950"/>
+          </a:xfrm>
+          <a:prstGeom prst="rect">
+            <a:avLst/>
+          </a:prstGeom>
+          <a:solidFill>
+            <a:srgbClr val="404040"/>
+          </a:solidFill>
+          <a:ln w="12700">
+            <a:solidFill>
+              <a:srgbClr val="808080"/>
+            </a:solidFill>
+          </a:ln>
+        </p:spPr>
+        <p:style>
+          <a:lnRef idx="1">
+            <a:schemeClr val="accent1"/>
+          </a:lnRef>
+          <a:fillRef idx="3">
+            <a:schemeClr val="accent1"/>
+          </a:fillRef>
+          <a:effectRef idx="2">
+            <a:schemeClr val="accent1"/>
+          </a:effectRef>
+          <a:fontRef idx="minor">
+            <a:schemeClr val="lt1"/>
+          </a:fontRef>
+        </p:style>
+        <p:txBody>
+          <a:bodyPr rtlCol="0" anchor="ctr"/>
+          <a:lstStyle/>
+          <a:p>
+            <a:pPr algn="ctr"/>
+          </a:p>
+        </p:txBody>
+      </p:sp>
+      <p:sp>
+        <p:nvSpPr>
+          <p:cNvPr id="9" name="TextBox 8"/>
           <p:cNvSpPr txBox="1"/>
           <p:nvPr/>
         </p:nvSpPr>
         <p:spPr>
           <a:xfrm>
-            <a:off x="1143000" y="1943100"/>
-            <a:ext cx="6858000" cy="2971800"/>
-          </a:xfrm>
-          <a:prstGeom prst="rect">
-            <a:avLst/>
-          </a:prstGeom>
-          <a:noFill/>
-        </p:spPr>
-        <p:txBody>
-          <a:bodyPr wrap="square">
-            <a:spAutoFit/>
-          </a:bodyPr>
-          <a:lstStyle/>
-          <a:p>
-            <a:pPr>
-              <a:defRPr sz="1600" b="0">
-                <a:solidFill>
-                  <a:srgbClr val="2E86AB"/>
-                </a:solidFill>
-                <a:latin typeface="Source Sans Pro"/>
-              </a:defRPr>
-            </a:pPr>
-            <a:r>
-              <a:t>Professional yet approachable, confident, innovative, and human-centered with a focus on clarity and trust.</a:t>
-            </a:r>
-          </a:p>
-        </p:txBody>
-      </p:sp>
-      <p:sp>
-        <p:nvSpPr>
-          <p:cNvPr id="5" name="TextBox 4"/>
-          <p:cNvSpPr txBox="1"/>
-          <p:nvPr/>
-        </p:nvSpPr>
-        <p:spPr>
-          <a:xfrm>
-            <a:off x="457200" y="5657850"/>
-            <a:ext cx="4114800" cy="742950"/>
+            <a:off x="6629400" y="5162550"/>
+            <a:ext cx="685800" cy="247650"/>
           </a:xfrm>
           <a:prstGeom prst="rect">
             <a:avLst/>
@@ -8391,8 +6538,8 @@
           </a:bodyPr>
           <a:lstStyle/>
           <a:p>
-            <a:pPr algn="l">
-              <a:defRPr sz="1000" b="0">
+            <a:pPr algn="ctr">
+              <a:defRPr sz="800" b="0">
                 <a:solidFill>
                   <a:srgbClr val="2E86AB"/>
                 </a:solidFill>
@@ -8400,21 +6547,66 @@
               </a:defRPr>
             </a:pPr>
             <a:r>
-              <a:t>TechForward Live</a:t>
-            </a:r>
-          </a:p>
-        </p:txBody>
-      </p:sp>
-      <p:sp>
-        <p:nvSpPr>
-          <p:cNvPr id="6" name="TextBox 5"/>
+              <a:t>Example</a:t>
+            </a:r>
+          </a:p>
+        </p:txBody>
+      </p:sp>
+      <p:sp>
+        <p:nvSpPr>
+          <p:cNvPr id="10" name="Rectangle 9"/>
+          <p:cNvSpPr/>
+          <p:nvPr/>
+        </p:nvSpPr>
+        <p:spPr>
+          <a:xfrm>
+            <a:off x="8001000" y="4914900"/>
+            <a:ext cx="685800" cy="742950"/>
+          </a:xfrm>
+          <a:prstGeom prst="rect">
+            <a:avLst/>
+          </a:prstGeom>
+          <a:solidFill>
+            <a:srgbClr val="404040"/>
+          </a:solidFill>
+          <a:ln w="12700">
+            <a:solidFill>
+              <a:srgbClr val="808080"/>
+            </a:solidFill>
+          </a:ln>
+        </p:spPr>
+        <p:style>
+          <a:lnRef idx="1">
+            <a:schemeClr val="accent1"/>
+          </a:lnRef>
+          <a:fillRef idx="3">
+            <a:schemeClr val="accent1"/>
+          </a:fillRef>
+          <a:effectRef idx="2">
+            <a:schemeClr val="accent1"/>
+          </a:effectRef>
+          <a:fontRef idx="minor">
+            <a:schemeClr val="lt1"/>
+          </a:fontRef>
+        </p:style>
+        <p:txBody>
+          <a:bodyPr rtlCol="0" anchor="ctr"/>
+          <a:lstStyle/>
+          <a:p>
+            <a:pPr algn="ctr"/>
+          </a:p>
+        </p:txBody>
+      </p:sp>
+      <p:sp>
+        <p:nvSpPr>
+          <p:cNvPr id="11" name="TextBox 10"/>
           <p:cNvSpPr txBox="1"/>
           <p:nvPr/>
         </p:nvSpPr>
         <p:spPr>
           <a:xfrm>
-            <a:off x="4572000" y="5657850"/>
-            <a:ext cx="4114800" cy="742950"/>
+            <a:off x="8001000" y="5162550"/>
+            <a:ext cx="685800" cy="247650"/>
           </a:xfrm>
           <a:prstGeom prst="rect">
             <a:avLst/>
@@ -8427,6 +6619,78 @@
           </a:bodyPr>
           <a:lstStyle/>
           <a:p>
+            <a:pPr algn="ctr">
+              <a:defRPr sz="800" b="0">
+                <a:solidFill>
+                  <a:srgbClr val="2E86AB"/>
+                </a:solidFill>
+                <a:latin typeface="Source Sans Pro"/>
+              </a:defRPr>
+            </a:pPr>
+            <a:r>
+              <a:t>Example</a:t>
+            </a:r>
+          </a:p>
+        </p:txBody>
+      </p:sp>
+      <p:sp>
+        <p:nvSpPr>
+          <p:cNvPr id="12" name="TextBox 11"/>
+          <p:cNvSpPr txBox="1"/>
+          <p:nvPr/>
+        </p:nvSpPr>
+        <p:spPr>
+          <a:xfrm>
+            <a:off x="457200" y="5657850"/>
+            <a:ext cx="4114800" cy="742950"/>
+          </a:xfrm>
+          <a:prstGeom prst="rect">
+            <a:avLst/>
+          </a:prstGeom>
+          <a:noFill/>
+        </p:spPr>
+        <p:txBody>
+          <a:bodyPr wrap="none">
+            <a:spAutoFit/>
+          </a:bodyPr>
+          <a:lstStyle/>
+          <a:p>
+            <a:pPr algn="l">
+              <a:defRPr sz="1000" b="0">
+                <a:solidFill>
+                  <a:srgbClr val="2E86AB"/>
+                </a:solidFill>
+                <a:latin typeface="Source Sans Pro"/>
+              </a:defRPr>
+            </a:pPr>
+            <a:r>
+              <a:t>TechForward Live</a:t>
+            </a:r>
+          </a:p>
+        </p:txBody>
+      </p:sp>
+      <p:sp>
+        <p:nvSpPr>
+          <p:cNvPr id="13" name="TextBox 12"/>
+          <p:cNvSpPr txBox="1"/>
+          <p:nvPr/>
+        </p:nvSpPr>
+        <p:spPr>
+          <a:xfrm>
+            <a:off x="4572000" y="5657850"/>
+            <a:ext cx="4114800" cy="742950"/>
+          </a:xfrm>
+          <a:prstGeom prst="rect">
+            <a:avLst/>
+          </a:prstGeom>
+          <a:noFill/>
+        </p:spPr>
+        <p:txBody>
+          <a:bodyPr wrap="none">
+            <a:spAutoFit/>
+          </a:bodyPr>
+          <a:lstStyle/>
+          <a:p>
             <a:pPr algn="r">
               <a:defRPr sz="1000" b="0">
                 <a:solidFill>
@@ -8436,7 +6700,7 @@
               </a:defRPr>
             </a:pPr>
             <a:r>
-              <a:t>9</a:t>
+              <a:t>8</a:t>
             </a:r>
           </a:p>
         </p:txBody>

--- a/output/techforward_live/techforward_live_enhanced_brand_book.pptx
+++ b/output/techforward_live/techforward_live_enhanced_brand_book.pptx
@@ -3128,7 +3128,7 @@
             <a:pPr algn="ctr">
               <a:defRPr sz="3600" b="1">
                 <a:solidFill>
-                  <a:srgbClr val="2E86AB"/>
+                  <a:srgbClr val="FFFFFF"/>
                 </a:solidFill>
                 <a:latin typeface="Inter"/>
               </a:defRPr>

--- a/output/techforward_live/techforward_live_enhanced_brand_book.pptx
+++ b/output/techforward_live/techforward_live_enhanced_brand_book.pptx
@@ -4522,8 +4522,146 @@
         </p:nvSpPr>
         <p:spPr>
           <a:xfrm>
-            <a:off x="1143000" y="457200"/>
-            <a:ext cx="6858000" cy="742950"/>
+            <a:off x="800100" y="1051560"/>
+            <a:ext cx="6858000" cy="2971800"/>
+          </a:xfrm>
+          <a:prstGeom prst="rect">
+            <a:avLst/>
+          </a:prstGeom>
+          <a:noFill/>
+        </p:spPr>
+        <p:txBody>
+          <a:bodyPr wrap="square" lIns="0" rIns="0" tIns="0" bIns="0">
+            <a:spAutoFit/>
+          </a:bodyPr>
+          <a:lstStyle/>
+          <a:p>
+            <a:pPr algn="l">
+              <a:spcAft>
+                <a:spcPts val="800"/>
+              </a:spcAft>
+              <a:defRPr sz="2000" b="0">
+                <a:solidFill>
+                  <a:srgbClr val="FFFFFF"/>
+                </a:solidFill>
+                <a:latin typeface="Source Sans Pro"/>
+              </a:defRPr>
+            </a:pPr>
+            <a:r>
+              <a:t>The following brand identity system for TechForward Live</a:t>
+            </a:r>
+          </a:p>
+          <a:p>
+            <a:pPr algn="l">
+              <a:spcAft>
+                <a:spcPts val="800"/>
+              </a:spcAft>
+              <a:defRPr sz="2000" b="0">
+                <a:solidFill>
+                  <a:srgbClr val="FFFFFF"/>
+                </a:solidFill>
+                <a:latin typeface="Source Sans Pro"/>
+              </a:defRPr>
+            </a:pPr>
+            <a:r>
+              <a:t>is thoughtfully crafted to present our brand in</a:t>
+            </a:r>
+          </a:p>
+          <a:p>
+            <a:pPr algn="l">
+              <a:spcAft>
+                <a:spcPts val="800"/>
+              </a:spcAft>
+              <a:defRPr sz="2000" b="0">
+                <a:solidFill>
+                  <a:srgbClr val="FFFFFF"/>
+                </a:solidFill>
+                <a:latin typeface="Source Sans Pro"/>
+              </a:defRPr>
+            </a:pPr>
+            <a:r>
+              <a:t>an international, engaging, consistent, recognisable</a:t>
+            </a:r>
+          </a:p>
+          <a:p>
+            <a:pPr algn="l">
+              <a:spcAft>
+                <a:spcPts val="800"/>
+              </a:spcAft>
+              <a:defRPr sz="2000" b="0">
+                <a:solidFill>
+                  <a:srgbClr val="FFFFFF"/>
+                </a:solidFill>
+                <a:latin typeface="Source Sans Pro"/>
+              </a:defRPr>
+            </a:pPr>
+            <a:r>
+              <a:t>and proprietary way. Unique in form, versatile in its</a:t>
+            </a:r>
+          </a:p>
+          <a:p>
+            <a:pPr algn="l">
+              <a:spcAft>
+                <a:spcPts val="800"/>
+              </a:spcAft>
+              <a:defRPr sz="2000" b="0">
+                <a:solidFill>
+                  <a:srgbClr val="FFFFFF"/>
+                </a:solidFill>
+                <a:latin typeface="Source Sans Pro"/>
+              </a:defRPr>
+            </a:pPr>
+            <a:r>
+              <a:t>application and unified by a fundamental principle.</a:t>
+            </a:r>
+          </a:p>
+        </p:txBody>
+      </p:sp>
+      <p:cxnSp>
+        <p:nvCxnSpPr>
+          <p:cNvPr id="3" name="Connector 2"/>
+          <p:cNvCxnSpPr/>
+          <p:nvPr/>
+        </p:nvCxnSpPr>
+        <p:spPr>
+          <a:xfrm>
+            <a:off x="457200" y="4914900.0"/>
+            <a:ext cx="8229600" cy="0.0"/>
+          </a:xfrm>
+          <a:prstGeom prst="line">
+            <a:avLst/>
+          </a:prstGeom>
+          <a:ln w="25400">
+            <a:solidFill>
+              <a:srgbClr val="2E86AB"/>
+            </a:solidFill>
+          </a:ln>
+        </p:spPr>
+        <p:style>
+          <a:lnRef idx="2">
+            <a:schemeClr val="accent1"/>
+          </a:lnRef>
+          <a:fillRef idx="0">
+            <a:schemeClr val="accent1"/>
+          </a:fillRef>
+          <a:effectRef idx="1">
+            <a:schemeClr val="accent1"/>
+          </a:effectRef>
+          <a:fontRef idx="minor">
+            <a:schemeClr val="tx1"/>
+          </a:fontRef>
+        </p:style>
+      </p:cxnSp>
+      <p:sp>
+        <p:nvSpPr>
+          <p:cNvPr id="4" name="TextBox 3"/>
+          <p:cNvSpPr txBox="1"/>
+          <p:nvPr/>
+        </p:nvSpPr>
+        <p:spPr>
+          <a:xfrm>
+            <a:off x="800100" y="5189220"/>
+            <a:ext cx="3657600" cy="731520"/>
           </a:xfrm>
           <a:prstGeom prst="rect">
             <a:avLst/>
@@ -4536,8 +4674,8 @@
           </a:bodyPr>
           <a:lstStyle/>
           <a:p>
-            <a:pPr algn="ctr">
-              <a:defRPr sz="3200" b="1">
+            <a:pPr algn="l">
+              <a:defRPr sz="2800" b="1">
                 <a:solidFill>
                   <a:srgbClr val="2E86AB"/>
                 </a:solidFill>
@@ -4545,89 +4683,7 @@
               </a:defRPr>
             </a:pPr>
             <a:r>
-              <a:t>Introduction</a:t>
-            </a:r>
-          </a:p>
-        </p:txBody>
-      </p:sp>
-      <p:sp>
-        <p:nvSpPr>
-          <p:cNvPr id="3" name="TextBox 2"/>
-          <p:cNvSpPr txBox="1"/>
-          <p:nvPr/>
-        </p:nvSpPr>
-        <p:spPr>
-          <a:xfrm>
-            <a:off x="1828800" y="1943100"/>
-            <a:ext cx="5486400" cy="2971800"/>
-          </a:xfrm>
-          <a:prstGeom prst="rect">
-            <a:avLst/>
-          </a:prstGeom>
-          <a:noFill/>
-        </p:spPr>
-        <p:txBody>
-          <a:bodyPr wrap="square">
-            <a:spAutoFit/>
-          </a:bodyPr>
-          <a:lstStyle/>
-          <a:p>
-            <a:pPr algn="ctr">
-              <a:defRPr sz="1800" b="0">
-                <a:solidFill>
-                  <a:srgbClr val="FFFFFF"/>
-                </a:solidFill>
-                <a:latin typeface="Source Sans Pro"/>
-              </a:defRPr>
-            </a:pPr>
-            <a:r>
-              <a:t>Welcome to the TechForward Live Brand Book.</a:t>
-            </a:r>
-          </a:p>
-          <a:p>
-            <a:pPr algn="ctr">
-              <a:defRPr sz="1800" b="0">
-                <a:solidFill>
-                  <a:srgbClr val="FFFFFF"/>
-                </a:solidFill>
-                <a:latin typeface="Source Sans Pro"/>
-              </a:defRPr>
-            </a:pPr>
-          </a:p>
-          <a:p>
-            <a:pPr algn="ctr">
-              <a:defRPr sz="1800" b="0">
-                <a:solidFill>
-                  <a:srgbClr val="FFFFFF"/>
-                </a:solidFill>
-                <a:latin typeface="Source Sans Pro"/>
-              </a:defRPr>
-            </a:pPr>
-            <a:r>
-              <a:t>This comprehensive guide outlines our brand identity, values, and visual standards to ensure consistent brand representation across all touchpoints.</a:t>
-            </a:r>
-          </a:p>
-          <a:p>
-            <a:pPr algn="ctr">
-              <a:defRPr sz="1800" b="0">
-                <a:solidFill>
-                  <a:srgbClr val="FFFFFF"/>
-                </a:solidFill>
-                <a:latin typeface="Source Sans Pro"/>
-              </a:defRPr>
-            </a:pPr>
-          </a:p>
-          <a:p>
-            <a:pPr algn="ctr">
-              <a:defRPr sz="1800" b="0">
-                <a:solidFill>
-                  <a:srgbClr val="FFFFFF"/>
-                </a:solidFill>
-                <a:latin typeface="Source Sans Pro"/>
-              </a:defRPr>
-            </a:pPr>
-            <a:r>
-              <a:t>Our mission is to serve Progressive businesses seeking digital transformation and innovation with excellence and innovation.</a:t>
+              <a:t>INTRODUCTION</a:t>
             </a:r>
           </a:p>
         </p:txBody>

--- a/output/techforward_live/techforward_live_enhanced_brand_book.pptx
+++ b/output/techforward_live/techforward_live_enhanced_brand_book.pptx
@@ -4580,7 +4580,7 @@
               </a:defRPr>
             </a:pPr>
             <a:r>
-              <a:t>an international, engaging, consistent, recognisable</a:t>
+              <a:t>an international, engaging, consistent, recognizable</a:t>
             </a:r>
           </a:p>
           <a:p>
@@ -4612,7 +4612,7 @@
               </a:defRPr>
             </a:pPr>
             <a:r>
-              <a:t>application and unified by a fundamental principle.</a:t>
+              <a:t>application and unified by our fundamental principles.</a:t>
             </a:r>
           </a:p>
         </p:txBody>
@@ -4722,8 +4722,249 @@
         </p:nvSpPr>
         <p:spPr>
           <a:xfrm>
-            <a:off x="1143000" y="457200"/>
-            <a:ext cx="6858000" cy="742950"/>
+            <a:off x="800100" y="1051560"/>
+            <a:ext cx="6858000" cy="2971800"/>
+          </a:xfrm>
+          <a:prstGeom prst="rect">
+            <a:avLst/>
+          </a:prstGeom>
+          <a:noFill/>
+        </p:spPr>
+        <p:txBody>
+          <a:bodyPr wrap="square" lIns="0" rIns="0" tIns="0" bIns="0">
+            <a:spAutoFit/>
+          </a:bodyPr>
+          <a:lstStyle/>
+          <a:p>
+            <a:pPr algn="l">
+              <a:spcAft>
+                <a:spcPts val="800"/>
+              </a:spcAft>
+              <a:defRPr sz="2000" b="0">
+                <a:solidFill>
+                  <a:srgbClr val="FFFFFF"/>
+                </a:solidFill>
+                <a:latin typeface="Source Sans Pro"/>
+              </a:defRPr>
+            </a:pPr>
+            <a:r>
+              <a:t>Vision: To be the preferred partner for businesses seeking excellence and innovation in their field.</a:t>
+            </a:r>
+          </a:p>
+          <a:p>
+            <a:pPr algn="l">
+              <a:spcAft>
+                <a:spcPts val="800"/>
+              </a:spcAft>
+              <a:defRPr sz="2000" b="0">
+                <a:solidFill>
+                  <a:srgbClr val="FFFFFF"/>
+                </a:solidFill>
+                <a:latin typeface="Source Sans Pro"/>
+              </a:defRPr>
+            </a:pPr>
+          </a:p>
+          <a:p>
+            <a:pPr algn="l">
+              <a:spcAft>
+                <a:spcPts val="800"/>
+              </a:spcAft>
+              <a:defRPr sz="2000" b="0">
+                <a:solidFill>
+                  <a:srgbClr val="FFFFFF"/>
+                </a:solidFill>
+                <a:latin typeface="Source Sans Pro"/>
+              </a:defRPr>
+            </a:pPr>
+            <a:r>
+              <a:t>Mission: We deliver exceptional solutions that drive growth and create lasting value for our clients and communities.</a:t>
+            </a:r>
+          </a:p>
+          <a:p>
+            <a:pPr algn="l">
+              <a:spcAft>
+                <a:spcPts val="800"/>
+              </a:spcAft>
+              <a:defRPr sz="2000" b="0">
+                <a:solidFill>
+                  <a:srgbClr val="FFFFFF"/>
+                </a:solidFill>
+                <a:latin typeface="Source Sans Pro"/>
+              </a:defRPr>
+            </a:pPr>
+          </a:p>
+          <a:p>
+            <a:pPr algn="l">
+              <a:spcAft>
+                <a:spcPts val="800"/>
+              </a:spcAft>
+              <a:defRPr sz="2000" b="0">
+                <a:solidFill>
+                  <a:srgbClr val="FFFFFF"/>
+                </a:solidFill>
+                <a:latin typeface="Source Sans Pro"/>
+              </a:defRPr>
+            </a:pPr>
+            <a:r>
+              <a:t>Core Values:</a:t>
+            </a:r>
+          </a:p>
+          <a:p>
+            <a:pPr algn="l">
+              <a:spcAft>
+                <a:spcPts val="800"/>
+              </a:spcAft>
+              <a:defRPr sz="2000" b="0">
+                <a:solidFill>
+                  <a:srgbClr val="FFFFFF"/>
+                </a:solidFill>
+                <a:latin typeface="Source Sans Pro"/>
+              </a:defRPr>
+            </a:pPr>
+            <a:r>
+              <a:t>• Innovation: Driving progress through creative thinking and breakthrough solutions</a:t>
+            </a:r>
+          </a:p>
+          <a:p>
+            <a:pPr algn="l">
+              <a:spcAft>
+                <a:spcPts val="800"/>
+              </a:spcAft>
+              <a:defRPr sz="2000" b="0">
+                <a:solidFill>
+                  <a:srgbClr val="FFFFFF"/>
+                </a:solidFill>
+                <a:latin typeface="Source Sans Pro"/>
+              </a:defRPr>
+            </a:pPr>
+            <a:r>
+              <a:t>• Simplicity: Embodying simplicity in all aspects of our business operations</a:t>
+            </a:r>
+          </a:p>
+          <a:p>
+            <a:pPr algn="l">
+              <a:spcAft>
+                <a:spcPts val="800"/>
+              </a:spcAft>
+              <a:defRPr sz="2000" b="0">
+                <a:solidFill>
+                  <a:srgbClr val="FFFFFF"/>
+                </a:solidFill>
+                <a:latin typeface="Source Sans Pro"/>
+              </a:defRPr>
+            </a:pPr>
+            <a:r>
+              <a:t>• Human-Centered: Embodying human-centered in all aspects of our business operations</a:t>
+            </a:r>
+          </a:p>
+          <a:p>
+            <a:pPr algn="l">
+              <a:spcAft>
+                <a:spcPts val="800"/>
+              </a:spcAft>
+              <a:defRPr sz="2000" b="0">
+                <a:solidFill>
+                  <a:srgbClr val="FFFFFF"/>
+                </a:solidFill>
+                <a:latin typeface="Source Sans Pro"/>
+              </a:defRPr>
+            </a:pPr>
+            <a:r>
+              <a:t>• Excellence: Pursuing the highest standards in everything we deliver</a:t>
+            </a:r>
+          </a:p>
+          <a:p>
+            <a:pPr algn="l">
+              <a:spcAft>
+                <a:spcPts val="800"/>
+              </a:spcAft>
+              <a:defRPr sz="2000" b="0">
+                <a:solidFill>
+                  <a:srgbClr val="FFFFFF"/>
+                </a:solidFill>
+                <a:latin typeface="Source Sans Pro"/>
+              </a:defRPr>
+            </a:pPr>
+            <a:r>
+              <a:t>• Trust: Building lasting relationships through transparency and consistent delivery</a:t>
+            </a:r>
+          </a:p>
+          <a:p>
+            <a:pPr algn="l">
+              <a:spcAft>
+                <a:spcPts val="800"/>
+              </a:spcAft>
+              <a:defRPr sz="2000" b="0">
+                <a:solidFill>
+                  <a:srgbClr val="FFFFFF"/>
+                </a:solidFill>
+                <a:latin typeface="Source Sans Pro"/>
+              </a:defRPr>
+            </a:pPr>
+            <a:r>
+              <a:t>• Reliability: Ensuring dependable performance and unwavering support in all our services</a:t>
+            </a:r>
+          </a:p>
+          <a:p>
+            <a:pPr algn="l">
+              <a:spcAft>
+                <a:spcPts val="800"/>
+              </a:spcAft>
+              <a:defRPr sz="2000" b="0">
+                <a:solidFill>
+                  <a:srgbClr val="FFFFFF"/>
+                </a:solidFill>
+                <a:latin typeface="Source Sans Pro"/>
+              </a:defRPr>
+            </a:pPr>
+          </a:p>
+        </p:txBody>
+      </p:sp>
+      <p:cxnSp>
+        <p:nvCxnSpPr>
+          <p:cNvPr id="3" name="Connector 2"/>
+          <p:cNvCxnSpPr/>
+          <p:nvPr/>
+        </p:nvCxnSpPr>
+        <p:spPr>
+          <a:xfrm>
+            <a:off x="457200" y="4914900.0"/>
+            <a:ext cx="8229600" cy="0.0"/>
+          </a:xfrm>
+          <a:prstGeom prst="line">
+            <a:avLst/>
+          </a:prstGeom>
+          <a:ln w="25400">
+            <a:solidFill>
+              <a:srgbClr val="2E86AB"/>
+            </a:solidFill>
+          </a:ln>
+        </p:spPr>
+        <p:style>
+          <a:lnRef idx="2">
+            <a:schemeClr val="accent1"/>
+          </a:lnRef>
+          <a:fillRef idx="0">
+            <a:schemeClr val="accent1"/>
+          </a:fillRef>
+          <a:effectRef idx="1">
+            <a:schemeClr val="accent1"/>
+          </a:effectRef>
+          <a:fontRef idx="minor">
+            <a:schemeClr val="tx1"/>
+          </a:fontRef>
+        </p:style>
+      </p:cxnSp>
+      <p:sp>
+        <p:nvSpPr>
+          <p:cNvPr id="4" name="TextBox 3"/>
+          <p:cNvSpPr txBox="1"/>
+          <p:nvPr/>
+        </p:nvSpPr>
+        <p:spPr>
+          <a:xfrm>
+            <a:off x="800100" y="5189220"/>
+            <a:ext cx="3657600" cy="731520"/>
           </a:xfrm>
           <a:prstGeom prst="rect">
             <a:avLst/>
@@ -4736,8 +4977,8 @@
           </a:bodyPr>
           <a:lstStyle/>
           <a:p>
-            <a:pPr algn="ctr">
-              <a:defRPr sz="3200" b="1">
+            <a:pPr algn="l">
+              <a:defRPr sz="2800" b="1">
                 <a:solidFill>
                   <a:srgbClr val="2E86AB"/>
                 </a:solidFill>
@@ -4745,201 +4986,8 @@
               </a:defRPr>
             </a:pPr>
             <a:r>
-              <a:t>Brand Purpose</a:t>
-            </a:r>
-          </a:p>
-        </p:txBody>
-      </p:sp>
-      <p:sp>
-        <p:nvSpPr>
-          <p:cNvPr id="3" name="TextBox 2"/>
-          <p:cNvSpPr txBox="1"/>
-          <p:nvPr/>
-        </p:nvSpPr>
-        <p:spPr>
-          <a:xfrm>
-            <a:off x="1828800" y="1943100"/>
-            <a:ext cx="5486400" cy="3714750"/>
-          </a:xfrm>
-          <a:prstGeom prst="rect">
-            <a:avLst/>
-          </a:prstGeom>
-          <a:noFill/>
-        </p:spPr>
-        <p:txBody>
-          <a:bodyPr wrap="square">
-            <a:spAutoFit/>
-          </a:bodyPr>
-          <a:lstStyle/>
-          <a:p>
-            <a:pPr algn="ctr">
-              <a:defRPr sz="2400" b="0">
-                <a:solidFill>
-                  <a:srgbClr val="2E86AB"/>
-                </a:solidFill>
-                <a:latin typeface="Source Sans Pro"/>
-              </a:defRPr>
-            </a:pPr>
-            <a:r>
-              <a:t>Our Purpose</a:t>
-            </a:r>
-          </a:p>
-          <a:p>
-            <a:pPr>
-              <a:defRPr sz="1600" b="0">
-                <a:solidFill>
-                  <a:srgbClr val="FFFFFF"/>
-                </a:solidFill>
-                <a:latin typeface="Source Sans Pro"/>
-              </a:defRPr>
-            </a:pPr>
-          </a:p>
-          <a:p>
-            <a:pPr>
-              <a:defRPr sz="1600" b="0">
-                <a:solidFill>
-                  <a:srgbClr val="FFFFFF"/>
-                </a:solidFill>
-                <a:latin typeface="Source Sans Pro"/>
-              </a:defRPr>
-            </a:pPr>
-            <a:r>
-              <a:t>Vision: We bridge the gap between complex technology and intuitive user experiences through human-centered design</a:t>
-            </a:r>
-          </a:p>
-          <a:p>
-            <a:pPr>
-              <a:defRPr sz="1600" b="0">
-                <a:solidFill>
-                  <a:srgbClr val="FFFFFF"/>
-                </a:solidFill>
-                <a:latin typeface="Source Sans Pro"/>
-              </a:defRPr>
-            </a:pPr>
-          </a:p>
-          <a:p>
-            <a:pPr>
-              <a:defRPr sz="1600" b="0">
-                <a:solidFill>
-                  <a:srgbClr val="FFFFFF"/>
-                </a:solidFill>
-                <a:latin typeface="Source Sans Pro"/>
-              </a:defRPr>
-            </a:pPr>
-            <a:r>
-              <a:t>Mission: Technology that enhances human potential without adding complexity to your workflow</a:t>
-            </a:r>
-          </a:p>
-          <a:p>
-            <a:pPr>
-              <a:defRPr sz="1600" b="0">
-                <a:solidFill>
-                  <a:srgbClr val="FFFFFF"/>
-                </a:solidFill>
-                <a:latin typeface="Source Sans Pro"/>
-              </a:defRPr>
-            </a:pPr>
-          </a:p>
-          <a:p>
-            <a:pPr>
-              <a:defRPr sz="1600" b="0">
-                <a:solidFill>
-                  <a:srgbClr val="FFFFFF"/>
-                </a:solidFill>
-                <a:latin typeface="Source Sans Pro"/>
-              </a:defRPr>
-            </a:pPr>
-            <a:r>
-              <a:t>Core Values:</a:t>
-            </a:r>
-          </a:p>
-          <a:p>
-            <a:pPr>
-              <a:defRPr sz="1600" b="0">
-                <a:solidFill>
-                  <a:srgbClr val="FFFFFF"/>
-                </a:solidFill>
-                <a:latin typeface="Source Sans Pro"/>
-              </a:defRPr>
-            </a:pPr>
-            <a:r>
-              <a:t>• Innovation</a:t>
-            </a:r>
-          </a:p>
-          <a:p>
-            <a:pPr>
-              <a:defRPr sz="1600" b="0">
-                <a:solidFill>
-                  <a:srgbClr val="FFFFFF"/>
-                </a:solidFill>
-                <a:latin typeface="Source Sans Pro"/>
-              </a:defRPr>
-            </a:pPr>
-            <a:r>
-              <a:t>• Simplicity</a:t>
-            </a:r>
-          </a:p>
-          <a:p>
-            <a:pPr>
-              <a:defRPr sz="1600" b="0">
-                <a:solidFill>
-                  <a:srgbClr val="FFFFFF"/>
-                </a:solidFill>
-                <a:latin typeface="Source Sans Pro"/>
-              </a:defRPr>
-            </a:pPr>
-            <a:r>
-              <a:t>• Human-Centered</a:t>
-            </a:r>
-          </a:p>
-          <a:p>
-            <a:pPr>
-              <a:defRPr sz="1600" b="0">
-                <a:solidFill>
-                  <a:srgbClr val="FFFFFF"/>
-                </a:solidFill>
-                <a:latin typeface="Source Sans Pro"/>
-              </a:defRPr>
-            </a:pPr>
-            <a:r>
-              <a:t>• Excellence</a:t>
-            </a:r>
-          </a:p>
-          <a:p>
-            <a:pPr>
-              <a:defRPr sz="1600" b="0">
-                <a:solidFill>
-                  <a:srgbClr val="FFFFFF"/>
-                </a:solidFill>
-                <a:latin typeface="Source Sans Pro"/>
-              </a:defRPr>
-            </a:pPr>
-            <a:r>
-              <a:t>• Trust</a:t>
-            </a:r>
-          </a:p>
-          <a:p>
-            <a:pPr>
-              <a:defRPr sz="1600" b="0">
-                <a:solidFill>
-                  <a:srgbClr val="FFFFFF"/>
-                </a:solidFill>
-                <a:latin typeface="Source Sans Pro"/>
-              </a:defRPr>
-            </a:pPr>
-            <a:r>
-              <a:t>• Reliability</a:t>
-            </a:r>
-          </a:p>
-          <a:p>
-            <a:pPr>
-              <a:defRPr sz="1600" b="0">
-                <a:solidFill>
-                  <a:srgbClr val="FFFFFF"/>
-                </a:solidFill>
-                <a:latin typeface="Source Sans Pro"/>
-              </a:defRPr>
-            </a:pPr>
+              <a:t>BRAND PURPOSE</a:t>
+            </a:r>
           </a:p>
         </p:txBody>
       </p:sp>

--- a/output/techforward_live/techforward_live_enhanced_brand_book.pptx
+++ b/output/techforward_live/techforward_live_enhanced_brand_book.pptx
@@ -3111,7 +3111,7 @@
         </p:nvSpPr>
         <p:spPr>
           <a:xfrm>
-            <a:off x="1143000" y="4171950"/>
+            <a:off x="1828800" y="4171950"/>
             <a:ext cx="2743200" cy="742950"/>
           </a:xfrm>
           <a:prstGeom prst="rect">

--- a/output/techforward_live/techforward_live_enhanced_brand_book.pptx
+++ b/output/techforward_live/techforward_live_enhanced_brand_book.pptx
@@ -13,6 +13,8 @@
     <p:sldId id="261" r:id="rId12"/>
     <p:sldId id="262" r:id="rId13"/>
     <p:sldId id="263" r:id="rId14"/>
+    <p:sldId id="264" r:id="rId15"/>
+    <p:sldId id="265" r:id="rId16"/>
   </p:sldIdLst>
   <p:sldSz cx="9144000" cy="6858000" type="screen4x3"/>
   <p:notesSz cx="6858000" cy="9144000"/>
@@ -3111,7 +3113,7 @@
         </p:nvSpPr>
         <p:spPr>
           <a:xfrm>
-            <a:off x="1828800" y="4171950"/>
+            <a:off x="1143000" y="3800475"/>
             <a:ext cx="2743200" cy="742950"/>
           </a:xfrm>
           <a:prstGeom prst="rect">
@@ -3120,12 +3122,12 @@
           <a:noFill/>
         </p:spPr>
         <p:txBody>
-          <a:bodyPr wrap="none">
+          <a:bodyPr wrap="none" lIns="0" rIns="0" tIns="0" bIns="0">
             <a:spAutoFit/>
           </a:bodyPr>
           <a:lstStyle/>
           <a:p>
-            <a:pPr algn="ctr">
+            <a:pPr algn="l">
               <a:defRPr sz="3600" b="1">
                 <a:solidFill>
                   <a:srgbClr val="FFFFFF"/>
@@ -3206,6 +3208,594 @@
             </a:pPr>
             <a:r>
               <a:t>Brand Identity System</a:t>
+            </a:r>
+          </a:p>
+        </p:txBody>
+      </p:sp>
+    </p:spTree>
+  </p:cSld>
+  <p:clrMapOvr>
+    <a:masterClrMapping/>
+  </p:clrMapOvr>
+</p:sld>
+</file>
+
+<file path=ppt/slides/slide10.xml><?xml version="1.0" encoding="utf-8"?>
+<p:sld xmlns:a="http://schemas.openxmlformats.org/drawingml/2006/main" xmlns:p="http://schemas.openxmlformats.org/presentationml/2006/main" xmlns:r="http://schemas.openxmlformats.org/officeDocument/2006/relationships">
+  <p:cSld>
+    <p:spTree>
+      <p:nvGrpSpPr>
+        <p:cNvPr id="1" name=""/>
+        <p:cNvGrpSpPr/>
+        <p:nvPr/>
+      </p:nvGrpSpPr>
+      <p:sp>
+        <p:nvSpPr>
+          <p:cNvPr id="2" name="Rectangle 1"/>
+          <p:cNvSpPr/>
+          <p:nvPr/>
+        </p:nvSpPr>
+        <p:spPr>
+          <a:xfrm>
+            <a:off x="0" y="0"/>
+            <a:ext cx="9144000" cy="6858000"/>
+          </a:xfrm>
+          <a:prstGeom prst="rect">
+            <a:avLst/>
+          </a:prstGeom>
+          <a:solidFill>
+            <a:srgbClr val="1A1A1A"/>
+          </a:solidFill>
+          <a:ln>
+            <a:noFill/>
+          </a:ln>
+        </p:spPr>
+        <p:style>
+          <a:lnRef idx="1">
+            <a:schemeClr val="accent1"/>
+          </a:lnRef>
+          <a:fillRef idx="3">
+            <a:schemeClr val="accent1"/>
+          </a:fillRef>
+          <a:effectRef idx="2">
+            <a:schemeClr val="accent1"/>
+          </a:effectRef>
+          <a:fontRef idx="minor">
+            <a:schemeClr val="lt1"/>
+          </a:fontRef>
+        </p:style>
+        <p:txBody>
+          <a:bodyPr rtlCol="0" anchor="ctr"/>
+          <a:lstStyle/>
+          <a:p>
+            <a:pPr algn="ctr"/>
+          </a:p>
+        </p:txBody>
+      </p:sp>
+      <p:grpSpPr/>
+      <p:sp>
+        <p:nvSpPr>
+          <p:cNvPr id="3" name="TextBox 2"/>
+          <p:cNvSpPr txBox="1"/>
+          <p:nvPr/>
+        </p:nvSpPr>
+        <p:spPr>
+          <a:xfrm>
+            <a:off x="1143000" y="457200"/>
+            <a:ext cx="6858000" cy="742950"/>
+          </a:xfrm>
+          <a:prstGeom prst="rect">
+            <a:avLst/>
+          </a:prstGeom>
+          <a:noFill/>
+        </p:spPr>
+        <p:txBody>
+          <a:bodyPr wrap="none">
+            <a:spAutoFit/>
+          </a:bodyPr>
+          <a:lstStyle/>
+          <a:p>
+            <a:pPr>
+              <a:defRPr sz="3200" b="1">
+                <a:solidFill>
+                  <a:srgbClr val="2E86AB"/>
+                </a:solidFill>
+                <a:latin typeface="Inter"/>
+              </a:defRPr>
+            </a:pPr>
+            <a:r>
+              <a:t>Visual &amp; Photography Guidelines</a:t>
+            </a:r>
+          </a:p>
+        </p:txBody>
+      </p:sp>
+      <p:sp>
+        <p:nvSpPr>
+          <p:cNvPr id="4" name="TextBox 3"/>
+          <p:cNvSpPr txBox="1"/>
+          <p:nvPr/>
+        </p:nvSpPr>
+        <p:spPr>
+          <a:xfrm>
+            <a:off x="1143000" y="1943100"/>
+            <a:ext cx="3429000" cy="2971800"/>
+          </a:xfrm>
+          <a:prstGeom prst="rect">
+            <a:avLst/>
+          </a:prstGeom>
+          <a:noFill/>
+        </p:spPr>
+        <p:txBody>
+          <a:bodyPr wrap="square">
+            <a:spAutoFit/>
+          </a:bodyPr>
+          <a:lstStyle/>
+          <a:p>
+            <a:pPr>
+              <a:defRPr sz="1800" b="0">
+                <a:solidFill>
+                  <a:srgbClr val="2E86AB"/>
+                </a:solidFill>
+                <a:latin typeface="Source Sans Pro"/>
+              </a:defRPr>
+            </a:pPr>
+            <a:r>
+              <a:t>Visual Style Guidelines:</a:t>
+            </a:r>
+          </a:p>
+          <a:p>
+            <a:pPr>
+              <a:defRPr sz="1400" b="0">
+                <a:solidFill>
+                  <a:srgbClr val="2E86AB"/>
+                </a:solidFill>
+                <a:latin typeface="Source Sans Pro"/>
+              </a:defRPr>
+            </a:pPr>
+            <a:r>
+              <a:t>• Modern</a:t>
+            </a:r>
+          </a:p>
+          <a:p>
+            <a:pPr>
+              <a:defRPr sz="1400" b="0">
+                <a:solidFill>
+                  <a:srgbClr val="2E86AB"/>
+                </a:solidFill>
+                <a:latin typeface="Source Sans Pro"/>
+              </a:defRPr>
+            </a:pPr>
+            <a:r>
+              <a:t>• clean</a:t>
+            </a:r>
+          </a:p>
+          <a:p>
+            <a:pPr>
+              <a:defRPr sz="1400" b="0">
+                <a:solidFill>
+                  <a:srgbClr val="2E86AB"/>
+                </a:solidFill>
+                <a:latin typeface="Source Sans Pro"/>
+              </a:defRPr>
+            </a:pPr>
+            <a:r>
+              <a:t>• professional</a:t>
+            </a:r>
+          </a:p>
+          <a:p>
+            <a:pPr>
+              <a:defRPr sz="1400" b="0">
+                <a:solidFill>
+                  <a:srgbClr val="2E86AB"/>
+                </a:solidFill>
+                <a:latin typeface="Source Sans Pro"/>
+              </a:defRPr>
+            </a:pPr>
+            <a:r>
+              <a:t>• minimalist</a:t>
+            </a:r>
+          </a:p>
+          <a:p>
+            <a:pPr>
+              <a:defRPr sz="1400" b="0">
+                <a:solidFill>
+                  <a:srgbClr val="2E86AB"/>
+                </a:solidFill>
+                <a:latin typeface="Source Sans Pro"/>
+              </a:defRPr>
+            </a:pPr>
+            <a:r>
+              <a:t>• bold typography</a:t>
+            </a:r>
+          </a:p>
+        </p:txBody>
+      </p:sp>
+      <p:sp>
+        <p:nvSpPr>
+          <p:cNvPr id="5" name="TextBox 4"/>
+          <p:cNvSpPr txBox="1"/>
+          <p:nvPr/>
+        </p:nvSpPr>
+        <p:spPr>
+          <a:xfrm>
+            <a:off x="5257800" y="1943100"/>
+            <a:ext cx="3429000" cy="2971800"/>
+          </a:xfrm>
+          <a:prstGeom prst="rect">
+            <a:avLst/>
+          </a:prstGeom>
+          <a:noFill/>
+        </p:spPr>
+        <p:txBody>
+          <a:bodyPr wrap="square">
+            <a:spAutoFit/>
+          </a:bodyPr>
+          <a:lstStyle/>
+          <a:p>
+            <a:pPr>
+              <a:defRPr sz="1800" b="0">
+                <a:solidFill>
+                  <a:srgbClr val="2E86AB"/>
+                </a:solidFill>
+                <a:latin typeface="Source Sans Pro"/>
+              </a:defRPr>
+            </a:pPr>
+            <a:r>
+              <a:t>Photography Guidelines:</a:t>
+            </a:r>
+          </a:p>
+          <a:p>
+            <a:pPr>
+              <a:defRPr sz="1400" b="0">
+                <a:solidFill>
+                  <a:srgbClr val="2E86AB"/>
+                </a:solidFill>
+                <a:latin typeface="Source Sans Pro"/>
+              </a:defRPr>
+            </a:pPr>
+            <a:r>
+              <a:t>• High contrast</a:t>
+            </a:r>
+          </a:p>
+          <a:p>
+            <a:pPr>
+              <a:defRPr sz="1400" b="0">
+                <a:solidFill>
+                  <a:srgbClr val="2E86AB"/>
+                </a:solidFill>
+                <a:latin typeface="Source Sans Pro"/>
+              </a:defRPr>
+            </a:pPr>
+            <a:r>
+              <a:t>• authentic moments</a:t>
+            </a:r>
+          </a:p>
+          <a:p>
+            <a:pPr>
+              <a:defRPr sz="1400" b="0">
+                <a:solidFill>
+                  <a:srgbClr val="2E86AB"/>
+                </a:solidFill>
+                <a:latin typeface="Source Sans Pro"/>
+              </a:defRPr>
+            </a:pPr>
+            <a:r>
+              <a:t>• natural lighting</a:t>
+            </a:r>
+          </a:p>
+        </p:txBody>
+      </p:sp>
+      <p:sp>
+        <p:nvSpPr>
+          <p:cNvPr id="6" name="Rectangle 5"/>
+          <p:cNvSpPr/>
+          <p:nvPr/>
+        </p:nvSpPr>
+        <p:spPr>
+          <a:xfrm>
+            <a:off x="5257800" y="4914900"/>
+            <a:ext cx="685800" cy="742950"/>
+          </a:xfrm>
+          <a:prstGeom prst="rect">
+            <a:avLst/>
+          </a:prstGeom>
+          <a:solidFill>
+            <a:srgbClr val="404040"/>
+          </a:solidFill>
+          <a:ln w="12700">
+            <a:solidFill>
+              <a:srgbClr val="808080"/>
+            </a:solidFill>
+          </a:ln>
+        </p:spPr>
+        <p:style>
+          <a:lnRef idx="1">
+            <a:schemeClr val="accent1"/>
+          </a:lnRef>
+          <a:fillRef idx="3">
+            <a:schemeClr val="accent1"/>
+          </a:fillRef>
+          <a:effectRef idx="2">
+            <a:schemeClr val="accent1"/>
+          </a:effectRef>
+          <a:fontRef idx="minor">
+            <a:schemeClr val="lt1"/>
+          </a:fontRef>
+        </p:style>
+        <p:txBody>
+          <a:bodyPr rtlCol="0" anchor="ctr"/>
+          <a:lstStyle/>
+          <a:p>
+            <a:pPr algn="ctr"/>
+          </a:p>
+        </p:txBody>
+      </p:sp>
+      <p:sp>
+        <p:nvSpPr>
+          <p:cNvPr id="7" name="TextBox 6"/>
+          <p:cNvSpPr txBox="1"/>
+          <p:nvPr/>
+        </p:nvSpPr>
+        <p:spPr>
+          <a:xfrm>
+            <a:off x="5257800" y="5162550"/>
+            <a:ext cx="685800" cy="247650"/>
+          </a:xfrm>
+          <a:prstGeom prst="rect">
+            <a:avLst/>
+          </a:prstGeom>
+          <a:noFill/>
+        </p:spPr>
+        <p:txBody>
+          <a:bodyPr wrap="none">
+            <a:spAutoFit/>
+          </a:bodyPr>
+          <a:lstStyle/>
+          <a:p>
+            <a:pPr algn="ctr">
+              <a:defRPr sz="800" b="0">
+                <a:solidFill>
+                  <a:srgbClr val="2E86AB"/>
+                </a:solidFill>
+                <a:latin typeface="Source Sans Pro"/>
+              </a:defRPr>
+            </a:pPr>
+            <a:r>
+              <a:t>Example</a:t>
+            </a:r>
+          </a:p>
+        </p:txBody>
+      </p:sp>
+      <p:sp>
+        <p:nvSpPr>
+          <p:cNvPr id="8" name="Rectangle 7"/>
+          <p:cNvSpPr/>
+          <p:nvPr/>
+        </p:nvSpPr>
+        <p:spPr>
+          <a:xfrm>
+            <a:off x="6629400" y="4914900"/>
+            <a:ext cx="685800" cy="742950"/>
+          </a:xfrm>
+          <a:prstGeom prst="rect">
+            <a:avLst/>
+          </a:prstGeom>
+          <a:solidFill>
+            <a:srgbClr val="404040"/>
+          </a:solidFill>
+          <a:ln w="12700">
+            <a:solidFill>
+              <a:srgbClr val="808080"/>
+            </a:solidFill>
+          </a:ln>
+        </p:spPr>
+        <p:style>
+          <a:lnRef idx="1">
+            <a:schemeClr val="accent1"/>
+          </a:lnRef>
+          <a:fillRef idx="3">
+            <a:schemeClr val="accent1"/>
+          </a:fillRef>
+          <a:effectRef idx="2">
+            <a:schemeClr val="accent1"/>
+          </a:effectRef>
+          <a:fontRef idx="minor">
+            <a:schemeClr val="lt1"/>
+          </a:fontRef>
+        </p:style>
+        <p:txBody>
+          <a:bodyPr rtlCol="0" anchor="ctr"/>
+          <a:lstStyle/>
+          <a:p>
+            <a:pPr algn="ctr"/>
+          </a:p>
+        </p:txBody>
+      </p:sp>
+      <p:sp>
+        <p:nvSpPr>
+          <p:cNvPr id="9" name="TextBox 8"/>
+          <p:cNvSpPr txBox="1"/>
+          <p:nvPr/>
+        </p:nvSpPr>
+        <p:spPr>
+          <a:xfrm>
+            <a:off x="6629400" y="5162550"/>
+            <a:ext cx="685800" cy="247650"/>
+          </a:xfrm>
+          <a:prstGeom prst="rect">
+            <a:avLst/>
+          </a:prstGeom>
+          <a:noFill/>
+        </p:spPr>
+        <p:txBody>
+          <a:bodyPr wrap="none">
+            <a:spAutoFit/>
+          </a:bodyPr>
+          <a:lstStyle/>
+          <a:p>
+            <a:pPr algn="ctr">
+              <a:defRPr sz="800" b="0">
+                <a:solidFill>
+                  <a:srgbClr val="2E86AB"/>
+                </a:solidFill>
+                <a:latin typeface="Source Sans Pro"/>
+              </a:defRPr>
+            </a:pPr>
+            <a:r>
+              <a:t>Example</a:t>
+            </a:r>
+          </a:p>
+        </p:txBody>
+      </p:sp>
+      <p:sp>
+        <p:nvSpPr>
+          <p:cNvPr id="10" name="Rectangle 9"/>
+          <p:cNvSpPr/>
+          <p:nvPr/>
+        </p:nvSpPr>
+        <p:spPr>
+          <a:xfrm>
+            <a:off x="8001000" y="4914900"/>
+            <a:ext cx="685800" cy="742950"/>
+          </a:xfrm>
+          <a:prstGeom prst="rect">
+            <a:avLst/>
+          </a:prstGeom>
+          <a:solidFill>
+            <a:srgbClr val="404040"/>
+          </a:solidFill>
+          <a:ln w="12700">
+            <a:solidFill>
+              <a:srgbClr val="808080"/>
+            </a:solidFill>
+          </a:ln>
+        </p:spPr>
+        <p:style>
+          <a:lnRef idx="1">
+            <a:schemeClr val="accent1"/>
+          </a:lnRef>
+          <a:fillRef idx="3">
+            <a:schemeClr val="accent1"/>
+          </a:fillRef>
+          <a:effectRef idx="2">
+            <a:schemeClr val="accent1"/>
+          </a:effectRef>
+          <a:fontRef idx="minor">
+            <a:schemeClr val="lt1"/>
+          </a:fontRef>
+        </p:style>
+        <p:txBody>
+          <a:bodyPr rtlCol="0" anchor="ctr"/>
+          <a:lstStyle/>
+          <a:p>
+            <a:pPr algn="ctr"/>
+          </a:p>
+        </p:txBody>
+      </p:sp>
+      <p:sp>
+        <p:nvSpPr>
+          <p:cNvPr id="11" name="TextBox 10"/>
+          <p:cNvSpPr txBox="1"/>
+          <p:nvPr/>
+        </p:nvSpPr>
+        <p:spPr>
+          <a:xfrm>
+            <a:off x="8001000" y="5162550"/>
+            <a:ext cx="685800" cy="247650"/>
+          </a:xfrm>
+          <a:prstGeom prst="rect">
+            <a:avLst/>
+          </a:prstGeom>
+          <a:noFill/>
+        </p:spPr>
+        <p:txBody>
+          <a:bodyPr wrap="none">
+            <a:spAutoFit/>
+          </a:bodyPr>
+          <a:lstStyle/>
+          <a:p>
+            <a:pPr algn="ctr">
+              <a:defRPr sz="800" b="0">
+                <a:solidFill>
+                  <a:srgbClr val="2E86AB"/>
+                </a:solidFill>
+                <a:latin typeface="Source Sans Pro"/>
+              </a:defRPr>
+            </a:pPr>
+            <a:r>
+              <a:t>Example</a:t>
+            </a:r>
+          </a:p>
+        </p:txBody>
+      </p:sp>
+      <p:sp>
+        <p:nvSpPr>
+          <p:cNvPr id="12" name="TextBox 11"/>
+          <p:cNvSpPr txBox="1"/>
+          <p:nvPr/>
+        </p:nvSpPr>
+        <p:spPr>
+          <a:xfrm>
+            <a:off x="457200" y="5657850"/>
+            <a:ext cx="4114800" cy="742950"/>
+          </a:xfrm>
+          <a:prstGeom prst="rect">
+            <a:avLst/>
+          </a:prstGeom>
+          <a:noFill/>
+        </p:spPr>
+        <p:txBody>
+          <a:bodyPr wrap="none">
+            <a:spAutoFit/>
+          </a:bodyPr>
+          <a:lstStyle/>
+          <a:p>
+            <a:pPr algn="l">
+              <a:defRPr sz="1000" b="0">
+                <a:solidFill>
+                  <a:srgbClr val="2E86AB"/>
+                </a:solidFill>
+                <a:latin typeface="Source Sans Pro"/>
+              </a:defRPr>
+            </a:pPr>
+            <a:r>
+              <a:t>TechForward Live</a:t>
+            </a:r>
+          </a:p>
+        </p:txBody>
+      </p:sp>
+      <p:sp>
+        <p:nvSpPr>
+          <p:cNvPr id="13" name="TextBox 12"/>
+          <p:cNvSpPr txBox="1"/>
+          <p:nvPr/>
+        </p:nvSpPr>
+        <p:spPr>
+          <a:xfrm>
+            <a:off x="4572000" y="5657850"/>
+            <a:ext cx="4114800" cy="742950"/>
+          </a:xfrm>
+          <a:prstGeom prst="rect">
+            <a:avLst/>
+          </a:prstGeom>
+          <a:noFill/>
+        </p:spPr>
+        <p:txBody>
+          <a:bodyPr wrap="none">
+            <a:spAutoFit/>
+          </a:bodyPr>
+          <a:lstStyle/>
+          <a:p>
+            <a:pPr algn="r">
+              <a:defRPr sz="1000" b="0">
+                <a:solidFill>
+                  <a:srgbClr val="2E86AB"/>
+                </a:solidFill>
+                <a:latin typeface="Source Sans Pro"/>
+              </a:defRPr>
+            </a:pPr>
+            <a:r>
+              <a:t>10</a:t>
             </a:r>
           </a:p>
         </p:txBody>
@@ -3445,7 +4035,7 @@
               </a:defRPr>
             </a:pPr>
             <a:r>
-              <a:t>Brand Purpose</a:t>
+              <a:t>Brand Purpose (Vision)</a:t>
             </a:r>
           </a:p>
         </p:txBody>
@@ -3552,7 +4142,7 @@
               </a:defRPr>
             </a:pPr>
             <a:r>
-              <a:t>Brand Story</a:t>
+              <a:t>Brand Purpose (Mission)</a:t>
             </a:r>
           </a:p>
         </p:txBody>
@@ -3659,7 +4249,7 @@
               </a:defRPr>
             </a:pPr>
             <a:r>
-              <a:t>Logo Variations</a:t>
+              <a:t>Brand Purpose (Values)</a:t>
             </a:r>
           </a:p>
         </p:txBody>
@@ -3743,115 +4333,7 @@
         </p:nvSpPr>
         <p:spPr>
           <a:xfrm>
-            <a:off x="3657600" y="1920240"/>
-            <a:ext cx="1828800" cy="228600"/>
-          </a:xfrm>
-          <a:prstGeom prst="rect">
-            <a:avLst/>
-          </a:prstGeom>
-          <a:noFill/>
-        </p:spPr>
-        <p:txBody>
-          <a:bodyPr wrap="none" lIns="0" tIns="0" bIns="0">
-            <a:spAutoFit/>
-          </a:bodyPr>
-          <a:lstStyle/>
-          <a:p>
-            <a:pPr>
-              <a:defRPr sz="900" b="0">
-                <a:solidFill>
-                  <a:srgbClr val="CCCCCC"/>
-                </a:solidFill>
-                <a:latin typeface="Source Sans Pro"/>
-              </a:defRPr>
-            </a:pPr>
-            <a:r>
-              <a:t>Logo Mark</a:t>
-            </a:r>
-          </a:p>
-        </p:txBody>
-      </p:sp>
-      <p:sp>
-        <p:nvSpPr>
-          <p:cNvPr id="17" name="TextBox 16"/>
-          <p:cNvSpPr txBox="1"/>
-          <p:nvPr/>
-        </p:nvSpPr>
-        <p:spPr>
-          <a:xfrm>
-            <a:off x="3657600" y="2148840"/>
-            <a:ext cx="1828800" cy="228600"/>
-          </a:xfrm>
-          <a:prstGeom prst="rect">
-            <a:avLst/>
-          </a:prstGeom>
-          <a:noFill/>
-        </p:spPr>
-        <p:txBody>
-          <a:bodyPr wrap="none" lIns="0" tIns="0" bIns="0">
-            <a:spAutoFit/>
-          </a:bodyPr>
-          <a:lstStyle/>
-          <a:p>
-            <a:pPr>
-              <a:defRPr sz="900" b="0">
-                <a:solidFill>
-                  <a:srgbClr val="CCCCCC"/>
-                </a:solidFill>
-                <a:latin typeface="Source Sans Pro"/>
-              </a:defRPr>
-            </a:pPr>
-            <a:r>
-              <a:t>Clear Space</a:t>
-            </a:r>
-          </a:p>
-        </p:txBody>
-      </p:sp>
-      <p:sp>
-        <p:nvSpPr>
-          <p:cNvPr id="18" name="TextBox 17"/>
-          <p:cNvSpPr txBox="1"/>
-          <p:nvPr/>
-        </p:nvSpPr>
-        <p:spPr>
-          <a:xfrm>
-            <a:off x="3657600" y="2377440"/>
-            <a:ext cx="1828800" cy="228600"/>
-          </a:xfrm>
-          <a:prstGeom prst="rect">
-            <a:avLst/>
-          </a:prstGeom>
-          <a:noFill/>
-        </p:spPr>
-        <p:txBody>
-          <a:bodyPr wrap="none" lIns="0" tIns="0" bIns="0">
-            <a:spAutoFit/>
-          </a:bodyPr>
-          <a:lstStyle/>
-          <a:p>
-            <a:pPr>
-              <a:defRPr sz="900" b="0">
-                <a:solidFill>
-                  <a:srgbClr val="CCCCCC"/>
-                </a:solidFill>
-                <a:latin typeface="Source Sans Pro"/>
-              </a:defRPr>
-            </a:pPr>
-            <a:r>
-              <a:t>Usage Guidelines</a:t>
-            </a:r>
-          </a:p>
-        </p:txBody>
-      </p:sp>
-      <p:sp>
-        <p:nvSpPr>
-          <p:cNvPr id="19" name="TextBox 18"/>
-          <p:cNvSpPr txBox="1"/>
-          <p:nvPr/>
-        </p:nvSpPr>
-        <p:spPr>
-          <a:xfrm>
-            <a:off x="3474720" y="2743200"/>
+            <a:off x="3474720" y="2057400"/>
             <a:ext cx="1828800" cy="274320"/>
           </a:xfrm>
           <a:prstGeom prst="rect">
@@ -3874,20 +4356,20 @@
               </a:defRPr>
             </a:pPr>
             <a:r>
-              <a:t>Brand Colors</a:t>
+              <a:t>Brand Story</a:t>
             </a:r>
           </a:p>
         </p:txBody>
       </p:sp>
       <p:cxnSp>
         <p:nvCxnSpPr>
-          <p:cNvPr id="20" name="Connector 19"/>
+          <p:cNvPr id="17" name="Connector 16"/>
           <p:cNvCxnSpPr/>
           <p:nvPr/>
         </p:nvCxnSpPr>
         <p:spPr>
           <a:xfrm>
-            <a:off x="5349239" y="2852928"/>
+            <a:off x="5349239" y="2167128"/>
             <a:ext cx="365760" cy="0"/>
           </a:xfrm>
           <a:prstGeom prst="line">
@@ -3916,13 +4398,13 @@
       </p:cxnSp>
       <p:sp>
         <p:nvSpPr>
-          <p:cNvPr id="21" name="TextBox 20"/>
+          <p:cNvPr id="18" name="TextBox 17"/>
           <p:cNvSpPr txBox="1"/>
           <p:nvPr/>
         </p:nvSpPr>
         <p:spPr>
           <a:xfrm>
-            <a:off x="5760720" y="2743200"/>
+            <a:off x="5760720" y="2057400"/>
             <a:ext cx="274320" cy="274320"/>
           </a:xfrm>
           <a:prstGeom prst="rect">
@@ -3952,121 +4434,13 @@
       </p:sp>
       <p:sp>
         <p:nvSpPr>
-          <p:cNvPr id="22" name="TextBox 21"/>
+          <p:cNvPr id="19" name="TextBox 18"/>
           <p:cNvSpPr txBox="1"/>
           <p:nvPr/>
         </p:nvSpPr>
         <p:spPr>
           <a:xfrm>
-            <a:off x="3657600" y="3108960"/>
-            <a:ext cx="1828800" cy="228600"/>
-          </a:xfrm>
-          <a:prstGeom prst="rect">
-            <a:avLst/>
-          </a:prstGeom>
-          <a:noFill/>
-        </p:spPr>
-        <p:txBody>
-          <a:bodyPr wrap="none" lIns="0" tIns="0" bIns="0">
-            <a:spAutoFit/>
-          </a:bodyPr>
-          <a:lstStyle/>
-          <a:p>
-            <a:pPr>
-              <a:defRPr sz="900" b="0">
-                <a:solidFill>
-                  <a:srgbClr val="CCCCCC"/>
-                </a:solidFill>
-                <a:latin typeface="Source Sans Pro"/>
-              </a:defRPr>
-            </a:pPr>
-            <a:r>
-              <a:t>Primary Colors</a:t>
-            </a:r>
-          </a:p>
-        </p:txBody>
-      </p:sp>
-      <p:sp>
-        <p:nvSpPr>
-          <p:cNvPr id="23" name="TextBox 22"/>
-          <p:cNvSpPr txBox="1"/>
-          <p:nvPr/>
-        </p:nvSpPr>
-        <p:spPr>
-          <a:xfrm>
-            <a:off x="3657600" y="3337560"/>
-            <a:ext cx="1828800" cy="228600"/>
-          </a:xfrm>
-          <a:prstGeom prst="rect">
-            <a:avLst/>
-          </a:prstGeom>
-          <a:noFill/>
-        </p:spPr>
-        <p:txBody>
-          <a:bodyPr wrap="none" lIns="0" tIns="0" bIns="0">
-            <a:spAutoFit/>
-          </a:bodyPr>
-          <a:lstStyle/>
-          <a:p>
-            <a:pPr>
-              <a:defRPr sz="900" b="0">
-                <a:solidFill>
-                  <a:srgbClr val="CCCCCC"/>
-                </a:solidFill>
-                <a:latin typeface="Source Sans Pro"/>
-              </a:defRPr>
-            </a:pPr>
-            <a:r>
-              <a:t>Secondary Colors</a:t>
-            </a:r>
-          </a:p>
-        </p:txBody>
-      </p:sp>
-      <p:sp>
-        <p:nvSpPr>
-          <p:cNvPr id="24" name="TextBox 23"/>
-          <p:cNvSpPr txBox="1"/>
-          <p:nvPr/>
-        </p:nvSpPr>
-        <p:spPr>
-          <a:xfrm>
-            <a:off x="3657600" y="3566160"/>
-            <a:ext cx="1828800" cy="228600"/>
-          </a:xfrm>
-          <a:prstGeom prst="rect">
-            <a:avLst/>
-          </a:prstGeom>
-          <a:noFill/>
-        </p:spPr>
-        <p:txBody>
-          <a:bodyPr wrap="none" lIns="0" tIns="0" bIns="0">
-            <a:spAutoFit/>
-          </a:bodyPr>
-          <a:lstStyle/>
-          <a:p>
-            <a:pPr>
-              <a:defRPr sz="900" b="0">
-                <a:solidFill>
-                  <a:srgbClr val="CCCCCC"/>
-                </a:solidFill>
-                <a:latin typeface="Source Sans Pro"/>
-              </a:defRPr>
-            </a:pPr>
-            <a:r>
-              <a:t>Color Usage</a:t>
-            </a:r>
-          </a:p>
-        </p:txBody>
-      </p:sp>
-      <p:sp>
-        <p:nvSpPr>
-          <p:cNvPr id="25" name="TextBox 24"/>
-          <p:cNvSpPr txBox="1"/>
-          <p:nvPr/>
-        </p:nvSpPr>
-        <p:spPr>
-          <a:xfrm>
-            <a:off x="3474720" y="3931920"/>
+            <a:off x="3474720" y="2560320"/>
             <a:ext cx="1828800" cy="274320"/>
           </a:xfrm>
           <a:prstGeom prst="rect">
@@ -4089,20 +4463,20 @@
               </a:defRPr>
             </a:pPr>
             <a:r>
-              <a:t>Typography</a:t>
+              <a:t>Logo Variations</a:t>
             </a:r>
           </a:p>
         </p:txBody>
       </p:sp>
       <p:cxnSp>
         <p:nvCxnSpPr>
-          <p:cNvPr id="26" name="Connector 25"/>
+          <p:cNvPr id="20" name="Connector 19"/>
           <p:cNvCxnSpPr/>
           <p:nvPr/>
         </p:nvCxnSpPr>
         <p:spPr>
           <a:xfrm>
-            <a:off x="5349239" y="4041648"/>
+            <a:off x="5349239" y="2670048"/>
             <a:ext cx="365760" cy="0"/>
           </a:xfrm>
           <a:prstGeom prst="line">
@@ -4131,13 +4505,13 @@
       </p:cxnSp>
       <p:sp>
         <p:nvSpPr>
-          <p:cNvPr id="27" name="TextBox 26"/>
+          <p:cNvPr id="21" name="TextBox 20"/>
           <p:cNvSpPr txBox="1"/>
           <p:nvPr/>
         </p:nvSpPr>
         <p:spPr>
           <a:xfrm>
-            <a:off x="5760720" y="3931920"/>
+            <a:off x="5760720" y="2560320"/>
             <a:ext cx="274320" cy="274320"/>
           </a:xfrm>
           <a:prstGeom prst="rect">
@@ -4167,13 +4541,13 @@
       </p:sp>
       <p:sp>
         <p:nvSpPr>
-          <p:cNvPr id="28" name="TextBox 27"/>
+          <p:cNvPr id="22" name="TextBox 21"/>
           <p:cNvSpPr txBox="1"/>
           <p:nvPr/>
         </p:nvSpPr>
         <p:spPr>
           <a:xfrm>
-            <a:off x="3657600" y="4297680"/>
+            <a:off x="3657600" y="2926079"/>
             <a:ext cx="1828800" cy="228600"/>
           </a:xfrm>
           <a:prstGeom prst="rect">
@@ -4196,20 +4570,20 @@
               </a:defRPr>
             </a:pPr>
             <a:r>
-              <a:t>Brand Font</a:t>
-            </a:r>
-          </a:p>
-        </p:txBody>
-      </p:sp>
-      <p:sp>
-        <p:nvSpPr>
-          <p:cNvPr id="29" name="TextBox 28"/>
+              <a:t>Logo Mark</a:t>
+            </a:r>
+          </a:p>
+        </p:txBody>
+      </p:sp>
+      <p:sp>
+        <p:nvSpPr>
+          <p:cNvPr id="23" name="TextBox 22"/>
           <p:cNvSpPr txBox="1"/>
           <p:nvPr/>
         </p:nvSpPr>
         <p:spPr>
           <a:xfrm>
-            <a:off x="3657600" y="4526280"/>
+            <a:off x="3657600" y="3154679"/>
             <a:ext cx="1828800" cy="228600"/>
           </a:xfrm>
           <a:prstGeom prst="rect">
@@ -4232,20 +4606,20 @@
               </a:defRPr>
             </a:pPr>
             <a:r>
-              <a:t>Font Usage</a:t>
-            </a:r>
-          </a:p>
-        </p:txBody>
-      </p:sp>
-      <p:sp>
-        <p:nvSpPr>
-          <p:cNvPr id="30" name="TextBox 29"/>
+              <a:t>Clear Space</a:t>
+            </a:r>
+          </a:p>
+        </p:txBody>
+      </p:sp>
+      <p:sp>
+        <p:nvSpPr>
+          <p:cNvPr id="24" name="TextBox 23"/>
           <p:cNvSpPr txBox="1"/>
           <p:nvPr/>
         </p:nvSpPr>
         <p:spPr>
           <a:xfrm>
-            <a:off x="3657600" y="4754880"/>
+            <a:off x="3657600" y="3383279"/>
             <a:ext cx="1828800" cy="228600"/>
           </a:xfrm>
           <a:prstGeom prst="rect">
@@ -4268,14 +4642,14 @@
               </a:defRPr>
             </a:pPr>
             <a:r>
-              <a:t>Text Hierarchy</a:t>
-            </a:r>
-          </a:p>
-        </p:txBody>
-      </p:sp>
-      <p:sp>
-        <p:nvSpPr>
-          <p:cNvPr id="31" name="TextBox 30"/>
+              <a:t>Usage Guidelines</a:t>
+            </a:r>
+          </a:p>
+        </p:txBody>
+      </p:sp>
+      <p:sp>
+        <p:nvSpPr>
+          <p:cNvPr id="25" name="TextBox 24"/>
           <p:cNvSpPr txBox="1"/>
           <p:nvPr/>
         </p:nvSpPr>
@@ -4304,14 +4678,14 @@
               </a:defRPr>
             </a:pPr>
             <a:r>
-              <a:t>Visual Guidelines</a:t>
+              <a:t>Brand Colors</a:t>
             </a:r>
           </a:p>
         </p:txBody>
       </p:sp>
       <p:cxnSp>
         <p:nvCxnSpPr>
-          <p:cNvPr id="32" name="Connector 31"/>
+          <p:cNvPr id="26" name="Connector 25"/>
           <p:cNvCxnSpPr/>
           <p:nvPr/>
         </p:nvCxnSpPr>
@@ -4346,7 +4720,7 @@
       </p:cxnSp>
       <p:sp>
         <p:nvSpPr>
-          <p:cNvPr id="33" name="TextBox 32"/>
+          <p:cNvPr id="27" name="TextBox 26"/>
           <p:cNvSpPr txBox="1"/>
           <p:nvPr/>
         </p:nvSpPr>
@@ -4382,7 +4756,7 @@
       </p:sp>
       <p:sp>
         <p:nvSpPr>
-          <p:cNvPr id="34" name="TextBox 33"/>
+          <p:cNvPr id="28" name="TextBox 27"/>
           <p:cNvSpPr txBox="1"/>
           <p:nvPr/>
         </p:nvSpPr>
@@ -4411,14 +4785,14 @@
               </a:defRPr>
             </a:pPr>
             <a:r>
-              <a:t>Visual Style</a:t>
-            </a:r>
-          </a:p>
-        </p:txBody>
-      </p:sp>
-      <p:sp>
-        <p:nvSpPr>
-          <p:cNvPr id="35" name="TextBox 34"/>
+              <a:t>Primary Colors</a:t>
+            </a:r>
+          </a:p>
+        </p:txBody>
+      </p:sp>
+      <p:sp>
+        <p:nvSpPr>
+          <p:cNvPr id="29" name="TextBox 28"/>
           <p:cNvSpPr txBox="1"/>
           <p:nvPr/>
         </p:nvSpPr>
@@ -4447,7 +4821,222 @@
               </a:defRPr>
             </a:pPr>
             <a:r>
-              <a:t>Photography</a:t>
+              <a:t>Secondary Colors</a:t>
+            </a:r>
+          </a:p>
+        </p:txBody>
+      </p:sp>
+      <p:sp>
+        <p:nvSpPr>
+          <p:cNvPr id="30" name="TextBox 29"/>
+          <p:cNvSpPr txBox="1"/>
+          <p:nvPr/>
+        </p:nvSpPr>
+        <p:spPr>
+          <a:xfrm>
+            <a:off x="6675120" y="2377440"/>
+            <a:ext cx="1828800" cy="228600"/>
+          </a:xfrm>
+          <a:prstGeom prst="rect">
+            <a:avLst/>
+          </a:prstGeom>
+          <a:noFill/>
+        </p:spPr>
+        <p:txBody>
+          <a:bodyPr wrap="none" lIns="0" tIns="0" bIns="0">
+            <a:spAutoFit/>
+          </a:bodyPr>
+          <a:lstStyle/>
+          <a:p>
+            <a:pPr>
+              <a:defRPr sz="900" b="0">
+                <a:solidFill>
+                  <a:srgbClr val="CCCCCC"/>
+                </a:solidFill>
+                <a:latin typeface="Source Sans Pro"/>
+              </a:defRPr>
+            </a:pPr>
+            <a:r>
+              <a:t>Color Usage</a:t>
+            </a:r>
+          </a:p>
+        </p:txBody>
+      </p:sp>
+      <p:sp>
+        <p:nvSpPr>
+          <p:cNvPr id="31" name="TextBox 30"/>
+          <p:cNvSpPr txBox="1"/>
+          <p:nvPr/>
+        </p:nvSpPr>
+        <p:spPr>
+          <a:xfrm>
+            <a:off x="6492240" y="2743200"/>
+            <a:ext cx="1828800" cy="274320"/>
+          </a:xfrm>
+          <a:prstGeom prst="rect">
+            <a:avLst/>
+          </a:prstGeom>
+          <a:noFill/>
+        </p:spPr>
+        <p:txBody>
+          <a:bodyPr wrap="none" lIns="0" rIns="0" tIns="0" bIns="0">
+            <a:spAutoFit/>
+          </a:bodyPr>
+          <a:lstStyle/>
+          <a:p>
+            <a:pPr>
+              <a:defRPr sz="1200" b="1">
+                <a:solidFill>
+                  <a:srgbClr val="FFFFFF"/>
+                </a:solidFill>
+                <a:latin typeface="Source Sans Pro"/>
+              </a:defRPr>
+            </a:pPr>
+            <a:r>
+              <a:t>Typography</a:t>
+            </a:r>
+          </a:p>
+        </p:txBody>
+      </p:sp>
+      <p:cxnSp>
+        <p:nvCxnSpPr>
+          <p:cNvPr id="32" name="Connector 31"/>
+          <p:cNvCxnSpPr/>
+          <p:nvPr/>
+        </p:nvCxnSpPr>
+        <p:spPr>
+          <a:xfrm>
+            <a:off x="8366759" y="2852928"/>
+            <a:ext cx="365760" cy="0"/>
+          </a:xfrm>
+          <a:prstGeom prst="line">
+            <a:avLst/>
+          </a:prstGeom>
+          <a:ln w="19050">
+            <a:solidFill>
+              <a:srgbClr val="2E86AB"/>
+            </a:solidFill>
+          </a:ln>
+        </p:spPr>
+        <p:style>
+          <a:lnRef idx="2">
+            <a:schemeClr val="accent1"/>
+          </a:lnRef>
+          <a:fillRef idx="0">
+            <a:schemeClr val="accent1"/>
+          </a:fillRef>
+          <a:effectRef idx="1">
+            <a:schemeClr val="accent1"/>
+          </a:effectRef>
+          <a:fontRef idx="minor">
+            <a:schemeClr val="tx1"/>
+          </a:fontRef>
+        </p:style>
+      </p:cxnSp>
+      <p:sp>
+        <p:nvSpPr>
+          <p:cNvPr id="33" name="TextBox 32"/>
+          <p:cNvSpPr txBox="1"/>
+          <p:nvPr/>
+        </p:nvSpPr>
+        <p:spPr>
+          <a:xfrm>
+            <a:off x="8778240" y="2743200"/>
+            <a:ext cx="274320" cy="274320"/>
+          </a:xfrm>
+          <a:prstGeom prst="rect">
+            <a:avLst/>
+          </a:prstGeom>
+          <a:noFill/>
+        </p:spPr>
+        <p:txBody>
+          <a:bodyPr wrap="none" lIns="0" tIns="0" bIns="0">
+            <a:spAutoFit/>
+          </a:bodyPr>
+          <a:lstStyle/>
+          <a:p>
+            <a:pPr>
+              <a:defRPr sz="1200" b="1">
+                <a:solidFill>
+                  <a:srgbClr val="2E86AB"/>
+                </a:solidFill>
+                <a:latin typeface="Source Sans Pro"/>
+              </a:defRPr>
+            </a:pPr>
+            <a:r>
+              <a:t>08</a:t>
+            </a:r>
+          </a:p>
+        </p:txBody>
+      </p:sp>
+      <p:sp>
+        <p:nvSpPr>
+          <p:cNvPr id="34" name="TextBox 33"/>
+          <p:cNvSpPr txBox="1"/>
+          <p:nvPr/>
+        </p:nvSpPr>
+        <p:spPr>
+          <a:xfrm>
+            <a:off x="6675120" y="3108960"/>
+            <a:ext cx="1828800" cy="228600"/>
+          </a:xfrm>
+          <a:prstGeom prst="rect">
+            <a:avLst/>
+          </a:prstGeom>
+          <a:noFill/>
+        </p:spPr>
+        <p:txBody>
+          <a:bodyPr wrap="none" lIns="0" tIns="0" bIns="0">
+            <a:spAutoFit/>
+          </a:bodyPr>
+          <a:lstStyle/>
+          <a:p>
+            <a:pPr>
+              <a:defRPr sz="900" b="0">
+                <a:solidFill>
+                  <a:srgbClr val="CCCCCC"/>
+                </a:solidFill>
+                <a:latin typeface="Source Sans Pro"/>
+              </a:defRPr>
+            </a:pPr>
+            <a:r>
+              <a:t>Brand Font</a:t>
+            </a:r>
+          </a:p>
+        </p:txBody>
+      </p:sp>
+      <p:sp>
+        <p:nvSpPr>
+          <p:cNvPr id="35" name="TextBox 34"/>
+          <p:cNvSpPr txBox="1"/>
+          <p:nvPr/>
+        </p:nvSpPr>
+        <p:spPr>
+          <a:xfrm>
+            <a:off x="6675120" y="3337560"/>
+            <a:ext cx="1828800" cy="228600"/>
+          </a:xfrm>
+          <a:prstGeom prst="rect">
+            <a:avLst/>
+          </a:prstGeom>
+          <a:noFill/>
+        </p:spPr>
+        <p:txBody>
+          <a:bodyPr wrap="none" lIns="0" tIns="0" bIns="0">
+            <a:spAutoFit/>
+          </a:bodyPr>
+          <a:lstStyle/>
+          <a:p>
+            <a:pPr>
+              <a:defRPr sz="900" b="0">
+                <a:solidFill>
+                  <a:srgbClr val="CCCCCC"/>
+                </a:solidFill>
+                <a:latin typeface="Source Sans Pro"/>
+              </a:defRPr>
+            </a:pPr>
+            <a:r>
+              <a:t>Font Usage</a:t>
             </a:r>
           </a:p>
         </p:txBody>
@@ -4460,7 +5049,222 @@
         </p:nvSpPr>
         <p:spPr>
           <a:xfrm>
-            <a:off x="6675120" y="2377440"/>
+            <a:off x="6675120" y="3566160"/>
+            <a:ext cx="1828800" cy="228600"/>
+          </a:xfrm>
+          <a:prstGeom prst="rect">
+            <a:avLst/>
+          </a:prstGeom>
+          <a:noFill/>
+        </p:spPr>
+        <p:txBody>
+          <a:bodyPr wrap="none" lIns="0" tIns="0" bIns="0">
+            <a:spAutoFit/>
+          </a:bodyPr>
+          <a:lstStyle/>
+          <a:p>
+            <a:pPr>
+              <a:defRPr sz="900" b="0">
+                <a:solidFill>
+                  <a:srgbClr val="CCCCCC"/>
+                </a:solidFill>
+                <a:latin typeface="Source Sans Pro"/>
+              </a:defRPr>
+            </a:pPr>
+            <a:r>
+              <a:t>Text Hierarchy</a:t>
+            </a:r>
+          </a:p>
+        </p:txBody>
+      </p:sp>
+      <p:sp>
+        <p:nvSpPr>
+          <p:cNvPr id="37" name="TextBox 36"/>
+          <p:cNvSpPr txBox="1"/>
+          <p:nvPr/>
+        </p:nvSpPr>
+        <p:spPr>
+          <a:xfrm>
+            <a:off x="6492240" y="3931920"/>
+            <a:ext cx="1828800" cy="274320"/>
+          </a:xfrm>
+          <a:prstGeom prst="rect">
+            <a:avLst/>
+          </a:prstGeom>
+          <a:noFill/>
+        </p:spPr>
+        <p:txBody>
+          <a:bodyPr wrap="none" lIns="0" rIns="0" tIns="0" bIns="0">
+            <a:spAutoFit/>
+          </a:bodyPr>
+          <a:lstStyle/>
+          <a:p>
+            <a:pPr>
+              <a:defRPr sz="1200" b="1">
+                <a:solidFill>
+                  <a:srgbClr val="FFFFFF"/>
+                </a:solidFill>
+                <a:latin typeface="Source Sans Pro"/>
+              </a:defRPr>
+            </a:pPr>
+            <a:r>
+              <a:t>Visual Guidelines</a:t>
+            </a:r>
+          </a:p>
+        </p:txBody>
+      </p:sp>
+      <p:cxnSp>
+        <p:nvCxnSpPr>
+          <p:cNvPr id="38" name="Connector 37"/>
+          <p:cNvCxnSpPr/>
+          <p:nvPr/>
+        </p:nvCxnSpPr>
+        <p:spPr>
+          <a:xfrm>
+            <a:off x="8366759" y="4041648"/>
+            <a:ext cx="365760" cy="0"/>
+          </a:xfrm>
+          <a:prstGeom prst="line">
+            <a:avLst/>
+          </a:prstGeom>
+          <a:ln w="19050">
+            <a:solidFill>
+              <a:srgbClr val="2E86AB"/>
+            </a:solidFill>
+          </a:ln>
+        </p:spPr>
+        <p:style>
+          <a:lnRef idx="2">
+            <a:schemeClr val="accent1"/>
+          </a:lnRef>
+          <a:fillRef idx="0">
+            <a:schemeClr val="accent1"/>
+          </a:fillRef>
+          <a:effectRef idx="1">
+            <a:schemeClr val="accent1"/>
+          </a:effectRef>
+          <a:fontRef idx="minor">
+            <a:schemeClr val="tx1"/>
+          </a:fontRef>
+        </p:style>
+      </p:cxnSp>
+      <p:sp>
+        <p:nvSpPr>
+          <p:cNvPr id="39" name="TextBox 38"/>
+          <p:cNvSpPr txBox="1"/>
+          <p:nvPr/>
+        </p:nvSpPr>
+        <p:spPr>
+          <a:xfrm>
+            <a:off x="8778240" y="3931920"/>
+            <a:ext cx="274320" cy="274320"/>
+          </a:xfrm>
+          <a:prstGeom prst="rect">
+            <a:avLst/>
+          </a:prstGeom>
+          <a:noFill/>
+        </p:spPr>
+        <p:txBody>
+          <a:bodyPr wrap="none" lIns="0" tIns="0" bIns="0">
+            <a:spAutoFit/>
+          </a:bodyPr>
+          <a:lstStyle/>
+          <a:p>
+            <a:pPr>
+              <a:defRPr sz="1200" b="1">
+                <a:solidFill>
+                  <a:srgbClr val="2E86AB"/>
+                </a:solidFill>
+                <a:latin typeface="Source Sans Pro"/>
+              </a:defRPr>
+            </a:pPr>
+            <a:r>
+              <a:t>09</a:t>
+            </a:r>
+          </a:p>
+        </p:txBody>
+      </p:sp>
+      <p:sp>
+        <p:nvSpPr>
+          <p:cNvPr id="40" name="TextBox 39"/>
+          <p:cNvSpPr txBox="1"/>
+          <p:nvPr/>
+        </p:nvSpPr>
+        <p:spPr>
+          <a:xfrm>
+            <a:off x="6675120" y="4297680"/>
+            <a:ext cx="1828800" cy="228600"/>
+          </a:xfrm>
+          <a:prstGeom prst="rect">
+            <a:avLst/>
+          </a:prstGeom>
+          <a:noFill/>
+        </p:spPr>
+        <p:txBody>
+          <a:bodyPr wrap="none" lIns="0" tIns="0" bIns="0">
+            <a:spAutoFit/>
+          </a:bodyPr>
+          <a:lstStyle/>
+          <a:p>
+            <a:pPr>
+              <a:defRPr sz="900" b="0">
+                <a:solidFill>
+                  <a:srgbClr val="CCCCCC"/>
+                </a:solidFill>
+                <a:latin typeface="Source Sans Pro"/>
+              </a:defRPr>
+            </a:pPr>
+            <a:r>
+              <a:t>Visual Style</a:t>
+            </a:r>
+          </a:p>
+        </p:txBody>
+      </p:sp>
+      <p:sp>
+        <p:nvSpPr>
+          <p:cNvPr id="41" name="TextBox 40"/>
+          <p:cNvSpPr txBox="1"/>
+          <p:nvPr/>
+        </p:nvSpPr>
+        <p:spPr>
+          <a:xfrm>
+            <a:off x="6675120" y="4526280"/>
+            <a:ext cx="1828800" cy="228600"/>
+          </a:xfrm>
+          <a:prstGeom prst="rect">
+            <a:avLst/>
+          </a:prstGeom>
+          <a:noFill/>
+        </p:spPr>
+        <p:txBody>
+          <a:bodyPr wrap="none" lIns="0" tIns="0" bIns="0">
+            <a:spAutoFit/>
+          </a:bodyPr>
+          <a:lstStyle/>
+          <a:p>
+            <a:pPr>
+              <a:defRPr sz="900" b="0">
+                <a:solidFill>
+                  <a:srgbClr val="CCCCCC"/>
+                </a:solidFill>
+                <a:latin typeface="Source Sans Pro"/>
+              </a:defRPr>
+            </a:pPr>
+            <a:r>
+              <a:t>Photography</a:t>
+            </a:r>
+          </a:p>
+        </p:txBody>
+      </p:sp>
+      <p:sp>
+        <p:nvSpPr>
+          <p:cNvPr id="42" name="TextBox 41"/>
+          <p:cNvSpPr txBox="1"/>
+          <p:nvPr/>
+        </p:nvSpPr>
+        <p:spPr>
+          <a:xfrm>
+            <a:off x="6675120" y="4754880"/>
             <a:ext cx="1828800" cy="228600"/>
           </a:xfrm>
           <a:prstGeom prst="rect">
@@ -4748,175 +5552,8 @@
               </a:defRPr>
             </a:pPr>
             <a:r>
-              <a:t>Vision: To be the preferred partner for businesses seeking excellence and innovation in their field.</a:t>
-            </a:r>
-          </a:p>
-          <a:p>
-            <a:pPr algn="l">
-              <a:spcAft>
-                <a:spcPts val="800"/>
-              </a:spcAft>
-              <a:defRPr sz="2000" b="0">
-                <a:solidFill>
-                  <a:srgbClr val="FFFFFF"/>
-                </a:solidFill>
-                <a:latin typeface="Source Sans Pro"/>
-              </a:defRPr>
-            </a:pPr>
-          </a:p>
-          <a:p>
-            <a:pPr algn="l">
-              <a:spcAft>
-                <a:spcPts val="800"/>
-              </a:spcAft>
-              <a:defRPr sz="2000" b="0">
-                <a:solidFill>
-                  <a:srgbClr val="FFFFFF"/>
-                </a:solidFill>
-                <a:latin typeface="Source Sans Pro"/>
-              </a:defRPr>
-            </a:pPr>
-            <a:r>
-              <a:t>Mission: We deliver exceptional solutions that drive growth and create lasting value for our clients and communities.</a:t>
-            </a:r>
-          </a:p>
-          <a:p>
-            <a:pPr algn="l">
-              <a:spcAft>
-                <a:spcPts val="800"/>
-              </a:spcAft>
-              <a:defRPr sz="2000" b="0">
-                <a:solidFill>
-                  <a:srgbClr val="FFFFFF"/>
-                </a:solidFill>
-                <a:latin typeface="Source Sans Pro"/>
-              </a:defRPr>
-            </a:pPr>
-          </a:p>
-          <a:p>
-            <a:pPr algn="l">
-              <a:spcAft>
-                <a:spcPts val="800"/>
-              </a:spcAft>
-              <a:defRPr sz="2000" b="0">
-                <a:solidFill>
-                  <a:srgbClr val="FFFFFF"/>
-                </a:solidFill>
-                <a:latin typeface="Source Sans Pro"/>
-              </a:defRPr>
-            </a:pPr>
-            <a:r>
-              <a:t>Core Values:</a:t>
-            </a:r>
-          </a:p>
-          <a:p>
-            <a:pPr algn="l">
-              <a:spcAft>
-                <a:spcPts val="800"/>
-              </a:spcAft>
-              <a:defRPr sz="2000" b="0">
-                <a:solidFill>
-                  <a:srgbClr val="FFFFFF"/>
-                </a:solidFill>
-                <a:latin typeface="Source Sans Pro"/>
-              </a:defRPr>
-            </a:pPr>
-            <a:r>
-              <a:t>• Innovation: Driving progress through creative thinking and breakthrough solutions</a:t>
-            </a:r>
-          </a:p>
-          <a:p>
-            <a:pPr algn="l">
-              <a:spcAft>
-                <a:spcPts val="800"/>
-              </a:spcAft>
-              <a:defRPr sz="2000" b="0">
-                <a:solidFill>
-                  <a:srgbClr val="FFFFFF"/>
-                </a:solidFill>
-                <a:latin typeface="Source Sans Pro"/>
-              </a:defRPr>
-            </a:pPr>
-            <a:r>
-              <a:t>• Simplicity: Embodying simplicity in all aspects of our business operations</a:t>
-            </a:r>
-          </a:p>
-          <a:p>
-            <a:pPr algn="l">
-              <a:spcAft>
-                <a:spcPts val="800"/>
-              </a:spcAft>
-              <a:defRPr sz="2000" b="0">
-                <a:solidFill>
-                  <a:srgbClr val="FFFFFF"/>
-                </a:solidFill>
-                <a:latin typeface="Source Sans Pro"/>
-              </a:defRPr>
-            </a:pPr>
-            <a:r>
-              <a:t>• Human-Centered: Embodying human-centered in all aspects of our business operations</a:t>
-            </a:r>
-          </a:p>
-          <a:p>
-            <a:pPr algn="l">
-              <a:spcAft>
-                <a:spcPts val="800"/>
-              </a:spcAft>
-              <a:defRPr sz="2000" b="0">
-                <a:solidFill>
-                  <a:srgbClr val="FFFFFF"/>
-                </a:solidFill>
-                <a:latin typeface="Source Sans Pro"/>
-              </a:defRPr>
-            </a:pPr>
-            <a:r>
-              <a:t>• Excellence: Pursuing the highest standards in everything we deliver</a:t>
-            </a:r>
-          </a:p>
-          <a:p>
-            <a:pPr algn="l">
-              <a:spcAft>
-                <a:spcPts val="800"/>
-              </a:spcAft>
-              <a:defRPr sz="2000" b="0">
-                <a:solidFill>
-                  <a:srgbClr val="FFFFFF"/>
-                </a:solidFill>
-                <a:latin typeface="Source Sans Pro"/>
-              </a:defRPr>
-            </a:pPr>
-            <a:r>
-              <a:t>• Trust: Building lasting relationships through transparency and consistent delivery</a:t>
-            </a:r>
-          </a:p>
-          <a:p>
-            <a:pPr algn="l">
-              <a:spcAft>
-                <a:spcPts val="800"/>
-              </a:spcAft>
-              <a:defRPr sz="2000" b="0">
-                <a:solidFill>
-                  <a:srgbClr val="FFFFFF"/>
-                </a:solidFill>
-                <a:latin typeface="Source Sans Pro"/>
-              </a:defRPr>
-            </a:pPr>
-            <a:r>
-              <a:t>• Reliability: Ensuring dependable performance and unwavering support in all our services</a:t>
-            </a:r>
-          </a:p>
-          <a:p>
-            <a:pPr algn="l">
-              <a:spcAft>
-                <a:spcPts val="800"/>
-              </a:spcAft>
-              <a:defRPr sz="2000" b="0">
-                <a:solidFill>
-                  <a:srgbClr val="FFFFFF"/>
-                </a:solidFill>
-                <a:latin typeface="Source Sans Pro"/>
-              </a:defRPr>
-            </a:pPr>
+              <a:t>To be the preferred partner for businesses seeking excellence and innovation in their field.</a:t>
+            </a:r>
           </a:p>
         </p:txBody>
       </p:sp>
@@ -4964,7 +5601,7 @@
         <p:spPr>
           <a:xfrm>
             <a:off x="800100" y="5189220"/>
-            <a:ext cx="3657600" cy="731520"/>
+            <a:ext cx="5486400" cy="731520"/>
           </a:xfrm>
           <a:prstGeom prst="rect">
             <a:avLst/>
@@ -4986,7 +5623,7 @@
               </a:defRPr>
             </a:pPr>
             <a:r>
-              <a:t>BRAND PURPOSE</a:t>
+              <a:t>VISION</a:t>
             </a:r>
           </a:p>
         </p:txBody>
@@ -5002,66 +5639,105 @@
 <file path=ppt/slides/slide5.xml><?xml version="1.0" encoding="utf-8"?>
 <p:sld xmlns:a="http://schemas.openxmlformats.org/drawingml/2006/main" xmlns:p="http://schemas.openxmlformats.org/presentationml/2006/main" xmlns:r="http://schemas.openxmlformats.org/officeDocument/2006/relationships">
   <p:cSld>
+    <p:bg>
+      <p:bgPr>
+        <a:solidFill>
+          <a:srgbClr val="000000"/>
+        </a:solidFill>
+        <a:effectLst/>
+      </p:bgPr>
+    </p:bg>
     <p:spTree>
       <p:nvGrpSpPr>
         <p:cNvPr id="1" name=""/>
         <p:cNvGrpSpPr/>
         <p:nvPr/>
       </p:nvGrpSpPr>
-      <p:sp>
-        <p:nvSpPr>
-          <p:cNvPr id="2" name="Rectangle 1"/>
-          <p:cNvSpPr/>
-          <p:nvPr/>
-        </p:nvSpPr>
-        <p:spPr>
-          <a:xfrm>
-            <a:off x="0" y="0"/>
-            <a:ext cx="9144000" cy="6858000"/>
-          </a:xfrm>
-          <a:prstGeom prst="rect">
-            <a:avLst/>
-          </a:prstGeom>
-          <a:solidFill>
-            <a:srgbClr val="1A1A1A"/>
-          </a:solidFill>
-          <a:ln>
-            <a:noFill/>
+      <p:grpSpPr/>
+      <p:sp>
+        <p:nvSpPr>
+          <p:cNvPr id="2" name="TextBox 1"/>
+          <p:cNvSpPr txBox="1"/>
+          <p:nvPr/>
+        </p:nvSpPr>
+        <p:spPr>
+          <a:xfrm>
+            <a:off x="800100" y="1051560"/>
+            <a:ext cx="6858000" cy="2971800"/>
+          </a:xfrm>
+          <a:prstGeom prst="rect">
+            <a:avLst/>
+          </a:prstGeom>
+          <a:noFill/>
+        </p:spPr>
+        <p:txBody>
+          <a:bodyPr wrap="square" lIns="0" rIns="0" tIns="0" bIns="0">
+            <a:spAutoFit/>
+          </a:bodyPr>
+          <a:lstStyle/>
+          <a:p>
+            <a:pPr algn="l">
+              <a:spcAft>
+                <a:spcPts val="800"/>
+              </a:spcAft>
+              <a:defRPr sz="2000" b="0">
+                <a:solidFill>
+                  <a:srgbClr val="FFFFFF"/>
+                </a:solidFill>
+                <a:latin typeface="Source Sans Pro"/>
+              </a:defRPr>
+            </a:pPr>
+            <a:r>
+              <a:t>We deliver exceptional solutions that drive growth and create lasting value for our clients and communities.</a:t>
+            </a:r>
+          </a:p>
+        </p:txBody>
+      </p:sp>
+      <p:cxnSp>
+        <p:nvCxnSpPr>
+          <p:cNvPr id="3" name="Connector 2"/>
+          <p:cNvCxnSpPr/>
+          <p:nvPr/>
+        </p:nvCxnSpPr>
+        <p:spPr>
+          <a:xfrm>
+            <a:off x="457200" y="4914900.0"/>
+            <a:ext cx="8229600" cy="0.0"/>
+          </a:xfrm>
+          <a:prstGeom prst="line">
+            <a:avLst/>
+          </a:prstGeom>
+          <a:ln w="25400">
+            <a:solidFill>
+              <a:srgbClr val="2E86AB"/>
+            </a:solidFill>
           </a:ln>
         </p:spPr>
         <p:style>
-          <a:lnRef idx="1">
+          <a:lnRef idx="2">
             <a:schemeClr val="accent1"/>
           </a:lnRef>
-          <a:fillRef idx="3">
+          <a:fillRef idx="0">
             <a:schemeClr val="accent1"/>
           </a:fillRef>
-          <a:effectRef idx="2">
+          <a:effectRef idx="1">
             <a:schemeClr val="accent1"/>
           </a:effectRef>
           <a:fontRef idx="minor">
-            <a:schemeClr val="lt1"/>
+            <a:schemeClr val="tx1"/>
           </a:fontRef>
         </p:style>
-        <p:txBody>
-          <a:bodyPr rtlCol="0" anchor="ctr"/>
-          <a:lstStyle/>
-          <a:p>
-            <a:pPr algn="ctr"/>
-          </a:p>
-        </p:txBody>
-      </p:sp>
-      <p:grpSpPr/>
-      <p:sp>
-        <p:nvSpPr>
-          <p:cNvPr id="3" name="TextBox 2"/>
+      </p:cxnSp>
+      <p:sp>
+        <p:nvSpPr>
+          <p:cNvPr id="4" name="TextBox 3"/>
           <p:cNvSpPr txBox="1"/>
           <p:nvPr/>
         </p:nvSpPr>
         <p:spPr>
           <a:xfrm>
-            <a:off x="1143000" y="457200"/>
-            <a:ext cx="6858000" cy="742950"/>
+            <a:off x="800100" y="5189220"/>
+            <a:ext cx="5486400" cy="731520"/>
           </a:xfrm>
           <a:prstGeom prst="rect">
             <a:avLst/>
@@ -5074,8 +5750,8 @@
           </a:bodyPr>
           <a:lstStyle/>
           <a:p>
-            <a:pPr>
-              <a:defRPr sz="3200" b="1">
+            <a:pPr algn="l">
+              <a:defRPr sz="2800" b="1">
                 <a:solidFill>
                   <a:srgbClr val="2E86AB"/>
                 </a:solidFill>
@@ -5083,115 +5759,7 @@
               </a:defRPr>
             </a:pPr>
             <a:r>
-              <a:t>Brand Story</a:t>
-            </a:r>
-          </a:p>
-        </p:txBody>
-      </p:sp>
-      <p:sp>
-        <p:nvSpPr>
-          <p:cNvPr id="4" name="TextBox 3"/>
-          <p:cNvSpPr txBox="1"/>
-          <p:nvPr/>
-        </p:nvSpPr>
-        <p:spPr>
-          <a:xfrm>
-            <a:off x="1143000" y="1943100"/>
-            <a:ext cx="6858000" cy="2971800"/>
-          </a:xfrm>
-          <a:prstGeom prst="rect">
-            <a:avLst/>
-          </a:prstGeom>
-          <a:noFill/>
-        </p:spPr>
-        <p:txBody>
-          <a:bodyPr wrap="square">
-            <a:spAutoFit/>
-          </a:bodyPr>
-          <a:lstStyle/>
-          <a:p>
-            <a:pPr>
-              <a:defRPr sz="1600" b="0">
-                <a:solidFill>
-                  <a:srgbClr val="2E86AB"/>
-                </a:solidFill>
-                <a:latin typeface="Source Sans Pro"/>
-              </a:defRPr>
-            </a:pPr>
-            <a:r>
-              <a:t>We revolutionize technology through innovative design and human-centered solutions that empower businesses to achieve their digital transformation goals.</a:t>
-            </a:r>
-          </a:p>
-        </p:txBody>
-      </p:sp>
-      <p:sp>
-        <p:nvSpPr>
-          <p:cNvPr id="5" name="TextBox 4"/>
-          <p:cNvSpPr txBox="1"/>
-          <p:nvPr/>
-        </p:nvSpPr>
-        <p:spPr>
-          <a:xfrm>
-            <a:off x="457200" y="5657850"/>
-            <a:ext cx="4114800" cy="742950"/>
-          </a:xfrm>
-          <a:prstGeom prst="rect">
-            <a:avLst/>
-          </a:prstGeom>
-          <a:noFill/>
-        </p:spPr>
-        <p:txBody>
-          <a:bodyPr wrap="none">
-            <a:spAutoFit/>
-          </a:bodyPr>
-          <a:lstStyle/>
-          <a:p>
-            <a:pPr algn="l">
-              <a:defRPr sz="1000" b="0">
-                <a:solidFill>
-                  <a:srgbClr val="2E86AB"/>
-                </a:solidFill>
-                <a:latin typeface="Source Sans Pro"/>
-              </a:defRPr>
-            </a:pPr>
-            <a:r>
-              <a:t>TechForward Live</a:t>
-            </a:r>
-          </a:p>
-        </p:txBody>
-      </p:sp>
-      <p:sp>
-        <p:nvSpPr>
-          <p:cNvPr id="6" name="TextBox 5"/>
-          <p:cNvSpPr txBox="1"/>
-          <p:nvPr/>
-        </p:nvSpPr>
-        <p:spPr>
-          <a:xfrm>
-            <a:off x="4572000" y="5657850"/>
-            <a:ext cx="4114800" cy="742950"/>
-          </a:xfrm>
-          <a:prstGeom prst="rect">
-            <a:avLst/>
-          </a:prstGeom>
-          <a:noFill/>
-        </p:spPr>
-        <p:txBody>
-          <a:bodyPr wrap="none">
-            <a:spAutoFit/>
-          </a:bodyPr>
-          <a:lstStyle/>
-          <a:p>
-            <a:pPr algn="r">
-              <a:defRPr sz="1000" b="0">
-                <a:solidFill>
-                  <a:srgbClr val="2E86AB"/>
-                </a:solidFill>
-                <a:latin typeface="Source Sans Pro"/>
-              </a:defRPr>
-            </a:pPr>
-            <a:r>
-              <a:t>5</a:t>
+              <a:t>MISSION</a:t>
             </a:r>
           </a:p>
         </p:txBody>
@@ -5207,66 +5775,214 @@
 <file path=ppt/slides/slide6.xml><?xml version="1.0" encoding="utf-8"?>
 <p:sld xmlns:a="http://schemas.openxmlformats.org/drawingml/2006/main" xmlns:p="http://schemas.openxmlformats.org/presentationml/2006/main" xmlns:r="http://schemas.openxmlformats.org/officeDocument/2006/relationships">
   <p:cSld>
+    <p:bg>
+      <p:bgPr>
+        <a:solidFill>
+          <a:srgbClr val="000000"/>
+        </a:solidFill>
+        <a:effectLst/>
+      </p:bgPr>
+    </p:bg>
     <p:spTree>
       <p:nvGrpSpPr>
         <p:cNvPr id="1" name=""/>
         <p:cNvGrpSpPr/>
         <p:nvPr/>
       </p:nvGrpSpPr>
-      <p:sp>
-        <p:nvSpPr>
-          <p:cNvPr id="2" name="Rectangle 1"/>
-          <p:cNvSpPr/>
-          <p:nvPr/>
-        </p:nvSpPr>
-        <p:spPr>
-          <a:xfrm>
-            <a:off x="0" y="0"/>
-            <a:ext cx="9144000" cy="6858000"/>
-          </a:xfrm>
-          <a:prstGeom prst="rect">
-            <a:avLst/>
-          </a:prstGeom>
-          <a:solidFill>
-            <a:srgbClr val="1A1A1A"/>
-          </a:solidFill>
-          <a:ln>
-            <a:noFill/>
+      <p:grpSpPr/>
+      <p:sp>
+        <p:nvSpPr>
+          <p:cNvPr id="2" name="TextBox 1"/>
+          <p:cNvSpPr txBox="1"/>
+          <p:nvPr/>
+        </p:nvSpPr>
+        <p:spPr>
+          <a:xfrm>
+            <a:off x="800100" y="1051560"/>
+            <a:ext cx="6858000" cy="2971800"/>
+          </a:xfrm>
+          <a:prstGeom prst="rect">
+            <a:avLst/>
+          </a:prstGeom>
+          <a:noFill/>
+        </p:spPr>
+        <p:txBody>
+          <a:bodyPr wrap="square" lIns="0" rIns="0" tIns="0" bIns="0">
+            <a:spAutoFit/>
+          </a:bodyPr>
+          <a:lstStyle/>
+          <a:p>
+            <a:pPr algn="l">
+              <a:spcAft>
+                <a:spcPts val="800"/>
+              </a:spcAft>
+              <a:defRPr sz="2000" b="0">
+                <a:solidFill>
+                  <a:srgbClr val="FFFFFF"/>
+                </a:solidFill>
+                <a:latin typeface="Source Sans Pro"/>
+              </a:defRPr>
+            </a:pPr>
+            <a:r>
+              <a:t>Core Values:</a:t>
+            </a:r>
+          </a:p>
+          <a:p>
+            <a:pPr algn="l">
+              <a:spcAft>
+                <a:spcPts val="800"/>
+              </a:spcAft>
+              <a:defRPr sz="2000" b="0">
+                <a:solidFill>
+                  <a:srgbClr val="FFFFFF"/>
+                </a:solidFill>
+                <a:latin typeface="Source Sans Pro"/>
+              </a:defRPr>
+            </a:pPr>
+            <a:r>
+              <a:t>• Innovation: Driving progress through creative thinking and breakthrough solutions</a:t>
+            </a:r>
+          </a:p>
+          <a:p>
+            <a:pPr algn="l">
+              <a:spcAft>
+                <a:spcPts val="800"/>
+              </a:spcAft>
+              <a:defRPr sz="2000" b="0">
+                <a:solidFill>
+                  <a:srgbClr val="FFFFFF"/>
+                </a:solidFill>
+                <a:latin typeface="Source Sans Pro"/>
+              </a:defRPr>
+            </a:pPr>
+            <a:r>
+              <a:t>• Simplicity: Embodying simplicity in all aspects of our business operations</a:t>
+            </a:r>
+          </a:p>
+          <a:p>
+            <a:pPr algn="l">
+              <a:spcAft>
+                <a:spcPts val="800"/>
+              </a:spcAft>
+              <a:defRPr sz="2000" b="0">
+                <a:solidFill>
+                  <a:srgbClr val="FFFFFF"/>
+                </a:solidFill>
+                <a:latin typeface="Source Sans Pro"/>
+              </a:defRPr>
+            </a:pPr>
+            <a:r>
+              <a:t>• Human-Centered: Embodying human-centered in all aspects of our business operations</a:t>
+            </a:r>
+          </a:p>
+          <a:p>
+            <a:pPr algn="l">
+              <a:spcAft>
+                <a:spcPts val="800"/>
+              </a:spcAft>
+              <a:defRPr sz="2000" b="0">
+                <a:solidFill>
+                  <a:srgbClr val="FFFFFF"/>
+                </a:solidFill>
+                <a:latin typeface="Source Sans Pro"/>
+              </a:defRPr>
+            </a:pPr>
+            <a:r>
+              <a:t>• Excellence: Pursuing the highest standards in everything we deliver</a:t>
+            </a:r>
+          </a:p>
+          <a:p>
+            <a:pPr algn="l">
+              <a:spcAft>
+                <a:spcPts val="800"/>
+              </a:spcAft>
+              <a:defRPr sz="2000" b="0">
+                <a:solidFill>
+                  <a:srgbClr val="FFFFFF"/>
+                </a:solidFill>
+                <a:latin typeface="Source Sans Pro"/>
+              </a:defRPr>
+            </a:pPr>
+            <a:r>
+              <a:t>• Trust: Building lasting relationships through transparency and consistent delivery</a:t>
+            </a:r>
+          </a:p>
+          <a:p>
+            <a:pPr algn="l">
+              <a:spcAft>
+                <a:spcPts val="800"/>
+              </a:spcAft>
+              <a:defRPr sz="2000" b="0">
+                <a:solidFill>
+                  <a:srgbClr val="FFFFFF"/>
+                </a:solidFill>
+                <a:latin typeface="Source Sans Pro"/>
+              </a:defRPr>
+            </a:pPr>
+            <a:r>
+              <a:t>• Reliability: Ensuring dependable performance and unwavering support in all our services</a:t>
+            </a:r>
+          </a:p>
+          <a:p>
+            <a:pPr algn="l">
+              <a:spcAft>
+                <a:spcPts val="800"/>
+              </a:spcAft>
+              <a:defRPr sz="2000" b="0">
+                <a:solidFill>
+                  <a:srgbClr val="FFFFFF"/>
+                </a:solidFill>
+                <a:latin typeface="Source Sans Pro"/>
+              </a:defRPr>
+            </a:pPr>
+          </a:p>
+        </p:txBody>
+      </p:sp>
+      <p:cxnSp>
+        <p:nvCxnSpPr>
+          <p:cNvPr id="3" name="Connector 2"/>
+          <p:cNvCxnSpPr/>
+          <p:nvPr/>
+        </p:nvCxnSpPr>
+        <p:spPr>
+          <a:xfrm>
+            <a:off x="457200" y="4914900.0"/>
+            <a:ext cx="8229600" cy="0.0"/>
+          </a:xfrm>
+          <a:prstGeom prst="line">
+            <a:avLst/>
+          </a:prstGeom>
+          <a:ln w="25400">
+            <a:solidFill>
+              <a:srgbClr val="2E86AB"/>
+            </a:solidFill>
           </a:ln>
         </p:spPr>
         <p:style>
-          <a:lnRef idx="1">
+          <a:lnRef idx="2">
             <a:schemeClr val="accent1"/>
           </a:lnRef>
-          <a:fillRef idx="3">
+          <a:fillRef idx="0">
             <a:schemeClr val="accent1"/>
           </a:fillRef>
-          <a:effectRef idx="2">
+          <a:effectRef idx="1">
             <a:schemeClr val="accent1"/>
           </a:effectRef>
           <a:fontRef idx="minor">
-            <a:schemeClr val="lt1"/>
+            <a:schemeClr val="tx1"/>
           </a:fontRef>
         </p:style>
-        <p:txBody>
-          <a:bodyPr rtlCol="0" anchor="ctr"/>
-          <a:lstStyle/>
-          <a:p>
-            <a:pPr algn="ctr"/>
-          </a:p>
-        </p:txBody>
-      </p:sp>
-      <p:grpSpPr/>
-      <p:sp>
-        <p:nvSpPr>
-          <p:cNvPr id="3" name="TextBox 2"/>
+      </p:cxnSp>
+      <p:sp>
+        <p:nvSpPr>
+          <p:cNvPr id="4" name="TextBox 3"/>
           <p:cNvSpPr txBox="1"/>
           <p:nvPr/>
         </p:nvSpPr>
         <p:spPr>
           <a:xfrm>
-            <a:off x="1143000" y="457200"/>
-            <a:ext cx="6858000" cy="742950"/>
+            <a:off x="800100" y="5189220"/>
+            <a:ext cx="5486400" cy="731520"/>
           </a:xfrm>
           <a:prstGeom prst="rect">
             <a:avLst/>
@@ -5279,8 +5995,8 @@
           </a:bodyPr>
           <a:lstStyle/>
           <a:p>
-            <a:pPr>
-              <a:defRPr sz="3200" b="1">
+            <a:pPr algn="l">
+              <a:defRPr sz="2800" b="1">
                 <a:solidFill>
                   <a:srgbClr val="2E86AB"/>
                 </a:solidFill>
@@ -5288,478 +6004,7 @@
               </a:defRPr>
             </a:pPr>
             <a:r>
-              <a:t>Color Palette</a:t>
-            </a:r>
-          </a:p>
-        </p:txBody>
-      </p:sp>
-      <p:sp>
-        <p:nvSpPr>
-          <p:cNvPr id="4" name="Rectangle 3"/>
-          <p:cNvSpPr/>
-          <p:nvPr/>
-        </p:nvSpPr>
-        <p:spPr>
-          <a:xfrm>
-            <a:off x="1143000" y="1943100"/>
-            <a:ext cx="2057400" cy="1485900"/>
-          </a:xfrm>
-          <a:prstGeom prst="rect">
-            <a:avLst/>
-          </a:prstGeom>
-          <a:solidFill>
-            <a:srgbClr val="2E86AB"/>
-          </a:solidFill>
-          <a:ln w="12700">
-            <a:solidFill>
-              <a:srgbClr val="FFFFFF"/>
-            </a:solidFill>
-          </a:ln>
-        </p:spPr>
-        <p:style>
-          <a:lnRef idx="1">
-            <a:schemeClr val="accent1"/>
-          </a:lnRef>
-          <a:fillRef idx="3">
-            <a:schemeClr val="accent1"/>
-          </a:fillRef>
-          <a:effectRef idx="2">
-            <a:schemeClr val="accent1"/>
-          </a:effectRef>
-          <a:fontRef idx="minor">
-            <a:schemeClr val="lt1"/>
-          </a:fontRef>
-        </p:style>
-        <p:txBody>
-          <a:bodyPr rtlCol="0" anchor="ctr"/>
-          <a:lstStyle/>
-          <a:p>
-            <a:pPr algn="ctr"/>
-          </a:p>
-        </p:txBody>
-      </p:sp>
-      <p:sp>
-        <p:nvSpPr>
-          <p:cNvPr id="5" name="TextBox 4"/>
-          <p:cNvSpPr txBox="1"/>
-          <p:nvPr/>
-        </p:nvSpPr>
-        <p:spPr>
-          <a:xfrm>
-            <a:off x="1143000" y="3429000"/>
-            <a:ext cx="2057400" cy="1485900"/>
-          </a:xfrm>
-          <a:prstGeom prst="rect">
-            <a:avLst/>
-          </a:prstGeom>
-          <a:noFill/>
-        </p:spPr>
-        <p:txBody>
-          <a:bodyPr wrap="square">
-            <a:spAutoFit/>
-          </a:bodyPr>
-          <a:lstStyle/>
-          <a:p>
-            <a:pPr>
-              <a:defRPr sz="1000" b="0">
-                <a:solidFill>
-                  <a:srgbClr val="2E86AB"/>
-                </a:solidFill>
-                <a:latin typeface="Source Sans Pro"/>
-              </a:defRPr>
-            </a:pPr>
-            <a:r>
-              <a:t>Primary</a:t>
-            </a:r>
-          </a:p>
-          <a:p>
-            <a:pPr>
-              <a:defRPr sz="1000" b="0">
-                <a:solidFill>
-                  <a:srgbClr val="2E86AB"/>
-                </a:solidFill>
-                <a:latin typeface="Source Sans Pro"/>
-              </a:defRPr>
-            </a:pPr>
-            <a:r>
-              <a:t>#2E86AB</a:t>
-            </a:r>
-          </a:p>
-          <a:p>
-            <a:pPr>
-              <a:defRPr sz="1000" b="0">
-                <a:solidFill>
-                  <a:srgbClr val="2E86AB"/>
-                </a:solidFill>
-                <a:latin typeface="Source Sans Pro"/>
-              </a:defRPr>
-            </a:pPr>
-            <a:r>
-              <a:t>RGB(46, 134, 171)</a:t>
-            </a:r>
-          </a:p>
-          <a:p>
-            <a:pPr>
-              <a:defRPr sz="1000" b="0">
-                <a:solidFill>
-                  <a:srgbClr val="2E86AB"/>
-                </a:solidFill>
-                <a:latin typeface="Source Sans Pro"/>
-              </a:defRPr>
-            </a:pPr>
-            <a:r>
-              <a:t>CMYK(73, 21, 0, 32)</a:t>
-            </a:r>
-          </a:p>
-          <a:p>
-            <a:pPr>
-              <a:defRPr sz="1000" b="0">
-                <a:solidFill>
-                  <a:srgbClr val="2E86AB"/>
-                </a:solidFill>
-                <a:latin typeface="Source Sans Pro"/>
-              </a:defRPr>
-            </a:pPr>
-            <a:r>
-              <a:t>Use Light Text</a:t>
-            </a:r>
-          </a:p>
-        </p:txBody>
-      </p:sp>
-      <p:sp>
-        <p:nvSpPr>
-          <p:cNvPr id="6" name="Rectangle 5"/>
-          <p:cNvSpPr/>
-          <p:nvPr/>
-        </p:nvSpPr>
-        <p:spPr>
-          <a:xfrm>
-            <a:off x="3886200" y="1943100"/>
-            <a:ext cx="2057400" cy="1485900"/>
-          </a:xfrm>
-          <a:prstGeom prst="rect">
-            <a:avLst/>
-          </a:prstGeom>
-          <a:solidFill>
-            <a:srgbClr val="A23B72"/>
-          </a:solidFill>
-          <a:ln w="12700">
-            <a:solidFill>
-              <a:srgbClr val="FFFFFF"/>
-            </a:solidFill>
-          </a:ln>
-        </p:spPr>
-        <p:style>
-          <a:lnRef idx="1">
-            <a:schemeClr val="accent1"/>
-          </a:lnRef>
-          <a:fillRef idx="3">
-            <a:schemeClr val="accent1"/>
-          </a:fillRef>
-          <a:effectRef idx="2">
-            <a:schemeClr val="accent1"/>
-          </a:effectRef>
-          <a:fontRef idx="minor">
-            <a:schemeClr val="lt1"/>
-          </a:fontRef>
-        </p:style>
-        <p:txBody>
-          <a:bodyPr rtlCol="0" anchor="ctr"/>
-          <a:lstStyle/>
-          <a:p>
-            <a:pPr algn="ctr"/>
-          </a:p>
-        </p:txBody>
-      </p:sp>
-      <p:sp>
-        <p:nvSpPr>
-          <p:cNvPr id="7" name="TextBox 6"/>
-          <p:cNvSpPr txBox="1"/>
-          <p:nvPr/>
-        </p:nvSpPr>
-        <p:spPr>
-          <a:xfrm>
-            <a:off x="3886200" y="3429000"/>
-            <a:ext cx="2057400" cy="1485900"/>
-          </a:xfrm>
-          <a:prstGeom prst="rect">
-            <a:avLst/>
-          </a:prstGeom>
-          <a:noFill/>
-        </p:spPr>
-        <p:txBody>
-          <a:bodyPr wrap="square">
-            <a:spAutoFit/>
-          </a:bodyPr>
-          <a:lstStyle/>
-          <a:p>
-            <a:pPr>
-              <a:defRPr sz="1000" b="0">
-                <a:solidFill>
-                  <a:srgbClr val="2E86AB"/>
-                </a:solidFill>
-                <a:latin typeface="Source Sans Pro"/>
-              </a:defRPr>
-            </a:pPr>
-            <a:r>
-              <a:t>Secondary</a:t>
-            </a:r>
-          </a:p>
-          <a:p>
-            <a:pPr>
-              <a:defRPr sz="1000" b="0">
-                <a:solidFill>
-                  <a:srgbClr val="2E86AB"/>
-                </a:solidFill>
-                <a:latin typeface="Source Sans Pro"/>
-              </a:defRPr>
-            </a:pPr>
-            <a:r>
-              <a:t>#A23B72</a:t>
-            </a:r>
-          </a:p>
-          <a:p>
-            <a:pPr>
-              <a:defRPr sz="1000" b="0">
-                <a:solidFill>
-                  <a:srgbClr val="2E86AB"/>
-                </a:solidFill>
-                <a:latin typeface="Source Sans Pro"/>
-              </a:defRPr>
-            </a:pPr>
-            <a:r>
-              <a:t>RGB(162, 59, 114)</a:t>
-            </a:r>
-          </a:p>
-          <a:p>
-            <a:pPr>
-              <a:defRPr sz="1000" b="0">
-                <a:solidFill>
-                  <a:srgbClr val="2E86AB"/>
-                </a:solidFill>
-                <a:latin typeface="Source Sans Pro"/>
-              </a:defRPr>
-            </a:pPr>
-            <a:r>
-              <a:t>CMYK(0, 63, 29, 36)</a:t>
-            </a:r>
-          </a:p>
-          <a:p>
-            <a:pPr>
-              <a:defRPr sz="1000" b="0">
-                <a:solidFill>
-                  <a:srgbClr val="2E86AB"/>
-                </a:solidFill>
-                <a:latin typeface="Source Sans Pro"/>
-              </a:defRPr>
-            </a:pPr>
-            <a:r>
-              <a:t>Use Light Text</a:t>
-            </a:r>
-          </a:p>
-        </p:txBody>
-      </p:sp>
-      <p:sp>
-        <p:nvSpPr>
-          <p:cNvPr id="8" name="Rectangle 7"/>
-          <p:cNvSpPr/>
-          <p:nvPr/>
-        </p:nvSpPr>
-        <p:spPr>
-          <a:xfrm>
-            <a:off x="6629400" y="1943100"/>
-            <a:ext cx="2057400" cy="1485900"/>
-          </a:xfrm>
-          <a:prstGeom prst="rect">
-            <a:avLst/>
-          </a:prstGeom>
-          <a:solidFill>
-            <a:srgbClr val="F18F01"/>
-          </a:solidFill>
-          <a:ln w="12700">
-            <a:solidFill>
-              <a:srgbClr val="FFFFFF"/>
-            </a:solidFill>
-          </a:ln>
-        </p:spPr>
-        <p:style>
-          <a:lnRef idx="1">
-            <a:schemeClr val="accent1"/>
-          </a:lnRef>
-          <a:fillRef idx="3">
-            <a:schemeClr val="accent1"/>
-          </a:fillRef>
-          <a:effectRef idx="2">
-            <a:schemeClr val="accent1"/>
-          </a:effectRef>
-          <a:fontRef idx="minor">
-            <a:schemeClr val="lt1"/>
-          </a:fontRef>
-        </p:style>
-        <p:txBody>
-          <a:bodyPr rtlCol="0" anchor="ctr"/>
-          <a:lstStyle/>
-          <a:p>
-            <a:pPr algn="ctr"/>
-          </a:p>
-        </p:txBody>
-      </p:sp>
-      <p:sp>
-        <p:nvSpPr>
-          <p:cNvPr id="9" name="TextBox 8"/>
-          <p:cNvSpPr txBox="1"/>
-          <p:nvPr/>
-        </p:nvSpPr>
-        <p:spPr>
-          <a:xfrm>
-            <a:off x="6629400" y="3429000"/>
-            <a:ext cx="2057400" cy="1485900"/>
-          </a:xfrm>
-          <a:prstGeom prst="rect">
-            <a:avLst/>
-          </a:prstGeom>
-          <a:noFill/>
-        </p:spPr>
-        <p:txBody>
-          <a:bodyPr wrap="square">
-            <a:spAutoFit/>
-          </a:bodyPr>
-          <a:lstStyle/>
-          <a:p>
-            <a:pPr>
-              <a:defRPr sz="1000" b="0">
-                <a:solidFill>
-                  <a:srgbClr val="2E86AB"/>
-                </a:solidFill>
-                <a:latin typeface="Source Sans Pro"/>
-              </a:defRPr>
-            </a:pPr>
-            <a:r>
-              <a:t>Accent</a:t>
-            </a:r>
-          </a:p>
-          <a:p>
-            <a:pPr>
-              <a:defRPr sz="1000" b="0">
-                <a:solidFill>
-                  <a:srgbClr val="2E86AB"/>
-                </a:solidFill>
-                <a:latin typeface="Source Sans Pro"/>
-              </a:defRPr>
-            </a:pPr>
-            <a:r>
-              <a:t>#F18F01</a:t>
-            </a:r>
-          </a:p>
-          <a:p>
-            <a:pPr>
-              <a:defRPr sz="1000" b="0">
-                <a:solidFill>
-                  <a:srgbClr val="2E86AB"/>
-                </a:solidFill>
-                <a:latin typeface="Source Sans Pro"/>
-              </a:defRPr>
-            </a:pPr>
-            <a:r>
-              <a:t>RGB(241, 143, 1)</a:t>
-            </a:r>
-          </a:p>
-          <a:p>
-            <a:pPr>
-              <a:defRPr sz="1000" b="0">
-                <a:solidFill>
-                  <a:srgbClr val="2E86AB"/>
-                </a:solidFill>
-                <a:latin typeface="Source Sans Pro"/>
-              </a:defRPr>
-            </a:pPr>
-            <a:r>
-              <a:t>CMYK(0, 40, 99, 5)</a:t>
-            </a:r>
-          </a:p>
-          <a:p>
-            <a:pPr>
-              <a:defRPr sz="1000" b="0">
-                <a:solidFill>
-                  <a:srgbClr val="2E86AB"/>
-                </a:solidFill>
-                <a:latin typeface="Source Sans Pro"/>
-              </a:defRPr>
-            </a:pPr>
-            <a:r>
-              <a:t>Use Dark Text</a:t>
-            </a:r>
-          </a:p>
-        </p:txBody>
-      </p:sp>
-      <p:sp>
-        <p:nvSpPr>
-          <p:cNvPr id="10" name="TextBox 9"/>
-          <p:cNvSpPr txBox="1"/>
-          <p:nvPr/>
-        </p:nvSpPr>
-        <p:spPr>
-          <a:xfrm>
-            <a:off x="457200" y="5657850"/>
-            <a:ext cx="4114800" cy="742950"/>
-          </a:xfrm>
-          <a:prstGeom prst="rect">
-            <a:avLst/>
-          </a:prstGeom>
-          <a:noFill/>
-        </p:spPr>
-        <p:txBody>
-          <a:bodyPr wrap="none">
-            <a:spAutoFit/>
-          </a:bodyPr>
-          <a:lstStyle/>
-          <a:p>
-            <a:pPr algn="l">
-              <a:defRPr sz="1000" b="0">
-                <a:solidFill>
-                  <a:srgbClr val="2E86AB"/>
-                </a:solidFill>
-                <a:latin typeface="Source Sans Pro"/>
-              </a:defRPr>
-            </a:pPr>
-            <a:r>
-              <a:t>TechForward Live</a:t>
-            </a:r>
-          </a:p>
-        </p:txBody>
-      </p:sp>
-      <p:sp>
-        <p:nvSpPr>
-          <p:cNvPr id="11" name="TextBox 10"/>
-          <p:cNvSpPr txBox="1"/>
-          <p:nvPr/>
-        </p:nvSpPr>
-        <p:spPr>
-          <a:xfrm>
-            <a:off x="4572000" y="5657850"/>
-            <a:ext cx="4114800" cy="742950"/>
-          </a:xfrm>
-          <a:prstGeom prst="rect">
-            <a:avLst/>
-          </a:prstGeom>
-          <a:noFill/>
-        </p:spPr>
-        <p:txBody>
-          <a:bodyPr wrap="none">
-            <a:spAutoFit/>
-          </a:bodyPr>
-          <a:lstStyle/>
-          <a:p>
-            <a:pPr algn="r">
-              <a:defRPr sz="1000" b="0">
-                <a:solidFill>
-                  <a:srgbClr val="2E86AB"/>
-                </a:solidFill>
-                <a:latin typeface="Source Sans Pro"/>
-              </a:defRPr>
-            </a:pPr>
-            <a:r>
-              <a:t>6</a:t>
+              <a:t>CORE VALUES</a:t>
             </a:r>
           </a:p>
         </p:txBody>
@@ -5856,7 +6101,7 @@
               </a:defRPr>
             </a:pPr>
             <a:r>
-              <a:t>Typography</a:t>
+              <a:t>Brand Story</a:t>
             </a:r>
           </a:p>
         </p:txBody>
@@ -5870,7 +6115,43 @@
         <p:spPr>
           <a:xfrm>
             <a:off x="1143000" y="1943100"/>
-            <a:ext cx="3429000" cy="742950"/>
+            <a:ext cx="6858000" cy="2971800"/>
+          </a:xfrm>
+          <a:prstGeom prst="rect">
+            <a:avLst/>
+          </a:prstGeom>
+          <a:noFill/>
+        </p:spPr>
+        <p:txBody>
+          <a:bodyPr wrap="square">
+            <a:spAutoFit/>
+          </a:bodyPr>
+          <a:lstStyle/>
+          <a:p>
+            <a:pPr>
+              <a:defRPr sz="1600" b="0">
+                <a:solidFill>
+                  <a:srgbClr val="2E86AB"/>
+                </a:solidFill>
+                <a:latin typeface="Source Sans Pro"/>
+              </a:defRPr>
+            </a:pPr>
+            <a:r>
+              <a:t>We revolutionize technology through innovative design and human-centered solutions that empower businesses to achieve their digital transformation goals.</a:t>
+            </a:r>
+          </a:p>
+        </p:txBody>
+      </p:sp>
+      <p:sp>
+        <p:nvSpPr>
+          <p:cNvPr id="5" name="TextBox 4"/>
+          <p:cNvSpPr txBox="1"/>
+          <p:nvPr/>
+        </p:nvSpPr>
+        <p:spPr>
+          <a:xfrm>
+            <a:off x="457200" y="5657850"/>
+            <a:ext cx="4114800" cy="742950"/>
           </a:xfrm>
           <a:prstGeom prst="rect">
             <a:avLst/>
@@ -5883,294 +6164,6 @@
           </a:bodyPr>
           <a:lstStyle/>
           <a:p>
-            <a:pPr>
-              <a:defRPr sz="2000" b="0">
-                <a:solidFill>
-                  <a:srgbClr val="2E86AB"/>
-                </a:solidFill>
-                <a:latin typeface="Source Sans Pro"/>
-              </a:defRPr>
-            </a:pPr>
-            <a:r>
-              <a:t>Primary Font: Inter</a:t>
-            </a:r>
-          </a:p>
-        </p:txBody>
-      </p:sp>
-      <p:sp>
-        <p:nvSpPr>
-          <p:cNvPr id="5" name="TextBox 4"/>
-          <p:cNvSpPr txBox="1"/>
-          <p:nvPr/>
-        </p:nvSpPr>
-        <p:spPr>
-          <a:xfrm>
-            <a:off x="1143000" y="2686050"/>
-            <a:ext cx="3429000" cy="742950"/>
-          </a:xfrm>
-          <a:prstGeom prst="rect">
-            <a:avLst/>
-          </a:prstGeom>
-          <a:noFill/>
-        </p:spPr>
-        <p:txBody>
-          <a:bodyPr wrap="none">
-            <a:spAutoFit/>
-          </a:bodyPr>
-          <a:lstStyle/>
-          <a:p>
-            <a:pPr>
-              <a:defRPr sz="3200" b="1">
-                <a:solidFill>
-                  <a:srgbClr val="2E86AB"/>
-                </a:solidFill>
-                <a:latin typeface="Inter"/>
-              </a:defRPr>
-            </a:pPr>
-            <a:r>
-              <a:t>H1 Heading</a:t>
-            </a:r>
-          </a:p>
-        </p:txBody>
-      </p:sp>
-      <p:sp>
-        <p:nvSpPr>
-          <p:cNvPr id="6" name="TextBox 5"/>
-          <p:cNvSpPr txBox="1"/>
-          <p:nvPr/>
-        </p:nvSpPr>
-        <p:spPr>
-          <a:xfrm>
-            <a:off x="1143000" y="3429000"/>
-            <a:ext cx="3429000" cy="742950"/>
-          </a:xfrm>
-          <a:prstGeom prst="rect">
-            <a:avLst/>
-          </a:prstGeom>
-          <a:noFill/>
-        </p:spPr>
-        <p:txBody>
-          <a:bodyPr wrap="none">
-            <a:spAutoFit/>
-          </a:bodyPr>
-          <a:lstStyle/>
-          <a:p>
-            <a:pPr>
-              <a:defRPr sz="2400" b="1">
-                <a:solidFill>
-                  <a:srgbClr val="2E86AB"/>
-                </a:solidFill>
-                <a:latin typeface="Inter"/>
-              </a:defRPr>
-            </a:pPr>
-            <a:r>
-              <a:t>H2 Heading</a:t>
-            </a:r>
-          </a:p>
-        </p:txBody>
-      </p:sp>
-      <p:sp>
-        <p:nvSpPr>
-          <p:cNvPr id="7" name="TextBox 6"/>
-          <p:cNvSpPr txBox="1"/>
-          <p:nvPr/>
-        </p:nvSpPr>
-        <p:spPr>
-          <a:xfrm>
-            <a:off x="1143000" y="4171950"/>
-            <a:ext cx="3429000" cy="742950"/>
-          </a:xfrm>
-          <a:prstGeom prst="rect">
-            <a:avLst/>
-          </a:prstGeom>
-          <a:noFill/>
-        </p:spPr>
-        <p:txBody>
-          <a:bodyPr wrap="none">
-            <a:spAutoFit/>
-          </a:bodyPr>
-          <a:lstStyle/>
-          <a:p>
-            <a:pPr>
-              <a:defRPr sz="2000" b="0">
-                <a:solidFill>
-                  <a:srgbClr val="2E86AB"/>
-                </a:solidFill>
-                <a:latin typeface="Inter"/>
-              </a:defRPr>
-            </a:pPr>
-            <a:r>
-              <a:t>H3 Heading</a:t>
-            </a:r>
-          </a:p>
-        </p:txBody>
-      </p:sp>
-      <p:sp>
-        <p:nvSpPr>
-          <p:cNvPr id="8" name="TextBox 7"/>
-          <p:cNvSpPr txBox="1"/>
-          <p:nvPr/>
-        </p:nvSpPr>
-        <p:spPr>
-          <a:xfrm>
-            <a:off x="5257800" y="1943100"/>
-            <a:ext cx="3429000" cy="742950"/>
-          </a:xfrm>
-          <a:prstGeom prst="rect">
-            <a:avLst/>
-          </a:prstGeom>
-          <a:noFill/>
-        </p:spPr>
-        <p:txBody>
-          <a:bodyPr wrap="none">
-            <a:spAutoFit/>
-          </a:bodyPr>
-          <a:lstStyle/>
-          <a:p>
-            <a:pPr>
-              <a:defRPr sz="2000" b="0">
-                <a:solidFill>
-                  <a:srgbClr val="2E86AB"/>
-                </a:solidFill>
-                <a:latin typeface="Source Sans Pro"/>
-              </a:defRPr>
-            </a:pPr>
-            <a:r>
-              <a:t>Secondary Font: Source Sans Pro</a:t>
-            </a:r>
-          </a:p>
-        </p:txBody>
-      </p:sp>
-      <p:sp>
-        <p:nvSpPr>
-          <p:cNvPr id="9" name="TextBox 8"/>
-          <p:cNvSpPr txBox="1"/>
-          <p:nvPr/>
-        </p:nvSpPr>
-        <p:spPr>
-          <a:xfrm>
-            <a:off x="5257800" y="2686050"/>
-            <a:ext cx="3429000" cy="742950"/>
-          </a:xfrm>
-          <a:prstGeom prst="rect">
-            <a:avLst/>
-          </a:prstGeom>
-          <a:noFill/>
-        </p:spPr>
-        <p:txBody>
-          <a:bodyPr wrap="none">
-            <a:spAutoFit/>
-          </a:bodyPr>
-          <a:lstStyle/>
-          <a:p>
-            <a:pPr>
-              <a:defRPr sz="1600" b="0">
-                <a:solidFill>
-                  <a:srgbClr val="2E86AB"/>
-                </a:solidFill>
-                <a:latin typeface="Source Sans Pro"/>
-              </a:defRPr>
-            </a:pPr>
-            <a:r>
-              <a:t>Body Text</a:t>
-            </a:r>
-          </a:p>
-        </p:txBody>
-      </p:sp>
-      <p:sp>
-        <p:nvSpPr>
-          <p:cNvPr id="10" name="TextBox 9"/>
-          <p:cNvSpPr txBox="1"/>
-          <p:nvPr/>
-        </p:nvSpPr>
-        <p:spPr>
-          <a:xfrm>
-            <a:off x="5257800" y="3429000"/>
-            <a:ext cx="3429000" cy="742950"/>
-          </a:xfrm>
-          <a:prstGeom prst="rect">
-            <a:avLst/>
-          </a:prstGeom>
-          <a:noFill/>
-        </p:spPr>
-        <p:txBody>
-          <a:bodyPr wrap="none">
-            <a:spAutoFit/>
-          </a:bodyPr>
-          <a:lstStyle/>
-          <a:p>
-            <a:pPr>
-              <a:defRPr sz="1600" b="1">
-                <a:solidFill>
-                  <a:srgbClr val="2E86AB"/>
-                </a:solidFill>
-                <a:latin typeface="Source Sans Pro"/>
-              </a:defRPr>
-            </a:pPr>
-            <a:r>
-              <a:t>Body Bold</a:t>
-            </a:r>
-          </a:p>
-        </p:txBody>
-      </p:sp>
-      <p:sp>
-        <p:nvSpPr>
-          <p:cNvPr id="11" name="TextBox 10"/>
-          <p:cNvSpPr txBox="1"/>
-          <p:nvPr/>
-        </p:nvSpPr>
-        <p:spPr>
-          <a:xfrm>
-            <a:off x="5257800" y="4171950"/>
-            <a:ext cx="3429000" cy="742950"/>
-          </a:xfrm>
-          <a:prstGeom prst="rect">
-            <a:avLst/>
-          </a:prstGeom>
-          <a:noFill/>
-        </p:spPr>
-        <p:txBody>
-          <a:bodyPr wrap="none">
-            <a:spAutoFit/>
-          </a:bodyPr>
-          <a:lstStyle/>
-          <a:p>
-            <a:pPr>
-              <a:defRPr sz="1200" b="0">
-                <a:solidFill>
-                  <a:srgbClr val="2E86AB"/>
-                </a:solidFill>
-                <a:latin typeface="Source Sans Pro"/>
-              </a:defRPr>
-            </a:pPr>
-            <a:r>
-              <a:t>Caption Text</a:t>
-            </a:r>
-          </a:p>
-        </p:txBody>
-      </p:sp>
-      <p:sp>
-        <p:nvSpPr>
-          <p:cNvPr id="12" name="TextBox 11"/>
-          <p:cNvSpPr txBox="1"/>
-          <p:nvPr/>
-        </p:nvSpPr>
-        <p:spPr>
-          <a:xfrm>
-            <a:off x="457200" y="5657850"/>
-            <a:ext cx="4114800" cy="742950"/>
-          </a:xfrm>
-          <a:prstGeom prst="rect">
-            <a:avLst/>
-          </a:prstGeom>
-          <a:noFill/>
-        </p:spPr>
-        <p:txBody>
-          <a:bodyPr wrap="none">
-            <a:spAutoFit/>
-          </a:bodyPr>
-          <a:lstStyle/>
-          <a:p>
             <a:pPr algn="l">
               <a:defRPr sz="1000" b="0">
                 <a:solidFill>
@@ -6187,7 +6180,7 @@
       </p:sp>
       <p:sp>
         <p:nvSpPr>
-          <p:cNvPr id="13" name="TextBox 12"/>
+          <p:cNvPr id="6" name="TextBox 5"/>
           <p:cNvSpPr txBox="1"/>
           <p:nvPr/>
         </p:nvSpPr>
@@ -6313,207 +6306,31 @@
               </a:defRPr>
             </a:pPr>
             <a:r>
-              <a:t>Visual &amp; Photography Guidelines</a:t>
-            </a:r>
-          </a:p>
-        </p:txBody>
-      </p:sp>
-      <p:sp>
-        <p:nvSpPr>
-          <p:cNvPr id="4" name="TextBox 3"/>
-          <p:cNvSpPr txBox="1"/>
+              <a:t>Color Palette</a:t>
+            </a:r>
+          </a:p>
+        </p:txBody>
+      </p:sp>
+      <p:sp>
+        <p:nvSpPr>
+          <p:cNvPr id="4" name="Rectangle 3"/>
+          <p:cNvSpPr/>
           <p:nvPr/>
         </p:nvSpPr>
         <p:spPr>
           <a:xfrm>
             <a:off x="1143000" y="1943100"/>
-            <a:ext cx="3429000" cy="2971800"/>
-          </a:xfrm>
-          <a:prstGeom prst="rect">
-            <a:avLst/>
-          </a:prstGeom>
-          <a:noFill/>
-        </p:spPr>
-        <p:txBody>
-          <a:bodyPr wrap="square">
-            <a:spAutoFit/>
-          </a:bodyPr>
-          <a:lstStyle/>
-          <a:p>
-            <a:pPr>
-              <a:defRPr sz="1800" b="0">
-                <a:solidFill>
-                  <a:srgbClr val="2E86AB"/>
-                </a:solidFill>
-                <a:latin typeface="Source Sans Pro"/>
-              </a:defRPr>
-            </a:pPr>
-            <a:r>
-              <a:t>Visual Style Guidelines:</a:t>
-            </a:r>
-          </a:p>
-          <a:p>
-            <a:pPr>
-              <a:defRPr sz="1400" b="0">
-                <a:solidFill>
-                  <a:srgbClr val="2E86AB"/>
-                </a:solidFill>
-                <a:latin typeface="Source Sans Pro"/>
-              </a:defRPr>
-            </a:pPr>
-            <a:r>
-              <a:t>• Modern</a:t>
-            </a:r>
-          </a:p>
-          <a:p>
-            <a:pPr>
-              <a:defRPr sz="1400" b="0">
-                <a:solidFill>
-                  <a:srgbClr val="2E86AB"/>
-                </a:solidFill>
-                <a:latin typeface="Source Sans Pro"/>
-              </a:defRPr>
-            </a:pPr>
-            <a:r>
-              <a:t>• clean</a:t>
-            </a:r>
-          </a:p>
-          <a:p>
-            <a:pPr>
-              <a:defRPr sz="1400" b="0">
-                <a:solidFill>
-                  <a:srgbClr val="2E86AB"/>
-                </a:solidFill>
-                <a:latin typeface="Source Sans Pro"/>
-              </a:defRPr>
-            </a:pPr>
-            <a:r>
-              <a:t>• professional</a:t>
-            </a:r>
-          </a:p>
-          <a:p>
-            <a:pPr>
-              <a:defRPr sz="1400" b="0">
-                <a:solidFill>
-                  <a:srgbClr val="2E86AB"/>
-                </a:solidFill>
-                <a:latin typeface="Source Sans Pro"/>
-              </a:defRPr>
-            </a:pPr>
-            <a:r>
-              <a:t>• minimalist</a:t>
-            </a:r>
-          </a:p>
-          <a:p>
-            <a:pPr>
-              <a:defRPr sz="1400" b="0">
-                <a:solidFill>
-                  <a:srgbClr val="2E86AB"/>
-                </a:solidFill>
-                <a:latin typeface="Source Sans Pro"/>
-              </a:defRPr>
-            </a:pPr>
-            <a:r>
-              <a:t>• bold typography</a:t>
-            </a:r>
-          </a:p>
-        </p:txBody>
-      </p:sp>
-      <p:sp>
-        <p:nvSpPr>
-          <p:cNvPr id="5" name="TextBox 4"/>
-          <p:cNvSpPr txBox="1"/>
-          <p:nvPr/>
-        </p:nvSpPr>
-        <p:spPr>
-          <a:xfrm>
-            <a:off x="5257800" y="1943100"/>
-            <a:ext cx="3429000" cy="2971800"/>
-          </a:xfrm>
-          <a:prstGeom prst="rect">
-            <a:avLst/>
-          </a:prstGeom>
-          <a:noFill/>
-        </p:spPr>
-        <p:txBody>
-          <a:bodyPr wrap="square">
-            <a:spAutoFit/>
-          </a:bodyPr>
-          <a:lstStyle/>
-          <a:p>
-            <a:pPr>
-              <a:defRPr sz="1800" b="0">
-                <a:solidFill>
-                  <a:srgbClr val="2E86AB"/>
-                </a:solidFill>
-                <a:latin typeface="Source Sans Pro"/>
-              </a:defRPr>
-            </a:pPr>
-            <a:r>
-              <a:t>Photography Guidelines:</a:t>
-            </a:r>
-          </a:p>
-          <a:p>
-            <a:pPr>
-              <a:defRPr sz="1400" b="0">
-                <a:solidFill>
-                  <a:srgbClr val="2E86AB"/>
-                </a:solidFill>
-                <a:latin typeface="Source Sans Pro"/>
-              </a:defRPr>
-            </a:pPr>
-            <a:r>
-              <a:t>• High contrast</a:t>
-            </a:r>
-          </a:p>
-          <a:p>
-            <a:pPr>
-              <a:defRPr sz="1400" b="0">
-                <a:solidFill>
-                  <a:srgbClr val="2E86AB"/>
-                </a:solidFill>
-                <a:latin typeface="Source Sans Pro"/>
-              </a:defRPr>
-            </a:pPr>
-            <a:r>
-              <a:t>• authentic moments</a:t>
-            </a:r>
-          </a:p>
-          <a:p>
-            <a:pPr>
-              <a:defRPr sz="1400" b="0">
-                <a:solidFill>
-                  <a:srgbClr val="2E86AB"/>
-                </a:solidFill>
-                <a:latin typeface="Source Sans Pro"/>
-              </a:defRPr>
-            </a:pPr>
-            <a:r>
-              <a:t>• natural lighting</a:t>
-            </a:r>
-          </a:p>
-        </p:txBody>
-      </p:sp>
-      <p:sp>
-        <p:nvSpPr>
-          <p:cNvPr id="6" name="Rectangle 5"/>
-          <p:cNvSpPr/>
-          <p:nvPr/>
-        </p:nvSpPr>
-        <p:spPr>
-          <a:xfrm>
-            <a:off x="5257800" y="4914900"/>
-            <a:ext cx="685800" cy="742950"/>
+            <a:ext cx="2057400" cy="1485900"/>
           </a:xfrm>
           <a:prstGeom prst="rect">
             <a:avLst/>
           </a:prstGeom>
           <a:solidFill>
-            <a:srgbClr val="404040"/>
+            <a:srgbClr val="2E86AB"/>
           </a:solidFill>
           <a:ln w="12700">
             <a:solidFill>
-              <a:srgbClr val="808080"/>
+              <a:srgbClr val="FFFFFF"/>
             </a:solidFill>
           </a:ln>
         </p:spPr>
@@ -6541,14 +6358,14 @@
       </p:sp>
       <p:sp>
         <p:nvSpPr>
-          <p:cNvPr id="7" name="TextBox 6"/>
+          <p:cNvPr id="5" name="TextBox 4"/>
           <p:cNvSpPr txBox="1"/>
           <p:nvPr/>
         </p:nvSpPr>
         <p:spPr>
           <a:xfrm>
-            <a:off x="5257800" y="5162550"/>
-            <a:ext cx="685800" cy="247650"/>
+            <a:off x="1143000" y="3429000"/>
+            <a:ext cx="2057400" cy="1485900"/>
           </a:xfrm>
           <a:prstGeom prst="rect">
             <a:avLst/>
@@ -6556,13 +6373,13 @@
           <a:noFill/>
         </p:spPr>
         <p:txBody>
-          <a:bodyPr wrap="none">
+          <a:bodyPr wrap="square">
             <a:spAutoFit/>
           </a:bodyPr>
           <a:lstStyle/>
           <a:p>
-            <a:pPr algn="ctr">
-              <a:defRPr sz="800" b="0">
+            <a:pPr>
+              <a:defRPr sz="1000" b="0">
                 <a:solidFill>
                   <a:srgbClr val="2E86AB"/>
                 </a:solidFill>
@@ -6570,31 +6387,83 @@
               </a:defRPr>
             </a:pPr>
             <a:r>
-              <a:t>Example</a:t>
-            </a:r>
-          </a:p>
-        </p:txBody>
-      </p:sp>
-      <p:sp>
-        <p:nvSpPr>
-          <p:cNvPr id="8" name="Rectangle 7"/>
+              <a:t>Primary</a:t>
+            </a:r>
+          </a:p>
+          <a:p>
+            <a:pPr>
+              <a:defRPr sz="1000" b="0">
+                <a:solidFill>
+                  <a:srgbClr val="2E86AB"/>
+                </a:solidFill>
+                <a:latin typeface="Source Sans Pro"/>
+              </a:defRPr>
+            </a:pPr>
+            <a:r>
+              <a:t>#2E86AB</a:t>
+            </a:r>
+          </a:p>
+          <a:p>
+            <a:pPr>
+              <a:defRPr sz="1000" b="0">
+                <a:solidFill>
+                  <a:srgbClr val="2E86AB"/>
+                </a:solidFill>
+                <a:latin typeface="Source Sans Pro"/>
+              </a:defRPr>
+            </a:pPr>
+            <a:r>
+              <a:t>RGB(46, 134, 171)</a:t>
+            </a:r>
+          </a:p>
+          <a:p>
+            <a:pPr>
+              <a:defRPr sz="1000" b="0">
+                <a:solidFill>
+                  <a:srgbClr val="2E86AB"/>
+                </a:solidFill>
+                <a:latin typeface="Source Sans Pro"/>
+              </a:defRPr>
+            </a:pPr>
+            <a:r>
+              <a:t>CMYK(73, 21, 0, 32)</a:t>
+            </a:r>
+          </a:p>
+          <a:p>
+            <a:pPr>
+              <a:defRPr sz="1000" b="0">
+                <a:solidFill>
+                  <a:srgbClr val="2E86AB"/>
+                </a:solidFill>
+                <a:latin typeface="Source Sans Pro"/>
+              </a:defRPr>
+            </a:pPr>
+            <a:r>
+              <a:t>Use Light Text</a:t>
+            </a:r>
+          </a:p>
+        </p:txBody>
+      </p:sp>
+      <p:sp>
+        <p:nvSpPr>
+          <p:cNvPr id="6" name="Rectangle 5"/>
           <p:cNvSpPr/>
           <p:nvPr/>
         </p:nvSpPr>
         <p:spPr>
           <a:xfrm>
-            <a:off x="6629400" y="4914900"/>
-            <a:ext cx="685800" cy="742950"/>
+            <a:off x="3886200" y="1943100"/>
+            <a:ext cx="2057400" cy="1485900"/>
           </a:xfrm>
           <a:prstGeom prst="rect">
             <a:avLst/>
           </a:prstGeom>
           <a:solidFill>
-            <a:srgbClr val="404040"/>
+            <a:srgbClr val="A23B72"/>
           </a:solidFill>
           <a:ln w="12700">
             <a:solidFill>
-              <a:srgbClr val="808080"/>
+              <a:srgbClr val="FFFFFF"/>
             </a:solidFill>
           </a:ln>
         </p:spPr>
@@ -6622,14 +6491,14 @@
       </p:sp>
       <p:sp>
         <p:nvSpPr>
-          <p:cNvPr id="9" name="TextBox 8"/>
+          <p:cNvPr id="7" name="TextBox 6"/>
           <p:cNvSpPr txBox="1"/>
           <p:nvPr/>
         </p:nvSpPr>
         <p:spPr>
           <a:xfrm>
-            <a:off x="6629400" y="5162550"/>
-            <a:ext cx="685800" cy="247650"/>
+            <a:off x="3886200" y="3429000"/>
+            <a:ext cx="2057400" cy="1485900"/>
           </a:xfrm>
           <a:prstGeom prst="rect">
             <a:avLst/>
@@ -6637,13 +6506,13 @@
           <a:noFill/>
         </p:spPr>
         <p:txBody>
-          <a:bodyPr wrap="none">
+          <a:bodyPr wrap="square">
             <a:spAutoFit/>
           </a:bodyPr>
           <a:lstStyle/>
           <a:p>
-            <a:pPr algn="ctr">
-              <a:defRPr sz="800" b="0">
+            <a:pPr>
+              <a:defRPr sz="1000" b="0">
                 <a:solidFill>
                   <a:srgbClr val="2E86AB"/>
                 </a:solidFill>
@@ -6651,31 +6520,83 @@
               </a:defRPr>
             </a:pPr>
             <a:r>
-              <a:t>Example</a:t>
-            </a:r>
-          </a:p>
-        </p:txBody>
-      </p:sp>
-      <p:sp>
-        <p:nvSpPr>
-          <p:cNvPr id="10" name="Rectangle 9"/>
+              <a:t>Secondary</a:t>
+            </a:r>
+          </a:p>
+          <a:p>
+            <a:pPr>
+              <a:defRPr sz="1000" b="0">
+                <a:solidFill>
+                  <a:srgbClr val="2E86AB"/>
+                </a:solidFill>
+                <a:latin typeface="Source Sans Pro"/>
+              </a:defRPr>
+            </a:pPr>
+            <a:r>
+              <a:t>#A23B72</a:t>
+            </a:r>
+          </a:p>
+          <a:p>
+            <a:pPr>
+              <a:defRPr sz="1000" b="0">
+                <a:solidFill>
+                  <a:srgbClr val="2E86AB"/>
+                </a:solidFill>
+                <a:latin typeface="Source Sans Pro"/>
+              </a:defRPr>
+            </a:pPr>
+            <a:r>
+              <a:t>RGB(162, 59, 114)</a:t>
+            </a:r>
+          </a:p>
+          <a:p>
+            <a:pPr>
+              <a:defRPr sz="1000" b="0">
+                <a:solidFill>
+                  <a:srgbClr val="2E86AB"/>
+                </a:solidFill>
+                <a:latin typeface="Source Sans Pro"/>
+              </a:defRPr>
+            </a:pPr>
+            <a:r>
+              <a:t>CMYK(0, 63, 29, 36)</a:t>
+            </a:r>
+          </a:p>
+          <a:p>
+            <a:pPr>
+              <a:defRPr sz="1000" b="0">
+                <a:solidFill>
+                  <a:srgbClr val="2E86AB"/>
+                </a:solidFill>
+                <a:latin typeface="Source Sans Pro"/>
+              </a:defRPr>
+            </a:pPr>
+            <a:r>
+              <a:t>Use Light Text</a:t>
+            </a:r>
+          </a:p>
+        </p:txBody>
+      </p:sp>
+      <p:sp>
+        <p:nvSpPr>
+          <p:cNvPr id="8" name="Rectangle 7"/>
           <p:cNvSpPr/>
           <p:nvPr/>
         </p:nvSpPr>
         <p:spPr>
           <a:xfrm>
-            <a:off x="8001000" y="4914900"/>
-            <a:ext cx="685800" cy="742950"/>
+            <a:off x="6629400" y="1943100"/>
+            <a:ext cx="2057400" cy="1485900"/>
           </a:xfrm>
           <a:prstGeom prst="rect">
             <a:avLst/>
           </a:prstGeom>
           <a:solidFill>
-            <a:srgbClr val="404040"/>
+            <a:srgbClr val="F18F01"/>
           </a:solidFill>
           <a:ln w="12700">
             <a:solidFill>
-              <a:srgbClr val="808080"/>
+              <a:srgbClr val="FFFFFF"/>
             </a:solidFill>
           </a:ln>
         </p:spPr>
@@ -6703,14 +6624,102 @@
       </p:sp>
       <p:sp>
         <p:nvSpPr>
-          <p:cNvPr id="11" name="TextBox 10"/>
+          <p:cNvPr id="9" name="TextBox 8"/>
           <p:cNvSpPr txBox="1"/>
           <p:nvPr/>
         </p:nvSpPr>
         <p:spPr>
           <a:xfrm>
-            <a:off x="8001000" y="5162550"/>
-            <a:ext cx="685800" cy="247650"/>
+            <a:off x="6629400" y="3429000"/>
+            <a:ext cx="2057400" cy="1485900"/>
+          </a:xfrm>
+          <a:prstGeom prst="rect">
+            <a:avLst/>
+          </a:prstGeom>
+          <a:noFill/>
+        </p:spPr>
+        <p:txBody>
+          <a:bodyPr wrap="square">
+            <a:spAutoFit/>
+          </a:bodyPr>
+          <a:lstStyle/>
+          <a:p>
+            <a:pPr>
+              <a:defRPr sz="1000" b="0">
+                <a:solidFill>
+                  <a:srgbClr val="2E86AB"/>
+                </a:solidFill>
+                <a:latin typeface="Source Sans Pro"/>
+              </a:defRPr>
+            </a:pPr>
+            <a:r>
+              <a:t>Accent</a:t>
+            </a:r>
+          </a:p>
+          <a:p>
+            <a:pPr>
+              <a:defRPr sz="1000" b="0">
+                <a:solidFill>
+                  <a:srgbClr val="2E86AB"/>
+                </a:solidFill>
+                <a:latin typeface="Source Sans Pro"/>
+              </a:defRPr>
+            </a:pPr>
+            <a:r>
+              <a:t>#F18F01</a:t>
+            </a:r>
+          </a:p>
+          <a:p>
+            <a:pPr>
+              <a:defRPr sz="1000" b="0">
+                <a:solidFill>
+                  <a:srgbClr val="2E86AB"/>
+                </a:solidFill>
+                <a:latin typeface="Source Sans Pro"/>
+              </a:defRPr>
+            </a:pPr>
+            <a:r>
+              <a:t>RGB(241, 143, 1)</a:t>
+            </a:r>
+          </a:p>
+          <a:p>
+            <a:pPr>
+              <a:defRPr sz="1000" b="0">
+                <a:solidFill>
+                  <a:srgbClr val="2E86AB"/>
+                </a:solidFill>
+                <a:latin typeface="Source Sans Pro"/>
+              </a:defRPr>
+            </a:pPr>
+            <a:r>
+              <a:t>CMYK(0, 40, 99, 5)</a:t>
+            </a:r>
+          </a:p>
+          <a:p>
+            <a:pPr>
+              <a:defRPr sz="1000" b="0">
+                <a:solidFill>
+                  <a:srgbClr val="2E86AB"/>
+                </a:solidFill>
+                <a:latin typeface="Source Sans Pro"/>
+              </a:defRPr>
+            </a:pPr>
+            <a:r>
+              <a:t>Use Dark Text</a:t>
+            </a:r>
+          </a:p>
+        </p:txBody>
+      </p:sp>
+      <p:sp>
+        <p:nvSpPr>
+          <p:cNvPr id="10" name="TextBox 9"/>
+          <p:cNvSpPr txBox="1"/>
+          <p:nvPr/>
+        </p:nvSpPr>
+        <p:spPr>
+          <a:xfrm>
+            <a:off x="457200" y="5657850"/>
+            <a:ext cx="4114800" cy="742950"/>
           </a:xfrm>
           <a:prstGeom prst="rect">
             <a:avLst/>
@@ -6723,8 +6732,8 @@
           </a:bodyPr>
           <a:lstStyle/>
           <a:p>
-            <a:pPr algn="ctr">
-              <a:defRPr sz="800" b="0">
+            <a:pPr algn="l">
+              <a:defRPr sz="1000" b="0">
                 <a:solidFill>
                   <a:srgbClr val="2E86AB"/>
                 </a:solidFill>
@@ -6732,20 +6741,20 @@
               </a:defRPr>
             </a:pPr>
             <a:r>
-              <a:t>Example</a:t>
-            </a:r>
-          </a:p>
-        </p:txBody>
-      </p:sp>
-      <p:sp>
-        <p:nvSpPr>
-          <p:cNvPr id="12" name="TextBox 11"/>
+              <a:t>TechForward Live</a:t>
+            </a:r>
+          </a:p>
+        </p:txBody>
+      </p:sp>
+      <p:sp>
+        <p:nvSpPr>
+          <p:cNvPr id="11" name="TextBox 10"/>
           <p:cNvSpPr txBox="1"/>
           <p:nvPr/>
         </p:nvSpPr>
         <p:spPr>
           <a:xfrm>
-            <a:off x="457200" y="5657850"/>
+            <a:off x="4572000" y="5657850"/>
             <a:ext cx="4114800" cy="742950"/>
           </a:xfrm>
           <a:prstGeom prst="rect">
@@ -6759,7 +6768,7 @@
           </a:bodyPr>
           <a:lstStyle/>
           <a:p>
-            <a:pPr algn="l">
+            <a:pPr algn="r">
               <a:defRPr sz="1000" b="0">
                 <a:solidFill>
                   <a:srgbClr val="2E86AB"/>
@@ -6768,21 +6777,82 @@
               </a:defRPr>
             </a:pPr>
             <a:r>
-              <a:t>TechForward Live</a:t>
-            </a:r>
-          </a:p>
-        </p:txBody>
-      </p:sp>
-      <p:sp>
-        <p:nvSpPr>
-          <p:cNvPr id="13" name="TextBox 12"/>
+              <a:t>8</a:t>
+            </a:r>
+          </a:p>
+        </p:txBody>
+      </p:sp>
+    </p:spTree>
+  </p:cSld>
+  <p:clrMapOvr>
+    <a:masterClrMapping/>
+  </p:clrMapOvr>
+</p:sld>
+</file>
+
+<file path=ppt/slides/slide9.xml><?xml version="1.0" encoding="utf-8"?>
+<p:sld xmlns:a="http://schemas.openxmlformats.org/drawingml/2006/main" xmlns:p="http://schemas.openxmlformats.org/presentationml/2006/main" xmlns:r="http://schemas.openxmlformats.org/officeDocument/2006/relationships">
+  <p:cSld>
+    <p:spTree>
+      <p:nvGrpSpPr>
+        <p:cNvPr id="1" name=""/>
+        <p:cNvGrpSpPr/>
+        <p:nvPr/>
+      </p:nvGrpSpPr>
+      <p:sp>
+        <p:nvSpPr>
+          <p:cNvPr id="2" name="Rectangle 1"/>
+          <p:cNvSpPr/>
+          <p:nvPr/>
+        </p:nvSpPr>
+        <p:spPr>
+          <a:xfrm>
+            <a:off x="0" y="0"/>
+            <a:ext cx="9144000" cy="6858000"/>
+          </a:xfrm>
+          <a:prstGeom prst="rect">
+            <a:avLst/>
+          </a:prstGeom>
+          <a:solidFill>
+            <a:srgbClr val="1A1A1A"/>
+          </a:solidFill>
+          <a:ln>
+            <a:noFill/>
+          </a:ln>
+        </p:spPr>
+        <p:style>
+          <a:lnRef idx="1">
+            <a:schemeClr val="accent1"/>
+          </a:lnRef>
+          <a:fillRef idx="3">
+            <a:schemeClr val="accent1"/>
+          </a:fillRef>
+          <a:effectRef idx="2">
+            <a:schemeClr val="accent1"/>
+          </a:effectRef>
+          <a:fontRef idx="minor">
+            <a:schemeClr val="lt1"/>
+          </a:fontRef>
+        </p:style>
+        <p:txBody>
+          <a:bodyPr rtlCol="0" anchor="ctr"/>
+          <a:lstStyle/>
+          <a:p>
+            <a:pPr algn="ctr"/>
+          </a:p>
+        </p:txBody>
+      </p:sp>
+      <p:grpSpPr/>
+      <p:sp>
+        <p:nvSpPr>
+          <p:cNvPr id="3" name="TextBox 2"/>
           <p:cNvSpPr txBox="1"/>
           <p:nvPr/>
         </p:nvSpPr>
         <p:spPr>
           <a:xfrm>
-            <a:off x="4572000" y="5657850"/>
-            <a:ext cx="4114800" cy="742950"/>
+            <a:off x="1143000" y="457200"/>
+            <a:ext cx="6858000" cy="742950"/>
           </a:xfrm>
           <a:prstGeom prst="rect">
             <a:avLst/>
@@ -6795,6 +6865,366 @@
           </a:bodyPr>
           <a:lstStyle/>
           <a:p>
+            <a:pPr>
+              <a:defRPr sz="3200" b="1">
+                <a:solidFill>
+                  <a:srgbClr val="2E86AB"/>
+                </a:solidFill>
+                <a:latin typeface="Inter"/>
+              </a:defRPr>
+            </a:pPr>
+            <a:r>
+              <a:t>Typography</a:t>
+            </a:r>
+          </a:p>
+        </p:txBody>
+      </p:sp>
+      <p:sp>
+        <p:nvSpPr>
+          <p:cNvPr id="4" name="TextBox 3"/>
+          <p:cNvSpPr txBox="1"/>
+          <p:nvPr/>
+        </p:nvSpPr>
+        <p:spPr>
+          <a:xfrm>
+            <a:off x="1143000" y="1943100"/>
+            <a:ext cx="3429000" cy="742950"/>
+          </a:xfrm>
+          <a:prstGeom prst="rect">
+            <a:avLst/>
+          </a:prstGeom>
+          <a:noFill/>
+        </p:spPr>
+        <p:txBody>
+          <a:bodyPr wrap="none">
+            <a:spAutoFit/>
+          </a:bodyPr>
+          <a:lstStyle/>
+          <a:p>
+            <a:pPr>
+              <a:defRPr sz="2000" b="0">
+                <a:solidFill>
+                  <a:srgbClr val="2E86AB"/>
+                </a:solidFill>
+                <a:latin typeface="Source Sans Pro"/>
+              </a:defRPr>
+            </a:pPr>
+            <a:r>
+              <a:t>Primary Font: Inter</a:t>
+            </a:r>
+          </a:p>
+        </p:txBody>
+      </p:sp>
+      <p:sp>
+        <p:nvSpPr>
+          <p:cNvPr id="5" name="TextBox 4"/>
+          <p:cNvSpPr txBox="1"/>
+          <p:nvPr/>
+        </p:nvSpPr>
+        <p:spPr>
+          <a:xfrm>
+            <a:off x="1143000" y="2686050"/>
+            <a:ext cx="3429000" cy="742950"/>
+          </a:xfrm>
+          <a:prstGeom prst="rect">
+            <a:avLst/>
+          </a:prstGeom>
+          <a:noFill/>
+        </p:spPr>
+        <p:txBody>
+          <a:bodyPr wrap="none">
+            <a:spAutoFit/>
+          </a:bodyPr>
+          <a:lstStyle/>
+          <a:p>
+            <a:pPr>
+              <a:defRPr sz="3200" b="1">
+                <a:solidFill>
+                  <a:srgbClr val="2E86AB"/>
+                </a:solidFill>
+                <a:latin typeface="Inter"/>
+              </a:defRPr>
+            </a:pPr>
+            <a:r>
+              <a:t>H1 Heading</a:t>
+            </a:r>
+          </a:p>
+        </p:txBody>
+      </p:sp>
+      <p:sp>
+        <p:nvSpPr>
+          <p:cNvPr id="6" name="TextBox 5"/>
+          <p:cNvSpPr txBox="1"/>
+          <p:nvPr/>
+        </p:nvSpPr>
+        <p:spPr>
+          <a:xfrm>
+            <a:off x="1143000" y="3429000"/>
+            <a:ext cx="3429000" cy="742950"/>
+          </a:xfrm>
+          <a:prstGeom prst="rect">
+            <a:avLst/>
+          </a:prstGeom>
+          <a:noFill/>
+        </p:spPr>
+        <p:txBody>
+          <a:bodyPr wrap="none">
+            <a:spAutoFit/>
+          </a:bodyPr>
+          <a:lstStyle/>
+          <a:p>
+            <a:pPr>
+              <a:defRPr sz="2400" b="1">
+                <a:solidFill>
+                  <a:srgbClr val="2E86AB"/>
+                </a:solidFill>
+                <a:latin typeface="Inter"/>
+              </a:defRPr>
+            </a:pPr>
+            <a:r>
+              <a:t>H2 Heading</a:t>
+            </a:r>
+          </a:p>
+        </p:txBody>
+      </p:sp>
+      <p:sp>
+        <p:nvSpPr>
+          <p:cNvPr id="7" name="TextBox 6"/>
+          <p:cNvSpPr txBox="1"/>
+          <p:nvPr/>
+        </p:nvSpPr>
+        <p:spPr>
+          <a:xfrm>
+            <a:off x="1143000" y="4171950"/>
+            <a:ext cx="3429000" cy="742950"/>
+          </a:xfrm>
+          <a:prstGeom prst="rect">
+            <a:avLst/>
+          </a:prstGeom>
+          <a:noFill/>
+        </p:spPr>
+        <p:txBody>
+          <a:bodyPr wrap="none">
+            <a:spAutoFit/>
+          </a:bodyPr>
+          <a:lstStyle/>
+          <a:p>
+            <a:pPr>
+              <a:defRPr sz="2000" b="0">
+                <a:solidFill>
+                  <a:srgbClr val="2E86AB"/>
+                </a:solidFill>
+                <a:latin typeface="Inter"/>
+              </a:defRPr>
+            </a:pPr>
+            <a:r>
+              <a:t>H3 Heading</a:t>
+            </a:r>
+          </a:p>
+        </p:txBody>
+      </p:sp>
+      <p:sp>
+        <p:nvSpPr>
+          <p:cNvPr id="8" name="TextBox 7"/>
+          <p:cNvSpPr txBox="1"/>
+          <p:nvPr/>
+        </p:nvSpPr>
+        <p:spPr>
+          <a:xfrm>
+            <a:off x="5257800" y="1943100"/>
+            <a:ext cx="3429000" cy="742950"/>
+          </a:xfrm>
+          <a:prstGeom prst="rect">
+            <a:avLst/>
+          </a:prstGeom>
+          <a:noFill/>
+        </p:spPr>
+        <p:txBody>
+          <a:bodyPr wrap="none">
+            <a:spAutoFit/>
+          </a:bodyPr>
+          <a:lstStyle/>
+          <a:p>
+            <a:pPr>
+              <a:defRPr sz="2000" b="0">
+                <a:solidFill>
+                  <a:srgbClr val="2E86AB"/>
+                </a:solidFill>
+                <a:latin typeface="Source Sans Pro"/>
+              </a:defRPr>
+            </a:pPr>
+            <a:r>
+              <a:t>Secondary Font: Source Sans Pro</a:t>
+            </a:r>
+          </a:p>
+        </p:txBody>
+      </p:sp>
+      <p:sp>
+        <p:nvSpPr>
+          <p:cNvPr id="9" name="TextBox 8"/>
+          <p:cNvSpPr txBox="1"/>
+          <p:nvPr/>
+        </p:nvSpPr>
+        <p:spPr>
+          <a:xfrm>
+            <a:off x="5257800" y="2686050"/>
+            <a:ext cx="3429000" cy="742950"/>
+          </a:xfrm>
+          <a:prstGeom prst="rect">
+            <a:avLst/>
+          </a:prstGeom>
+          <a:noFill/>
+        </p:spPr>
+        <p:txBody>
+          <a:bodyPr wrap="none">
+            <a:spAutoFit/>
+          </a:bodyPr>
+          <a:lstStyle/>
+          <a:p>
+            <a:pPr>
+              <a:defRPr sz="1600" b="0">
+                <a:solidFill>
+                  <a:srgbClr val="2E86AB"/>
+                </a:solidFill>
+                <a:latin typeface="Source Sans Pro"/>
+              </a:defRPr>
+            </a:pPr>
+            <a:r>
+              <a:t>Body Text</a:t>
+            </a:r>
+          </a:p>
+        </p:txBody>
+      </p:sp>
+      <p:sp>
+        <p:nvSpPr>
+          <p:cNvPr id="10" name="TextBox 9"/>
+          <p:cNvSpPr txBox="1"/>
+          <p:nvPr/>
+        </p:nvSpPr>
+        <p:spPr>
+          <a:xfrm>
+            <a:off x="5257800" y="3429000"/>
+            <a:ext cx="3429000" cy="742950"/>
+          </a:xfrm>
+          <a:prstGeom prst="rect">
+            <a:avLst/>
+          </a:prstGeom>
+          <a:noFill/>
+        </p:spPr>
+        <p:txBody>
+          <a:bodyPr wrap="none">
+            <a:spAutoFit/>
+          </a:bodyPr>
+          <a:lstStyle/>
+          <a:p>
+            <a:pPr>
+              <a:defRPr sz="1600" b="1">
+                <a:solidFill>
+                  <a:srgbClr val="2E86AB"/>
+                </a:solidFill>
+                <a:latin typeface="Source Sans Pro"/>
+              </a:defRPr>
+            </a:pPr>
+            <a:r>
+              <a:t>Body Bold</a:t>
+            </a:r>
+          </a:p>
+        </p:txBody>
+      </p:sp>
+      <p:sp>
+        <p:nvSpPr>
+          <p:cNvPr id="11" name="TextBox 10"/>
+          <p:cNvSpPr txBox="1"/>
+          <p:nvPr/>
+        </p:nvSpPr>
+        <p:spPr>
+          <a:xfrm>
+            <a:off x="5257800" y="4171950"/>
+            <a:ext cx="3429000" cy="742950"/>
+          </a:xfrm>
+          <a:prstGeom prst="rect">
+            <a:avLst/>
+          </a:prstGeom>
+          <a:noFill/>
+        </p:spPr>
+        <p:txBody>
+          <a:bodyPr wrap="none">
+            <a:spAutoFit/>
+          </a:bodyPr>
+          <a:lstStyle/>
+          <a:p>
+            <a:pPr>
+              <a:defRPr sz="1200" b="0">
+                <a:solidFill>
+                  <a:srgbClr val="2E86AB"/>
+                </a:solidFill>
+                <a:latin typeface="Source Sans Pro"/>
+              </a:defRPr>
+            </a:pPr>
+            <a:r>
+              <a:t>Caption Text</a:t>
+            </a:r>
+          </a:p>
+        </p:txBody>
+      </p:sp>
+      <p:sp>
+        <p:nvSpPr>
+          <p:cNvPr id="12" name="TextBox 11"/>
+          <p:cNvSpPr txBox="1"/>
+          <p:nvPr/>
+        </p:nvSpPr>
+        <p:spPr>
+          <a:xfrm>
+            <a:off x="457200" y="5657850"/>
+            <a:ext cx="4114800" cy="742950"/>
+          </a:xfrm>
+          <a:prstGeom prst="rect">
+            <a:avLst/>
+          </a:prstGeom>
+          <a:noFill/>
+        </p:spPr>
+        <p:txBody>
+          <a:bodyPr wrap="none">
+            <a:spAutoFit/>
+          </a:bodyPr>
+          <a:lstStyle/>
+          <a:p>
+            <a:pPr algn="l">
+              <a:defRPr sz="1000" b="0">
+                <a:solidFill>
+                  <a:srgbClr val="2E86AB"/>
+                </a:solidFill>
+                <a:latin typeface="Source Sans Pro"/>
+              </a:defRPr>
+            </a:pPr>
+            <a:r>
+              <a:t>TechForward Live</a:t>
+            </a:r>
+          </a:p>
+        </p:txBody>
+      </p:sp>
+      <p:sp>
+        <p:nvSpPr>
+          <p:cNvPr id="13" name="TextBox 12"/>
+          <p:cNvSpPr txBox="1"/>
+          <p:nvPr/>
+        </p:nvSpPr>
+        <p:spPr>
+          <a:xfrm>
+            <a:off x="4572000" y="5657850"/>
+            <a:ext cx="4114800" cy="742950"/>
+          </a:xfrm>
+          <a:prstGeom prst="rect">
+            <a:avLst/>
+          </a:prstGeom>
+          <a:noFill/>
+        </p:spPr>
+        <p:txBody>
+          <a:bodyPr wrap="none">
+            <a:spAutoFit/>
+          </a:bodyPr>
+          <a:lstStyle/>
+          <a:p>
             <a:pPr algn="r">
               <a:defRPr sz="1000" b="0">
                 <a:solidFill>
@@ -6804,7 +7234,7 @@
               </a:defRPr>
             </a:pPr>
             <a:r>
-              <a:t>8</a:t>
+              <a:t>9</a:t>
             </a:r>
           </a:p>
         </p:txBody>

--- a/output/techforward_live/techforward_live_enhanced_brand_book.pptx
+++ b/output/techforward_live/techforward_live_enhanced_brand_book.pptx
@@ -5623,7 +5623,7 @@
               </a:defRPr>
             </a:pPr>
             <a:r>
-              <a:t>VISION</a:t>
+              <a:t>BRAND PURPOSE (VISION)</a:t>
             </a:r>
           </a:p>
         </p:txBody>
@@ -5759,7 +5759,7 @@
               </a:defRPr>
             </a:pPr>
             <a:r>
-              <a:t>MISSION</a:t>
+              <a:t>BRAND PURPOSE (MISSION)</a:t>
             </a:r>
           </a:p>
         </p:txBody>
@@ -6004,7 +6004,7 @@
               </a:defRPr>
             </a:pPr>
             <a:r>
-              <a:t>CORE VALUES</a:t>
+              <a:t>BRAND PURPOSE (VALUES)</a:t>
             </a:r>
           </a:p>
         </p:txBody>

--- a/output/techforward_live/techforward_live_enhanced_brand_book.pptx
+++ b/output/techforward_live/techforward_live_enhanced_brand_book.pptx
@@ -6020,66 +6020,105 @@
 <file path=ppt/slides/slide7.xml><?xml version="1.0" encoding="utf-8"?>
 <p:sld xmlns:a="http://schemas.openxmlformats.org/drawingml/2006/main" xmlns:p="http://schemas.openxmlformats.org/presentationml/2006/main" xmlns:r="http://schemas.openxmlformats.org/officeDocument/2006/relationships">
   <p:cSld>
+    <p:bg>
+      <p:bgPr>
+        <a:solidFill>
+          <a:srgbClr val="000000"/>
+        </a:solidFill>
+        <a:effectLst/>
+      </p:bgPr>
+    </p:bg>
     <p:spTree>
       <p:nvGrpSpPr>
         <p:cNvPr id="1" name=""/>
         <p:cNvGrpSpPr/>
         <p:nvPr/>
       </p:nvGrpSpPr>
-      <p:sp>
-        <p:nvSpPr>
-          <p:cNvPr id="2" name="Rectangle 1"/>
-          <p:cNvSpPr/>
-          <p:nvPr/>
-        </p:nvSpPr>
-        <p:spPr>
-          <a:xfrm>
-            <a:off x="0" y="0"/>
-            <a:ext cx="9144000" cy="6858000"/>
-          </a:xfrm>
-          <a:prstGeom prst="rect">
-            <a:avLst/>
-          </a:prstGeom>
-          <a:solidFill>
-            <a:srgbClr val="1A1A1A"/>
-          </a:solidFill>
-          <a:ln>
-            <a:noFill/>
+      <p:grpSpPr/>
+      <p:sp>
+        <p:nvSpPr>
+          <p:cNvPr id="2" name="TextBox 1"/>
+          <p:cNvSpPr txBox="1"/>
+          <p:nvPr/>
+        </p:nvSpPr>
+        <p:spPr>
+          <a:xfrm>
+            <a:off x="800100" y="1051560"/>
+            <a:ext cx="6858000" cy="2971800"/>
+          </a:xfrm>
+          <a:prstGeom prst="rect">
+            <a:avLst/>
+          </a:prstGeom>
+          <a:noFill/>
+        </p:spPr>
+        <p:txBody>
+          <a:bodyPr wrap="square" lIns="0" rIns="0" tIns="0" bIns="0">
+            <a:spAutoFit/>
+          </a:bodyPr>
+          <a:lstStyle/>
+          <a:p>
+            <a:pPr algn="l">
+              <a:spcAft>
+                <a:spcPts val="800"/>
+              </a:spcAft>
+              <a:defRPr sz="2000" b="0">
+                <a:solidFill>
+                  <a:srgbClr val="FFFFFF"/>
+                </a:solidFill>
+                <a:latin typeface="Source Sans Pro"/>
+              </a:defRPr>
+            </a:pPr>
+            <a:r>
+              <a:t>We revolutionize technology through innovative design and human-centered solutions that empower businesses to achieve their digital transformation goals.</a:t>
+            </a:r>
+          </a:p>
+        </p:txBody>
+      </p:sp>
+      <p:cxnSp>
+        <p:nvCxnSpPr>
+          <p:cNvPr id="3" name="Connector 2"/>
+          <p:cNvCxnSpPr/>
+          <p:nvPr/>
+        </p:nvCxnSpPr>
+        <p:spPr>
+          <a:xfrm>
+            <a:off x="457200" y="4914900.0"/>
+            <a:ext cx="8229600" cy="0.0"/>
+          </a:xfrm>
+          <a:prstGeom prst="line">
+            <a:avLst/>
+          </a:prstGeom>
+          <a:ln w="25400">
+            <a:solidFill>
+              <a:srgbClr val="2E86AB"/>
+            </a:solidFill>
           </a:ln>
         </p:spPr>
         <p:style>
-          <a:lnRef idx="1">
+          <a:lnRef idx="2">
             <a:schemeClr val="accent1"/>
           </a:lnRef>
-          <a:fillRef idx="3">
+          <a:fillRef idx="0">
             <a:schemeClr val="accent1"/>
           </a:fillRef>
-          <a:effectRef idx="2">
+          <a:effectRef idx="1">
             <a:schemeClr val="accent1"/>
           </a:effectRef>
           <a:fontRef idx="minor">
-            <a:schemeClr val="lt1"/>
+            <a:schemeClr val="tx1"/>
           </a:fontRef>
         </p:style>
-        <p:txBody>
-          <a:bodyPr rtlCol="0" anchor="ctr"/>
-          <a:lstStyle/>
-          <a:p>
-            <a:pPr algn="ctr"/>
-          </a:p>
-        </p:txBody>
-      </p:sp>
-      <p:grpSpPr/>
-      <p:sp>
-        <p:nvSpPr>
-          <p:cNvPr id="3" name="TextBox 2"/>
+      </p:cxnSp>
+      <p:sp>
+        <p:nvSpPr>
+          <p:cNvPr id="4" name="TextBox 3"/>
           <p:cNvSpPr txBox="1"/>
           <p:nvPr/>
         </p:nvSpPr>
         <p:spPr>
           <a:xfrm>
-            <a:off x="1143000" y="457200"/>
-            <a:ext cx="6858000" cy="742950"/>
+            <a:off x="800100" y="5189220"/>
+            <a:ext cx="5486400" cy="731520"/>
           </a:xfrm>
           <a:prstGeom prst="rect">
             <a:avLst/>
@@ -6092,8 +6131,8 @@
           </a:bodyPr>
           <a:lstStyle/>
           <a:p>
-            <a:pPr>
-              <a:defRPr sz="3200" b="1">
+            <a:pPr algn="l">
+              <a:defRPr sz="2800" b="1">
                 <a:solidFill>
                   <a:srgbClr val="2E86AB"/>
                 </a:solidFill>
@@ -6101,115 +6140,7 @@
               </a:defRPr>
             </a:pPr>
             <a:r>
-              <a:t>Brand Story</a:t>
-            </a:r>
-          </a:p>
-        </p:txBody>
-      </p:sp>
-      <p:sp>
-        <p:nvSpPr>
-          <p:cNvPr id="4" name="TextBox 3"/>
-          <p:cNvSpPr txBox="1"/>
-          <p:nvPr/>
-        </p:nvSpPr>
-        <p:spPr>
-          <a:xfrm>
-            <a:off x="1143000" y="1943100"/>
-            <a:ext cx="6858000" cy="2971800"/>
-          </a:xfrm>
-          <a:prstGeom prst="rect">
-            <a:avLst/>
-          </a:prstGeom>
-          <a:noFill/>
-        </p:spPr>
-        <p:txBody>
-          <a:bodyPr wrap="square">
-            <a:spAutoFit/>
-          </a:bodyPr>
-          <a:lstStyle/>
-          <a:p>
-            <a:pPr>
-              <a:defRPr sz="1600" b="0">
-                <a:solidFill>
-                  <a:srgbClr val="2E86AB"/>
-                </a:solidFill>
-                <a:latin typeface="Source Sans Pro"/>
-              </a:defRPr>
-            </a:pPr>
-            <a:r>
-              <a:t>We revolutionize technology through innovative design and human-centered solutions that empower businesses to achieve their digital transformation goals.</a:t>
-            </a:r>
-          </a:p>
-        </p:txBody>
-      </p:sp>
-      <p:sp>
-        <p:nvSpPr>
-          <p:cNvPr id="5" name="TextBox 4"/>
-          <p:cNvSpPr txBox="1"/>
-          <p:nvPr/>
-        </p:nvSpPr>
-        <p:spPr>
-          <a:xfrm>
-            <a:off x="457200" y="5657850"/>
-            <a:ext cx="4114800" cy="742950"/>
-          </a:xfrm>
-          <a:prstGeom prst="rect">
-            <a:avLst/>
-          </a:prstGeom>
-          <a:noFill/>
-        </p:spPr>
-        <p:txBody>
-          <a:bodyPr wrap="none">
-            <a:spAutoFit/>
-          </a:bodyPr>
-          <a:lstStyle/>
-          <a:p>
-            <a:pPr algn="l">
-              <a:defRPr sz="1000" b="0">
-                <a:solidFill>
-                  <a:srgbClr val="2E86AB"/>
-                </a:solidFill>
-                <a:latin typeface="Source Sans Pro"/>
-              </a:defRPr>
-            </a:pPr>
-            <a:r>
-              <a:t>TechForward Live</a:t>
-            </a:r>
-          </a:p>
-        </p:txBody>
-      </p:sp>
-      <p:sp>
-        <p:nvSpPr>
-          <p:cNvPr id="6" name="TextBox 5"/>
-          <p:cNvSpPr txBox="1"/>
-          <p:nvPr/>
-        </p:nvSpPr>
-        <p:spPr>
-          <a:xfrm>
-            <a:off x="4572000" y="5657850"/>
-            <a:ext cx="4114800" cy="742950"/>
-          </a:xfrm>
-          <a:prstGeom prst="rect">
-            <a:avLst/>
-          </a:prstGeom>
-          <a:noFill/>
-        </p:spPr>
-        <p:txBody>
-          <a:bodyPr wrap="none">
-            <a:spAutoFit/>
-          </a:bodyPr>
-          <a:lstStyle/>
-          <a:p>
-            <a:pPr algn="r">
-              <a:defRPr sz="1000" b="0">
-                <a:solidFill>
-                  <a:srgbClr val="2E86AB"/>
-                </a:solidFill>
-                <a:latin typeface="Source Sans Pro"/>
-              </a:defRPr>
-            </a:pPr>
-            <a:r>
-              <a:t>7</a:t>
+              <a:t>BRAND STORY</a:t>
             </a:r>
           </a:p>
         </p:txBody>

--- a/output/techforward_live/techforward_live_enhanced_brand_book.pptx
+++ b/output/techforward_live/techforward_live_enhanced_brand_book.pptx
@@ -3105,45 +3105,9 @@
         <p:nvPr/>
       </p:nvGrpSpPr>
       <p:grpSpPr/>
-      <p:sp>
-        <p:nvSpPr>
-          <p:cNvPr id="2" name="TextBox 1"/>
-          <p:cNvSpPr txBox="1"/>
-          <p:nvPr/>
-        </p:nvSpPr>
-        <p:spPr>
-          <a:xfrm>
-            <a:off x="1143000" y="3800475"/>
-            <a:ext cx="2743200" cy="742950"/>
-          </a:xfrm>
-          <a:prstGeom prst="rect">
-            <a:avLst/>
-          </a:prstGeom>
-          <a:noFill/>
-        </p:spPr>
-        <p:txBody>
-          <a:bodyPr wrap="none" lIns="0" rIns="0" tIns="0" bIns="0">
-            <a:spAutoFit/>
-          </a:bodyPr>
-          <a:lstStyle/>
-          <a:p>
-            <a:pPr algn="l">
-              <a:defRPr sz="3600" b="1">
-                <a:solidFill>
-                  <a:srgbClr val="FFFFFF"/>
-                </a:solidFill>
-                <a:latin typeface="Inter"/>
-              </a:defRPr>
-            </a:pPr>
-            <a:r>
-              <a:t>TechForward Live</a:t>
-            </a:r>
-          </a:p>
-        </p:txBody>
-      </p:sp>
       <p:cxnSp>
         <p:nvCxnSpPr>
-          <p:cNvPr id="3" name="Connector 2"/>
+          <p:cNvPr id="2" name="Connector 1"/>
           <p:cNvCxnSpPr/>
           <p:nvPr/>
         </p:nvCxnSpPr>
@@ -3178,7 +3142,7 @@
       </p:cxnSp>
       <p:sp>
         <p:nvSpPr>
-          <p:cNvPr id="4" name="TextBox 3"/>
+          <p:cNvPr id="3" name="TextBox 2"/>
           <p:cNvSpPr txBox="1"/>
           <p:nvPr/>
         </p:nvSpPr>

--- a/output/techforward_live/techforward_live_enhanced_brand_book.pptx
+++ b/output/techforward_live/techforward_live_enhanced_brand_book.pptx
@@ -15,6 +15,7 @@
     <p:sldId id="263" r:id="rId14"/>
     <p:sldId id="264" r:id="rId15"/>
     <p:sldId id="265" r:id="rId16"/>
+    <p:sldId id="266" r:id="rId17"/>
   </p:sldIdLst>
   <p:sldSz cx="9144000" cy="6858000" type="screen4x3"/>
   <p:notesSz cx="6858000" cy="9144000"/>
@@ -3105,9 +3106,33 @@
         <p:nvPr/>
       </p:nvGrpSpPr>
       <p:grpSpPr/>
+      <p:pic>
+        <p:nvPicPr>
+          <p:cNvPr id="2" name="Picture 1" descr="zeta_logo_1_20250828_235333_3e1fde11.png"/>
+          <p:cNvPicPr>
+            <a:picLocks noChangeAspect="1"/>
+          </p:cNvPicPr>
+          <p:nvPr/>
+        </p:nvPicPr>
+        <p:blipFill>
+          <a:blip r:embed="rId2"/>
+          <a:stretch>
+            <a:fillRect/>
+          </a:stretch>
+        </p:blipFill>
+        <p:spPr>
+          <a:xfrm>
+            <a:off x="0" y="0"/>
+            <a:ext cx="9144000" cy="6858000"/>
+          </a:xfrm>
+          <a:prstGeom prst="rect">
+            <a:avLst/>
+          </a:prstGeom>
+        </p:spPr>
+      </p:pic>
       <p:cxnSp>
         <p:nvCxnSpPr>
-          <p:cNvPr id="2" name="Connector 1"/>
+          <p:cNvPr id="3" name="Connector 2"/>
           <p:cNvCxnSpPr/>
           <p:nvPr/>
         </p:nvCxnSpPr>
@@ -3142,7 +3167,7 @@
       </p:cxnSp>
       <p:sp>
         <p:nvSpPr>
-          <p:cNvPr id="3" name="TextBox 2"/>
+          <p:cNvPr id="4" name="TextBox 3"/>
           <p:cNvSpPr txBox="1"/>
           <p:nvPr/>
         </p:nvSpPr>
@@ -3268,6 +3293,463 @@
               </a:defRPr>
             </a:pPr>
             <a:r>
+              <a:t>Typography</a:t>
+            </a:r>
+          </a:p>
+        </p:txBody>
+      </p:sp>
+      <p:sp>
+        <p:nvSpPr>
+          <p:cNvPr id="4" name="TextBox 3"/>
+          <p:cNvSpPr txBox="1"/>
+          <p:nvPr/>
+        </p:nvSpPr>
+        <p:spPr>
+          <a:xfrm>
+            <a:off x="1143000" y="1943100"/>
+            <a:ext cx="3429000" cy="742950"/>
+          </a:xfrm>
+          <a:prstGeom prst="rect">
+            <a:avLst/>
+          </a:prstGeom>
+          <a:noFill/>
+        </p:spPr>
+        <p:txBody>
+          <a:bodyPr wrap="none">
+            <a:spAutoFit/>
+          </a:bodyPr>
+          <a:lstStyle/>
+          <a:p>
+            <a:pPr>
+              <a:defRPr sz="2000" b="0">
+                <a:solidFill>
+                  <a:srgbClr val="2E86AB"/>
+                </a:solidFill>
+                <a:latin typeface="Source Sans Pro"/>
+              </a:defRPr>
+            </a:pPr>
+            <a:r>
+              <a:t>Primary Font: Inter</a:t>
+            </a:r>
+          </a:p>
+        </p:txBody>
+      </p:sp>
+      <p:sp>
+        <p:nvSpPr>
+          <p:cNvPr id="5" name="TextBox 4"/>
+          <p:cNvSpPr txBox="1"/>
+          <p:nvPr/>
+        </p:nvSpPr>
+        <p:spPr>
+          <a:xfrm>
+            <a:off x="1143000" y="2686050"/>
+            <a:ext cx="3429000" cy="742950"/>
+          </a:xfrm>
+          <a:prstGeom prst="rect">
+            <a:avLst/>
+          </a:prstGeom>
+          <a:noFill/>
+        </p:spPr>
+        <p:txBody>
+          <a:bodyPr wrap="none">
+            <a:spAutoFit/>
+          </a:bodyPr>
+          <a:lstStyle/>
+          <a:p>
+            <a:pPr>
+              <a:defRPr sz="3200" b="1">
+                <a:solidFill>
+                  <a:srgbClr val="2E86AB"/>
+                </a:solidFill>
+                <a:latin typeface="Inter"/>
+              </a:defRPr>
+            </a:pPr>
+            <a:r>
+              <a:t>H1 Heading</a:t>
+            </a:r>
+          </a:p>
+        </p:txBody>
+      </p:sp>
+      <p:sp>
+        <p:nvSpPr>
+          <p:cNvPr id="6" name="TextBox 5"/>
+          <p:cNvSpPr txBox="1"/>
+          <p:nvPr/>
+        </p:nvSpPr>
+        <p:spPr>
+          <a:xfrm>
+            <a:off x="1143000" y="3429000"/>
+            <a:ext cx="3429000" cy="742950"/>
+          </a:xfrm>
+          <a:prstGeom prst="rect">
+            <a:avLst/>
+          </a:prstGeom>
+          <a:noFill/>
+        </p:spPr>
+        <p:txBody>
+          <a:bodyPr wrap="none">
+            <a:spAutoFit/>
+          </a:bodyPr>
+          <a:lstStyle/>
+          <a:p>
+            <a:pPr>
+              <a:defRPr sz="2400" b="1">
+                <a:solidFill>
+                  <a:srgbClr val="2E86AB"/>
+                </a:solidFill>
+                <a:latin typeface="Inter"/>
+              </a:defRPr>
+            </a:pPr>
+            <a:r>
+              <a:t>H2 Heading</a:t>
+            </a:r>
+          </a:p>
+        </p:txBody>
+      </p:sp>
+      <p:sp>
+        <p:nvSpPr>
+          <p:cNvPr id="7" name="TextBox 6"/>
+          <p:cNvSpPr txBox="1"/>
+          <p:nvPr/>
+        </p:nvSpPr>
+        <p:spPr>
+          <a:xfrm>
+            <a:off x="1143000" y="4171950"/>
+            <a:ext cx="3429000" cy="742950"/>
+          </a:xfrm>
+          <a:prstGeom prst="rect">
+            <a:avLst/>
+          </a:prstGeom>
+          <a:noFill/>
+        </p:spPr>
+        <p:txBody>
+          <a:bodyPr wrap="none">
+            <a:spAutoFit/>
+          </a:bodyPr>
+          <a:lstStyle/>
+          <a:p>
+            <a:pPr>
+              <a:defRPr sz="2000" b="0">
+                <a:solidFill>
+                  <a:srgbClr val="2E86AB"/>
+                </a:solidFill>
+                <a:latin typeface="Inter"/>
+              </a:defRPr>
+            </a:pPr>
+            <a:r>
+              <a:t>H3 Heading</a:t>
+            </a:r>
+          </a:p>
+        </p:txBody>
+      </p:sp>
+      <p:sp>
+        <p:nvSpPr>
+          <p:cNvPr id="8" name="TextBox 7"/>
+          <p:cNvSpPr txBox="1"/>
+          <p:nvPr/>
+        </p:nvSpPr>
+        <p:spPr>
+          <a:xfrm>
+            <a:off x="5257800" y="1943100"/>
+            <a:ext cx="3429000" cy="742950"/>
+          </a:xfrm>
+          <a:prstGeom prst="rect">
+            <a:avLst/>
+          </a:prstGeom>
+          <a:noFill/>
+        </p:spPr>
+        <p:txBody>
+          <a:bodyPr wrap="none">
+            <a:spAutoFit/>
+          </a:bodyPr>
+          <a:lstStyle/>
+          <a:p>
+            <a:pPr>
+              <a:defRPr sz="2000" b="0">
+                <a:solidFill>
+                  <a:srgbClr val="2E86AB"/>
+                </a:solidFill>
+                <a:latin typeface="Source Sans Pro"/>
+              </a:defRPr>
+            </a:pPr>
+            <a:r>
+              <a:t>Secondary Font: Source Sans Pro</a:t>
+            </a:r>
+          </a:p>
+        </p:txBody>
+      </p:sp>
+      <p:sp>
+        <p:nvSpPr>
+          <p:cNvPr id="9" name="TextBox 8"/>
+          <p:cNvSpPr txBox="1"/>
+          <p:nvPr/>
+        </p:nvSpPr>
+        <p:spPr>
+          <a:xfrm>
+            <a:off x="5257800" y="2686050"/>
+            <a:ext cx="3429000" cy="742950"/>
+          </a:xfrm>
+          <a:prstGeom prst="rect">
+            <a:avLst/>
+          </a:prstGeom>
+          <a:noFill/>
+        </p:spPr>
+        <p:txBody>
+          <a:bodyPr wrap="none">
+            <a:spAutoFit/>
+          </a:bodyPr>
+          <a:lstStyle/>
+          <a:p>
+            <a:pPr>
+              <a:defRPr sz="1600" b="0">
+                <a:solidFill>
+                  <a:srgbClr val="2E86AB"/>
+                </a:solidFill>
+                <a:latin typeface="Source Sans Pro"/>
+              </a:defRPr>
+            </a:pPr>
+            <a:r>
+              <a:t>Body Text</a:t>
+            </a:r>
+          </a:p>
+        </p:txBody>
+      </p:sp>
+      <p:sp>
+        <p:nvSpPr>
+          <p:cNvPr id="10" name="TextBox 9"/>
+          <p:cNvSpPr txBox="1"/>
+          <p:nvPr/>
+        </p:nvSpPr>
+        <p:spPr>
+          <a:xfrm>
+            <a:off x="5257800" y="3429000"/>
+            <a:ext cx="3429000" cy="742950"/>
+          </a:xfrm>
+          <a:prstGeom prst="rect">
+            <a:avLst/>
+          </a:prstGeom>
+          <a:noFill/>
+        </p:spPr>
+        <p:txBody>
+          <a:bodyPr wrap="none">
+            <a:spAutoFit/>
+          </a:bodyPr>
+          <a:lstStyle/>
+          <a:p>
+            <a:pPr>
+              <a:defRPr sz="1600" b="1">
+                <a:solidFill>
+                  <a:srgbClr val="2E86AB"/>
+                </a:solidFill>
+                <a:latin typeface="Source Sans Pro"/>
+              </a:defRPr>
+            </a:pPr>
+            <a:r>
+              <a:t>Body Bold</a:t>
+            </a:r>
+          </a:p>
+        </p:txBody>
+      </p:sp>
+      <p:sp>
+        <p:nvSpPr>
+          <p:cNvPr id="11" name="TextBox 10"/>
+          <p:cNvSpPr txBox="1"/>
+          <p:nvPr/>
+        </p:nvSpPr>
+        <p:spPr>
+          <a:xfrm>
+            <a:off x="5257800" y="4171950"/>
+            <a:ext cx="3429000" cy="742950"/>
+          </a:xfrm>
+          <a:prstGeom prst="rect">
+            <a:avLst/>
+          </a:prstGeom>
+          <a:noFill/>
+        </p:spPr>
+        <p:txBody>
+          <a:bodyPr wrap="none">
+            <a:spAutoFit/>
+          </a:bodyPr>
+          <a:lstStyle/>
+          <a:p>
+            <a:pPr>
+              <a:defRPr sz="1200" b="0">
+                <a:solidFill>
+                  <a:srgbClr val="2E86AB"/>
+                </a:solidFill>
+                <a:latin typeface="Source Sans Pro"/>
+              </a:defRPr>
+            </a:pPr>
+            <a:r>
+              <a:t>Caption Text</a:t>
+            </a:r>
+          </a:p>
+        </p:txBody>
+      </p:sp>
+      <p:sp>
+        <p:nvSpPr>
+          <p:cNvPr id="12" name="TextBox 11"/>
+          <p:cNvSpPr txBox="1"/>
+          <p:nvPr/>
+        </p:nvSpPr>
+        <p:spPr>
+          <a:xfrm>
+            <a:off x="457200" y="5657850"/>
+            <a:ext cx="4114800" cy="742950"/>
+          </a:xfrm>
+          <a:prstGeom prst="rect">
+            <a:avLst/>
+          </a:prstGeom>
+          <a:noFill/>
+        </p:spPr>
+        <p:txBody>
+          <a:bodyPr wrap="none">
+            <a:spAutoFit/>
+          </a:bodyPr>
+          <a:lstStyle/>
+          <a:p>
+            <a:pPr algn="l">
+              <a:defRPr sz="1000" b="0">
+                <a:solidFill>
+                  <a:srgbClr val="2E86AB"/>
+                </a:solidFill>
+                <a:latin typeface="Source Sans Pro"/>
+              </a:defRPr>
+            </a:pPr>
+            <a:r>
+              <a:t>TechForward Live</a:t>
+            </a:r>
+          </a:p>
+        </p:txBody>
+      </p:sp>
+      <p:sp>
+        <p:nvSpPr>
+          <p:cNvPr id="13" name="TextBox 12"/>
+          <p:cNvSpPr txBox="1"/>
+          <p:nvPr/>
+        </p:nvSpPr>
+        <p:spPr>
+          <a:xfrm>
+            <a:off x="4572000" y="5657850"/>
+            <a:ext cx="4114800" cy="742950"/>
+          </a:xfrm>
+          <a:prstGeom prst="rect">
+            <a:avLst/>
+          </a:prstGeom>
+          <a:noFill/>
+        </p:spPr>
+        <p:txBody>
+          <a:bodyPr wrap="none">
+            <a:spAutoFit/>
+          </a:bodyPr>
+          <a:lstStyle/>
+          <a:p>
+            <a:pPr algn="r">
+              <a:defRPr sz="1000" b="0">
+                <a:solidFill>
+                  <a:srgbClr val="2E86AB"/>
+                </a:solidFill>
+                <a:latin typeface="Source Sans Pro"/>
+              </a:defRPr>
+            </a:pPr>
+            <a:r>
+              <a:t>10</a:t>
+            </a:r>
+          </a:p>
+        </p:txBody>
+      </p:sp>
+    </p:spTree>
+  </p:cSld>
+  <p:clrMapOvr>
+    <a:masterClrMapping/>
+  </p:clrMapOvr>
+</p:sld>
+</file>
+
+<file path=ppt/slides/slide11.xml><?xml version="1.0" encoding="utf-8"?>
+<p:sld xmlns:a="http://schemas.openxmlformats.org/drawingml/2006/main" xmlns:p="http://schemas.openxmlformats.org/presentationml/2006/main" xmlns:r="http://schemas.openxmlformats.org/officeDocument/2006/relationships">
+  <p:cSld>
+    <p:spTree>
+      <p:nvGrpSpPr>
+        <p:cNvPr id="1" name=""/>
+        <p:cNvGrpSpPr/>
+        <p:nvPr/>
+      </p:nvGrpSpPr>
+      <p:sp>
+        <p:nvSpPr>
+          <p:cNvPr id="2" name="Rectangle 1"/>
+          <p:cNvSpPr/>
+          <p:nvPr/>
+        </p:nvSpPr>
+        <p:spPr>
+          <a:xfrm>
+            <a:off x="0" y="0"/>
+            <a:ext cx="9144000" cy="6858000"/>
+          </a:xfrm>
+          <a:prstGeom prst="rect">
+            <a:avLst/>
+          </a:prstGeom>
+          <a:solidFill>
+            <a:srgbClr val="1A1A1A"/>
+          </a:solidFill>
+          <a:ln>
+            <a:noFill/>
+          </a:ln>
+        </p:spPr>
+        <p:style>
+          <a:lnRef idx="1">
+            <a:schemeClr val="accent1"/>
+          </a:lnRef>
+          <a:fillRef idx="3">
+            <a:schemeClr val="accent1"/>
+          </a:fillRef>
+          <a:effectRef idx="2">
+            <a:schemeClr val="accent1"/>
+          </a:effectRef>
+          <a:fontRef idx="minor">
+            <a:schemeClr val="lt1"/>
+          </a:fontRef>
+        </p:style>
+        <p:txBody>
+          <a:bodyPr rtlCol="0" anchor="ctr"/>
+          <a:lstStyle/>
+          <a:p>
+            <a:pPr algn="ctr"/>
+          </a:p>
+        </p:txBody>
+      </p:sp>
+      <p:grpSpPr/>
+      <p:sp>
+        <p:nvSpPr>
+          <p:cNvPr id="3" name="TextBox 2"/>
+          <p:cNvSpPr txBox="1"/>
+          <p:nvPr/>
+        </p:nvSpPr>
+        <p:spPr>
+          <a:xfrm>
+            <a:off x="1143000" y="457200"/>
+            <a:ext cx="6858000" cy="742950"/>
+          </a:xfrm>
+          <a:prstGeom prst="rect">
+            <a:avLst/>
+          </a:prstGeom>
+          <a:noFill/>
+        </p:spPr>
+        <p:txBody>
+          <a:bodyPr wrap="none">
+            <a:spAutoFit/>
+          </a:bodyPr>
+          <a:lstStyle/>
+          <a:p>
+            <a:pPr>
+              <a:defRPr sz="3200" b="1">
+                <a:solidFill>
+                  <a:srgbClr val="2E86AB"/>
+                </a:solidFill>
+                <a:latin typeface="Inter"/>
+              </a:defRPr>
+            </a:pPr>
+            <a:r>
               <a:t>Visual &amp; Photography Guidelines</a:t>
             </a:r>
           </a:p>
@@ -3759,7 +4241,7 @@
               </a:defRPr>
             </a:pPr>
             <a:r>
-              <a:t>10</a:t>
+              <a:t>11</a:t>
             </a:r>
           </a:p>
         </p:txBody>
@@ -5788,117 +6270,8 @@
               </a:defRPr>
             </a:pPr>
             <a:r>
-              <a:t>Core Values:</a:t>
-            </a:r>
-          </a:p>
-          <a:p>
-            <a:pPr algn="l">
-              <a:spcAft>
-                <a:spcPts val="800"/>
-              </a:spcAft>
-              <a:defRPr sz="2000" b="0">
-                <a:solidFill>
-                  <a:srgbClr val="FFFFFF"/>
-                </a:solidFill>
-                <a:latin typeface="Source Sans Pro"/>
-              </a:defRPr>
-            </a:pPr>
-            <a:r>
-              <a:t>• Innovation: Driving progress through creative thinking and breakthrough solutions</a:t>
-            </a:r>
-          </a:p>
-          <a:p>
-            <a:pPr algn="l">
-              <a:spcAft>
-                <a:spcPts val="800"/>
-              </a:spcAft>
-              <a:defRPr sz="2000" b="0">
-                <a:solidFill>
-                  <a:srgbClr val="FFFFFF"/>
-                </a:solidFill>
-                <a:latin typeface="Source Sans Pro"/>
-              </a:defRPr>
-            </a:pPr>
-            <a:r>
-              <a:t>• Simplicity: Embodying simplicity in all aspects of our business operations</a:t>
-            </a:r>
-          </a:p>
-          <a:p>
-            <a:pPr algn="l">
-              <a:spcAft>
-                <a:spcPts val="800"/>
-              </a:spcAft>
-              <a:defRPr sz="2000" b="0">
-                <a:solidFill>
-                  <a:srgbClr val="FFFFFF"/>
-                </a:solidFill>
-                <a:latin typeface="Source Sans Pro"/>
-              </a:defRPr>
-            </a:pPr>
-            <a:r>
-              <a:t>• Human-Centered: Embodying human-centered in all aspects of our business operations</a:t>
-            </a:r>
-          </a:p>
-          <a:p>
-            <a:pPr algn="l">
-              <a:spcAft>
-                <a:spcPts val="800"/>
-              </a:spcAft>
-              <a:defRPr sz="2000" b="0">
-                <a:solidFill>
-                  <a:srgbClr val="FFFFFF"/>
-                </a:solidFill>
-                <a:latin typeface="Source Sans Pro"/>
-              </a:defRPr>
-            </a:pPr>
-            <a:r>
-              <a:t>• Excellence: Pursuing the highest standards in everything we deliver</a:t>
-            </a:r>
-          </a:p>
-          <a:p>
-            <a:pPr algn="l">
-              <a:spcAft>
-                <a:spcPts val="800"/>
-              </a:spcAft>
-              <a:defRPr sz="2000" b="0">
-                <a:solidFill>
-                  <a:srgbClr val="FFFFFF"/>
-                </a:solidFill>
-                <a:latin typeface="Source Sans Pro"/>
-              </a:defRPr>
-            </a:pPr>
-            <a:r>
-              <a:t>• Trust: Building lasting relationships through transparency and consistent delivery</a:t>
-            </a:r>
-          </a:p>
-          <a:p>
-            <a:pPr algn="l">
-              <a:spcAft>
-                <a:spcPts val="800"/>
-              </a:spcAft>
-              <a:defRPr sz="2000" b="0">
-                <a:solidFill>
-                  <a:srgbClr val="FFFFFF"/>
-                </a:solidFill>
-                <a:latin typeface="Source Sans Pro"/>
-              </a:defRPr>
-            </a:pPr>
-            <a:r>
-              <a:t>• Reliability: Ensuring dependable performance and unwavering support in all our services</a:t>
-            </a:r>
-          </a:p>
-          <a:p>
-            <a:pPr algn="l">
-              <a:spcAft>
-                <a:spcPts val="800"/>
-              </a:spcAft>
-              <a:defRPr sz="2000" b="0">
-                <a:solidFill>
-                  <a:srgbClr val="FFFFFF"/>
-                </a:solidFill>
-                <a:latin typeface="Source Sans Pro"/>
-              </a:defRPr>
-            </a:pPr>
+              <a:t>Core Values: Our foundation rests on innovation, simplicity, human-centered, excellence, trust, and reliability, which together guide our commitment to excellence and drive our mission to create meaningful impact for our clients.</a:t>
+            </a:r>
           </a:p>
         </p:txBody>
       </p:sp>
@@ -6201,7 +6574,7 @@
               </a:defRPr>
             </a:pPr>
             <a:r>
-              <a:t>Color Palette</a:t>
+              <a:t>Logo Variations (3 designs)</a:t>
             </a:r>
           </a:p>
         </p:txBody>
@@ -6214,19 +6587,17 @@
         </p:nvSpPr>
         <p:spPr>
           <a:xfrm>
-            <a:off x="1143000" y="1943100"/>
-            <a:ext cx="2057400" cy="1485900"/>
+            <a:off x="1051560" y="1851660"/>
+            <a:ext cx="1554480" cy="1668780"/>
           </a:xfrm>
           <a:prstGeom prst="rect">
             <a:avLst/>
           </a:prstGeom>
           <a:solidFill>
-            <a:srgbClr val="2E86AB"/>
+            <a:srgbClr val="FFFFFF"/>
           </a:solidFill>
-          <a:ln w="12700">
-            <a:solidFill>
-              <a:srgbClr val="FFFFFF"/>
-            </a:solidFill>
+          <a:ln>
+            <a:noFill/>
           </a:ln>
         </p:spPr>
         <p:style>
@@ -6251,16 +6622,40 @@
           </a:p>
         </p:txBody>
       </p:sp>
-      <p:sp>
-        <p:nvSpPr>
-          <p:cNvPr id="5" name="TextBox 4"/>
+      <p:pic>
+        <p:nvPicPr>
+          <p:cNvPr id="5" name="Picture 4" descr="zeta_logo_1_20250828_235333_3e1fde11.png"/>
+          <p:cNvPicPr>
+            <a:picLocks noChangeAspect="1"/>
+          </p:cNvPicPr>
+          <p:nvPr/>
+        </p:nvPicPr>
+        <p:blipFill>
+          <a:blip r:embed="rId2"/>
+          <a:stretch>
+            <a:fillRect/>
+          </a:stretch>
+        </p:blipFill>
+        <p:spPr>
+          <a:xfrm>
+            <a:off x="1143000" y="1943100"/>
+            <a:ext cx="1371600" cy="1485900"/>
+          </a:xfrm>
+          <a:prstGeom prst="rect">
+            <a:avLst/>
+          </a:prstGeom>
+        </p:spPr>
+      </p:pic>
+      <p:sp>
+        <p:nvSpPr>
+          <p:cNvPr id="6" name="TextBox 5"/>
           <p:cNvSpPr txBox="1"/>
           <p:nvPr/>
         </p:nvSpPr>
         <p:spPr>
           <a:xfrm>
             <a:off x="1143000" y="3429000"/>
-            <a:ext cx="2057400" cy="1485900"/>
+            <a:ext cx="1371600" cy="742950"/>
           </a:xfrm>
           <a:prstGeom prst="rect">
             <a:avLst/>
@@ -6268,13 +6663,13 @@
           <a:noFill/>
         </p:spPr>
         <p:txBody>
-          <a:bodyPr wrap="square">
+          <a:bodyPr wrap="none">
             <a:spAutoFit/>
           </a:bodyPr>
           <a:lstStyle/>
           <a:p>
-            <a:pPr>
-              <a:defRPr sz="1000" b="0">
+            <a:pPr algn="ctr">
+              <a:defRPr sz="1200" b="0">
                 <a:solidFill>
                   <a:srgbClr val="2E86AB"/>
                 </a:solidFill>
@@ -6282,84 +6677,30 @@
               </a:defRPr>
             </a:pPr>
             <a:r>
-              <a:t>Primary</a:t>
-            </a:r>
-          </a:p>
-          <a:p>
-            <a:pPr>
-              <a:defRPr sz="1000" b="0">
-                <a:solidFill>
-                  <a:srgbClr val="2E86AB"/>
-                </a:solidFill>
-                <a:latin typeface="Source Sans Pro"/>
-              </a:defRPr>
-            </a:pPr>
-            <a:r>
-              <a:t>#2E86AB</a:t>
-            </a:r>
-          </a:p>
-          <a:p>
-            <a:pPr>
-              <a:defRPr sz="1000" b="0">
-                <a:solidFill>
-                  <a:srgbClr val="2E86AB"/>
-                </a:solidFill>
-                <a:latin typeface="Source Sans Pro"/>
-              </a:defRPr>
-            </a:pPr>
-            <a:r>
-              <a:t>RGB(46, 134, 171)</a:t>
-            </a:r>
-          </a:p>
-          <a:p>
-            <a:pPr>
-              <a:defRPr sz="1000" b="0">
-                <a:solidFill>
-                  <a:srgbClr val="2E86AB"/>
-                </a:solidFill>
-                <a:latin typeface="Source Sans Pro"/>
-              </a:defRPr>
-            </a:pPr>
-            <a:r>
-              <a:t>CMYK(73, 21, 0, 32)</a:t>
-            </a:r>
-          </a:p>
-          <a:p>
-            <a:pPr>
-              <a:defRPr sz="1000" b="0">
-                <a:solidFill>
-                  <a:srgbClr val="2E86AB"/>
-                </a:solidFill>
-                <a:latin typeface="Source Sans Pro"/>
-              </a:defRPr>
-            </a:pPr>
-            <a:r>
-              <a:t>Use Light Text</a:t>
-            </a:r>
-          </a:p>
-        </p:txBody>
-      </p:sp>
-      <p:sp>
-        <p:nvSpPr>
-          <p:cNvPr id="6" name="Rectangle 5"/>
+              <a:t>Version 1</a:t>
+            </a:r>
+          </a:p>
+        </p:txBody>
+      </p:sp>
+      <p:sp>
+        <p:nvSpPr>
+          <p:cNvPr id="7" name="Rectangle 6"/>
           <p:cNvSpPr/>
           <p:nvPr/>
         </p:nvSpPr>
         <p:spPr>
           <a:xfrm>
-            <a:off x="3886200" y="1943100"/>
-            <a:ext cx="2057400" cy="1485900"/>
+            <a:off x="3108960" y="1851660"/>
+            <a:ext cx="1554480" cy="1668780"/>
           </a:xfrm>
           <a:prstGeom prst="rect">
             <a:avLst/>
           </a:prstGeom>
           <a:solidFill>
-            <a:srgbClr val="A23B72"/>
+            <a:srgbClr val="FFFFFF"/>
           </a:solidFill>
-          <a:ln w="12700">
-            <a:solidFill>
-              <a:srgbClr val="FFFFFF"/>
-            </a:solidFill>
+          <a:ln>
+            <a:noFill/>
           </a:ln>
         </p:spPr>
         <p:style>
@@ -6384,16 +6725,40 @@
           </a:p>
         </p:txBody>
       </p:sp>
-      <p:sp>
-        <p:nvSpPr>
-          <p:cNvPr id="7" name="TextBox 6"/>
+      <p:pic>
+        <p:nvPicPr>
+          <p:cNvPr id="8" name="Picture 7" descr="zeta_logo_2_20250828_235352_a3259202.png"/>
+          <p:cNvPicPr>
+            <a:picLocks noChangeAspect="1"/>
+          </p:cNvPicPr>
+          <p:nvPr/>
+        </p:nvPicPr>
+        <p:blipFill>
+          <a:blip r:embed="rId3"/>
+          <a:stretch>
+            <a:fillRect/>
+          </a:stretch>
+        </p:blipFill>
+        <p:spPr>
+          <a:xfrm>
+            <a:off x="3200400" y="1943100"/>
+            <a:ext cx="1371600" cy="1485900"/>
+          </a:xfrm>
+          <a:prstGeom prst="rect">
+            <a:avLst/>
+          </a:prstGeom>
+        </p:spPr>
+      </p:pic>
+      <p:sp>
+        <p:nvSpPr>
+          <p:cNvPr id="9" name="TextBox 8"/>
           <p:cNvSpPr txBox="1"/>
           <p:nvPr/>
         </p:nvSpPr>
         <p:spPr>
           <a:xfrm>
-            <a:off x="3886200" y="3429000"/>
-            <a:ext cx="2057400" cy="1485900"/>
+            <a:off x="3200400" y="3429000"/>
+            <a:ext cx="1371600" cy="742950"/>
           </a:xfrm>
           <a:prstGeom prst="rect">
             <a:avLst/>
@@ -6401,13 +6766,13 @@
           <a:noFill/>
         </p:spPr>
         <p:txBody>
-          <a:bodyPr wrap="square">
+          <a:bodyPr wrap="none">
             <a:spAutoFit/>
           </a:bodyPr>
           <a:lstStyle/>
           <a:p>
-            <a:pPr>
-              <a:defRPr sz="1000" b="0">
+            <a:pPr algn="ctr">
+              <a:defRPr sz="1200" b="0">
                 <a:solidFill>
                   <a:srgbClr val="2E86AB"/>
                 </a:solidFill>
@@ -6415,84 +6780,30 @@
               </a:defRPr>
             </a:pPr>
             <a:r>
-              <a:t>Secondary</a:t>
-            </a:r>
-          </a:p>
-          <a:p>
-            <a:pPr>
-              <a:defRPr sz="1000" b="0">
-                <a:solidFill>
-                  <a:srgbClr val="2E86AB"/>
-                </a:solidFill>
-                <a:latin typeface="Source Sans Pro"/>
-              </a:defRPr>
-            </a:pPr>
-            <a:r>
-              <a:t>#A23B72</a:t>
-            </a:r>
-          </a:p>
-          <a:p>
-            <a:pPr>
-              <a:defRPr sz="1000" b="0">
-                <a:solidFill>
-                  <a:srgbClr val="2E86AB"/>
-                </a:solidFill>
-                <a:latin typeface="Source Sans Pro"/>
-              </a:defRPr>
-            </a:pPr>
-            <a:r>
-              <a:t>RGB(162, 59, 114)</a:t>
-            </a:r>
-          </a:p>
-          <a:p>
-            <a:pPr>
-              <a:defRPr sz="1000" b="0">
-                <a:solidFill>
-                  <a:srgbClr val="2E86AB"/>
-                </a:solidFill>
-                <a:latin typeface="Source Sans Pro"/>
-              </a:defRPr>
-            </a:pPr>
-            <a:r>
-              <a:t>CMYK(0, 63, 29, 36)</a:t>
-            </a:r>
-          </a:p>
-          <a:p>
-            <a:pPr>
-              <a:defRPr sz="1000" b="0">
-                <a:solidFill>
-                  <a:srgbClr val="2E86AB"/>
-                </a:solidFill>
-                <a:latin typeface="Source Sans Pro"/>
-              </a:defRPr>
-            </a:pPr>
-            <a:r>
-              <a:t>Use Light Text</a:t>
-            </a:r>
-          </a:p>
-        </p:txBody>
-      </p:sp>
-      <p:sp>
-        <p:nvSpPr>
-          <p:cNvPr id="8" name="Rectangle 7"/>
+              <a:t>Version 2</a:t>
+            </a:r>
+          </a:p>
+        </p:txBody>
+      </p:sp>
+      <p:sp>
+        <p:nvSpPr>
+          <p:cNvPr id="10" name="Rectangle 9"/>
           <p:cNvSpPr/>
           <p:nvPr/>
         </p:nvSpPr>
         <p:spPr>
           <a:xfrm>
-            <a:off x="6629400" y="1943100"/>
-            <a:ext cx="2057400" cy="1485900"/>
+            <a:off x="5166360" y="1851660"/>
+            <a:ext cx="1554480" cy="1668780"/>
           </a:xfrm>
           <a:prstGeom prst="rect">
             <a:avLst/>
           </a:prstGeom>
           <a:solidFill>
-            <a:srgbClr val="F18F01"/>
+            <a:srgbClr val="FFFFFF"/>
           </a:solidFill>
-          <a:ln w="12700">
-            <a:solidFill>
-              <a:srgbClr val="FFFFFF"/>
-            </a:solidFill>
+          <a:ln>
+            <a:noFill/>
           </a:ln>
         </p:spPr>
         <p:style>
@@ -6517,104 +6828,40 @@
           </a:p>
         </p:txBody>
       </p:sp>
-      <p:sp>
-        <p:nvSpPr>
-          <p:cNvPr id="9" name="TextBox 8"/>
+      <p:pic>
+        <p:nvPicPr>
+          <p:cNvPr id="11" name="Picture 10" descr="zeta_logo_3_20250828_235415_054bae29.png"/>
+          <p:cNvPicPr>
+            <a:picLocks noChangeAspect="1"/>
+          </p:cNvPicPr>
+          <p:nvPr/>
+        </p:nvPicPr>
+        <p:blipFill>
+          <a:blip r:embed="rId4"/>
+          <a:stretch>
+            <a:fillRect/>
+          </a:stretch>
+        </p:blipFill>
+        <p:spPr>
+          <a:xfrm>
+            <a:off x="5257800" y="1943100"/>
+            <a:ext cx="1371600" cy="1485900"/>
+          </a:xfrm>
+          <a:prstGeom prst="rect">
+            <a:avLst/>
+          </a:prstGeom>
+        </p:spPr>
+      </p:pic>
+      <p:sp>
+        <p:nvSpPr>
+          <p:cNvPr id="12" name="TextBox 11"/>
           <p:cNvSpPr txBox="1"/>
           <p:nvPr/>
         </p:nvSpPr>
         <p:spPr>
           <a:xfrm>
-            <a:off x="6629400" y="3429000"/>
-            <a:ext cx="2057400" cy="1485900"/>
-          </a:xfrm>
-          <a:prstGeom prst="rect">
-            <a:avLst/>
-          </a:prstGeom>
-          <a:noFill/>
-        </p:spPr>
-        <p:txBody>
-          <a:bodyPr wrap="square">
-            <a:spAutoFit/>
-          </a:bodyPr>
-          <a:lstStyle/>
-          <a:p>
-            <a:pPr>
-              <a:defRPr sz="1000" b="0">
-                <a:solidFill>
-                  <a:srgbClr val="2E86AB"/>
-                </a:solidFill>
-                <a:latin typeface="Source Sans Pro"/>
-              </a:defRPr>
-            </a:pPr>
-            <a:r>
-              <a:t>Accent</a:t>
-            </a:r>
-          </a:p>
-          <a:p>
-            <a:pPr>
-              <a:defRPr sz="1000" b="0">
-                <a:solidFill>
-                  <a:srgbClr val="2E86AB"/>
-                </a:solidFill>
-                <a:latin typeface="Source Sans Pro"/>
-              </a:defRPr>
-            </a:pPr>
-            <a:r>
-              <a:t>#F18F01</a:t>
-            </a:r>
-          </a:p>
-          <a:p>
-            <a:pPr>
-              <a:defRPr sz="1000" b="0">
-                <a:solidFill>
-                  <a:srgbClr val="2E86AB"/>
-                </a:solidFill>
-                <a:latin typeface="Source Sans Pro"/>
-              </a:defRPr>
-            </a:pPr>
-            <a:r>
-              <a:t>RGB(241, 143, 1)</a:t>
-            </a:r>
-          </a:p>
-          <a:p>
-            <a:pPr>
-              <a:defRPr sz="1000" b="0">
-                <a:solidFill>
-                  <a:srgbClr val="2E86AB"/>
-                </a:solidFill>
-                <a:latin typeface="Source Sans Pro"/>
-              </a:defRPr>
-            </a:pPr>
-            <a:r>
-              <a:t>CMYK(0, 40, 99, 5)</a:t>
-            </a:r>
-          </a:p>
-          <a:p>
-            <a:pPr>
-              <a:defRPr sz="1000" b="0">
-                <a:solidFill>
-                  <a:srgbClr val="2E86AB"/>
-                </a:solidFill>
-                <a:latin typeface="Source Sans Pro"/>
-              </a:defRPr>
-            </a:pPr>
-            <a:r>
-              <a:t>Use Dark Text</a:t>
-            </a:r>
-          </a:p>
-        </p:txBody>
-      </p:sp>
-      <p:sp>
-        <p:nvSpPr>
-          <p:cNvPr id="10" name="TextBox 9"/>
-          <p:cNvSpPr txBox="1"/>
-          <p:nvPr/>
-        </p:nvSpPr>
-        <p:spPr>
-          <a:xfrm>
-            <a:off x="457200" y="5657850"/>
-            <a:ext cx="4114800" cy="742950"/>
+            <a:off x="5257800" y="3429000"/>
+            <a:ext cx="1371600" cy="742950"/>
           </a:xfrm>
           <a:prstGeom prst="rect">
             <a:avLst/>
@@ -6627,6 +6874,78 @@
           </a:bodyPr>
           <a:lstStyle/>
           <a:p>
+            <a:pPr algn="ctr">
+              <a:defRPr sz="1200" b="0">
+                <a:solidFill>
+                  <a:srgbClr val="2E86AB"/>
+                </a:solidFill>
+                <a:latin typeface="Source Sans Pro"/>
+              </a:defRPr>
+            </a:pPr>
+            <a:r>
+              <a:t>Version 3</a:t>
+            </a:r>
+          </a:p>
+        </p:txBody>
+      </p:sp>
+      <p:sp>
+        <p:nvSpPr>
+          <p:cNvPr id="13" name="TextBox 12"/>
+          <p:cNvSpPr txBox="1"/>
+          <p:nvPr/>
+        </p:nvSpPr>
+        <p:spPr>
+          <a:xfrm>
+            <a:off x="1143000" y="4914900"/>
+            <a:ext cx="7543800" cy="742950"/>
+          </a:xfrm>
+          <a:prstGeom prst="rect">
+            <a:avLst/>
+          </a:prstGeom>
+          <a:noFill/>
+        </p:spPr>
+        <p:txBody>
+          <a:bodyPr wrap="none">
+            <a:spAutoFit/>
+          </a:bodyPr>
+          <a:lstStyle/>
+          <a:p>
+            <a:pPr algn="ctr">
+              <a:defRPr sz="1200" b="0">
+                <a:solidFill>
+                  <a:srgbClr val="2E86AB"/>
+                </a:solidFill>
+                <a:latin typeface="Source Sans Pro"/>
+              </a:defRPr>
+            </a:pPr>
+            <a:r>
+              <a:t>Minimum size: 0.5 inches • Clearspace: 0.25 inches on all sides</a:t>
+            </a:r>
+          </a:p>
+        </p:txBody>
+      </p:sp>
+      <p:sp>
+        <p:nvSpPr>
+          <p:cNvPr id="14" name="TextBox 13"/>
+          <p:cNvSpPr txBox="1"/>
+          <p:nvPr/>
+        </p:nvSpPr>
+        <p:spPr>
+          <a:xfrm>
+            <a:off x="457200" y="5657850"/>
+            <a:ext cx="4114800" cy="742950"/>
+          </a:xfrm>
+          <a:prstGeom prst="rect">
+            <a:avLst/>
+          </a:prstGeom>
+          <a:noFill/>
+        </p:spPr>
+        <p:txBody>
+          <a:bodyPr wrap="none">
+            <a:spAutoFit/>
+          </a:bodyPr>
+          <a:lstStyle/>
+          <a:p>
             <a:pPr algn="l">
               <a:defRPr sz="1000" b="0">
                 <a:solidFill>
@@ -6643,7 +6962,7 @@
       </p:sp>
       <p:sp>
         <p:nvSpPr>
-          <p:cNvPr id="11" name="TextBox 10"/>
+          <p:cNvPr id="15" name="TextBox 14"/>
           <p:cNvSpPr txBox="1"/>
           <p:nvPr/>
         </p:nvSpPr>
@@ -6769,21 +7088,420 @@
               </a:defRPr>
             </a:pPr>
             <a:r>
-              <a:t>Typography</a:t>
-            </a:r>
-          </a:p>
-        </p:txBody>
-      </p:sp>
-      <p:sp>
-        <p:nvSpPr>
-          <p:cNvPr id="4" name="TextBox 3"/>
+              <a:t>Color Palette</a:t>
+            </a:r>
+          </a:p>
+        </p:txBody>
+      </p:sp>
+      <p:sp>
+        <p:nvSpPr>
+          <p:cNvPr id="4" name="Rectangle 3"/>
+          <p:cNvSpPr/>
+          <p:nvPr/>
+        </p:nvSpPr>
+        <p:spPr>
+          <a:xfrm>
+            <a:off x="1143000" y="1943100"/>
+            <a:ext cx="2057400" cy="1485900"/>
+          </a:xfrm>
+          <a:prstGeom prst="rect">
+            <a:avLst/>
+          </a:prstGeom>
+          <a:solidFill>
+            <a:srgbClr val="2E86AB"/>
+          </a:solidFill>
+          <a:ln w="12700">
+            <a:solidFill>
+              <a:srgbClr val="FFFFFF"/>
+            </a:solidFill>
+          </a:ln>
+        </p:spPr>
+        <p:style>
+          <a:lnRef idx="1">
+            <a:schemeClr val="accent1"/>
+          </a:lnRef>
+          <a:fillRef idx="3">
+            <a:schemeClr val="accent1"/>
+          </a:fillRef>
+          <a:effectRef idx="2">
+            <a:schemeClr val="accent1"/>
+          </a:effectRef>
+          <a:fontRef idx="minor">
+            <a:schemeClr val="lt1"/>
+          </a:fontRef>
+        </p:style>
+        <p:txBody>
+          <a:bodyPr rtlCol="0" anchor="ctr"/>
+          <a:lstStyle/>
+          <a:p>
+            <a:pPr algn="ctr"/>
+          </a:p>
+        </p:txBody>
+      </p:sp>
+      <p:sp>
+        <p:nvSpPr>
+          <p:cNvPr id="5" name="TextBox 4"/>
           <p:cNvSpPr txBox="1"/>
           <p:nvPr/>
         </p:nvSpPr>
         <p:spPr>
           <a:xfrm>
-            <a:off x="1143000" y="1943100"/>
-            <a:ext cx="3429000" cy="742950"/>
+            <a:off x="1143000" y="3429000"/>
+            <a:ext cx="2057400" cy="1485900"/>
+          </a:xfrm>
+          <a:prstGeom prst="rect">
+            <a:avLst/>
+          </a:prstGeom>
+          <a:noFill/>
+        </p:spPr>
+        <p:txBody>
+          <a:bodyPr wrap="square">
+            <a:spAutoFit/>
+          </a:bodyPr>
+          <a:lstStyle/>
+          <a:p>
+            <a:pPr>
+              <a:defRPr sz="1000" b="0">
+                <a:solidFill>
+                  <a:srgbClr val="2E86AB"/>
+                </a:solidFill>
+                <a:latin typeface="Source Sans Pro"/>
+              </a:defRPr>
+            </a:pPr>
+            <a:r>
+              <a:t>Primary</a:t>
+            </a:r>
+          </a:p>
+          <a:p>
+            <a:pPr>
+              <a:defRPr sz="1000" b="0">
+                <a:solidFill>
+                  <a:srgbClr val="2E86AB"/>
+                </a:solidFill>
+                <a:latin typeface="Source Sans Pro"/>
+              </a:defRPr>
+            </a:pPr>
+            <a:r>
+              <a:t>#2E86AB</a:t>
+            </a:r>
+          </a:p>
+          <a:p>
+            <a:pPr>
+              <a:defRPr sz="1000" b="0">
+                <a:solidFill>
+                  <a:srgbClr val="2E86AB"/>
+                </a:solidFill>
+                <a:latin typeface="Source Sans Pro"/>
+              </a:defRPr>
+            </a:pPr>
+            <a:r>
+              <a:t>RGB(46, 134, 171)</a:t>
+            </a:r>
+          </a:p>
+          <a:p>
+            <a:pPr>
+              <a:defRPr sz="1000" b="0">
+                <a:solidFill>
+                  <a:srgbClr val="2E86AB"/>
+                </a:solidFill>
+                <a:latin typeface="Source Sans Pro"/>
+              </a:defRPr>
+            </a:pPr>
+            <a:r>
+              <a:t>CMYK(73, 21, 0, 32)</a:t>
+            </a:r>
+          </a:p>
+          <a:p>
+            <a:pPr>
+              <a:defRPr sz="1000" b="0">
+                <a:solidFill>
+                  <a:srgbClr val="2E86AB"/>
+                </a:solidFill>
+                <a:latin typeface="Source Sans Pro"/>
+              </a:defRPr>
+            </a:pPr>
+            <a:r>
+              <a:t>Use Light Text</a:t>
+            </a:r>
+          </a:p>
+        </p:txBody>
+      </p:sp>
+      <p:sp>
+        <p:nvSpPr>
+          <p:cNvPr id="6" name="Rectangle 5"/>
+          <p:cNvSpPr/>
+          <p:nvPr/>
+        </p:nvSpPr>
+        <p:spPr>
+          <a:xfrm>
+            <a:off x="3886200" y="1943100"/>
+            <a:ext cx="2057400" cy="1485900"/>
+          </a:xfrm>
+          <a:prstGeom prst="rect">
+            <a:avLst/>
+          </a:prstGeom>
+          <a:solidFill>
+            <a:srgbClr val="A23B72"/>
+          </a:solidFill>
+          <a:ln w="12700">
+            <a:solidFill>
+              <a:srgbClr val="FFFFFF"/>
+            </a:solidFill>
+          </a:ln>
+        </p:spPr>
+        <p:style>
+          <a:lnRef idx="1">
+            <a:schemeClr val="accent1"/>
+          </a:lnRef>
+          <a:fillRef idx="3">
+            <a:schemeClr val="accent1"/>
+          </a:fillRef>
+          <a:effectRef idx="2">
+            <a:schemeClr val="accent1"/>
+          </a:effectRef>
+          <a:fontRef idx="minor">
+            <a:schemeClr val="lt1"/>
+          </a:fontRef>
+        </p:style>
+        <p:txBody>
+          <a:bodyPr rtlCol="0" anchor="ctr"/>
+          <a:lstStyle/>
+          <a:p>
+            <a:pPr algn="ctr"/>
+          </a:p>
+        </p:txBody>
+      </p:sp>
+      <p:sp>
+        <p:nvSpPr>
+          <p:cNvPr id="7" name="TextBox 6"/>
+          <p:cNvSpPr txBox="1"/>
+          <p:nvPr/>
+        </p:nvSpPr>
+        <p:spPr>
+          <a:xfrm>
+            <a:off x="3886200" y="3429000"/>
+            <a:ext cx="2057400" cy="1485900"/>
+          </a:xfrm>
+          <a:prstGeom prst="rect">
+            <a:avLst/>
+          </a:prstGeom>
+          <a:noFill/>
+        </p:spPr>
+        <p:txBody>
+          <a:bodyPr wrap="square">
+            <a:spAutoFit/>
+          </a:bodyPr>
+          <a:lstStyle/>
+          <a:p>
+            <a:pPr>
+              <a:defRPr sz="1000" b="0">
+                <a:solidFill>
+                  <a:srgbClr val="2E86AB"/>
+                </a:solidFill>
+                <a:latin typeface="Source Sans Pro"/>
+              </a:defRPr>
+            </a:pPr>
+            <a:r>
+              <a:t>Secondary</a:t>
+            </a:r>
+          </a:p>
+          <a:p>
+            <a:pPr>
+              <a:defRPr sz="1000" b="0">
+                <a:solidFill>
+                  <a:srgbClr val="2E86AB"/>
+                </a:solidFill>
+                <a:latin typeface="Source Sans Pro"/>
+              </a:defRPr>
+            </a:pPr>
+            <a:r>
+              <a:t>#A23B72</a:t>
+            </a:r>
+          </a:p>
+          <a:p>
+            <a:pPr>
+              <a:defRPr sz="1000" b="0">
+                <a:solidFill>
+                  <a:srgbClr val="2E86AB"/>
+                </a:solidFill>
+                <a:latin typeface="Source Sans Pro"/>
+              </a:defRPr>
+            </a:pPr>
+            <a:r>
+              <a:t>RGB(162, 59, 114)</a:t>
+            </a:r>
+          </a:p>
+          <a:p>
+            <a:pPr>
+              <a:defRPr sz="1000" b="0">
+                <a:solidFill>
+                  <a:srgbClr val="2E86AB"/>
+                </a:solidFill>
+                <a:latin typeface="Source Sans Pro"/>
+              </a:defRPr>
+            </a:pPr>
+            <a:r>
+              <a:t>CMYK(0, 63, 29, 36)</a:t>
+            </a:r>
+          </a:p>
+          <a:p>
+            <a:pPr>
+              <a:defRPr sz="1000" b="0">
+                <a:solidFill>
+                  <a:srgbClr val="2E86AB"/>
+                </a:solidFill>
+                <a:latin typeface="Source Sans Pro"/>
+              </a:defRPr>
+            </a:pPr>
+            <a:r>
+              <a:t>Use Light Text</a:t>
+            </a:r>
+          </a:p>
+        </p:txBody>
+      </p:sp>
+      <p:sp>
+        <p:nvSpPr>
+          <p:cNvPr id="8" name="Rectangle 7"/>
+          <p:cNvSpPr/>
+          <p:nvPr/>
+        </p:nvSpPr>
+        <p:spPr>
+          <a:xfrm>
+            <a:off x="6629400" y="1943100"/>
+            <a:ext cx="2057400" cy="1485900"/>
+          </a:xfrm>
+          <a:prstGeom prst="rect">
+            <a:avLst/>
+          </a:prstGeom>
+          <a:solidFill>
+            <a:srgbClr val="F18F01"/>
+          </a:solidFill>
+          <a:ln w="12700">
+            <a:solidFill>
+              <a:srgbClr val="FFFFFF"/>
+            </a:solidFill>
+          </a:ln>
+        </p:spPr>
+        <p:style>
+          <a:lnRef idx="1">
+            <a:schemeClr val="accent1"/>
+          </a:lnRef>
+          <a:fillRef idx="3">
+            <a:schemeClr val="accent1"/>
+          </a:fillRef>
+          <a:effectRef idx="2">
+            <a:schemeClr val="accent1"/>
+          </a:effectRef>
+          <a:fontRef idx="minor">
+            <a:schemeClr val="lt1"/>
+          </a:fontRef>
+        </p:style>
+        <p:txBody>
+          <a:bodyPr rtlCol="0" anchor="ctr"/>
+          <a:lstStyle/>
+          <a:p>
+            <a:pPr algn="ctr"/>
+          </a:p>
+        </p:txBody>
+      </p:sp>
+      <p:sp>
+        <p:nvSpPr>
+          <p:cNvPr id="9" name="TextBox 8"/>
+          <p:cNvSpPr txBox="1"/>
+          <p:nvPr/>
+        </p:nvSpPr>
+        <p:spPr>
+          <a:xfrm>
+            <a:off x="6629400" y="3429000"/>
+            <a:ext cx="2057400" cy="1485900"/>
+          </a:xfrm>
+          <a:prstGeom prst="rect">
+            <a:avLst/>
+          </a:prstGeom>
+          <a:noFill/>
+        </p:spPr>
+        <p:txBody>
+          <a:bodyPr wrap="square">
+            <a:spAutoFit/>
+          </a:bodyPr>
+          <a:lstStyle/>
+          <a:p>
+            <a:pPr>
+              <a:defRPr sz="1000" b="0">
+                <a:solidFill>
+                  <a:srgbClr val="2E86AB"/>
+                </a:solidFill>
+                <a:latin typeface="Source Sans Pro"/>
+              </a:defRPr>
+            </a:pPr>
+            <a:r>
+              <a:t>Accent</a:t>
+            </a:r>
+          </a:p>
+          <a:p>
+            <a:pPr>
+              <a:defRPr sz="1000" b="0">
+                <a:solidFill>
+                  <a:srgbClr val="2E86AB"/>
+                </a:solidFill>
+                <a:latin typeface="Source Sans Pro"/>
+              </a:defRPr>
+            </a:pPr>
+            <a:r>
+              <a:t>#F18F01</a:t>
+            </a:r>
+          </a:p>
+          <a:p>
+            <a:pPr>
+              <a:defRPr sz="1000" b="0">
+                <a:solidFill>
+                  <a:srgbClr val="2E86AB"/>
+                </a:solidFill>
+                <a:latin typeface="Source Sans Pro"/>
+              </a:defRPr>
+            </a:pPr>
+            <a:r>
+              <a:t>RGB(241, 143, 1)</a:t>
+            </a:r>
+          </a:p>
+          <a:p>
+            <a:pPr>
+              <a:defRPr sz="1000" b="0">
+                <a:solidFill>
+                  <a:srgbClr val="2E86AB"/>
+                </a:solidFill>
+                <a:latin typeface="Source Sans Pro"/>
+              </a:defRPr>
+            </a:pPr>
+            <a:r>
+              <a:t>CMYK(0, 40, 99, 5)</a:t>
+            </a:r>
+          </a:p>
+          <a:p>
+            <a:pPr>
+              <a:defRPr sz="1000" b="0">
+                <a:solidFill>
+                  <a:srgbClr val="2E86AB"/>
+                </a:solidFill>
+                <a:latin typeface="Source Sans Pro"/>
+              </a:defRPr>
+            </a:pPr>
+            <a:r>
+              <a:t>Use Dark Text</a:t>
+            </a:r>
+          </a:p>
+        </p:txBody>
+      </p:sp>
+      <p:sp>
+        <p:nvSpPr>
+          <p:cNvPr id="10" name="TextBox 9"/>
+          <p:cNvSpPr txBox="1"/>
+          <p:nvPr/>
+        </p:nvSpPr>
+        <p:spPr>
+          <a:xfrm>
+            <a:off x="457200" y="5657850"/>
+            <a:ext cx="4114800" cy="742950"/>
           </a:xfrm>
           <a:prstGeom prst="rect">
             <a:avLst/>
@@ -6796,294 +7514,6 @@
           </a:bodyPr>
           <a:lstStyle/>
           <a:p>
-            <a:pPr>
-              <a:defRPr sz="2000" b="0">
-                <a:solidFill>
-                  <a:srgbClr val="2E86AB"/>
-                </a:solidFill>
-                <a:latin typeface="Source Sans Pro"/>
-              </a:defRPr>
-            </a:pPr>
-            <a:r>
-              <a:t>Primary Font: Inter</a:t>
-            </a:r>
-          </a:p>
-        </p:txBody>
-      </p:sp>
-      <p:sp>
-        <p:nvSpPr>
-          <p:cNvPr id="5" name="TextBox 4"/>
-          <p:cNvSpPr txBox="1"/>
-          <p:nvPr/>
-        </p:nvSpPr>
-        <p:spPr>
-          <a:xfrm>
-            <a:off x="1143000" y="2686050"/>
-            <a:ext cx="3429000" cy="742950"/>
-          </a:xfrm>
-          <a:prstGeom prst="rect">
-            <a:avLst/>
-          </a:prstGeom>
-          <a:noFill/>
-        </p:spPr>
-        <p:txBody>
-          <a:bodyPr wrap="none">
-            <a:spAutoFit/>
-          </a:bodyPr>
-          <a:lstStyle/>
-          <a:p>
-            <a:pPr>
-              <a:defRPr sz="3200" b="1">
-                <a:solidFill>
-                  <a:srgbClr val="2E86AB"/>
-                </a:solidFill>
-                <a:latin typeface="Inter"/>
-              </a:defRPr>
-            </a:pPr>
-            <a:r>
-              <a:t>H1 Heading</a:t>
-            </a:r>
-          </a:p>
-        </p:txBody>
-      </p:sp>
-      <p:sp>
-        <p:nvSpPr>
-          <p:cNvPr id="6" name="TextBox 5"/>
-          <p:cNvSpPr txBox="1"/>
-          <p:nvPr/>
-        </p:nvSpPr>
-        <p:spPr>
-          <a:xfrm>
-            <a:off x="1143000" y="3429000"/>
-            <a:ext cx="3429000" cy="742950"/>
-          </a:xfrm>
-          <a:prstGeom prst="rect">
-            <a:avLst/>
-          </a:prstGeom>
-          <a:noFill/>
-        </p:spPr>
-        <p:txBody>
-          <a:bodyPr wrap="none">
-            <a:spAutoFit/>
-          </a:bodyPr>
-          <a:lstStyle/>
-          <a:p>
-            <a:pPr>
-              <a:defRPr sz="2400" b="1">
-                <a:solidFill>
-                  <a:srgbClr val="2E86AB"/>
-                </a:solidFill>
-                <a:latin typeface="Inter"/>
-              </a:defRPr>
-            </a:pPr>
-            <a:r>
-              <a:t>H2 Heading</a:t>
-            </a:r>
-          </a:p>
-        </p:txBody>
-      </p:sp>
-      <p:sp>
-        <p:nvSpPr>
-          <p:cNvPr id="7" name="TextBox 6"/>
-          <p:cNvSpPr txBox="1"/>
-          <p:nvPr/>
-        </p:nvSpPr>
-        <p:spPr>
-          <a:xfrm>
-            <a:off x="1143000" y="4171950"/>
-            <a:ext cx="3429000" cy="742950"/>
-          </a:xfrm>
-          <a:prstGeom prst="rect">
-            <a:avLst/>
-          </a:prstGeom>
-          <a:noFill/>
-        </p:spPr>
-        <p:txBody>
-          <a:bodyPr wrap="none">
-            <a:spAutoFit/>
-          </a:bodyPr>
-          <a:lstStyle/>
-          <a:p>
-            <a:pPr>
-              <a:defRPr sz="2000" b="0">
-                <a:solidFill>
-                  <a:srgbClr val="2E86AB"/>
-                </a:solidFill>
-                <a:latin typeface="Inter"/>
-              </a:defRPr>
-            </a:pPr>
-            <a:r>
-              <a:t>H3 Heading</a:t>
-            </a:r>
-          </a:p>
-        </p:txBody>
-      </p:sp>
-      <p:sp>
-        <p:nvSpPr>
-          <p:cNvPr id="8" name="TextBox 7"/>
-          <p:cNvSpPr txBox="1"/>
-          <p:nvPr/>
-        </p:nvSpPr>
-        <p:spPr>
-          <a:xfrm>
-            <a:off x="5257800" y="1943100"/>
-            <a:ext cx="3429000" cy="742950"/>
-          </a:xfrm>
-          <a:prstGeom prst="rect">
-            <a:avLst/>
-          </a:prstGeom>
-          <a:noFill/>
-        </p:spPr>
-        <p:txBody>
-          <a:bodyPr wrap="none">
-            <a:spAutoFit/>
-          </a:bodyPr>
-          <a:lstStyle/>
-          <a:p>
-            <a:pPr>
-              <a:defRPr sz="2000" b="0">
-                <a:solidFill>
-                  <a:srgbClr val="2E86AB"/>
-                </a:solidFill>
-                <a:latin typeface="Source Sans Pro"/>
-              </a:defRPr>
-            </a:pPr>
-            <a:r>
-              <a:t>Secondary Font: Source Sans Pro</a:t>
-            </a:r>
-          </a:p>
-        </p:txBody>
-      </p:sp>
-      <p:sp>
-        <p:nvSpPr>
-          <p:cNvPr id="9" name="TextBox 8"/>
-          <p:cNvSpPr txBox="1"/>
-          <p:nvPr/>
-        </p:nvSpPr>
-        <p:spPr>
-          <a:xfrm>
-            <a:off x="5257800" y="2686050"/>
-            <a:ext cx="3429000" cy="742950"/>
-          </a:xfrm>
-          <a:prstGeom prst="rect">
-            <a:avLst/>
-          </a:prstGeom>
-          <a:noFill/>
-        </p:spPr>
-        <p:txBody>
-          <a:bodyPr wrap="none">
-            <a:spAutoFit/>
-          </a:bodyPr>
-          <a:lstStyle/>
-          <a:p>
-            <a:pPr>
-              <a:defRPr sz="1600" b="0">
-                <a:solidFill>
-                  <a:srgbClr val="2E86AB"/>
-                </a:solidFill>
-                <a:latin typeface="Source Sans Pro"/>
-              </a:defRPr>
-            </a:pPr>
-            <a:r>
-              <a:t>Body Text</a:t>
-            </a:r>
-          </a:p>
-        </p:txBody>
-      </p:sp>
-      <p:sp>
-        <p:nvSpPr>
-          <p:cNvPr id="10" name="TextBox 9"/>
-          <p:cNvSpPr txBox="1"/>
-          <p:nvPr/>
-        </p:nvSpPr>
-        <p:spPr>
-          <a:xfrm>
-            <a:off x="5257800" y="3429000"/>
-            <a:ext cx="3429000" cy="742950"/>
-          </a:xfrm>
-          <a:prstGeom prst="rect">
-            <a:avLst/>
-          </a:prstGeom>
-          <a:noFill/>
-        </p:spPr>
-        <p:txBody>
-          <a:bodyPr wrap="none">
-            <a:spAutoFit/>
-          </a:bodyPr>
-          <a:lstStyle/>
-          <a:p>
-            <a:pPr>
-              <a:defRPr sz="1600" b="1">
-                <a:solidFill>
-                  <a:srgbClr val="2E86AB"/>
-                </a:solidFill>
-                <a:latin typeface="Source Sans Pro"/>
-              </a:defRPr>
-            </a:pPr>
-            <a:r>
-              <a:t>Body Bold</a:t>
-            </a:r>
-          </a:p>
-        </p:txBody>
-      </p:sp>
-      <p:sp>
-        <p:nvSpPr>
-          <p:cNvPr id="11" name="TextBox 10"/>
-          <p:cNvSpPr txBox="1"/>
-          <p:nvPr/>
-        </p:nvSpPr>
-        <p:spPr>
-          <a:xfrm>
-            <a:off x="5257800" y="4171950"/>
-            <a:ext cx="3429000" cy="742950"/>
-          </a:xfrm>
-          <a:prstGeom prst="rect">
-            <a:avLst/>
-          </a:prstGeom>
-          <a:noFill/>
-        </p:spPr>
-        <p:txBody>
-          <a:bodyPr wrap="none">
-            <a:spAutoFit/>
-          </a:bodyPr>
-          <a:lstStyle/>
-          <a:p>
-            <a:pPr>
-              <a:defRPr sz="1200" b="0">
-                <a:solidFill>
-                  <a:srgbClr val="2E86AB"/>
-                </a:solidFill>
-                <a:latin typeface="Source Sans Pro"/>
-              </a:defRPr>
-            </a:pPr>
-            <a:r>
-              <a:t>Caption Text</a:t>
-            </a:r>
-          </a:p>
-        </p:txBody>
-      </p:sp>
-      <p:sp>
-        <p:nvSpPr>
-          <p:cNvPr id="12" name="TextBox 11"/>
-          <p:cNvSpPr txBox="1"/>
-          <p:nvPr/>
-        </p:nvSpPr>
-        <p:spPr>
-          <a:xfrm>
-            <a:off x="457200" y="5657850"/>
-            <a:ext cx="4114800" cy="742950"/>
-          </a:xfrm>
-          <a:prstGeom prst="rect">
-            <a:avLst/>
-          </a:prstGeom>
-          <a:noFill/>
-        </p:spPr>
-        <p:txBody>
-          <a:bodyPr wrap="none">
-            <a:spAutoFit/>
-          </a:bodyPr>
-          <a:lstStyle/>
-          <a:p>
             <a:pPr algn="l">
               <a:defRPr sz="1000" b="0">
                 <a:solidFill>
@@ -7100,7 +7530,7 @@
       </p:sp>
       <p:sp>
         <p:nvSpPr>
-          <p:cNvPr id="13" name="TextBox 12"/>
+          <p:cNvPr id="11" name="TextBox 10"/>
           <p:cNvSpPr txBox="1"/>
           <p:nvPr/>
         </p:nvSpPr>

--- a/output/techforward_live/techforward_live_enhanced_brand_book.pptx
+++ b/output/techforward_live/techforward_live_enhanced_brand_book.pptx
@@ -16,6 +16,8 @@
     <p:sldId id="264" r:id="rId15"/>
     <p:sldId id="265" r:id="rId16"/>
     <p:sldId id="266" r:id="rId17"/>
+    <p:sldId id="267" r:id="rId18"/>
+    <p:sldId id="268" r:id="rId19"/>
   </p:sldIdLst>
   <p:sldSz cx="9144000" cy="6858000" type="screen4x3"/>
   <p:notesSz cx="6858000" cy="9144000"/>
@@ -3212,66 +3214,129 @@
 <file path=ppt/slides/slide10.xml><?xml version="1.0" encoding="utf-8"?>
 <p:sld xmlns:a="http://schemas.openxmlformats.org/drawingml/2006/main" xmlns:p="http://schemas.openxmlformats.org/presentationml/2006/main" xmlns:r="http://schemas.openxmlformats.org/officeDocument/2006/relationships">
   <p:cSld>
+    <p:bg>
+      <p:bgPr>
+        <a:solidFill>
+          <a:srgbClr val="000000"/>
+        </a:solidFill>
+        <a:effectLst/>
+      </p:bgPr>
+    </p:bg>
     <p:spTree>
       <p:nvGrpSpPr>
         <p:cNvPr id="1" name=""/>
         <p:cNvGrpSpPr/>
         <p:nvPr/>
       </p:nvGrpSpPr>
-      <p:sp>
-        <p:nvSpPr>
-          <p:cNvPr id="2" name="Rectangle 1"/>
-          <p:cNvSpPr/>
-          <p:nvPr/>
-        </p:nvSpPr>
-        <p:spPr>
-          <a:xfrm>
-            <a:off x="0" y="0"/>
-            <a:ext cx="9144000" cy="6858000"/>
-          </a:xfrm>
-          <a:prstGeom prst="rect">
-            <a:avLst/>
-          </a:prstGeom>
-          <a:solidFill>
-            <a:srgbClr val="1A1A1A"/>
-          </a:solidFill>
-          <a:ln>
-            <a:noFill/>
+      <p:grpSpPr/>
+      <p:pic>
+        <p:nvPicPr>
+          <p:cNvPr id="2" name="Picture 1" descr="zeta_logo_3_20250828_235415_054bae29.png"/>
+          <p:cNvPicPr>
+            <a:picLocks noChangeAspect="1"/>
+          </p:cNvPicPr>
+          <p:nvPr/>
+        </p:nvPicPr>
+        <p:blipFill>
+          <a:blip r:embed="rId2"/>
+          <a:stretch>
+            <a:fillRect/>
+          </a:stretch>
+        </p:blipFill>
+        <p:spPr>
+          <a:xfrm>
+            <a:off x="1143000" y="1943100"/>
+            <a:ext cx="3429000" cy="2971800"/>
+          </a:xfrm>
+          <a:prstGeom prst="rect">
+            <a:avLst/>
+          </a:prstGeom>
+        </p:spPr>
+      </p:pic>
+      <p:sp>
+        <p:nvSpPr>
+          <p:cNvPr id="3" name="TextBox 2"/>
+          <p:cNvSpPr txBox="1"/>
+          <p:nvPr/>
+        </p:nvSpPr>
+        <p:spPr>
+          <a:xfrm>
+            <a:off x="5257800" y="1200150"/>
+            <a:ext cx="3429000" cy="4457700"/>
+          </a:xfrm>
+          <a:prstGeom prst="rect">
+            <a:avLst/>
+          </a:prstGeom>
+          <a:noFill/>
+        </p:spPr>
+        <p:txBody>
+          <a:bodyPr wrap="square" lIns="0" rIns="0" tIns="0" bIns="0">
+            <a:spAutoFit/>
+          </a:bodyPr>
+          <a:lstStyle/>
+          <a:p>
+            <a:pPr algn="l">
+              <a:spcAft>
+                <a:spcPts val="800"/>
+              </a:spcAft>
+              <a:defRPr sz="1600" b="0">
+                <a:solidFill>
+                  <a:srgbClr val="FFFFFF"/>
+                </a:solidFill>
+                <a:latin typeface="Source Sans Pro"/>
+              </a:defRPr>
+            </a:pPr>
+            <a:r>
+              <a:t>Simplified logo for minimal sizes. Perfect for watermarks, stamps, and tight layouts.</a:t>
+            </a:r>
+          </a:p>
+        </p:txBody>
+      </p:sp>
+      <p:cxnSp>
+        <p:nvCxnSpPr>
+          <p:cNvPr id="4" name="Connector 3"/>
+          <p:cNvCxnSpPr/>
+          <p:nvPr/>
+        </p:nvCxnSpPr>
+        <p:spPr>
+          <a:xfrm>
+            <a:off x="457200" y="5286375.0"/>
+            <a:ext cx="8229600" cy="0.0"/>
+          </a:xfrm>
+          <a:prstGeom prst="line">
+            <a:avLst/>
+          </a:prstGeom>
+          <a:ln w="25400">
+            <a:solidFill>
+              <a:srgbClr val="2E86AB"/>
+            </a:solidFill>
           </a:ln>
         </p:spPr>
         <p:style>
-          <a:lnRef idx="1">
+          <a:lnRef idx="2">
             <a:schemeClr val="accent1"/>
           </a:lnRef>
-          <a:fillRef idx="3">
+          <a:fillRef idx="0">
             <a:schemeClr val="accent1"/>
           </a:fillRef>
-          <a:effectRef idx="2">
+          <a:effectRef idx="1">
             <a:schemeClr val="accent1"/>
           </a:effectRef>
           <a:fontRef idx="minor">
-            <a:schemeClr val="lt1"/>
+            <a:schemeClr val="tx1"/>
           </a:fontRef>
         </p:style>
-        <p:txBody>
-          <a:bodyPr rtlCol="0" anchor="ctr"/>
-          <a:lstStyle/>
-          <a:p>
-            <a:pPr algn="ctr"/>
-          </a:p>
-        </p:txBody>
-      </p:sp>
-      <p:grpSpPr/>
-      <p:sp>
-        <p:nvSpPr>
-          <p:cNvPr id="3" name="TextBox 2"/>
+      </p:cxnSp>
+      <p:sp>
+        <p:nvSpPr>
+          <p:cNvPr id="5" name="TextBox 4"/>
           <p:cNvSpPr txBox="1"/>
           <p:nvPr/>
         </p:nvSpPr>
         <p:spPr>
           <a:xfrm>
-            <a:off x="1143000" y="457200"/>
-            <a:ext cx="6858000" cy="742950"/>
+            <a:off x="800100" y="5560695"/>
+            <a:ext cx="5486400" cy="731520"/>
           </a:xfrm>
           <a:prstGeom prst="rect">
             <a:avLst/>
@@ -3284,8 +3349,8 @@
           </a:bodyPr>
           <a:lstStyle/>
           <a:p>
-            <a:pPr>
-              <a:defRPr sz="3200" b="1">
+            <a:pPr algn="l">
+              <a:defRPr sz="2800" b="1">
                 <a:solidFill>
                   <a:srgbClr val="2E86AB"/>
                 </a:solidFill>
@@ -3293,367 +3358,7 @@
               </a:defRPr>
             </a:pPr>
             <a:r>
-              <a:t>Typography</a:t>
-            </a:r>
-          </a:p>
-        </p:txBody>
-      </p:sp>
-      <p:sp>
-        <p:nvSpPr>
-          <p:cNvPr id="4" name="TextBox 3"/>
-          <p:cNvSpPr txBox="1"/>
-          <p:nvPr/>
-        </p:nvSpPr>
-        <p:spPr>
-          <a:xfrm>
-            <a:off x="1143000" y="1943100"/>
-            <a:ext cx="3429000" cy="742950"/>
-          </a:xfrm>
-          <a:prstGeom prst="rect">
-            <a:avLst/>
-          </a:prstGeom>
-          <a:noFill/>
-        </p:spPr>
-        <p:txBody>
-          <a:bodyPr wrap="none">
-            <a:spAutoFit/>
-          </a:bodyPr>
-          <a:lstStyle/>
-          <a:p>
-            <a:pPr>
-              <a:defRPr sz="2000" b="0">
-                <a:solidFill>
-                  <a:srgbClr val="2E86AB"/>
-                </a:solidFill>
-                <a:latin typeface="Source Sans Pro"/>
-              </a:defRPr>
-            </a:pPr>
-            <a:r>
-              <a:t>Primary Font: Inter</a:t>
-            </a:r>
-          </a:p>
-        </p:txBody>
-      </p:sp>
-      <p:sp>
-        <p:nvSpPr>
-          <p:cNvPr id="5" name="TextBox 4"/>
-          <p:cNvSpPr txBox="1"/>
-          <p:nvPr/>
-        </p:nvSpPr>
-        <p:spPr>
-          <a:xfrm>
-            <a:off x="1143000" y="2686050"/>
-            <a:ext cx="3429000" cy="742950"/>
-          </a:xfrm>
-          <a:prstGeom prst="rect">
-            <a:avLst/>
-          </a:prstGeom>
-          <a:noFill/>
-        </p:spPr>
-        <p:txBody>
-          <a:bodyPr wrap="none">
-            <a:spAutoFit/>
-          </a:bodyPr>
-          <a:lstStyle/>
-          <a:p>
-            <a:pPr>
-              <a:defRPr sz="3200" b="1">
-                <a:solidFill>
-                  <a:srgbClr val="2E86AB"/>
-                </a:solidFill>
-                <a:latin typeface="Inter"/>
-              </a:defRPr>
-            </a:pPr>
-            <a:r>
-              <a:t>H1 Heading</a:t>
-            </a:r>
-          </a:p>
-        </p:txBody>
-      </p:sp>
-      <p:sp>
-        <p:nvSpPr>
-          <p:cNvPr id="6" name="TextBox 5"/>
-          <p:cNvSpPr txBox="1"/>
-          <p:nvPr/>
-        </p:nvSpPr>
-        <p:spPr>
-          <a:xfrm>
-            <a:off x="1143000" y="3429000"/>
-            <a:ext cx="3429000" cy="742950"/>
-          </a:xfrm>
-          <a:prstGeom prst="rect">
-            <a:avLst/>
-          </a:prstGeom>
-          <a:noFill/>
-        </p:spPr>
-        <p:txBody>
-          <a:bodyPr wrap="none">
-            <a:spAutoFit/>
-          </a:bodyPr>
-          <a:lstStyle/>
-          <a:p>
-            <a:pPr>
-              <a:defRPr sz="2400" b="1">
-                <a:solidFill>
-                  <a:srgbClr val="2E86AB"/>
-                </a:solidFill>
-                <a:latin typeface="Inter"/>
-              </a:defRPr>
-            </a:pPr>
-            <a:r>
-              <a:t>H2 Heading</a:t>
-            </a:r>
-          </a:p>
-        </p:txBody>
-      </p:sp>
-      <p:sp>
-        <p:nvSpPr>
-          <p:cNvPr id="7" name="TextBox 6"/>
-          <p:cNvSpPr txBox="1"/>
-          <p:nvPr/>
-        </p:nvSpPr>
-        <p:spPr>
-          <a:xfrm>
-            <a:off x="1143000" y="4171950"/>
-            <a:ext cx="3429000" cy="742950"/>
-          </a:xfrm>
-          <a:prstGeom prst="rect">
-            <a:avLst/>
-          </a:prstGeom>
-          <a:noFill/>
-        </p:spPr>
-        <p:txBody>
-          <a:bodyPr wrap="none">
-            <a:spAutoFit/>
-          </a:bodyPr>
-          <a:lstStyle/>
-          <a:p>
-            <a:pPr>
-              <a:defRPr sz="2000" b="0">
-                <a:solidFill>
-                  <a:srgbClr val="2E86AB"/>
-                </a:solidFill>
-                <a:latin typeface="Inter"/>
-              </a:defRPr>
-            </a:pPr>
-            <a:r>
-              <a:t>H3 Heading</a:t>
-            </a:r>
-          </a:p>
-        </p:txBody>
-      </p:sp>
-      <p:sp>
-        <p:nvSpPr>
-          <p:cNvPr id="8" name="TextBox 7"/>
-          <p:cNvSpPr txBox="1"/>
-          <p:nvPr/>
-        </p:nvSpPr>
-        <p:spPr>
-          <a:xfrm>
-            <a:off x="5257800" y="1943100"/>
-            <a:ext cx="3429000" cy="742950"/>
-          </a:xfrm>
-          <a:prstGeom prst="rect">
-            <a:avLst/>
-          </a:prstGeom>
-          <a:noFill/>
-        </p:spPr>
-        <p:txBody>
-          <a:bodyPr wrap="none">
-            <a:spAutoFit/>
-          </a:bodyPr>
-          <a:lstStyle/>
-          <a:p>
-            <a:pPr>
-              <a:defRPr sz="2000" b="0">
-                <a:solidFill>
-                  <a:srgbClr val="2E86AB"/>
-                </a:solidFill>
-                <a:latin typeface="Source Sans Pro"/>
-              </a:defRPr>
-            </a:pPr>
-            <a:r>
-              <a:t>Secondary Font: Source Sans Pro</a:t>
-            </a:r>
-          </a:p>
-        </p:txBody>
-      </p:sp>
-      <p:sp>
-        <p:nvSpPr>
-          <p:cNvPr id="9" name="TextBox 8"/>
-          <p:cNvSpPr txBox="1"/>
-          <p:nvPr/>
-        </p:nvSpPr>
-        <p:spPr>
-          <a:xfrm>
-            <a:off x="5257800" y="2686050"/>
-            <a:ext cx="3429000" cy="742950"/>
-          </a:xfrm>
-          <a:prstGeom prst="rect">
-            <a:avLst/>
-          </a:prstGeom>
-          <a:noFill/>
-        </p:spPr>
-        <p:txBody>
-          <a:bodyPr wrap="none">
-            <a:spAutoFit/>
-          </a:bodyPr>
-          <a:lstStyle/>
-          <a:p>
-            <a:pPr>
-              <a:defRPr sz="1600" b="0">
-                <a:solidFill>
-                  <a:srgbClr val="2E86AB"/>
-                </a:solidFill>
-                <a:latin typeface="Source Sans Pro"/>
-              </a:defRPr>
-            </a:pPr>
-            <a:r>
-              <a:t>Body Text</a:t>
-            </a:r>
-          </a:p>
-        </p:txBody>
-      </p:sp>
-      <p:sp>
-        <p:nvSpPr>
-          <p:cNvPr id="10" name="TextBox 9"/>
-          <p:cNvSpPr txBox="1"/>
-          <p:nvPr/>
-        </p:nvSpPr>
-        <p:spPr>
-          <a:xfrm>
-            <a:off x="5257800" y="3429000"/>
-            <a:ext cx="3429000" cy="742950"/>
-          </a:xfrm>
-          <a:prstGeom prst="rect">
-            <a:avLst/>
-          </a:prstGeom>
-          <a:noFill/>
-        </p:spPr>
-        <p:txBody>
-          <a:bodyPr wrap="none">
-            <a:spAutoFit/>
-          </a:bodyPr>
-          <a:lstStyle/>
-          <a:p>
-            <a:pPr>
-              <a:defRPr sz="1600" b="1">
-                <a:solidFill>
-                  <a:srgbClr val="2E86AB"/>
-                </a:solidFill>
-                <a:latin typeface="Source Sans Pro"/>
-              </a:defRPr>
-            </a:pPr>
-            <a:r>
-              <a:t>Body Bold</a:t>
-            </a:r>
-          </a:p>
-        </p:txBody>
-      </p:sp>
-      <p:sp>
-        <p:nvSpPr>
-          <p:cNvPr id="11" name="TextBox 10"/>
-          <p:cNvSpPr txBox="1"/>
-          <p:nvPr/>
-        </p:nvSpPr>
-        <p:spPr>
-          <a:xfrm>
-            <a:off x="5257800" y="4171950"/>
-            <a:ext cx="3429000" cy="742950"/>
-          </a:xfrm>
-          <a:prstGeom prst="rect">
-            <a:avLst/>
-          </a:prstGeom>
-          <a:noFill/>
-        </p:spPr>
-        <p:txBody>
-          <a:bodyPr wrap="none">
-            <a:spAutoFit/>
-          </a:bodyPr>
-          <a:lstStyle/>
-          <a:p>
-            <a:pPr>
-              <a:defRPr sz="1200" b="0">
-                <a:solidFill>
-                  <a:srgbClr val="2E86AB"/>
-                </a:solidFill>
-                <a:latin typeface="Source Sans Pro"/>
-              </a:defRPr>
-            </a:pPr>
-            <a:r>
-              <a:t>Caption Text</a:t>
-            </a:r>
-          </a:p>
-        </p:txBody>
-      </p:sp>
-      <p:sp>
-        <p:nvSpPr>
-          <p:cNvPr id="12" name="TextBox 11"/>
-          <p:cNvSpPr txBox="1"/>
-          <p:nvPr/>
-        </p:nvSpPr>
-        <p:spPr>
-          <a:xfrm>
-            <a:off x="457200" y="5657850"/>
-            <a:ext cx="4114800" cy="742950"/>
-          </a:xfrm>
-          <a:prstGeom prst="rect">
-            <a:avLst/>
-          </a:prstGeom>
-          <a:noFill/>
-        </p:spPr>
-        <p:txBody>
-          <a:bodyPr wrap="none">
-            <a:spAutoFit/>
-          </a:bodyPr>
-          <a:lstStyle/>
-          <a:p>
-            <a:pPr algn="l">
-              <a:defRPr sz="1000" b="0">
-                <a:solidFill>
-                  <a:srgbClr val="2E86AB"/>
-                </a:solidFill>
-                <a:latin typeface="Source Sans Pro"/>
-              </a:defRPr>
-            </a:pPr>
-            <a:r>
-              <a:t>TechForward Live</a:t>
-            </a:r>
-          </a:p>
-        </p:txBody>
-      </p:sp>
-      <p:sp>
-        <p:nvSpPr>
-          <p:cNvPr id="13" name="TextBox 12"/>
-          <p:cNvSpPr txBox="1"/>
-          <p:nvPr/>
-        </p:nvSpPr>
-        <p:spPr>
-          <a:xfrm>
-            <a:off x="4572000" y="5657850"/>
-            <a:ext cx="4114800" cy="742950"/>
-          </a:xfrm>
-          <a:prstGeom prst="rect">
-            <a:avLst/>
-          </a:prstGeom>
-          <a:noFill/>
-        </p:spPr>
-        <p:txBody>
-          <a:bodyPr wrap="none">
-            <a:spAutoFit/>
-          </a:bodyPr>
-          <a:lstStyle/>
-          <a:p>
-            <a:pPr algn="r">
-              <a:defRPr sz="1000" b="0">
-                <a:solidFill>
-                  <a:srgbClr val="2E86AB"/>
-                </a:solidFill>
-                <a:latin typeface="Source Sans Pro"/>
-              </a:defRPr>
-            </a:pPr>
-            <a:r>
-              <a:t>10</a:t>
+              <a:t>Logo Variation 3</a:t>
             </a:r>
           </a:p>
         </p:txBody>
@@ -3750,6 +3455,1031 @@
               </a:defRPr>
             </a:pPr>
             <a:r>
+              <a:t>Color Palette</a:t>
+            </a:r>
+          </a:p>
+        </p:txBody>
+      </p:sp>
+      <p:sp>
+        <p:nvSpPr>
+          <p:cNvPr id="4" name="Rectangle 3"/>
+          <p:cNvSpPr/>
+          <p:nvPr/>
+        </p:nvSpPr>
+        <p:spPr>
+          <a:xfrm>
+            <a:off x="1143000" y="1943100"/>
+            <a:ext cx="2057400" cy="1485900"/>
+          </a:xfrm>
+          <a:prstGeom prst="rect">
+            <a:avLst/>
+          </a:prstGeom>
+          <a:solidFill>
+            <a:srgbClr val="2E86AB"/>
+          </a:solidFill>
+          <a:ln w="12700">
+            <a:solidFill>
+              <a:srgbClr val="FFFFFF"/>
+            </a:solidFill>
+          </a:ln>
+        </p:spPr>
+        <p:style>
+          <a:lnRef idx="1">
+            <a:schemeClr val="accent1"/>
+          </a:lnRef>
+          <a:fillRef idx="3">
+            <a:schemeClr val="accent1"/>
+          </a:fillRef>
+          <a:effectRef idx="2">
+            <a:schemeClr val="accent1"/>
+          </a:effectRef>
+          <a:fontRef idx="minor">
+            <a:schemeClr val="lt1"/>
+          </a:fontRef>
+        </p:style>
+        <p:txBody>
+          <a:bodyPr rtlCol="0" anchor="ctr"/>
+          <a:lstStyle/>
+          <a:p>
+            <a:pPr algn="ctr"/>
+          </a:p>
+        </p:txBody>
+      </p:sp>
+      <p:sp>
+        <p:nvSpPr>
+          <p:cNvPr id="5" name="TextBox 4"/>
+          <p:cNvSpPr txBox="1"/>
+          <p:nvPr/>
+        </p:nvSpPr>
+        <p:spPr>
+          <a:xfrm>
+            <a:off x="1143000" y="3429000"/>
+            <a:ext cx="2057400" cy="1485900"/>
+          </a:xfrm>
+          <a:prstGeom prst="rect">
+            <a:avLst/>
+          </a:prstGeom>
+          <a:noFill/>
+        </p:spPr>
+        <p:txBody>
+          <a:bodyPr wrap="square">
+            <a:spAutoFit/>
+          </a:bodyPr>
+          <a:lstStyle/>
+          <a:p>
+            <a:pPr>
+              <a:defRPr sz="1000" b="0">
+                <a:solidFill>
+                  <a:srgbClr val="2E86AB"/>
+                </a:solidFill>
+                <a:latin typeface="Source Sans Pro"/>
+              </a:defRPr>
+            </a:pPr>
+            <a:r>
+              <a:t>Primary</a:t>
+            </a:r>
+          </a:p>
+          <a:p>
+            <a:pPr>
+              <a:defRPr sz="1000" b="0">
+                <a:solidFill>
+                  <a:srgbClr val="2E86AB"/>
+                </a:solidFill>
+                <a:latin typeface="Source Sans Pro"/>
+              </a:defRPr>
+            </a:pPr>
+            <a:r>
+              <a:t>#2E86AB</a:t>
+            </a:r>
+          </a:p>
+          <a:p>
+            <a:pPr>
+              <a:defRPr sz="1000" b="0">
+                <a:solidFill>
+                  <a:srgbClr val="2E86AB"/>
+                </a:solidFill>
+                <a:latin typeface="Source Sans Pro"/>
+              </a:defRPr>
+            </a:pPr>
+            <a:r>
+              <a:t>RGB(46, 134, 171)</a:t>
+            </a:r>
+          </a:p>
+          <a:p>
+            <a:pPr>
+              <a:defRPr sz="1000" b="0">
+                <a:solidFill>
+                  <a:srgbClr val="2E86AB"/>
+                </a:solidFill>
+                <a:latin typeface="Source Sans Pro"/>
+              </a:defRPr>
+            </a:pPr>
+            <a:r>
+              <a:t>CMYK(73, 21, 0, 32)</a:t>
+            </a:r>
+          </a:p>
+          <a:p>
+            <a:pPr>
+              <a:defRPr sz="1000" b="0">
+                <a:solidFill>
+                  <a:srgbClr val="2E86AB"/>
+                </a:solidFill>
+                <a:latin typeface="Source Sans Pro"/>
+              </a:defRPr>
+            </a:pPr>
+            <a:r>
+              <a:t>Use Light Text</a:t>
+            </a:r>
+          </a:p>
+        </p:txBody>
+      </p:sp>
+      <p:sp>
+        <p:nvSpPr>
+          <p:cNvPr id="6" name="Rectangle 5"/>
+          <p:cNvSpPr/>
+          <p:nvPr/>
+        </p:nvSpPr>
+        <p:spPr>
+          <a:xfrm>
+            <a:off x="3886200" y="1943100"/>
+            <a:ext cx="2057400" cy="1485900"/>
+          </a:xfrm>
+          <a:prstGeom prst="rect">
+            <a:avLst/>
+          </a:prstGeom>
+          <a:solidFill>
+            <a:srgbClr val="A23B72"/>
+          </a:solidFill>
+          <a:ln w="12700">
+            <a:solidFill>
+              <a:srgbClr val="FFFFFF"/>
+            </a:solidFill>
+          </a:ln>
+        </p:spPr>
+        <p:style>
+          <a:lnRef idx="1">
+            <a:schemeClr val="accent1"/>
+          </a:lnRef>
+          <a:fillRef idx="3">
+            <a:schemeClr val="accent1"/>
+          </a:fillRef>
+          <a:effectRef idx="2">
+            <a:schemeClr val="accent1"/>
+          </a:effectRef>
+          <a:fontRef idx="minor">
+            <a:schemeClr val="lt1"/>
+          </a:fontRef>
+        </p:style>
+        <p:txBody>
+          <a:bodyPr rtlCol="0" anchor="ctr"/>
+          <a:lstStyle/>
+          <a:p>
+            <a:pPr algn="ctr"/>
+          </a:p>
+        </p:txBody>
+      </p:sp>
+      <p:sp>
+        <p:nvSpPr>
+          <p:cNvPr id="7" name="TextBox 6"/>
+          <p:cNvSpPr txBox="1"/>
+          <p:nvPr/>
+        </p:nvSpPr>
+        <p:spPr>
+          <a:xfrm>
+            <a:off x="3886200" y="3429000"/>
+            <a:ext cx="2057400" cy="1485900"/>
+          </a:xfrm>
+          <a:prstGeom prst="rect">
+            <a:avLst/>
+          </a:prstGeom>
+          <a:noFill/>
+        </p:spPr>
+        <p:txBody>
+          <a:bodyPr wrap="square">
+            <a:spAutoFit/>
+          </a:bodyPr>
+          <a:lstStyle/>
+          <a:p>
+            <a:pPr>
+              <a:defRPr sz="1000" b="0">
+                <a:solidFill>
+                  <a:srgbClr val="2E86AB"/>
+                </a:solidFill>
+                <a:latin typeface="Source Sans Pro"/>
+              </a:defRPr>
+            </a:pPr>
+            <a:r>
+              <a:t>Secondary</a:t>
+            </a:r>
+          </a:p>
+          <a:p>
+            <a:pPr>
+              <a:defRPr sz="1000" b="0">
+                <a:solidFill>
+                  <a:srgbClr val="2E86AB"/>
+                </a:solidFill>
+                <a:latin typeface="Source Sans Pro"/>
+              </a:defRPr>
+            </a:pPr>
+            <a:r>
+              <a:t>#A23B72</a:t>
+            </a:r>
+          </a:p>
+          <a:p>
+            <a:pPr>
+              <a:defRPr sz="1000" b="0">
+                <a:solidFill>
+                  <a:srgbClr val="2E86AB"/>
+                </a:solidFill>
+                <a:latin typeface="Source Sans Pro"/>
+              </a:defRPr>
+            </a:pPr>
+            <a:r>
+              <a:t>RGB(162, 59, 114)</a:t>
+            </a:r>
+          </a:p>
+          <a:p>
+            <a:pPr>
+              <a:defRPr sz="1000" b="0">
+                <a:solidFill>
+                  <a:srgbClr val="2E86AB"/>
+                </a:solidFill>
+                <a:latin typeface="Source Sans Pro"/>
+              </a:defRPr>
+            </a:pPr>
+            <a:r>
+              <a:t>CMYK(0, 63, 29, 36)</a:t>
+            </a:r>
+          </a:p>
+          <a:p>
+            <a:pPr>
+              <a:defRPr sz="1000" b="0">
+                <a:solidFill>
+                  <a:srgbClr val="2E86AB"/>
+                </a:solidFill>
+                <a:latin typeface="Source Sans Pro"/>
+              </a:defRPr>
+            </a:pPr>
+            <a:r>
+              <a:t>Use Light Text</a:t>
+            </a:r>
+          </a:p>
+        </p:txBody>
+      </p:sp>
+      <p:sp>
+        <p:nvSpPr>
+          <p:cNvPr id="8" name="Rectangle 7"/>
+          <p:cNvSpPr/>
+          <p:nvPr/>
+        </p:nvSpPr>
+        <p:spPr>
+          <a:xfrm>
+            <a:off x="6629400" y="1943100"/>
+            <a:ext cx="2057400" cy="1485900"/>
+          </a:xfrm>
+          <a:prstGeom prst="rect">
+            <a:avLst/>
+          </a:prstGeom>
+          <a:solidFill>
+            <a:srgbClr val="F18F01"/>
+          </a:solidFill>
+          <a:ln w="12700">
+            <a:solidFill>
+              <a:srgbClr val="FFFFFF"/>
+            </a:solidFill>
+          </a:ln>
+        </p:spPr>
+        <p:style>
+          <a:lnRef idx="1">
+            <a:schemeClr val="accent1"/>
+          </a:lnRef>
+          <a:fillRef idx="3">
+            <a:schemeClr val="accent1"/>
+          </a:fillRef>
+          <a:effectRef idx="2">
+            <a:schemeClr val="accent1"/>
+          </a:effectRef>
+          <a:fontRef idx="minor">
+            <a:schemeClr val="lt1"/>
+          </a:fontRef>
+        </p:style>
+        <p:txBody>
+          <a:bodyPr rtlCol="0" anchor="ctr"/>
+          <a:lstStyle/>
+          <a:p>
+            <a:pPr algn="ctr"/>
+          </a:p>
+        </p:txBody>
+      </p:sp>
+      <p:sp>
+        <p:nvSpPr>
+          <p:cNvPr id="9" name="TextBox 8"/>
+          <p:cNvSpPr txBox="1"/>
+          <p:nvPr/>
+        </p:nvSpPr>
+        <p:spPr>
+          <a:xfrm>
+            <a:off x="6629400" y="3429000"/>
+            <a:ext cx="2057400" cy="1485900"/>
+          </a:xfrm>
+          <a:prstGeom prst="rect">
+            <a:avLst/>
+          </a:prstGeom>
+          <a:noFill/>
+        </p:spPr>
+        <p:txBody>
+          <a:bodyPr wrap="square">
+            <a:spAutoFit/>
+          </a:bodyPr>
+          <a:lstStyle/>
+          <a:p>
+            <a:pPr>
+              <a:defRPr sz="1000" b="0">
+                <a:solidFill>
+                  <a:srgbClr val="2E86AB"/>
+                </a:solidFill>
+                <a:latin typeface="Source Sans Pro"/>
+              </a:defRPr>
+            </a:pPr>
+            <a:r>
+              <a:t>Accent</a:t>
+            </a:r>
+          </a:p>
+          <a:p>
+            <a:pPr>
+              <a:defRPr sz="1000" b="0">
+                <a:solidFill>
+                  <a:srgbClr val="2E86AB"/>
+                </a:solidFill>
+                <a:latin typeface="Source Sans Pro"/>
+              </a:defRPr>
+            </a:pPr>
+            <a:r>
+              <a:t>#F18F01</a:t>
+            </a:r>
+          </a:p>
+          <a:p>
+            <a:pPr>
+              <a:defRPr sz="1000" b="0">
+                <a:solidFill>
+                  <a:srgbClr val="2E86AB"/>
+                </a:solidFill>
+                <a:latin typeface="Source Sans Pro"/>
+              </a:defRPr>
+            </a:pPr>
+            <a:r>
+              <a:t>RGB(241, 143, 1)</a:t>
+            </a:r>
+          </a:p>
+          <a:p>
+            <a:pPr>
+              <a:defRPr sz="1000" b="0">
+                <a:solidFill>
+                  <a:srgbClr val="2E86AB"/>
+                </a:solidFill>
+                <a:latin typeface="Source Sans Pro"/>
+              </a:defRPr>
+            </a:pPr>
+            <a:r>
+              <a:t>CMYK(0, 40, 99, 5)</a:t>
+            </a:r>
+          </a:p>
+          <a:p>
+            <a:pPr>
+              <a:defRPr sz="1000" b="0">
+                <a:solidFill>
+                  <a:srgbClr val="2E86AB"/>
+                </a:solidFill>
+                <a:latin typeface="Source Sans Pro"/>
+              </a:defRPr>
+            </a:pPr>
+            <a:r>
+              <a:t>Use Dark Text</a:t>
+            </a:r>
+          </a:p>
+        </p:txBody>
+      </p:sp>
+      <p:sp>
+        <p:nvSpPr>
+          <p:cNvPr id="10" name="TextBox 9"/>
+          <p:cNvSpPr txBox="1"/>
+          <p:nvPr/>
+        </p:nvSpPr>
+        <p:spPr>
+          <a:xfrm>
+            <a:off x="457200" y="5657850"/>
+            <a:ext cx="4114800" cy="742950"/>
+          </a:xfrm>
+          <a:prstGeom prst="rect">
+            <a:avLst/>
+          </a:prstGeom>
+          <a:noFill/>
+        </p:spPr>
+        <p:txBody>
+          <a:bodyPr wrap="none">
+            <a:spAutoFit/>
+          </a:bodyPr>
+          <a:lstStyle/>
+          <a:p>
+            <a:pPr algn="l">
+              <a:defRPr sz="1000" b="0">
+                <a:solidFill>
+                  <a:srgbClr val="2E86AB"/>
+                </a:solidFill>
+                <a:latin typeface="Source Sans Pro"/>
+              </a:defRPr>
+            </a:pPr>
+            <a:r>
+              <a:t>TechForward Live</a:t>
+            </a:r>
+          </a:p>
+        </p:txBody>
+      </p:sp>
+      <p:sp>
+        <p:nvSpPr>
+          <p:cNvPr id="11" name="TextBox 10"/>
+          <p:cNvSpPr txBox="1"/>
+          <p:nvPr/>
+        </p:nvSpPr>
+        <p:spPr>
+          <a:xfrm>
+            <a:off x="4572000" y="5657850"/>
+            <a:ext cx="4114800" cy="742950"/>
+          </a:xfrm>
+          <a:prstGeom prst="rect">
+            <a:avLst/>
+          </a:prstGeom>
+          <a:noFill/>
+        </p:spPr>
+        <p:txBody>
+          <a:bodyPr wrap="none">
+            <a:spAutoFit/>
+          </a:bodyPr>
+          <a:lstStyle/>
+          <a:p>
+            <a:pPr algn="r">
+              <a:defRPr sz="1000" b="0">
+                <a:solidFill>
+                  <a:srgbClr val="2E86AB"/>
+                </a:solidFill>
+                <a:latin typeface="Source Sans Pro"/>
+              </a:defRPr>
+            </a:pPr>
+            <a:r>
+              <a:t>11</a:t>
+            </a:r>
+          </a:p>
+        </p:txBody>
+      </p:sp>
+    </p:spTree>
+  </p:cSld>
+  <p:clrMapOvr>
+    <a:masterClrMapping/>
+  </p:clrMapOvr>
+</p:sld>
+</file>
+
+<file path=ppt/slides/slide12.xml><?xml version="1.0" encoding="utf-8"?>
+<p:sld xmlns:a="http://schemas.openxmlformats.org/drawingml/2006/main" xmlns:p="http://schemas.openxmlformats.org/presentationml/2006/main" xmlns:r="http://schemas.openxmlformats.org/officeDocument/2006/relationships">
+  <p:cSld>
+    <p:spTree>
+      <p:nvGrpSpPr>
+        <p:cNvPr id="1" name=""/>
+        <p:cNvGrpSpPr/>
+        <p:nvPr/>
+      </p:nvGrpSpPr>
+      <p:sp>
+        <p:nvSpPr>
+          <p:cNvPr id="2" name="Rectangle 1"/>
+          <p:cNvSpPr/>
+          <p:nvPr/>
+        </p:nvSpPr>
+        <p:spPr>
+          <a:xfrm>
+            <a:off x="0" y="0"/>
+            <a:ext cx="9144000" cy="6858000"/>
+          </a:xfrm>
+          <a:prstGeom prst="rect">
+            <a:avLst/>
+          </a:prstGeom>
+          <a:solidFill>
+            <a:srgbClr val="1A1A1A"/>
+          </a:solidFill>
+          <a:ln>
+            <a:noFill/>
+          </a:ln>
+        </p:spPr>
+        <p:style>
+          <a:lnRef idx="1">
+            <a:schemeClr val="accent1"/>
+          </a:lnRef>
+          <a:fillRef idx="3">
+            <a:schemeClr val="accent1"/>
+          </a:fillRef>
+          <a:effectRef idx="2">
+            <a:schemeClr val="accent1"/>
+          </a:effectRef>
+          <a:fontRef idx="minor">
+            <a:schemeClr val="lt1"/>
+          </a:fontRef>
+        </p:style>
+        <p:txBody>
+          <a:bodyPr rtlCol="0" anchor="ctr"/>
+          <a:lstStyle/>
+          <a:p>
+            <a:pPr algn="ctr"/>
+          </a:p>
+        </p:txBody>
+      </p:sp>
+      <p:grpSpPr/>
+      <p:sp>
+        <p:nvSpPr>
+          <p:cNvPr id="3" name="TextBox 2"/>
+          <p:cNvSpPr txBox="1"/>
+          <p:nvPr/>
+        </p:nvSpPr>
+        <p:spPr>
+          <a:xfrm>
+            <a:off x="1143000" y="457200"/>
+            <a:ext cx="6858000" cy="742950"/>
+          </a:xfrm>
+          <a:prstGeom prst="rect">
+            <a:avLst/>
+          </a:prstGeom>
+          <a:noFill/>
+        </p:spPr>
+        <p:txBody>
+          <a:bodyPr wrap="none">
+            <a:spAutoFit/>
+          </a:bodyPr>
+          <a:lstStyle/>
+          <a:p>
+            <a:pPr>
+              <a:defRPr sz="3200" b="1">
+                <a:solidFill>
+                  <a:srgbClr val="2E86AB"/>
+                </a:solidFill>
+                <a:latin typeface="Inter"/>
+              </a:defRPr>
+            </a:pPr>
+            <a:r>
+              <a:t>Typography</a:t>
+            </a:r>
+          </a:p>
+        </p:txBody>
+      </p:sp>
+      <p:sp>
+        <p:nvSpPr>
+          <p:cNvPr id="4" name="TextBox 3"/>
+          <p:cNvSpPr txBox="1"/>
+          <p:nvPr/>
+        </p:nvSpPr>
+        <p:spPr>
+          <a:xfrm>
+            <a:off x="1143000" y="1943100"/>
+            <a:ext cx="3429000" cy="742950"/>
+          </a:xfrm>
+          <a:prstGeom prst="rect">
+            <a:avLst/>
+          </a:prstGeom>
+          <a:noFill/>
+        </p:spPr>
+        <p:txBody>
+          <a:bodyPr wrap="none">
+            <a:spAutoFit/>
+          </a:bodyPr>
+          <a:lstStyle/>
+          <a:p>
+            <a:pPr>
+              <a:defRPr sz="2000" b="0">
+                <a:solidFill>
+                  <a:srgbClr val="2E86AB"/>
+                </a:solidFill>
+                <a:latin typeface="Source Sans Pro"/>
+              </a:defRPr>
+            </a:pPr>
+            <a:r>
+              <a:t>Primary Font: Inter</a:t>
+            </a:r>
+          </a:p>
+        </p:txBody>
+      </p:sp>
+      <p:sp>
+        <p:nvSpPr>
+          <p:cNvPr id="5" name="TextBox 4"/>
+          <p:cNvSpPr txBox="1"/>
+          <p:nvPr/>
+        </p:nvSpPr>
+        <p:spPr>
+          <a:xfrm>
+            <a:off x="1143000" y="2686050"/>
+            <a:ext cx="3429000" cy="742950"/>
+          </a:xfrm>
+          <a:prstGeom prst="rect">
+            <a:avLst/>
+          </a:prstGeom>
+          <a:noFill/>
+        </p:spPr>
+        <p:txBody>
+          <a:bodyPr wrap="none">
+            <a:spAutoFit/>
+          </a:bodyPr>
+          <a:lstStyle/>
+          <a:p>
+            <a:pPr>
+              <a:defRPr sz="3200" b="1">
+                <a:solidFill>
+                  <a:srgbClr val="2E86AB"/>
+                </a:solidFill>
+                <a:latin typeface="Inter"/>
+              </a:defRPr>
+            </a:pPr>
+            <a:r>
+              <a:t>H1 Heading</a:t>
+            </a:r>
+          </a:p>
+        </p:txBody>
+      </p:sp>
+      <p:sp>
+        <p:nvSpPr>
+          <p:cNvPr id="6" name="TextBox 5"/>
+          <p:cNvSpPr txBox="1"/>
+          <p:nvPr/>
+        </p:nvSpPr>
+        <p:spPr>
+          <a:xfrm>
+            <a:off x="1143000" y="3429000"/>
+            <a:ext cx="3429000" cy="742950"/>
+          </a:xfrm>
+          <a:prstGeom prst="rect">
+            <a:avLst/>
+          </a:prstGeom>
+          <a:noFill/>
+        </p:spPr>
+        <p:txBody>
+          <a:bodyPr wrap="none">
+            <a:spAutoFit/>
+          </a:bodyPr>
+          <a:lstStyle/>
+          <a:p>
+            <a:pPr>
+              <a:defRPr sz="2400" b="1">
+                <a:solidFill>
+                  <a:srgbClr val="2E86AB"/>
+                </a:solidFill>
+                <a:latin typeface="Inter"/>
+              </a:defRPr>
+            </a:pPr>
+            <a:r>
+              <a:t>H2 Heading</a:t>
+            </a:r>
+          </a:p>
+        </p:txBody>
+      </p:sp>
+      <p:sp>
+        <p:nvSpPr>
+          <p:cNvPr id="7" name="TextBox 6"/>
+          <p:cNvSpPr txBox="1"/>
+          <p:nvPr/>
+        </p:nvSpPr>
+        <p:spPr>
+          <a:xfrm>
+            <a:off x="1143000" y="4171950"/>
+            <a:ext cx="3429000" cy="742950"/>
+          </a:xfrm>
+          <a:prstGeom prst="rect">
+            <a:avLst/>
+          </a:prstGeom>
+          <a:noFill/>
+        </p:spPr>
+        <p:txBody>
+          <a:bodyPr wrap="none">
+            <a:spAutoFit/>
+          </a:bodyPr>
+          <a:lstStyle/>
+          <a:p>
+            <a:pPr>
+              <a:defRPr sz="2000" b="0">
+                <a:solidFill>
+                  <a:srgbClr val="2E86AB"/>
+                </a:solidFill>
+                <a:latin typeface="Inter"/>
+              </a:defRPr>
+            </a:pPr>
+            <a:r>
+              <a:t>H3 Heading</a:t>
+            </a:r>
+          </a:p>
+        </p:txBody>
+      </p:sp>
+      <p:sp>
+        <p:nvSpPr>
+          <p:cNvPr id="8" name="TextBox 7"/>
+          <p:cNvSpPr txBox="1"/>
+          <p:nvPr/>
+        </p:nvSpPr>
+        <p:spPr>
+          <a:xfrm>
+            <a:off x="5257800" y="1943100"/>
+            <a:ext cx="3429000" cy="742950"/>
+          </a:xfrm>
+          <a:prstGeom prst="rect">
+            <a:avLst/>
+          </a:prstGeom>
+          <a:noFill/>
+        </p:spPr>
+        <p:txBody>
+          <a:bodyPr wrap="none">
+            <a:spAutoFit/>
+          </a:bodyPr>
+          <a:lstStyle/>
+          <a:p>
+            <a:pPr>
+              <a:defRPr sz="2000" b="0">
+                <a:solidFill>
+                  <a:srgbClr val="2E86AB"/>
+                </a:solidFill>
+                <a:latin typeface="Source Sans Pro"/>
+              </a:defRPr>
+            </a:pPr>
+            <a:r>
+              <a:t>Secondary Font: Source Sans Pro</a:t>
+            </a:r>
+          </a:p>
+        </p:txBody>
+      </p:sp>
+      <p:sp>
+        <p:nvSpPr>
+          <p:cNvPr id="9" name="TextBox 8"/>
+          <p:cNvSpPr txBox="1"/>
+          <p:nvPr/>
+        </p:nvSpPr>
+        <p:spPr>
+          <a:xfrm>
+            <a:off x="5257800" y="2686050"/>
+            <a:ext cx="3429000" cy="742950"/>
+          </a:xfrm>
+          <a:prstGeom prst="rect">
+            <a:avLst/>
+          </a:prstGeom>
+          <a:noFill/>
+        </p:spPr>
+        <p:txBody>
+          <a:bodyPr wrap="none">
+            <a:spAutoFit/>
+          </a:bodyPr>
+          <a:lstStyle/>
+          <a:p>
+            <a:pPr>
+              <a:defRPr sz="1600" b="0">
+                <a:solidFill>
+                  <a:srgbClr val="2E86AB"/>
+                </a:solidFill>
+                <a:latin typeface="Source Sans Pro"/>
+              </a:defRPr>
+            </a:pPr>
+            <a:r>
+              <a:t>Body Text</a:t>
+            </a:r>
+          </a:p>
+        </p:txBody>
+      </p:sp>
+      <p:sp>
+        <p:nvSpPr>
+          <p:cNvPr id="10" name="TextBox 9"/>
+          <p:cNvSpPr txBox="1"/>
+          <p:nvPr/>
+        </p:nvSpPr>
+        <p:spPr>
+          <a:xfrm>
+            <a:off x="5257800" y="3429000"/>
+            <a:ext cx="3429000" cy="742950"/>
+          </a:xfrm>
+          <a:prstGeom prst="rect">
+            <a:avLst/>
+          </a:prstGeom>
+          <a:noFill/>
+        </p:spPr>
+        <p:txBody>
+          <a:bodyPr wrap="none">
+            <a:spAutoFit/>
+          </a:bodyPr>
+          <a:lstStyle/>
+          <a:p>
+            <a:pPr>
+              <a:defRPr sz="1600" b="1">
+                <a:solidFill>
+                  <a:srgbClr val="2E86AB"/>
+                </a:solidFill>
+                <a:latin typeface="Source Sans Pro"/>
+              </a:defRPr>
+            </a:pPr>
+            <a:r>
+              <a:t>Body Bold</a:t>
+            </a:r>
+          </a:p>
+        </p:txBody>
+      </p:sp>
+      <p:sp>
+        <p:nvSpPr>
+          <p:cNvPr id="11" name="TextBox 10"/>
+          <p:cNvSpPr txBox="1"/>
+          <p:nvPr/>
+        </p:nvSpPr>
+        <p:spPr>
+          <a:xfrm>
+            <a:off x="5257800" y="4171950"/>
+            <a:ext cx="3429000" cy="742950"/>
+          </a:xfrm>
+          <a:prstGeom prst="rect">
+            <a:avLst/>
+          </a:prstGeom>
+          <a:noFill/>
+        </p:spPr>
+        <p:txBody>
+          <a:bodyPr wrap="none">
+            <a:spAutoFit/>
+          </a:bodyPr>
+          <a:lstStyle/>
+          <a:p>
+            <a:pPr>
+              <a:defRPr sz="1200" b="0">
+                <a:solidFill>
+                  <a:srgbClr val="2E86AB"/>
+                </a:solidFill>
+                <a:latin typeface="Source Sans Pro"/>
+              </a:defRPr>
+            </a:pPr>
+            <a:r>
+              <a:t>Caption Text</a:t>
+            </a:r>
+          </a:p>
+        </p:txBody>
+      </p:sp>
+      <p:sp>
+        <p:nvSpPr>
+          <p:cNvPr id="12" name="TextBox 11"/>
+          <p:cNvSpPr txBox="1"/>
+          <p:nvPr/>
+        </p:nvSpPr>
+        <p:spPr>
+          <a:xfrm>
+            <a:off x="457200" y="5657850"/>
+            <a:ext cx="4114800" cy="742950"/>
+          </a:xfrm>
+          <a:prstGeom prst="rect">
+            <a:avLst/>
+          </a:prstGeom>
+          <a:noFill/>
+        </p:spPr>
+        <p:txBody>
+          <a:bodyPr wrap="none">
+            <a:spAutoFit/>
+          </a:bodyPr>
+          <a:lstStyle/>
+          <a:p>
+            <a:pPr algn="l">
+              <a:defRPr sz="1000" b="0">
+                <a:solidFill>
+                  <a:srgbClr val="2E86AB"/>
+                </a:solidFill>
+                <a:latin typeface="Source Sans Pro"/>
+              </a:defRPr>
+            </a:pPr>
+            <a:r>
+              <a:t>TechForward Live</a:t>
+            </a:r>
+          </a:p>
+        </p:txBody>
+      </p:sp>
+      <p:sp>
+        <p:nvSpPr>
+          <p:cNvPr id="13" name="TextBox 12"/>
+          <p:cNvSpPr txBox="1"/>
+          <p:nvPr/>
+        </p:nvSpPr>
+        <p:spPr>
+          <a:xfrm>
+            <a:off x="4572000" y="5657850"/>
+            <a:ext cx="4114800" cy="742950"/>
+          </a:xfrm>
+          <a:prstGeom prst="rect">
+            <a:avLst/>
+          </a:prstGeom>
+          <a:noFill/>
+        </p:spPr>
+        <p:txBody>
+          <a:bodyPr wrap="none">
+            <a:spAutoFit/>
+          </a:bodyPr>
+          <a:lstStyle/>
+          <a:p>
+            <a:pPr algn="r">
+              <a:defRPr sz="1000" b="0">
+                <a:solidFill>
+                  <a:srgbClr val="2E86AB"/>
+                </a:solidFill>
+                <a:latin typeface="Source Sans Pro"/>
+              </a:defRPr>
+            </a:pPr>
+            <a:r>
+              <a:t>12</a:t>
+            </a:r>
+          </a:p>
+        </p:txBody>
+      </p:sp>
+    </p:spTree>
+  </p:cSld>
+  <p:clrMapOvr>
+    <a:masterClrMapping/>
+  </p:clrMapOvr>
+</p:sld>
+</file>
+
+<file path=ppt/slides/slide13.xml><?xml version="1.0" encoding="utf-8"?>
+<p:sld xmlns:a="http://schemas.openxmlformats.org/drawingml/2006/main" xmlns:p="http://schemas.openxmlformats.org/presentationml/2006/main" xmlns:r="http://schemas.openxmlformats.org/officeDocument/2006/relationships">
+  <p:cSld>
+    <p:spTree>
+      <p:nvGrpSpPr>
+        <p:cNvPr id="1" name=""/>
+        <p:cNvGrpSpPr/>
+        <p:nvPr/>
+      </p:nvGrpSpPr>
+      <p:sp>
+        <p:nvSpPr>
+          <p:cNvPr id="2" name="Rectangle 1"/>
+          <p:cNvSpPr/>
+          <p:nvPr/>
+        </p:nvSpPr>
+        <p:spPr>
+          <a:xfrm>
+            <a:off x="0" y="0"/>
+            <a:ext cx="9144000" cy="6858000"/>
+          </a:xfrm>
+          <a:prstGeom prst="rect">
+            <a:avLst/>
+          </a:prstGeom>
+          <a:solidFill>
+            <a:srgbClr val="1A1A1A"/>
+          </a:solidFill>
+          <a:ln>
+            <a:noFill/>
+          </a:ln>
+        </p:spPr>
+        <p:style>
+          <a:lnRef idx="1">
+            <a:schemeClr val="accent1"/>
+          </a:lnRef>
+          <a:fillRef idx="3">
+            <a:schemeClr val="accent1"/>
+          </a:fillRef>
+          <a:effectRef idx="2">
+            <a:schemeClr val="accent1"/>
+          </a:effectRef>
+          <a:fontRef idx="minor">
+            <a:schemeClr val="lt1"/>
+          </a:fontRef>
+        </p:style>
+        <p:txBody>
+          <a:bodyPr rtlCol="0" anchor="ctr"/>
+          <a:lstStyle/>
+          <a:p>
+            <a:pPr algn="ctr"/>
+          </a:p>
+        </p:txBody>
+      </p:sp>
+      <p:grpSpPr/>
+      <p:sp>
+        <p:nvSpPr>
+          <p:cNvPr id="3" name="TextBox 2"/>
+          <p:cNvSpPr txBox="1"/>
+          <p:nvPr/>
+        </p:nvSpPr>
+        <p:spPr>
+          <a:xfrm>
+            <a:off x="1143000" y="457200"/>
+            <a:ext cx="6858000" cy="742950"/>
+          </a:xfrm>
+          <a:prstGeom prst="rect">
+            <a:avLst/>
+          </a:prstGeom>
+          <a:noFill/>
+        </p:spPr>
+        <p:txBody>
+          <a:bodyPr wrap="none">
+            <a:spAutoFit/>
+          </a:bodyPr>
+          <a:lstStyle/>
+          <a:p>
+            <a:pPr>
+              <a:defRPr sz="3200" b="1">
+                <a:solidFill>
+                  <a:srgbClr val="2E86AB"/>
+                </a:solidFill>
+                <a:latin typeface="Inter"/>
+              </a:defRPr>
+            </a:pPr>
+            <a:r>
               <a:t>Visual &amp; Photography Guidelines</a:t>
             </a:r>
           </a:p>
@@ -4241,7 +4971,7 @@
               </a:defRPr>
             </a:pPr>
             <a:r>
-              <a:t>11</a:t>
+              <a:t>13</a:t>
             </a:r>
           </a:p>
         </p:txBody>
@@ -5016,7 +5746,7 @@
               </a:defRPr>
             </a:pPr>
             <a:r>
-              <a:t>Logo Mark</a:t>
+              <a:t>Variation 1</a:t>
             </a:r>
           </a:p>
         </p:txBody>
@@ -5052,7 +5782,7 @@
               </a:defRPr>
             </a:pPr>
             <a:r>
-              <a:t>Clear Space</a:t>
+              <a:t>Variation 2</a:t>
             </a:r>
           </a:p>
         </p:txBody>
@@ -5088,7 +5818,7 @@
               </a:defRPr>
             </a:pPr>
             <a:r>
-              <a:t>Usage Guidelines</a:t>
+              <a:t>Variation 3</a:t>
             </a:r>
           </a:p>
         </p:txBody>
@@ -6493,138 +7223,24 @@
 <file path=ppt/slides/slide8.xml><?xml version="1.0" encoding="utf-8"?>
 <p:sld xmlns:a="http://schemas.openxmlformats.org/drawingml/2006/main" xmlns:p="http://schemas.openxmlformats.org/presentationml/2006/main" xmlns:r="http://schemas.openxmlformats.org/officeDocument/2006/relationships">
   <p:cSld>
+    <p:bg>
+      <p:bgPr>
+        <a:solidFill>
+          <a:srgbClr val="000000"/>
+        </a:solidFill>
+        <a:effectLst/>
+      </p:bgPr>
+    </p:bg>
     <p:spTree>
       <p:nvGrpSpPr>
         <p:cNvPr id="1" name=""/>
         <p:cNvGrpSpPr/>
         <p:nvPr/>
       </p:nvGrpSpPr>
-      <p:sp>
-        <p:nvSpPr>
-          <p:cNvPr id="2" name="Rectangle 1"/>
-          <p:cNvSpPr/>
-          <p:nvPr/>
-        </p:nvSpPr>
-        <p:spPr>
-          <a:xfrm>
-            <a:off x="0" y="0"/>
-            <a:ext cx="9144000" cy="6858000"/>
-          </a:xfrm>
-          <a:prstGeom prst="rect">
-            <a:avLst/>
-          </a:prstGeom>
-          <a:solidFill>
-            <a:srgbClr val="1A1A1A"/>
-          </a:solidFill>
-          <a:ln>
-            <a:noFill/>
-          </a:ln>
-        </p:spPr>
-        <p:style>
-          <a:lnRef idx="1">
-            <a:schemeClr val="accent1"/>
-          </a:lnRef>
-          <a:fillRef idx="3">
-            <a:schemeClr val="accent1"/>
-          </a:fillRef>
-          <a:effectRef idx="2">
-            <a:schemeClr val="accent1"/>
-          </a:effectRef>
-          <a:fontRef idx="minor">
-            <a:schemeClr val="lt1"/>
-          </a:fontRef>
-        </p:style>
-        <p:txBody>
-          <a:bodyPr rtlCol="0" anchor="ctr"/>
-          <a:lstStyle/>
-          <a:p>
-            <a:pPr algn="ctr"/>
-          </a:p>
-        </p:txBody>
-      </p:sp>
       <p:grpSpPr/>
-      <p:sp>
-        <p:nvSpPr>
-          <p:cNvPr id="3" name="TextBox 2"/>
-          <p:cNvSpPr txBox="1"/>
-          <p:nvPr/>
-        </p:nvSpPr>
-        <p:spPr>
-          <a:xfrm>
-            <a:off x="1143000" y="457200"/>
-            <a:ext cx="6858000" cy="742950"/>
-          </a:xfrm>
-          <a:prstGeom prst="rect">
-            <a:avLst/>
-          </a:prstGeom>
-          <a:noFill/>
-        </p:spPr>
-        <p:txBody>
-          <a:bodyPr wrap="none">
-            <a:spAutoFit/>
-          </a:bodyPr>
-          <a:lstStyle/>
-          <a:p>
-            <a:pPr>
-              <a:defRPr sz="3200" b="1">
-                <a:solidFill>
-                  <a:srgbClr val="2E86AB"/>
-                </a:solidFill>
-                <a:latin typeface="Inter"/>
-              </a:defRPr>
-            </a:pPr>
-            <a:r>
-              <a:t>Logo Variations (3 designs)</a:t>
-            </a:r>
-          </a:p>
-        </p:txBody>
-      </p:sp>
-      <p:sp>
-        <p:nvSpPr>
-          <p:cNvPr id="4" name="Rectangle 3"/>
-          <p:cNvSpPr/>
-          <p:nvPr/>
-        </p:nvSpPr>
-        <p:spPr>
-          <a:xfrm>
-            <a:off x="1051560" y="1851660"/>
-            <a:ext cx="1554480" cy="1668780"/>
-          </a:xfrm>
-          <a:prstGeom prst="rect">
-            <a:avLst/>
-          </a:prstGeom>
-          <a:solidFill>
-            <a:srgbClr val="FFFFFF"/>
-          </a:solidFill>
-          <a:ln>
-            <a:noFill/>
-          </a:ln>
-        </p:spPr>
-        <p:style>
-          <a:lnRef idx="1">
-            <a:schemeClr val="accent1"/>
-          </a:lnRef>
-          <a:fillRef idx="3">
-            <a:schemeClr val="accent1"/>
-          </a:fillRef>
-          <a:effectRef idx="2">
-            <a:schemeClr val="accent1"/>
-          </a:effectRef>
-          <a:fontRef idx="minor">
-            <a:schemeClr val="lt1"/>
-          </a:fontRef>
-        </p:style>
-        <p:txBody>
-          <a:bodyPr rtlCol="0" anchor="ctr"/>
-          <a:lstStyle/>
-          <a:p>
-            <a:pPr algn="ctr"/>
-          </a:p>
-        </p:txBody>
-      </p:sp>
       <p:pic>
         <p:nvPicPr>
-          <p:cNvPr id="5" name="Picture 4" descr="zeta_logo_1_20250828_235333_3e1fde11.png"/>
+          <p:cNvPr id="2" name="Picture 1" descr="zeta_logo_1_20250828_235333_3e1fde11.png"/>
           <p:cNvPicPr>
             <a:picLocks noChangeAspect="1"/>
           </p:cNvPicPr>
@@ -6639,7 +7255,7 @@
         <p:spPr>
           <a:xfrm>
             <a:off x="1143000" y="1943100"/>
-            <a:ext cx="1371600" cy="1485900"/>
+            <a:ext cx="3429000" cy="2971800"/>
           </a:xfrm>
           <a:prstGeom prst="rect">
             <a:avLst/>
@@ -6648,14 +7264,88 @@
       </p:pic>
       <p:sp>
         <p:nvSpPr>
-          <p:cNvPr id="6" name="TextBox 5"/>
+          <p:cNvPr id="3" name="TextBox 2"/>
           <p:cNvSpPr txBox="1"/>
           <p:nvPr/>
         </p:nvSpPr>
         <p:spPr>
           <a:xfrm>
-            <a:off x="1143000" y="3429000"/>
-            <a:ext cx="1371600" cy="742950"/>
+            <a:off x="5257800" y="1200150"/>
+            <a:ext cx="3429000" cy="4457700"/>
+          </a:xfrm>
+          <a:prstGeom prst="rect">
+            <a:avLst/>
+          </a:prstGeom>
+          <a:noFill/>
+        </p:spPr>
+        <p:txBody>
+          <a:bodyPr wrap="square" lIns="0" rIns="0" tIns="0" bIns="0">
+            <a:spAutoFit/>
+          </a:bodyPr>
+          <a:lstStyle/>
+          <a:p>
+            <a:pPr algn="l">
+              <a:spcAft>
+                <a:spcPts val="800"/>
+              </a:spcAft>
+              <a:defRPr sz="1600" b="0">
+                <a:solidFill>
+                  <a:srgbClr val="FFFFFF"/>
+                </a:solidFill>
+                <a:latin typeface="Source Sans Pro"/>
+              </a:defRPr>
+            </a:pPr>
+            <a:r>
+              <a:t>Primary logo for main brand applications. Use in headers, business cards, and large formats.</a:t>
+            </a:r>
+          </a:p>
+        </p:txBody>
+      </p:sp>
+      <p:cxnSp>
+        <p:nvCxnSpPr>
+          <p:cNvPr id="4" name="Connector 3"/>
+          <p:cNvCxnSpPr/>
+          <p:nvPr/>
+        </p:nvCxnSpPr>
+        <p:spPr>
+          <a:xfrm>
+            <a:off x="457200" y="5286375.0"/>
+            <a:ext cx="8229600" cy="0.0"/>
+          </a:xfrm>
+          <a:prstGeom prst="line">
+            <a:avLst/>
+          </a:prstGeom>
+          <a:ln w="25400">
+            <a:solidFill>
+              <a:srgbClr val="2E86AB"/>
+            </a:solidFill>
+          </a:ln>
+        </p:spPr>
+        <p:style>
+          <a:lnRef idx="2">
+            <a:schemeClr val="accent1"/>
+          </a:lnRef>
+          <a:fillRef idx="0">
+            <a:schemeClr val="accent1"/>
+          </a:fillRef>
+          <a:effectRef idx="1">
+            <a:schemeClr val="accent1"/>
+          </a:effectRef>
+          <a:fontRef idx="minor">
+            <a:schemeClr val="tx1"/>
+          </a:fontRef>
+        </p:style>
+      </p:cxnSp>
+      <p:sp>
+        <p:nvSpPr>
+          <p:cNvPr id="5" name="TextBox 4"/>
+          <p:cNvSpPr txBox="1"/>
+          <p:nvPr/>
+        </p:nvSpPr>
+        <p:spPr>
+          <a:xfrm>
+            <a:off x="800100" y="5560695"/>
+            <a:ext cx="5486400" cy="731520"/>
           </a:xfrm>
           <a:prstGeom prst="rect">
             <a:avLst/>
@@ -6668,330 +7358,16 @@
           </a:bodyPr>
           <a:lstStyle/>
           <a:p>
-            <a:pPr algn="ctr">
-              <a:defRPr sz="1200" b="0">
+            <a:pPr algn="l">
+              <a:defRPr sz="2800" b="1">
                 <a:solidFill>
                   <a:srgbClr val="2E86AB"/>
                 </a:solidFill>
-                <a:latin typeface="Source Sans Pro"/>
-              </a:defRPr>
-            </a:pPr>
-            <a:r>
-              <a:t>Version 1</a:t>
-            </a:r>
-          </a:p>
-        </p:txBody>
-      </p:sp>
-      <p:sp>
-        <p:nvSpPr>
-          <p:cNvPr id="7" name="Rectangle 6"/>
-          <p:cNvSpPr/>
-          <p:nvPr/>
-        </p:nvSpPr>
-        <p:spPr>
-          <a:xfrm>
-            <a:off x="3108960" y="1851660"/>
-            <a:ext cx="1554480" cy="1668780"/>
-          </a:xfrm>
-          <a:prstGeom prst="rect">
-            <a:avLst/>
-          </a:prstGeom>
-          <a:solidFill>
-            <a:srgbClr val="FFFFFF"/>
-          </a:solidFill>
-          <a:ln>
-            <a:noFill/>
-          </a:ln>
-        </p:spPr>
-        <p:style>
-          <a:lnRef idx="1">
-            <a:schemeClr val="accent1"/>
-          </a:lnRef>
-          <a:fillRef idx="3">
-            <a:schemeClr val="accent1"/>
-          </a:fillRef>
-          <a:effectRef idx="2">
-            <a:schemeClr val="accent1"/>
-          </a:effectRef>
-          <a:fontRef idx="minor">
-            <a:schemeClr val="lt1"/>
-          </a:fontRef>
-        </p:style>
-        <p:txBody>
-          <a:bodyPr rtlCol="0" anchor="ctr"/>
-          <a:lstStyle/>
-          <a:p>
-            <a:pPr algn="ctr"/>
-          </a:p>
-        </p:txBody>
-      </p:sp>
-      <p:pic>
-        <p:nvPicPr>
-          <p:cNvPr id="8" name="Picture 7" descr="zeta_logo_2_20250828_235352_a3259202.png"/>
-          <p:cNvPicPr>
-            <a:picLocks noChangeAspect="1"/>
-          </p:cNvPicPr>
-          <p:nvPr/>
-        </p:nvPicPr>
-        <p:blipFill>
-          <a:blip r:embed="rId3"/>
-          <a:stretch>
-            <a:fillRect/>
-          </a:stretch>
-        </p:blipFill>
-        <p:spPr>
-          <a:xfrm>
-            <a:off x="3200400" y="1943100"/>
-            <a:ext cx="1371600" cy="1485900"/>
-          </a:xfrm>
-          <a:prstGeom prst="rect">
-            <a:avLst/>
-          </a:prstGeom>
-        </p:spPr>
-      </p:pic>
-      <p:sp>
-        <p:nvSpPr>
-          <p:cNvPr id="9" name="TextBox 8"/>
-          <p:cNvSpPr txBox="1"/>
-          <p:nvPr/>
-        </p:nvSpPr>
-        <p:spPr>
-          <a:xfrm>
-            <a:off x="3200400" y="3429000"/>
-            <a:ext cx="1371600" cy="742950"/>
-          </a:xfrm>
-          <a:prstGeom prst="rect">
-            <a:avLst/>
-          </a:prstGeom>
-          <a:noFill/>
-        </p:spPr>
-        <p:txBody>
-          <a:bodyPr wrap="none">
-            <a:spAutoFit/>
-          </a:bodyPr>
-          <a:lstStyle/>
-          <a:p>
-            <a:pPr algn="ctr">
-              <a:defRPr sz="1200" b="0">
-                <a:solidFill>
-                  <a:srgbClr val="2E86AB"/>
-                </a:solidFill>
-                <a:latin typeface="Source Sans Pro"/>
-              </a:defRPr>
-            </a:pPr>
-            <a:r>
-              <a:t>Version 2</a:t>
-            </a:r>
-          </a:p>
-        </p:txBody>
-      </p:sp>
-      <p:sp>
-        <p:nvSpPr>
-          <p:cNvPr id="10" name="Rectangle 9"/>
-          <p:cNvSpPr/>
-          <p:nvPr/>
-        </p:nvSpPr>
-        <p:spPr>
-          <a:xfrm>
-            <a:off x="5166360" y="1851660"/>
-            <a:ext cx="1554480" cy="1668780"/>
-          </a:xfrm>
-          <a:prstGeom prst="rect">
-            <a:avLst/>
-          </a:prstGeom>
-          <a:solidFill>
-            <a:srgbClr val="FFFFFF"/>
-          </a:solidFill>
-          <a:ln>
-            <a:noFill/>
-          </a:ln>
-        </p:spPr>
-        <p:style>
-          <a:lnRef idx="1">
-            <a:schemeClr val="accent1"/>
-          </a:lnRef>
-          <a:fillRef idx="3">
-            <a:schemeClr val="accent1"/>
-          </a:fillRef>
-          <a:effectRef idx="2">
-            <a:schemeClr val="accent1"/>
-          </a:effectRef>
-          <a:fontRef idx="minor">
-            <a:schemeClr val="lt1"/>
-          </a:fontRef>
-        </p:style>
-        <p:txBody>
-          <a:bodyPr rtlCol="0" anchor="ctr"/>
-          <a:lstStyle/>
-          <a:p>
-            <a:pPr algn="ctr"/>
-          </a:p>
-        </p:txBody>
-      </p:sp>
-      <p:pic>
-        <p:nvPicPr>
-          <p:cNvPr id="11" name="Picture 10" descr="zeta_logo_3_20250828_235415_054bae29.png"/>
-          <p:cNvPicPr>
-            <a:picLocks noChangeAspect="1"/>
-          </p:cNvPicPr>
-          <p:nvPr/>
-        </p:nvPicPr>
-        <p:blipFill>
-          <a:blip r:embed="rId4"/>
-          <a:stretch>
-            <a:fillRect/>
-          </a:stretch>
-        </p:blipFill>
-        <p:spPr>
-          <a:xfrm>
-            <a:off x="5257800" y="1943100"/>
-            <a:ext cx="1371600" cy="1485900"/>
-          </a:xfrm>
-          <a:prstGeom prst="rect">
-            <a:avLst/>
-          </a:prstGeom>
-        </p:spPr>
-      </p:pic>
-      <p:sp>
-        <p:nvSpPr>
-          <p:cNvPr id="12" name="TextBox 11"/>
-          <p:cNvSpPr txBox="1"/>
-          <p:nvPr/>
-        </p:nvSpPr>
-        <p:spPr>
-          <a:xfrm>
-            <a:off x="5257800" y="3429000"/>
-            <a:ext cx="1371600" cy="742950"/>
-          </a:xfrm>
-          <a:prstGeom prst="rect">
-            <a:avLst/>
-          </a:prstGeom>
-          <a:noFill/>
-        </p:spPr>
-        <p:txBody>
-          <a:bodyPr wrap="none">
-            <a:spAutoFit/>
-          </a:bodyPr>
-          <a:lstStyle/>
-          <a:p>
-            <a:pPr algn="ctr">
-              <a:defRPr sz="1200" b="0">
-                <a:solidFill>
-                  <a:srgbClr val="2E86AB"/>
-                </a:solidFill>
-                <a:latin typeface="Source Sans Pro"/>
-              </a:defRPr>
-            </a:pPr>
-            <a:r>
-              <a:t>Version 3</a:t>
-            </a:r>
-          </a:p>
-        </p:txBody>
-      </p:sp>
-      <p:sp>
-        <p:nvSpPr>
-          <p:cNvPr id="13" name="TextBox 12"/>
-          <p:cNvSpPr txBox="1"/>
-          <p:nvPr/>
-        </p:nvSpPr>
-        <p:spPr>
-          <a:xfrm>
-            <a:off x="1143000" y="4914900"/>
-            <a:ext cx="7543800" cy="742950"/>
-          </a:xfrm>
-          <a:prstGeom prst="rect">
-            <a:avLst/>
-          </a:prstGeom>
-          <a:noFill/>
-        </p:spPr>
-        <p:txBody>
-          <a:bodyPr wrap="none">
-            <a:spAutoFit/>
-          </a:bodyPr>
-          <a:lstStyle/>
-          <a:p>
-            <a:pPr algn="ctr">
-              <a:defRPr sz="1200" b="0">
-                <a:solidFill>
-                  <a:srgbClr val="2E86AB"/>
-                </a:solidFill>
-                <a:latin typeface="Source Sans Pro"/>
-              </a:defRPr>
-            </a:pPr>
-            <a:r>
-              <a:t>Minimum size: 0.5 inches • Clearspace: 0.25 inches on all sides</a:t>
-            </a:r>
-          </a:p>
-        </p:txBody>
-      </p:sp>
-      <p:sp>
-        <p:nvSpPr>
-          <p:cNvPr id="14" name="TextBox 13"/>
-          <p:cNvSpPr txBox="1"/>
-          <p:nvPr/>
-        </p:nvSpPr>
-        <p:spPr>
-          <a:xfrm>
-            <a:off x="457200" y="5657850"/>
-            <a:ext cx="4114800" cy="742950"/>
-          </a:xfrm>
-          <a:prstGeom prst="rect">
-            <a:avLst/>
-          </a:prstGeom>
-          <a:noFill/>
-        </p:spPr>
-        <p:txBody>
-          <a:bodyPr wrap="none">
-            <a:spAutoFit/>
-          </a:bodyPr>
-          <a:lstStyle/>
-          <a:p>
-            <a:pPr algn="l">
-              <a:defRPr sz="1000" b="0">
-                <a:solidFill>
-                  <a:srgbClr val="2E86AB"/>
-                </a:solidFill>
-                <a:latin typeface="Source Sans Pro"/>
-              </a:defRPr>
-            </a:pPr>
-            <a:r>
-              <a:t>TechForward Live</a:t>
-            </a:r>
-          </a:p>
-        </p:txBody>
-      </p:sp>
-      <p:sp>
-        <p:nvSpPr>
-          <p:cNvPr id="15" name="TextBox 14"/>
-          <p:cNvSpPr txBox="1"/>
-          <p:nvPr/>
-        </p:nvSpPr>
-        <p:spPr>
-          <a:xfrm>
-            <a:off x="4572000" y="5657850"/>
-            <a:ext cx="4114800" cy="742950"/>
-          </a:xfrm>
-          <a:prstGeom prst="rect">
-            <a:avLst/>
-          </a:prstGeom>
-          <a:noFill/>
-        </p:spPr>
-        <p:txBody>
-          <a:bodyPr wrap="none">
-            <a:spAutoFit/>
-          </a:bodyPr>
-          <a:lstStyle/>
-          <a:p>
-            <a:pPr algn="r">
-              <a:defRPr sz="1000" b="0">
-                <a:solidFill>
-                  <a:srgbClr val="2E86AB"/>
-                </a:solidFill>
-                <a:latin typeface="Source Sans Pro"/>
-              </a:defRPr>
-            </a:pPr>
-            <a:r>
-              <a:t>8</a:t>
+                <a:latin typeface="Inter"/>
+              </a:defRPr>
+            </a:pPr>
+            <a:r>
+              <a:t>Logo Variation 1</a:t>
             </a:r>
           </a:p>
         </p:txBody>
@@ -7007,66 +7383,129 @@
 <file path=ppt/slides/slide9.xml><?xml version="1.0" encoding="utf-8"?>
 <p:sld xmlns:a="http://schemas.openxmlformats.org/drawingml/2006/main" xmlns:p="http://schemas.openxmlformats.org/presentationml/2006/main" xmlns:r="http://schemas.openxmlformats.org/officeDocument/2006/relationships">
   <p:cSld>
+    <p:bg>
+      <p:bgPr>
+        <a:solidFill>
+          <a:srgbClr val="000000"/>
+        </a:solidFill>
+        <a:effectLst/>
+      </p:bgPr>
+    </p:bg>
     <p:spTree>
       <p:nvGrpSpPr>
         <p:cNvPr id="1" name=""/>
         <p:cNvGrpSpPr/>
         <p:nvPr/>
       </p:nvGrpSpPr>
-      <p:sp>
-        <p:nvSpPr>
-          <p:cNvPr id="2" name="Rectangle 1"/>
-          <p:cNvSpPr/>
-          <p:nvPr/>
-        </p:nvSpPr>
-        <p:spPr>
-          <a:xfrm>
-            <a:off x="0" y="0"/>
-            <a:ext cx="9144000" cy="6858000"/>
-          </a:xfrm>
-          <a:prstGeom prst="rect">
-            <a:avLst/>
-          </a:prstGeom>
-          <a:solidFill>
-            <a:srgbClr val="1A1A1A"/>
-          </a:solidFill>
-          <a:ln>
-            <a:noFill/>
+      <p:grpSpPr/>
+      <p:pic>
+        <p:nvPicPr>
+          <p:cNvPr id="2" name="Picture 1" descr="zeta_logo_2_20250828_235352_a3259202.png"/>
+          <p:cNvPicPr>
+            <a:picLocks noChangeAspect="1"/>
+          </p:cNvPicPr>
+          <p:nvPr/>
+        </p:nvPicPr>
+        <p:blipFill>
+          <a:blip r:embed="rId2"/>
+          <a:stretch>
+            <a:fillRect/>
+          </a:stretch>
+        </p:blipFill>
+        <p:spPr>
+          <a:xfrm>
+            <a:off x="1143000" y="1943100"/>
+            <a:ext cx="3429000" cy="2971800"/>
+          </a:xfrm>
+          <a:prstGeom prst="rect">
+            <a:avLst/>
+          </a:prstGeom>
+        </p:spPr>
+      </p:pic>
+      <p:sp>
+        <p:nvSpPr>
+          <p:cNvPr id="3" name="TextBox 2"/>
+          <p:cNvSpPr txBox="1"/>
+          <p:nvPr/>
+        </p:nvSpPr>
+        <p:spPr>
+          <a:xfrm>
+            <a:off x="5257800" y="1200150"/>
+            <a:ext cx="3429000" cy="4457700"/>
+          </a:xfrm>
+          <a:prstGeom prst="rect">
+            <a:avLst/>
+          </a:prstGeom>
+          <a:noFill/>
+        </p:spPr>
+        <p:txBody>
+          <a:bodyPr wrap="square" lIns="0" rIns="0" tIns="0" bIns="0">
+            <a:spAutoFit/>
+          </a:bodyPr>
+          <a:lstStyle/>
+          <a:p>
+            <a:pPr algn="l">
+              <a:spcAft>
+                <a:spcPts val="800"/>
+              </a:spcAft>
+              <a:defRPr sz="1600" b="0">
+                <a:solidFill>
+                  <a:srgbClr val="FFFFFF"/>
+                </a:solidFill>
+                <a:latin typeface="Source Sans Pro"/>
+              </a:defRPr>
+            </a:pPr>
+            <a:r>
+              <a:t>Secondary logo for compact spaces. Ideal for social media, favicons, and small applications.</a:t>
+            </a:r>
+          </a:p>
+        </p:txBody>
+      </p:sp>
+      <p:cxnSp>
+        <p:nvCxnSpPr>
+          <p:cNvPr id="4" name="Connector 3"/>
+          <p:cNvCxnSpPr/>
+          <p:nvPr/>
+        </p:nvCxnSpPr>
+        <p:spPr>
+          <a:xfrm>
+            <a:off x="457200" y="5286375.0"/>
+            <a:ext cx="8229600" cy="0.0"/>
+          </a:xfrm>
+          <a:prstGeom prst="line">
+            <a:avLst/>
+          </a:prstGeom>
+          <a:ln w="25400">
+            <a:solidFill>
+              <a:srgbClr val="2E86AB"/>
+            </a:solidFill>
           </a:ln>
         </p:spPr>
         <p:style>
-          <a:lnRef idx="1">
+          <a:lnRef idx="2">
             <a:schemeClr val="accent1"/>
           </a:lnRef>
-          <a:fillRef idx="3">
+          <a:fillRef idx="0">
             <a:schemeClr val="accent1"/>
           </a:fillRef>
-          <a:effectRef idx="2">
+          <a:effectRef idx="1">
             <a:schemeClr val="accent1"/>
           </a:effectRef>
           <a:fontRef idx="minor">
-            <a:schemeClr val="lt1"/>
+            <a:schemeClr val="tx1"/>
           </a:fontRef>
         </p:style>
-        <p:txBody>
-          <a:bodyPr rtlCol="0" anchor="ctr"/>
-          <a:lstStyle/>
-          <a:p>
-            <a:pPr algn="ctr"/>
-          </a:p>
-        </p:txBody>
-      </p:sp>
-      <p:grpSpPr/>
-      <p:sp>
-        <p:nvSpPr>
-          <p:cNvPr id="3" name="TextBox 2"/>
+      </p:cxnSp>
+      <p:sp>
+        <p:nvSpPr>
+          <p:cNvPr id="5" name="TextBox 4"/>
           <p:cNvSpPr txBox="1"/>
           <p:nvPr/>
         </p:nvSpPr>
         <p:spPr>
           <a:xfrm>
-            <a:off x="1143000" y="457200"/>
-            <a:ext cx="6858000" cy="742950"/>
+            <a:off x="800100" y="5560695"/>
+            <a:ext cx="5486400" cy="731520"/>
           </a:xfrm>
           <a:prstGeom prst="rect">
             <a:avLst/>
@@ -7079,8 +7518,8 @@
           </a:bodyPr>
           <a:lstStyle/>
           <a:p>
-            <a:pPr>
-              <a:defRPr sz="3200" b="1">
+            <a:pPr algn="l">
+              <a:defRPr sz="2800" b="1">
                 <a:solidFill>
                   <a:srgbClr val="2E86AB"/>
                 </a:solidFill>
@@ -7088,478 +7527,7 @@
               </a:defRPr>
             </a:pPr>
             <a:r>
-              <a:t>Color Palette</a:t>
-            </a:r>
-          </a:p>
-        </p:txBody>
-      </p:sp>
-      <p:sp>
-        <p:nvSpPr>
-          <p:cNvPr id="4" name="Rectangle 3"/>
-          <p:cNvSpPr/>
-          <p:nvPr/>
-        </p:nvSpPr>
-        <p:spPr>
-          <a:xfrm>
-            <a:off x="1143000" y="1943100"/>
-            <a:ext cx="2057400" cy="1485900"/>
-          </a:xfrm>
-          <a:prstGeom prst="rect">
-            <a:avLst/>
-          </a:prstGeom>
-          <a:solidFill>
-            <a:srgbClr val="2E86AB"/>
-          </a:solidFill>
-          <a:ln w="12700">
-            <a:solidFill>
-              <a:srgbClr val="FFFFFF"/>
-            </a:solidFill>
-          </a:ln>
-        </p:spPr>
-        <p:style>
-          <a:lnRef idx="1">
-            <a:schemeClr val="accent1"/>
-          </a:lnRef>
-          <a:fillRef idx="3">
-            <a:schemeClr val="accent1"/>
-          </a:fillRef>
-          <a:effectRef idx="2">
-            <a:schemeClr val="accent1"/>
-          </a:effectRef>
-          <a:fontRef idx="minor">
-            <a:schemeClr val="lt1"/>
-          </a:fontRef>
-        </p:style>
-        <p:txBody>
-          <a:bodyPr rtlCol="0" anchor="ctr"/>
-          <a:lstStyle/>
-          <a:p>
-            <a:pPr algn="ctr"/>
-          </a:p>
-        </p:txBody>
-      </p:sp>
-      <p:sp>
-        <p:nvSpPr>
-          <p:cNvPr id="5" name="TextBox 4"/>
-          <p:cNvSpPr txBox="1"/>
-          <p:nvPr/>
-        </p:nvSpPr>
-        <p:spPr>
-          <a:xfrm>
-            <a:off x="1143000" y="3429000"/>
-            <a:ext cx="2057400" cy="1485900"/>
-          </a:xfrm>
-          <a:prstGeom prst="rect">
-            <a:avLst/>
-          </a:prstGeom>
-          <a:noFill/>
-        </p:spPr>
-        <p:txBody>
-          <a:bodyPr wrap="square">
-            <a:spAutoFit/>
-          </a:bodyPr>
-          <a:lstStyle/>
-          <a:p>
-            <a:pPr>
-              <a:defRPr sz="1000" b="0">
-                <a:solidFill>
-                  <a:srgbClr val="2E86AB"/>
-                </a:solidFill>
-                <a:latin typeface="Source Sans Pro"/>
-              </a:defRPr>
-            </a:pPr>
-            <a:r>
-              <a:t>Primary</a:t>
-            </a:r>
-          </a:p>
-          <a:p>
-            <a:pPr>
-              <a:defRPr sz="1000" b="0">
-                <a:solidFill>
-                  <a:srgbClr val="2E86AB"/>
-                </a:solidFill>
-                <a:latin typeface="Source Sans Pro"/>
-              </a:defRPr>
-            </a:pPr>
-            <a:r>
-              <a:t>#2E86AB</a:t>
-            </a:r>
-          </a:p>
-          <a:p>
-            <a:pPr>
-              <a:defRPr sz="1000" b="0">
-                <a:solidFill>
-                  <a:srgbClr val="2E86AB"/>
-                </a:solidFill>
-                <a:latin typeface="Source Sans Pro"/>
-              </a:defRPr>
-            </a:pPr>
-            <a:r>
-              <a:t>RGB(46, 134, 171)</a:t>
-            </a:r>
-          </a:p>
-          <a:p>
-            <a:pPr>
-              <a:defRPr sz="1000" b="0">
-                <a:solidFill>
-                  <a:srgbClr val="2E86AB"/>
-                </a:solidFill>
-                <a:latin typeface="Source Sans Pro"/>
-              </a:defRPr>
-            </a:pPr>
-            <a:r>
-              <a:t>CMYK(73, 21, 0, 32)</a:t>
-            </a:r>
-          </a:p>
-          <a:p>
-            <a:pPr>
-              <a:defRPr sz="1000" b="0">
-                <a:solidFill>
-                  <a:srgbClr val="2E86AB"/>
-                </a:solidFill>
-                <a:latin typeface="Source Sans Pro"/>
-              </a:defRPr>
-            </a:pPr>
-            <a:r>
-              <a:t>Use Light Text</a:t>
-            </a:r>
-          </a:p>
-        </p:txBody>
-      </p:sp>
-      <p:sp>
-        <p:nvSpPr>
-          <p:cNvPr id="6" name="Rectangle 5"/>
-          <p:cNvSpPr/>
-          <p:nvPr/>
-        </p:nvSpPr>
-        <p:spPr>
-          <a:xfrm>
-            <a:off x="3886200" y="1943100"/>
-            <a:ext cx="2057400" cy="1485900"/>
-          </a:xfrm>
-          <a:prstGeom prst="rect">
-            <a:avLst/>
-          </a:prstGeom>
-          <a:solidFill>
-            <a:srgbClr val="A23B72"/>
-          </a:solidFill>
-          <a:ln w="12700">
-            <a:solidFill>
-              <a:srgbClr val="FFFFFF"/>
-            </a:solidFill>
-          </a:ln>
-        </p:spPr>
-        <p:style>
-          <a:lnRef idx="1">
-            <a:schemeClr val="accent1"/>
-          </a:lnRef>
-          <a:fillRef idx="3">
-            <a:schemeClr val="accent1"/>
-          </a:fillRef>
-          <a:effectRef idx="2">
-            <a:schemeClr val="accent1"/>
-          </a:effectRef>
-          <a:fontRef idx="minor">
-            <a:schemeClr val="lt1"/>
-          </a:fontRef>
-        </p:style>
-        <p:txBody>
-          <a:bodyPr rtlCol="0" anchor="ctr"/>
-          <a:lstStyle/>
-          <a:p>
-            <a:pPr algn="ctr"/>
-          </a:p>
-        </p:txBody>
-      </p:sp>
-      <p:sp>
-        <p:nvSpPr>
-          <p:cNvPr id="7" name="TextBox 6"/>
-          <p:cNvSpPr txBox="1"/>
-          <p:nvPr/>
-        </p:nvSpPr>
-        <p:spPr>
-          <a:xfrm>
-            <a:off x="3886200" y="3429000"/>
-            <a:ext cx="2057400" cy="1485900"/>
-          </a:xfrm>
-          <a:prstGeom prst="rect">
-            <a:avLst/>
-          </a:prstGeom>
-          <a:noFill/>
-        </p:spPr>
-        <p:txBody>
-          <a:bodyPr wrap="square">
-            <a:spAutoFit/>
-          </a:bodyPr>
-          <a:lstStyle/>
-          <a:p>
-            <a:pPr>
-              <a:defRPr sz="1000" b="0">
-                <a:solidFill>
-                  <a:srgbClr val="2E86AB"/>
-                </a:solidFill>
-                <a:latin typeface="Source Sans Pro"/>
-              </a:defRPr>
-            </a:pPr>
-            <a:r>
-              <a:t>Secondary</a:t>
-            </a:r>
-          </a:p>
-          <a:p>
-            <a:pPr>
-              <a:defRPr sz="1000" b="0">
-                <a:solidFill>
-                  <a:srgbClr val="2E86AB"/>
-                </a:solidFill>
-                <a:latin typeface="Source Sans Pro"/>
-              </a:defRPr>
-            </a:pPr>
-            <a:r>
-              <a:t>#A23B72</a:t>
-            </a:r>
-          </a:p>
-          <a:p>
-            <a:pPr>
-              <a:defRPr sz="1000" b="0">
-                <a:solidFill>
-                  <a:srgbClr val="2E86AB"/>
-                </a:solidFill>
-                <a:latin typeface="Source Sans Pro"/>
-              </a:defRPr>
-            </a:pPr>
-            <a:r>
-              <a:t>RGB(162, 59, 114)</a:t>
-            </a:r>
-          </a:p>
-          <a:p>
-            <a:pPr>
-              <a:defRPr sz="1000" b="0">
-                <a:solidFill>
-                  <a:srgbClr val="2E86AB"/>
-                </a:solidFill>
-                <a:latin typeface="Source Sans Pro"/>
-              </a:defRPr>
-            </a:pPr>
-            <a:r>
-              <a:t>CMYK(0, 63, 29, 36)</a:t>
-            </a:r>
-          </a:p>
-          <a:p>
-            <a:pPr>
-              <a:defRPr sz="1000" b="0">
-                <a:solidFill>
-                  <a:srgbClr val="2E86AB"/>
-                </a:solidFill>
-                <a:latin typeface="Source Sans Pro"/>
-              </a:defRPr>
-            </a:pPr>
-            <a:r>
-              <a:t>Use Light Text</a:t>
-            </a:r>
-          </a:p>
-        </p:txBody>
-      </p:sp>
-      <p:sp>
-        <p:nvSpPr>
-          <p:cNvPr id="8" name="Rectangle 7"/>
-          <p:cNvSpPr/>
-          <p:nvPr/>
-        </p:nvSpPr>
-        <p:spPr>
-          <a:xfrm>
-            <a:off x="6629400" y="1943100"/>
-            <a:ext cx="2057400" cy="1485900"/>
-          </a:xfrm>
-          <a:prstGeom prst="rect">
-            <a:avLst/>
-          </a:prstGeom>
-          <a:solidFill>
-            <a:srgbClr val="F18F01"/>
-          </a:solidFill>
-          <a:ln w="12700">
-            <a:solidFill>
-              <a:srgbClr val="FFFFFF"/>
-            </a:solidFill>
-          </a:ln>
-        </p:spPr>
-        <p:style>
-          <a:lnRef idx="1">
-            <a:schemeClr val="accent1"/>
-          </a:lnRef>
-          <a:fillRef idx="3">
-            <a:schemeClr val="accent1"/>
-          </a:fillRef>
-          <a:effectRef idx="2">
-            <a:schemeClr val="accent1"/>
-          </a:effectRef>
-          <a:fontRef idx="minor">
-            <a:schemeClr val="lt1"/>
-          </a:fontRef>
-        </p:style>
-        <p:txBody>
-          <a:bodyPr rtlCol="0" anchor="ctr"/>
-          <a:lstStyle/>
-          <a:p>
-            <a:pPr algn="ctr"/>
-          </a:p>
-        </p:txBody>
-      </p:sp>
-      <p:sp>
-        <p:nvSpPr>
-          <p:cNvPr id="9" name="TextBox 8"/>
-          <p:cNvSpPr txBox="1"/>
-          <p:nvPr/>
-        </p:nvSpPr>
-        <p:spPr>
-          <a:xfrm>
-            <a:off x="6629400" y="3429000"/>
-            <a:ext cx="2057400" cy="1485900"/>
-          </a:xfrm>
-          <a:prstGeom prst="rect">
-            <a:avLst/>
-          </a:prstGeom>
-          <a:noFill/>
-        </p:spPr>
-        <p:txBody>
-          <a:bodyPr wrap="square">
-            <a:spAutoFit/>
-          </a:bodyPr>
-          <a:lstStyle/>
-          <a:p>
-            <a:pPr>
-              <a:defRPr sz="1000" b="0">
-                <a:solidFill>
-                  <a:srgbClr val="2E86AB"/>
-                </a:solidFill>
-                <a:latin typeface="Source Sans Pro"/>
-              </a:defRPr>
-            </a:pPr>
-            <a:r>
-              <a:t>Accent</a:t>
-            </a:r>
-          </a:p>
-          <a:p>
-            <a:pPr>
-              <a:defRPr sz="1000" b="0">
-                <a:solidFill>
-                  <a:srgbClr val="2E86AB"/>
-                </a:solidFill>
-                <a:latin typeface="Source Sans Pro"/>
-              </a:defRPr>
-            </a:pPr>
-            <a:r>
-              <a:t>#F18F01</a:t>
-            </a:r>
-          </a:p>
-          <a:p>
-            <a:pPr>
-              <a:defRPr sz="1000" b="0">
-                <a:solidFill>
-                  <a:srgbClr val="2E86AB"/>
-                </a:solidFill>
-                <a:latin typeface="Source Sans Pro"/>
-              </a:defRPr>
-            </a:pPr>
-            <a:r>
-              <a:t>RGB(241, 143, 1)</a:t>
-            </a:r>
-          </a:p>
-          <a:p>
-            <a:pPr>
-              <a:defRPr sz="1000" b="0">
-                <a:solidFill>
-                  <a:srgbClr val="2E86AB"/>
-                </a:solidFill>
-                <a:latin typeface="Source Sans Pro"/>
-              </a:defRPr>
-            </a:pPr>
-            <a:r>
-              <a:t>CMYK(0, 40, 99, 5)</a:t>
-            </a:r>
-          </a:p>
-          <a:p>
-            <a:pPr>
-              <a:defRPr sz="1000" b="0">
-                <a:solidFill>
-                  <a:srgbClr val="2E86AB"/>
-                </a:solidFill>
-                <a:latin typeface="Source Sans Pro"/>
-              </a:defRPr>
-            </a:pPr>
-            <a:r>
-              <a:t>Use Dark Text</a:t>
-            </a:r>
-          </a:p>
-        </p:txBody>
-      </p:sp>
-      <p:sp>
-        <p:nvSpPr>
-          <p:cNvPr id="10" name="TextBox 9"/>
-          <p:cNvSpPr txBox="1"/>
-          <p:nvPr/>
-        </p:nvSpPr>
-        <p:spPr>
-          <a:xfrm>
-            <a:off x="457200" y="5657850"/>
-            <a:ext cx="4114800" cy="742950"/>
-          </a:xfrm>
-          <a:prstGeom prst="rect">
-            <a:avLst/>
-          </a:prstGeom>
-          <a:noFill/>
-        </p:spPr>
-        <p:txBody>
-          <a:bodyPr wrap="none">
-            <a:spAutoFit/>
-          </a:bodyPr>
-          <a:lstStyle/>
-          <a:p>
-            <a:pPr algn="l">
-              <a:defRPr sz="1000" b="0">
-                <a:solidFill>
-                  <a:srgbClr val="2E86AB"/>
-                </a:solidFill>
-                <a:latin typeface="Source Sans Pro"/>
-              </a:defRPr>
-            </a:pPr>
-            <a:r>
-              <a:t>TechForward Live</a:t>
-            </a:r>
-          </a:p>
-        </p:txBody>
-      </p:sp>
-      <p:sp>
-        <p:nvSpPr>
-          <p:cNvPr id="11" name="TextBox 10"/>
-          <p:cNvSpPr txBox="1"/>
-          <p:nvPr/>
-        </p:nvSpPr>
-        <p:spPr>
-          <a:xfrm>
-            <a:off x="4572000" y="5657850"/>
-            <a:ext cx="4114800" cy="742950"/>
-          </a:xfrm>
-          <a:prstGeom prst="rect">
-            <a:avLst/>
-          </a:prstGeom>
-          <a:noFill/>
-        </p:spPr>
-        <p:txBody>
-          <a:bodyPr wrap="none">
-            <a:spAutoFit/>
-          </a:bodyPr>
-          <a:lstStyle/>
-          <a:p>
-            <a:pPr algn="r">
-              <a:defRPr sz="1000" b="0">
-                <a:solidFill>
-                  <a:srgbClr val="2E86AB"/>
-                </a:solidFill>
-                <a:latin typeface="Source Sans Pro"/>
-              </a:defRPr>
-            </a:pPr>
-            <a:r>
-              <a:t>9</a:t>
+              <a:t>Logo Variation 2</a:t>
             </a:r>
           </a:p>
         </p:txBody>

--- a/output/techforward_live/techforward_live_enhanced_brand_book.pptx
+++ b/output/techforward_live/techforward_live_enhanced_brand_book.pptx
@@ -18,6 +18,9 @@
     <p:sldId id="266" r:id="rId17"/>
     <p:sldId id="267" r:id="rId18"/>
     <p:sldId id="268" r:id="rId19"/>
+    <p:sldId id="269" r:id="rId20"/>
+    <p:sldId id="270" r:id="rId21"/>
+    <p:sldId id="271" r:id="rId22"/>
   </p:sldIdLst>
   <p:sldSz cx="9144000" cy="6858000" type="screen4x3"/>
   <p:notesSz cx="6858000" cy="9144000"/>
@@ -3287,7 +3290,7 @@
               </a:defRPr>
             </a:pPr>
             <a:r>
-              <a:t>Simplified logo for minimal sizes. Perfect for watermarks, stamps, and tight layouts.</a:t>
+              <a:t>Ideal for small sizes, watermarks, and applications requiring simplified brand representation.</a:t>
             </a:r>
           </a:p>
         </p:txBody>
@@ -3374,12 +3377,21 @@
 <file path=ppt/slides/slide11.xml><?xml version="1.0" encoding="utf-8"?>
 <p:sld xmlns:a="http://schemas.openxmlformats.org/drawingml/2006/main" xmlns:p="http://schemas.openxmlformats.org/presentationml/2006/main" xmlns:r="http://schemas.openxmlformats.org/officeDocument/2006/relationships">
   <p:cSld>
+    <p:bg>
+      <p:bgPr>
+        <a:solidFill>
+          <a:srgbClr val="000000"/>
+        </a:solidFill>
+        <a:effectLst/>
+      </p:bgPr>
+    </p:bg>
     <p:spTree>
       <p:nvGrpSpPr>
         <p:cNvPr id="1" name=""/>
         <p:cNvGrpSpPr/>
         <p:nvPr/>
       </p:nvGrpSpPr>
+      <p:grpSpPr/>
       <p:sp>
         <p:nvSpPr>
           <p:cNvPr id="2" name="Rectangle 1"/>
@@ -3388,17 +3400,19 @@
         </p:nvSpPr>
         <p:spPr>
           <a:xfrm>
-            <a:off x="0" y="0"/>
-            <a:ext cx="9144000" cy="6858000"/>
+            <a:off x="1143000" y="1645920"/>
+            <a:ext cx="1828800" cy="1371600"/>
           </a:xfrm>
           <a:prstGeom prst="rect">
             <a:avLst/>
           </a:prstGeom>
           <a:solidFill>
-            <a:srgbClr val="1A1A1A"/>
+            <a:srgbClr val="2E86AB"/>
           </a:solidFill>
-          <a:ln>
-            <a:noFill/>
+          <a:ln w="25400">
+            <a:solidFill>
+              <a:srgbClr val="FFFFFF"/>
+            </a:solidFill>
           </a:ln>
         </p:spPr>
         <p:style>
@@ -3423,7 +3437,6 @@
           </a:p>
         </p:txBody>
       </p:sp>
-      <p:grpSpPr/>
       <p:sp>
         <p:nvSpPr>
           <p:cNvPr id="3" name="TextBox 2"/>
@@ -3432,8 +3445,8 @@
         </p:nvSpPr>
         <p:spPr>
           <a:xfrm>
-            <a:off x="1143000" y="457200"/>
-            <a:ext cx="6858000" cy="742950"/>
+            <a:off x="3154680" y="1645920"/>
+            <a:ext cx="3017520" cy="1371600"/>
           </a:xfrm>
           <a:prstGeom prst="rect">
             <a:avLst/>
@@ -3441,21 +3454,88 @@
           <a:noFill/>
         </p:spPr>
         <p:txBody>
-          <a:bodyPr wrap="none">
+          <a:bodyPr wrap="square" lIns="0" rIns="0" tIns="0" bIns="0">
             <a:spAutoFit/>
           </a:bodyPr>
           <a:lstStyle/>
           <a:p>
-            <a:pPr>
-              <a:defRPr sz="3200" b="1">
-                <a:solidFill>
-                  <a:srgbClr val="2E86AB"/>
-                </a:solidFill>
-                <a:latin typeface="Inter"/>
-              </a:defRPr>
-            </a:pPr>
-            <a:r>
-              <a:t>Color Palette</a:t>
+            <a:pPr algn="l">
+              <a:spcAft>
+                <a:spcPts val="400"/>
+              </a:spcAft>
+              <a:defRPr sz="1200" b="0">
+                <a:solidFill>
+                  <a:srgbClr val="FFFFFF"/>
+                </a:solidFill>
+                <a:latin typeface="Source Sans Pro"/>
+              </a:defRPr>
+            </a:pPr>
+            <a:r>
+              <a:t>Primary Blue</a:t>
+            </a:r>
+          </a:p>
+          <a:p>
+            <a:pPr algn="l">
+              <a:spcAft>
+                <a:spcPts val="400"/>
+              </a:spcAft>
+              <a:defRPr sz="1200" b="0">
+                <a:solidFill>
+                  <a:srgbClr val="FFFFFF"/>
+                </a:solidFill>
+                <a:latin typeface="Source Sans Pro"/>
+              </a:defRPr>
+            </a:pPr>
+            <a:r>
+              <a:t>#2E86AB</a:t>
+            </a:r>
+          </a:p>
+          <a:p>
+            <a:pPr algn="l">
+              <a:spcAft>
+                <a:spcPts val="400"/>
+              </a:spcAft>
+              <a:defRPr sz="1200" b="0">
+                <a:solidFill>
+                  <a:srgbClr val="FFFFFF"/>
+                </a:solidFill>
+                <a:latin typeface="Source Sans Pro"/>
+              </a:defRPr>
+            </a:pPr>
+            <a:r>
+              <a:t>RGB(46, 134, 171)</a:t>
+            </a:r>
+          </a:p>
+          <a:p>
+            <a:pPr algn="l">
+              <a:spcAft>
+                <a:spcPts val="400"/>
+              </a:spcAft>
+              <a:defRPr sz="1200" b="0">
+                <a:solidFill>
+                  <a:srgbClr val="FFFFFF"/>
+                </a:solidFill>
+                <a:latin typeface="Source Sans Pro"/>
+              </a:defRPr>
+            </a:pPr>
+            <a:r>
+              <a:t>CMYK(73, 21, 0, 32)</a:t>
+            </a:r>
+          </a:p>
+          <a:p>
+            <a:pPr algn="l">
+              <a:spcAft>
+                <a:spcPts val="400"/>
+              </a:spcAft>
+              <a:defRPr sz="1200" b="0">
+                <a:solidFill>
+                  <a:srgbClr val="FFFFFF"/>
+                </a:solidFill>
+                <a:latin typeface="Source Sans Pro"/>
+              </a:defRPr>
+            </a:pPr>
+            <a:r>
+              <a:t>Use Dark Text</a:t>
             </a:r>
           </a:p>
         </p:txBody>
@@ -3468,16 +3548,16 @@
         </p:nvSpPr>
         <p:spPr>
           <a:xfrm>
-            <a:off x="1143000" y="1943100"/>
-            <a:ext cx="2057400" cy="1485900"/>
+            <a:off x="4572000" y="1645920"/>
+            <a:ext cx="1828800" cy="1371600"/>
           </a:xfrm>
           <a:prstGeom prst="rect">
             <a:avLst/>
           </a:prstGeom>
           <a:solidFill>
-            <a:srgbClr val="2E86AB"/>
+            <a:srgbClr val="24A19C"/>
           </a:solidFill>
-          <a:ln w="12700">
+          <a:ln w="25400">
             <a:solidFill>
               <a:srgbClr val="FFFFFF"/>
             </a:solidFill>
@@ -3513,8 +3593,8 @@
         </p:nvSpPr>
         <p:spPr>
           <a:xfrm>
-            <a:off x="1143000" y="3429000"/>
-            <a:ext cx="2057400" cy="1485900"/>
+            <a:off x="6583680" y="1645920"/>
+            <a:ext cx="3017520" cy="1371600"/>
           </a:xfrm>
           <a:prstGeom prst="rect">
             <a:avLst/>
@@ -3522,73 +3602,88 @@
           <a:noFill/>
         </p:spPr>
         <p:txBody>
-          <a:bodyPr wrap="square">
+          <a:bodyPr wrap="square" lIns="0" rIns="0" tIns="0" bIns="0">
             <a:spAutoFit/>
           </a:bodyPr>
           <a:lstStyle/>
           <a:p>
-            <a:pPr>
-              <a:defRPr sz="1000" b="0">
-                <a:solidFill>
-                  <a:srgbClr val="2E86AB"/>
-                </a:solidFill>
-                <a:latin typeface="Source Sans Pro"/>
-              </a:defRPr>
-            </a:pPr>
-            <a:r>
-              <a:t>Primary</a:t>
-            </a:r>
-          </a:p>
-          <a:p>
-            <a:pPr>
-              <a:defRPr sz="1000" b="0">
-                <a:solidFill>
-                  <a:srgbClr val="2E86AB"/>
-                </a:solidFill>
-                <a:latin typeface="Source Sans Pro"/>
-              </a:defRPr>
-            </a:pPr>
-            <a:r>
-              <a:t>#2E86AB</a:t>
-            </a:r>
-          </a:p>
-          <a:p>
-            <a:pPr>
-              <a:defRPr sz="1000" b="0">
-                <a:solidFill>
-                  <a:srgbClr val="2E86AB"/>
-                </a:solidFill>
-                <a:latin typeface="Source Sans Pro"/>
-              </a:defRPr>
-            </a:pPr>
-            <a:r>
-              <a:t>RGB(46, 134, 171)</a:t>
-            </a:r>
-          </a:p>
-          <a:p>
-            <a:pPr>
-              <a:defRPr sz="1000" b="0">
-                <a:solidFill>
-                  <a:srgbClr val="2E86AB"/>
-                </a:solidFill>
-                <a:latin typeface="Source Sans Pro"/>
-              </a:defRPr>
-            </a:pPr>
-            <a:r>
-              <a:t>CMYK(73, 21, 0, 32)</a:t>
-            </a:r>
-          </a:p>
-          <a:p>
-            <a:pPr>
-              <a:defRPr sz="1000" b="0">
-                <a:solidFill>
-                  <a:srgbClr val="2E86AB"/>
-                </a:solidFill>
-                <a:latin typeface="Source Sans Pro"/>
-              </a:defRPr>
-            </a:pPr>
-            <a:r>
-              <a:t>Use Light Text</a:t>
+            <a:pPr algn="l">
+              <a:spcAft>
+                <a:spcPts val="400"/>
+              </a:spcAft>
+              <a:defRPr sz="1200" b="0">
+                <a:solidFill>
+                  <a:srgbClr val="FFFFFF"/>
+                </a:solidFill>
+                <a:latin typeface="Source Sans Pro"/>
+              </a:defRPr>
+            </a:pPr>
+            <a:r>
+              <a:t>Accent Teal</a:t>
+            </a:r>
+          </a:p>
+          <a:p>
+            <a:pPr algn="l">
+              <a:spcAft>
+                <a:spcPts val="400"/>
+              </a:spcAft>
+              <a:defRPr sz="1200" b="0">
+                <a:solidFill>
+                  <a:srgbClr val="FFFFFF"/>
+                </a:solidFill>
+                <a:latin typeface="Source Sans Pro"/>
+              </a:defRPr>
+            </a:pPr>
+            <a:r>
+              <a:t>#24A19C</a:t>
+            </a:r>
+          </a:p>
+          <a:p>
+            <a:pPr algn="l">
+              <a:spcAft>
+                <a:spcPts val="400"/>
+              </a:spcAft>
+              <a:defRPr sz="1200" b="0">
+                <a:solidFill>
+                  <a:srgbClr val="FFFFFF"/>
+                </a:solidFill>
+                <a:latin typeface="Source Sans Pro"/>
+              </a:defRPr>
+            </a:pPr>
+            <a:r>
+              <a:t>RGB(36, 161, 156)</a:t>
+            </a:r>
+          </a:p>
+          <a:p>
+            <a:pPr algn="l">
+              <a:spcAft>
+                <a:spcPts val="400"/>
+              </a:spcAft>
+              <a:defRPr sz="1200" b="0">
+                <a:solidFill>
+                  <a:srgbClr val="FFFFFF"/>
+                </a:solidFill>
+                <a:latin typeface="Source Sans Pro"/>
+              </a:defRPr>
+            </a:pPr>
+            <a:r>
+              <a:t>CMYK(77, 0, 3, 36)</a:t>
+            </a:r>
+          </a:p>
+          <a:p>
+            <a:pPr algn="l">
+              <a:spcAft>
+                <a:spcPts val="400"/>
+              </a:spcAft>
+              <a:defRPr sz="1200" b="0">
+                <a:solidFill>
+                  <a:srgbClr val="FFFFFF"/>
+                </a:solidFill>
+                <a:latin typeface="Source Sans Pro"/>
+              </a:defRPr>
+            </a:pPr>
+            <a:r>
+              <a:t>Use Dark Text</a:t>
             </a:r>
           </a:p>
         </p:txBody>
@@ -3601,16 +3696,16 @@
         </p:nvSpPr>
         <p:spPr>
           <a:xfrm>
-            <a:off x="3886200" y="1943100"/>
-            <a:ext cx="2057400" cy="1485900"/>
+            <a:off x="1143000" y="3726180"/>
+            <a:ext cx="1828800" cy="1371600"/>
           </a:xfrm>
           <a:prstGeom prst="rect">
             <a:avLst/>
           </a:prstGeom>
           <a:solidFill>
-            <a:srgbClr val="A23B72"/>
+            <a:srgbClr val="1B365D"/>
           </a:solidFill>
-          <a:ln w="12700">
+          <a:ln w="25400">
             <a:solidFill>
               <a:srgbClr val="FFFFFF"/>
             </a:solidFill>
@@ -3646,8 +3741,8 @@
         </p:nvSpPr>
         <p:spPr>
           <a:xfrm>
-            <a:off x="3886200" y="3429000"/>
-            <a:ext cx="2057400" cy="1485900"/>
+            <a:off x="3154680" y="3726180"/>
+            <a:ext cx="3017520" cy="1371600"/>
           </a:xfrm>
           <a:prstGeom prst="rect">
             <a:avLst/>
@@ -3655,67 +3750,82 @@
           <a:noFill/>
         </p:spPr>
         <p:txBody>
-          <a:bodyPr wrap="square">
+          <a:bodyPr wrap="square" lIns="0" rIns="0" tIns="0" bIns="0">
             <a:spAutoFit/>
           </a:bodyPr>
           <a:lstStyle/>
           <a:p>
-            <a:pPr>
-              <a:defRPr sz="1000" b="0">
-                <a:solidFill>
-                  <a:srgbClr val="2E86AB"/>
-                </a:solidFill>
-                <a:latin typeface="Source Sans Pro"/>
-              </a:defRPr>
-            </a:pPr>
-            <a:r>
-              <a:t>Secondary</a:t>
-            </a:r>
-          </a:p>
-          <a:p>
-            <a:pPr>
-              <a:defRPr sz="1000" b="0">
-                <a:solidFill>
-                  <a:srgbClr val="2E86AB"/>
-                </a:solidFill>
-                <a:latin typeface="Source Sans Pro"/>
-              </a:defRPr>
-            </a:pPr>
-            <a:r>
-              <a:t>#A23B72</a:t>
-            </a:r>
-          </a:p>
-          <a:p>
-            <a:pPr>
-              <a:defRPr sz="1000" b="0">
-                <a:solidFill>
-                  <a:srgbClr val="2E86AB"/>
-                </a:solidFill>
-                <a:latin typeface="Source Sans Pro"/>
-              </a:defRPr>
-            </a:pPr>
-            <a:r>
-              <a:t>RGB(162, 59, 114)</a:t>
-            </a:r>
-          </a:p>
-          <a:p>
-            <a:pPr>
-              <a:defRPr sz="1000" b="0">
-                <a:solidFill>
-                  <a:srgbClr val="2E86AB"/>
-                </a:solidFill>
-                <a:latin typeface="Source Sans Pro"/>
-              </a:defRPr>
-            </a:pPr>
-            <a:r>
-              <a:t>CMYK(0, 63, 29, 36)</a:t>
-            </a:r>
-          </a:p>
-          <a:p>
-            <a:pPr>
-              <a:defRPr sz="1000" b="0">
-                <a:solidFill>
-                  <a:srgbClr val="2E86AB"/>
+            <a:pPr algn="l">
+              <a:spcAft>
+                <a:spcPts val="400"/>
+              </a:spcAft>
+              <a:defRPr sz="1200" b="0">
+                <a:solidFill>
+                  <a:srgbClr val="FFFFFF"/>
+                </a:solidFill>
+                <a:latin typeface="Source Sans Pro"/>
+              </a:defRPr>
+            </a:pPr>
+            <a:r>
+              <a:t>Deep Navy</a:t>
+            </a:r>
+          </a:p>
+          <a:p>
+            <a:pPr algn="l">
+              <a:spcAft>
+                <a:spcPts val="400"/>
+              </a:spcAft>
+              <a:defRPr sz="1200" b="0">
+                <a:solidFill>
+                  <a:srgbClr val="FFFFFF"/>
+                </a:solidFill>
+                <a:latin typeface="Source Sans Pro"/>
+              </a:defRPr>
+            </a:pPr>
+            <a:r>
+              <a:t>#1B365D</a:t>
+            </a:r>
+          </a:p>
+          <a:p>
+            <a:pPr algn="l">
+              <a:spcAft>
+                <a:spcPts val="400"/>
+              </a:spcAft>
+              <a:defRPr sz="1200" b="0">
+                <a:solidFill>
+                  <a:srgbClr val="FFFFFF"/>
+                </a:solidFill>
+                <a:latin typeface="Source Sans Pro"/>
+              </a:defRPr>
+            </a:pPr>
+            <a:r>
+              <a:t>RGB(27, 54, 93)</a:t>
+            </a:r>
+          </a:p>
+          <a:p>
+            <a:pPr algn="l">
+              <a:spcAft>
+                <a:spcPts val="400"/>
+              </a:spcAft>
+              <a:defRPr sz="1200" b="0">
+                <a:solidFill>
+                  <a:srgbClr val="FFFFFF"/>
+                </a:solidFill>
+                <a:latin typeface="Source Sans Pro"/>
+              </a:defRPr>
+            </a:pPr>
+            <a:r>
+              <a:t>CMYK(70, 41, 0, 63)</a:t>
+            </a:r>
+          </a:p>
+          <a:p>
+            <a:pPr algn="l">
+              <a:spcAft>
+                <a:spcPts val="400"/>
+              </a:spcAft>
+              <a:defRPr sz="1200" b="0">
+                <a:solidFill>
+                  <a:srgbClr val="FFFFFF"/>
                 </a:solidFill>
                 <a:latin typeface="Source Sans Pro"/>
               </a:defRPr>
@@ -3726,51 +3836,41 @@
           </a:p>
         </p:txBody>
       </p:sp>
-      <p:sp>
-        <p:nvSpPr>
-          <p:cNvPr id="8" name="Rectangle 7"/>
-          <p:cNvSpPr/>
-          <p:nvPr/>
-        </p:nvSpPr>
-        <p:spPr>
-          <a:xfrm>
-            <a:off x="6629400" y="1943100"/>
-            <a:ext cx="2057400" cy="1485900"/>
-          </a:xfrm>
-          <a:prstGeom prst="rect">
-            <a:avLst/>
-          </a:prstGeom>
-          <a:solidFill>
-            <a:srgbClr val="F18F01"/>
-          </a:solidFill>
-          <a:ln w="12700">
+      <p:cxnSp>
+        <p:nvCxnSpPr>
+          <p:cNvPr id="8" name="Connector 7"/>
+          <p:cNvCxnSpPr/>
+          <p:nvPr/>
+        </p:nvCxnSpPr>
+        <p:spPr>
+          <a:xfrm>
+            <a:off x="457200" y="5286375.0"/>
+            <a:ext cx="8229600" cy="0.0"/>
+          </a:xfrm>
+          <a:prstGeom prst="line">
+            <a:avLst/>
+          </a:prstGeom>
+          <a:ln w="25400">
             <a:solidFill>
-              <a:srgbClr val="FFFFFF"/>
+              <a:srgbClr val="2E86AB"/>
             </a:solidFill>
           </a:ln>
         </p:spPr>
         <p:style>
-          <a:lnRef idx="1">
+          <a:lnRef idx="2">
             <a:schemeClr val="accent1"/>
           </a:lnRef>
-          <a:fillRef idx="3">
+          <a:fillRef idx="0">
             <a:schemeClr val="accent1"/>
           </a:fillRef>
-          <a:effectRef idx="2">
+          <a:effectRef idx="1">
             <a:schemeClr val="accent1"/>
           </a:effectRef>
           <a:fontRef idx="minor">
-            <a:schemeClr val="lt1"/>
+            <a:schemeClr val="tx1"/>
           </a:fontRef>
         </p:style>
-        <p:txBody>
-          <a:bodyPr rtlCol="0" anchor="ctr"/>
-          <a:lstStyle/>
-          <a:p>
-            <a:pPr algn="ctr"/>
-          </a:p>
-        </p:txBody>
-      </p:sp>
+      </p:cxnSp>
       <p:sp>
         <p:nvSpPr>
           <p:cNvPr id="9" name="TextBox 8"/>
@@ -3779,96 +3879,8 @@
         </p:nvSpPr>
         <p:spPr>
           <a:xfrm>
-            <a:off x="6629400" y="3429000"/>
-            <a:ext cx="2057400" cy="1485900"/>
-          </a:xfrm>
-          <a:prstGeom prst="rect">
-            <a:avLst/>
-          </a:prstGeom>
-          <a:noFill/>
-        </p:spPr>
-        <p:txBody>
-          <a:bodyPr wrap="square">
-            <a:spAutoFit/>
-          </a:bodyPr>
-          <a:lstStyle/>
-          <a:p>
-            <a:pPr>
-              <a:defRPr sz="1000" b="0">
-                <a:solidFill>
-                  <a:srgbClr val="2E86AB"/>
-                </a:solidFill>
-                <a:latin typeface="Source Sans Pro"/>
-              </a:defRPr>
-            </a:pPr>
-            <a:r>
-              <a:t>Accent</a:t>
-            </a:r>
-          </a:p>
-          <a:p>
-            <a:pPr>
-              <a:defRPr sz="1000" b="0">
-                <a:solidFill>
-                  <a:srgbClr val="2E86AB"/>
-                </a:solidFill>
-                <a:latin typeface="Source Sans Pro"/>
-              </a:defRPr>
-            </a:pPr>
-            <a:r>
-              <a:t>#F18F01</a:t>
-            </a:r>
-          </a:p>
-          <a:p>
-            <a:pPr>
-              <a:defRPr sz="1000" b="0">
-                <a:solidFill>
-                  <a:srgbClr val="2E86AB"/>
-                </a:solidFill>
-                <a:latin typeface="Source Sans Pro"/>
-              </a:defRPr>
-            </a:pPr>
-            <a:r>
-              <a:t>RGB(241, 143, 1)</a:t>
-            </a:r>
-          </a:p>
-          <a:p>
-            <a:pPr>
-              <a:defRPr sz="1000" b="0">
-                <a:solidFill>
-                  <a:srgbClr val="2E86AB"/>
-                </a:solidFill>
-                <a:latin typeface="Source Sans Pro"/>
-              </a:defRPr>
-            </a:pPr>
-            <a:r>
-              <a:t>CMYK(0, 40, 99, 5)</a:t>
-            </a:r>
-          </a:p>
-          <a:p>
-            <a:pPr>
-              <a:defRPr sz="1000" b="0">
-                <a:solidFill>
-                  <a:srgbClr val="2E86AB"/>
-                </a:solidFill>
-                <a:latin typeface="Source Sans Pro"/>
-              </a:defRPr>
-            </a:pPr>
-            <a:r>
-              <a:t>Use Dark Text</a:t>
-            </a:r>
-          </a:p>
-        </p:txBody>
-      </p:sp>
-      <p:sp>
-        <p:nvSpPr>
-          <p:cNvPr id="10" name="TextBox 9"/>
-          <p:cNvSpPr txBox="1"/>
-          <p:nvPr/>
-        </p:nvSpPr>
-        <p:spPr>
-          <a:xfrm>
-            <a:off x="457200" y="5657850"/>
-            <a:ext cx="4114800" cy="742950"/>
+            <a:off x="457200" y="5560695"/>
+            <a:ext cx="5486400" cy="731520"/>
           </a:xfrm>
           <a:prstGeom prst="rect">
             <a:avLst/>
@@ -3882,51 +3894,15 @@
           <a:lstStyle/>
           <a:p>
             <a:pPr algn="l">
-              <a:defRPr sz="1000" b="0">
+              <a:defRPr sz="2800" b="1">
                 <a:solidFill>
                   <a:srgbClr val="2E86AB"/>
                 </a:solidFill>
-                <a:latin typeface="Source Sans Pro"/>
-              </a:defRPr>
-            </a:pPr>
-            <a:r>
-              <a:t>TechForward Live</a:t>
-            </a:r>
-          </a:p>
-        </p:txBody>
-      </p:sp>
-      <p:sp>
-        <p:nvSpPr>
-          <p:cNvPr id="11" name="TextBox 10"/>
-          <p:cNvSpPr txBox="1"/>
-          <p:nvPr/>
-        </p:nvSpPr>
-        <p:spPr>
-          <a:xfrm>
-            <a:off x="4572000" y="5657850"/>
-            <a:ext cx="4114800" cy="742950"/>
-          </a:xfrm>
-          <a:prstGeom prst="rect">
-            <a:avLst/>
-          </a:prstGeom>
-          <a:noFill/>
-        </p:spPr>
-        <p:txBody>
-          <a:bodyPr wrap="none">
-            <a:spAutoFit/>
-          </a:bodyPr>
-          <a:lstStyle/>
-          <a:p>
-            <a:pPr algn="r">
-              <a:defRPr sz="1000" b="0">
-                <a:solidFill>
-                  <a:srgbClr val="2E86AB"/>
-                </a:solidFill>
-                <a:latin typeface="Source Sans Pro"/>
-              </a:defRPr>
-            </a:pPr>
-            <a:r>
-              <a:t>11</a:t>
+                <a:latin typeface="Inter"/>
+              </a:defRPr>
+            </a:pPr>
+            <a:r>
+              <a:t>Primary Colors</a:t>
             </a:r>
           </a:p>
         </p:txBody>
@@ -3942,12 +3918,21 @@
 <file path=ppt/slides/slide12.xml><?xml version="1.0" encoding="utf-8"?>
 <p:sld xmlns:a="http://schemas.openxmlformats.org/drawingml/2006/main" xmlns:p="http://schemas.openxmlformats.org/presentationml/2006/main" xmlns:r="http://schemas.openxmlformats.org/officeDocument/2006/relationships">
   <p:cSld>
+    <p:bg>
+      <p:bgPr>
+        <a:solidFill>
+          <a:srgbClr val="000000"/>
+        </a:solidFill>
+        <a:effectLst/>
+      </p:bgPr>
+    </p:bg>
     <p:spTree>
       <p:nvGrpSpPr>
         <p:cNvPr id="1" name=""/>
         <p:cNvGrpSpPr/>
         <p:nvPr/>
       </p:nvGrpSpPr>
+      <p:grpSpPr/>
       <p:sp>
         <p:nvSpPr>
           <p:cNvPr id="2" name="Rectangle 1"/>
@@ -3956,17 +3941,19 @@
         </p:nvSpPr>
         <p:spPr>
           <a:xfrm>
-            <a:off x="0" y="0"/>
-            <a:ext cx="9144000" cy="6858000"/>
+            <a:off x="1143000" y="1571625"/>
+            <a:ext cx="1828800" cy="914400"/>
           </a:xfrm>
           <a:prstGeom prst="rect">
             <a:avLst/>
           </a:prstGeom>
           <a:solidFill>
-            <a:srgbClr val="1A1A1A"/>
+            <a:srgbClr val="F8F9FA"/>
           </a:solidFill>
-          <a:ln>
-            <a:noFill/>
+          <a:ln w="25400">
+            <a:solidFill>
+              <a:srgbClr val="FFFFFF"/>
+            </a:solidFill>
           </a:ln>
         </p:spPr>
         <p:style>
@@ -3991,7 +3978,6 @@
           </a:p>
         </p:txBody>
       </p:sp>
-      <p:grpSpPr/>
       <p:sp>
         <p:nvSpPr>
           <p:cNvPr id="3" name="TextBox 2"/>
@@ -4000,8 +3986,578 @@
         </p:nvSpPr>
         <p:spPr>
           <a:xfrm>
-            <a:off x="1143000" y="457200"/>
-            <a:ext cx="6858000" cy="742950"/>
+            <a:off x="1143000" y="2668905"/>
+            <a:ext cx="1828800" cy="914400"/>
+          </a:xfrm>
+          <a:prstGeom prst="rect">
+            <a:avLst/>
+          </a:prstGeom>
+          <a:noFill/>
+        </p:spPr>
+        <p:txBody>
+          <a:bodyPr wrap="square" lIns="0" rIns="0" tIns="0" bIns="0">
+            <a:spAutoFit/>
+          </a:bodyPr>
+          <a:lstStyle/>
+          <a:p>
+            <a:pPr algn="ctr">
+              <a:spcAft>
+                <a:spcPts val="300"/>
+              </a:spcAft>
+              <a:defRPr sz="1000" b="0">
+                <a:solidFill>
+                  <a:srgbClr val="FFFFFF"/>
+                </a:solidFill>
+                <a:latin typeface="Source Sans Pro"/>
+              </a:defRPr>
+            </a:pPr>
+            <a:r>
+              <a:t>Light Gray</a:t>
+            </a:r>
+          </a:p>
+          <a:p>
+            <a:pPr algn="ctr">
+              <a:spcAft>
+                <a:spcPts val="300"/>
+              </a:spcAft>
+              <a:defRPr sz="1000" b="0">
+                <a:solidFill>
+                  <a:srgbClr val="FFFFFF"/>
+                </a:solidFill>
+                <a:latin typeface="Source Sans Pro"/>
+              </a:defRPr>
+            </a:pPr>
+            <a:r>
+              <a:t>#F8F9FA</a:t>
+            </a:r>
+          </a:p>
+          <a:p>
+            <a:pPr algn="ctr">
+              <a:spcAft>
+                <a:spcPts val="300"/>
+              </a:spcAft>
+              <a:defRPr sz="1000" b="0">
+                <a:solidFill>
+                  <a:srgbClr val="FFFFFF"/>
+                </a:solidFill>
+                <a:latin typeface="Source Sans Pro"/>
+              </a:defRPr>
+            </a:pPr>
+            <a:r>
+              <a:t>Use Dark Text</a:t>
+            </a:r>
+          </a:p>
+        </p:txBody>
+      </p:sp>
+      <p:sp>
+        <p:nvSpPr>
+          <p:cNvPr id="4" name="Rectangle 3"/>
+          <p:cNvSpPr/>
+          <p:nvPr/>
+        </p:nvSpPr>
+        <p:spPr>
+          <a:xfrm>
+            <a:off x="3200400" y="1571625"/>
+            <a:ext cx="1828800" cy="914400"/>
+          </a:xfrm>
+          <a:prstGeom prst="rect">
+            <a:avLst/>
+          </a:prstGeom>
+          <a:solidFill>
+            <a:srgbClr val="9AD1D4"/>
+          </a:solidFill>
+          <a:ln w="25400">
+            <a:solidFill>
+              <a:srgbClr val="FFFFFF"/>
+            </a:solidFill>
+          </a:ln>
+        </p:spPr>
+        <p:style>
+          <a:lnRef idx="1">
+            <a:schemeClr val="accent1"/>
+          </a:lnRef>
+          <a:fillRef idx="3">
+            <a:schemeClr val="accent1"/>
+          </a:fillRef>
+          <a:effectRef idx="2">
+            <a:schemeClr val="accent1"/>
+          </a:effectRef>
+          <a:fontRef idx="minor">
+            <a:schemeClr val="lt1"/>
+          </a:fontRef>
+        </p:style>
+        <p:txBody>
+          <a:bodyPr rtlCol="0" anchor="ctr"/>
+          <a:lstStyle/>
+          <a:p>
+            <a:pPr algn="ctr"/>
+          </a:p>
+        </p:txBody>
+      </p:sp>
+      <p:sp>
+        <p:nvSpPr>
+          <p:cNvPr id="5" name="TextBox 4"/>
+          <p:cNvSpPr txBox="1"/>
+          <p:nvPr/>
+        </p:nvSpPr>
+        <p:spPr>
+          <a:xfrm>
+            <a:off x="3200400" y="2668905"/>
+            <a:ext cx="1828800" cy="914400"/>
+          </a:xfrm>
+          <a:prstGeom prst="rect">
+            <a:avLst/>
+          </a:prstGeom>
+          <a:noFill/>
+        </p:spPr>
+        <p:txBody>
+          <a:bodyPr wrap="square" lIns="0" rIns="0" tIns="0" bIns="0">
+            <a:spAutoFit/>
+          </a:bodyPr>
+          <a:lstStyle/>
+          <a:p>
+            <a:pPr algn="ctr">
+              <a:spcAft>
+                <a:spcPts val="300"/>
+              </a:spcAft>
+              <a:defRPr sz="1000" b="0">
+                <a:solidFill>
+                  <a:srgbClr val="FFFFFF"/>
+                </a:solidFill>
+                <a:latin typeface="Source Sans Pro"/>
+              </a:defRPr>
+            </a:pPr>
+            <a:r>
+              <a:t>Pale Aqua</a:t>
+            </a:r>
+          </a:p>
+          <a:p>
+            <a:pPr algn="ctr">
+              <a:spcAft>
+                <a:spcPts val="300"/>
+              </a:spcAft>
+              <a:defRPr sz="1000" b="0">
+                <a:solidFill>
+                  <a:srgbClr val="FFFFFF"/>
+                </a:solidFill>
+                <a:latin typeface="Source Sans Pro"/>
+              </a:defRPr>
+            </a:pPr>
+            <a:r>
+              <a:t>#9AD1D4</a:t>
+            </a:r>
+          </a:p>
+          <a:p>
+            <a:pPr algn="ctr">
+              <a:spcAft>
+                <a:spcPts val="300"/>
+              </a:spcAft>
+              <a:defRPr sz="1000" b="0">
+                <a:solidFill>
+                  <a:srgbClr val="FFFFFF"/>
+                </a:solidFill>
+                <a:latin typeface="Source Sans Pro"/>
+              </a:defRPr>
+            </a:pPr>
+            <a:r>
+              <a:t>Use Dark Text</a:t>
+            </a:r>
+          </a:p>
+        </p:txBody>
+      </p:sp>
+      <p:sp>
+        <p:nvSpPr>
+          <p:cNvPr id="6" name="Rectangle 5"/>
+          <p:cNvSpPr/>
+          <p:nvPr/>
+        </p:nvSpPr>
+        <p:spPr>
+          <a:xfrm>
+            <a:off x="5257800" y="1571625"/>
+            <a:ext cx="1828800" cy="914400"/>
+          </a:xfrm>
+          <a:prstGeom prst="rect">
+            <a:avLst/>
+          </a:prstGeom>
+          <a:solidFill>
+            <a:srgbClr val="145C61"/>
+          </a:solidFill>
+          <a:ln w="25400">
+            <a:solidFill>
+              <a:srgbClr val="FFFFFF"/>
+            </a:solidFill>
+          </a:ln>
+        </p:spPr>
+        <p:style>
+          <a:lnRef idx="1">
+            <a:schemeClr val="accent1"/>
+          </a:lnRef>
+          <a:fillRef idx="3">
+            <a:schemeClr val="accent1"/>
+          </a:fillRef>
+          <a:effectRef idx="2">
+            <a:schemeClr val="accent1"/>
+          </a:effectRef>
+          <a:fontRef idx="minor">
+            <a:schemeClr val="lt1"/>
+          </a:fontRef>
+        </p:style>
+        <p:txBody>
+          <a:bodyPr rtlCol="0" anchor="ctr"/>
+          <a:lstStyle/>
+          <a:p>
+            <a:pPr algn="ctr"/>
+          </a:p>
+        </p:txBody>
+      </p:sp>
+      <p:sp>
+        <p:nvSpPr>
+          <p:cNvPr id="7" name="TextBox 6"/>
+          <p:cNvSpPr txBox="1"/>
+          <p:nvPr/>
+        </p:nvSpPr>
+        <p:spPr>
+          <a:xfrm>
+            <a:off x="5257800" y="2668905"/>
+            <a:ext cx="1828800" cy="914400"/>
+          </a:xfrm>
+          <a:prstGeom prst="rect">
+            <a:avLst/>
+          </a:prstGeom>
+          <a:noFill/>
+        </p:spPr>
+        <p:txBody>
+          <a:bodyPr wrap="square" lIns="0" rIns="0" tIns="0" bIns="0">
+            <a:spAutoFit/>
+          </a:bodyPr>
+          <a:lstStyle/>
+          <a:p>
+            <a:pPr algn="ctr">
+              <a:spcAft>
+                <a:spcPts val="300"/>
+              </a:spcAft>
+              <a:defRPr sz="1000" b="0">
+                <a:solidFill>
+                  <a:srgbClr val="FFFFFF"/>
+                </a:solidFill>
+                <a:latin typeface="Source Sans Pro"/>
+              </a:defRPr>
+            </a:pPr>
+            <a:r>
+              <a:t>Deep Teal</a:t>
+            </a:r>
+          </a:p>
+          <a:p>
+            <a:pPr algn="ctr">
+              <a:spcAft>
+                <a:spcPts val="300"/>
+              </a:spcAft>
+              <a:defRPr sz="1000" b="0">
+                <a:solidFill>
+                  <a:srgbClr val="FFFFFF"/>
+                </a:solidFill>
+                <a:latin typeface="Source Sans Pro"/>
+              </a:defRPr>
+            </a:pPr>
+            <a:r>
+              <a:t>#145C61</a:t>
+            </a:r>
+          </a:p>
+          <a:p>
+            <a:pPr algn="ctr">
+              <a:spcAft>
+                <a:spcPts val="300"/>
+              </a:spcAft>
+              <a:defRPr sz="1000" b="0">
+                <a:solidFill>
+                  <a:srgbClr val="FFFFFF"/>
+                </a:solidFill>
+                <a:latin typeface="Source Sans Pro"/>
+              </a:defRPr>
+            </a:pPr>
+            <a:r>
+              <a:t>Use Light Text</a:t>
+            </a:r>
+          </a:p>
+        </p:txBody>
+      </p:sp>
+      <p:sp>
+        <p:nvSpPr>
+          <p:cNvPr id="8" name="Rectangle 7"/>
+          <p:cNvSpPr/>
+          <p:nvPr/>
+        </p:nvSpPr>
+        <p:spPr>
+          <a:xfrm>
+            <a:off x="2171700" y="3429000"/>
+            <a:ext cx="1828800" cy="914400"/>
+          </a:xfrm>
+          <a:prstGeom prst="rect">
+            <a:avLst/>
+          </a:prstGeom>
+          <a:solidFill>
+            <a:srgbClr val="5CA4B7"/>
+          </a:solidFill>
+          <a:ln w="25400">
+            <a:solidFill>
+              <a:srgbClr val="FFFFFF"/>
+            </a:solidFill>
+          </a:ln>
+        </p:spPr>
+        <p:style>
+          <a:lnRef idx="1">
+            <a:schemeClr val="accent1"/>
+          </a:lnRef>
+          <a:fillRef idx="3">
+            <a:schemeClr val="accent1"/>
+          </a:fillRef>
+          <a:effectRef idx="2">
+            <a:schemeClr val="accent1"/>
+          </a:effectRef>
+          <a:fontRef idx="minor">
+            <a:schemeClr val="lt1"/>
+          </a:fontRef>
+        </p:style>
+        <p:txBody>
+          <a:bodyPr rtlCol="0" anchor="ctr"/>
+          <a:lstStyle/>
+          <a:p>
+            <a:pPr algn="ctr"/>
+          </a:p>
+        </p:txBody>
+      </p:sp>
+      <p:sp>
+        <p:nvSpPr>
+          <p:cNvPr id="9" name="TextBox 8"/>
+          <p:cNvSpPr txBox="1"/>
+          <p:nvPr/>
+        </p:nvSpPr>
+        <p:spPr>
+          <a:xfrm>
+            <a:off x="2171700" y="4526280"/>
+            <a:ext cx="1828800" cy="914400"/>
+          </a:xfrm>
+          <a:prstGeom prst="rect">
+            <a:avLst/>
+          </a:prstGeom>
+          <a:noFill/>
+        </p:spPr>
+        <p:txBody>
+          <a:bodyPr wrap="square" lIns="0" rIns="0" tIns="0" bIns="0">
+            <a:spAutoFit/>
+          </a:bodyPr>
+          <a:lstStyle/>
+          <a:p>
+            <a:pPr algn="ctr">
+              <a:spcAft>
+                <a:spcPts val="300"/>
+              </a:spcAft>
+              <a:defRPr sz="1000" b="0">
+                <a:solidFill>
+                  <a:srgbClr val="FFFFFF"/>
+                </a:solidFill>
+                <a:latin typeface="Source Sans Pro"/>
+              </a:defRPr>
+            </a:pPr>
+            <a:r>
+              <a:t>Soft Blue</a:t>
+            </a:r>
+          </a:p>
+          <a:p>
+            <a:pPr algn="ctr">
+              <a:spcAft>
+                <a:spcPts val="300"/>
+              </a:spcAft>
+              <a:defRPr sz="1000" b="0">
+                <a:solidFill>
+                  <a:srgbClr val="FFFFFF"/>
+                </a:solidFill>
+                <a:latin typeface="Source Sans Pro"/>
+              </a:defRPr>
+            </a:pPr>
+            <a:r>
+              <a:t>#5CA4B7</a:t>
+            </a:r>
+          </a:p>
+          <a:p>
+            <a:pPr algn="ctr">
+              <a:spcAft>
+                <a:spcPts val="300"/>
+              </a:spcAft>
+              <a:defRPr sz="1000" b="0">
+                <a:solidFill>
+                  <a:srgbClr val="FFFFFF"/>
+                </a:solidFill>
+                <a:latin typeface="Source Sans Pro"/>
+              </a:defRPr>
+            </a:pPr>
+            <a:r>
+              <a:t>Use Dark Text</a:t>
+            </a:r>
+          </a:p>
+        </p:txBody>
+      </p:sp>
+      <p:sp>
+        <p:nvSpPr>
+          <p:cNvPr id="10" name="Rectangle 9"/>
+          <p:cNvSpPr/>
+          <p:nvPr/>
+        </p:nvSpPr>
+        <p:spPr>
+          <a:xfrm>
+            <a:off x="4229100" y="3429000"/>
+            <a:ext cx="1828800" cy="914400"/>
+          </a:xfrm>
+          <a:prstGeom prst="rect">
+            <a:avLst/>
+          </a:prstGeom>
+          <a:solidFill>
+            <a:srgbClr val="708090"/>
+          </a:solidFill>
+          <a:ln w="25400">
+            <a:solidFill>
+              <a:srgbClr val="FFFFFF"/>
+            </a:solidFill>
+          </a:ln>
+        </p:spPr>
+        <p:style>
+          <a:lnRef idx="1">
+            <a:schemeClr val="accent1"/>
+          </a:lnRef>
+          <a:fillRef idx="3">
+            <a:schemeClr val="accent1"/>
+          </a:fillRef>
+          <a:effectRef idx="2">
+            <a:schemeClr val="accent1"/>
+          </a:effectRef>
+          <a:fontRef idx="minor">
+            <a:schemeClr val="lt1"/>
+          </a:fontRef>
+        </p:style>
+        <p:txBody>
+          <a:bodyPr rtlCol="0" anchor="ctr"/>
+          <a:lstStyle/>
+          <a:p>
+            <a:pPr algn="ctr"/>
+          </a:p>
+        </p:txBody>
+      </p:sp>
+      <p:sp>
+        <p:nvSpPr>
+          <p:cNvPr id="11" name="TextBox 10"/>
+          <p:cNvSpPr txBox="1"/>
+          <p:nvPr/>
+        </p:nvSpPr>
+        <p:spPr>
+          <a:xfrm>
+            <a:off x="4229100" y="4526280"/>
+            <a:ext cx="1828800" cy="914400"/>
+          </a:xfrm>
+          <a:prstGeom prst="rect">
+            <a:avLst/>
+          </a:prstGeom>
+          <a:noFill/>
+        </p:spPr>
+        <p:txBody>
+          <a:bodyPr wrap="square" lIns="0" rIns="0" tIns="0" bIns="0">
+            <a:spAutoFit/>
+          </a:bodyPr>
+          <a:lstStyle/>
+          <a:p>
+            <a:pPr algn="ctr">
+              <a:spcAft>
+                <a:spcPts val="300"/>
+              </a:spcAft>
+              <a:defRPr sz="1000" b="0">
+                <a:solidFill>
+                  <a:srgbClr val="FFFFFF"/>
+                </a:solidFill>
+                <a:latin typeface="Source Sans Pro"/>
+              </a:defRPr>
+            </a:pPr>
+            <a:r>
+              <a:t>Slate Gray</a:t>
+            </a:r>
+          </a:p>
+          <a:p>
+            <a:pPr algn="ctr">
+              <a:spcAft>
+                <a:spcPts val="300"/>
+              </a:spcAft>
+              <a:defRPr sz="1000" b="0">
+                <a:solidFill>
+                  <a:srgbClr val="FFFFFF"/>
+                </a:solidFill>
+                <a:latin typeface="Source Sans Pro"/>
+              </a:defRPr>
+            </a:pPr>
+            <a:r>
+              <a:t>#708090</a:t>
+            </a:r>
+          </a:p>
+          <a:p>
+            <a:pPr algn="ctr">
+              <a:spcAft>
+                <a:spcPts val="300"/>
+              </a:spcAft>
+              <a:defRPr sz="1000" b="0">
+                <a:solidFill>
+                  <a:srgbClr val="FFFFFF"/>
+                </a:solidFill>
+                <a:latin typeface="Source Sans Pro"/>
+              </a:defRPr>
+            </a:pPr>
+            <a:r>
+              <a:t>Use Dark Text</a:t>
+            </a:r>
+          </a:p>
+        </p:txBody>
+      </p:sp>
+      <p:cxnSp>
+        <p:nvCxnSpPr>
+          <p:cNvPr id="12" name="Connector 11"/>
+          <p:cNvCxnSpPr/>
+          <p:nvPr/>
+        </p:nvCxnSpPr>
+        <p:spPr>
+          <a:xfrm>
+            <a:off x="457200" y="5286375.0"/>
+            <a:ext cx="8229600" cy="0.0"/>
+          </a:xfrm>
+          <a:prstGeom prst="line">
+            <a:avLst/>
+          </a:prstGeom>
+          <a:ln w="25400">
+            <a:solidFill>
+              <a:srgbClr val="2E86AB"/>
+            </a:solidFill>
+          </a:ln>
+        </p:spPr>
+        <p:style>
+          <a:lnRef idx="2">
+            <a:schemeClr val="accent1"/>
+          </a:lnRef>
+          <a:fillRef idx="0">
+            <a:schemeClr val="accent1"/>
+          </a:fillRef>
+          <a:effectRef idx="1">
+            <a:schemeClr val="accent1"/>
+          </a:effectRef>
+          <a:fontRef idx="minor">
+            <a:schemeClr val="tx1"/>
+          </a:fontRef>
+        </p:style>
+      </p:cxnSp>
+      <p:sp>
+        <p:nvSpPr>
+          <p:cNvPr id="13" name="TextBox 12"/>
+          <p:cNvSpPr txBox="1"/>
+          <p:nvPr/>
+        </p:nvSpPr>
+        <p:spPr>
+          <a:xfrm>
+            <a:off x="457200" y="5560695"/>
+            <a:ext cx="5486400" cy="731520"/>
           </a:xfrm>
           <a:prstGeom prst="rect">
             <a:avLst/>
@@ -4014,8 +4570,8 @@
           </a:bodyPr>
           <a:lstStyle/>
           <a:p>
-            <a:pPr>
-              <a:defRPr sz="3200" b="1">
+            <a:pPr algn="l">
+              <a:defRPr sz="2800" b="1">
                 <a:solidFill>
                   <a:srgbClr val="2E86AB"/>
                 </a:solidFill>
@@ -4023,367 +4579,7 @@
               </a:defRPr>
             </a:pPr>
             <a:r>
-              <a:t>Typography</a:t>
-            </a:r>
-          </a:p>
-        </p:txBody>
-      </p:sp>
-      <p:sp>
-        <p:nvSpPr>
-          <p:cNvPr id="4" name="TextBox 3"/>
-          <p:cNvSpPr txBox="1"/>
-          <p:nvPr/>
-        </p:nvSpPr>
-        <p:spPr>
-          <a:xfrm>
-            <a:off x="1143000" y="1943100"/>
-            <a:ext cx="3429000" cy="742950"/>
-          </a:xfrm>
-          <a:prstGeom prst="rect">
-            <a:avLst/>
-          </a:prstGeom>
-          <a:noFill/>
-        </p:spPr>
-        <p:txBody>
-          <a:bodyPr wrap="none">
-            <a:spAutoFit/>
-          </a:bodyPr>
-          <a:lstStyle/>
-          <a:p>
-            <a:pPr>
-              <a:defRPr sz="2000" b="0">
-                <a:solidFill>
-                  <a:srgbClr val="2E86AB"/>
-                </a:solidFill>
-                <a:latin typeface="Source Sans Pro"/>
-              </a:defRPr>
-            </a:pPr>
-            <a:r>
-              <a:t>Primary Font: Inter</a:t>
-            </a:r>
-          </a:p>
-        </p:txBody>
-      </p:sp>
-      <p:sp>
-        <p:nvSpPr>
-          <p:cNvPr id="5" name="TextBox 4"/>
-          <p:cNvSpPr txBox="1"/>
-          <p:nvPr/>
-        </p:nvSpPr>
-        <p:spPr>
-          <a:xfrm>
-            <a:off x="1143000" y="2686050"/>
-            <a:ext cx="3429000" cy="742950"/>
-          </a:xfrm>
-          <a:prstGeom prst="rect">
-            <a:avLst/>
-          </a:prstGeom>
-          <a:noFill/>
-        </p:spPr>
-        <p:txBody>
-          <a:bodyPr wrap="none">
-            <a:spAutoFit/>
-          </a:bodyPr>
-          <a:lstStyle/>
-          <a:p>
-            <a:pPr>
-              <a:defRPr sz="3200" b="1">
-                <a:solidFill>
-                  <a:srgbClr val="2E86AB"/>
-                </a:solidFill>
-                <a:latin typeface="Inter"/>
-              </a:defRPr>
-            </a:pPr>
-            <a:r>
-              <a:t>H1 Heading</a:t>
-            </a:r>
-          </a:p>
-        </p:txBody>
-      </p:sp>
-      <p:sp>
-        <p:nvSpPr>
-          <p:cNvPr id="6" name="TextBox 5"/>
-          <p:cNvSpPr txBox="1"/>
-          <p:nvPr/>
-        </p:nvSpPr>
-        <p:spPr>
-          <a:xfrm>
-            <a:off x="1143000" y="3429000"/>
-            <a:ext cx="3429000" cy="742950"/>
-          </a:xfrm>
-          <a:prstGeom prst="rect">
-            <a:avLst/>
-          </a:prstGeom>
-          <a:noFill/>
-        </p:spPr>
-        <p:txBody>
-          <a:bodyPr wrap="none">
-            <a:spAutoFit/>
-          </a:bodyPr>
-          <a:lstStyle/>
-          <a:p>
-            <a:pPr>
-              <a:defRPr sz="2400" b="1">
-                <a:solidFill>
-                  <a:srgbClr val="2E86AB"/>
-                </a:solidFill>
-                <a:latin typeface="Inter"/>
-              </a:defRPr>
-            </a:pPr>
-            <a:r>
-              <a:t>H2 Heading</a:t>
-            </a:r>
-          </a:p>
-        </p:txBody>
-      </p:sp>
-      <p:sp>
-        <p:nvSpPr>
-          <p:cNvPr id="7" name="TextBox 6"/>
-          <p:cNvSpPr txBox="1"/>
-          <p:nvPr/>
-        </p:nvSpPr>
-        <p:spPr>
-          <a:xfrm>
-            <a:off x="1143000" y="4171950"/>
-            <a:ext cx="3429000" cy="742950"/>
-          </a:xfrm>
-          <a:prstGeom prst="rect">
-            <a:avLst/>
-          </a:prstGeom>
-          <a:noFill/>
-        </p:spPr>
-        <p:txBody>
-          <a:bodyPr wrap="none">
-            <a:spAutoFit/>
-          </a:bodyPr>
-          <a:lstStyle/>
-          <a:p>
-            <a:pPr>
-              <a:defRPr sz="2000" b="0">
-                <a:solidFill>
-                  <a:srgbClr val="2E86AB"/>
-                </a:solidFill>
-                <a:latin typeface="Inter"/>
-              </a:defRPr>
-            </a:pPr>
-            <a:r>
-              <a:t>H3 Heading</a:t>
-            </a:r>
-          </a:p>
-        </p:txBody>
-      </p:sp>
-      <p:sp>
-        <p:nvSpPr>
-          <p:cNvPr id="8" name="TextBox 7"/>
-          <p:cNvSpPr txBox="1"/>
-          <p:nvPr/>
-        </p:nvSpPr>
-        <p:spPr>
-          <a:xfrm>
-            <a:off x="5257800" y="1943100"/>
-            <a:ext cx="3429000" cy="742950"/>
-          </a:xfrm>
-          <a:prstGeom prst="rect">
-            <a:avLst/>
-          </a:prstGeom>
-          <a:noFill/>
-        </p:spPr>
-        <p:txBody>
-          <a:bodyPr wrap="none">
-            <a:spAutoFit/>
-          </a:bodyPr>
-          <a:lstStyle/>
-          <a:p>
-            <a:pPr>
-              <a:defRPr sz="2000" b="0">
-                <a:solidFill>
-                  <a:srgbClr val="2E86AB"/>
-                </a:solidFill>
-                <a:latin typeface="Source Sans Pro"/>
-              </a:defRPr>
-            </a:pPr>
-            <a:r>
-              <a:t>Secondary Font: Source Sans Pro</a:t>
-            </a:r>
-          </a:p>
-        </p:txBody>
-      </p:sp>
-      <p:sp>
-        <p:nvSpPr>
-          <p:cNvPr id="9" name="TextBox 8"/>
-          <p:cNvSpPr txBox="1"/>
-          <p:nvPr/>
-        </p:nvSpPr>
-        <p:spPr>
-          <a:xfrm>
-            <a:off x="5257800" y="2686050"/>
-            <a:ext cx="3429000" cy="742950"/>
-          </a:xfrm>
-          <a:prstGeom prst="rect">
-            <a:avLst/>
-          </a:prstGeom>
-          <a:noFill/>
-        </p:spPr>
-        <p:txBody>
-          <a:bodyPr wrap="none">
-            <a:spAutoFit/>
-          </a:bodyPr>
-          <a:lstStyle/>
-          <a:p>
-            <a:pPr>
-              <a:defRPr sz="1600" b="0">
-                <a:solidFill>
-                  <a:srgbClr val="2E86AB"/>
-                </a:solidFill>
-                <a:latin typeface="Source Sans Pro"/>
-              </a:defRPr>
-            </a:pPr>
-            <a:r>
-              <a:t>Body Text</a:t>
-            </a:r>
-          </a:p>
-        </p:txBody>
-      </p:sp>
-      <p:sp>
-        <p:nvSpPr>
-          <p:cNvPr id="10" name="TextBox 9"/>
-          <p:cNvSpPr txBox="1"/>
-          <p:nvPr/>
-        </p:nvSpPr>
-        <p:spPr>
-          <a:xfrm>
-            <a:off x="5257800" y="3429000"/>
-            <a:ext cx="3429000" cy="742950"/>
-          </a:xfrm>
-          <a:prstGeom prst="rect">
-            <a:avLst/>
-          </a:prstGeom>
-          <a:noFill/>
-        </p:spPr>
-        <p:txBody>
-          <a:bodyPr wrap="none">
-            <a:spAutoFit/>
-          </a:bodyPr>
-          <a:lstStyle/>
-          <a:p>
-            <a:pPr>
-              <a:defRPr sz="1600" b="1">
-                <a:solidFill>
-                  <a:srgbClr val="2E86AB"/>
-                </a:solidFill>
-                <a:latin typeface="Source Sans Pro"/>
-              </a:defRPr>
-            </a:pPr>
-            <a:r>
-              <a:t>Body Bold</a:t>
-            </a:r>
-          </a:p>
-        </p:txBody>
-      </p:sp>
-      <p:sp>
-        <p:nvSpPr>
-          <p:cNvPr id="11" name="TextBox 10"/>
-          <p:cNvSpPr txBox="1"/>
-          <p:nvPr/>
-        </p:nvSpPr>
-        <p:spPr>
-          <a:xfrm>
-            <a:off x="5257800" y="4171950"/>
-            <a:ext cx="3429000" cy="742950"/>
-          </a:xfrm>
-          <a:prstGeom prst="rect">
-            <a:avLst/>
-          </a:prstGeom>
-          <a:noFill/>
-        </p:spPr>
-        <p:txBody>
-          <a:bodyPr wrap="none">
-            <a:spAutoFit/>
-          </a:bodyPr>
-          <a:lstStyle/>
-          <a:p>
-            <a:pPr>
-              <a:defRPr sz="1200" b="0">
-                <a:solidFill>
-                  <a:srgbClr val="2E86AB"/>
-                </a:solidFill>
-                <a:latin typeface="Source Sans Pro"/>
-              </a:defRPr>
-            </a:pPr>
-            <a:r>
-              <a:t>Caption Text</a:t>
-            </a:r>
-          </a:p>
-        </p:txBody>
-      </p:sp>
-      <p:sp>
-        <p:nvSpPr>
-          <p:cNvPr id="12" name="TextBox 11"/>
-          <p:cNvSpPr txBox="1"/>
-          <p:nvPr/>
-        </p:nvSpPr>
-        <p:spPr>
-          <a:xfrm>
-            <a:off x="457200" y="5657850"/>
-            <a:ext cx="4114800" cy="742950"/>
-          </a:xfrm>
-          <a:prstGeom prst="rect">
-            <a:avLst/>
-          </a:prstGeom>
-          <a:noFill/>
-        </p:spPr>
-        <p:txBody>
-          <a:bodyPr wrap="none">
-            <a:spAutoFit/>
-          </a:bodyPr>
-          <a:lstStyle/>
-          <a:p>
-            <a:pPr algn="l">
-              <a:defRPr sz="1000" b="0">
-                <a:solidFill>
-                  <a:srgbClr val="2E86AB"/>
-                </a:solidFill>
-                <a:latin typeface="Source Sans Pro"/>
-              </a:defRPr>
-            </a:pPr>
-            <a:r>
-              <a:t>TechForward Live</a:t>
-            </a:r>
-          </a:p>
-        </p:txBody>
-      </p:sp>
-      <p:sp>
-        <p:nvSpPr>
-          <p:cNvPr id="13" name="TextBox 12"/>
-          <p:cNvSpPr txBox="1"/>
-          <p:nvPr/>
-        </p:nvSpPr>
-        <p:spPr>
-          <a:xfrm>
-            <a:off x="4572000" y="5657850"/>
-            <a:ext cx="4114800" cy="742950"/>
-          </a:xfrm>
-          <a:prstGeom prst="rect">
-            <a:avLst/>
-          </a:prstGeom>
-          <a:noFill/>
-        </p:spPr>
-        <p:txBody>
-          <a:bodyPr wrap="none">
-            <a:spAutoFit/>
-          </a:bodyPr>
-          <a:lstStyle/>
-          <a:p>
-            <a:pPr algn="r">
-              <a:defRPr sz="1000" b="0">
-                <a:solidFill>
-                  <a:srgbClr val="2E86AB"/>
-                </a:solidFill>
-                <a:latin typeface="Source Sans Pro"/>
-              </a:defRPr>
-            </a:pPr>
-            <a:r>
-              <a:t>12</a:t>
+              <a:t>Secondary Colors</a:t>
             </a:r>
           </a:p>
         </p:txBody>
@@ -4399,12 +4595,948 @@
 <file path=ppt/slides/slide13.xml><?xml version="1.0" encoding="utf-8"?>
 <p:sld xmlns:a="http://schemas.openxmlformats.org/drawingml/2006/main" xmlns:p="http://schemas.openxmlformats.org/presentationml/2006/main" xmlns:r="http://schemas.openxmlformats.org/officeDocument/2006/relationships">
   <p:cSld>
+    <p:bg>
+      <p:bgPr>
+        <a:solidFill>
+          <a:srgbClr val="000000"/>
+        </a:solidFill>
+        <a:effectLst/>
+      </p:bgPr>
+    </p:bg>
     <p:spTree>
       <p:nvGrpSpPr>
         <p:cNvPr id="1" name=""/>
         <p:cNvGrpSpPr/>
         <p:nvPr/>
       </p:nvGrpSpPr>
+      <p:grpSpPr/>
+      <p:sp>
+        <p:nvSpPr>
+          <p:cNvPr id="2" name="TextBox 1"/>
+          <p:cNvSpPr txBox="1"/>
+          <p:nvPr/>
+        </p:nvSpPr>
+        <p:spPr>
+          <a:xfrm>
+            <a:off x="800100" y="1051560"/>
+            <a:ext cx="6858000" cy="3714750"/>
+          </a:xfrm>
+          <a:prstGeom prst="rect">
+            <a:avLst/>
+          </a:prstGeom>
+          <a:noFill/>
+        </p:spPr>
+        <p:txBody>
+          <a:bodyPr wrap="square" lIns="0" rIns="0" tIns="0" bIns="0">
+            <a:spAutoFit/>
+          </a:bodyPr>
+          <a:lstStyle/>
+          <a:p>
+            <a:pPr algn="l">
+              <a:spcAft>
+                <a:spcPts val="800"/>
+              </a:spcAft>
+              <a:defRPr sz="1600" b="0">
+                <a:solidFill>
+                  <a:srgbClr val="FFFFFF"/>
+                </a:solidFill>
+                <a:latin typeface="Source Sans Pro"/>
+              </a:defRPr>
+            </a:pPr>
+            <a:r>
+              <a:t>Primary Color Usage Guidelines</a:t>
+            </a:r>
+          </a:p>
+          <a:p>
+            <a:pPr algn="l">
+              <a:spcAft>
+                <a:spcPts val="800"/>
+              </a:spcAft>
+              <a:defRPr sz="1600" b="0">
+                <a:solidFill>
+                  <a:srgbClr val="FFFFFF"/>
+                </a:solidFill>
+                <a:latin typeface="Source Sans Pro"/>
+              </a:defRPr>
+            </a:pPr>
+          </a:p>
+          <a:p>
+            <a:pPr algn="l">
+              <a:spcAft>
+                <a:spcPts val="800"/>
+              </a:spcAft>
+              <a:defRPr sz="1600" b="0">
+                <a:solidFill>
+                  <a:srgbClr val="FFFFFF"/>
+                </a:solidFill>
+                <a:latin typeface="Source Sans Pro"/>
+              </a:defRPr>
+            </a:pPr>
+            <a:r>
+              <a:t>Your primary colors are the foundation of your brand identity. Use them prominently in:</a:t>
+            </a:r>
+          </a:p>
+          <a:p>
+            <a:pPr algn="l">
+              <a:spcAft>
+                <a:spcPts val="800"/>
+              </a:spcAft>
+              <a:defRPr sz="1600" b="0">
+                <a:solidFill>
+                  <a:srgbClr val="FFFFFF"/>
+                </a:solidFill>
+                <a:latin typeface="Source Sans Pro"/>
+              </a:defRPr>
+            </a:pPr>
+          </a:p>
+          <a:p>
+            <a:pPr algn="l">
+              <a:spcAft>
+                <a:spcPts val="800"/>
+              </a:spcAft>
+              <a:defRPr sz="1600" b="0">
+                <a:solidFill>
+                  <a:srgbClr val="FFFFFF"/>
+                </a:solidFill>
+                <a:latin typeface="Source Sans Pro"/>
+              </a:defRPr>
+            </a:pPr>
+            <a:r>
+              <a:t>• Brand logos and primary brand marks</a:t>
+            </a:r>
+          </a:p>
+          <a:p>
+            <a:pPr algn="l">
+              <a:spcAft>
+                <a:spcPts val="800"/>
+              </a:spcAft>
+              <a:defRPr sz="1600" b="0">
+                <a:solidFill>
+                  <a:srgbClr val="FFFFFF"/>
+                </a:solidFill>
+                <a:latin typeface="Source Sans Pro"/>
+              </a:defRPr>
+            </a:pPr>
+            <a:r>
+              <a:t>• Headlines and primary text elements</a:t>
+            </a:r>
+          </a:p>
+          <a:p>
+            <a:pPr algn="l">
+              <a:spcAft>
+                <a:spcPts val="800"/>
+              </a:spcAft>
+              <a:defRPr sz="1600" b="0">
+                <a:solidFill>
+                  <a:srgbClr val="FFFFFF"/>
+                </a:solidFill>
+                <a:latin typeface="Source Sans Pro"/>
+              </a:defRPr>
+            </a:pPr>
+            <a:r>
+              <a:t>• Call-to-action buttons and key interactive elements</a:t>
+            </a:r>
+          </a:p>
+          <a:p>
+            <a:pPr algn="l">
+              <a:spcAft>
+                <a:spcPts val="800"/>
+              </a:spcAft>
+              <a:defRPr sz="1600" b="0">
+                <a:solidFill>
+                  <a:srgbClr val="FFFFFF"/>
+                </a:solidFill>
+                <a:latin typeface="Source Sans Pro"/>
+              </a:defRPr>
+            </a:pPr>
+            <a:r>
+              <a:t>• Primary navigation and menu items</a:t>
+            </a:r>
+          </a:p>
+          <a:p>
+            <a:pPr algn="l">
+              <a:spcAft>
+                <a:spcPts val="800"/>
+              </a:spcAft>
+              <a:defRPr sz="1600" b="0">
+                <a:solidFill>
+                  <a:srgbClr val="FFFFFF"/>
+                </a:solidFill>
+                <a:latin typeface="Source Sans Pro"/>
+              </a:defRPr>
+            </a:pPr>
+            <a:r>
+              <a:t>• Hero sections and main content areas</a:t>
+            </a:r>
+          </a:p>
+          <a:p>
+            <a:pPr algn="l">
+              <a:spcAft>
+                <a:spcPts val="800"/>
+              </a:spcAft>
+              <a:defRPr sz="1600" b="0">
+                <a:solidFill>
+                  <a:srgbClr val="FFFFFF"/>
+                </a:solidFill>
+                <a:latin typeface="Source Sans Pro"/>
+              </a:defRPr>
+            </a:pPr>
+          </a:p>
+          <a:p>
+            <a:pPr algn="l">
+              <a:spcAft>
+                <a:spcPts val="800"/>
+              </a:spcAft>
+              <a:defRPr sz="1600" b="0">
+                <a:solidFill>
+                  <a:srgbClr val="FFFFFF"/>
+                </a:solidFill>
+                <a:latin typeface="Source Sans Pro"/>
+              </a:defRPr>
+            </a:pPr>
+            <a:r>
+              <a:t>Primary Colors: Primary Blue, Accent Teal, Deep Navy</a:t>
+            </a:r>
+          </a:p>
+          <a:p>
+            <a:pPr algn="l">
+              <a:spcAft>
+                <a:spcPts val="800"/>
+              </a:spcAft>
+              <a:defRPr sz="1600" b="0">
+                <a:solidFill>
+                  <a:srgbClr val="FFFFFF"/>
+                </a:solidFill>
+                <a:latin typeface="Source Sans Pro"/>
+              </a:defRPr>
+            </a:pPr>
+          </a:p>
+          <a:p>
+            <a:pPr algn="l">
+              <a:spcAft>
+                <a:spcPts val="800"/>
+              </a:spcAft>
+              <a:defRPr sz="1600" b="0">
+                <a:solidFill>
+                  <a:srgbClr val="FFFFFF"/>
+                </a:solidFill>
+                <a:latin typeface="Source Sans Pro"/>
+              </a:defRPr>
+            </a:pPr>
+            <a:r>
+              <a:t>Best Practices:</a:t>
+            </a:r>
+          </a:p>
+          <a:p>
+            <a:pPr algn="l">
+              <a:spcAft>
+                <a:spcPts val="800"/>
+              </a:spcAft>
+              <a:defRPr sz="1600" b="0">
+                <a:solidFill>
+                  <a:srgbClr val="FFFFFF"/>
+                </a:solidFill>
+                <a:latin typeface="Source Sans Pro"/>
+              </a:defRPr>
+            </a:pPr>
+            <a:r>
+              <a:t>- Use primary colors for maximum brand recognition</a:t>
+            </a:r>
+          </a:p>
+          <a:p>
+            <a:pPr algn="l">
+              <a:spcAft>
+                <a:spcPts val="800"/>
+              </a:spcAft>
+              <a:defRPr sz="1600" b="0">
+                <a:solidFill>
+                  <a:srgbClr val="FFFFFF"/>
+                </a:solidFill>
+                <a:latin typeface="Source Sans Pro"/>
+              </a:defRPr>
+            </a:pPr>
+            <a:r>
+              <a:t>- Maintain sufficient contrast with background elements</a:t>
+            </a:r>
+          </a:p>
+          <a:p>
+            <a:pPr algn="l">
+              <a:spcAft>
+                <a:spcPts val="800"/>
+              </a:spcAft>
+              <a:defRPr sz="1600" b="0">
+                <a:solidFill>
+                  <a:srgbClr val="FFFFFF"/>
+                </a:solidFill>
+                <a:latin typeface="Source Sans Pro"/>
+              </a:defRPr>
+            </a:pPr>
+            <a:r>
+              <a:t>- Apply consistently across all brand touchpoints</a:t>
+            </a:r>
+          </a:p>
+          <a:p>
+            <a:pPr algn="l">
+              <a:spcAft>
+                <a:spcPts val="800"/>
+              </a:spcAft>
+              <a:defRPr sz="1600" b="0">
+                <a:solidFill>
+                  <a:srgbClr val="FFFFFF"/>
+                </a:solidFill>
+                <a:latin typeface="Source Sans Pro"/>
+              </a:defRPr>
+            </a:pPr>
+            <a:r>
+              <a:t>- Reserve for the most important visual elements</a:t>
+            </a:r>
+          </a:p>
+          <a:p>
+            <a:pPr algn="l">
+              <a:spcAft>
+                <a:spcPts val="800"/>
+              </a:spcAft>
+              <a:defRPr sz="1600" b="0">
+                <a:solidFill>
+                  <a:srgbClr val="FFFFFF"/>
+                </a:solidFill>
+                <a:latin typeface="Source Sans Pro"/>
+              </a:defRPr>
+            </a:pPr>
+            <a:r>
+              <a:t>- Ensure accessibility compliance in all applications</a:t>
+            </a:r>
+          </a:p>
+        </p:txBody>
+      </p:sp>
+      <p:cxnSp>
+        <p:nvCxnSpPr>
+          <p:cNvPr id="3" name="Connector 2"/>
+          <p:cNvCxnSpPr/>
+          <p:nvPr/>
+        </p:nvCxnSpPr>
+        <p:spPr>
+          <a:xfrm>
+            <a:off x="457200" y="5286375.0"/>
+            <a:ext cx="8229600" cy="0.0"/>
+          </a:xfrm>
+          <a:prstGeom prst="line">
+            <a:avLst/>
+          </a:prstGeom>
+          <a:ln w="25400">
+            <a:solidFill>
+              <a:srgbClr val="2E86AB"/>
+            </a:solidFill>
+          </a:ln>
+        </p:spPr>
+        <p:style>
+          <a:lnRef idx="2">
+            <a:schemeClr val="accent1"/>
+          </a:lnRef>
+          <a:fillRef idx="0">
+            <a:schemeClr val="accent1"/>
+          </a:fillRef>
+          <a:effectRef idx="1">
+            <a:schemeClr val="accent1"/>
+          </a:effectRef>
+          <a:fontRef idx="minor">
+            <a:schemeClr val="tx1"/>
+          </a:fontRef>
+        </p:style>
+      </p:cxnSp>
+      <p:sp>
+        <p:nvSpPr>
+          <p:cNvPr id="4" name="TextBox 3"/>
+          <p:cNvSpPr txBox="1"/>
+          <p:nvPr/>
+        </p:nvSpPr>
+        <p:spPr>
+          <a:xfrm>
+            <a:off x="457200" y="5560695"/>
+            <a:ext cx="5486400" cy="731520"/>
+          </a:xfrm>
+          <a:prstGeom prst="rect">
+            <a:avLst/>
+          </a:prstGeom>
+          <a:noFill/>
+        </p:spPr>
+        <p:txBody>
+          <a:bodyPr wrap="none">
+            <a:spAutoFit/>
+          </a:bodyPr>
+          <a:lstStyle/>
+          <a:p>
+            <a:pPr algn="l">
+              <a:defRPr sz="2800" b="1">
+                <a:solidFill>
+                  <a:srgbClr val="2E86AB"/>
+                </a:solidFill>
+                <a:latin typeface="Inter"/>
+              </a:defRPr>
+            </a:pPr>
+            <a:r>
+              <a:t>Color Usage 1/2</a:t>
+            </a:r>
+          </a:p>
+        </p:txBody>
+      </p:sp>
+      <p:sp>
+        <p:nvSpPr>
+          <p:cNvPr id="5" name="TextBox 4"/>
+          <p:cNvSpPr txBox="1"/>
+          <p:nvPr/>
+        </p:nvSpPr>
+        <p:spPr>
+          <a:xfrm>
+            <a:off x="457200" y="5657850"/>
+            <a:ext cx="4114800" cy="742950"/>
+          </a:xfrm>
+          <a:prstGeom prst="rect">
+            <a:avLst/>
+          </a:prstGeom>
+          <a:noFill/>
+        </p:spPr>
+        <p:txBody>
+          <a:bodyPr wrap="none">
+            <a:spAutoFit/>
+          </a:bodyPr>
+          <a:lstStyle/>
+          <a:p>
+            <a:pPr algn="l">
+              <a:defRPr sz="1000" b="0">
+                <a:solidFill>
+                  <a:srgbClr val="FFFFFF"/>
+                </a:solidFill>
+                <a:latin typeface="Source Sans Pro"/>
+              </a:defRPr>
+            </a:pPr>
+            <a:r>
+              <a:t>TechForward Live</a:t>
+            </a:r>
+          </a:p>
+        </p:txBody>
+      </p:sp>
+      <p:sp>
+        <p:nvSpPr>
+          <p:cNvPr id="6" name="TextBox 5"/>
+          <p:cNvSpPr txBox="1"/>
+          <p:nvPr/>
+        </p:nvSpPr>
+        <p:spPr>
+          <a:xfrm>
+            <a:off x="4572000" y="5657850"/>
+            <a:ext cx="4114800" cy="742950"/>
+          </a:xfrm>
+          <a:prstGeom prst="rect">
+            <a:avLst/>
+          </a:prstGeom>
+          <a:noFill/>
+        </p:spPr>
+        <p:txBody>
+          <a:bodyPr wrap="none">
+            <a:spAutoFit/>
+          </a:bodyPr>
+          <a:lstStyle/>
+          <a:p>
+            <a:pPr algn="r">
+              <a:defRPr sz="1000" b="0">
+                <a:solidFill>
+                  <a:srgbClr val="FFFFFF"/>
+                </a:solidFill>
+                <a:latin typeface="Source Sans Pro"/>
+              </a:defRPr>
+            </a:pPr>
+            <a:r>
+              <a:t>13</a:t>
+            </a:r>
+          </a:p>
+        </p:txBody>
+      </p:sp>
+    </p:spTree>
+  </p:cSld>
+  <p:clrMapOvr>
+    <a:masterClrMapping/>
+  </p:clrMapOvr>
+</p:sld>
+</file>
+
+<file path=ppt/slides/slide14.xml><?xml version="1.0" encoding="utf-8"?>
+<p:sld xmlns:a="http://schemas.openxmlformats.org/drawingml/2006/main" xmlns:p="http://schemas.openxmlformats.org/presentationml/2006/main" xmlns:r="http://schemas.openxmlformats.org/officeDocument/2006/relationships">
+  <p:cSld>
+    <p:bg>
+      <p:bgPr>
+        <a:solidFill>
+          <a:srgbClr val="000000"/>
+        </a:solidFill>
+        <a:effectLst/>
+      </p:bgPr>
+    </p:bg>
+    <p:spTree>
+      <p:nvGrpSpPr>
+        <p:cNvPr id="1" name=""/>
+        <p:cNvGrpSpPr/>
+        <p:nvPr/>
+      </p:nvGrpSpPr>
+      <p:grpSpPr/>
+      <p:sp>
+        <p:nvSpPr>
+          <p:cNvPr id="2" name="TextBox 1"/>
+          <p:cNvSpPr txBox="1"/>
+          <p:nvPr/>
+        </p:nvSpPr>
+        <p:spPr>
+          <a:xfrm>
+            <a:off x="800100" y="1051560"/>
+            <a:ext cx="6858000" cy="3714750"/>
+          </a:xfrm>
+          <a:prstGeom prst="rect">
+            <a:avLst/>
+          </a:prstGeom>
+          <a:noFill/>
+        </p:spPr>
+        <p:txBody>
+          <a:bodyPr wrap="square" lIns="0" rIns="0" tIns="0" bIns="0">
+            <a:spAutoFit/>
+          </a:bodyPr>
+          <a:lstStyle/>
+          <a:p>
+            <a:pPr algn="l">
+              <a:spcAft>
+                <a:spcPts val="800"/>
+              </a:spcAft>
+              <a:defRPr sz="1600" b="0">
+                <a:solidFill>
+                  <a:srgbClr val="FFFFFF"/>
+                </a:solidFill>
+                <a:latin typeface="Source Sans Pro"/>
+              </a:defRPr>
+            </a:pPr>
+            <a:r>
+              <a:t>Secondary Color Usage Guidelines</a:t>
+            </a:r>
+          </a:p>
+          <a:p>
+            <a:pPr algn="l">
+              <a:spcAft>
+                <a:spcPts val="800"/>
+              </a:spcAft>
+              <a:defRPr sz="1600" b="0">
+                <a:solidFill>
+                  <a:srgbClr val="FFFFFF"/>
+                </a:solidFill>
+                <a:latin typeface="Source Sans Pro"/>
+              </a:defRPr>
+            </a:pPr>
+          </a:p>
+          <a:p>
+            <a:pPr algn="l">
+              <a:spcAft>
+                <a:spcPts val="800"/>
+              </a:spcAft>
+              <a:defRPr sz="1600" b="0">
+                <a:solidFill>
+                  <a:srgbClr val="FFFFFF"/>
+                </a:solidFill>
+                <a:latin typeface="Source Sans Pro"/>
+              </a:defRPr>
+            </a:pPr>
+            <a:r>
+              <a:t>Secondary colors support and enhance your primary palette. Use them for:</a:t>
+            </a:r>
+          </a:p>
+          <a:p>
+            <a:pPr algn="l">
+              <a:spcAft>
+                <a:spcPts val="800"/>
+              </a:spcAft>
+              <a:defRPr sz="1600" b="0">
+                <a:solidFill>
+                  <a:srgbClr val="FFFFFF"/>
+                </a:solidFill>
+                <a:latin typeface="Source Sans Pro"/>
+              </a:defRPr>
+            </a:pPr>
+          </a:p>
+          <a:p>
+            <a:pPr algn="l">
+              <a:spcAft>
+                <a:spcPts val="800"/>
+              </a:spcAft>
+              <a:defRPr sz="1600" b="0">
+                <a:solidFill>
+                  <a:srgbClr val="FFFFFF"/>
+                </a:solidFill>
+                <a:latin typeface="Source Sans Pro"/>
+              </a:defRPr>
+            </a:pPr>
+            <a:r>
+              <a:t>• Background elements and subtle accents</a:t>
+            </a:r>
+          </a:p>
+          <a:p>
+            <a:pPr algn="l">
+              <a:spcAft>
+                <a:spcPts val="800"/>
+              </a:spcAft>
+              <a:defRPr sz="1600" b="0">
+                <a:solidFill>
+                  <a:srgbClr val="FFFFFF"/>
+                </a:solidFill>
+                <a:latin typeface="Source Sans Pro"/>
+              </a:defRPr>
+            </a:pPr>
+            <a:r>
+              <a:t>• Secondary text and supporting information</a:t>
+            </a:r>
+          </a:p>
+          <a:p>
+            <a:pPr algn="l">
+              <a:spcAft>
+                <a:spcPts val="800"/>
+              </a:spcAft>
+              <a:defRPr sz="1600" b="0">
+                <a:solidFill>
+                  <a:srgbClr val="FFFFFF"/>
+                </a:solidFill>
+                <a:latin typeface="Source Sans Pro"/>
+              </a:defRPr>
+            </a:pPr>
+            <a:r>
+              <a:t>• Borders, dividers, and structural elements</a:t>
+            </a:r>
+          </a:p>
+          <a:p>
+            <a:pPr algn="l">
+              <a:spcAft>
+                <a:spcPts val="800"/>
+              </a:spcAft>
+              <a:defRPr sz="1600" b="0">
+                <a:solidFill>
+                  <a:srgbClr val="FFFFFF"/>
+                </a:solidFill>
+                <a:latin typeface="Source Sans Pro"/>
+              </a:defRPr>
+            </a:pPr>
+            <a:r>
+              <a:t>• Hover states and interactive feedback</a:t>
+            </a:r>
+          </a:p>
+          <a:p>
+            <a:pPr algn="l">
+              <a:spcAft>
+                <a:spcPts val="800"/>
+              </a:spcAft>
+              <a:defRPr sz="1600" b="0">
+                <a:solidFill>
+                  <a:srgbClr val="FFFFFF"/>
+                </a:solidFill>
+                <a:latin typeface="Source Sans Pro"/>
+              </a:defRPr>
+            </a:pPr>
+            <a:r>
+              <a:t>• Icons and decorative elements</a:t>
+            </a:r>
+          </a:p>
+          <a:p>
+            <a:pPr algn="l">
+              <a:spcAft>
+                <a:spcPts val="800"/>
+              </a:spcAft>
+              <a:defRPr sz="1600" b="0">
+                <a:solidFill>
+                  <a:srgbClr val="FFFFFF"/>
+                </a:solidFill>
+                <a:latin typeface="Source Sans Pro"/>
+              </a:defRPr>
+            </a:pPr>
+          </a:p>
+          <a:p>
+            <a:pPr algn="l">
+              <a:spcAft>
+                <a:spcPts val="800"/>
+              </a:spcAft>
+              <a:defRPr sz="1600" b="0">
+                <a:solidFill>
+                  <a:srgbClr val="FFFFFF"/>
+                </a:solidFill>
+                <a:latin typeface="Source Sans Pro"/>
+              </a:defRPr>
+            </a:pPr>
+            <a:r>
+              <a:t>Secondary Colors: Light Gray, Pale Aqua, Deep Teal, Soft Blue, Slate Gray</a:t>
+            </a:r>
+          </a:p>
+          <a:p>
+            <a:pPr algn="l">
+              <a:spcAft>
+                <a:spcPts val="800"/>
+              </a:spcAft>
+              <a:defRPr sz="1600" b="0">
+                <a:solidFill>
+                  <a:srgbClr val="FFFFFF"/>
+                </a:solidFill>
+                <a:latin typeface="Source Sans Pro"/>
+              </a:defRPr>
+            </a:pPr>
+          </a:p>
+          <a:p>
+            <a:pPr algn="l">
+              <a:spcAft>
+                <a:spcPts val="800"/>
+              </a:spcAft>
+              <a:defRPr sz="1600" b="0">
+                <a:solidFill>
+                  <a:srgbClr val="FFFFFF"/>
+                </a:solidFill>
+                <a:latin typeface="Source Sans Pro"/>
+              </a:defRPr>
+            </a:pPr>
+            <a:r>
+              <a:t>Best Practices:</a:t>
+            </a:r>
+          </a:p>
+          <a:p>
+            <a:pPr algn="l">
+              <a:spcAft>
+                <a:spcPts val="800"/>
+              </a:spcAft>
+              <a:defRPr sz="1600" b="0">
+                <a:solidFill>
+                  <a:srgbClr val="FFFFFF"/>
+                </a:solidFill>
+                <a:latin typeface="Source Sans Pro"/>
+              </a:defRPr>
+            </a:pPr>
+            <a:r>
+              <a:t>- Use to create visual hierarchy and balance</a:t>
+            </a:r>
+          </a:p>
+          <a:p>
+            <a:pPr algn="l">
+              <a:spcAft>
+                <a:spcPts val="800"/>
+              </a:spcAft>
+              <a:defRPr sz="1600" b="0">
+                <a:solidFill>
+                  <a:srgbClr val="FFFFFF"/>
+                </a:solidFill>
+                <a:latin typeface="Source Sans Pro"/>
+              </a:defRPr>
+            </a:pPr>
+            <a:r>
+              <a:t>- Apply for backgrounds and supporting elements</a:t>
+            </a:r>
+          </a:p>
+          <a:p>
+            <a:pPr algn="l">
+              <a:spcAft>
+                <a:spcPts val="800"/>
+              </a:spcAft>
+              <a:defRPr sz="1600" b="0">
+                <a:solidFill>
+                  <a:srgbClr val="FFFFFF"/>
+                </a:solidFill>
+                <a:latin typeface="Source Sans Pro"/>
+              </a:defRPr>
+            </a:pPr>
+            <a:r>
+              <a:t>- Maintain readability with appropriate contrast</a:t>
+            </a:r>
+          </a:p>
+          <a:p>
+            <a:pPr algn="l">
+              <a:spcAft>
+                <a:spcPts val="800"/>
+              </a:spcAft>
+              <a:defRPr sz="1600" b="0">
+                <a:solidFill>
+                  <a:srgbClr val="FFFFFF"/>
+                </a:solidFill>
+                <a:latin typeface="Source Sans Pro"/>
+              </a:defRPr>
+            </a:pPr>
+            <a:r>
+              <a:t>- Use sparingly to avoid overwhelming the design</a:t>
+            </a:r>
+          </a:p>
+          <a:p>
+            <a:pPr algn="l">
+              <a:spcAft>
+                <a:spcPts val="800"/>
+              </a:spcAft>
+              <a:defRPr sz="1600" b="0">
+                <a:solidFill>
+                  <a:srgbClr val="FFFFFF"/>
+                </a:solidFill>
+                <a:latin typeface="Source Sans Pro"/>
+              </a:defRPr>
+            </a:pPr>
+            <a:r>
+              <a:t>- Complement, don't compete with primary colors</a:t>
+            </a:r>
+          </a:p>
+        </p:txBody>
+      </p:sp>
+      <p:cxnSp>
+        <p:nvCxnSpPr>
+          <p:cNvPr id="3" name="Connector 2"/>
+          <p:cNvCxnSpPr/>
+          <p:nvPr/>
+        </p:nvCxnSpPr>
+        <p:spPr>
+          <a:xfrm>
+            <a:off x="457200" y="5286375.0"/>
+            <a:ext cx="8229600" cy="0.0"/>
+          </a:xfrm>
+          <a:prstGeom prst="line">
+            <a:avLst/>
+          </a:prstGeom>
+          <a:ln w="25400">
+            <a:solidFill>
+              <a:srgbClr val="2E86AB"/>
+            </a:solidFill>
+          </a:ln>
+        </p:spPr>
+        <p:style>
+          <a:lnRef idx="2">
+            <a:schemeClr val="accent1"/>
+          </a:lnRef>
+          <a:fillRef idx="0">
+            <a:schemeClr val="accent1"/>
+          </a:fillRef>
+          <a:effectRef idx="1">
+            <a:schemeClr val="accent1"/>
+          </a:effectRef>
+          <a:fontRef idx="minor">
+            <a:schemeClr val="tx1"/>
+          </a:fontRef>
+        </p:style>
+      </p:cxnSp>
+      <p:sp>
+        <p:nvSpPr>
+          <p:cNvPr id="4" name="TextBox 3"/>
+          <p:cNvSpPr txBox="1"/>
+          <p:nvPr/>
+        </p:nvSpPr>
+        <p:spPr>
+          <a:xfrm>
+            <a:off x="457200" y="5560695"/>
+            <a:ext cx="5486400" cy="731520"/>
+          </a:xfrm>
+          <a:prstGeom prst="rect">
+            <a:avLst/>
+          </a:prstGeom>
+          <a:noFill/>
+        </p:spPr>
+        <p:txBody>
+          <a:bodyPr wrap="none">
+            <a:spAutoFit/>
+          </a:bodyPr>
+          <a:lstStyle/>
+          <a:p>
+            <a:pPr algn="l">
+              <a:defRPr sz="2800" b="1">
+                <a:solidFill>
+                  <a:srgbClr val="2E86AB"/>
+                </a:solidFill>
+                <a:latin typeface="Inter"/>
+              </a:defRPr>
+            </a:pPr>
+            <a:r>
+              <a:t>Color Usage 2/2</a:t>
+            </a:r>
+          </a:p>
+        </p:txBody>
+      </p:sp>
+      <p:sp>
+        <p:nvSpPr>
+          <p:cNvPr id="5" name="TextBox 4"/>
+          <p:cNvSpPr txBox="1"/>
+          <p:nvPr/>
+        </p:nvSpPr>
+        <p:spPr>
+          <a:xfrm>
+            <a:off x="457200" y="5657850"/>
+            <a:ext cx="4114800" cy="742950"/>
+          </a:xfrm>
+          <a:prstGeom prst="rect">
+            <a:avLst/>
+          </a:prstGeom>
+          <a:noFill/>
+        </p:spPr>
+        <p:txBody>
+          <a:bodyPr wrap="none">
+            <a:spAutoFit/>
+          </a:bodyPr>
+          <a:lstStyle/>
+          <a:p>
+            <a:pPr algn="l">
+              <a:defRPr sz="1000" b="0">
+                <a:solidFill>
+                  <a:srgbClr val="FFFFFF"/>
+                </a:solidFill>
+                <a:latin typeface="Source Sans Pro"/>
+              </a:defRPr>
+            </a:pPr>
+            <a:r>
+              <a:t>TechForward Live</a:t>
+            </a:r>
+          </a:p>
+        </p:txBody>
+      </p:sp>
+      <p:sp>
+        <p:nvSpPr>
+          <p:cNvPr id="6" name="TextBox 5"/>
+          <p:cNvSpPr txBox="1"/>
+          <p:nvPr/>
+        </p:nvSpPr>
+        <p:spPr>
+          <a:xfrm>
+            <a:off x="4572000" y="5657850"/>
+            <a:ext cx="4114800" cy="742950"/>
+          </a:xfrm>
+          <a:prstGeom prst="rect">
+            <a:avLst/>
+          </a:prstGeom>
+          <a:noFill/>
+        </p:spPr>
+        <p:txBody>
+          <a:bodyPr wrap="none">
+            <a:spAutoFit/>
+          </a:bodyPr>
+          <a:lstStyle/>
+          <a:p>
+            <a:pPr algn="r">
+              <a:defRPr sz="1000" b="0">
+                <a:solidFill>
+                  <a:srgbClr val="FFFFFF"/>
+                </a:solidFill>
+                <a:latin typeface="Source Sans Pro"/>
+              </a:defRPr>
+            </a:pPr>
+            <a:r>
+              <a:t>14</a:t>
+            </a:r>
+          </a:p>
+        </p:txBody>
+      </p:sp>
+    </p:spTree>
+  </p:cSld>
+  <p:clrMapOvr>
+    <a:masterClrMapping/>
+  </p:clrMapOvr>
+</p:sld>
+</file>
+
+<file path=ppt/slides/slide15.xml><?xml version="1.0" encoding="utf-8"?>
+<p:sld xmlns:a="http://schemas.openxmlformats.org/drawingml/2006/main" xmlns:p="http://schemas.openxmlformats.org/presentationml/2006/main" xmlns:r="http://schemas.openxmlformats.org/officeDocument/2006/relationships">
+  <p:cSld>
+    <p:spTree>
+      <p:nvGrpSpPr>
+        <p:cNvPr id="1" name=""/>
+        <p:cNvGrpSpPr/>
+        <p:nvPr/>
+      </p:nvGrpSpPr>
       <p:sp>
         <p:nvSpPr>
           <p:cNvPr id="2" name="Rectangle 1"/>
@@ -4474,7 +5606,464 @@
             <a:pPr>
               <a:defRPr sz="3200" b="1">
                 <a:solidFill>
-                  <a:srgbClr val="2E86AB"/>
+                  <a:srgbClr val="FFFFFF"/>
+                </a:solidFill>
+                <a:latin typeface="Inter"/>
+              </a:defRPr>
+            </a:pPr>
+            <a:r>
+              <a:t>Typography</a:t>
+            </a:r>
+          </a:p>
+        </p:txBody>
+      </p:sp>
+      <p:sp>
+        <p:nvSpPr>
+          <p:cNvPr id="4" name="TextBox 3"/>
+          <p:cNvSpPr txBox="1"/>
+          <p:nvPr/>
+        </p:nvSpPr>
+        <p:spPr>
+          <a:xfrm>
+            <a:off x="1143000" y="1943100"/>
+            <a:ext cx="3429000" cy="742950"/>
+          </a:xfrm>
+          <a:prstGeom prst="rect">
+            <a:avLst/>
+          </a:prstGeom>
+          <a:noFill/>
+        </p:spPr>
+        <p:txBody>
+          <a:bodyPr wrap="none">
+            <a:spAutoFit/>
+          </a:bodyPr>
+          <a:lstStyle/>
+          <a:p>
+            <a:pPr>
+              <a:defRPr sz="2000" b="0">
+                <a:solidFill>
+                  <a:srgbClr val="FFFFFF"/>
+                </a:solidFill>
+                <a:latin typeface="Source Sans Pro"/>
+              </a:defRPr>
+            </a:pPr>
+            <a:r>
+              <a:t>Primary Font: Inter</a:t>
+            </a:r>
+          </a:p>
+        </p:txBody>
+      </p:sp>
+      <p:sp>
+        <p:nvSpPr>
+          <p:cNvPr id="5" name="TextBox 4"/>
+          <p:cNvSpPr txBox="1"/>
+          <p:nvPr/>
+        </p:nvSpPr>
+        <p:spPr>
+          <a:xfrm>
+            <a:off x="1143000" y="2686050"/>
+            <a:ext cx="3429000" cy="742950"/>
+          </a:xfrm>
+          <a:prstGeom prst="rect">
+            <a:avLst/>
+          </a:prstGeom>
+          <a:noFill/>
+        </p:spPr>
+        <p:txBody>
+          <a:bodyPr wrap="none">
+            <a:spAutoFit/>
+          </a:bodyPr>
+          <a:lstStyle/>
+          <a:p>
+            <a:pPr>
+              <a:defRPr sz="3200" b="1">
+                <a:solidFill>
+                  <a:srgbClr val="FFFFFF"/>
+                </a:solidFill>
+                <a:latin typeface="Inter"/>
+              </a:defRPr>
+            </a:pPr>
+            <a:r>
+              <a:t>H1 Heading</a:t>
+            </a:r>
+          </a:p>
+        </p:txBody>
+      </p:sp>
+      <p:sp>
+        <p:nvSpPr>
+          <p:cNvPr id="6" name="TextBox 5"/>
+          <p:cNvSpPr txBox="1"/>
+          <p:nvPr/>
+        </p:nvSpPr>
+        <p:spPr>
+          <a:xfrm>
+            <a:off x="1143000" y="3429000"/>
+            <a:ext cx="3429000" cy="742950"/>
+          </a:xfrm>
+          <a:prstGeom prst="rect">
+            <a:avLst/>
+          </a:prstGeom>
+          <a:noFill/>
+        </p:spPr>
+        <p:txBody>
+          <a:bodyPr wrap="none">
+            <a:spAutoFit/>
+          </a:bodyPr>
+          <a:lstStyle/>
+          <a:p>
+            <a:pPr>
+              <a:defRPr sz="2400" b="1">
+                <a:solidFill>
+                  <a:srgbClr val="FFFFFF"/>
+                </a:solidFill>
+                <a:latin typeface="Inter"/>
+              </a:defRPr>
+            </a:pPr>
+            <a:r>
+              <a:t>H2 Heading</a:t>
+            </a:r>
+          </a:p>
+        </p:txBody>
+      </p:sp>
+      <p:sp>
+        <p:nvSpPr>
+          <p:cNvPr id="7" name="TextBox 6"/>
+          <p:cNvSpPr txBox="1"/>
+          <p:nvPr/>
+        </p:nvSpPr>
+        <p:spPr>
+          <a:xfrm>
+            <a:off x="1143000" y="4171950"/>
+            <a:ext cx="3429000" cy="742950"/>
+          </a:xfrm>
+          <a:prstGeom prst="rect">
+            <a:avLst/>
+          </a:prstGeom>
+          <a:noFill/>
+        </p:spPr>
+        <p:txBody>
+          <a:bodyPr wrap="none">
+            <a:spAutoFit/>
+          </a:bodyPr>
+          <a:lstStyle/>
+          <a:p>
+            <a:pPr>
+              <a:defRPr sz="2000" b="0">
+                <a:solidFill>
+                  <a:srgbClr val="FFFFFF"/>
+                </a:solidFill>
+                <a:latin typeface="Inter"/>
+              </a:defRPr>
+            </a:pPr>
+            <a:r>
+              <a:t>H3 Heading</a:t>
+            </a:r>
+          </a:p>
+        </p:txBody>
+      </p:sp>
+      <p:sp>
+        <p:nvSpPr>
+          <p:cNvPr id="8" name="TextBox 7"/>
+          <p:cNvSpPr txBox="1"/>
+          <p:nvPr/>
+        </p:nvSpPr>
+        <p:spPr>
+          <a:xfrm>
+            <a:off x="5257800" y="1943100"/>
+            <a:ext cx="3429000" cy="742950"/>
+          </a:xfrm>
+          <a:prstGeom prst="rect">
+            <a:avLst/>
+          </a:prstGeom>
+          <a:noFill/>
+        </p:spPr>
+        <p:txBody>
+          <a:bodyPr wrap="none">
+            <a:spAutoFit/>
+          </a:bodyPr>
+          <a:lstStyle/>
+          <a:p>
+            <a:pPr>
+              <a:defRPr sz="2000" b="0">
+                <a:solidFill>
+                  <a:srgbClr val="FFFFFF"/>
+                </a:solidFill>
+                <a:latin typeface="Source Sans Pro"/>
+              </a:defRPr>
+            </a:pPr>
+            <a:r>
+              <a:t>Secondary Font: Source Sans Pro</a:t>
+            </a:r>
+          </a:p>
+        </p:txBody>
+      </p:sp>
+      <p:sp>
+        <p:nvSpPr>
+          <p:cNvPr id="9" name="TextBox 8"/>
+          <p:cNvSpPr txBox="1"/>
+          <p:nvPr/>
+        </p:nvSpPr>
+        <p:spPr>
+          <a:xfrm>
+            <a:off x="5257800" y="2686050"/>
+            <a:ext cx="3429000" cy="742950"/>
+          </a:xfrm>
+          <a:prstGeom prst="rect">
+            <a:avLst/>
+          </a:prstGeom>
+          <a:noFill/>
+        </p:spPr>
+        <p:txBody>
+          <a:bodyPr wrap="none">
+            <a:spAutoFit/>
+          </a:bodyPr>
+          <a:lstStyle/>
+          <a:p>
+            <a:pPr>
+              <a:defRPr sz="1600" b="0">
+                <a:solidFill>
+                  <a:srgbClr val="FFFFFF"/>
+                </a:solidFill>
+                <a:latin typeface="Source Sans Pro"/>
+              </a:defRPr>
+            </a:pPr>
+            <a:r>
+              <a:t>Body Text</a:t>
+            </a:r>
+          </a:p>
+        </p:txBody>
+      </p:sp>
+      <p:sp>
+        <p:nvSpPr>
+          <p:cNvPr id="10" name="TextBox 9"/>
+          <p:cNvSpPr txBox="1"/>
+          <p:nvPr/>
+        </p:nvSpPr>
+        <p:spPr>
+          <a:xfrm>
+            <a:off x="5257800" y="3429000"/>
+            <a:ext cx="3429000" cy="742950"/>
+          </a:xfrm>
+          <a:prstGeom prst="rect">
+            <a:avLst/>
+          </a:prstGeom>
+          <a:noFill/>
+        </p:spPr>
+        <p:txBody>
+          <a:bodyPr wrap="none">
+            <a:spAutoFit/>
+          </a:bodyPr>
+          <a:lstStyle/>
+          <a:p>
+            <a:pPr>
+              <a:defRPr sz="1600" b="1">
+                <a:solidFill>
+                  <a:srgbClr val="FFFFFF"/>
+                </a:solidFill>
+                <a:latin typeface="Source Sans Pro"/>
+              </a:defRPr>
+            </a:pPr>
+            <a:r>
+              <a:t>Body Bold</a:t>
+            </a:r>
+          </a:p>
+        </p:txBody>
+      </p:sp>
+      <p:sp>
+        <p:nvSpPr>
+          <p:cNvPr id="11" name="TextBox 10"/>
+          <p:cNvSpPr txBox="1"/>
+          <p:nvPr/>
+        </p:nvSpPr>
+        <p:spPr>
+          <a:xfrm>
+            <a:off x="5257800" y="4171950"/>
+            <a:ext cx="3429000" cy="742950"/>
+          </a:xfrm>
+          <a:prstGeom prst="rect">
+            <a:avLst/>
+          </a:prstGeom>
+          <a:noFill/>
+        </p:spPr>
+        <p:txBody>
+          <a:bodyPr wrap="none">
+            <a:spAutoFit/>
+          </a:bodyPr>
+          <a:lstStyle/>
+          <a:p>
+            <a:pPr>
+              <a:defRPr sz="1200" b="0">
+                <a:solidFill>
+                  <a:srgbClr val="FFFFFF"/>
+                </a:solidFill>
+                <a:latin typeface="Source Sans Pro"/>
+              </a:defRPr>
+            </a:pPr>
+            <a:r>
+              <a:t>Caption Text</a:t>
+            </a:r>
+          </a:p>
+        </p:txBody>
+      </p:sp>
+      <p:sp>
+        <p:nvSpPr>
+          <p:cNvPr id="12" name="TextBox 11"/>
+          <p:cNvSpPr txBox="1"/>
+          <p:nvPr/>
+        </p:nvSpPr>
+        <p:spPr>
+          <a:xfrm>
+            <a:off x="457200" y="5657850"/>
+            <a:ext cx="4114800" cy="742950"/>
+          </a:xfrm>
+          <a:prstGeom prst="rect">
+            <a:avLst/>
+          </a:prstGeom>
+          <a:noFill/>
+        </p:spPr>
+        <p:txBody>
+          <a:bodyPr wrap="none">
+            <a:spAutoFit/>
+          </a:bodyPr>
+          <a:lstStyle/>
+          <a:p>
+            <a:pPr algn="l">
+              <a:defRPr sz="1000" b="0">
+                <a:solidFill>
+                  <a:srgbClr val="FFFFFF"/>
+                </a:solidFill>
+                <a:latin typeface="Source Sans Pro"/>
+              </a:defRPr>
+            </a:pPr>
+            <a:r>
+              <a:t>TechForward Live</a:t>
+            </a:r>
+          </a:p>
+        </p:txBody>
+      </p:sp>
+      <p:sp>
+        <p:nvSpPr>
+          <p:cNvPr id="13" name="TextBox 12"/>
+          <p:cNvSpPr txBox="1"/>
+          <p:nvPr/>
+        </p:nvSpPr>
+        <p:spPr>
+          <a:xfrm>
+            <a:off x="4572000" y="5657850"/>
+            <a:ext cx="4114800" cy="742950"/>
+          </a:xfrm>
+          <a:prstGeom prst="rect">
+            <a:avLst/>
+          </a:prstGeom>
+          <a:noFill/>
+        </p:spPr>
+        <p:txBody>
+          <a:bodyPr wrap="none">
+            <a:spAutoFit/>
+          </a:bodyPr>
+          <a:lstStyle/>
+          <a:p>
+            <a:pPr algn="r">
+              <a:defRPr sz="1000" b="0">
+                <a:solidFill>
+                  <a:srgbClr val="FFFFFF"/>
+                </a:solidFill>
+                <a:latin typeface="Source Sans Pro"/>
+              </a:defRPr>
+            </a:pPr>
+            <a:r>
+              <a:t>15</a:t>
+            </a:r>
+          </a:p>
+        </p:txBody>
+      </p:sp>
+    </p:spTree>
+  </p:cSld>
+  <p:clrMapOvr>
+    <a:masterClrMapping/>
+  </p:clrMapOvr>
+</p:sld>
+</file>
+
+<file path=ppt/slides/slide16.xml><?xml version="1.0" encoding="utf-8"?>
+<p:sld xmlns:a="http://schemas.openxmlformats.org/drawingml/2006/main" xmlns:p="http://schemas.openxmlformats.org/presentationml/2006/main" xmlns:r="http://schemas.openxmlformats.org/officeDocument/2006/relationships">
+  <p:cSld>
+    <p:spTree>
+      <p:nvGrpSpPr>
+        <p:cNvPr id="1" name=""/>
+        <p:cNvGrpSpPr/>
+        <p:nvPr/>
+      </p:nvGrpSpPr>
+      <p:sp>
+        <p:nvSpPr>
+          <p:cNvPr id="2" name="Rectangle 1"/>
+          <p:cNvSpPr/>
+          <p:nvPr/>
+        </p:nvSpPr>
+        <p:spPr>
+          <a:xfrm>
+            <a:off x="0" y="0"/>
+            <a:ext cx="9144000" cy="6858000"/>
+          </a:xfrm>
+          <a:prstGeom prst="rect">
+            <a:avLst/>
+          </a:prstGeom>
+          <a:solidFill>
+            <a:srgbClr val="1A1A1A"/>
+          </a:solidFill>
+          <a:ln>
+            <a:noFill/>
+          </a:ln>
+        </p:spPr>
+        <p:style>
+          <a:lnRef idx="1">
+            <a:schemeClr val="accent1"/>
+          </a:lnRef>
+          <a:fillRef idx="3">
+            <a:schemeClr val="accent1"/>
+          </a:fillRef>
+          <a:effectRef idx="2">
+            <a:schemeClr val="accent1"/>
+          </a:effectRef>
+          <a:fontRef idx="minor">
+            <a:schemeClr val="lt1"/>
+          </a:fontRef>
+        </p:style>
+        <p:txBody>
+          <a:bodyPr rtlCol="0" anchor="ctr"/>
+          <a:lstStyle/>
+          <a:p>
+            <a:pPr algn="ctr"/>
+          </a:p>
+        </p:txBody>
+      </p:sp>
+      <p:grpSpPr/>
+      <p:sp>
+        <p:nvSpPr>
+          <p:cNvPr id="3" name="TextBox 2"/>
+          <p:cNvSpPr txBox="1"/>
+          <p:nvPr/>
+        </p:nvSpPr>
+        <p:spPr>
+          <a:xfrm>
+            <a:off x="1143000" y="457200"/>
+            <a:ext cx="6858000" cy="742950"/>
+          </a:xfrm>
+          <a:prstGeom prst="rect">
+            <a:avLst/>
+          </a:prstGeom>
+          <a:noFill/>
+        </p:spPr>
+        <p:txBody>
+          <a:bodyPr wrap="none">
+            <a:spAutoFit/>
+          </a:bodyPr>
+          <a:lstStyle/>
+          <a:p>
+            <a:pPr>
+              <a:defRPr sz="3200" b="1">
+                <a:solidFill>
+                  <a:srgbClr val="FFFFFF"/>
                 </a:solidFill>
                 <a:latin typeface="Inter"/>
               </a:defRPr>
@@ -4510,7 +6099,7 @@
             <a:pPr>
               <a:defRPr sz="1800" b="0">
                 <a:solidFill>
-                  <a:srgbClr val="2E86AB"/>
+                  <a:srgbClr val="FFFFFF"/>
                 </a:solidFill>
                 <a:latin typeface="Source Sans Pro"/>
               </a:defRPr>
@@ -4523,7 +6112,7 @@
             <a:pPr>
               <a:defRPr sz="1400" b="0">
                 <a:solidFill>
-                  <a:srgbClr val="2E86AB"/>
+                  <a:srgbClr val="FFFFFF"/>
                 </a:solidFill>
                 <a:latin typeface="Source Sans Pro"/>
               </a:defRPr>
@@ -4536,7 +6125,7 @@
             <a:pPr>
               <a:defRPr sz="1400" b="0">
                 <a:solidFill>
-                  <a:srgbClr val="2E86AB"/>
+                  <a:srgbClr val="FFFFFF"/>
                 </a:solidFill>
                 <a:latin typeface="Source Sans Pro"/>
               </a:defRPr>
@@ -4549,7 +6138,7 @@
             <a:pPr>
               <a:defRPr sz="1400" b="0">
                 <a:solidFill>
-                  <a:srgbClr val="2E86AB"/>
+                  <a:srgbClr val="FFFFFF"/>
                 </a:solidFill>
                 <a:latin typeface="Source Sans Pro"/>
               </a:defRPr>
@@ -4562,7 +6151,7 @@
             <a:pPr>
               <a:defRPr sz="1400" b="0">
                 <a:solidFill>
-                  <a:srgbClr val="2E86AB"/>
+                  <a:srgbClr val="FFFFFF"/>
                 </a:solidFill>
                 <a:latin typeface="Source Sans Pro"/>
               </a:defRPr>
@@ -4575,7 +6164,7 @@
             <a:pPr>
               <a:defRPr sz="1400" b="0">
                 <a:solidFill>
-                  <a:srgbClr val="2E86AB"/>
+                  <a:srgbClr val="FFFFFF"/>
                 </a:solidFill>
                 <a:latin typeface="Source Sans Pro"/>
               </a:defRPr>
@@ -4611,7 +6200,7 @@
             <a:pPr>
               <a:defRPr sz="1800" b="0">
                 <a:solidFill>
-                  <a:srgbClr val="2E86AB"/>
+                  <a:srgbClr val="FFFFFF"/>
                 </a:solidFill>
                 <a:latin typeface="Source Sans Pro"/>
               </a:defRPr>
@@ -4624,7 +6213,7 @@
             <a:pPr>
               <a:defRPr sz="1400" b="0">
                 <a:solidFill>
-                  <a:srgbClr val="2E86AB"/>
+                  <a:srgbClr val="FFFFFF"/>
                 </a:solidFill>
                 <a:latin typeface="Source Sans Pro"/>
               </a:defRPr>
@@ -4637,7 +6226,7 @@
             <a:pPr>
               <a:defRPr sz="1400" b="0">
                 <a:solidFill>
-                  <a:srgbClr val="2E86AB"/>
+                  <a:srgbClr val="FFFFFF"/>
                 </a:solidFill>
                 <a:latin typeface="Source Sans Pro"/>
               </a:defRPr>
@@ -4650,7 +6239,7 @@
             <a:pPr>
               <a:defRPr sz="1400" b="0">
                 <a:solidFill>
-                  <a:srgbClr val="2E86AB"/>
+                  <a:srgbClr val="FFFFFF"/>
                 </a:solidFill>
                 <a:latin typeface="Source Sans Pro"/>
               </a:defRPr>
@@ -4731,7 +6320,7 @@
             <a:pPr algn="ctr">
               <a:defRPr sz="800" b="0">
                 <a:solidFill>
-                  <a:srgbClr val="2E86AB"/>
+                  <a:srgbClr val="FFFFFF"/>
                 </a:solidFill>
                 <a:latin typeface="Source Sans Pro"/>
               </a:defRPr>
@@ -4812,7 +6401,7 @@
             <a:pPr algn="ctr">
               <a:defRPr sz="800" b="0">
                 <a:solidFill>
-                  <a:srgbClr val="2E86AB"/>
+                  <a:srgbClr val="FFFFFF"/>
                 </a:solidFill>
                 <a:latin typeface="Source Sans Pro"/>
               </a:defRPr>
@@ -4893,7 +6482,7 @@
             <a:pPr algn="ctr">
               <a:defRPr sz="800" b="0">
                 <a:solidFill>
-                  <a:srgbClr val="2E86AB"/>
+                  <a:srgbClr val="FFFFFF"/>
                 </a:solidFill>
                 <a:latin typeface="Source Sans Pro"/>
               </a:defRPr>
@@ -4929,7 +6518,7 @@
             <a:pPr algn="l">
               <a:defRPr sz="1000" b="0">
                 <a:solidFill>
-                  <a:srgbClr val="2E86AB"/>
+                  <a:srgbClr val="FFFFFF"/>
                 </a:solidFill>
                 <a:latin typeface="Source Sans Pro"/>
               </a:defRPr>
@@ -4965,13 +6554,13 @@
             <a:pPr algn="r">
               <a:defRPr sz="1000" b="0">
                 <a:solidFill>
-                  <a:srgbClr val="2E86AB"/>
-                </a:solidFill>
-                <a:latin typeface="Source Sans Pro"/>
-              </a:defRPr>
-            </a:pPr>
-            <a:r>
-              <a:t>13</a:t>
+                  <a:srgbClr val="FFFFFF"/>
+                </a:solidFill>
+                <a:latin typeface="Source Sans Pro"/>
+              </a:defRPr>
+            </a:pPr>
+            <a:r>
+              <a:t>16</a:t>
             </a:r>
           </a:p>
         </p:txBody>
@@ -6033,7 +7622,7 @@
               </a:defRPr>
             </a:pPr>
             <a:r>
-              <a:t>Color Usage</a:t>
+              <a:t>Color Usage 1/2</a:t>
             </a:r>
           </a:p>
         </p:txBody>
@@ -6046,7 +7635,43 @@
         </p:nvSpPr>
         <p:spPr>
           <a:xfrm>
-            <a:off x="6492240" y="2743200"/>
+            <a:off x="6675120" y="2606040"/>
+            <a:ext cx="1828800" cy="228600"/>
+          </a:xfrm>
+          <a:prstGeom prst="rect">
+            <a:avLst/>
+          </a:prstGeom>
+          <a:noFill/>
+        </p:spPr>
+        <p:txBody>
+          <a:bodyPr wrap="none" lIns="0" tIns="0" bIns="0">
+            <a:spAutoFit/>
+          </a:bodyPr>
+          <a:lstStyle/>
+          <a:p>
+            <a:pPr>
+              <a:defRPr sz="900" b="0">
+                <a:solidFill>
+                  <a:srgbClr val="CCCCCC"/>
+                </a:solidFill>
+                <a:latin typeface="Source Sans Pro"/>
+              </a:defRPr>
+            </a:pPr>
+            <a:r>
+              <a:t>Color Usage 2/2</a:t>
+            </a:r>
+          </a:p>
+        </p:txBody>
+      </p:sp>
+      <p:sp>
+        <p:nvSpPr>
+          <p:cNvPr id="32" name="TextBox 31"/>
+          <p:cNvSpPr txBox="1"/>
+          <p:nvPr/>
+        </p:nvSpPr>
+        <p:spPr>
+          <a:xfrm>
+            <a:off x="6492240" y="2971800"/>
             <a:ext cx="1828800" cy="274320"/>
           </a:xfrm>
           <a:prstGeom prst="rect">
@@ -6076,13 +7701,13 @@
       </p:sp>
       <p:cxnSp>
         <p:nvCxnSpPr>
-          <p:cNvPr id="32" name="Connector 31"/>
+          <p:cNvPr id="33" name="Connector 32"/>
           <p:cNvCxnSpPr/>
           <p:nvPr/>
         </p:nvCxnSpPr>
         <p:spPr>
           <a:xfrm>
-            <a:off x="8366759" y="2852928"/>
+            <a:off x="8366759" y="3081528"/>
             <a:ext cx="365760" cy="0"/>
           </a:xfrm>
           <a:prstGeom prst="line">
@@ -6111,13 +7736,13 @@
       </p:cxnSp>
       <p:sp>
         <p:nvSpPr>
-          <p:cNvPr id="33" name="TextBox 32"/>
+          <p:cNvPr id="34" name="TextBox 33"/>
           <p:cNvSpPr txBox="1"/>
           <p:nvPr/>
         </p:nvSpPr>
         <p:spPr>
           <a:xfrm>
-            <a:off x="8778240" y="2743200"/>
+            <a:off x="8778240" y="2971800"/>
             <a:ext cx="274320" cy="274320"/>
           </a:xfrm>
           <a:prstGeom prst="rect">
@@ -6147,13 +7772,13 @@
       </p:sp>
       <p:sp>
         <p:nvSpPr>
-          <p:cNvPr id="34" name="TextBox 33"/>
+          <p:cNvPr id="35" name="TextBox 34"/>
           <p:cNvSpPr txBox="1"/>
           <p:nvPr/>
         </p:nvSpPr>
         <p:spPr>
           <a:xfrm>
-            <a:off x="6675120" y="3108960"/>
+            <a:off x="6675120" y="3337560"/>
             <a:ext cx="1828800" cy="228600"/>
           </a:xfrm>
           <a:prstGeom prst="rect">
@@ -6183,13 +7808,13 @@
       </p:sp>
       <p:sp>
         <p:nvSpPr>
-          <p:cNvPr id="35" name="TextBox 34"/>
+          <p:cNvPr id="36" name="TextBox 35"/>
           <p:cNvSpPr txBox="1"/>
           <p:nvPr/>
         </p:nvSpPr>
         <p:spPr>
           <a:xfrm>
-            <a:off x="6675120" y="3337560"/>
+            <a:off x="6675120" y="3566160"/>
             <a:ext cx="1828800" cy="228600"/>
           </a:xfrm>
           <a:prstGeom prst="rect">
@@ -6219,13 +7844,13 @@
       </p:sp>
       <p:sp>
         <p:nvSpPr>
-          <p:cNvPr id="36" name="TextBox 35"/>
+          <p:cNvPr id="37" name="TextBox 36"/>
           <p:cNvSpPr txBox="1"/>
           <p:nvPr/>
         </p:nvSpPr>
         <p:spPr>
           <a:xfrm>
-            <a:off x="6675120" y="3566160"/>
+            <a:off x="6675120" y="3794760"/>
             <a:ext cx="1828800" cy="228600"/>
           </a:xfrm>
           <a:prstGeom prst="rect">
@@ -6255,13 +7880,13 @@
       </p:sp>
       <p:sp>
         <p:nvSpPr>
-          <p:cNvPr id="37" name="TextBox 36"/>
+          <p:cNvPr id="38" name="TextBox 37"/>
           <p:cNvSpPr txBox="1"/>
           <p:nvPr/>
         </p:nvSpPr>
         <p:spPr>
           <a:xfrm>
-            <a:off x="6492240" y="3931920"/>
+            <a:off x="6492240" y="4160520"/>
             <a:ext cx="1828800" cy="274320"/>
           </a:xfrm>
           <a:prstGeom prst="rect">
@@ -6291,13 +7916,13 @@
       </p:sp>
       <p:cxnSp>
         <p:nvCxnSpPr>
-          <p:cNvPr id="38" name="Connector 37"/>
+          <p:cNvPr id="39" name="Connector 38"/>
           <p:cNvCxnSpPr/>
           <p:nvPr/>
         </p:nvCxnSpPr>
         <p:spPr>
           <a:xfrm>
-            <a:off x="8366759" y="4041648"/>
+            <a:off x="8366759" y="4270248"/>
             <a:ext cx="365760" cy="0"/>
           </a:xfrm>
           <a:prstGeom prst="line">
@@ -6326,13 +7951,13 @@
       </p:cxnSp>
       <p:sp>
         <p:nvSpPr>
-          <p:cNvPr id="39" name="TextBox 38"/>
+          <p:cNvPr id="40" name="TextBox 39"/>
           <p:cNvSpPr txBox="1"/>
           <p:nvPr/>
         </p:nvSpPr>
         <p:spPr>
           <a:xfrm>
-            <a:off x="8778240" y="3931920"/>
+            <a:off x="8778240" y="4160520"/>
             <a:ext cx="274320" cy="274320"/>
           </a:xfrm>
           <a:prstGeom prst="rect">
@@ -6362,13 +7987,13 @@
       </p:sp>
       <p:sp>
         <p:nvSpPr>
-          <p:cNvPr id="40" name="TextBox 39"/>
+          <p:cNvPr id="41" name="TextBox 40"/>
           <p:cNvSpPr txBox="1"/>
           <p:nvPr/>
         </p:nvSpPr>
         <p:spPr>
           <a:xfrm>
-            <a:off x="6675120" y="4297680"/>
+            <a:off x="6675120" y="4526280"/>
             <a:ext cx="1828800" cy="228600"/>
           </a:xfrm>
           <a:prstGeom prst="rect">
@@ -6398,13 +8023,13 @@
       </p:sp>
       <p:sp>
         <p:nvSpPr>
-          <p:cNvPr id="41" name="TextBox 40"/>
+          <p:cNvPr id="42" name="TextBox 41"/>
           <p:cNvSpPr txBox="1"/>
           <p:nvPr/>
         </p:nvSpPr>
         <p:spPr>
           <a:xfrm>
-            <a:off x="6675120" y="4526280"/>
+            <a:off x="6675120" y="4754880"/>
             <a:ext cx="1828800" cy="228600"/>
           </a:xfrm>
           <a:prstGeom prst="rect">
@@ -6434,13 +8059,13 @@
       </p:sp>
       <p:sp>
         <p:nvSpPr>
-          <p:cNvPr id="42" name="TextBox 41"/>
+          <p:cNvPr id="43" name="TextBox 42"/>
           <p:cNvSpPr txBox="1"/>
           <p:nvPr/>
         </p:nvSpPr>
         <p:spPr>
           <a:xfrm>
-            <a:off x="6675120" y="4754880"/>
+            <a:off x="6675120" y="4983480"/>
             <a:ext cx="1828800" cy="228600"/>
           </a:xfrm>
           <a:prstGeom prst="rect">
@@ -6528,71 +8153,7 @@
               </a:defRPr>
             </a:pPr>
             <a:r>
-              <a:t>The following brand identity system for TechForward Live</a:t>
-            </a:r>
-          </a:p>
-          <a:p>
-            <a:pPr algn="l">
-              <a:spcAft>
-                <a:spcPts val="800"/>
-              </a:spcAft>
-              <a:defRPr sz="2000" b="0">
-                <a:solidFill>
-                  <a:srgbClr val="FFFFFF"/>
-                </a:solidFill>
-                <a:latin typeface="Source Sans Pro"/>
-              </a:defRPr>
-            </a:pPr>
-            <a:r>
-              <a:t>is thoughtfully crafted to present our brand in</a:t>
-            </a:r>
-          </a:p>
-          <a:p>
-            <a:pPr algn="l">
-              <a:spcAft>
-                <a:spcPts val="800"/>
-              </a:spcAft>
-              <a:defRPr sz="2000" b="0">
-                <a:solidFill>
-                  <a:srgbClr val="FFFFFF"/>
-                </a:solidFill>
-                <a:latin typeface="Source Sans Pro"/>
-              </a:defRPr>
-            </a:pPr>
-            <a:r>
-              <a:t>an international, engaging, consistent, recognizable</a:t>
-            </a:r>
-          </a:p>
-          <a:p>
-            <a:pPr algn="l">
-              <a:spcAft>
-                <a:spcPts val="800"/>
-              </a:spcAft>
-              <a:defRPr sz="2000" b="0">
-                <a:solidFill>
-                  <a:srgbClr val="FFFFFF"/>
-                </a:solidFill>
-                <a:latin typeface="Source Sans Pro"/>
-              </a:defRPr>
-            </a:pPr>
-            <a:r>
-              <a:t>and proprietary way. Unique in form, versatile in its</a:t>
-            </a:r>
-          </a:p>
-          <a:p>
-            <a:pPr algn="l">
-              <a:spcAft>
-                <a:spcPts val="800"/>
-              </a:spcAft>
-              <a:defRPr sz="2000" b="0">
-                <a:solidFill>
-                  <a:srgbClr val="FFFFFF"/>
-                </a:solidFill>
-                <a:latin typeface="Source Sans Pro"/>
-              </a:defRPr>
-            </a:pPr>
-            <a:r>
-              <a:t>application and unified by our fundamental principles.</a:t>
+              <a:t>Welcome to TechForward Live's brand identity system presentation, where we unveil a transformative approach to showcasing our commitment to innovation and human-centered design. This system ensures an internationally engaging, consistent, and proprietary brand presentation, reflecting our core values of simplicity, excellence, and trust in the dynamic landscape of technology and digital solutions.</a:t>
             </a:r>
           </a:p>
         </p:txBody>
@@ -6728,7 +8289,7 @@
               </a:defRPr>
             </a:pPr>
             <a:r>
-              <a:t>To be the preferred partner for businesses seeking excellence and innovation in their field.</a:t>
+              <a:t>Our vision at TechForward Live is to empower a future where technology seamlessly enhances human potential, driving unparalleled innovation and digital transformation for progressive businesses. We aspire to be the catalyst for unlocking new possibilities and shaping a world where simplicity and excellence define the digital landscape.</a:t>
             </a:r>
           </a:p>
         </p:txBody>
@@ -6864,7 +8425,7 @@
               </a:defRPr>
             </a:pPr>
             <a:r>
-              <a:t>We deliver exceptional solutions that drive growth and create lasting value for our clients and communities.</a:t>
+              <a:t>At TechForward Live, we are dedicated to bridging the gap between complex technology and intuitive user experiences. Our mission is to provide cutting-edge technology solutions that drive digital transformation and innovation for businesses, ensuring that our human-centered approach leads the way in creating impactful, user-friendly digital solutions.</a:t>
             </a:r>
           </a:p>
         </p:txBody>
@@ -7000,7 +8561,7 @@
               </a:defRPr>
             </a:pPr>
             <a:r>
-              <a:t>Core Values: Our foundation rests on innovation, simplicity, human-centered, excellence, trust, and reliability, which together guide our commitment to excellence and drive our mission to create meaningful impact for our clients.</a:t>
+              <a:t>At the core of TechForward Live, our values of innovation, simplicity, human-centered design, excellence, trust, and reliability guide every aspect of our work. We believe in pushing boundaries through innovation, simplifying complexities to create seamless experiences, and always putting humans at the center of our solutions. Our commitment to excellence, trustworthiness, and reliability ensures that we deliver technology solutions that truly transform businesses and drive progress in the digital world.</a:t>
             </a:r>
           </a:p>
         </p:txBody>
@@ -7296,7 +8857,7 @@
               </a:defRPr>
             </a:pPr>
             <a:r>
-              <a:t>Primary logo for main brand applications. Use in headers, business cards, and large formats.</a:t>
+              <a:t>Choose for maximum impact and brand recognition in primary applications.</a:t>
             </a:r>
           </a:p>
         </p:txBody>
@@ -7456,7 +9017,7 @@
               </a:defRPr>
             </a:pPr>
             <a:r>
-              <a:t>Secondary logo for compact spaces. Ideal for social media, favicons, and small applications.</a:t>
+              <a:t>Perfect for constrained spaces while maintaining professional brand presence and clarity.</a:t>
             </a:r>
           </a:p>
         </p:txBody>

--- a/output/techforward_live/techforward_live_enhanced_brand_book.pptx
+++ b/output/techforward_live/techforward_live_enhanced_brand_book.pptx
@@ -3407,7 +3407,7 @@
             <a:avLst/>
           </a:prstGeom>
           <a:solidFill>
-            <a:srgbClr val="2E86AB"/>
+            <a:srgbClr val="FF4D4D"/>
           </a:solidFill>
           <a:ln w="25400">
             <a:solidFill>
@@ -3461,73 +3461,73 @@
           <a:p>
             <a:pPr algn="l">
               <a:spcAft>
-                <a:spcPts val="400"/>
+                <a:spcPts val="300"/>
               </a:spcAft>
-              <a:defRPr sz="1200" b="0">
-                <a:solidFill>
-                  <a:srgbClr val="FFFFFF"/>
-                </a:solidFill>
-                <a:latin typeface="Source Sans Pro"/>
-              </a:defRPr>
-            </a:pPr>
-            <a:r>
-              <a:t>Primary Blue</a:t>
+              <a:defRPr sz="1000" b="0">
+                <a:solidFill>
+                  <a:srgbClr val="FFFFFF"/>
+                </a:solidFill>
+                <a:latin typeface="Source Sans Pro"/>
+              </a:defRPr>
+            </a:pPr>
+            <a:r>
+              <a:t>Innovation Red</a:t>
             </a:r>
           </a:p>
           <a:p>
             <a:pPr algn="l">
               <a:spcAft>
-                <a:spcPts val="400"/>
+                <a:spcPts val="300"/>
               </a:spcAft>
-              <a:defRPr sz="1200" b="0">
-                <a:solidFill>
-                  <a:srgbClr val="FFFFFF"/>
-                </a:solidFill>
-                <a:latin typeface="Source Sans Pro"/>
-              </a:defRPr>
-            </a:pPr>
-            <a:r>
-              <a:t>#2E86AB</a:t>
+              <a:defRPr sz="1000" b="0">
+                <a:solidFill>
+                  <a:srgbClr val="FFFFFF"/>
+                </a:solidFill>
+                <a:latin typeface="Source Sans Pro"/>
+              </a:defRPr>
+            </a:pPr>
+            <a:r>
+              <a:t>#FF4D4D</a:t>
             </a:r>
           </a:p>
           <a:p>
             <a:pPr algn="l">
               <a:spcAft>
-                <a:spcPts val="400"/>
+                <a:spcPts val="300"/>
               </a:spcAft>
-              <a:defRPr sz="1200" b="0">
-                <a:solidFill>
-                  <a:srgbClr val="FFFFFF"/>
-                </a:solidFill>
-                <a:latin typeface="Source Sans Pro"/>
-              </a:defRPr>
-            </a:pPr>
-            <a:r>
-              <a:t>RGB(46, 134, 171)</a:t>
+              <a:defRPr sz="1000" b="0">
+                <a:solidFill>
+                  <a:srgbClr val="FFFFFF"/>
+                </a:solidFill>
+                <a:latin typeface="Source Sans Pro"/>
+              </a:defRPr>
+            </a:pPr>
+            <a:r>
+              <a:t>RGB(255, 77, 77)</a:t>
             </a:r>
           </a:p>
           <a:p>
             <a:pPr algn="l">
               <a:spcAft>
-                <a:spcPts val="400"/>
+                <a:spcPts val="300"/>
               </a:spcAft>
-              <a:defRPr sz="1200" b="0">
-                <a:solidFill>
-                  <a:srgbClr val="FFFFFF"/>
-                </a:solidFill>
-                <a:latin typeface="Source Sans Pro"/>
-              </a:defRPr>
-            </a:pPr>
-            <a:r>
-              <a:t>CMYK(73, 21, 0, 32)</a:t>
+              <a:defRPr sz="1000" b="0">
+                <a:solidFill>
+                  <a:srgbClr val="FFFFFF"/>
+                </a:solidFill>
+                <a:latin typeface="Source Sans Pro"/>
+              </a:defRPr>
+            </a:pPr>
+            <a:r>
+              <a:t>CMYK(0, 69, 69, 0)</a:t>
             </a:r>
           </a:p>
           <a:p>
             <a:pPr algn="l">
               <a:spcAft>
-                <a:spcPts val="400"/>
+                <a:spcPts val="300"/>
               </a:spcAft>
-              <a:defRPr sz="1200" b="0">
+              <a:defRPr sz="1000" b="0">
                 <a:solidFill>
                   <a:srgbClr val="FFFFFF"/>
                 </a:solidFill>
@@ -3555,7 +3555,7 @@
             <a:avLst/>
           </a:prstGeom>
           <a:solidFill>
-            <a:srgbClr val="24A19C"/>
+            <a:srgbClr val="3F88C5"/>
           </a:solidFill>
           <a:ln w="25400">
             <a:solidFill>
@@ -3609,73 +3609,73 @@
           <a:p>
             <a:pPr algn="l">
               <a:spcAft>
-                <a:spcPts val="400"/>
+                <a:spcPts val="300"/>
               </a:spcAft>
-              <a:defRPr sz="1200" b="0">
-                <a:solidFill>
-                  <a:srgbClr val="FFFFFF"/>
-                </a:solidFill>
-                <a:latin typeface="Source Sans Pro"/>
-              </a:defRPr>
-            </a:pPr>
-            <a:r>
-              <a:t>Accent Teal</a:t>
+              <a:defRPr sz="1000" b="0">
+                <a:solidFill>
+                  <a:srgbClr val="FFFFFF"/>
+                </a:solidFill>
+                <a:latin typeface="Source Sans Pro"/>
+              </a:defRPr>
+            </a:pPr>
+            <a:r>
+              <a:t>Tech Blue</a:t>
             </a:r>
           </a:p>
           <a:p>
             <a:pPr algn="l">
               <a:spcAft>
-                <a:spcPts val="400"/>
+                <a:spcPts val="300"/>
               </a:spcAft>
-              <a:defRPr sz="1200" b="0">
-                <a:solidFill>
-                  <a:srgbClr val="FFFFFF"/>
-                </a:solidFill>
-                <a:latin typeface="Source Sans Pro"/>
-              </a:defRPr>
-            </a:pPr>
-            <a:r>
-              <a:t>#24A19C</a:t>
+              <a:defRPr sz="1000" b="0">
+                <a:solidFill>
+                  <a:srgbClr val="FFFFFF"/>
+                </a:solidFill>
+                <a:latin typeface="Source Sans Pro"/>
+              </a:defRPr>
+            </a:pPr>
+            <a:r>
+              <a:t>#3F88C5</a:t>
             </a:r>
           </a:p>
           <a:p>
             <a:pPr algn="l">
               <a:spcAft>
-                <a:spcPts val="400"/>
+                <a:spcPts val="300"/>
               </a:spcAft>
-              <a:defRPr sz="1200" b="0">
-                <a:solidFill>
-                  <a:srgbClr val="FFFFFF"/>
-                </a:solidFill>
-                <a:latin typeface="Source Sans Pro"/>
-              </a:defRPr>
-            </a:pPr>
-            <a:r>
-              <a:t>RGB(36, 161, 156)</a:t>
+              <a:defRPr sz="1000" b="0">
+                <a:solidFill>
+                  <a:srgbClr val="FFFFFF"/>
+                </a:solidFill>
+                <a:latin typeface="Source Sans Pro"/>
+              </a:defRPr>
+            </a:pPr>
+            <a:r>
+              <a:t>RGB(63, 136, 197)</a:t>
             </a:r>
           </a:p>
           <a:p>
             <a:pPr algn="l">
               <a:spcAft>
-                <a:spcPts val="400"/>
+                <a:spcPts val="300"/>
               </a:spcAft>
-              <a:defRPr sz="1200" b="0">
-                <a:solidFill>
-                  <a:srgbClr val="FFFFFF"/>
-                </a:solidFill>
-                <a:latin typeface="Source Sans Pro"/>
-              </a:defRPr>
-            </a:pPr>
-            <a:r>
-              <a:t>CMYK(77, 0, 3, 36)</a:t>
+              <a:defRPr sz="1000" b="0">
+                <a:solidFill>
+                  <a:srgbClr val="FFFFFF"/>
+                </a:solidFill>
+                <a:latin typeface="Source Sans Pro"/>
+              </a:defRPr>
+            </a:pPr>
+            <a:r>
+              <a:t>CMYK(68, 30, 0, 22)</a:t>
             </a:r>
           </a:p>
           <a:p>
             <a:pPr algn="l">
               <a:spcAft>
-                <a:spcPts val="400"/>
+                <a:spcPts val="300"/>
               </a:spcAft>
-              <a:defRPr sz="1200" b="0">
+              <a:defRPr sz="1000" b="0">
                 <a:solidFill>
                   <a:srgbClr val="FFFFFF"/>
                 </a:solidFill>
@@ -3703,7 +3703,7 @@
             <a:avLst/>
           </a:prstGeom>
           <a:solidFill>
-            <a:srgbClr val="1B365D"/>
+            <a:srgbClr val="00B159"/>
           </a:solidFill>
           <a:ln w="25400">
             <a:solidFill>
@@ -3757,81 +3757,81 @@
           <a:p>
             <a:pPr algn="l">
               <a:spcAft>
-                <a:spcPts val="400"/>
+                <a:spcPts val="300"/>
               </a:spcAft>
-              <a:defRPr sz="1200" b="0">
-                <a:solidFill>
-                  <a:srgbClr val="FFFFFF"/>
-                </a:solidFill>
-                <a:latin typeface="Source Sans Pro"/>
-              </a:defRPr>
-            </a:pPr>
-            <a:r>
-              <a:t>Deep Navy</a:t>
+              <a:defRPr sz="1000" b="0">
+                <a:solidFill>
+                  <a:srgbClr val="FFFFFF"/>
+                </a:solidFill>
+                <a:latin typeface="Source Sans Pro"/>
+              </a:defRPr>
+            </a:pPr>
+            <a:r>
+              <a:t>Digital Green</a:t>
             </a:r>
           </a:p>
           <a:p>
             <a:pPr algn="l">
               <a:spcAft>
-                <a:spcPts val="400"/>
+                <a:spcPts val="300"/>
               </a:spcAft>
-              <a:defRPr sz="1200" b="0">
-                <a:solidFill>
-                  <a:srgbClr val="FFFFFF"/>
-                </a:solidFill>
-                <a:latin typeface="Source Sans Pro"/>
-              </a:defRPr>
-            </a:pPr>
-            <a:r>
-              <a:t>#1B365D</a:t>
+              <a:defRPr sz="1000" b="0">
+                <a:solidFill>
+                  <a:srgbClr val="FFFFFF"/>
+                </a:solidFill>
+                <a:latin typeface="Source Sans Pro"/>
+              </a:defRPr>
+            </a:pPr>
+            <a:r>
+              <a:t>#00B159</a:t>
             </a:r>
           </a:p>
           <a:p>
             <a:pPr algn="l">
               <a:spcAft>
-                <a:spcPts val="400"/>
+                <a:spcPts val="300"/>
               </a:spcAft>
-              <a:defRPr sz="1200" b="0">
-                <a:solidFill>
-                  <a:srgbClr val="FFFFFF"/>
-                </a:solidFill>
-                <a:latin typeface="Source Sans Pro"/>
-              </a:defRPr>
-            </a:pPr>
-            <a:r>
-              <a:t>RGB(27, 54, 93)</a:t>
+              <a:defRPr sz="1000" b="0">
+                <a:solidFill>
+                  <a:srgbClr val="FFFFFF"/>
+                </a:solidFill>
+                <a:latin typeface="Source Sans Pro"/>
+              </a:defRPr>
+            </a:pPr>
+            <a:r>
+              <a:t>RGB(0, 177, 89)</a:t>
             </a:r>
           </a:p>
           <a:p>
             <a:pPr algn="l">
               <a:spcAft>
-                <a:spcPts val="400"/>
+                <a:spcPts val="300"/>
               </a:spcAft>
-              <a:defRPr sz="1200" b="0">
-                <a:solidFill>
-                  <a:srgbClr val="FFFFFF"/>
-                </a:solidFill>
-                <a:latin typeface="Source Sans Pro"/>
-              </a:defRPr>
-            </a:pPr>
-            <a:r>
-              <a:t>CMYK(70, 41, 0, 63)</a:t>
+              <a:defRPr sz="1000" b="0">
+                <a:solidFill>
+                  <a:srgbClr val="FFFFFF"/>
+                </a:solidFill>
+                <a:latin typeface="Source Sans Pro"/>
+              </a:defRPr>
+            </a:pPr>
+            <a:r>
+              <a:t>CMYK(100, 0, 49, 30)</a:t>
             </a:r>
           </a:p>
           <a:p>
             <a:pPr algn="l">
               <a:spcAft>
-                <a:spcPts val="400"/>
+                <a:spcPts val="300"/>
               </a:spcAft>
-              <a:defRPr sz="1200" b="0">
-                <a:solidFill>
-                  <a:srgbClr val="FFFFFF"/>
-                </a:solidFill>
-                <a:latin typeface="Source Sans Pro"/>
-              </a:defRPr>
-            </a:pPr>
-            <a:r>
-              <a:t>Use Light Text</a:t>
+              <a:defRPr sz="1000" b="0">
+                <a:solidFill>
+                  <a:srgbClr val="FFFFFF"/>
+                </a:solidFill>
+                <a:latin typeface="Source Sans Pro"/>
+              </a:defRPr>
+            </a:pPr>
+            <a:r>
+              <a:t>Use Dark Text</a:t>
             </a:r>
           </a:p>
         </p:txBody>
@@ -4064,7 +4064,7 @@
             <a:avLst/>
           </a:prstGeom>
           <a:solidFill>
-            <a:srgbClr val="9AD1D4"/>
+            <a:srgbClr val="6FFFB0"/>
           </a:solidFill>
           <a:ln w="25400">
             <a:solidFill>
@@ -4128,7 +4128,7 @@
               </a:defRPr>
             </a:pPr>
             <a:r>
-              <a:t>Pale Aqua</a:t>
+              <a:t>Mint Green</a:t>
             </a:r>
           </a:p>
           <a:p>
@@ -4144,7 +4144,7 @@
               </a:defRPr>
             </a:pPr>
             <a:r>
-              <a:t>#9AD1D4</a:t>
+              <a:t>#6FFFB0</a:t>
             </a:r>
           </a:p>
           <a:p>
@@ -4180,7 +4180,7 @@
             <a:avLst/>
           </a:prstGeom>
           <a:solidFill>
-            <a:srgbClr val="145C61"/>
+            <a:srgbClr val="6E88A3"/>
           </a:solidFill>
           <a:ln w="25400">
             <a:solidFill>
@@ -4244,7 +4244,7 @@
               </a:defRPr>
             </a:pPr>
             <a:r>
-              <a:t>Deep Teal</a:t>
+              <a:t>Dusty Blue</a:t>
             </a:r>
           </a:p>
           <a:p>
@@ -4260,7 +4260,7 @@
               </a:defRPr>
             </a:pPr>
             <a:r>
-              <a:t>#145C61</a:t>
+              <a:t>#6E88A3</a:t>
             </a:r>
           </a:p>
           <a:p>
@@ -4276,7 +4276,7 @@
               </a:defRPr>
             </a:pPr>
             <a:r>
-              <a:t>Use Light Text</a:t>
+              <a:t>Use Dark Text</a:t>
             </a:r>
           </a:p>
         </p:txBody>
@@ -4296,7 +4296,7 @@
             <a:avLst/>
           </a:prstGeom>
           <a:solidFill>
-            <a:srgbClr val="5CA4B7"/>
+            <a:srgbClr val="B98DE0"/>
           </a:solidFill>
           <a:ln w="25400">
             <a:solidFill>
@@ -4360,7 +4360,7 @@
               </a:defRPr>
             </a:pPr>
             <a:r>
-              <a:t>Soft Blue</a:t>
+              <a:t>Lavender</a:t>
             </a:r>
           </a:p>
           <a:p>
@@ -4376,7 +4376,7 @@
               </a:defRPr>
             </a:pPr>
             <a:r>
-              <a:t>#5CA4B7</a:t>
+              <a:t>#B98DE0</a:t>
             </a:r>
           </a:p>
           <a:p>
@@ -4412,7 +4412,7 @@
             <a:avLst/>
           </a:prstGeom>
           <a:solidFill>
-            <a:srgbClr val="708090"/>
+            <a:srgbClr val="333333"/>
           </a:solidFill>
           <a:ln w="25400">
             <a:solidFill>
@@ -4476,7 +4476,7 @@
               </a:defRPr>
             </a:pPr>
             <a:r>
-              <a:t>Slate Gray</a:t>
+              <a:t>Charcoal</a:t>
             </a:r>
           </a:p>
           <a:p>
@@ -4492,7 +4492,7 @@
               </a:defRPr>
             </a:pPr>
             <a:r>
-              <a:t>#708090</a:t>
+              <a:t>#333333</a:t>
             </a:r>
           </a:p>
           <a:p>
@@ -4508,7 +4508,7 @@
               </a:defRPr>
             </a:pPr>
             <a:r>
-              <a:t>Use Dark Text</a:t>
+              <a:t>Use Light Text</a:t>
             </a:r>
           </a:p>
         </p:txBody>
@@ -4634,25 +4634,25 @@
           <a:p>
             <a:pPr algn="l">
               <a:spcAft>
-                <a:spcPts val="800"/>
+                <a:spcPts val="600"/>
               </a:spcAft>
-              <a:defRPr sz="1600" b="0">
-                <a:solidFill>
-                  <a:srgbClr val="FFFFFF"/>
-                </a:solidFill>
-                <a:latin typeface="Source Sans Pro"/>
-              </a:defRPr>
-            </a:pPr>
-            <a:r>
-              <a:t>Primary Color Usage Guidelines</a:t>
+              <a:defRPr sz="1400" b="0">
+                <a:solidFill>
+                  <a:srgbClr val="FFFFFF"/>
+                </a:solidFill>
+                <a:latin typeface="Source Sans Pro"/>
+              </a:defRPr>
+            </a:pPr>
+            <a:r>
+              <a:t>Primary Color Usage</a:t>
             </a:r>
           </a:p>
           <a:p>
             <a:pPr algn="l">
               <a:spcAft>
-                <a:spcPts val="800"/>
+                <a:spcPts val="600"/>
               </a:spcAft>
-              <a:defRPr sz="1600" b="0">
+              <a:defRPr sz="1400" b="0">
                 <a:solidFill>
                   <a:srgbClr val="FFFFFF"/>
                 </a:solidFill>
@@ -4663,118 +4663,118 @@
           <a:p>
             <a:pPr algn="l">
               <a:spcAft>
-                <a:spcPts val="800"/>
+                <a:spcPts val="600"/>
               </a:spcAft>
-              <a:defRPr sz="1600" b="0">
-                <a:solidFill>
-                  <a:srgbClr val="FFFFFF"/>
-                </a:solidFill>
-                <a:latin typeface="Source Sans Pro"/>
-              </a:defRPr>
-            </a:pPr>
-            <a:r>
-              <a:t>Your primary colors are the foundation of your brand identity. Use them prominently in:</a:t>
+              <a:defRPr sz="1400" b="0">
+                <a:solidFill>
+                  <a:srgbClr val="FFFFFF"/>
+                </a:solidFill>
+                <a:latin typeface="Source Sans Pro"/>
+              </a:defRPr>
+            </a:pPr>
+            <a:r>
+              <a:t>Use for brand-critical elements:</a:t>
             </a:r>
           </a:p>
           <a:p>
             <a:pPr algn="l">
               <a:spcAft>
-                <a:spcPts val="800"/>
+                <a:spcPts val="600"/>
               </a:spcAft>
-              <a:defRPr sz="1600" b="0">
-                <a:solidFill>
-                  <a:srgbClr val="FFFFFF"/>
-                </a:solidFill>
-                <a:latin typeface="Source Sans Pro"/>
-              </a:defRPr>
-            </a:pPr>
+              <a:defRPr sz="1400" b="0">
+                <a:solidFill>
+                  <a:srgbClr val="FFFFFF"/>
+                </a:solidFill>
+                <a:latin typeface="Source Sans Pro"/>
+              </a:defRPr>
+            </a:pPr>
+            <a:r>
+              <a:t>• Logos and main brand marks</a:t>
+            </a:r>
           </a:p>
           <a:p>
             <a:pPr algn="l">
               <a:spcAft>
-                <a:spcPts val="800"/>
+                <a:spcPts val="600"/>
               </a:spcAft>
-              <a:defRPr sz="1600" b="0">
-                <a:solidFill>
-                  <a:srgbClr val="FFFFFF"/>
-                </a:solidFill>
-                <a:latin typeface="Source Sans Pro"/>
-              </a:defRPr>
-            </a:pPr>
-            <a:r>
-              <a:t>• Brand logos and primary brand marks</a:t>
+              <a:defRPr sz="1400" b="0">
+                <a:solidFill>
+                  <a:srgbClr val="FFFFFF"/>
+                </a:solidFill>
+                <a:latin typeface="Source Sans Pro"/>
+              </a:defRPr>
+            </a:pPr>
+            <a:r>
+              <a:t>• Headlines and key text</a:t>
             </a:r>
           </a:p>
           <a:p>
             <a:pPr algn="l">
               <a:spcAft>
-                <a:spcPts val="800"/>
+                <a:spcPts val="600"/>
               </a:spcAft>
-              <a:defRPr sz="1600" b="0">
-                <a:solidFill>
-                  <a:srgbClr val="FFFFFF"/>
-                </a:solidFill>
-                <a:latin typeface="Source Sans Pro"/>
-              </a:defRPr>
-            </a:pPr>
-            <a:r>
-              <a:t>• Headlines and primary text elements</a:t>
+              <a:defRPr sz="1400" b="0">
+                <a:solidFill>
+                  <a:srgbClr val="FFFFFF"/>
+                </a:solidFill>
+                <a:latin typeface="Source Sans Pro"/>
+              </a:defRPr>
+            </a:pPr>
+            <a:r>
+              <a:t>• CTA buttons and navigation</a:t>
             </a:r>
           </a:p>
           <a:p>
             <a:pPr algn="l">
               <a:spcAft>
-                <a:spcPts val="800"/>
+                <a:spcPts val="600"/>
               </a:spcAft>
-              <a:defRPr sz="1600" b="0">
-                <a:solidFill>
-                  <a:srgbClr val="FFFFFF"/>
-                </a:solidFill>
-                <a:latin typeface="Source Sans Pro"/>
-              </a:defRPr>
-            </a:pPr>
-            <a:r>
-              <a:t>• Call-to-action buttons and key interactive elements</a:t>
+              <a:defRPr sz="1400" b="0">
+                <a:solidFill>
+                  <a:srgbClr val="FFFFFF"/>
+                </a:solidFill>
+                <a:latin typeface="Source Sans Pro"/>
+              </a:defRPr>
+            </a:pPr>
+            <a:r>
+              <a:t>• Hero sections</a:t>
             </a:r>
           </a:p>
           <a:p>
             <a:pPr algn="l">
               <a:spcAft>
-                <a:spcPts val="800"/>
+                <a:spcPts val="600"/>
               </a:spcAft>
-              <a:defRPr sz="1600" b="0">
-                <a:solidFill>
-                  <a:srgbClr val="FFFFFF"/>
-                </a:solidFill>
-                <a:latin typeface="Source Sans Pro"/>
-              </a:defRPr>
-            </a:pPr>
-            <a:r>
-              <a:t>• Primary navigation and menu items</a:t>
-            </a:r>
+              <a:defRPr sz="1400" b="0">
+                <a:solidFill>
+                  <a:srgbClr val="FFFFFF"/>
+                </a:solidFill>
+                <a:latin typeface="Source Sans Pro"/>
+              </a:defRPr>
+            </a:pPr>
           </a:p>
           <a:p>
             <a:pPr algn="l">
               <a:spcAft>
-                <a:spcPts val="800"/>
+                <a:spcPts val="600"/>
               </a:spcAft>
-              <a:defRPr sz="1600" b="0">
-                <a:solidFill>
-                  <a:srgbClr val="FFFFFF"/>
-                </a:solidFill>
-                <a:latin typeface="Source Sans Pro"/>
-              </a:defRPr>
-            </a:pPr>
-            <a:r>
-              <a:t>• Hero sections and main content areas</a:t>
+              <a:defRPr sz="1400" b="0">
+                <a:solidFill>
+                  <a:srgbClr val="FFFFFF"/>
+                </a:solidFill>
+                <a:latin typeface="Source Sans Pro"/>
+              </a:defRPr>
+            </a:pPr>
+            <a:r>
+              <a:t>Colors: Innovation Red, Tech Blue, Digital Green</a:t>
             </a:r>
           </a:p>
           <a:p>
             <a:pPr algn="l">
               <a:spcAft>
-                <a:spcPts val="800"/>
+                <a:spcPts val="600"/>
               </a:spcAft>
-              <a:defRPr sz="1600" b="0">
+              <a:defRPr sz="1400" b="0">
                 <a:solidFill>
                   <a:srgbClr val="FFFFFF"/>
                 </a:solidFill>
@@ -4785,126 +4785,81 @@
           <a:p>
             <a:pPr algn="l">
               <a:spcAft>
-                <a:spcPts val="800"/>
+                <a:spcPts val="600"/>
               </a:spcAft>
-              <a:defRPr sz="1600" b="0">
-                <a:solidFill>
-                  <a:srgbClr val="FFFFFF"/>
-                </a:solidFill>
-                <a:latin typeface="Source Sans Pro"/>
-              </a:defRPr>
-            </a:pPr>
-            <a:r>
-              <a:t>Primary Colors: Primary Blue, Accent Teal, Deep Navy</a:t>
+              <a:defRPr sz="1400" b="0">
+                <a:solidFill>
+                  <a:srgbClr val="FFFFFF"/>
+                </a:solidFill>
+                <a:latin typeface="Source Sans Pro"/>
+              </a:defRPr>
+            </a:pPr>
+            <a:r>
+              <a:t>Best Practices:</a:t>
             </a:r>
           </a:p>
           <a:p>
             <a:pPr algn="l">
               <a:spcAft>
-                <a:spcPts val="800"/>
+                <a:spcPts val="600"/>
               </a:spcAft>
-              <a:defRPr sz="1600" b="0">
-                <a:solidFill>
-                  <a:srgbClr val="FFFFFF"/>
-                </a:solidFill>
-                <a:latin typeface="Source Sans Pro"/>
-              </a:defRPr>
-            </a:pPr>
+              <a:defRPr sz="1400" b="0">
+                <a:solidFill>
+                  <a:srgbClr val="FFFFFF"/>
+                </a:solidFill>
+                <a:latin typeface="Source Sans Pro"/>
+              </a:defRPr>
+            </a:pPr>
+            <a:r>
+              <a:t>- Maximum brand recognition</a:t>
+            </a:r>
           </a:p>
           <a:p>
             <a:pPr algn="l">
               <a:spcAft>
-                <a:spcPts val="800"/>
+                <a:spcPts val="600"/>
               </a:spcAft>
-              <a:defRPr sz="1600" b="0">
-                <a:solidFill>
-                  <a:srgbClr val="FFFFFF"/>
-                </a:solidFill>
-                <a:latin typeface="Source Sans Pro"/>
-              </a:defRPr>
-            </a:pPr>
-            <a:r>
-              <a:t>Best Practices:</a:t>
+              <a:defRPr sz="1400" b="0">
+                <a:solidFill>
+                  <a:srgbClr val="FFFFFF"/>
+                </a:solidFill>
+                <a:latin typeface="Source Sans Pro"/>
+              </a:defRPr>
+            </a:pPr>
+            <a:r>
+              <a:t>- Consistent application</a:t>
             </a:r>
           </a:p>
           <a:p>
             <a:pPr algn="l">
               <a:spcAft>
-                <a:spcPts val="800"/>
+                <a:spcPts val="600"/>
               </a:spcAft>
-              <a:defRPr sz="1600" b="0">
-                <a:solidFill>
-                  <a:srgbClr val="FFFFFF"/>
-                </a:solidFill>
-                <a:latin typeface="Source Sans Pro"/>
-              </a:defRPr>
-            </a:pPr>
-            <a:r>
-              <a:t>- Use primary colors for maximum brand recognition</a:t>
+              <a:defRPr sz="1400" b="0">
+                <a:solidFill>
+                  <a:srgbClr val="FFFFFF"/>
+                </a:solidFill>
+                <a:latin typeface="Source Sans Pro"/>
+              </a:defRPr>
+            </a:pPr>
+            <a:r>
+              <a:t>- Sufficient contrast</a:t>
             </a:r>
           </a:p>
           <a:p>
             <a:pPr algn="l">
               <a:spcAft>
-                <a:spcPts val="800"/>
+                <a:spcPts val="600"/>
               </a:spcAft>
-              <a:defRPr sz="1600" b="0">
-                <a:solidFill>
-                  <a:srgbClr val="FFFFFF"/>
-                </a:solidFill>
-                <a:latin typeface="Source Sans Pro"/>
-              </a:defRPr>
-            </a:pPr>
-            <a:r>
-              <a:t>- Maintain sufficient contrast with background elements</a:t>
-            </a:r>
-          </a:p>
-          <a:p>
-            <a:pPr algn="l">
-              <a:spcAft>
-                <a:spcPts val="800"/>
-              </a:spcAft>
-              <a:defRPr sz="1600" b="0">
-                <a:solidFill>
-                  <a:srgbClr val="FFFFFF"/>
-                </a:solidFill>
-                <a:latin typeface="Source Sans Pro"/>
-              </a:defRPr>
-            </a:pPr>
-            <a:r>
-              <a:t>- Apply consistently across all brand touchpoints</a:t>
-            </a:r>
-          </a:p>
-          <a:p>
-            <a:pPr algn="l">
-              <a:spcAft>
-                <a:spcPts val="800"/>
-              </a:spcAft>
-              <a:defRPr sz="1600" b="0">
-                <a:solidFill>
-                  <a:srgbClr val="FFFFFF"/>
-                </a:solidFill>
-                <a:latin typeface="Source Sans Pro"/>
-              </a:defRPr>
-            </a:pPr>
-            <a:r>
-              <a:t>- Reserve for the most important visual elements</a:t>
-            </a:r>
-          </a:p>
-          <a:p>
-            <a:pPr algn="l">
-              <a:spcAft>
-                <a:spcPts val="800"/>
-              </a:spcAft>
-              <a:defRPr sz="1600" b="0">
-                <a:solidFill>
-                  <a:srgbClr val="FFFFFF"/>
-                </a:solidFill>
-                <a:latin typeface="Source Sans Pro"/>
-              </a:defRPr>
-            </a:pPr>
-            <a:r>
-              <a:t>- Ensure accessibility compliance in all applications</a:t>
+              <a:defRPr sz="1400" b="0">
+                <a:solidFill>
+                  <a:srgbClr val="FFFFFF"/>
+                </a:solidFill>
+                <a:latin typeface="Source Sans Pro"/>
+              </a:defRPr>
+            </a:pPr>
+            <a:r>
+              <a:t>- Accessibility compliance</a:t>
             </a:r>
           </a:p>
         </p:txBody>
@@ -4925,7 +4880,7 @@
           </a:prstGeom>
           <a:ln w="25400">
             <a:solidFill>
-              <a:srgbClr val="2E86AB"/>
+              <a:srgbClr val="FF4D4D"/>
             </a:solidFill>
           </a:ln>
         </p:spPr>
@@ -4969,85 +4924,13 @@
             <a:pPr algn="l">
               <a:defRPr sz="2800" b="1">
                 <a:solidFill>
-                  <a:srgbClr val="2E86AB"/>
+                  <a:srgbClr val="FF4D4D"/>
                 </a:solidFill>
                 <a:latin typeface="Inter"/>
               </a:defRPr>
             </a:pPr>
             <a:r>
               <a:t>Color Usage 1/2</a:t>
-            </a:r>
-          </a:p>
-        </p:txBody>
-      </p:sp>
-      <p:sp>
-        <p:nvSpPr>
-          <p:cNvPr id="5" name="TextBox 4"/>
-          <p:cNvSpPr txBox="1"/>
-          <p:nvPr/>
-        </p:nvSpPr>
-        <p:spPr>
-          <a:xfrm>
-            <a:off x="457200" y="5657850"/>
-            <a:ext cx="4114800" cy="742950"/>
-          </a:xfrm>
-          <a:prstGeom prst="rect">
-            <a:avLst/>
-          </a:prstGeom>
-          <a:noFill/>
-        </p:spPr>
-        <p:txBody>
-          <a:bodyPr wrap="none">
-            <a:spAutoFit/>
-          </a:bodyPr>
-          <a:lstStyle/>
-          <a:p>
-            <a:pPr algn="l">
-              <a:defRPr sz="1000" b="0">
-                <a:solidFill>
-                  <a:srgbClr val="FFFFFF"/>
-                </a:solidFill>
-                <a:latin typeface="Source Sans Pro"/>
-              </a:defRPr>
-            </a:pPr>
-            <a:r>
-              <a:t>TechForward Live</a:t>
-            </a:r>
-          </a:p>
-        </p:txBody>
-      </p:sp>
-      <p:sp>
-        <p:nvSpPr>
-          <p:cNvPr id="6" name="TextBox 5"/>
-          <p:cNvSpPr txBox="1"/>
-          <p:nvPr/>
-        </p:nvSpPr>
-        <p:spPr>
-          <a:xfrm>
-            <a:off x="4572000" y="5657850"/>
-            <a:ext cx="4114800" cy="742950"/>
-          </a:xfrm>
-          <a:prstGeom prst="rect">
-            <a:avLst/>
-          </a:prstGeom>
-          <a:noFill/>
-        </p:spPr>
-        <p:txBody>
-          <a:bodyPr wrap="none">
-            <a:spAutoFit/>
-          </a:bodyPr>
-          <a:lstStyle/>
-          <a:p>
-            <a:pPr algn="r">
-              <a:defRPr sz="1000" b="0">
-                <a:solidFill>
-                  <a:srgbClr val="FFFFFF"/>
-                </a:solidFill>
-                <a:latin typeface="Source Sans Pro"/>
-              </a:defRPr>
-            </a:pPr>
-            <a:r>
-              <a:t>13</a:t>
             </a:r>
           </a:p>
         </p:txBody>
@@ -5102,25 +4985,25 @@
           <a:p>
             <a:pPr algn="l">
               <a:spcAft>
-                <a:spcPts val="800"/>
+                <a:spcPts val="600"/>
               </a:spcAft>
-              <a:defRPr sz="1600" b="0">
-                <a:solidFill>
-                  <a:srgbClr val="FFFFFF"/>
-                </a:solidFill>
-                <a:latin typeface="Source Sans Pro"/>
-              </a:defRPr>
-            </a:pPr>
-            <a:r>
-              <a:t>Secondary Color Usage Guidelines</a:t>
+              <a:defRPr sz="1400" b="0">
+                <a:solidFill>
+                  <a:srgbClr val="FFFFFF"/>
+                </a:solidFill>
+                <a:latin typeface="Source Sans Pro"/>
+              </a:defRPr>
+            </a:pPr>
+            <a:r>
+              <a:t>Secondary Color Usage</a:t>
             </a:r>
           </a:p>
           <a:p>
             <a:pPr algn="l">
               <a:spcAft>
-                <a:spcPts val="800"/>
+                <a:spcPts val="600"/>
               </a:spcAft>
-              <a:defRPr sz="1600" b="0">
+              <a:defRPr sz="1400" b="0">
                 <a:solidFill>
                   <a:srgbClr val="FFFFFF"/>
                 </a:solidFill>
@@ -5131,118 +5014,118 @@
           <a:p>
             <a:pPr algn="l">
               <a:spcAft>
-                <a:spcPts val="800"/>
+                <a:spcPts val="600"/>
               </a:spcAft>
-              <a:defRPr sz="1600" b="0">
-                <a:solidFill>
-                  <a:srgbClr val="FFFFFF"/>
-                </a:solidFill>
-                <a:latin typeface="Source Sans Pro"/>
-              </a:defRPr>
-            </a:pPr>
-            <a:r>
-              <a:t>Secondary colors support and enhance your primary palette. Use them for:</a:t>
+              <a:defRPr sz="1400" b="0">
+                <a:solidFill>
+                  <a:srgbClr val="FFFFFF"/>
+                </a:solidFill>
+                <a:latin typeface="Source Sans Pro"/>
+              </a:defRPr>
+            </a:pPr>
+            <a:r>
+              <a:t>Use for supporting elements:</a:t>
             </a:r>
           </a:p>
           <a:p>
             <a:pPr algn="l">
               <a:spcAft>
-                <a:spcPts val="800"/>
+                <a:spcPts val="600"/>
               </a:spcAft>
-              <a:defRPr sz="1600" b="0">
-                <a:solidFill>
-                  <a:srgbClr val="FFFFFF"/>
-                </a:solidFill>
-                <a:latin typeface="Source Sans Pro"/>
-              </a:defRPr>
-            </a:pPr>
+              <a:defRPr sz="1400" b="0">
+                <a:solidFill>
+                  <a:srgbClr val="FFFFFF"/>
+                </a:solidFill>
+                <a:latin typeface="Source Sans Pro"/>
+              </a:defRPr>
+            </a:pPr>
+            <a:r>
+              <a:t>• Backgrounds and subtle accents</a:t>
+            </a:r>
           </a:p>
           <a:p>
             <a:pPr algn="l">
               <a:spcAft>
-                <a:spcPts val="800"/>
+                <a:spcPts val="600"/>
               </a:spcAft>
-              <a:defRPr sz="1600" b="0">
-                <a:solidFill>
-                  <a:srgbClr val="FFFFFF"/>
-                </a:solidFill>
-                <a:latin typeface="Source Sans Pro"/>
-              </a:defRPr>
-            </a:pPr>
-            <a:r>
-              <a:t>• Background elements and subtle accents</a:t>
+              <a:defRPr sz="1400" b="0">
+                <a:solidFill>
+                  <a:srgbClr val="FFFFFF"/>
+                </a:solidFill>
+                <a:latin typeface="Source Sans Pro"/>
+              </a:defRPr>
+            </a:pPr>
+            <a:r>
+              <a:t>• Secondary text</a:t>
             </a:r>
           </a:p>
           <a:p>
             <a:pPr algn="l">
               <a:spcAft>
-                <a:spcPts val="800"/>
+                <a:spcPts val="600"/>
               </a:spcAft>
-              <a:defRPr sz="1600" b="0">
-                <a:solidFill>
-                  <a:srgbClr val="FFFFFF"/>
-                </a:solidFill>
-                <a:latin typeface="Source Sans Pro"/>
-              </a:defRPr>
-            </a:pPr>
-            <a:r>
-              <a:t>• Secondary text and supporting information</a:t>
+              <a:defRPr sz="1400" b="0">
+                <a:solidFill>
+                  <a:srgbClr val="FFFFFF"/>
+                </a:solidFill>
+                <a:latin typeface="Source Sans Pro"/>
+              </a:defRPr>
+            </a:pPr>
+            <a:r>
+              <a:t>• Borders and dividers</a:t>
             </a:r>
           </a:p>
           <a:p>
             <a:pPr algn="l">
               <a:spcAft>
-                <a:spcPts val="800"/>
+                <a:spcPts val="600"/>
               </a:spcAft>
-              <a:defRPr sz="1600" b="0">
-                <a:solidFill>
-                  <a:srgbClr val="FFFFFF"/>
-                </a:solidFill>
-                <a:latin typeface="Source Sans Pro"/>
-              </a:defRPr>
-            </a:pPr>
-            <a:r>
-              <a:t>• Borders, dividers, and structural elements</a:t>
+              <a:defRPr sz="1400" b="0">
+                <a:solidFill>
+                  <a:srgbClr val="FFFFFF"/>
+                </a:solidFill>
+                <a:latin typeface="Source Sans Pro"/>
+              </a:defRPr>
+            </a:pPr>
+            <a:r>
+              <a:t>• Hover states and icons</a:t>
             </a:r>
           </a:p>
           <a:p>
             <a:pPr algn="l">
               <a:spcAft>
-                <a:spcPts val="800"/>
+                <a:spcPts val="600"/>
               </a:spcAft>
-              <a:defRPr sz="1600" b="0">
-                <a:solidFill>
-                  <a:srgbClr val="FFFFFF"/>
-                </a:solidFill>
-                <a:latin typeface="Source Sans Pro"/>
-              </a:defRPr>
-            </a:pPr>
-            <a:r>
-              <a:t>• Hover states and interactive feedback</a:t>
-            </a:r>
+              <a:defRPr sz="1400" b="0">
+                <a:solidFill>
+                  <a:srgbClr val="FFFFFF"/>
+                </a:solidFill>
+                <a:latin typeface="Source Sans Pro"/>
+              </a:defRPr>
+            </a:pPr>
           </a:p>
           <a:p>
             <a:pPr algn="l">
               <a:spcAft>
-                <a:spcPts val="800"/>
+                <a:spcPts val="600"/>
               </a:spcAft>
-              <a:defRPr sz="1600" b="0">
-                <a:solidFill>
-                  <a:srgbClr val="FFFFFF"/>
-                </a:solidFill>
-                <a:latin typeface="Source Sans Pro"/>
-              </a:defRPr>
-            </a:pPr>
-            <a:r>
-              <a:t>• Icons and decorative elements</a:t>
+              <a:defRPr sz="1400" b="0">
+                <a:solidFill>
+                  <a:srgbClr val="FFFFFF"/>
+                </a:solidFill>
+                <a:latin typeface="Source Sans Pro"/>
+              </a:defRPr>
+            </a:pPr>
+            <a:r>
+              <a:t>Colors: Light Gray, Mint Green, Dusty Blue, Lavender, Charcoal</a:t>
             </a:r>
           </a:p>
           <a:p>
             <a:pPr algn="l">
               <a:spcAft>
-                <a:spcPts val="800"/>
+                <a:spcPts val="600"/>
               </a:spcAft>
-              <a:defRPr sz="1600" b="0">
+              <a:defRPr sz="1400" b="0">
                 <a:solidFill>
                   <a:srgbClr val="FFFFFF"/>
                 </a:solidFill>
@@ -5253,126 +5136,81 @@
           <a:p>
             <a:pPr algn="l">
               <a:spcAft>
-                <a:spcPts val="800"/>
+                <a:spcPts val="600"/>
               </a:spcAft>
-              <a:defRPr sz="1600" b="0">
-                <a:solidFill>
-                  <a:srgbClr val="FFFFFF"/>
-                </a:solidFill>
-                <a:latin typeface="Source Sans Pro"/>
-              </a:defRPr>
-            </a:pPr>
-            <a:r>
-              <a:t>Secondary Colors: Light Gray, Pale Aqua, Deep Teal, Soft Blue, Slate Gray</a:t>
+              <a:defRPr sz="1400" b="0">
+                <a:solidFill>
+                  <a:srgbClr val="FFFFFF"/>
+                </a:solidFill>
+                <a:latin typeface="Source Sans Pro"/>
+              </a:defRPr>
+            </a:pPr>
+            <a:r>
+              <a:t>Best Practices:</a:t>
             </a:r>
           </a:p>
           <a:p>
             <a:pPr algn="l">
               <a:spcAft>
-                <a:spcPts val="800"/>
+                <a:spcPts val="600"/>
               </a:spcAft>
-              <a:defRPr sz="1600" b="0">
-                <a:solidFill>
-                  <a:srgbClr val="FFFFFF"/>
-                </a:solidFill>
-                <a:latin typeface="Source Sans Pro"/>
-              </a:defRPr>
-            </a:pPr>
+              <a:defRPr sz="1400" b="0">
+                <a:solidFill>
+                  <a:srgbClr val="FFFFFF"/>
+                </a:solidFill>
+                <a:latin typeface="Source Sans Pro"/>
+              </a:defRPr>
+            </a:pPr>
+            <a:r>
+              <a:t>- Create visual hierarchy</a:t>
+            </a:r>
           </a:p>
           <a:p>
             <a:pPr algn="l">
               <a:spcAft>
-                <a:spcPts val="800"/>
+                <a:spcPts val="600"/>
               </a:spcAft>
-              <a:defRPr sz="1600" b="0">
-                <a:solidFill>
-                  <a:srgbClr val="FFFFFF"/>
-                </a:solidFill>
-                <a:latin typeface="Source Sans Pro"/>
-              </a:defRPr>
-            </a:pPr>
-            <a:r>
-              <a:t>Best Practices:</a:t>
+              <a:defRPr sz="1400" b="0">
+                <a:solidFill>
+                  <a:srgbClr val="FFFFFF"/>
+                </a:solidFill>
+                <a:latin typeface="Source Sans Pro"/>
+              </a:defRPr>
+            </a:pPr>
+            <a:r>
+              <a:t>- Support, don't compete</a:t>
             </a:r>
           </a:p>
           <a:p>
             <a:pPr algn="l">
               <a:spcAft>
-                <a:spcPts val="800"/>
+                <a:spcPts val="600"/>
               </a:spcAft>
-              <a:defRPr sz="1600" b="0">
-                <a:solidFill>
-                  <a:srgbClr val="FFFFFF"/>
-                </a:solidFill>
-                <a:latin typeface="Source Sans Pro"/>
-              </a:defRPr>
-            </a:pPr>
-            <a:r>
-              <a:t>- Use to create visual hierarchy and balance</a:t>
+              <a:defRPr sz="1400" b="0">
+                <a:solidFill>
+                  <a:srgbClr val="FFFFFF"/>
+                </a:solidFill>
+                <a:latin typeface="Source Sans Pro"/>
+              </a:defRPr>
+            </a:pPr>
+            <a:r>
+              <a:t>- Maintain readability</a:t>
             </a:r>
           </a:p>
           <a:p>
             <a:pPr algn="l">
               <a:spcAft>
-                <a:spcPts val="800"/>
+                <a:spcPts val="600"/>
               </a:spcAft>
-              <a:defRPr sz="1600" b="0">
-                <a:solidFill>
-                  <a:srgbClr val="FFFFFF"/>
-                </a:solidFill>
-                <a:latin typeface="Source Sans Pro"/>
-              </a:defRPr>
-            </a:pPr>
-            <a:r>
-              <a:t>- Apply for backgrounds and supporting elements</a:t>
-            </a:r>
-          </a:p>
-          <a:p>
-            <a:pPr algn="l">
-              <a:spcAft>
-                <a:spcPts val="800"/>
-              </a:spcAft>
-              <a:defRPr sz="1600" b="0">
-                <a:solidFill>
-                  <a:srgbClr val="FFFFFF"/>
-                </a:solidFill>
-                <a:latin typeface="Source Sans Pro"/>
-              </a:defRPr>
-            </a:pPr>
-            <a:r>
-              <a:t>- Maintain readability with appropriate contrast</a:t>
-            </a:r>
-          </a:p>
-          <a:p>
-            <a:pPr algn="l">
-              <a:spcAft>
-                <a:spcPts val="800"/>
-              </a:spcAft>
-              <a:defRPr sz="1600" b="0">
-                <a:solidFill>
-                  <a:srgbClr val="FFFFFF"/>
-                </a:solidFill>
-                <a:latin typeface="Source Sans Pro"/>
-              </a:defRPr>
-            </a:pPr>
-            <a:r>
-              <a:t>- Use sparingly to avoid overwhelming the design</a:t>
-            </a:r>
-          </a:p>
-          <a:p>
-            <a:pPr algn="l">
-              <a:spcAft>
-                <a:spcPts val="800"/>
-              </a:spcAft>
-              <a:defRPr sz="1600" b="0">
-                <a:solidFill>
-                  <a:srgbClr val="FFFFFF"/>
-                </a:solidFill>
-                <a:latin typeface="Source Sans Pro"/>
-              </a:defRPr>
-            </a:pPr>
-            <a:r>
-              <a:t>- Complement, don't compete with primary colors</a:t>
+              <a:defRPr sz="1400" b="0">
+                <a:solidFill>
+                  <a:srgbClr val="FFFFFF"/>
+                </a:solidFill>
+                <a:latin typeface="Source Sans Pro"/>
+              </a:defRPr>
+            </a:pPr>
+            <a:r>
+              <a:t>- Use sparingly</a:t>
             </a:r>
           </a:p>
         </p:txBody>
@@ -5393,7 +5231,7 @@
           </a:prstGeom>
           <a:ln w="25400">
             <a:solidFill>
-              <a:srgbClr val="2E86AB"/>
+              <a:srgbClr val="FF4D4D"/>
             </a:solidFill>
           </a:ln>
         </p:spPr>
@@ -5437,85 +5275,13 @@
             <a:pPr algn="l">
               <a:defRPr sz="2800" b="1">
                 <a:solidFill>
-                  <a:srgbClr val="2E86AB"/>
+                  <a:srgbClr val="FF4D4D"/>
                 </a:solidFill>
                 <a:latin typeface="Inter"/>
               </a:defRPr>
             </a:pPr>
             <a:r>
               <a:t>Color Usage 2/2</a:t>
-            </a:r>
-          </a:p>
-        </p:txBody>
-      </p:sp>
-      <p:sp>
-        <p:nvSpPr>
-          <p:cNvPr id="5" name="TextBox 4"/>
-          <p:cNvSpPr txBox="1"/>
-          <p:nvPr/>
-        </p:nvSpPr>
-        <p:spPr>
-          <a:xfrm>
-            <a:off x="457200" y="5657850"/>
-            <a:ext cx="4114800" cy="742950"/>
-          </a:xfrm>
-          <a:prstGeom prst="rect">
-            <a:avLst/>
-          </a:prstGeom>
-          <a:noFill/>
-        </p:spPr>
-        <p:txBody>
-          <a:bodyPr wrap="none">
-            <a:spAutoFit/>
-          </a:bodyPr>
-          <a:lstStyle/>
-          <a:p>
-            <a:pPr algn="l">
-              <a:defRPr sz="1000" b="0">
-                <a:solidFill>
-                  <a:srgbClr val="FFFFFF"/>
-                </a:solidFill>
-                <a:latin typeface="Source Sans Pro"/>
-              </a:defRPr>
-            </a:pPr>
-            <a:r>
-              <a:t>TechForward Live</a:t>
-            </a:r>
-          </a:p>
-        </p:txBody>
-      </p:sp>
-      <p:sp>
-        <p:nvSpPr>
-          <p:cNvPr id="6" name="TextBox 5"/>
-          <p:cNvSpPr txBox="1"/>
-          <p:nvPr/>
-        </p:nvSpPr>
-        <p:spPr>
-          <a:xfrm>
-            <a:off x="4572000" y="5657850"/>
-            <a:ext cx="4114800" cy="742950"/>
-          </a:xfrm>
-          <a:prstGeom prst="rect">
-            <a:avLst/>
-          </a:prstGeom>
-          <a:noFill/>
-        </p:spPr>
-        <p:txBody>
-          <a:bodyPr wrap="none">
-            <a:spAutoFit/>
-          </a:bodyPr>
-          <a:lstStyle/>
-          <a:p>
-            <a:pPr algn="r">
-              <a:defRPr sz="1000" b="0">
-                <a:solidFill>
-                  <a:srgbClr val="FFFFFF"/>
-                </a:solidFill>
-                <a:latin typeface="Source Sans Pro"/>
-              </a:defRPr>
-            </a:pPr>
-            <a:r>
-              <a:t>14</a:t>
             </a:r>
           </a:p>
         </p:txBody>
@@ -8153,7 +7919,7 @@
               </a:defRPr>
             </a:pPr>
             <a:r>
-              <a:t>Welcome to TechForward Live's brand identity system presentation, where we unveil a transformative approach to showcasing our commitment to innovation and human-centered design. This system ensures an internationally engaging, consistent, and proprietary brand presentation, reflecting our core values of simplicity, excellence, and trust in the dynamic landscape of technology and digital solutions.</a:t>
+              <a:t>Welcome to TechForward Live's brand identity system presentation. Here, we unveil a cohesive framework that guarantees an international, engaging, and recognizable brand presence. Rooted in our core values of innovation, simplicity, and human-centered design, this system embodies our commitment to bridging the gap between complex technology and intuitive user experiences.</a:t>
             </a:r>
           </a:p>
         </p:txBody>
@@ -8289,7 +8055,7 @@
               </a:defRPr>
             </a:pPr>
             <a:r>
-              <a:t>Our vision at TechForward Live is to empower a future where technology seamlessly enhances human potential, driving unparalleled innovation and digital transformation for progressive businesses. We aspire to be the catalyst for unlocking new possibilities and shaping a world where simplicity and excellence define the digital landscape.</a:t>
+              <a:t>At TechForward Live, our vision is to empower Progressive businesses with transformative digital solutions that propel them towards a future of limitless innovation and sustainable growth. We aspire to be the catalyst for change, driving digital transformation and unlocking the full potential of businesses through technology.</a:t>
             </a:r>
           </a:p>
         </p:txBody>
@@ -8425,7 +8191,7 @@
               </a:defRPr>
             </a:pPr>
             <a:r>
-              <a:t>At TechForward Live, we are dedicated to bridging the gap between complex technology and intuitive user experiences. Our mission is to provide cutting-edge technology solutions that drive digital transformation and innovation for businesses, ensuring that our human-centered approach leads the way in creating impactful, user-friendly digital solutions.</a:t>
+              <a:t>Our mission at TechForward Live is to deliver intuitive and human-centered technology solutions that simplify complexity, enhance productivity, and drive innovation in the Technology &amp; Digital Solutions industry. We are committed to bridging the gap between cutting-edge technology and user-friendly experiences, ensuring seamless integration and impactful outcomes for our clients.</a:t>
             </a:r>
           </a:p>
         </p:txBody>
@@ -8561,7 +8327,7 @@
               </a:defRPr>
             </a:pPr>
             <a:r>
-              <a:t>At the core of TechForward Live, our values of innovation, simplicity, human-centered design, excellence, trust, and reliability guide every aspect of our work. We believe in pushing boundaries through innovation, simplifying complexities to create seamless experiences, and always putting humans at the center of our solutions. Our commitment to excellence, trustworthiness, and reliability ensures that we deliver technology solutions that truly transform businesses and drive progress in the digital world.</a:t>
+              <a:t>At the core of TechForward Live's ethos are our unwavering values of Innovation, Simplicity, Human-Centered design, Excellence, Trust, and Reliability. We believe in pushing boundaries through continuous innovation, crafting solutions that prioritize simplicity without compromising on excellence. Our human-centered approach ensures that trust and reliability are woven into every aspect of our technology, empowering Progressive businesses to thrive in an ever-evolving digital landscape.</a:t>
             </a:r>
           </a:p>
         </p:txBody>

--- a/output/techforward_live/techforward_live_enhanced_brand_book.pptx
+++ b/output/techforward_live/techforward_live_enhanced_brand_book.pptx
@@ -3407,7 +3407,7 @@
             <a:avLst/>
           </a:prstGeom>
           <a:solidFill>
-            <a:srgbClr val="FF4D4D"/>
+            <a:srgbClr val="FF5252"/>
           </a:solidFill>
           <a:ln w="25400">
             <a:solidFill>
@@ -3487,7 +3487,7 @@
               </a:defRPr>
             </a:pPr>
             <a:r>
-              <a:t>#FF4D4D</a:t>
+              <a:t>#FF5252</a:t>
             </a:r>
           </a:p>
           <a:p>
@@ -3503,7 +3503,7 @@
               </a:defRPr>
             </a:pPr>
             <a:r>
-              <a:t>RGB(255, 77, 77)</a:t>
+              <a:t>RGB(255, 82, 82)</a:t>
             </a:r>
           </a:p>
           <a:p>
@@ -3519,7 +3519,7 @@
               </a:defRPr>
             </a:pPr>
             <a:r>
-              <a:t>CMYK(0, 69, 69, 0)</a:t>
+              <a:t>CMYK(0, 67, 67, 0)</a:t>
             </a:r>
           </a:p>
           <a:p>
@@ -3555,7 +3555,7 @@
             <a:avLst/>
           </a:prstGeom>
           <a:solidFill>
-            <a:srgbClr val="3F88C5"/>
+            <a:srgbClr val="2E86AB"/>
           </a:solidFill>
           <a:ln w="25400">
             <a:solidFill>
@@ -3619,7 +3619,7 @@
               </a:defRPr>
             </a:pPr>
             <a:r>
-              <a:t>Tech Blue</a:t>
+              <a:t>TechForward Blue</a:t>
             </a:r>
           </a:p>
           <a:p>
@@ -3635,7 +3635,7 @@
               </a:defRPr>
             </a:pPr>
             <a:r>
-              <a:t>#3F88C5</a:t>
+              <a:t>#2E86AB</a:t>
             </a:r>
           </a:p>
           <a:p>
@@ -3651,7 +3651,7 @@
               </a:defRPr>
             </a:pPr>
             <a:r>
-              <a:t>RGB(63, 136, 197)</a:t>
+              <a:t>RGB(46, 134, 171)</a:t>
             </a:r>
           </a:p>
           <a:p>
@@ -3667,7 +3667,7 @@
               </a:defRPr>
             </a:pPr>
             <a:r>
-              <a:t>CMYK(68, 30, 0, 22)</a:t>
+              <a:t>CMYK(73, 21, 0, 32)</a:t>
             </a:r>
           </a:p>
           <a:p>
@@ -3703,7 +3703,7 @@
             <a:avLst/>
           </a:prstGeom>
           <a:solidFill>
-            <a:srgbClr val="00B159"/>
+            <a:srgbClr val="39FF14"/>
           </a:solidFill>
           <a:ln w="25400">
             <a:solidFill>
@@ -3767,7 +3767,7 @@
               </a:defRPr>
             </a:pPr>
             <a:r>
-              <a:t>Digital Green</a:t>
+              <a:t>Dynamic Neon Green</a:t>
             </a:r>
           </a:p>
           <a:p>
@@ -3783,7 +3783,7 @@
               </a:defRPr>
             </a:pPr>
             <a:r>
-              <a:t>#00B159</a:t>
+              <a:t>#39FF14</a:t>
             </a:r>
           </a:p>
           <a:p>
@@ -3799,7 +3799,7 @@
               </a:defRPr>
             </a:pPr>
             <a:r>
-              <a:t>RGB(0, 177, 89)</a:t>
+              <a:t>RGB(57, 255, 20)</a:t>
             </a:r>
           </a:p>
           <a:p>
@@ -3815,7 +3815,7 @@
               </a:defRPr>
             </a:pPr>
             <a:r>
-              <a:t>CMYK(100, 0, 49, 30)</a:t>
+              <a:t>CMYK(77, 0, 92, 0)</a:t>
             </a:r>
           </a:p>
           <a:p>
@@ -3836,9 +3836,157 @@
           </a:p>
         </p:txBody>
       </p:sp>
+      <p:sp>
+        <p:nvSpPr>
+          <p:cNvPr id="8" name="Rectangle 7"/>
+          <p:cNvSpPr/>
+          <p:nvPr/>
+        </p:nvSpPr>
+        <p:spPr>
+          <a:xfrm>
+            <a:off x="4572000" y="3726180"/>
+            <a:ext cx="1828800" cy="1371600"/>
+          </a:xfrm>
+          <a:prstGeom prst="rect">
+            <a:avLst/>
+          </a:prstGeom>
+          <a:solidFill>
+            <a:srgbClr val="C0C0C0"/>
+          </a:solidFill>
+          <a:ln w="25400">
+            <a:solidFill>
+              <a:srgbClr val="FFFFFF"/>
+            </a:solidFill>
+          </a:ln>
+        </p:spPr>
+        <p:style>
+          <a:lnRef idx="1">
+            <a:schemeClr val="accent1"/>
+          </a:lnRef>
+          <a:fillRef idx="3">
+            <a:schemeClr val="accent1"/>
+          </a:fillRef>
+          <a:effectRef idx="2">
+            <a:schemeClr val="accent1"/>
+          </a:effectRef>
+          <a:fontRef idx="minor">
+            <a:schemeClr val="lt1"/>
+          </a:fontRef>
+        </p:style>
+        <p:txBody>
+          <a:bodyPr rtlCol="0" anchor="ctr"/>
+          <a:lstStyle/>
+          <a:p>
+            <a:pPr algn="ctr"/>
+          </a:p>
+        </p:txBody>
+      </p:sp>
+      <p:sp>
+        <p:nvSpPr>
+          <p:cNvPr id="9" name="TextBox 8"/>
+          <p:cNvSpPr txBox="1"/>
+          <p:nvPr/>
+        </p:nvSpPr>
+        <p:spPr>
+          <a:xfrm>
+            <a:off x="6583680" y="3726180"/>
+            <a:ext cx="3017520" cy="1371600"/>
+          </a:xfrm>
+          <a:prstGeom prst="rect">
+            <a:avLst/>
+          </a:prstGeom>
+          <a:noFill/>
+        </p:spPr>
+        <p:txBody>
+          <a:bodyPr wrap="square" lIns="0" rIns="0" tIns="0" bIns="0">
+            <a:spAutoFit/>
+          </a:bodyPr>
+          <a:lstStyle/>
+          <a:p>
+            <a:pPr algn="l">
+              <a:spcAft>
+                <a:spcPts val="300"/>
+              </a:spcAft>
+              <a:defRPr sz="1000" b="0">
+                <a:solidFill>
+                  <a:srgbClr val="FFFFFF"/>
+                </a:solidFill>
+                <a:latin typeface="Source Sans Pro"/>
+              </a:defRPr>
+            </a:pPr>
+            <a:r>
+              <a:t>Futuristic Silver</a:t>
+            </a:r>
+          </a:p>
+          <a:p>
+            <a:pPr algn="l">
+              <a:spcAft>
+                <a:spcPts val="300"/>
+              </a:spcAft>
+              <a:defRPr sz="1000" b="0">
+                <a:solidFill>
+                  <a:srgbClr val="FFFFFF"/>
+                </a:solidFill>
+                <a:latin typeface="Source Sans Pro"/>
+              </a:defRPr>
+            </a:pPr>
+            <a:r>
+              <a:t>#C0C0C0</a:t>
+            </a:r>
+          </a:p>
+          <a:p>
+            <a:pPr algn="l">
+              <a:spcAft>
+                <a:spcPts val="300"/>
+              </a:spcAft>
+              <a:defRPr sz="1000" b="0">
+                <a:solidFill>
+                  <a:srgbClr val="FFFFFF"/>
+                </a:solidFill>
+                <a:latin typeface="Source Sans Pro"/>
+              </a:defRPr>
+            </a:pPr>
+            <a:r>
+              <a:t>RGB(192, 192, 192)</a:t>
+            </a:r>
+          </a:p>
+          <a:p>
+            <a:pPr algn="l">
+              <a:spcAft>
+                <a:spcPts val="300"/>
+              </a:spcAft>
+              <a:defRPr sz="1000" b="0">
+                <a:solidFill>
+                  <a:srgbClr val="FFFFFF"/>
+                </a:solidFill>
+                <a:latin typeface="Source Sans Pro"/>
+              </a:defRPr>
+            </a:pPr>
+            <a:r>
+              <a:t>CMYK(0, 0, 0, 24)</a:t>
+            </a:r>
+          </a:p>
+          <a:p>
+            <a:pPr algn="l">
+              <a:spcAft>
+                <a:spcPts val="300"/>
+              </a:spcAft>
+              <a:defRPr sz="1000" b="0">
+                <a:solidFill>
+                  <a:srgbClr val="FFFFFF"/>
+                </a:solidFill>
+                <a:latin typeface="Source Sans Pro"/>
+              </a:defRPr>
+            </a:pPr>
+            <a:r>
+              <a:t>Use Dark Text</a:t>
+            </a:r>
+          </a:p>
+        </p:txBody>
+      </p:sp>
       <p:cxnSp>
         <p:nvCxnSpPr>
-          <p:cNvPr id="8" name="Connector 7"/>
+          <p:cNvPr id="10" name="Connector 9"/>
           <p:cNvCxnSpPr/>
           <p:nvPr/>
         </p:nvCxnSpPr>
@@ -3873,7 +4021,7 @@
       </p:cxnSp>
       <p:sp>
         <p:nvSpPr>
-          <p:cNvPr id="9" name="TextBox 8"/>
+          <p:cNvPr id="11" name="TextBox 10"/>
           <p:cNvSpPr txBox="1"/>
           <p:nvPr/>
         </p:nvSpPr>
@@ -4064,7 +4212,7 @@
             <a:avLst/>
           </a:prstGeom>
           <a:solidFill>
-            <a:srgbClr val="6FFFB0"/>
+            <a:srgbClr val="8EE4AF"/>
           </a:solidFill>
           <a:ln w="25400">
             <a:solidFill>
@@ -4144,7 +4292,7 @@
               </a:defRPr>
             </a:pPr>
             <a:r>
-              <a:t>#6FFFB0</a:t>
+              <a:t>#8EE4AF</a:t>
             </a:r>
           </a:p>
           <a:p>
@@ -4180,7 +4328,7 @@
             <a:avLst/>
           </a:prstGeom>
           <a:solidFill>
-            <a:srgbClr val="6E88A3"/>
+            <a:srgbClr val="FFC2D7"/>
           </a:solidFill>
           <a:ln w="25400">
             <a:solidFill>
@@ -4244,7 +4392,7 @@
               </a:defRPr>
             </a:pPr>
             <a:r>
-              <a:t>Dusty Blue</a:t>
+              <a:t>Soft Pink</a:t>
             </a:r>
           </a:p>
           <a:p>
@@ -4260,7 +4408,7 @@
               </a:defRPr>
             </a:pPr>
             <a:r>
-              <a:t>#6E88A3</a:t>
+              <a:t>#FFC2D7</a:t>
             </a:r>
           </a:p>
           <a:p>
@@ -4296,7 +4444,7 @@
             <a:avLst/>
           </a:prstGeom>
           <a:solidFill>
-            <a:srgbClr val="B98DE0"/>
+            <a:srgbClr val="5C6BC0"/>
           </a:solidFill>
           <a:ln w="25400">
             <a:solidFill>
@@ -4360,7 +4508,7 @@
               </a:defRPr>
             </a:pPr>
             <a:r>
-              <a:t>Lavender</a:t>
+              <a:t>Slate Blue</a:t>
             </a:r>
           </a:p>
           <a:p>
@@ -4376,7 +4524,7 @@
               </a:defRPr>
             </a:pPr>
             <a:r>
-              <a:t>#B98DE0</a:t>
+              <a:t>#5C6BC0</a:t>
             </a:r>
           </a:p>
           <a:p>
@@ -4392,7 +4540,7 @@
               </a:defRPr>
             </a:pPr>
             <a:r>
-              <a:t>Use Dark Text</a:t>
+              <a:t>Use Light Text</a:t>
             </a:r>
           </a:p>
         </p:txBody>
@@ -4412,7 +4560,7 @@
             <a:avLst/>
           </a:prstGeom>
           <a:solidFill>
-            <a:srgbClr val="333333"/>
+            <a:srgbClr val="005F5F"/>
           </a:solidFill>
           <a:ln w="25400">
             <a:solidFill>
@@ -4476,7 +4624,7 @@
               </a:defRPr>
             </a:pPr>
             <a:r>
-              <a:t>Charcoal</a:t>
+              <a:t>Dark Teal</a:t>
             </a:r>
           </a:p>
           <a:p>
@@ -4492,7 +4640,7 @@
               </a:defRPr>
             </a:pPr>
             <a:r>
-              <a:t>#333333</a:t>
+              <a:t>#005F5F</a:t>
             </a:r>
           </a:p>
           <a:p>
@@ -4766,7 +4914,7 @@
               </a:defRPr>
             </a:pPr>
             <a:r>
-              <a:t>Colors: Innovation Red, Tech Blue, Digital Green</a:t>
+              <a:t>Colors: Innovation Red, TechForward Blue, Dynamic Neon Green, Futuristic Silver</a:t>
             </a:r>
           </a:p>
           <a:p>
@@ -4880,7 +5028,7 @@
           </a:prstGeom>
           <a:ln w="25400">
             <a:solidFill>
-              <a:srgbClr val="FF4D4D"/>
+              <a:srgbClr val="FF5252"/>
             </a:solidFill>
           </a:ln>
         </p:spPr>
@@ -4924,7 +5072,7 @@
             <a:pPr algn="l">
               <a:defRPr sz="2800" b="1">
                 <a:solidFill>
-                  <a:srgbClr val="FF4D4D"/>
+                  <a:srgbClr val="FF5252"/>
                 </a:solidFill>
                 <a:latin typeface="Inter"/>
               </a:defRPr>
@@ -5117,7 +5265,7 @@
               </a:defRPr>
             </a:pPr>
             <a:r>
-              <a:t>Colors: Light Gray, Mint Green, Dusty Blue, Lavender, Charcoal</a:t>
+              <a:t>Colors: Light Gray, Mint Green, Soft Pink, Slate Blue, Dark Teal</a:t>
             </a:r>
           </a:p>
           <a:p>
@@ -5231,7 +5379,7 @@
           </a:prstGeom>
           <a:ln w="25400">
             <a:solidFill>
-              <a:srgbClr val="FF4D4D"/>
+              <a:srgbClr val="FF5252"/>
             </a:solidFill>
           </a:ln>
         </p:spPr>
@@ -5275,7 +5423,7 @@
             <a:pPr algn="l">
               <a:defRPr sz="2800" b="1">
                 <a:solidFill>
-                  <a:srgbClr val="FF4D4D"/>
+                  <a:srgbClr val="FF5252"/>
                 </a:solidFill>
                 <a:latin typeface="Inter"/>
               </a:defRPr>
@@ -7919,7 +8067,7 @@
               </a:defRPr>
             </a:pPr>
             <a:r>
-              <a:t>Welcome to TechForward Live's brand identity system presentation. Here, we unveil a cohesive framework that guarantees an international, engaging, and recognizable brand presence. Rooted in our core values of innovation, simplicity, and human-centered design, this system embodies our commitment to bridging the gap between complex technology and intuitive user experiences.</a:t>
+              <a:t>Welcome to TechForward Live's brand identity system presentation, where we unveil a strategic framework designed to ensure an international, engaging, consistent, recognizable, and proprietary brand presentation. Rooted in our core values of innovation, simplicity, and human-centered design, this system embodies our unique approach in bridging the gap between complex technology and intuitive user experiences. Join us as we showcase how our brand principles of excellence, trust, and reliability come to life in every aspect of our brand presentation.</a:t>
             </a:r>
           </a:p>
         </p:txBody>
@@ -8055,7 +8203,7 @@
               </a:defRPr>
             </a:pPr>
             <a:r>
-              <a:t>At TechForward Live, our vision is to empower Progressive businesses with transformative digital solutions that propel them towards a future of limitless innovation and sustainable growth. We aspire to be the catalyst for change, driving digital transformation and unlocking the full potential of businesses through technology.</a:t>
+              <a:t>Our vision at TechForward Live is to empower Progressive businesses with transformative digital solutions that unlock their full potential, driving innovation and sustainable growth in a rapidly evolving technological landscape. We aspire to be the catalyst for digital transformation, inspiring businesses to embrace change and seize opportunities for a brighter, more connected future.</a:t>
             </a:r>
           </a:p>
         </p:txBody>
@@ -8191,7 +8339,7 @@
               </a:defRPr>
             </a:pPr>
             <a:r>
-              <a:t>Our mission at TechForward Live is to deliver intuitive and human-centered technology solutions that simplify complexity, enhance productivity, and drive innovation in the Technology &amp; Digital Solutions industry. We are committed to bridging the gap between cutting-edge technology and user-friendly experiences, ensuring seamless integration and impactful outcomes for our clients.</a:t>
+              <a:t>At TechForward Live, we are dedicated to bridging the gap between cutting-edge technology and intuitive user experiences. We strive to provide Progressive businesses with innovative digital solutions that enhance efficiency, productivity, and user satisfaction. Our mission is to simplify complex technology, placing human-centered design at the core of everything we do, to drive tangible results and empower businesses to thrive in the digital age.</a:t>
             </a:r>
           </a:p>
         </p:txBody>
@@ -8327,7 +8475,7 @@
               </a:defRPr>
             </a:pPr>
             <a:r>
-              <a:t>At the core of TechForward Live's ethos are our unwavering values of Innovation, Simplicity, Human-Centered design, Excellence, Trust, and Reliability. We believe in pushing boundaries through continuous innovation, crafting solutions that prioritize simplicity without compromising on excellence. Our human-centered approach ensures that trust and reliability are woven into every aspect of our technology, empowering Progressive businesses to thrive in an ever-evolving digital landscape.</a:t>
+              <a:t>At TechForward Live, we live and breathe our core values of Innovation, Simplicity, Human-Centered design, Excellence, Trust, and Reliability. Innovation fuels our drive to push boundaries and pioneer new solutions in the Technology &amp; Digital Solutions industry. Simplicity is the cornerstone of our approach, ensuring that our solutions are intuitive and easy to adopt for Progressive businesses seeking digital transformation. We prioritize Human-Centered design to create meaningful experiences that resonate with users on a personal level. Excellence is our commitment to delivering top-tier solutions that exceed expectations. Trust is the foundation of our relationships with clients and partners, built on transparency and reliability in every interaction. Reliability underscores our dedication to delivering consistent, high-quality results that our clients can depend on to propel their businesses forward.</a:t>
             </a:r>
           </a:p>
         </p:txBody>

--- a/output/techforward_live/techforward_live_enhanced_brand_book.pptx
+++ b/output/techforward_live/techforward_live_enhanced_brand_book.pptx
@@ -3407,154 +3407,6 @@
             <a:avLst/>
           </a:prstGeom>
           <a:solidFill>
-            <a:srgbClr val="FF5252"/>
-          </a:solidFill>
-          <a:ln w="25400">
-            <a:solidFill>
-              <a:srgbClr val="FFFFFF"/>
-            </a:solidFill>
-          </a:ln>
-        </p:spPr>
-        <p:style>
-          <a:lnRef idx="1">
-            <a:schemeClr val="accent1"/>
-          </a:lnRef>
-          <a:fillRef idx="3">
-            <a:schemeClr val="accent1"/>
-          </a:fillRef>
-          <a:effectRef idx="2">
-            <a:schemeClr val="accent1"/>
-          </a:effectRef>
-          <a:fontRef idx="minor">
-            <a:schemeClr val="lt1"/>
-          </a:fontRef>
-        </p:style>
-        <p:txBody>
-          <a:bodyPr rtlCol="0" anchor="ctr"/>
-          <a:lstStyle/>
-          <a:p>
-            <a:pPr algn="ctr"/>
-          </a:p>
-        </p:txBody>
-      </p:sp>
-      <p:sp>
-        <p:nvSpPr>
-          <p:cNvPr id="3" name="TextBox 2"/>
-          <p:cNvSpPr txBox="1"/>
-          <p:nvPr/>
-        </p:nvSpPr>
-        <p:spPr>
-          <a:xfrm>
-            <a:off x="3154680" y="1645920"/>
-            <a:ext cx="3017520" cy="1371600"/>
-          </a:xfrm>
-          <a:prstGeom prst="rect">
-            <a:avLst/>
-          </a:prstGeom>
-          <a:noFill/>
-        </p:spPr>
-        <p:txBody>
-          <a:bodyPr wrap="square" lIns="0" rIns="0" tIns="0" bIns="0">
-            <a:spAutoFit/>
-          </a:bodyPr>
-          <a:lstStyle/>
-          <a:p>
-            <a:pPr algn="l">
-              <a:spcAft>
-                <a:spcPts val="300"/>
-              </a:spcAft>
-              <a:defRPr sz="1000" b="0">
-                <a:solidFill>
-                  <a:srgbClr val="FFFFFF"/>
-                </a:solidFill>
-                <a:latin typeface="Source Sans Pro"/>
-              </a:defRPr>
-            </a:pPr>
-            <a:r>
-              <a:t>Innovation Red</a:t>
-            </a:r>
-          </a:p>
-          <a:p>
-            <a:pPr algn="l">
-              <a:spcAft>
-                <a:spcPts val="300"/>
-              </a:spcAft>
-              <a:defRPr sz="1000" b="0">
-                <a:solidFill>
-                  <a:srgbClr val="FFFFFF"/>
-                </a:solidFill>
-                <a:latin typeface="Source Sans Pro"/>
-              </a:defRPr>
-            </a:pPr>
-            <a:r>
-              <a:t>#FF5252</a:t>
-            </a:r>
-          </a:p>
-          <a:p>
-            <a:pPr algn="l">
-              <a:spcAft>
-                <a:spcPts val="300"/>
-              </a:spcAft>
-              <a:defRPr sz="1000" b="0">
-                <a:solidFill>
-                  <a:srgbClr val="FFFFFF"/>
-                </a:solidFill>
-                <a:latin typeface="Source Sans Pro"/>
-              </a:defRPr>
-            </a:pPr>
-            <a:r>
-              <a:t>RGB(255, 82, 82)</a:t>
-            </a:r>
-          </a:p>
-          <a:p>
-            <a:pPr algn="l">
-              <a:spcAft>
-                <a:spcPts val="300"/>
-              </a:spcAft>
-              <a:defRPr sz="1000" b="0">
-                <a:solidFill>
-                  <a:srgbClr val="FFFFFF"/>
-                </a:solidFill>
-                <a:latin typeface="Source Sans Pro"/>
-              </a:defRPr>
-            </a:pPr>
-            <a:r>
-              <a:t>CMYK(0, 67, 67, 0)</a:t>
-            </a:r>
-          </a:p>
-          <a:p>
-            <a:pPr algn="l">
-              <a:spcAft>
-                <a:spcPts val="300"/>
-              </a:spcAft>
-              <a:defRPr sz="1000" b="0">
-                <a:solidFill>
-                  <a:srgbClr val="FFFFFF"/>
-                </a:solidFill>
-                <a:latin typeface="Source Sans Pro"/>
-              </a:defRPr>
-            </a:pPr>
-            <a:r>
-              <a:t>Use Dark Text</a:t>
-            </a:r>
-          </a:p>
-        </p:txBody>
-      </p:sp>
-      <p:sp>
-        <p:nvSpPr>
-          <p:cNvPr id="4" name="Rectangle 3"/>
-          <p:cNvSpPr/>
-          <p:nvPr/>
-        </p:nvSpPr>
-        <p:spPr>
-          <a:xfrm>
-            <a:off x="4572000" y="1645920"/>
-            <a:ext cx="1828800" cy="1371600"/>
-          </a:xfrm>
-          <a:prstGeom prst="rect">
-            <a:avLst/>
-          </a:prstGeom>
-          <a:solidFill>
             <a:srgbClr val="2E86AB"/>
           </a:solidFill>
           <a:ln w="25400">
@@ -3587,13 +3439,13 @@
       </p:sp>
       <p:sp>
         <p:nvSpPr>
-          <p:cNvPr id="5" name="TextBox 4"/>
+          <p:cNvPr id="3" name="TextBox 2"/>
           <p:cNvSpPr txBox="1"/>
           <p:nvPr/>
         </p:nvSpPr>
         <p:spPr>
           <a:xfrm>
-            <a:off x="6583680" y="1645920"/>
+            <a:off x="3154680" y="1645920"/>
             <a:ext cx="3017520" cy="1371600"/>
           </a:xfrm>
           <a:prstGeom prst="rect">
@@ -3619,7 +3471,7 @@
               </a:defRPr>
             </a:pPr>
             <a:r>
-              <a:t>TechForward Blue</a:t>
+              <a:t>Primary Blue</a:t>
             </a:r>
           </a:p>
           <a:p>
@@ -3690,20 +3542,20 @@
       </p:sp>
       <p:sp>
         <p:nvSpPr>
-          <p:cNvPr id="6" name="Rectangle 5"/>
+          <p:cNvPr id="4" name="Rectangle 3"/>
           <p:cNvSpPr/>
           <p:nvPr/>
         </p:nvSpPr>
         <p:spPr>
           <a:xfrm>
-            <a:off x="1143000" y="3726180"/>
+            <a:off x="4572000" y="1645920"/>
             <a:ext cx="1828800" cy="1371600"/>
           </a:xfrm>
           <a:prstGeom prst="rect">
             <a:avLst/>
           </a:prstGeom>
           <a:solidFill>
-            <a:srgbClr val="39FF14"/>
+            <a:srgbClr val="24A19C"/>
           </a:solidFill>
           <a:ln w="25400">
             <a:solidFill>
@@ -3735,13 +3587,13 @@
       </p:sp>
       <p:sp>
         <p:nvSpPr>
-          <p:cNvPr id="7" name="TextBox 6"/>
+          <p:cNvPr id="5" name="TextBox 4"/>
           <p:cNvSpPr txBox="1"/>
           <p:nvPr/>
         </p:nvSpPr>
         <p:spPr>
           <a:xfrm>
-            <a:off x="3154680" y="3726180"/>
+            <a:off x="6583680" y="1645920"/>
             <a:ext cx="3017520" cy="1371600"/>
           </a:xfrm>
           <a:prstGeom prst="rect">
@@ -3767,7 +3619,7 @@
               </a:defRPr>
             </a:pPr>
             <a:r>
-              <a:t>Dynamic Neon Green</a:t>
+              <a:t>Accent Teal</a:t>
             </a:r>
           </a:p>
           <a:p>
@@ -3783,7 +3635,7 @@
               </a:defRPr>
             </a:pPr>
             <a:r>
-              <a:t>#39FF14</a:t>
+              <a:t>#24A19C</a:t>
             </a:r>
           </a:p>
           <a:p>
@@ -3799,7 +3651,7 @@
               </a:defRPr>
             </a:pPr>
             <a:r>
-              <a:t>RGB(57, 255, 20)</a:t>
+              <a:t>RGB(36, 161, 156)</a:t>
             </a:r>
           </a:p>
           <a:p>
@@ -3815,7 +3667,7 @@
               </a:defRPr>
             </a:pPr>
             <a:r>
-              <a:t>CMYK(77, 0, 92, 0)</a:t>
+              <a:t>CMYK(77, 0, 3, 36)</a:t>
             </a:r>
           </a:p>
           <a:p>
@@ -3838,20 +3690,20 @@
       </p:sp>
       <p:sp>
         <p:nvSpPr>
-          <p:cNvPr id="8" name="Rectangle 7"/>
+          <p:cNvPr id="6" name="Rectangle 5"/>
           <p:cNvSpPr/>
           <p:nvPr/>
         </p:nvSpPr>
         <p:spPr>
           <a:xfrm>
-            <a:off x="4572000" y="3726180"/>
+            <a:off x="1143000" y="3726180"/>
             <a:ext cx="1828800" cy="1371600"/>
           </a:xfrm>
           <a:prstGeom prst="rect">
             <a:avLst/>
           </a:prstGeom>
           <a:solidFill>
-            <a:srgbClr val="C0C0C0"/>
+            <a:srgbClr val="1B365D"/>
           </a:solidFill>
           <a:ln w="25400">
             <a:solidFill>
@@ -3883,13 +3735,13 @@
       </p:sp>
       <p:sp>
         <p:nvSpPr>
-          <p:cNvPr id="9" name="TextBox 8"/>
+          <p:cNvPr id="7" name="TextBox 6"/>
           <p:cNvSpPr txBox="1"/>
           <p:nvPr/>
         </p:nvSpPr>
         <p:spPr>
           <a:xfrm>
-            <a:off x="6583680" y="3726180"/>
+            <a:off x="3154680" y="3726180"/>
             <a:ext cx="3017520" cy="1371600"/>
           </a:xfrm>
           <a:prstGeom prst="rect">
@@ -3915,7 +3767,7 @@
               </a:defRPr>
             </a:pPr>
             <a:r>
-              <a:t>Futuristic Silver</a:t>
+              <a:t>Deep Navy</a:t>
             </a:r>
           </a:p>
           <a:p>
@@ -3931,7 +3783,7 @@
               </a:defRPr>
             </a:pPr>
             <a:r>
-              <a:t>#C0C0C0</a:t>
+              <a:t>#1B365D</a:t>
             </a:r>
           </a:p>
           <a:p>
@@ -3947,7 +3799,7 @@
               </a:defRPr>
             </a:pPr>
             <a:r>
-              <a:t>RGB(192, 192, 192)</a:t>
+              <a:t>RGB(27, 54, 93)</a:t>
             </a:r>
           </a:p>
           <a:p>
@@ -3963,7 +3815,7 @@
               </a:defRPr>
             </a:pPr>
             <a:r>
-              <a:t>CMYK(0, 0, 0, 24)</a:t>
+              <a:t>CMYK(70, 41, 0, 63)</a:t>
             </a:r>
           </a:p>
           <a:p>
@@ -3979,14 +3831,14 @@
               </a:defRPr>
             </a:pPr>
             <a:r>
-              <a:t>Use Dark Text</a:t>
+              <a:t>Use Light Text</a:t>
             </a:r>
           </a:p>
         </p:txBody>
       </p:sp>
       <p:cxnSp>
         <p:nvCxnSpPr>
-          <p:cNvPr id="10" name="Connector 9"/>
+          <p:cNvPr id="8" name="Connector 7"/>
           <p:cNvCxnSpPr/>
           <p:nvPr/>
         </p:nvCxnSpPr>
@@ -4021,7 +3873,7 @@
       </p:cxnSp>
       <p:sp>
         <p:nvSpPr>
-          <p:cNvPr id="11" name="TextBox 10"/>
+          <p:cNvPr id="9" name="TextBox 8"/>
           <p:cNvSpPr txBox="1"/>
           <p:nvPr/>
         </p:nvSpPr>
@@ -4212,7 +4064,7 @@
             <a:avLst/>
           </a:prstGeom>
           <a:solidFill>
-            <a:srgbClr val="8EE4AF"/>
+            <a:srgbClr val="6CD4A2"/>
           </a:solidFill>
           <a:ln w="25400">
             <a:solidFill>
@@ -4292,7 +4144,7 @@
               </a:defRPr>
             </a:pPr>
             <a:r>
-              <a:t>#8EE4AF</a:t>
+              <a:t>#6CD4A2</a:t>
             </a:r>
           </a:p>
           <a:p>
@@ -4328,7 +4180,7 @@
             <a:avLst/>
           </a:prstGeom>
           <a:solidFill>
-            <a:srgbClr val="FFC2D7"/>
+            <a:srgbClr val="0E2941"/>
           </a:solidFill>
           <a:ln w="25400">
             <a:solidFill>
@@ -4392,7 +4244,7 @@
               </a:defRPr>
             </a:pPr>
             <a:r>
-              <a:t>Soft Pink</a:t>
+              <a:t>Deep Blue</a:t>
             </a:r>
           </a:p>
           <a:p>
@@ -4408,7 +4260,7 @@
               </a:defRPr>
             </a:pPr>
             <a:r>
-              <a:t>#FFC2D7</a:t>
+              <a:t>#0E2941</a:t>
             </a:r>
           </a:p>
           <a:p>
@@ -4424,7 +4276,7 @@
               </a:defRPr>
             </a:pPr>
             <a:r>
-              <a:t>Use Dark Text</a:t>
+              <a:t>Use Light Text</a:t>
             </a:r>
           </a:p>
         </p:txBody>
@@ -4444,7 +4296,7 @@
             <a:avLst/>
           </a:prstGeom>
           <a:solidFill>
-            <a:srgbClr val="5C6BC0"/>
+            <a:srgbClr val="F4A460"/>
           </a:solidFill>
           <a:ln w="25400">
             <a:solidFill>
@@ -4508,7 +4360,7 @@
               </a:defRPr>
             </a:pPr>
             <a:r>
-              <a:t>Slate Blue</a:t>
+              <a:t>Peach</a:t>
             </a:r>
           </a:p>
           <a:p>
@@ -4524,7 +4376,7 @@
               </a:defRPr>
             </a:pPr>
             <a:r>
-              <a:t>#5C6BC0</a:t>
+              <a:t>#F4A460</a:t>
             </a:r>
           </a:p>
           <a:p>
@@ -4540,7 +4392,7 @@
               </a:defRPr>
             </a:pPr>
             <a:r>
-              <a:t>Use Light Text</a:t>
+              <a:t>Use Dark Text</a:t>
             </a:r>
           </a:p>
         </p:txBody>
@@ -4560,7 +4412,7 @@
             <a:avLst/>
           </a:prstGeom>
           <a:solidFill>
-            <a:srgbClr val="005F5F"/>
+            <a:srgbClr val="C0C0C0"/>
           </a:solidFill>
           <a:ln w="25400">
             <a:solidFill>
@@ -4624,7 +4476,7 @@
               </a:defRPr>
             </a:pPr>
             <a:r>
-              <a:t>Dark Teal</a:t>
+              <a:t>Silver</a:t>
             </a:r>
           </a:p>
           <a:p>
@@ -4640,7 +4492,7 @@
               </a:defRPr>
             </a:pPr>
             <a:r>
-              <a:t>#005F5F</a:t>
+              <a:t>#C0C0C0</a:t>
             </a:r>
           </a:p>
           <a:p>
@@ -4656,7 +4508,7 @@
               </a:defRPr>
             </a:pPr>
             <a:r>
-              <a:t>Use Light Text</a:t>
+              <a:t>Use Dark Text</a:t>
             </a:r>
           </a:p>
         </p:txBody>
@@ -4914,7 +4766,7 @@
               </a:defRPr>
             </a:pPr>
             <a:r>
-              <a:t>Colors: Innovation Red, TechForward Blue, Dynamic Neon Green, Futuristic Silver</a:t>
+              <a:t>Colors: Primary Blue, Accent Teal, Deep Navy</a:t>
             </a:r>
           </a:p>
           <a:p>
@@ -5028,7 +4880,7 @@
           </a:prstGeom>
           <a:ln w="25400">
             <a:solidFill>
-              <a:srgbClr val="FF5252"/>
+              <a:srgbClr val="2E86AB"/>
             </a:solidFill>
           </a:ln>
         </p:spPr>
@@ -5072,7 +4924,7 @@
             <a:pPr algn="l">
               <a:defRPr sz="2800" b="1">
                 <a:solidFill>
-                  <a:srgbClr val="FF5252"/>
+                  <a:srgbClr val="2E86AB"/>
                 </a:solidFill>
                 <a:latin typeface="Inter"/>
               </a:defRPr>
@@ -5265,7 +5117,7 @@
               </a:defRPr>
             </a:pPr>
             <a:r>
-              <a:t>Colors: Light Gray, Mint Green, Soft Pink, Slate Blue, Dark Teal</a:t>
+              <a:t>Colors: Light Gray, Mint Green, Deep Blue, Peach, Silver</a:t>
             </a:r>
           </a:p>
           <a:p>
@@ -5379,7 +5231,7 @@
           </a:prstGeom>
           <a:ln w="25400">
             <a:solidFill>
-              <a:srgbClr val="FF5252"/>
+              <a:srgbClr val="2E86AB"/>
             </a:solidFill>
           </a:ln>
         </p:spPr>
@@ -5423,7 +5275,7 @@
             <a:pPr algn="l">
               <a:defRPr sz="2800" b="1">
                 <a:solidFill>
-                  <a:srgbClr val="FF5252"/>
+                  <a:srgbClr val="2E86AB"/>
                 </a:solidFill>
                 <a:latin typeface="Inter"/>
               </a:defRPr>
@@ -5445,66 +5297,227 @@
 <file path=ppt/slides/slide15.xml><?xml version="1.0" encoding="utf-8"?>
 <p:sld xmlns:a="http://schemas.openxmlformats.org/drawingml/2006/main" xmlns:p="http://schemas.openxmlformats.org/presentationml/2006/main" xmlns:r="http://schemas.openxmlformats.org/officeDocument/2006/relationships">
   <p:cSld>
+    <p:bg>
+      <p:bgPr>
+        <a:solidFill>
+          <a:srgbClr val="000000"/>
+        </a:solidFill>
+        <a:effectLst/>
+      </p:bgPr>
+    </p:bg>
     <p:spTree>
       <p:nvGrpSpPr>
         <p:cNvPr id="1" name=""/>
         <p:cNvGrpSpPr/>
         <p:nvPr/>
       </p:nvGrpSpPr>
-      <p:sp>
-        <p:nvSpPr>
-          <p:cNvPr id="2" name="Rectangle 1"/>
-          <p:cNvSpPr/>
-          <p:nvPr/>
-        </p:nvSpPr>
-        <p:spPr>
-          <a:xfrm>
-            <a:off x="0" y="0"/>
-            <a:ext cx="9144000" cy="6858000"/>
-          </a:xfrm>
-          <a:prstGeom prst="rect">
-            <a:avLst/>
-          </a:prstGeom>
-          <a:solidFill>
-            <a:srgbClr val="1A1A1A"/>
-          </a:solidFill>
-          <a:ln>
-            <a:noFill/>
+      <p:grpSpPr/>
+      <p:sp>
+        <p:nvSpPr>
+          <p:cNvPr id="2" name="TextBox 1"/>
+          <p:cNvSpPr txBox="1"/>
+          <p:nvPr/>
+        </p:nvSpPr>
+        <p:spPr>
+          <a:xfrm>
+            <a:off x="800100" y="1051560"/>
+            <a:ext cx="6858000" cy="2971800"/>
+          </a:xfrm>
+          <a:prstGeom prst="rect">
+            <a:avLst/>
+          </a:prstGeom>
+          <a:noFill/>
+        </p:spPr>
+        <p:txBody>
+          <a:bodyPr wrap="square" lIns="0" rIns="0" tIns="0" bIns="0">
+            <a:spAutoFit/>
+          </a:bodyPr>
+          <a:lstStyle/>
+          <a:p>
+            <a:pPr algn="l">
+              <a:spcAft>
+                <a:spcPts val="800"/>
+              </a:spcAft>
+              <a:defRPr sz="2000" b="0">
+                <a:solidFill>
+                  <a:srgbClr val="FFFFFF"/>
+                </a:solidFill>
+                <a:latin typeface="Source Sans Pro"/>
+              </a:defRPr>
+            </a:pPr>
+            <a:r>
+              <a:t>Primary Font: Inter</a:t>
+            </a:r>
+          </a:p>
+          <a:p>
+            <a:pPr algn="l">
+              <a:spcAft>
+                <a:spcPts val="800"/>
+              </a:spcAft>
+              <a:defRPr sz="2000" b="0">
+                <a:solidFill>
+                  <a:srgbClr val="FFFFFF"/>
+                </a:solidFill>
+                <a:latin typeface="Source Sans Pro"/>
+              </a:defRPr>
+            </a:pPr>
+          </a:p>
+          <a:p>
+            <a:pPr algn="l">
+              <a:spcAft>
+                <a:spcPts val="800"/>
+              </a:spcAft>
+              <a:defRPr sz="2000" b="0">
+                <a:solidFill>
+                  <a:srgbClr val="FFFFFF"/>
+                </a:solidFill>
+                <a:latin typeface="Source Sans Pro"/>
+              </a:defRPr>
+            </a:pPr>
+            <a:r>
+              <a:t>Secondary Font: Source Sans Pro</a:t>
+            </a:r>
+          </a:p>
+          <a:p>
+            <a:pPr algn="l">
+              <a:spcAft>
+                <a:spcPts val="800"/>
+              </a:spcAft>
+              <a:defRPr sz="2000" b="0">
+                <a:solidFill>
+                  <a:srgbClr val="FFFFFF"/>
+                </a:solidFill>
+                <a:latin typeface="Source Sans Pro"/>
+              </a:defRPr>
+            </a:pPr>
+          </a:p>
+          <a:p>
+            <a:pPr algn="l">
+              <a:spcAft>
+                <a:spcPts val="800"/>
+              </a:spcAft>
+              <a:defRPr sz="2000" b="0">
+                <a:solidFill>
+                  <a:srgbClr val="FFFFFF"/>
+                </a:solidFill>
+                <a:latin typeface="Source Sans Pro"/>
+              </a:defRPr>
+            </a:pPr>
+            <a:r>
+              <a:t>Font Hierarchy:</a:t>
+            </a:r>
+          </a:p>
+          <a:p>
+            <a:pPr algn="l">
+              <a:spcAft>
+                <a:spcPts val="800"/>
+              </a:spcAft>
+              <a:defRPr sz="2000" b="0">
+                <a:solidFill>
+                  <a:srgbClr val="FFFFFF"/>
+                </a:solidFill>
+                <a:latin typeface="Source Sans Pro"/>
+              </a:defRPr>
+            </a:pPr>
+            <a:r>
+              <a:t>• Headlines: Inter - Bold, 28-32pt</a:t>
+            </a:r>
+          </a:p>
+          <a:p>
+            <a:pPr algn="l">
+              <a:spcAft>
+                <a:spcPts val="800"/>
+              </a:spcAft>
+              <a:defRPr sz="2000" b="0">
+                <a:solidFill>
+                  <a:srgbClr val="FFFFFF"/>
+                </a:solidFill>
+                <a:latin typeface="Source Sans Pro"/>
+              </a:defRPr>
+            </a:pPr>
+            <a:r>
+              <a:t>• Subheadlines: Inter - Bold, 20-24pt</a:t>
+            </a:r>
+          </a:p>
+          <a:p>
+            <a:pPr algn="l">
+              <a:spcAft>
+                <a:spcPts val="800"/>
+              </a:spcAft>
+              <a:defRPr sz="2000" b="0">
+                <a:solidFill>
+                  <a:srgbClr val="FFFFFF"/>
+                </a:solidFill>
+                <a:latin typeface="Source Sans Pro"/>
+              </a:defRPr>
+            </a:pPr>
+            <a:r>
+              <a:t>• Body Text: Source Sans Pro - Regular, 16-18pt</a:t>
+            </a:r>
+          </a:p>
+          <a:p>
+            <a:pPr algn="l">
+              <a:spcAft>
+                <a:spcPts val="800"/>
+              </a:spcAft>
+              <a:defRPr sz="2000" b="0">
+                <a:solidFill>
+                  <a:srgbClr val="FFFFFF"/>
+                </a:solidFill>
+                <a:latin typeface="Source Sans Pro"/>
+              </a:defRPr>
+            </a:pPr>
+            <a:r>
+              <a:t>• Caption Text: Source Sans Pro - Regular, 12-14pt</a:t>
+            </a:r>
+          </a:p>
+        </p:txBody>
+      </p:sp>
+      <p:cxnSp>
+        <p:nvCxnSpPr>
+          <p:cNvPr id="3" name="Connector 2"/>
+          <p:cNvCxnSpPr/>
+          <p:nvPr/>
+        </p:nvCxnSpPr>
+        <p:spPr>
+          <a:xfrm>
+            <a:off x="457200" y="4914900.0"/>
+            <a:ext cx="8229600" cy="0.0"/>
+          </a:xfrm>
+          <a:prstGeom prst="line">
+            <a:avLst/>
+          </a:prstGeom>
+          <a:ln w="25400">
+            <a:solidFill>
+              <a:srgbClr val="2E86AB"/>
+            </a:solidFill>
           </a:ln>
         </p:spPr>
         <p:style>
-          <a:lnRef idx="1">
+          <a:lnRef idx="2">
             <a:schemeClr val="accent1"/>
           </a:lnRef>
-          <a:fillRef idx="3">
+          <a:fillRef idx="0">
             <a:schemeClr val="accent1"/>
           </a:fillRef>
-          <a:effectRef idx="2">
+          <a:effectRef idx="1">
             <a:schemeClr val="accent1"/>
           </a:effectRef>
           <a:fontRef idx="minor">
-            <a:schemeClr val="lt1"/>
+            <a:schemeClr val="tx1"/>
           </a:fontRef>
         </p:style>
-        <p:txBody>
-          <a:bodyPr rtlCol="0" anchor="ctr"/>
-          <a:lstStyle/>
-          <a:p>
-            <a:pPr algn="ctr"/>
-          </a:p>
-        </p:txBody>
-      </p:sp>
-      <p:grpSpPr/>
-      <p:sp>
-        <p:nvSpPr>
-          <p:cNvPr id="3" name="TextBox 2"/>
+      </p:cxnSp>
+      <p:sp>
+        <p:nvSpPr>
+          <p:cNvPr id="4" name="TextBox 3"/>
           <p:cNvSpPr txBox="1"/>
           <p:nvPr/>
         </p:nvSpPr>
         <p:spPr>
           <a:xfrm>
-            <a:off x="1143000" y="457200"/>
-            <a:ext cx="6858000" cy="742950"/>
+            <a:off x="800100" y="5189220"/>
+            <a:ext cx="3657600" cy="731520"/>
           </a:xfrm>
           <a:prstGeom prst="rect">
             <a:avLst/>
@@ -5517,376 +5530,16 @@
           </a:bodyPr>
           <a:lstStyle/>
           <a:p>
-            <a:pPr>
-              <a:defRPr sz="3200" b="1">
-                <a:solidFill>
-                  <a:srgbClr val="FFFFFF"/>
+            <a:pPr algn="l">
+              <a:defRPr sz="2800" b="1">
+                <a:solidFill>
+                  <a:srgbClr val="2E86AB"/>
                 </a:solidFill>
                 <a:latin typeface="Inter"/>
               </a:defRPr>
             </a:pPr>
             <a:r>
-              <a:t>Typography</a:t>
-            </a:r>
-          </a:p>
-        </p:txBody>
-      </p:sp>
-      <p:sp>
-        <p:nvSpPr>
-          <p:cNvPr id="4" name="TextBox 3"/>
-          <p:cNvSpPr txBox="1"/>
-          <p:nvPr/>
-        </p:nvSpPr>
-        <p:spPr>
-          <a:xfrm>
-            <a:off x="1143000" y="1943100"/>
-            <a:ext cx="3429000" cy="742950"/>
-          </a:xfrm>
-          <a:prstGeom prst="rect">
-            <a:avLst/>
-          </a:prstGeom>
-          <a:noFill/>
-        </p:spPr>
-        <p:txBody>
-          <a:bodyPr wrap="none">
-            <a:spAutoFit/>
-          </a:bodyPr>
-          <a:lstStyle/>
-          <a:p>
-            <a:pPr>
-              <a:defRPr sz="2000" b="0">
-                <a:solidFill>
-                  <a:srgbClr val="FFFFFF"/>
-                </a:solidFill>
-                <a:latin typeface="Source Sans Pro"/>
-              </a:defRPr>
-            </a:pPr>
-            <a:r>
-              <a:t>Primary Font: Inter</a:t>
-            </a:r>
-          </a:p>
-        </p:txBody>
-      </p:sp>
-      <p:sp>
-        <p:nvSpPr>
-          <p:cNvPr id="5" name="TextBox 4"/>
-          <p:cNvSpPr txBox="1"/>
-          <p:nvPr/>
-        </p:nvSpPr>
-        <p:spPr>
-          <a:xfrm>
-            <a:off x="1143000" y="2686050"/>
-            <a:ext cx="3429000" cy="742950"/>
-          </a:xfrm>
-          <a:prstGeom prst="rect">
-            <a:avLst/>
-          </a:prstGeom>
-          <a:noFill/>
-        </p:spPr>
-        <p:txBody>
-          <a:bodyPr wrap="none">
-            <a:spAutoFit/>
-          </a:bodyPr>
-          <a:lstStyle/>
-          <a:p>
-            <a:pPr>
-              <a:defRPr sz="3200" b="1">
-                <a:solidFill>
-                  <a:srgbClr val="FFFFFF"/>
-                </a:solidFill>
-                <a:latin typeface="Inter"/>
-              </a:defRPr>
-            </a:pPr>
-            <a:r>
-              <a:t>H1 Heading</a:t>
-            </a:r>
-          </a:p>
-        </p:txBody>
-      </p:sp>
-      <p:sp>
-        <p:nvSpPr>
-          <p:cNvPr id="6" name="TextBox 5"/>
-          <p:cNvSpPr txBox="1"/>
-          <p:nvPr/>
-        </p:nvSpPr>
-        <p:spPr>
-          <a:xfrm>
-            <a:off x="1143000" y="3429000"/>
-            <a:ext cx="3429000" cy="742950"/>
-          </a:xfrm>
-          <a:prstGeom prst="rect">
-            <a:avLst/>
-          </a:prstGeom>
-          <a:noFill/>
-        </p:spPr>
-        <p:txBody>
-          <a:bodyPr wrap="none">
-            <a:spAutoFit/>
-          </a:bodyPr>
-          <a:lstStyle/>
-          <a:p>
-            <a:pPr>
-              <a:defRPr sz="2400" b="1">
-                <a:solidFill>
-                  <a:srgbClr val="FFFFFF"/>
-                </a:solidFill>
-                <a:latin typeface="Inter"/>
-              </a:defRPr>
-            </a:pPr>
-            <a:r>
-              <a:t>H2 Heading</a:t>
-            </a:r>
-          </a:p>
-        </p:txBody>
-      </p:sp>
-      <p:sp>
-        <p:nvSpPr>
-          <p:cNvPr id="7" name="TextBox 6"/>
-          <p:cNvSpPr txBox="1"/>
-          <p:nvPr/>
-        </p:nvSpPr>
-        <p:spPr>
-          <a:xfrm>
-            <a:off x="1143000" y="4171950"/>
-            <a:ext cx="3429000" cy="742950"/>
-          </a:xfrm>
-          <a:prstGeom prst="rect">
-            <a:avLst/>
-          </a:prstGeom>
-          <a:noFill/>
-        </p:spPr>
-        <p:txBody>
-          <a:bodyPr wrap="none">
-            <a:spAutoFit/>
-          </a:bodyPr>
-          <a:lstStyle/>
-          <a:p>
-            <a:pPr>
-              <a:defRPr sz="2000" b="0">
-                <a:solidFill>
-                  <a:srgbClr val="FFFFFF"/>
-                </a:solidFill>
-                <a:latin typeface="Inter"/>
-              </a:defRPr>
-            </a:pPr>
-            <a:r>
-              <a:t>H3 Heading</a:t>
-            </a:r>
-          </a:p>
-        </p:txBody>
-      </p:sp>
-      <p:sp>
-        <p:nvSpPr>
-          <p:cNvPr id="8" name="TextBox 7"/>
-          <p:cNvSpPr txBox="1"/>
-          <p:nvPr/>
-        </p:nvSpPr>
-        <p:spPr>
-          <a:xfrm>
-            <a:off x="5257800" y="1943100"/>
-            <a:ext cx="3429000" cy="742950"/>
-          </a:xfrm>
-          <a:prstGeom prst="rect">
-            <a:avLst/>
-          </a:prstGeom>
-          <a:noFill/>
-        </p:spPr>
-        <p:txBody>
-          <a:bodyPr wrap="none">
-            <a:spAutoFit/>
-          </a:bodyPr>
-          <a:lstStyle/>
-          <a:p>
-            <a:pPr>
-              <a:defRPr sz="2000" b="0">
-                <a:solidFill>
-                  <a:srgbClr val="FFFFFF"/>
-                </a:solidFill>
-                <a:latin typeface="Source Sans Pro"/>
-              </a:defRPr>
-            </a:pPr>
-            <a:r>
-              <a:t>Secondary Font: Source Sans Pro</a:t>
-            </a:r>
-          </a:p>
-        </p:txBody>
-      </p:sp>
-      <p:sp>
-        <p:nvSpPr>
-          <p:cNvPr id="9" name="TextBox 8"/>
-          <p:cNvSpPr txBox="1"/>
-          <p:nvPr/>
-        </p:nvSpPr>
-        <p:spPr>
-          <a:xfrm>
-            <a:off x="5257800" y="2686050"/>
-            <a:ext cx="3429000" cy="742950"/>
-          </a:xfrm>
-          <a:prstGeom prst="rect">
-            <a:avLst/>
-          </a:prstGeom>
-          <a:noFill/>
-        </p:spPr>
-        <p:txBody>
-          <a:bodyPr wrap="none">
-            <a:spAutoFit/>
-          </a:bodyPr>
-          <a:lstStyle/>
-          <a:p>
-            <a:pPr>
-              <a:defRPr sz="1600" b="0">
-                <a:solidFill>
-                  <a:srgbClr val="FFFFFF"/>
-                </a:solidFill>
-                <a:latin typeface="Source Sans Pro"/>
-              </a:defRPr>
-            </a:pPr>
-            <a:r>
-              <a:t>Body Text</a:t>
-            </a:r>
-          </a:p>
-        </p:txBody>
-      </p:sp>
-      <p:sp>
-        <p:nvSpPr>
-          <p:cNvPr id="10" name="TextBox 9"/>
-          <p:cNvSpPr txBox="1"/>
-          <p:nvPr/>
-        </p:nvSpPr>
-        <p:spPr>
-          <a:xfrm>
-            <a:off x="5257800" y="3429000"/>
-            <a:ext cx="3429000" cy="742950"/>
-          </a:xfrm>
-          <a:prstGeom prst="rect">
-            <a:avLst/>
-          </a:prstGeom>
-          <a:noFill/>
-        </p:spPr>
-        <p:txBody>
-          <a:bodyPr wrap="none">
-            <a:spAutoFit/>
-          </a:bodyPr>
-          <a:lstStyle/>
-          <a:p>
-            <a:pPr>
-              <a:defRPr sz="1600" b="1">
-                <a:solidFill>
-                  <a:srgbClr val="FFFFFF"/>
-                </a:solidFill>
-                <a:latin typeface="Source Sans Pro"/>
-              </a:defRPr>
-            </a:pPr>
-            <a:r>
-              <a:t>Body Bold</a:t>
-            </a:r>
-          </a:p>
-        </p:txBody>
-      </p:sp>
-      <p:sp>
-        <p:nvSpPr>
-          <p:cNvPr id="11" name="TextBox 10"/>
-          <p:cNvSpPr txBox="1"/>
-          <p:nvPr/>
-        </p:nvSpPr>
-        <p:spPr>
-          <a:xfrm>
-            <a:off x="5257800" y="4171950"/>
-            <a:ext cx="3429000" cy="742950"/>
-          </a:xfrm>
-          <a:prstGeom prst="rect">
-            <a:avLst/>
-          </a:prstGeom>
-          <a:noFill/>
-        </p:spPr>
-        <p:txBody>
-          <a:bodyPr wrap="none">
-            <a:spAutoFit/>
-          </a:bodyPr>
-          <a:lstStyle/>
-          <a:p>
-            <a:pPr>
-              <a:defRPr sz="1200" b="0">
-                <a:solidFill>
-                  <a:srgbClr val="FFFFFF"/>
-                </a:solidFill>
-                <a:latin typeface="Source Sans Pro"/>
-              </a:defRPr>
-            </a:pPr>
-            <a:r>
-              <a:t>Caption Text</a:t>
-            </a:r>
-          </a:p>
-        </p:txBody>
-      </p:sp>
-      <p:sp>
-        <p:nvSpPr>
-          <p:cNvPr id="12" name="TextBox 11"/>
-          <p:cNvSpPr txBox="1"/>
-          <p:nvPr/>
-        </p:nvSpPr>
-        <p:spPr>
-          <a:xfrm>
-            <a:off x="457200" y="5657850"/>
-            <a:ext cx="4114800" cy="742950"/>
-          </a:xfrm>
-          <a:prstGeom prst="rect">
-            <a:avLst/>
-          </a:prstGeom>
-          <a:noFill/>
-        </p:spPr>
-        <p:txBody>
-          <a:bodyPr wrap="none">
-            <a:spAutoFit/>
-          </a:bodyPr>
-          <a:lstStyle/>
-          <a:p>
-            <a:pPr algn="l">
-              <a:defRPr sz="1000" b="0">
-                <a:solidFill>
-                  <a:srgbClr val="FFFFFF"/>
-                </a:solidFill>
-                <a:latin typeface="Source Sans Pro"/>
-              </a:defRPr>
-            </a:pPr>
-            <a:r>
-              <a:t>TechForward Live</a:t>
-            </a:r>
-          </a:p>
-        </p:txBody>
-      </p:sp>
-      <p:sp>
-        <p:nvSpPr>
-          <p:cNvPr id="13" name="TextBox 12"/>
-          <p:cNvSpPr txBox="1"/>
-          <p:nvPr/>
-        </p:nvSpPr>
-        <p:spPr>
-          <a:xfrm>
-            <a:off x="4572000" y="5657850"/>
-            <a:ext cx="4114800" cy="742950"/>
-          </a:xfrm>
-          <a:prstGeom prst="rect">
-            <a:avLst/>
-          </a:prstGeom>
-          <a:noFill/>
-        </p:spPr>
-        <p:txBody>
-          <a:bodyPr wrap="none">
-            <a:spAutoFit/>
-          </a:bodyPr>
-          <a:lstStyle/>
-          <a:p>
-            <a:pPr algn="r">
-              <a:defRPr sz="1000" b="0">
-                <a:solidFill>
-                  <a:srgbClr val="FFFFFF"/>
-                </a:solidFill>
-                <a:latin typeface="Source Sans Pro"/>
-              </a:defRPr>
-            </a:pPr>
-            <a:r>
-              <a:t>15</a:t>
+              <a:t>TYPOGRAPHY</a:t>
             </a:r>
           </a:p>
         </p:txBody>
@@ -8067,7 +7720,7 @@
               </a:defRPr>
             </a:pPr>
             <a:r>
-              <a:t>Welcome to TechForward Live's brand identity system presentation, where we unveil a strategic framework designed to ensure an international, engaging, consistent, recognizable, and proprietary brand presentation. Rooted in our core values of innovation, simplicity, and human-centered design, this system embodies our unique approach in bridging the gap between complex technology and intuitive user experiences. Join us as we showcase how our brand principles of excellence, trust, and reliability come to life in every aspect of our brand presentation.</a:t>
+              <a:t>Welcome to the unveiling of TechForward Live's comprehensive brand identity system. Designed to ensure a globally engaging, consistent, and recognizable brand presentation, this system embodies our unique approach of bridging complex technology with intuitive user experiences. Rooted in our fundamental principles of innovation, simplicity, and human-centered design, it is poised to elevate TechForward Live in the dynamic landscape of Technology &amp; Digital Solutions.</a:t>
             </a:r>
           </a:p>
         </p:txBody>
@@ -8203,7 +7856,7 @@
               </a:defRPr>
             </a:pPr>
             <a:r>
-              <a:t>Our vision at TechForward Live is to empower Progressive businesses with transformative digital solutions that unlock their full potential, driving innovation and sustainable growth in a rapidly evolving technological landscape. We aspire to be the catalyst for digital transformation, inspiring businesses to embrace change and seize opportunities for a brighter, more connected future.</a:t>
+              <a:t>At TechForward Live, we envision a future where digital transformation empowers businesses to unlock their full potential through innovative and human-centered technology solutions. Our ultimate goal is to revolutionize the digital landscape by simplifying complexity and driving progress for forward-thinking organizations seeking innovation.</a:t>
             </a:r>
           </a:p>
         </p:txBody>
@@ -8339,7 +7992,7 @@
               </a:defRPr>
             </a:pPr>
             <a:r>
-              <a:t>At TechForward Live, we are dedicated to bridging the gap between cutting-edge technology and intuitive user experiences. We strive to provide Progressive businesses with innovative digital solutions that enhance efficiency, productivity, and user satisfaction. Our mission is to simplify complex technology, placing human-centered design at the core of everything we do, to drive tangible results and empower businesses to thrive in the digital age.</a:t>
+              <a:t>TechForward Live is dedicated to delivering cutting-edge technology and digital solutions that blend simplicity with excellence. We exist to bridge the gap between traditional tech offerings and intuitive user experiences, providing progressive businesses with the tools they need to thrive in the ever-evolving digital world.</a:t>
             </a:r>
           </a:p>
         </p:txBody>
@@ -8475,7 +8128,7 @@
               </a:defRPr>
             </a:pPr>
             <a:r>
-              <a:t>At TechForward Live, we live and breathe our core values of Innovation, Simplicity, Human-Centered design, Excellence, Trust, and Reliability. Innovation fuels our drive to push boundaries and pioneer new solutions in the Technology &amp; Digital Solutions industry. Simplicity is the cornerstone of our approach, ensuring that our solutions are intuitive and easy to adopt for Progressive businesses seeking digital transformation. We prioritize Human-Centered design to create meaningful experiences that resonate with users on a personal level. Excellence is our commitment to delivering top-tier solutions that exceed expectations. Trust is the foundation of our relationships with clients and partners, built on transparency and reliability in every interaction. Reliability underscores our dedication to delivering consistent, high-quality results that our clients can depend on to propel their businesses forward.</a:t>
+              <a:t>Grounded in our core values of innovation, simplicity, and human-centered design, we strive for excellence in all that we do. Our commitment to trust and reliability ensures that our solutions not only meet but exceed the expectations of our clients, fostering lasting partnerships built on mutual growth and success in the dynamic realm of technology and digital innovation.</a:t>
             </a:r>
           </a:p>
         </p:txBody>

--- a/output/techforward_live/techforward_live_enhanced_brand_book.pptx
+++ b/output/techforward_live/techforward_live_enhanced_brand_book.pptx
@@ -20,7 +20,6 @@
     <p:sldId id="268" r:id="rId19"/>
     <p:sldId id="269" r:id="rId20"/>
     <p:sldId id="270" r:id="rId21"/>
-    <p:sldId id="271" r:id="rId22"/>
   </p:sldIdLst>
   <p:sldSz cx="9144000" cy="6858000" type="screen4x3"/>
   <p:notesSz cx="6858000" cy="9144000"/>
@@ -3311,7 +3310,7 @@
           </a:prstGeom>
           <a:ln w="25400">
             <a:solidFill>
-              <a:srgbClr val="2E86AB"/>
+              <a:srgbClr val="FF4D4D"/>
             </a:solidFill>
           </a:ln>
         </p:spPr>
@@ -3355,7 +3354,7 @@
             <a:pPr algn="l">
               <a:defRPr sz="2800" b="1">
                 <a:solidFill>
-                  <a:srgbClr val="2E86AB"/>
+                  <a:srgbClr val="FF4D4D"/>
                 </a:solidFill>
                 <a:latin typeface="Inter"/>
               </a:defRPr>
@@ -3407,7 +3406,7 @@
             <a:avLst/>
           </a:prstGeom>
           <a:solidFill>
-            <a:srgbClr val="2E86AB"/>
+            <a:srgbClr val="FF4D4D"/>
           </a:solidFill>
           <a:ln w="25400">
             <a:solidFill>
@@ -3471,7 +3470,7 @@
               </a:defRPr>
             </a:pPr>
             <a:r>
-              <a:t>Primary Blue</a:t>
+              <a:t>Innovation Red</a:t>
             </a:r>
           </a:p>
           <a:p>
@@ -3487,7 +3486,7 @@
               </a:defRPr>
             </a:pPr>
             <a:r>
-              <a:t>#2E86AB</a:t>
+              <a:t>#FF4D4D</a:t>
             </a:r>
           </a:p>
           <a:p>
@@ -3503,7 +3502,7 @@
               </a:defRPr>
             </a:pPr>
             <a:r>
-              <a:t>RGB(46, 134, 171)</a:t>
+              <a:t>RGB(255, 77, 77)</a:t>
             </a:r>
           </a:p>
           <a:p>
@@ -3519,7 +3518,7 @@
               </a:defRPr>
             </a:pPr>
             <a:r>
-              <a:t>CMYK(73, 21, 0, 32)</a:t>
+              <a:t>CMYK(0, 69, 69, 0)</a:t>
             </a:r>
           </a:p>
           <a:p>
@@ -3555,7 +3554,7 @@
             <a:avLst/>
           </a:prstGeom>
           <a:solidFill>
-            <a:srgbClr val="24A19C"/>
+            <a:srgbClr val="0077B6"/>
           </a:solidFill>
           <a:ln w="25400">
             <a:solidFill>
@@ -3619,7 +3618,7 @@
               </a:defRPr>
             </a:pPr>
             <a:r>
-              <a:t>Accent Teal</a:t>
+              <a:t>Tech Blue</a:t>
             </a:r>
           </a:p>
           <a:p>
@@ -3635,7 +3634,7 @@
               </a:defRPr>
             </a:pPr>
             <a:r>
-              <a:t>#24A19C</a:t>
+              <a:t>#0077B6</a:t>
             </a:r>
           </a:p>
           <a:p>
@@ -3651,7 +3650,7 @@
               </a:defRPr>
             </a:pPr>
             <a:r>
-              <a:t>RGB(36, 161, 156)</a:t>
+              <a:t>RGB(0, 119, 182)</a:t>
             </a:r>
           </a:p>
           <a:p>
@@ -3667,7 +3666,7 @@
               </a:defRPr>
             </a:pPr>
             <a:r>
-              <a:t>CMYK(77, 0, 3, 36)</a:t>
+              <a:t>CMYK(100, 34, 0, 28)</a:t>
             </a:r>
           </a:p>
           <a:p>
@@ -3683,7 +3682,7 @@
               </a:defRPr>
             </a:pPr>
             <a:r>
-              <a:t>Use Dark Text</a:t>
+              <a:t>Use Light Text</a:t>
             </a:r>
           </a:p>
         </p:txBody>
@@ -3703,7 +3702,7 @@
             <a:avLst/>
           </a:prstGeom>
           <a:solidFill>
-            <a:srgbClr val="1B365D"/>
+            <a:srgbClr val="00A86B"/>
           </a:solidFill>
           <a:ln w="25400">
             <a:solidFill>
@@ -3767,7 +3766,7 @@
               </a:defRPr>
             </a:pPr>
             <a:r>
-              <a:t>Deep Navy</a:t>
+              <a:t>Digital Green</a:t>
             </a:r>
           </a:p>
           <a:p>
@@ -3783,7 +3782,7 @@
               </a:defRPr>
             </a:pPr>
             <a:r>
-              <a:t>#1B365D</a:t>
+              <a:t>#00A86B</a:t>
             </a:r>
           </a:p>
           <a:p>
@@ -3799,7 +3798,7 @@
               </a:defRPr>
             </a:pPr>
             <a:r>
-              <a:t>RGB(27, 54, 93)</a:t>
+              <a:t>RGB(0, 168, 107)</a:t>
             </a:r>
           </a:p>
           <a:p>
@@ -3815,7 +3814,7 @@
               </a:defRPr>
             </a:pPr>
             <a:r>
-              <a:t>CMYK(70, 41, 0, 63)</a:t>
+              <a:t>CMYK(100, 0, 36, 34)</a:t>
             </a:r>
           </a:p>
           <a:p>
@@ -3831,14 +3830,162 @@
               </a:defRPr>
             </a:pPr>
             <a:r>
-              <a:t>Use Light Text</a:t>
+              <a:t>Use Dark Text</a:t>
+            </a:r>
+          </a:p>
+        </p:txBody>
+      </p:sp>
+      <p:sp>
+        <p:nvSpPr>
+          <p:cNvPr id="8" name="Rectangle 7"/>
+          <p:cNvSpPr/>
+          <p:nvPr/>
+        </p:nvSpPr>
+        <p:spPr>
+          <a:xfrm>
+            <a:off x="4572000" y="3726180"/>
+            <a:ext cx="1828800" cy="1371600"/>
+          </a:xfrm>
+          <a:prstGeom prst="rect">
+            <a:avLst/>
+          </a:prstGeom>
+          <a:solidFill>
+            <a:srgbClr val="A6A6A6"/>
+          </a:solidFill>
+          <a:ln w="25400">
+            <a:solidFill>
+              <a:srgbClr val="FFFFFF"/>
+            </a:solidFill>
+          </a:ln>
+        </p:spPr>
+        <p:style>
+          <a:lnRef idx="1">
+            <a:schemeClr val="accent1"/>
+          </a:lnRef>
+          <a:fillRef idx="3">
+            <a:schemeClr val="accent1"/>
+          </a:fillRef>
+          <a:effectRef idx="2">
+            <a:schemeClr val="accent1"/>
+          </a:effectRef>
+          <a:fontRef idx="minor">
+            <a:schemeClr val="lt1"/>
+          </a:fontRef>
+        </p:style>
+        <p:txBody>
+          <a:bodyPr rtlCol="0" anchor="ctr"/>
+          <a:lstStyle/>
+          <a:p>
+            <a:pPr algn="ctr"/>
+          </a:p>
+        </p:txBody>
+      </p:sp>
+      <p:sp>
+        <p:nvSpPr>
+          <p:cNvPr id="9" name="TextBox 8"/>
+          <p:cNvSpPr txBox="1"/>
+          <p:nvPr/>
+        </p:nvSpPr>
+        <p:spPr>
+          <a:xfrm>
+            <a:off x="6583680" y="3726180"/>
+            <a:ext cx="3017520" cy="1371600"/>
+          </a:xfrm>
+          <a:prstGeom prst="rect">
+            <a:avLst/>
+          </a:prstGeom>
+          <a:noFill/>
+        </p:spPr>
+        <p:txBody>
+          <a:bodyPr wrap="square" lIns="0" rIns="0" tIns="0" bIns="0">
+            <a:spAutoFit/>
+          </a:bodyPr>
+          <a:lstStyle/>
+          <a:p>
+            <a:pPr algn="l">
+              <a:spcAft>
+                <a:spcPts val="300"/>
+              </a:spcAft>
+              <a:defRPr sz="1000" b="0">
+                <a:solidFill>
+                  <a:srgbClr val="FFFFFF"/>
+                </a:solidFill>
+                <a:latin typeface="Source Sans Pro"/>
+              </a:defRPr>
+            </a:pPr>
+            <a:r>
+              <a:t>Simplicity Gray</a:t>
+            </a:r>
+          </a:p>
+          <a:p>
+            <a:pPr algn="l">
+              <a:spcAft>
+                <a:spcPts val="300"/>
+              </a:spcAft>
+              <a:defRPr sz="1000" b="0">
+                <a:solidFill>
+                  <a:srgbClr val="FFFFFF"/>
+                </a:solidFill>
+                <a:latin typeface="Source Sans Pro"/>
+              </a:defRPr>
+            </a:pPr>
+            <a:r>
+              <a:t>#A6A6A6</a:t>
+            </a:r>
+          </a:p>
+          <a:p>
+            <a:pPr algn="l">
+              <a:spcAft>
+                <a:spcPts val="300"/>
+              </a:spcAft>
+              <a:defRPr sz="1000" b="0">
+                <a:solidFill>
+                  <a:srgbClr val="FFFFFF"/>
+                </a:solidFill>
+                <a:latin typeface="Source Sans Pro"/>
+              </a:defRPr>
+            </a:pPr>
+            <a:r>
+              <a:t>RGB(166, 166, 166)</a:t>
+            </a:r>
+          </a:p>
+          <a:p>
+            <a:pPr algn="l">
+              <a:spcAft>
+                <a:spcPts val="300"/>
+              </a:spcAft>
+              <a:defRPr sz="1000" b="0">
+                <a:solidFill>
+                  <a:srgbClr val="FFFFFF"/>
+                </a:solidFill>
+                <a:latin typeface="Source Sans Pro"/>
+              </a:defRPr>
+            </a:pPr>
+            <a:r>
+              <a:t>CMYK(0, 0, 0, 34)</a:t>
+            </a:r>
+          </a:p>
+          <a:p>
+            <a:pPr algn="l">
+              <a:spcAft>
+                <a:spcPts val="300"/>
+              </a:spcAft>
+              <a:defRPr sz="1000" b="0">
+                <a:solidFill>
+                  <a:srgbClr val="FFFFFF"/>
+                </a:solidFill>
+                <a:latin typeface="Source Sans Pro"/>
+              </a:defRPr>
+            </a:pPr>
+            <a:r>
+              <a:t>Use Dark Text</a:t>
             </a:r>
           </a:p>
         </p:txBody>
       </p:sp>
       <p:cxnSp>
         <p:nvCxnSpPr>
-          <p:cNvPr id="8" name="Connector 7"/>
+          <p:cNvPr id="10" name="Connector 9"/>
           <p:cNvCxnSpPr/>
           <p:nvPr/>
         </p:nvCxnSpPr>
@@ -3852,7 +3999,7 @@
           </a:prstGeom>
           <a:ln w="25400">
             <a:solidFill>
-              <a:srgbClr val="2E86AB"/>
+              <a:srgbClr val="FF4D4D"/>
             </a:solidFill>
           </a:ln>
         </p:spPr>
@@ -3873,7 +4020,7 @@
       </p:cxnSp>
       <p:sp>
         <p:nvSpPr>
-          <p:cNvPr id="9" name="TextBox 8"/>
+          <p:cNvPr id="11" name="TextBox 10"/>
           <p:cNvSpPr txBox="1"/>
           <p:nvPr/>
         </p:nvSpPr>
@@ -3896,7 +4043,7 @@
             <a:pPr algn="l">
               <a:defRPr sz="2800" b="1">
                 <a:solidFill>
-                  <a:srgbClr val="2E86AB"/>
+                  <a:srgbClr val="FF4D4D"/>
                 </a:solidFill>
                 <a:latin typeface="Inter"/>
               </a:defRPr>
@@ -4064,7 +4211,7 @@
             <a:avLst/>
           </a:prstGeom>
           <a:solidFill>
-            <a:srgbClr val="6CD4A2"/>
+            <a:srgbClr val="5CE6A1"/>
           </a:solidFill>
           <a:ln w="25400">
             <a:solidFill>
@@ -4144,7 +4291,7 @@
               </a:defRPr>
             </a:pPr>
             <a:r>
-              <a:t>#6CD4A2</a:t>
+              <a:t>#5CE6A1</a:t>
             </a:r>
           </a:p>
           <a:p>
@@ -4180,7 +4327,7 @@
             <a:avLst/>
           </a:prstGeom>
           <a:solidFill>
-            <a:srgbClr val="0E2941"/>
+            <a:srgbClr val="4A6FA5"/>
           </a:solidFill>
           <a:ln w="25400">
             <a:solidFill>
@@ -4244,7 +4391,7 @@
               </a:defRPr>
             </a:pPr>
             <a:r>
-              <a:t>Deep Blue</a:t>
+              <a:t>Slate Blue</a:t>
             </a:r>
           </a:p>
           <a:p>
@@ -4260,7 +4407,7 @@
               </a:defRPr>
             </a:pPr>
             <a:r>
-              <a:t>#0E2941</a:t>
+              <a:t>#4A6FA5</a:t>
             </a:r>
           </a:p>
           <a:p>
@@ -4296,7 +4443,7 @@
             <a:avLst/>
           </a:prstGeom>
           <a:solidFill>
-            <a:srgbClr val="F4A460"/>
+            <a:srgbClr val="A284B5"/>
           </a:solidFill>
           <a:ln w="25400">
             <a:solidFill>
@@ -4360,7 +4507,7 @@
               </a:defRPr>
             </a:pPr>
             <a:r>
-              <a:t>Peach</a:t>
+              <a:t>Lavender</a:t>
             </a:r>
           </a:p>
           <a:p>
@@ -4376,7 +4523,7 @@
               </a:defRPr>
             </a:pPr>
             <a:r>
-              <a:t>#F4A460</a:t>
+              <a:t>#A284B5</a:t>
             </a:r>
           </a:p>
           <a:p>
@@ -4412,7 +4559,7 @@
             <a:avLst/>
           </a:prstGeom>
           <a:solidFill>
-            <a:srgbClr val="C0C0C0"/>
+            <a:srgbClr val="D65858"/>
           </a:solidFill>
           <a:ln w="25400">
             <a:solidFill>
@@ -4476,7 +4623,7 @@
               </a:defRPr>
             </a:pPr>
             <a:r>
-              <a:t>Silver</a:t>
+              <a:t>Dark Coral</a:t>
             </a:r>
           </a:p>
           <a:p>
@@ -4492,7 +4639,7 @@
               </a:defRPr>
             </a:pPr>
             <a:r>
-              <a:t>#C0C0C0</a:t>
+              <a:t>#D65858</a:t>
             </a:r>
           </a:p>
           <a:p>
@@ -4529,7 +4676,7 @@
           </a:prstGeom>
           <a:ln w="25400">
             <a:solidFill>
-              <a:srgbClr val="2E86AB"/>
+              <a:srgbClr val="FF4D4D"/>
             </a:solidFill>
           </a:ln>
         </p:spPr>
@@ -4573,7 +4720,7 @@
             <a:pPr algn="l">
               <a:defRPr sz="2800" b="1">
                 <a:solidFill>
-                  <a:srgbClr val="2E86AB"/>
+                  <a:srgbClr val="FF4D4D"/>
                 </a:solidFill>
                 <a:latin typeface="Inter"/>
               </a:defRPr>
@@ -4766,7 +4913,7 @@
               </a:defRPr>
             </a:pPr>
             <a:r>
-              <a:t>Colors: Primary Blue, Accent Teal, Deep Navy</a:t>
+              <a:t>Colors: Innovation Red, Tech Blue, Digital Green, Simplicity Gray</a:t>
             </a:r>
           </a:p>
           <a:p>
@@ -4880,7 +5027,7 @@
           </a:prstGeom>
           <a:ln w="25400">
             <a:solidFill>
-              <a:srgbClr val="2E86AB"/>
+              <a:srgbClr val="FF4D4D"/>
             </a:solidFill>
           </a:ln>
         </p:spPr>
@@ -4924,7 +5071,7 @@
             <a:pPr algn="l">
               <a:defRPr sz="2800" b="1">
                 <a:solidFill>
-                  <a:srgbClr val="2E86AB"/>
+                  <a:srgbClr val="FF4D4D"/>
                 </a:solidFill>
                 <a:latin typeface="Inter"/>
               </a:defRPr>
@@ -5117,7 +5264,7 @@
               </a:defRPr>
             </a:pPr>
             <a:r>
-              <a:t>Colors: Light Gray, Mint Green, Deep Blue, Peach, Silver</a:t>
+              <a:t>Colors: Light Gray, Mint Green, Slate Blue, Lavender, Dark Coral</a:t>
             </a:r>
           </a:p>
           <a:p>
@@ -5231,7 +5378,7 @@
           </a:prstGeom>
           <a:ln w="25400">
             <a:solidFill>
-              <a:srgbClr val="2E86AB"/>
+              <a:srgbClr val="FF4D4D"/>
             </a:solidFill>
           </a:ln>
         </p:spPr>
@@ -5275,7 +5422,7 @@
             <a:pPr algn="l">
               <a:defRPr sz="2800" b="1">
                 <a:solidFill>
-                  <a:srgbClr val="2E86AB"/>
+                  <a:srgbClr val="FF4D4D"/>
                 </a:solidFill>
                 <a:latin typeface="Inter"/>
               </a:defRPr>
@@ -5489,7 +5636,7 @@
           </a:prstGeom>
           <a:ln w="25400">
             <a:solidFill>
-              <a:srgbClr val="2E86AB"/>
+              <a:srgbClr val="FF4D4D"/>
             </a:solidFill>
           </a:ln>
         </p:spPr>
@@ -5533,601 +5680,13 @@
             <a:pPr algn="l">
               <a:defRPr sz="2800" b="1">
                 <a:solidFill>
-                  <a:srgbClr val="2E86AB"/>
+                  <a:srgbClr val="FF4D4D"/>
                 </a:solidFill>
                 <a:latin typeface="Inter"/>
               </a:defRPr>
             </a:pPr>
             <a:r>
               <a:t>TYPOGRAPHY</a:t>
-            </a:r>
-          </a:p>
-        </p:txBody>
-      </p:sp>
-    </p:spTree>
-  </p:cSld>
-  <p:clrMapOvr>
-    <a:masterClrMapping/>
-  </p:clrMapOvr>
-</p:sld>
-</file>
-
-<file path=ppt/slides/slide16.xml><?xml version="1.0" encoding="utf-8"?>
-<p:sld xmlns:a="http://schemas.openxmlformats.org/drawingml/2006/main" xmlns:p="http://schemas.openxmlformats.org/presentationml/2006/main" xmlns:r="http://schemas.openxmlformats.org/officeDocument/2006/relationships">
-  <p:cSld>
-    <p:spTree>
-      <p:nvGrpSpPr>
-        <p:cNvPr id="1" name=""/>
-        <p:cNvGrpSpPr/>
-        <p:nvPr/>
-      </p:nvGrpSpPr>
-      <p:sp>
-        <p:nvSpPr>
-          <p:cNvPr id="2" name="Rectangle 1"/>
-          <p:cNvSpPr/>
-          <p:nvPr/>
-        </p:nvSpPr>
-        <p:spPr>
-          <a:xfrm>
-            <a:off x="0" y="0"/>
-            <a:ext cx="9144000" cy="6858000"/>
-          </a:xfrm>
-          <a:prstGeom prst="rect">
-            <a:avLst/>
-          </a:prstGeom>
-          <a:solidFill>
-            <a:srgbClr val="1A1A1A"/>
-          </a:solidFill>
-          <a:ln>
-            <a:noFill/>
-          </a:ln>
-        </p:spPr>
-        <p:style>
-          <a:lnRef idx="1">
-            <a:schemeClr val="accent1"/>
-          </a:lnRef>
-          <a:fillRef idx="3">
-            <a:schemeClr val="accent1"/>
-          </a:fillRef>
-          <a:effectRef idx="2">
-            <a:schemeClr val="accent1"/>
-          </a:effectRef>
-          <a:fontRef idx="minor">
-            <a:schemeClr val="lt1"/>
-          </a:fontRef>
-        </p:style>
-        <p:txBody>
-          <a:bodyPr rtlCol="0" anchor="ctr"/>
-          <a:lstStyle/>
-          <a:p>
-            <a:pPr algn="ctr"/>
-          </a:p>
-        </p:txBody>
-      </p:sp>
-      <p:grpSpPr/>
-      <p:sp>
-        <p:nvSpPr>
-          <p:cNvPr id="3" name="TextBox 2"/>
-          <p:cNvSpPr txBox="1"/>
-          <p:nvPr/>
-        </p:nvSpPr>
-        <p:spPr>
-          <a:xfrm>
-            <a:off x="1143000" y="457200"/>
-            <a:ext cx="6858000" cy="742950"/>
-          </a:xfrm>
-          <a:prstGeom prst="rect">
-            <a:avLst/>
-          </a:prstGeom>
-          <a:noFill/>
-        </p:spPr>
-        <p:txBody>
-          <a:bodyPr wrap="none">
-            <a:spAutoFit/>
-          </a:bodyPr>
-          <a:lstStyle/>
-          <a:p>
-            <a:pPr>
-              <a:defRPr sz="3200" b="1">
-                <a:solidFill>
-                  <a:srgbClr val="FFFFFF"/>
-                </a:solidFill>
-                <a:latin typeface="Inter"/>
-              </a:defRPr>
-            </a:pPr>
-            <a:r>
-              <a:t>Visual &amp; Photography Guidelines</a:t>
-            </a:r>
-          </a:p>
-        </p:txBody>
-      </p:sp>
-      <p:sp>
-        <p:nvSpPr>
-          <p:cNvPr id="4" name="TextBox 3"/>
-          <p:cNvSpPr txBox="1"/>
-          <p:nvPr/>
-        </p:nvSpPr>
-        <p:spPr>
-          <a:xfrm>
-            <a:off x="1143000" y="1943100"/>
-            <a:ext cx="3429000" cy="2971800"/>
-          </a:xfrm>
-          <a:prstGeom prst="rect">
-            <a:avLst/>
-          </a:prstGeom>
-          <a:noFill/>
-        </p:spPr>
-        <p:txBody>
-          <a:bodyPr wrap="square">
-            <a:spAutoFit/>
-          </a:bodyPr>
-          <a:lstStyle/>
-          <a:p>
-            <a:pPr>
-              <a:defRPr sz="1800" b="0">
-                <a:solidFill>
-                  <a:srgbClr val="FFFFFF"/>
-                </a:solidFill>
-                <a:latin typeface="Source Sans Pro"/>
-              </a:defRPr>
-            </a:pPr>
-            <a:r>
-              <a:t>Visual Style Guidelines:</a:t>
-            </a:r>
-          </a:p>
-          <a:p>
-            <a:pPr>
-              <a:defRPr sz="1400" b="0">
-                <a:solidFill>
-                  <a:srgbClr val="FFFFFF"/>
-                </a:solidFill>
-                <a:latin typeface="Source Sans Pro"/>
-              </a:defRPr>
-            </a:pPr>
-            <a:r>
-              <a:t>• Modern</a:t>
-            </a:r>
-          </a:p>
-          <a:p>
-            <a:pPr>
-              <a:defRPr sz="1400" b="0">
-                <a:solidFill>
-                  <a:srgbClr val="FFFFFF"/>
-                </a:solidFill>
-                <a:latin typeface="Source Sans Pro"/>
-              </a:defRPr>
-            </a:pPr>
-            <a:r>
-              <a:t>• clean</a:t>
-            </a:r>
-          </a:p>
-          <a:p>
-            <a:pPr>
-              <a:defRPr sz="1400" b="0">
-                <a:solidFill>
-                  <a:srgbClr val="FFFFFF"/>
-                </a:solidFill>
-                <a:latin typeface="Source Sans Pro"/>
-              </a:defRPr>
-            </a:pPr>
-            <a:r>
-              <a:t>• professional</a:t>
-            </a:r>
-          </a:p>
-          <a:p>
-            <a:pPr>
-              <a:defRPr sz="1400" b="0">
-                <a:solidFill>
-                  <a:srgbClr val="FFFFFF"/>
-                </a:solidFill>
-                <a:latin typeface="Source Sans Pro"/>
-              </a:defRPr>
-            </a:pPr>
-            <a:r>
-              <a:t>• minimalist</a:t>
-            </a:r>
-          </a:p>
-          <a:p>
-            <a:pPr>
-              <a:defRPr sz="1400" b="0">
-                <a:solidFill>
-                  <a:srgbClr val="FFFFFF"/>
-                </a:solidFill>
-                <a:latin typeface="Source Sans Pro"/>
-              </a:defRPr>
-            </a:pPr>
-            <a:r>
-              <a:t>• bold typography</a:t>
-            </a:r>
-          </a:p>
-        </p:txBody>
-      </p:sp>
-      <p:sp>
-        <p:nvSpPr>
-          <p:cNvPr id="5" name="TextBox 4"/>
-          <p:cNvSpPr txBox="1"/>
-          <p:nvPr/>
-        </p:nvSpPr>
-        <p:spPr>
-          <a:xfrm>
-            <a:off x="5257800" y="1943100"/>
-            <a:ext cx="3429000" cy="2971800"/>
-          </a:xfrm>
-          <a:prstGeom prst="rect">
-            <a:avLst/>
-          </a:prstGeom>
-          <a:noFill/>
-        </p:spPr>
-        <p:txBody>
-          <a:bodyPr wrap="square">
-            <a:spAutoFit/>
-          </a:bodyPr>
-          <a:lstStyle/>
-          <a:p>
-            <a:pPr>
-              <a:defRPr sz="1800" b="0">
-                <a:solidFill>
-                  <a:srgbClr val="FFFFFF"/>
-                </a:solidFill>
-                <a:latin typeface="Source Sans Pro"/>
-              </a:defRPr>
-            </a:pPr>
-            <a:r>
-              <a:t>Photography Guidelines:</a:t>
-            </a:r>
-          </a:p>
-          <a:p>
-            <a:pPr>
-              <a:defRPr sz="1400" b="0">
-                <a:solidFill>
-                  <a:srgbClr val="FFFFFF"/>
-                </a:solidFill>
-                <a:latin typeface="Source Sans Pro"/>
-              </a:defRPr>
-            </a:pPr>
-            <a:r>
-              <a:t>• High contrast</a:t>
-            </a:r>
-          </a:p>
-          <a:p>
-            <a:pPr>
-              <a:defRPr sz="1400" b="0">
-                <a:solidFill>
-                  <a:srgbClr val="FFFFFF"/>
-                </a:solidFill>
-                <a:latin typeface="Source Sans Pro"/>
-              </a:defRPr>
-            </a:pPr>
-            <a:r>
-              <a:t>• authentic moments</a:t>
-            </a:r>
-          </a:p>
-          <a:p>
-            <a:pPr>
-              <a:defRPr sz="1400" b="0">
-                <a:solidFill>
-                  <a:srgbClr val="FFFFFF"/>
-                </a:solidFill>
-                <a:latin typeface="Source Sans Pro"/>
-              </a:defRPr>
-            </a:pPr>
-            <a:r>
-              <a:t>• natural lighting</a:t>
-            </a:r>
-          </a:p>
-        </p:txBody>
-      </p:sp>
-      <p:sp>
-        <p:nvSpPr>
-          <p:cNvPr id="6" name="Rectangle 5"/>
-          <p:cNvSpPr/>
-          <p:nvPr/>
-        </p:nvSpPr>
-        <p:spPr>
-          <a:xfrm>
-            <a:off x="5257800" y="4914900"/>
-            <a:ext cx="685800" cy="742950"/>
-          </a:xfrm>
-          <a:prstGeom prst="rect">
-            <a:avLst/>
-          </a:prstGeom>
-          <a:solidFill>
-            <a:srgbClr val="404040"/>
-          </a:solidFill>
-          <a:ln w="12700">
-            <a:solidFill>
-              <a:srgbClr val="808080"/>
-            </a:solidFill>
-          </a:ln>
-        </p:spPr>
-        <p:style>
-          <a:lnRef idx="1">
-            <a:schemeClr val="accent1"/>
-          </a:lnRef>
-          <a:fillRef idx="3">
-            <a:schemeClr val="accent1"/>
-          </a:fillRef>
-          <a:effectRef idx="2">
-            <a:schemeClr val="accent1"/>
-          </a:effectRef>
-          <a:fontRef idx="minor">
-            <a:schemeClr val="lt1"/>
-          </a:fontRef>
-        </p:style>
-        <p:txBody>
-          <a:bodyPr rtlCol="0" anchor="ctr"/>
-          <a:lstStyle/>
-          <a:p>
-            <a:pPr algn="ctr"/>
-          </a:p>
-        </p:txBody>
-      </p:sp>
-      <p:sp>
-        <p:nvSpPr>
-          <p:cNvPr id="7" name="TextBox 6"/>
-          <p:cNvSpPr txBox="1"/>
-          <p:nvPr/>
-        </p:nvSpPr>
-        <p:spPr>
-          <a:xfrm>
-            <a:off x="5257800" y="5162550"/>
-            <a:ext cx="685800" cy="247650"/>
-          </a:xfrm>
-          <a:prstGeom prst="rect">
-            <a:avLst/>
-          </a:prstGeom>
-          <a:noFill/>
-        </p:spPr>
-        <p:txBody>
-          <a:bodyPr wrap="none">
-            <a:spAutoFit/>
-          </a:bodyPr>
-          <a:lstStyle/>
-          <a:p>
-            <a:pPr algn="ctr">
-              <a:defRPr sz="800" b="0">
-                <a:solidFill>
-                  <a:srgbClr val="FFFFFF"/>
-                </a:solidFill>
-                <a:latin typeface="Source Sans Pro"/>
-              </a:defRPr>
-            </a:pPr>
-            <a:r>
-              <a:t>Example</a:t>
-            </a:r>
-          </a:p>
-        </p:txBody>
-      </p:sp>
-      <p:sp>
-        <p:nvSpPr>
-          <p:cNvPr id="8" name="Rectangle 7"/>
-          <p:cNvSpPr/>
-          <p:nvPr/>
-        </p:nvSpPr>
-        <p:spPr>
-          <a:xfrm>
-            <a:off x="6629400" y="4914900"/>
-            <a:ext cx="685800" cy="742950"/>
-          </a:xfrm>
-          <a:prstGeom prst="rect">
-            <a:avLst/>
-          </a:prstGeom>
-          <a:solidFill>
-            <a:srgbClr val="404040"/>
-          </a:solidFill>
-          <a:ln w="12700">
-            <a:solidFill>
-              <a:srgbClr val="808080"/>
-            </a:solidFill>
-          </a:ln>
-        </p:spPr>
-        <p:style>
-          <a:lnRef idx="1">
-            <a:schemeClr val="accent1"/>
-          </a:lnRef>
-          <a:fillRef idx="3">
-            <a:schemeClr val="accent1"/>
-          </a:fillRef>
-          <a:effectRef idx="2">
-            <a:schemeClr val="accent1"/>
-          </a:effectRef>
-          <a:fontRef idx="minor">
-            <a:schemeClr val="lt1"/>
-          </a:fontRef>
-        </p:style>
-        <p:txBody>
-          <a:bodyPr rtlCol="0" anchor="ctr"/>
-          <a:lstStyle/>
-          <a:p>
-            <a:pPr algn="ctr"/>
-          </a:p>
-        </p:txBody>
-      </p:sp>
-      <p:sp>
-        <p:nvSpPr>
-          <p:cNvPr id="9" name="TextBox 8"/>
-          <p:cNvSpPr txBox="1"/>
-          <p:nvPr/>
-        </p:nvSpPr>
-        <p:spPr>
-          <a:xfrm>
-            <a:off x="6629400" y="5162550"/>
-            <a:ext cx="685800" cy="247650"/>
-          </a:xfrm>
-          <a:prstGeom prst="rect">
-            <a:avLst/>
-          </a:prstGeom>
-          <a:noFill/>
-        </p:spPr>
-        <p:txBody>
-          <a:bodyPr wrap="none">
-            <a:spAutoFit/>
-          </a:bodyPr>
-          <a:lstStyle/>
-          <a:p>
-            <a:pPr algn="ctr">
-              <a:defRPr sz="800" b="0">
-                <a:solidFill>
-                  <a:srgbClr val="FFFFFF"/>
-                </a:solidFill>
-                <a:latin typeface="Source Sans Pro"/>
-              </a:defRPr>
-            </a:pPr>
-            <a:r>
-              <a:t>Example</a:t>
-            </a:r>
-          </a:p>
-        </p:txBody>
-      </p:sp>
-      <p:sp>
-        <p:nvSpPr>
-          <p:cNvPr id="10" name="Rectangle 9"/>
-          <p:cNvSpPr/>
-          <p:nvPr/>
-        </p:nvSpPr>
-        <p:spPr>
-          <a:xfrm>
-            <a:off x="8001000" y="4914900"/>
-            <a:ext cx="685800" cy="742950"/>
-          </a:xfrm>
-          <a:prstGeom prst="rect">
-            <a:avLst/>
-          </a:prstGeom>
-          <a:solidFill>
-            <a:srgbClr val="404040"/>
-          </a:solidFill>
-          <a:ln w="12700">
-            <a:solidFill>
-              <a:srgbClr val="808080"/>
-            </a:solidFill>
-          </a:ln>
-        </p:spPr>
-        <p:style>
-          <a:lnRef idx="1">
-            <a:schemeClr val="accent1"/>
-          </a:lnRef>
-          <a:fillRef idx="3">
-            <a:schemeClr val="accent1"/>
-          </a:fillRef>
-          <a:effectRef idx="2">
-            <a:schemeClr val="accent1"/>
-          </a:effectRef>
-          <a:fontRef idx="minor">
-            <a:schemeClr val="lt1"/>
-          </a:fontRef>
-        </p:style>
-        <p:txBody>
-          <a:bodyPr rtlCol="0" anchor="ctr"/>
-          <a:lstStyle/>
-          <a:p>
-            <a:pPr algn="ctr"/>
-          </a:p>
-        </p:txBody>
-      </p:sp>
-      <p:sp>
-        <p:nvSpPr>
-          <p:cNvPr id="11" name="TextBox 10"/>
-          <p:cNvSpPr txBox="1"/>
-          <p:nvPr/>
-        </p:nvSpPr>
-        <p:spPr>
-          <a:xfrm>
-            <a:off x="8001000" y="5162550"/>
-            <a:ext cx="685800" cy="247650"/>
-          </a:xfrm>
-          <a:prstGeom prst="rect">
-            <a:avLst/>
-          </a:prstGeom>
-          <a:noFill/>
-        </p:spPr>
-        <p:txBody>
-          <a:bodyPr wrap="none">
-            <a:spAutoFit/>
-          </a:bodyPr>
-          <a:lstStyle/>
-          <a:p>
-            <a:pPr algn="ctr">
-              <a:defRPr sz="800" b="0">
-                <a:solidFill>
-                  <a:srgbClr val="FFFFFF"/>
-                </a:solidFill>
-                <a:latin typeface="Source Sans Pro"/>
-              </a:defRPr>
-            </a:pPr>
-            <a:r>
-              <a:t>Example</a:t>
-            </a:r>
-          </a:p>
-        </p:txBody>
-      </p:sp>
-      <p:sp>
-        <p:nvSpPr>
-          <p:cNvPr id="12" name="TextBox 11"/>
-          <p:cNvSpPr txBox="1"/>
-          <p:nvPr/>
-        </p:nvSpPr>
-        <p:spPr>
-          <a:xfrm>
-            <a:off x="457200" y="5657850"/>
-            <a:ext cx="4114800" cy="742950"/>
-          </a:xfrm>
-          <a:prstGeom prst="rect">
-            <a:avLst/>
-          </a:prstGeom>
-          <a:noFill/>
-        </p:spPr>
-        <p:txBody>
-          <a:bodyPr wrap="none">
-            <a:spAutoFit/>
-          </a:bodyPr>
-          <a:lstStyle/>
-          <a:p>
-            <a:pPr algn="l">
-              <a:defRPr sz="1000" b="0">
-                <a:solidFill>
-                  <a:srgbClr val="FFFFFF"/>
-                </a:solidFill>
-                <a:latin typeface="Source Sans Pro"/>
-              </a:defRPr>
-            </a:pPr>
-            <a:r>
-              <a:t>TechForward Live</a:t>
-            </a:r>
-          </a:p>
-        </p:txBody>
-      </p:sp>
-      <p:sp>
-        <p:nvSpPr>
-          <p:cNvPr id="13" name="TextBox 12"/>
-          <p:cNvSpPr txBox="1"/>
-          <p:nvPr/>
-        </p:nvSpPr>
-        <p:spPr>
-          <a:xfrm>
-            <a:off x="4572000" y="5657850"/>
-            <a:ext cx="4114800" cy="742950"/>
-          </a:xfrm>
-          <a:prstGeom prst="rect">
-            <a:avLst/>
-          </a:prstGeom>
-          <a:noFill/>
-        </p:spPr>
-        <p:txBody>
-          <a:bodyPr wrap="none">
-            <a:spAutoFit/>
-          </a:bodyPr>
-          <a:lstStyle/>
-          <a:p>
-            <a:pPr algn="r">
-              <a:defRPr sz="1000" b="0">
-                <a:solidFill>
-                  <a:srgbClr val="FFFFFF"/>
-                </a:solidFill>
-                <a:latin typeface="Source Sans Pro"/>
-              </a:defRPr>
-            </a:pPr>
-            <a:r>
-              <a:t>16</a:t>
             </a:r>
           </a:p>
         </p:txBody>
@@ -6183,7 +5742,7 @@
             <a:pPr>
               <a:defRPr sz="2800" b="1">
                 <a:solidFill>
-                  <a:srgbClr val="2E86AB"/>
+                  <a:srgbClr val="FF4D4D"/>
                 </a:solidFill>
                 <a:latin typeface="Inter"/>
               </a:defRPr>
@@ -6210,7 +5769,7 @@
           </a:prstGeom>
           <a:ln w="25400">
             <a:solidFill>
-              <a:srgbClr val="2E86AB"/>
+              <a:srgbClr val="FF4D4D"/>
             </a:solidFill>
           </a:ln>
         </p:spPr>
@@ -6281,7 +5840,7 @@
           </a:prstGeom>
           <a:ln w="19050">
             <a:solidFill>
-              <a:srgbClr val="2E86AB"/>
+              <a:srgbClr val="FF4D4D"/>
             </a:solidFill>
           </a:ln>
         </p:spPr>
@@ -6325,7 +5884,7 @@
             <a:pPr>
               <a:defRPr sz="1200" b="1">
                 <a:solidFill>
-                  <a:srgbClr val="2E86AB"/>
+                  <a:srgbClr val="FF4D4D"/>
                 </a:solidFill>
                 <a:latin typeface="Source Sans Pro"/>
               </a:defRPr>
@@ -6388,7 +5947,7 @@
           </a:prstGeom>
           <a:ln w="19050">
             <a:solidFill>
-              <a:srgbClr val="2E86AB"/>
+              <a:srgbClr val="FF4D4D"/>
             </a:solidFill>
           </a:ln>
         </p:spPr>
@@ -6432,7 +5991,7 @@
             <a:pPr>
               <a:defRPr sz="1200" b="1">
                 <a:solidFill>
-                  <a:srgbClr val="2E86AB"/>
+                  <a:srgbClr val="FF4D4D"/>
                 </a:solidFill>
                 <a:latin typeface="Source Sans Pro"/>
               </a:defRPr>
@@ -6495,7 +6054,7 @@
           </a:prstGeom>
           <a:ln w="19050">
             <a:solidFill>
-              <a:srgbClr val="2E86AB"/>
+              <a:srgbClr val="FF4D4D"/>
             </a:solidFill>
           </a:ln>
         </p:spPr>
@@ -6539,7 +6098,7 @@
             <a:pPr>
               <a:defRPr sz="1200" b="1">
                 <a:solidFill>
-                  <a:srgbClr val="2E86AB"/>
+                  <a:srgbClr val="FF4D4D"/>
                 </a:solidFill>
                 <a:latin typeface="Source Sans Pro"/>
               </a:defRPr>
@@ -6602,7 +6161,7 @@
           </a:prstGeom>
           <a:ln w="19050">
             <a:solidFill>
-              <a:srgbClr val="2E86AB"/>
+              <a:srgbClr val="FF4D4D"/>
             </a:solidFill>
           </a:ln>
         </p:spPr>
@@ -6646,7 +6205,7 @@
             <a:pPr>
               <a:defRPr sz="1200" b="1">
                 <a:solidFill>
-                  <a:srgbClr val="2E86AB"/>
+                  <a:srgbClr val="FF4D4D"/>
                 </a:solidFill>
                 <a:latin typeface="Source Sans Pro"/>
               </a:defRPr>
@@ -6709,7 +6268,7 @@
           </a:prstGeom>
           <a:ln w="19050">
             <a:solidFill>
-              <a:srgbClr val="2E86AB"/>
+              <a:srgbClr val="FF4D4D"/>
             </a:solidFill>
           </a:ln>
         </p:spPr>
@@ -6753,7 +6312,7 @@
             <a:pPr>
               <a:defRPr sz="1200" b="1">
                 <a:solidFill>
-                  <a:srgbClr val="2E86AB"/>
+                  <a:srgbClr val="FF4D4D"/>
                 </a:solidFill>
                 <a:latin typeface="Source Sans Pro"/>
               </a:defRPr>
@@ -6816,7 +6375,7 @@
           </a:prstGeom>
           <a:ln w="19050">
             <a:solidFill>
-              <a:srgbClr val="2E86AB"/>
+              <a:srgbClr val="FF4D4D"/>
             </a:solidFill>
           </a:ln>
         </p:spPr>
@@ -6860,7 +6419,7 @@
             <a:pPr>
               <a:defRPr sz="1200" b="1">
                 <a:solidFill>
-                  <a:srgbClr val="2E86AB"/>
+                  <a:srgbClr val="FF4D4D"/>
                 </a:solidFill>
                 <a:latin typeface="Source Sans Pro"/>
               </a:defRPr>
@@ -7031,7 +6590,7 @@
           </a:prstGeom>
           <a:ln w="19050">
             <a:solidFill>
-              <a:srgbClr val="2E86AB"/>
+              <a:srgbClr val="FF4D4D"/>
             </a:solidFill>
           </a:ln>
         </p:spPr>
@@ -7075,7 +6634,7 @@
             <a:pPr>
               <a:defRPr sz="1200" b="1">
                 <a:solidFill>
-                  <a:srgbClr val="2E86AB"/>
+                  <a:srgbClr val="FF4D4D"/>
                 </a:solidFill>
                 <a:latin typeface="Source Sans Pro"/>
               </a:defRPr>
@@ -7282,7 +6841,7 @@
           </a:prstGeom>
           <a:ln w="19050">
             <a:solidFill>
-              <a:srgbClr val="2E86AB"/>
+              <a:srgbClr val="FF4D4D"/>
             </a:solidFill>
           </a:ln>
         </p:spPr>
@@ -7326,7 +6885,7 @@
             <a:pPr>
               <a:defRPr sz="1200" b="1">
                 <a:solidFill>
-                  <a:srgbClr val="2E86AB"/>
+                  <a:srgbClr val="FF4D4D"/>
                 </a:solidFill>
                 <a:latin typeface="Source Sans Pro"/>
               </a:defRPr>
@@ -7441,221 +7000,6 @@
             </a:pPr>
             <a:r>
               <a:t>Text Hierarchy</a:t>
-            </a:r>
-          </a:p>
-        </p:txBody>
-      </p:sp>
-      <p:sp>
-        <p:nvSpPr>
-          <p:cNvPr id="38" name="TextBox 37"/>
-          <p:cNvSpPr txBox="1"/>
-          <p:nvPr/>
-        </p:nvSpPr>
-        <p:spPr>
-          <a:xfrm>
-            <a:off x="6492240" y="4160520"/>
-            <a:ext cx="1828800" cy="274320"/>
-          </a:xfrm>
-          <a:prstGeom prst="rect">
-            <a:avLst/>
-          </a:prstGeom>
-          <a:noFill/>
-        </p:spPr>
-        <p:txBody>
-          <a:bodyPr wrap="none" lIns="0" rIns="0" tIns="0" bIns="0">
-            <a:spAutoFit/>
-          </a:bodyPr>
-          <a:lstStyle/>
-          <a:p>
-            <a:pPr>
-              <a:defRPr sz="1200" b="1">
-                <a:solidFill>
-                  <a:srgbClr val="FFFFFF"/>
-                </a:solidFill>
-                <a:latin typeface="Source Sans Pro"/>
-              </a:defRPr>
-            </a:pPr>
-            <a:r>
-              <a:t>Visual Guidelines</a:t>
-            </a:r>
-          </a:p>
-        </p:txBody>
-      </p:sp>
-      <p:cxnSp>
-        <p:nvCxnSpPr>
-          <p:cNvPr id="39" name="Connector 38"/>
-          <p:cNvCxnSpPr/>
-          <p:nvPr/>
-        </p:nvCxnSpPr>
-        <p:spPr>
-          <a:xfrm>
-            <a:off x="8366759" y="4270248"/>
-            <a:ext cx="365760" cy="0"/>
-          </a:xfrm>
-          <a:prstGeom prst="line">
-            <a:avLst/>
-          </a:prstGeom>
-          <a:ln w="19050">
-            <a:solidFill>
-              <a:srgbClr val="2E86AB"/>
-            </a:solidFill>
-          </a:ln>
-        </p:spPr>
-        <p:style>
-          <a:lnRef idx="2">
-            <a:schemeClr val="accent1"/>
-          </a:lnRef>
-          <a:fillRef idx="0">
-            <a:schemeClr val="accent1"/>
-          </a:fillRef>
-          <a:effectRef idx="1">
-            <a:schemeClr val="accent1"/>
-          </a:effectRef>
-          <a:fontRef idx="minor">
-            <a:schemeClr val="tx1"/>
-          </a:fontRef>
-        </p:style>
-      </p:cxnSp>
-      <p:sp>
-        <p:nvSpPr>
-          <p:cNvPr id="40" name="TextBox 39"/>
-          <p:cNvSpPr txBox="1"/>
-          <p:nvPr/>
-        </p:nvSpPr>
-        <p:spPr>
-          <a:xfrm>
-            <a:off x="8778240" y="4160520"/>
-            <a:ext cx="274320" cy="274320"/>
-          </a:xfrm>
-          <a:prstGeom prst="rect">
-            <a:avLst/>
-          </a:prstGeom>
-          <a:noFill/>
-        </p:spPr>
-        <p:txBody>
-          <a:bodyPr wrap="none" lIns="0" tIns="0" bIns="0">
-            <a:spAutoFit/>
-          </a:bodyPr>
-          <a:lstStyle/>
-          <a:p>
-            <a:pPr>
-              <a:defRPr sz="1200" b="1">
-                <a:solidFill>
-                  <a:srgbClr val="2E86AB"/>
-                </a:solidFill>
-                <a:latin typeface="Source Sans Pro"/>
-              </a:defRPr>
-            </a:pPr>
-            <a:r>
-              <a:t>09</a:t>
-            </a:r>
-          </a:p>
-        </p:txBody>
-      </p:sp>
-      <p:sp>
-        <p:nvSpPr>
-          <p:cNvPr id="41" name="TextBox 40"/>
-          <p:cNvSpPr txBox="1"/>
-          <p:nvPr/>
-        </p:nvSpPr>
-        <p:spPr>
-          <a:xfrm>
-            <a:off x="6675120" y="4526280"/>
-            <a:ext cx="1828800" cy="228600"/>
-          </a:xfrm>
-          <a:prstGeom prst="rect">
-            <a:avLst/>
-          </a:prstGeom>
-          <a:noFill/>
-        </p:spPr>
-        <p:txBody>
-          <a:bodyPr wrap="none" lIns="0" tIns="0" bIns="0">
-            <a:spAutoFit/>
-          </a:bodyPr>
-          <a:lstStyle/>
-          <a:p>
-            <a:pPr>
-              <a:defRPr sz="900" b="0">
-                <a:solidFill>
-                  <a:srgbClr val="CCCCCC"/>
-                </a:solidFill>
-                <a:latin typeface="Source Sans Pro"/>
-              </a:defRPr>
-            </a:pPr>
-            <a:r>
-              <a:t>Visual Style</a:t>
-            </a:r>
-          </a:p>
-        </p:txBody>
-      </p:sp>
-      <p:sp>
-        <p:nvSpPr>
-          <p:cNvPr id="42" name="TextBox 41"/>
-          <p:cNvSpPr txBox="1"/>
-          <p:nvPr/>
-        </p:nvSpPr>
-        <p:spPr>
-          <a:xfrm>
-            <a:off x="6675120" y="4754880"/>
-            <a:ext cx="1828800" cy="228600"/>
-          </a:xfrm>
-          <a:prstGeom prst="rect">
-            <a:avLst/>
-          </a:prstGeom>
-          <a:noFill/>
-        </p:spPr>
-        <p:txBody>
-          <a:bodyPr wrap="none" lIns="0" tIns="0" bIns="0">
-            <a:spAutoFit/>
-          </a:bodyPr>
-          <a:lstStyle/>
-          <a:p>
-            <a:pPr>
-              <a:defRPr sz="900" b="0">
-                <a:solidFill>
-                  <a:srgbClr val="CCCCCC"/>
-                </a:solidFill>
-                <a:latin typeface="Source Sans Pro"/>
-              </a:defRPr>
-            </a:pPr>
-            <a:r>
-              <a:t>Photography</a:t>
-            </a:r>
-          </a:p>
-        </p:txBody>
-      </p:sp>
-      <p:sp>
-        <p:nvSpPr>
-          <p:cNvPr id="43" name="TextBox 42"/>
-          <p:cNvSpPr txBox="1"/>
-          <p:nvPr/>
-        </p:nvSpPr>
-        <p:spPr>
-          <a:xfrm>
-            <a:off x="6675120" y="4983480"/>
-            <a:ext cx="1828800" cy="228600"/>
-          </a:xfrm>
-          <a:prstGeom prst="rect">
-            <a:avLst/>
-          </a:prstGeom>
-          <a:noFill/>
-        </p:spPr>
-        <p:txBody>
-          <a:bodyPr wrap="none" lIns="0" tIns="0" bIns="0">
-            <a:spAutoFit/>
-          </a:bodyPr>
-          <a:lstStyle/>
-          <a:p>
-            <a:pPr>
-              <a:defRPr sz="900" b="0">
-                <a:solidFill>
-                  <a:srgbClr val="CCCCCC"/>
-                </a:solidFill>
-                <a:latin typeface="Source Sans Pro"/>
-              </a:defRPr>
-            </a:pPr>
-            <a:r>
-              <a:t>Imagery</a:t>
             </a:r>
           </a:p>
         </p:txBody>
@@ -7720,7 +7064,7 @@
               </a:defRPr>
             </a:pPr>
             <a:r>
-              <a:t>Welcome to the unveiling of TechForward Live's comprehensive brand identity system. Designed to ensure a globally engaging, consistent, and recognizable brand presentation, this system embodies our unique approach of bridging complex technology with intuitive user experiences. Rooted in our fundamental principles of innovation, simplicity, and human-centered design, it is poised to elevate TechForward Live in the dynamic landscape of Technology &amp; Digital Solutions.</a:t>
+              <a:t>Welcome to the unveiling of TechForward Live's brand identity system. Designed to ensure an international, engaging, and consistent brand presentation, this system embodies our commitment to innovation, simplicity, and human-centered values. Embodying our unique approach and fundamental principles, it sets the stage for a progressive and trustworthy brand experience in the dynamic landscape of Technology &amp; Digital Solutions.</a:t>
             </a:r>
           </a:p>
         </p:txBody>
@@ -7741,7 +7085,7 @@
           </a:prstGeom>
           <a:ln w="25400">
             <a:solidFill>
-              <a:srgbClr val="2E86AB"/>
+              <a:srgbClr val="FF4D4D"/>
             </a:solidFill>
           </a:ln>
         </p:spPr>
@@ -7785,7 +7129,7 @@
             <a:pPr algn="l">
               <a:defRPr sz="2800" b="1">
                 <a:solidFill>
-                  <a:srgbClr val="2E86AB"/>
+                  <a:srgbClr val="FF4D4D"/>
                 </a:solidFill>
                 <a:latin typeface="Inter"/>
               </a:defRPr>
@@ -7856,7 +7200,7 @@
               </a:defRPr>
             </a:pPr>
             <a:r>
-              <a:t>At TechForward Live, we envision a future where digital transformation empowers businesses to unlock their full potential through innovative and human-centered technology solutions. Our ultimate goal is to revolutionize the digital landscape by simplifying complexity and driving progress for forward-thinking organizations seeking innovation.</a:t>
+              <a:t>At TechForward Live, we envision a future where technology seamlessly enhances human potential, empowering progressive businesses to achieve unparalleled digital transformation and innovation. Our ultimate goal is to revolutionize the tech industry by delivering solutions that inspire, simplify, and drive impactful change.</a:t>
             </a:r>
           </a:p>
         </p:txBody>
@@ -7877,7 +7221,7 @@
           </a:prstGeom>
           <a:ln w="25400">
             <a:solidFill>
-              <a:srgbClr val="2E86AB"/>
+              <a:srgbClr val="FF4D4D"/>
             </a:solidFill>
           </a:ln>
         </p:spPr>
@@ -7921,7 +7265,7 @@
             <a:pPr algn="l">
               <a:defRPr sz="2800" b="1">
                 <a:solidFill>
-                  <a:srgbClr val="2E86AB"/>
+                  <a:srgbClr val="FF4D4D"/>
                 </a:solidFill>
                 <a:latin typeface="Inter"/>
               </a:defRPr>
@@ -7992,7 +7336,7 @@
               </a:defRPr>
             </a:pPr>
             <a:r>
-              <a:t>TechForward Live is dedicated to delivering cutting-edge technology and digital solutions that blend simplicity with excellence. We exist to bridge the gap between traditional tech offerings and intuitive user experiences, providing progressive businesses with the tools they need to thrive in the ever-evolving digital world.</a:t>
+              <a:t>Our mission at TechForward Live is to bridge the gap between complex technology and intuitive user experiences through human-centered design. We are dedicated to providing cutting-edge technology solutions that not only meet but exceed the evolving needs of businesses in the digital age, driving growth and success through innovation and reliability.</a:t>
             </a:r>
           </a:p>
         </p:txBody>
@@ -8013,7 +7357,7 @@
           </a:prstGeom>
           <a:ln w="25400">
             <a:solidFill>
-              <a:srgbClr val="2E86AB"/>
+              <a:srgbClr val="FF4D4D"/>
             </a:solidFill>
           </a:ln>
         </p:spPr>
@@ -8057,7 +7401,7 @@
             <a:pPr algn="l">
               <a:defRPr sz="2800" b="1">
                 <a:solidFill>
-                  <a:srgbClr val="2E86AB"/>
+                  <a:srgbClr val="FF4D4D"/>
                 </a:solidFill>
                 <a:latin typeface="Inter"/>
               </a:defRPr>
@@ -8128,7 +7472,7 @@
               </a:defRPr>
             </a:pPr>
             <a:r>
-              <a:t>Grounded in our core values of innovation, simplicity, and human-centered design, we strive for excellence in all that we do. Our commitment to trust and reliability ensures that our solutions not only meet but exceed the expectations of our clients, fostering lasting partnerships built on mutual growth and success in the dynamic realm of technology and digital innovation.</a:t>
+              <a:t>At the core of TechForward Live, we embrace a culture defined by innovation, simplicity, and human-centered design. We are committed to excellence in all we do, building trust with our clients through reliable solutions that pave the way for transformative digital experiences. Our values guide us in creating technology that not only meets expectations but sets new standards in the industry, ensuring that businesses can thrive in an ever-evolving digital landscape.</a:t>
             </a:r>
           </a:p>
         </p:txBody>
@@ -8149,7 +7493,7 @@
           </a:prstGeom>
           <a:ln w="25400">
             <a:solidFill>
-              <a:srgbClr val="2E86AB"/>
+              <a:srgbClr val="FF4D4D"/>
             </a:solidFill>
           </a:ln>
         </p:spPr>
@@ -8193,7 +7537,7 @@
             <a:pPr algn="l">
               <a:defRPr sz="2800" b="1">
                 <a:solidFill>
-                  <a:srgbClr val="2E86AB"/>
+                  <a:srgbClr val="FF4D4D"/>
                 </a:solidFill>
                 <a:latin typeface="Inter"/>
               </a:defRPr>
@@ -8285,7 +7629,7 @@
           </a:prstGeom>
           <a:ln w="25400">
             <a:solidFill>
-              <a:srgbClr val="2E86AB"/>
+              <a:srgbClr val="FF4D4D"/>
             </a:solidFill>
           </a:ln>
         </p:spPr>
@@ -8329,7 +7673,7 @@
             <a:pPr algn="l">
               <a:defRPr sz="2800" b="1">
                 <a:solidFill>
-                  <a:srgbClr val="2E86AB"/>
+                  <a:srgbClr val="FF4D4D"/>
                 </a:solidFill>
                 <a:latin typeface="Inter"/>
               </a:defRPr>
@@ -8445,7 +7789,7 @@
           </a:prstGeom>
           <a:ln w="25400">
             <a:solidFill>
-              <a:srgbClr val="2E86AB"/>
+              <a:srgbClr val="FF4D4D"/>
             </a:solidFill>
           </a:ln>
         </p:spPr>
@@ -8489,7 +7833,7 @@
             <a:pPr algn="l">
               <a:defRPr sz="2800" b="1">
                 <a:solidFill>
-                  <a:srgbClr val="2E86AB"/>
+                  <a:srgbClr val="FF4D4D"/>
                 </a:solidFill>
                 <a:latin typeface="Inter"/>
               </a:defRPr>
@@ -8605,7 +7949,7 @@
           </a:prstGeom>
           <a:ln w="25400">
             <a:solidFill>
-              <a:srgbClr val="2E86AB"/>
+              <a:srgbClr val="FF4D4D"/>
             </a:solidFill>
           </a:ln>
         </p:spPr>
@@ -8649,7 +7993,7 @@
             <a:pPr algn="l">
               <a:defRPr sz="2800" b="1">
                 <a:solidFill>
-                  <a:srgbClr val="2E86AB"/>
+                  <a:srgbClr val="FF4D4D"/>
                 </a:solidFill>
                 <a:latin typeface="Inter"/>
               </a:defRPr>
